--- a/figs/DIYfigures_ipe1.pptx
+++ b/figs/DIYfigures_ipe1.pptx
@@ -7,6 +7,9 @@
   <p:sldIdLst>
     <p:sldId id="256" r:id="rId2"/>
     <p:sldId id="257" r:id="rId3"/>
+    <p:sldId id="259" r:id="rId4"/>
+    <p:sldId id="260" r:id="rId5"/>
+    <p:sldId id="261" r:id="rId6"/>
   </p:sldIdLst>
   <p:sldSz cx="12192000" cy="6858000"/>
   <p:notesSz cx="6858000" cy="9144000"/>
@@ -3762,7 +3765,7 @@
           <a:p>
             <a:fld id="{29D38AE0-A022-EC4B-ADED-C3987264F154}" type="datetimeFigureOut">
               <a:rPr kumimoji="1" lang="ja-JP" altLang="en-US" smtClean="0"/>
-              <a:t>2026/3/17</a:t>
+              <a:t>2026/4/29</a:t>
             </a:fld>
             <a:endParaRPr kumimoji="1" lang="ja-JP" altLang="en-US"/>
           </a:p>
@@ -3992,7 +3995,7 @@
           <a:p>
             <a:fld id="{29D38AE0-A022-EC4B-ADED-C3987264F154}" type="datetimeFigureOut">
               <a:rPr kumimoji="1" lang="ja-JP" altLang="en-US" smtClean="0"/>
-              <a:t>2026/3/17</a:t>
+              <a:t>2026/4/29</a:t>
             </a:fld>
             <a:endParaRPr kumimoji="1" lang="ja-JP" altLang="en-US"/>
           </a:p>
@@ -4232,7 +4235,7 @@
           <a:p>
             <a:fld id="{29D38AE0-A022-EC4B-ADED-C3987264F154}" type="datetimeFigureOut">
               <a:rPr kumimoji="1" lang="ja-JP" altLang="en-US" smtClean="0"/>
-              <a:t>2026/3/17</a:t>
+              <a:t>2026/4/29</a:t>
             </a:fld>
             <a:endParaRPr kumimoji="1" lang="ja-JP" altLang="en-US"/>
           </a:p>
@@ -4462,7 +4465,7 @@
           <a:p>
             <a:fld id="{29D38AE0-A022-EC4B-ADED-C3987264F154}" type="datetimeFigureOut">
               <a:rPr kumimoji="1" lang="ja-JP" altLang="en-US" smtClean="0"/>
-              <a:t>2026/3/17</a:t>
+              <a:t>2026/4/29</a:t>
             </a:fld>
             <a:endParaRPr kumimoji="1" lang="ja-JP" altLang="en-US"/>
           </a:p>
@@ -4737,7 +4740,7 @@
           <a:p>
             <a:fld id="{29D38AE0-A022-EC4B-ADED-C3987264F154}" type="datetimeFigureOut">
               <a:rPr kumimoji="1" lang="ja-JP" altLang="en-US" smtClean="0"/>
-              <a:t>2026/3/17</a:t>
+              <a:t>2026/4/29</a:t>
             </a:fld>
             <a:endParaRPr kumimoji="1" lang="ja-JP" altLang="en-US"/>
           </a:p>
@@ -5066,7 +5069,7 @@
           <a:p>
             <a:fld id="{29D38AE0-A022-EC4B-ADED-C3987264F154}" type="datetimeFigureOut">
               <a:rPr kumimoji="1" lang="ja-JP" altLang="en-US" smtClean="0"/>
-              <a:t>2026/3/17</a:t>
+              <a:t>2026/4/29</a:t>
             </a:fld>
             <a:endParaRPr kumimoji="1" lang="ja-JP" altLang="en-US"/>
           </a:p>
@@ -5542,7 +5545,7 @@
           <a:p>
             <a:fld id="{29D38AE0-A022-EC4B-ADED-C3987264F154}" type="datetimeFigureOut">
               <a:rPr kumimoji="1" lang="ja-JP" altLang="en-US" smtClean="0"/>
-              <a:t>2026/3/17</a:t>
+              <a:t>2026/4/29</a:t>
             </a:fld>
             <a:endParaRPr kumimoji="1" lang="ja-JP" altLang="en-US"/>
           </a:p>
@@ -5683,7 +5686,7 @@
           <a:p>
             <a:fld id="{29D38AE0-A022-EC4B-ADED-C3987264F154}" type="datetimeFigureOut">
               <a:rPr kumimoji="1" lang="ja-JP" altLang="en-US" smtClean="0"/>
-              <a:t>2026/3/17</a:t>
+              <a:t>2026/4/29</a:t>
             </a:fld>
             <a:endParaRPr kumimoji="1" lang="ja-JP" altLang="en-US"/>
           </a:p>
@@ -5796,7 +5799,7 @@
           <a:p>
             <a:fld id="{29D38AE0-A022-EC4B-ADED-C3987264F154}" type="datetimeFigureOut">
               <a:rPr kumimoji="1" lang="ja-JP" altLang="en-US" smtClean="0"/>
-              <a:t>2026/3/17</a:t>
+              <a:t>2026/4/29</a:t>
             </a:fld>
             <a:endParaRPr kumimoji="1" lang="ja-JP" altLang="en-US"/>
           </a:p>
@@ -6139,7 +6142,7 @@
           <a:p>
             <a:fld id="{29D38AE0-A022-EC4B-ADED-C3987264F154}" type="datetimeFigureOut">
               <a:rPr kumimoji="1" lang="ja-JP" altLang="en-US" smtClean="0"/>
-              <a:t>2026/3/17</a:t>
+              <a:t>2026/4/29</a:t>
             </a:fld>
             <a:endParaRPr kumimoji="1" lang="ja-JP" altLang="en-US"/>
           </a:p>
@@ -6427,7 +6430,7 @@
           <a:p>
             <a:fld id="{29D38AE0-A022-EC4B-ADED-C3987264F154}" type="datetimeFigureOut">
               <a:rPr kumimoji="1" lang="ja-JP" altLang="en-US" smtClean="0"/>
-              <a:t>2026/3/17</a:t>
+              <a:t>2026/4/29</a:t>
             </a:fld>
             <a:endParaRPr kumimoji="1" lang="ja-JP" altLang="en-US"/>
           </a:p>
@@ -6700,7 +6703,7 @@
           <a:p>
             <a:fld id="{29D38AE0-A022-EC4B-ADED-C3987264F154}" type="datetimeFigureOut">
               <a:rPr kumimoji="1" lang="ja-JP" altLang="en-US" smtClean="0"/>
-              <a:t>2026/3/17</a:t>
+              <a:t>2026/4/29</a:t>
             </a:fld>
             <a:endParaRPr kumimoji="1" lang="ja-JP" altLang="en-US"/>
           </a:p>
@@ -9181,6 +9184,3318 @@
 </p:sld>
 </file>
 
+<file path=ppt/slides/slide3.xml><?xml version="1.0" encoding="utf-8"?>
+<p:sld xmlns:a="http://schemas.openxmlformats.org/drawingml/2006/main" xmlns:r="http://schemas.openxmlformats.org/officeDocument/2006/relationships" xmlns:p="http://schemas.openxmlformats.org/presentationml/2006/main">
+  <p:cSld>
+    <p:spTree>
+      <p:nvGrpSpPr>
+        <p:cNvPr id="1" name="">
+          <a:extLst>
+            <a:ext uri="{FF2B5EF4-FFF2-40B4-BE49-F238E27FC236}">
+              <a16:creationId xmlns:a16="http://schemas.microsoft.com/office/drawing/2014/main" id="{2664BF5E-886D-F0F0-F61F-983F3E848794}"/>
+            </a:ext>
+          </a:extLst>
+        </p:cNvPr>
+        <p:cNvGrpSpPr/>
+        <p:nvPr/>
+      </p:nvGrpSpPr>
+      <p:grpSpPr>
+        <a:xfrm>
+          <a:off x="0" y="0"/>
+          <a:ext cx="0" cy="0"/>
+          <a:chOff x="0" y="0"/>
+          <a:chExt cx="0" cy="0"/>
+        </a:xfrm>
+      </p:grpSpPr>
+      <p:grpSp>
+        <p:nvGrpSpPr>
+          <p:cNvPr id="47" name="グループ化 46">
+            <a:extLst>
+              <a:ext uri="{FF2B5EF4-FFF2-40B4-BE49-F238E27FC236}">
+                <a16:creationId xmlns:a16="http://schemas.microsoft.com/office/drawing/2014/main" id="{ED0D3367-FBFD-6FAE-BD82-51F4F4648CF7}"/>
+              </a:ext>
+            </a:extLst>
+          </p:cNvPr>
+          <p:cNvGrpSpPr/>
+          <p:nvPr/>
+        </p:nvGrpSpPr>
+        <p:grpSpPr>
+          <a:xfrm>
+            <a:off x="193535" y="841016"/>
+            <a:ext cx="10892085" cy="5238489"/>
+            <a:chOff x="193535" y="841016"/>
+            <a:chExt cx="10892085" cy="5238489"/>
+          </a:xfrm>
+        </p:grpSpPr>
+        <p:cxnSp>
+          <p:nvCxnSpPr>
+            <p:cNvPr id="3" name="直線矢印コネクタ 2">
+              <a:extLst>
+                <a:ext uri="{FF2B5EF4-FFF2-40B4-BE49-F238E27FC236}">
+                  <a16:creationId xmlns:a16="http://schemas.microsoft.com/office/drawing/2014/main" id="{9E920F8B-DC95-73A8-83A0-06DDC1DEEBDE}"/>
+                </a:ext>
+              </a:extLst>
+            </p:cNvPr>
+            <p:cNvCxnSpPr/>
+            <p:nvPr/>
+          </p:nvCxnSpPr>
+          <p:spPr>
+            <a:xfrm flipV="1">
+              <a:off x="1254398" y="854182"/>
+              <a:ext cx="0" cy="4824248"/>
+            </a:xfrm>
+            <a:prstGeom prst="straightConnector1">
+              <a:avLst/>
+            </a:prstGeom>
+            <a:ln w="22225">
+              <a:tailEnd type="triangle"/>
+            </a:ln>
+          </p:spPr>
+          <p:style>
+            <a:lnRef idx="2">
+              <a:schemeClr val="dk1"/>
+            </a:lnRef>
+            <a:fillRef idx="0">
+              <a:schemeClr val="dk1"/>
+            </a:fillRef>
+            <a:effectRef idx="1">
+              <a:schemeClr val="dk1"/>
+            </a:effectRef>
+            <a:fontRef idx="minor">
+              <a:schemeClr val="tx1"/>
+            </a:fontRef>
+          </p:style>
+        </p:cxnSp>
+        <p:cxnSp>
+          <p:nvCxnSpPr>
+            <p:cNvPr id="4" name="直線矢印コネクタ 3">
+              <a:extLst>
+                <a:ext uri="{FF2B5EF4-FFF2-40B4-BE49-F238E27FC236}">
+                  <a16:creationId xmlns:a16="http://schemas.microsoft.com/office/drawing/2014/main" id="{88CBD905-7F1B-381B-5A7A-A030C8F577AD}"/>
+                </a:ext>
+              </a:extLst>
+            </p:cNvPr>
+            <p:cNvCxnSpPr>
+              <a:cxnSpLocks/>
+            </p:cNvCxnSpPr>
+            <p:nvPr/>
+          </p:nvCxnSpPr>
+          <p:spPr>
+            <a:xfrm>
+              <a:off x="1254398" y="5678430"/>
+              <a:ext cx="4477407" cy="0"/>
+            </a:xfrm>
+            <a:prstGeom prst="straightConnector1">
+              <a:avLst/>
+            </a:prstGeom>
+            <a:ln w="22225">
+              <a:tailEnd type="triangle"/>
+            </a:ln>
+          </p:spPr>
+          <p:style>
+            <a:lnRef idx="2">
+              <a:schemeClr val="dk1"/>
+            </a:lnRef>
+            <a:fillRef idx="0">
+              <a:schemeClr val="dk1"/>
+            </a:fillRef>
+            <a:effectRef idx="1">
+              <a:schemeClr val="dk1"/>
+            </a:effectRef>
+            <a:fontRef idx="minor">
+              <a:schemeClr val="tx1"/>
+            </a:fontRef>
+          </p:style>
+        </p:cxnSp>
+        <p:sp>
+          <p:nvSpPr>
+            <p:cNvPr id="5" name="テキスト ボックス 4">
+              <a:extLst>
+                <a:ext uri="{FF2B5EF4-FFF2-40B4-BE49-F238E27FC236}">
+                  <a16:creationId xmlns:a16="http://schemas.microsoft.com/office/drawing/2014/main" id="{C4FCA4EA-7AD1-5CC5-BA08-26AF5E200DD1}"/>
+                </a:ext>
+              </a:extLst>
+            </p:cNvPr>
+            <p:cNvSpPr txBox="1"/>
+            <p:nvPr/>
+          </p:nvSpPr>
+          <p:spPr>
+            <a:xfrm>
+              <a:off x="4212247" y="5678430"/>
+              <a:ext cx="1647685" cy="338554"/>
+            </a:xfrm>
+            <a:prstGeom prst="rect">
+              <a:avLst/>
+            </a:prstGeom>
+            <a:noFill/>
+          </p:spPr>
+          <p:txBody>
+            <a:bodyPr wrap="square" rtlCol="0">
+              <a:spAutoFit/>
+            </a:bodyPr>
+            <a:lstStyle/>
+            <a:p>
+              <a:r>
+                <a:rPr kumimoji="1" lang="ja-JP" altLang="en-US" sz="1600">
+                  <a:latin typeface="Hiragino Sans W4" panose="020B0400000000000000" pitchFamily="34" charset="-128"/>
+                  <a:ea typeface="Hiragino Sans W4" panose="020B0400000000000000" pitchFamily="34" charset="-128"/>
+                </a:rPr>
+                <a:t>車の生産量</a:t>
+              </a:r>
+              <a:r>
+                <a:rPr kumimoji="1" lang="en-US" altLang="ja-JP" sz="1600" dirty="0">
+                  <a:latin typeface="Hiragino Sans W4" panose="020B0400000000000000" pitchFamily="34" charset="-128"/>
+                  <a:ea typeface="Hiragino Sans W4" panose="020B0400000000000000" pitchFamily="34" charset="-128"/>
+                </a:rPr>
+                <a:t> (</a:t>
+              </a:r>
+              <a:r>
+                <a:rPr kumimoji="1" lang="ja-JP" altLang="en-US" sz="1600">
+                  <a:latin typeface="Hiragino Sans W4" panose="020B0400000000000000" pitchFamily="34" charset="-128"/>
+                  <a:ea typeface="Hiragino Sans W4" panose="020B0400000000000000" pitchFamily="34" charset="-128"/>
+                </a:rPr>
+                <a:t>台</a:t>
+              </a:r>
+              <a:r>
+                <a:rPr kumimoji="1" lang="en-US" altLang="ja-JP" sz="1600" dirty="0">
+                  <a:latin typeface="Hiragino Sans W4" panose="020B0400000000000000" pitchFamily="34" charset="-128"/>
+                  <a:ea typeface="Hiragino Sans W4" panose="020B0400000000000000" pitchFamily="34" charset="-128"/>
+                </a:rPr>
+                <a:t>)</a:t>
+              </a:r>
+              <a:endParaRPr kumimoji="1" lang="ja-JP" altLang="en-US" sz="1600">
+                <a:latin typeface="Hiragino Sans W4" panose="020B0400000000000000" pitchFamily="34" charset="-128"/>
+                <a:ea typeface="Hiragino Sans W4" panose="020B0400000000000000" pitchFamily="34" charset="-128"/>
+              </a:endParaRPr>
+            </a:p>
+          </p:txBody>
+        </p:sp>
+        <p:cxnSp>
+          <p:nvCxnSpPr>
+            <p:cNvPr id="6" name="直線コネクタ 5">
+              <a:extLst>
+                <a:ext uri="{FF2B5EF4-FFF2-40B4-BE49-F238E27FC236}">
+                  <a16:creationId xmlns:a16="http://schemas.microsoft.com/office/drawing/2014/main" id="{9606FB25-61CB-1113-61F7-AAC4BC4AFE4D}"/>
+                </a:ext>
+              </a:extLst>
+            </p:cNvPr>
+            <p:cNvCxnSpPr/>
+            <p:nvPr/>
+          </p:nvCxnSpPr>
+          <p:spPr>
+            <a:xfrm>
+              <a:off x="6500158" y="2522076"/>
+              <a:ext cx="2034022" cy="3156354"/>
+            </a:xfrm>
+            <a:prstGeom prst="line">
+              <a:avLst/>
+            </a:prstGeom>
+            <a:ln w="22225"/>
+          </p:spPr>
+          <p:style>
+            <a:lnRef idx="2">
+              <a:schemeClr val="dk1"/>
+            </a:lnRef>
+            <a:fillRef idx="0">
+              <a:schemeClr val="dk1"/>
+            </a:fillRef>
+            <a:effectRef idx="1">
+              <a:schemeClr val="dk1"/>
+            </a:effectRef>
+            <a:fontRef idx="minor">
+              <a:schemeClr val="tx1"/>
+            </a:fontRef>
+          </p:style>
+        </p:cxnSp>
+        <p:sp>
+          <p:nvSpPr>
+            <p:cNvPr id="7" name="テキスト ボックス 6">
+              <a:extLst>
+                <a:ext uri="{FF2B5EF4-FFF2-40B4-BE49-F238E27FC236}">
+                  <a16:creationId xmlns:a16="http://schemas.microsoft.com/office/drawing/2014/main" id="{02B45F23-F5C4-021D-E63A-D44343137CAA}"/>
+                </a:ext>
+              </a:extLst>
+            </p:cNvPr>
+            <p:cNvSpPr txBox="1"/>
+            <p:nvPr/>
+          </p:nvSpPr>
+          <p:spPr>
+            <a:xfrm>
+              <a:off x="5400383" y="2399929"/>
+              <a:ext cx="1111202" cy="369332"/>
+            </a:xfrm>
+            <a:prstGeom prst="rect">
+              <a:avLst/>
+            </a:prstGeom>
+            <a:noFill/>
+          </p:spPr>
+          <p:txBody>
+            <a:bodyPr wrap="none" rtlCol="0">
+              <a:spAutoFit/>
+            </a:bodyPr>
+            <a:lstStyle/>
+            <a:p>
+              <a:r>
+                <a:rPr kumimoji="1" lang="en-US" altLang="ja-JP" dirty="0">
+                  <a:latin typeface="Hiragino Sans W4" panose="020B0400000000000000" pitchFamily="34" charset="-128"/>
+                  <a:ea typeface="Hiragino Sans W4" panose="020B0400000000000000" pitchFamily="34" charset="-128"/>
+                </a:rPr>
+                <a:t>(0, 700)</a:t>
+              </a:r>
+              <a:endParaRPr kumimoji="1" lang="ja-JP" altLang="en-US">
+                <a:latin typeface="Hiragino Sans W4" panose="020B0400000000000000" pitchFamily="34" charset="-128"/>
+                <a:ea typeface="Hiragino Sans W4" panose="020B0400000000000000" pitchFamily="34" charset="-128"/>
+              </a:endParaRPr>
+            </a:p>
+          </p:txBody>
+        </p:sp>
+        <p:sp>
+          <p:nvSpPr>
+            <p:cNvPr id="8" name="テキスト ボックス 7">
+              <a:extLst>
+                <a:ext uri="{FF2B5EF4-FFF2-40B4-BE49-F238E27FC236}">
+                  <a16:creationId xmlns:a16="http://schemas.microsoft.com/office/drawing/2014/main" id="{35A8C133-6918-D576-9E24-D84B17EEA635}"/>
+                </a:ext>
+              </a:extLst>
+            </p:cNvPr>
+            <p:cNvSpPr txBox="1"/>
+            <p:nvPr/>
+          </p:nvSpPr>
+          <p:spPr>
+            <a:xfrm>
+              <a:off x="7955016" y="5710173"/>
+              <a:ext cx="1111202" cy="369332"/>
+            </a:xfrm>
+            <a:prstGeom prst="rect">
+              <a:avLst/>
+            </a:prstGeom>
+            <a:noFill/>
+          </p:spPr>
+          <p:txBody>
+            <a:bodyPr wrap="none" rtlCol="0">
+              <a:spAutoFit/>
+            </a:bodyPr>
+            <a:lstStyle/>
+            <a:p>
+              <a:r>
+                <a:rPr kumimoji="1" lang="en-US" altLang="ja-JP" dirty="0">
+                  <a:latin typeface="Hiragino Sans W4" panose="020B0400000000000000" pitchFamily="34" charset="-128"/>
+                  <a:ea typeface="Hiragino Sans W4" panose="020B0400000000000000" pitchFamily="34" charset="-128"/>
+                </a:rPr>
+                <a:t>(350, 0)</a:t>
+              </a:r>
+              <a:endParaRPr kumimoji="1" lang="ja-JP" altLang="en-US">
+                <a:latin typeface="Hiragino Sans W4" panose="020B0400000000000000" pitchFamily="34" charset="-128"/>
+                <a:ea typeface="Hiragino Sans W4" panose="020B0400000000000000" pitchFamily="34" charset="-128"/>
+              </a:endParaRPr>
+            </a:p>
+          </p:txBody>
+        </p:sp>
+        <p:cxnSp>
+          <p:nvCxnSpPr>
+            <p:cNvPr id="9" name="直線矢印コネクタ 8">
+              <a:extLst>
+                <a:ext uri="{FF2B5EF4-FFF2-40B4-BE49-F238E27FC236}">
+                  <a16:creationId xmlns:a16="http://schemas.microsoft.com/office/drawing/2014/main" id="{99C745EF-B41F-C582-398F-BD0001E35F37}"/>
+                </a:ext>
+              </a:extLst>
+            </p:cNvPr>
+            <p:cNvCxnSpPr/>
+            <p:nvPr/>
+          </p:nvCxnSpPr>
+          <p:spPr>
+            <a:xfrm flipV="1">
+              <a:off x="6480087" y="854181"/>
+              <a:ext cx="0" cy="4824248"/>
+            </a:xfrm>
+            <a:prstGeom prst="straightConnector1">
+              <a:avLst/>
+            </a:prstGeom>
+            <a:ln w="22225">
+              <a:tailEnd type="triangle"/>
+            </a:ln>
+          </p:spPr>
+          <p:style>
+            <a:lnRef idx="2">
+              <a:schemeClr val="dk1"/>
+            </a:lnRef>
+            <a:fillRef idx="0">
+              <a:schemeClr val="dk1"/>
+            </a:fillRef>
+            <a:effectRef idx="1">
+              <a:schemeClr val="dk1"/>
+            </a:effectRef>
+            <a:fontRef idx="minor">
+              <a:schemeClr val="tx1"/>
+            </a:fontRef>
+          </p:style>
+        </p:cxnSp>
+        <p:cxnSp>
+          <p:nvCxnSpPr>
+            <p:cNvPr id="10" name="直線矢印コネクタ 9">
+              <a:extLst>
+                <a:ext uri="{FF2B5EF4-FFF2-40B4-BE49-F238E27FC236}">
+                  <a16:creationId xmlns:a16="http://schemas.microsoft.com/office/drawing/2014/main" id="{FD5DC719-D19A-F81D-577D-A018B5FC26B6}"/>
+                </a:ext>
+              </a:extLst>
+            </p:cNvPr>
+            <p:cNvCxnSpPr>
+              <a:cxnSpLocks/>
+            </p:cNvCxnSpPr>
+            <p:nvPr/>
+          </p:nvCxnSpPr>
+          <p:spPr>
+            <a:xfrm>
+              <a:off x="6480087" y="5678429"/>
+              <a:ext cx="4477407" cy="0"/>
+            </a:xfrm>
+            <a:prstGeom prst="straightConnector1">
+              <a:avLst/>
+            </a:prstGeom>
+            <a:ln w="22225">
+              <a:tailEnd type="triangle"/>
+            </a:ln>
+          </p:spPr>
+          <p:style>
+            <a:lnRef idx="2">
+              <a:schemeClr val="dk1"/>
+            </a:lnRef>
+            <a:fillRef idx="0">
+              <a:schemeClr val="dk1"/>
+            </a:fillRef>
+            <a:effectRef idx="1">
+              <a:schemeClr val="dk1"/>
+            </a:effectRef>
+            <a:fontRef idx="minor">
+              <a:schemeClr val="tx1"/>
+            </a:fontRef>
+          </p:style>
+        </p:cxnSp>
+        <p:sp>
+          <p:nvSpPr>
+            <p:cNvPr id="11" name="テキスト ボックス 10">
+              <a:extLst>
+                <a:ext uri="{FF2B5EF4-FFF2-40B4-BE49-F238E27FC236}">
+                  <a16:creationId xmlns:a16="http://schemas.microsoft.com/office/drawing/2014/main" id="{D031A61D-9DBD-B676-F9AE-1BC6FD4C3BAA}"/>
+                </a:ext>
+              </a:extLst>
+            </p:cNvPr>
+            <p:cNvSpPr txBox="1"/>
+            <p:nvPr/>
+          </p:nvSpPr>
+          <p:spPr>
+            <a:xfrm>
+              <a:off x="2163443" y="884958"/>
+              <a:ext cx="1903085" cy="400110"/>
+            </a:xfrm>
+            <a:prstGeom prst="rect">
+              <a:avLst/>
+            </a:prstGeom>
+            <a:noFill/>
+          </p:spPr>
+          <p:txBody>
+            <a:bodyPr wrap="none" rtlCol="0">
+              <a:spAutoFit/>
+            </a:bodyPr>
+            <a:lstStyle/>
+            <a:p>
+              <a:r>
+                <a:rPr kumimoji="1" lang="ja-JP" altLang="en-US" sz="2000">
+                  <a:latin typeface="Hiragino Sans W4" panose="020B0400000000000000" pitchFamily="34" charset="-128"/>
+                  <a:ea typeface="Hiragino Sans W4" panose="020B0400000000000000" pitchFamily="34" charset="-128"/>
+                </a:rPr>
+                <a:t>労働力</a:t>
+              </a:r>
+              <a:r>
+                <a:rPr kumimoji="1" lang="en-US" altLang="ja-JP" sz="2000" dirty="0">
+                  <a:latin typeface="Hiragino Sans W4" panose="020B0400000000000000" pitchFamily="34" charset="-128"/>
+                  <a:ea typeface="Hiragino Sans W4" panose="020B0400000000000000" pitchFamily="34" charset="-128"/>
+                </a:rPr>
+                <a:t>1400</a:t>
+              </a:r>
+              <a:r>
+                <a:rPr kumimoji="1" lang="ja-JP" altLang="en-US" sz="2000">
+                  <a:latin typeface="Hiragino Sans W4" panose="020B0400000000000000" pitchFamily="34" charset="-128"/>
+                  <a:ea typeface="Hiragino Sans W4" panose="020B0400000000000000" pitchFamily="34" charset="-128"/>
+                </a:rPr>
+                <a:t>人</a:t>
+              </a:r>
+              <a:endParaRPr kumimoji="1" lang="en-US" altLang="ja-JP" sz="1400" dirty="0">
+                <a:latin typeface="Hiragino Sans W4" panose="020B0400000000000000" pitchFamily="34" charset="-128"/>
+                <a:ea typeface="Hiragino Sans W4" panose="020B0400000000000000" pitchFamily="34" charset="-128"/>
+              </a:endParaRPr>
+            </a:p>
+          </p:txBody>
+        </p:sp>
+        <p:sp>
+          <p:nvSpPr>
+            <p:cNvPr id="12" name="テキスト ボックス 11">
+              <a:extLst>
+                <a:ext uri="{FF2B5EF4-FFF2-40B4-BE49-F238E27FC236}">
+                  <a16:creationId xmlns:a16="http://schemas.microsoft.com/office/drawing/2014/main" id="{89F1385A-0121-1592-4756-262F68ACEDDC}"/>
+                </a:ext>
+              </a:extLst>
+            </p:cNvPr>
+            <p:cNvSpPr txBox="1"/>
+            <p:nvPr/>
+          </p:nvSpPr>
+          <p:spPr>
+            <a:xfrm>
+              <a:off x="4911414" y="5288467"/>
+              <a:ext cx="1111202" cy="369332"/>
+            </a:xfrm>
+            <a:prstGeom prst="rect">
+              <a:avLst/>
+            </a:prstGeom>
+            <a:noFill/>
+          </p:spPr>
+          <p:txBody>
+            <a:bodyPr wrap="none" rtlCol="0">
+              <a:spAutoFit/>
+            </a:bodyPr>
+            <a:lstStyle/>
+            <a:p>
+              <a:r>
+                <a:rPr kumimoji="1" lang="en-US" altLang="ja-JP" dirty="0">
+                  <a:latin typeface="Hiragino Sans W4" panose="020B0400000000000000" pitchFamily="34" charset="-128"/>
+                  <a:ea typeface="Hiragino Sans W4" panose="020B0400000000000000" pitchFamily="34" charset="-128"/>
+                </a:rPr>
+                <a:t>(700, 0)</a:t>
+              </a:r>
+              <a:endParaRPr kumimoji="1" lang="ja-JP" altLang="en-US">
+                <a:latin typeface="Hiragino Sans W4" panose="020B0400000000000000" pitchFamily="34" charset="-128"/>
+                <a:ea typeface="Hiragino Sans W4" panose="020B0400000000000000" pitchFamily="34" charset="-128"/>
+              </a:endParaRPr>
+            </a:p>
+          </p:txBody>
+        </p:sp>
+        <p:sp>
+          <p:nvSpPr>
+            <p:cNvPr id="13" name="テキスト ボックス 12">
+              <a:extLst>
+                <a:ext uri="{FF2B5EF4-FFF2-40B4-BE49-F238E27FC236}">
+                  <a16:creationId xmlns:a16="http://schemas.microsoft.com/office/drawing/2014/main" id="{35CAA5E9-F7AE-9EC7-DC89-8468F65E6E3C}"/>
+                </a:ext>
+              </a:extLst>
+            </p:cNvPr>
+            <p:cNvSpPr txBox="1"/>
+            <p:nvPr/>
+          </p:nvSpPr>
+          <p:spPr>
+            <a:xfrm>
+              <a:off x="800992" y="845404"/>
+              <a:ext cx="461665" cy="1522781"/>
+            </a:xfrm>
+            <a:prstGeom prst="rect">
+              <a:avLst/>
+            </a:prstGeom>
+            <a:noFill/>
+          </p:spPr>
+          <p:txBody>
+            <a:bodyPr vert="eaVert" wrap="square" rtlCol="0">
+              <a:spAutoFit/>
+            </a:bodyPr>
+            <a:lstStyle/>
+            <a:p>
+              <a:r>
+                <a:rPr lang="ja-JP" altLang="en-US">
+                  <a:latin typeface="Hiragino Sans W4" panose="020B0400000000000000" pitchFamily="34" charset="-128"/>
+                  <a:ea typeface="Hiragino Sans W4" panose="020B0400000000000000" pitchFamily="34" charset="-128"/>
+                </a:rPr>
+                <a:t>米の生産量</a:t>
+              </a:r>
+              <a:r>
+                <a:rPr lang="en-US" altLang="ja-JP" dirty="0">
+                  <a:latin typeface="Hiragino Sans W4" panose="020B0400000000000000" pitchFamily="34" charset="-128"/>
+                  <a:ea typeface="Hiragino Sans W4" panose="020B0400000000000000" pitchFamily="34" charset="-128"/>
+                </a:rPr>
+                <a:t>(t)</a:t>
+              </a:r>
+              <a:endParaRPr kumimoji="1" lang="ja-JP" altLang="en-US">
+                <a:latin typeface="Hiragino Sans W4" panose="020B0400000000000000" pitchFamily="34" charset="-128"/>
+                <a:ea typeface="Hiragino Sans W4" panose="020B0400000000000000" pitchFamily="34" charset="-128"/>
+              </a:endParaRPr>
+            </a:p>
+          </p:txBody>
+        </p:sp>
+        <p:sp>
+          <p:nvSpPr>
+            <p:cNvPr id="14" name="テキスト ボックス 13">
+              <a:extLst>
+                <a:ext uri="{FF2B5EF4-FFF2-40B4-BE49-F238E27FC236}">
+                  <a16:creationId xmlns:a16="http://schemas.microsoft.com/office/drawing/2014/main" id="{6EC0B74F-336F-5C22-386D-74EDEB7CC6B1}"/>
+                </a:ext>
+              </a:extLst>
+            </p:cNvPr>
+            <p:cNvSpPr txBox="1"/>
+            <p:nvPr/>
+          </p:nvSpPr>
+          <p:spPr>
+            <a:xfrm>
+              <a:off x="6018422" y="841016"/>
+              <a:ext cx="461665" cy="1522781"/>
+            </a:xfrm>
+            <a:prstGeom prst="rect">
+              <a:avLst/>
+            </a:prstGeom>
+            <a:noFill/>
+          </p:spPr>
+          <p:txBody>
+            <a:bodyPr vert="eaVert" wrap="square" rtlCol="0">
+              <a:spAutoFit/>
+            </a:bodyPr>
+            <a:lstStyle/>
+            <a:p>
+              <a:r>
+                <a:rPr lang="ja-JP" altLang="en-US">
+                  <a:latin typeface="Hiragino Sans W4" panose="020B0400000000000000" pitchFamily="34" charset="-128"/>
+                  <a:ea typeface="Hiragino Sans W4" panose="020B0400000000000000" pitchFamily="34" charset="-128"/>
+                </a:rPr>
+                <a:t>米の生産量</a:t>
+              </a:r>
+              <a:r>
+                <a:rPr lang="en-US" altLang="ja-JP" dirty="0">
+                  <a:latin typeface="Hiragino Sans W4" panose="020B0400000000000000" pitchFamily="34" charset="-128"/>
+                  <a:ea typeface="Hiragino Sans W4" panose="020B0400000000000000" pitchFamily="34" charset="-128"/>
+                </a:rPr>
+                <a:t>(t)</a:t>
+              </a:r>
+              <a:endParaRPr kumimoji="1" lang="ja-JP" altLang="en-US">
+                <a:latin typeface="Hiragino Sans W4" panose="020B0400000000000000" pitchFamily="34" charset="-128"/>
+                <a:ea typeface="Hiragino Sans W4" panose="020B0400000000000000" pitchFamily="34" charset="-128"/>
+              </a:endParaRPr>
+            </a:p>
+          </p:txBody>
+        </p:sp>
+        <p:sp>
+          <p:nvSpPr>
+            <p:cNvPr id="15" name="テキスト ボックス 14">
+              <a:extLst>
+                <a:ext uri="{FF2B5EF4-FFF2-40B4-BE49-F238E27FC236}">
+                  <a16:creationId xmlns:a16="http://schemas.microsoft.com/office/drawing/2014/main" id="{9FCE2A2F-246E-4C1A-8850-E17CED254DAB}"/>
+                </a:ext>
+              </a:extLst>
+            </p:cNvPr>
+            <p:cNvSpPr txBox="1"/>
+            <p:nvPr/>
+          </p:nvSpPr>
+          <p:spPr>
+            <a:xfrm>
+              <a:off x="9368711" y="5678430"/>
+              <a:ext cx="1716909" cy="338554"/>
+            </a:xfrm>
+            <a:prstGeom prst="rect">
+              <a:avLst/>
+            </a:prstGeom>
+            <a:noFill/>
+          </p:spPr>
+          <p:txBody>
+            <a:bodyPr wrap="square" rtlCol="0">
+              <a:spAutoFit/>
+            </a:bodyPr>
+            <a:lstStyle/>
+            <a:p>
+              <a:r>
+                <a:rPr kumimoji="1" lang="ja-JP" altLang="en-US" sz="1600">
+                  <a:latin typeface="Hiragino Sans W4" panose="020B0400000000000000" pitchFamily="34" charset="-128"/>
+                  <a:ea typeface="Hiragino Sans W4" panose="020B0400000000000000" pitchFamily="34" charset="-128"/>
+                </a:rPr>
+                <a:t>車の生産量</a:t>
+              </a:r>
+              <a:r>
+                <a:rPr kumimoji="1" lang="en-US" altLang="ja-JP" sz="1600" dirty="0">
+                  <a:latin typeface="Hiragino Sans W4" panose="020B0400000000000000" pitchFamily="34" charset="-128"/>
+                  <a:ea typeface="Hiragino Sans W4" panose="020B0400000000000000" pitchFamily="34" charset="-128"/>
+                </a:rPr>
+                <a:t> (</a:t>
+              </a:r>
+              <a:r>
+                <a:rPr kumimoji="1" lang="ja-JP" altLang="en-US" sz="1600">
+                  <a:latin typeface="Hiragino Sans W4" panose="020B0400000000000000" pitchFamily="34" charset="-128"/>
+                  <a:ea typeface="Hiragino Sans W4" panose="020B0400000000000000" pitchFamily="34" charset="-128"/>
+                </a:rPr>
+                <a:t>台</a:t>
+              </a:r>
+              <a:r>
+                <a:rPr kumimoji="1" lang="en-US" altLang="ja-JP" sz="1600" dirty="0">
+                  <a:latin typeface="Hiragino Sans W4" panose="020B0400000000000000" pitchFamily="34" charset="-128"/>
+                  <a:ea typeface="Hiragino Sans W4" panose="020B0400000000000000" pitchFamily="34" charset="-128"/>
+                </a:rPr>
+                <a:t>)</a:t>
+              </a:r>
+              <a:endParaRPr kumimoji="1" lang="ja-JP" altLang="en-US" sz="1600">
+                <a:latin typeface="Hiragino Sans W4" panose="020B0400000000000000" pitchFamily="34" charset="-128"/>
+                <a:ea typeface="Hiragino Sans W4" panose="020B0400000000000000" pitchFamily="34" charset="-128"/>
+              </a:endParaRPr>
+            </a:p>
+          </p:txBody>
+        </p:sp>
+        <p:sp>
+          <p:nvSpPr>
+            <p:cNvPr id="16" name="テキスト ボックス 15">
+              <a:extLst>
+                <a:ext uri="{FF2B5EF4-FFF2-40B4-BE49-F238E27FC236}">
+                  <a16:creationId xmlns:a16="http://schemas.microsoft.com/office/drawing/2014/main" id="{5D74FDD0-D856-B219-1461-A207387FFCFA}"/>
+                </a:ext>
+              </a:extLst>
+            </p:cNvPr>
+            <p:cNvSpPr txBox="1"/>
+            <p:nvPr/>
+          </p:nvSpPr>
+          <p:spPr>
+            <a:xfrm>
+              <a:off x="1323969" y="854181"/>
+              <a:ext cx="800219" cy="461665"/>
+            </a:xfrm>
+            <a:prstGeom prst="rect">
+              <a:avLst/>
+            </a:prstGeom>
+            <a:solidFill>
+              <a:schemeClr val="bg1"/>
+            </a:solidFill>
+            <a:ln>
+              <a:solidFill>
+                <a:schemeClr val="tx1"/>
+              </a:solidFill>
+            </a:ln>
+          </p:spPr>
+          <p:txBody>
+            <a:bodyPr wrap="none" rtlCol="0">
+              <a:spAutoFit/>
+            </a:bodyPr>
+            <a:lstStyle/>
+            <a:p>
+              <a:pPr algn="ctr"/>
+              <a:r>
+                <a:rPr kumimoji="1" lang="ja-JP" altLang="en-US" sz="2400" b="1"/>
+                <a:t>日本</a:t>
+              </a:r>
+            </a:p>
+          </p:txBody>
+        </p:sp>
+        <p:sp>
+          <p:nvSpPr>
+            <p:cNvPr id="17" name="テキスト ボックス 16">
+              <a:extLst>
+                <a:ext uri="{FF2B5EF4-FFF2-40B4-BE49-F238E27FC236}">
+                  <a16:creationId xmlns:a16="http://schemas.microsoft.com/office/drawing/2014/main" id="{82DACD8B-F473-14EA-A599-7EAA936B7F04}"/>
+                </a:ext>
+              </a:extLst>
+            </p:cNvPr>
+            <p:cNvSpPr txBox="1"/>
+            <p:nvPr/>
+          </p:nvSpPr>
+          <p:spPr>
+            <a:xfrm>
+              <a:off x="6566861" y="854181"/>
+              <a:ext cx="800219" cy="461665"/>
+            </a:xfrm>
+            <a:prstGeom prst="rect">
+              <a:avLst/>
+            </a:prstGeom>
+            <a:solidFill>
+              <a:schemeClr val="bg1"/>
+            </a:solidFill>
+            <a:ln>
+              <a:solidFill>
+                <a:schemeClr val="tx1"/>
+              </a:solidFill>
+            </a:ln>
+          </p:spPr>
+          <p:txBody>
+            <a:bodyPr wrap="none" rtlCol="0">
+              <a:spAutoFit/>
+            </a:bodyPr>
+            <a:lstStyle/>
+            <a:p>
+              <a:pPr algn="ctr"/>
+              <a:r>
+                <a:rPr kumimoji="1" lang="ja-JP" altLang="en-US" sz="2400" b="1"/>
+                <a:t>中国</a:t>
+              </a:r>
+            </a:p>
+          </p:txBody>
+        </p:sp>
+        <p:cxnSp>
+          <p:nvCxnSpPr>
+            <p:cNvPr id="22" name="直線コネクタ 21">
+              <a:extLst>
+                <a:ext uri="{FF2B5EF4-FFF2-40B4-BE49-F238E27FC236}">
+                  <a16:creationId xmlns:a16="http://schemas.microsoft.com/office/drawing/2014/main" id="{D42E2C03-D995-7D74-10A6-819D92DE8A47}"/>
+                </a:ext>
+              </a:extLst>
+            </p:cNvPr>
+            <p:cNvCxnSpPr>
+              <a:cxnSpLocks/>
+            </p:cNvCxnSpPr>
+            <p:nvPr/>
+          </p:nvCxnSpPr>
+          <p:spPr>
+            <a:xfrm>
+              <a:off x="1241418" y="3987416"/>
+              <a:ext cx="3834319" cy="1685772"/>
+            </a:xfrm>
+            <a:prstGeom prst="line">
+              <a:avLst/>
+            </a:prstGeom>
+            <a:ln w="22225"/>
+          </p:spPr>
+          <p:style>
+            <a:lnRef idx="2">
+              <a:schemeClr val="dk1"/>
+            </a:lnRef>
+            <a:fillRef idx="0">
+              <a:schemeClr val="dk1"/>
+            </a:fillRef>
+            <a:effectRef idx="1">
+              <a:schemeClr val="dk1"/>
+            </a:effectRef>
+            <a:fontRef idx="minor">
+              <a:schemeClr val="tx1"/>
+            </a:fontRef>
+          </p:style>
+        </p:cxnSp>
+        <p:sp>
+          <p:nvSpPr>
+            <p:cNvPr id="27" name="テキスト ボックス 26">
+              <a:extLst>
+                <a:ext uri="{FF2B5EF4-FFF2-40B4-BE49-F238E27FC236}">
+                  <a16:creationId xmlns:a16="http://schemas.microsoft.com/office/drawing/2014/main" id="{E848F047-9119-457D-AC08-2924B9BF7C4E}"/>
+                </a:ext>
+              </a:extLst>
+            </p:cNvPr>
+            <p:cNvSpPr txBox="1"/>
+            <p:nvPr/>
+          </p:nvSpPr>
+          <p:spPr>
+            <a:xfrm>
+              <a:off x="193535" y="3798361"/>
+              <a:ext cx="1111202" cy="369332"/>
+            </a:xfrm>
+            <a:prstGeom prst="rect">
+              <a:avLst/>
+            </a:prstGeom>
+            <a:noFill/>
+          </p:spPr>
+          <p:txBody>
+            <a:bodyPr wrap="none" rtlCol="0">
+              <a:spAutoFit/>
+            </a:bodyPr>
+            <a:lstStyle/>
+            <a:p>
+              <a:r>
+                <a:rPr kumimoji="1" lang="en-US" altLang="ja-JP" dirty="0">
+                  <a:latin typeface="Hiragino Sans W4" panose="020B0400000000000000" pitchFamily="34" charset="-128"/>
+                  <a:ea typeface="Hiragino Sans W4" panose="020B0400000000000000" pitchFamily="34" charset="-128"/>
+                </a:rPr>
+                <a:t>(0, 350)</a:t>
+              </a:r>
+            </a:p>
+          </p:txBody>
+        </p:sp>
+        <p:sp>
+          <p:nvSpPr>
+            <p:cNvPr id="28" name="テキスト ボックス 27">
+              <a:extLst>
+                <a:ext uri="{FF2B5EF4-FFF2-40B4-BE49-F238E27FC236}">
+                  <a16:creationId xmlns:a16="http://schemas.microsoft.com/office/drawing/2014/main" id="{E88DACAD-EAA6-F698-B1A2-A88FE5B0CC9A}"/>
+                </a:ext>
+              </a:extLst>
+            </p:cNvPr>
+            <p:cNvSpPr txBox="1"/>
+            <p:nvPr/>
+          </p:nvSpPr>
+          <p:spPr>
+            <a:xfrm>
+              <a:off x="7386346" y="894671"/>
+              <a:ext cx="1903085" cy="400110"/>
+            </a:xfrm>
+            <a:prstGeom prst="rect">
+              <a:avLst/>
+            </a:prstGeom>
+            <a:noFill/>
+          </p:spPr>
+          <p:txBody>
+            <a:bodyPr wrap="none" rtlCol="0">
+              <a:spAutoFit/>
+            </a:bodyPr>
+            <a:lstStyle/>
+            <a:p>
+              <a:r>
+                <a:rPr kumimoji="1" lang="ja-JP" altLang="en-US" sz="2000">
+                  <a:latin typeface="Hiragino Sans W4" panose="020B0400000000000000" pitchFamily="34" charset="-128"/>
+                  <a:ea typeface="Hiragino Sans W4" panose="020B0400000000000000" pitchFamily="34" charset="-128"/>
+                </a:rPr>
+                <a:t>労働力</a:t>
+              </a:r>
+              <a:r>
+                <a:rPr kumimoji="1" lang="en-US" altLang="ja-JP" sz="2000" dirty="0">
+                  <a:latin typeface="Hiragino Sans W4" panose="020B0400000000000000" pitchFamily="34" charset="-128"/>
+                  <a:ea typeface="Hiragino Sans W4" panose="020B0400000000000000" pitchFamily="34" charset="-128"/>
+                </a:rPr>
+                <a:t>3500</a:t>
+              </a:r>
+              <a:r>
+                <a:rPr kumimoji="1" lang="ja-JP" altLang="en-US" sz="2000">
+                  <a:latin typeface="Hiragino Sans W4" panose="020B0400000000000000" pitchFamily="34" charset="-128"/>
+                  <a:ea typeface="Hiragino Sans W4" panose="020B0400000000000000" pitchFamily="34" charset="-128"/>
+                </a:rPr>
+                <a:t>人</a:t>
+              </a:r>
+              <a:endParaRPr kumimoji="1" lang="en-US" altLang="ja-JP" sz="1400" dirty="0">
+                <a:latin typeface="Hiragino Sans W4" panose="020B0400000000000000" pitchFamily="34" charset="-128"/>
+                <a:ea typeface="Hiragino Sans W4" panose="020B0400000000000000" pitchFamily="34" charset="-128"/>
+              </a:endParaRPr>
+            </a:p>
+          </p:txBody>
+        </p:sp>
+        <p:sp>
+          <p:nvSpPr>
+            <p:cNvPr id="2" name="テキスト ボックス 1">
+              <a:extLst>
+                <a:ext uri="{FF2B5EF4-FFF2-40B4-BE49-F238E27FC236}">
+                  <a16:creationId xmlns:a16="http://schemas.microsoft.com/office/drawing/2014/main" id="{4136DE2E-1DC7-B9BD-F58B-8E495B59B658}"/>
+                </a:ext>
+              </a:extLst>
+            </p:cNvPr>
+            <p:cNvSpPr txBox="1"/>
+            <p:nvPr/>
+          </p:nvSpPr>
+          <p:spPr>
+            <a:xfrm>
+              <a:off x="3696940" y="4124904"/>
+              <a:ext cx="1422184" cy="369332"/>
+            </a:xfrm>
+            <a:prstGeom prst="rect">
+              <a:avLst/>
+            </a:prstGeom>
+            <a:noFill/>
+          </p:spPr>
+          <p:txBody>
+            <a:bodyPr wrap="square" rtlCol="0">
+              <a:spAutoFit/>
+            </a:bodyPr>
+            <a:lstStyle/>
+            <a:p>
+              <a:r>
+                <a:rPr kumimoji="1" lang="en-US" altLang="ja-JP" dirty="0">
+                  <a:latin typeface="Hiragino Sans W4" panose="020B0400000000000000" pitchFamily="34" charset="-128"/>
+                  <a:ea typeface="Hiragino Sans W4" panose="020B0400000000000000" pitchFamily="34" charset="-128"/>
+                </a:rPr>
+                <a:t>(300, 200)</a:t>
+              </a:r>
+              <a:endParaRPr kumimoji="1" lang="ja-JP" altLang="en-US">
+                <a:latin typeface="Hiragino Sans W4" panose="020B0400000000000000" pitchFamily="34" charset="-128"/>
+                <a:ea typeface="Hiragino Sans W4" panose="020B0400000000000000" pitchFamily="34" charset="-128"/>
+              </a:endParaRPr>
+            </a:p>
+          </p:txBody>
+        </p:sp>
+        <p:sp>
+          <p:nvSpPr>
+            <p:cNvPr id="32" name="テキスト ボックス 31">
+              <a:extLst>
+                <a:ext uri="{FF2B5EF4-FFF2-40B4-BE49-F238E27FC236}">
+                  <a16:creationId xmlns:a16="http://schemas.microsoft.com/office/drawing/2014/main" id="{F489F8A0-728B-C1C7-FCBF-10EB80F39293}"/>
+                </a:ext>
+              </a:extLst>
+            </p:cNvPr>
+            <p:cNvSpPr txBox="1"/>
+            <p:nvPr/>
+          </p:nvSpPr>
+          <p:spPr>
+            <a:xfrm>
+              <a:off x="7243924" y="3092375"/>
+              <a:ext cx="1422184" cy="369332"/>
+            </a:xfrm>
+            <a:prstGeom prst="rect">
+              <a:avLst/>
+            </a:prstGeom>
+            <a:noFill/>
+          </p:spPr>
+          <p:txBody>
+            <a:bodyPr wrap="none" rtlCol="0">
+              <a:spAutoFit/>
+            </a:bodyPr>
+            <a:lstStyle/>
+            <a:p>
+              <a:r>
+                <a:rPr kumimoji="1" lang="en-US" altLang="ja-JP" dirty="0">
+                  <a:latin typeface="Hiragino Sans W4" panose="020B0400000000000000" pitchFamily="34" charset="-128"/>
+                  <a:ea typeface="Hiragino Sans W4" panose="020B0400000000000000" pitchFamily="34" charset="-128"/>
+                </a:rPr>
+                <a:t>(200, 300)</a:t>
+              </a:r>
+              <a:endParaRPr kumimoji="1" lang="ja-JP" altLang="en-US">
+                <a:latin typeface="Hiragino Sans W4" panose="020B0400000000000000" pitchFamily="34" charset="-128"/>
+                <a:ea typeface="Hiragino Sans W4" panose="020B0400000000000000" pitchFamily="34" charset="-128"/>
+              </a:endParaRPr>
+            </a:p>
+          </p:txBody>
+        </p:sp>
+        <p:sp>
+          <p:nvSpPr>
+            <p:cNvPr id="33" name="円/楕円 32">
+              <a:extLst>
+                <a:ext uri="{FF2B5EF4-FFF2-40B4-BE49-F238E27FC236}">
+                  <a16:creationId xmlns:a16="http://schemas.microsoft.com/office/drawing/2014/main" id="{D270FBB2-9FD1-12FE-79EB-4302CF4DF494}"/>
+                </a:ext>
+              </a:extLst>
+            </p:cNvPr>
+            <p:cNvSpPr/>
+            <p:nvPr/>
+          </p:nvSpPr>
+          <p:spPr>
+            <a:xfrm>
+              <a:off x="3669155" y="4971916"/>
+              <a:ext cx="195476" cy="195476"/>
+            </a:xfrm>
+            <a:prstGeom prst="ellipse">
+              <a:avLst/>
+            </a:prstGeom>
+            <a:solidFill>
+              <a:srgbClr val="FF0000"/>
+            </a:solidFill>
+            <a:ln>
+              <a:noFill/>
+            </a:ln>
+          </p:spPr>
+          <p:style>
+            <a:lnRef idx="2">
+              <a:schemeClr val="accent1">
+                <a:shade val="15000"/>
+              </a:schemeClr>
+            </a:lnRef>
+            <a:fillRef idx="1">
+              <a:schemeClr val="accent1"/>
+            </a:fillRef>
+            <a:effectRef idx="0">
+              <a:schemeClr val="accent1"/>
+            </a:effectRef>
+            <a:fontRef idx="minor">
+              <a:schemeClr val="lt1"/>
+            </a:fontRef>
+          </p:style>
+          <p:txBody>
+            <a:bodyPr rtlCol="0" anchor="ctr"/>
+            <a:lstStyle/>
+            <a:p>
+              <a:pPr algn="ctr"/>
+              <a:endParaRPr kumimoji="1" lang="ja-JP" altLang="en-US"/>
+            </a:p>
+          </p:txBody>
+        </p:sp>
+        <p:cxnSp>
+          <p:nvCxnSpPr>
+            <p:cNvPr id="34" name="曲線コネクタ 33">
+              <a:extLst>
+                <a:ext uri="{FF2B5EF4-FFF2-40B4-BE49-F238E27FC236}">
+                  <a16:creationId xmlns:a16="http://schemas.microsoft.com/office/drawing/2014/main" id="{E6D219BF-5F77-46C6-0A18-376E1BB84341}"/>
+                </a:ext>
+              </a:extLst>
+            </p:cNvPr>
+            <p:cNvCxnSpPr>
+              <a:cxnSpLocks/>
+              <a:stCxn id="2" idx="2"/>
+              <a:endCxn id="33" idx="6"/>
+            </p:cNvCxnSpPr>
+            <p:nvPr/>
+          </p:nvCxnSpPr>
+          <p:spPr>
+            <a:xfrm rot="5400000">
+              <a:off x="3848623" y="4510245"/>
+              <a:ext cx="575418" cy="543401"/>
+            </a:xfrm>
+            <a:prstGeom prst="curvedConnector2">
+              <a:avLst/>
+            </a:prstGeom>
+            <a:ln w="25400">
+              <a:solidFill>
+                <a:schemeClr val="tx1"/>
+              </a:solidFill>
+              <a:tailEnd type="triangle"/>
+            </a:ln>
+          </p:spPr>
+          <p:style>
+            <a:lnRef idx="2">
+              <a:schemeClr val="accent1"/>
+            </a:lnRef>
+            <a:fillRef idx="0">
+              <a:schemeClr val="accent1"/>
+            </a:fillRef>
+            <a:effectRef idx="1">
+              <a:schemeClr val="accent1"/>
+            </a:effectRef>
+            <a:fontRef idx="minor">
+              <a:schemeClr val="tx1"/>
+            </a:fontRef>
+          </p:style>
+        </p:cxnSp>
+        <p:sp>
+          <p:nvSpPr>
+            <p:cNvPr id="39" name="円/楕円 38">
+              <a:extLst>
+                <a:ext uri="{FF2B5EF4-FFF2-40B4-BE49-F238E27FC236}">
+                  <a16:creationId xmlns:a16="http://schemas.microsoft.com/office/drawing/2014/main" id="{FB0E0D3F-9115-4B1C-1182-89783A16770B}"/>
+                </a:ext>
+              </a:extLst>
+            </p:cNvPr>
+            <p:cNvSpPr/>
+            <p:nvPr/>
+          </p:nvSpPr>
+          <p:spPr>
+            <a:xfrm>
+              <a:off x="7326551" y="3844616"/>
+              <a:ext cx="195476" cy="195476"/>
+            </a:xfrm>
+            <a:prstGeom prst="ellipse">
+              <a:avLst/>
+            </a:prstGeom>
+            <a:solidFill>
+              <a:srgbClr val="FF0000"/>
+            </a:solidFill>
+            <a:ln>
+              <a:noFill/>
+            </a:ln>
+          </p:spPr>
+          <p:style>
+            <a:lnRef idx="2">
+              <a:schemeClr val="accent1">
+                <a:shade val="15000"/>
+              </a:schemeClr>
+            </a:lnRef>
+            <a:fillRef idx="1">
+              <a:schemeClr val="accent1"/>
+            </a:fillRef>
+            <a:effectRef idx="0">
+              <a:schemeClr val="accent1"/>
+            </a:effectRef>
+            <a:fontRef idx="minor">
+              <a:schemeClr val="lt1"/>
+            </a:fontRef>
+          </p:style>
+          <p:txBody>
+            <a:bodyPr rtlCol="0" anchor="ctr"/>
+            <a:lstStyle/>
+            <a:p>
+              <a:pPr algn="ctr"/>
+              <a:endParaRPr kumimoji="1" lang="ja-JP" altLang="en-US"/>
+            </a:p>
+          </p:txBody>
+        </p:sp>
+        <p:cxnSp>
+          <p:nvCxnSpPr>
+            <p:cNvPr id="40" name="曲線コネクタ 39">
+              <a:extLst>
+                <a:ext uri="{FF2B5EF4-FFF2-40B4-BE49-F238E27FC236}">
+                  <a16:creationId xmlns:a16="http://schemas.microsoft.com/office/drawing/2014/main" id="{930C8B83-2624-5E0D-0F27-CB7F38A33138}"/>
+                </a:ext>
+              </a:extLst>
+            </p:cNvPr>
+            <p:cNvCxnSpPr>
+              <a:cxnSpLocks/>
+              <a:stCxn id="32" idx="2"/>
+              <a:endCxn id="39" idx="6"/>
+            </p:cNvCxnSpPr>
+            <p:nvPr/>
+          </p:nvCxnSpPr>
+          <p:spPr>
+            <a:xfrm rot="5400000">
+              <a:off x="7498199" y="3485536"/>
+              <a:ext cx="480647" cy="432989"/>
+            </a:xfrm>
+            <a:prstGeom prst="curvedConnector2">
+              <a:avLst/>
+            </a:prstGeom>
+            <a:ln w="25400">
+              <a:solidFill>
+                <a:schemeClr val="tx1"/>
+              </a:solidFill>
+              <a:tailEnd type="triangle"/>
+            </a:ln>
+          </p:spPr>
+          <p:style>
+            <a:lnRef idx="2">
+              <a:schemeClr val="accent1"/>
+            </a:lnRef>
+            <a:fillRef idx="0">
+              <a:schemeClr val="accent1"/>
+            </a:fillRef>
+            <a:effectRef idx="1">
+              <a:schemeClr val="accent1"/>
+            </a:effectRef>
+            <a:fontRef idx="minor">
+              <a:schemeClr val="tx1"/>
+            </a:fontRef>
+          </p:style>
+        </p:cxnSp>
+        <p:sp>
+          <p:nvSpPr>
+            <p:cNvPr id="43" name="三角形 42">
+              <a:extLst>
+                <a:ext uri="{FF2B5EF4-FFF2-40B4-BE49-F238E27FC236}">
+                  <a16:creationId xmlns:a16="http://schemas.microsoft.com/office/drawing/2014/main" id="{A881211C-C6A3-47F0-D0D7-559989855049}"/>
+                </a:ext>
+              </a:extLst>
+            </p:cNvPr>
+            <p:cNvSpPr/>
+            <p:nvPr/>
+          </p:nvSpPr>
+          <p:spPr>
+            <a:xfrm>
+              <a:off x="2414473" y="4530081"/>
+              <a:ext cx="1057877" cy="463693"/>
+            </a:xfrm>
+            <a:prstGeom prst="triangle">
+              <a:avLst>
+                <a:gd name="adj" fmla="val 0"/>
+              </a:avLst>
+            </a:prstGeom>
+            <a:noFill/>
+            <a:ln w="38100">
+              <a:solidFill>
+                <a:srgbClr val="FF0000"/>
+              </a:solidFill>
+            </a:ln>
+          </p:spPr>
+          <p:style>
+            <a:lnRef idx="2">
+              <a:schemeClr val="accent1">
+                <a:shade val="15000"/>
+              </a:schemeClr>
+            </a:lnRef>
+            <a:fillRef idx="1">
+              <a:schemeClr val="accent1"/>
+            </a:fillRef>
+            <a:effectRef idx="0">
+              <a:schemeClr val="accent1"/>
+            </a:effectRef>
+            <a:fontRef idx="minor">
+              <a:schemeClr val="lt1"/>
+            </a:fontRef>
+          </p:style>
+          <p:txBody>
+            <a:bodyPr rtlCol="0" anchor="ctr"/>
+            <a:lstStyle/>
+            <a:p>
+              <a:pPr algn="ctr"/>
+              <a:endParaRPr kumimoji="1" lang="ja-JP" altLang="en-US">
+                <a:solidFill>
+                  <a:schemeClr val="tx1"/>
+                </a:solidFill>
+              </a:endParaRPr>
+            </a:p>
+          </p:txBody>
+        </p:sp>
+        <p:sp>
+          <p:nvSpPr>
+            <p:cNvPr id="44" name="テキスト ボックス 43">
+              <a:extLst>
+                <a:ext uri="{FF2B5EF4-FFF2-40B4-BE49-F238E27FC236}">
+                  <a16:creationId xmlns:a16="http://schemas.microsoft.com/office/drawing/2014/main" id="{9E989B04-3AF1-42EA-4DBE-0CF8A8C1C587}"/>
+                </a:ext>
+              </a:extLst>
+            </p:cNvPr>
+            <p:cNvSpPr txBox="1"/>
+            <p:nvPr/>
+          </p:nvSpPr>
+          <p:spPr>
+            <a:xfrm>
+              <a:off x="2301411" y="5024320"/>
+              <a:ext cx="2274982" cy="646331"/>
+            </a:xfrm>
+            <a:prstGeom prst="rect">
+              <a:avLst/>
+            </a:prstGeom>
+            <a:noFill/>
+          </p:spPr>
+          <p:txBody>
+            <a:bodyPr wrap="none" rtlCol="0">
+              <a:spAutoFit/>
+            </a:bodyPr>
+            <a:lstStyle/>
+            <a:p>
+              <a:r>
+                <a:rPr kumimoji="1" lang="ja-JP" altLang="en-US" b="1">
+                  <a:solidFill>
+                    <a:srgbClr val="FF0000"/>
+                  </a:solidFill>
+                </a:rPr>
+                <a:t>傾き：</a:t>
+              </a:r>
+              <a:r>
+                <a:rPr kumimoji="1" lang="en-US" altLang="ja-JP" b="1" dirty="0">
+                  <a:solidFill>
+                    <a:srgbClr val="FF0000"/>
+                  </a:solidFill>
+                </a:rPr>
+                <a:t>0.5</a:t>
+              </a:r>
+            </a:p>
+            <a:p>
+              <a:r>
+                <a:rPr lang="en-US" altLang="ja-JP" b="1" dirty="0">
+                  <a:solidFill>
+                    <a:srgbClr val="FF0000"/>
+                  </a:solidFill>
+                </a:rPr>
+                <a:t>(=</a:t>
+              </a:r>
+              <a:r>
+                <a:rPr lang="ja-JP" altLang="en-US" b="1">
+                  <a:solidFill>
+                    <a:srgbClr val="FF0000"/>
+                  </a:solidFill>
+                </a:rPr>
+                <a:t>貿易前相対価格）</a:t>
+              </a:r>
+              <a:endParaRPr kumimoji="1" lang="ja-JP" altLang="en-US" b="1">
+                <a:solidFill>
+                  <a:srgbClr val="FF0000"/>
+                </a:solidFill>
+              </a:endParaRPr>
+            </a:p>
+          </p:txBody>
+        </p:sp>
+        <p:sp>
+          <p:nvSpPr>
+            <p:cNvPr id="45" name="三角形 44">
+              <a:extLst>
+                <a:ext uri="{FF2B5EF4-FFF2-40B4-BE49-F238E27FC236}">
+                  <a16:creationId xmlns:a16="http://schemas.microsoft.com/office/drawing/2014/main" id="{17A8A3F7-DE01-3950-259C-BD0C91A36B69}"/>
+                </a:ext>
+              </a:extLst>
+            </p:cNvPr>
+            <p:cNvSpPr/>
+            <p:nvPr/>
+          </p:nvSpPr>
+          <p:spPr>
+            <a:xfrm>
+              <a:off x="7524884" y="4177216"/>
+              <a:ext cx="599776" cy="913924"/>
+            </a:xfrm>
+            <a:prstGeom prst="triangle">
+              <a:avLst>
+                <a:gd name="adj" fmla="val 0"/>
+              </a:avLst>
+            </a:prstGeom>
+            <a:noFill/>
+            <a:ln w="38100">
+              <a:solidFill>
+                <a:srgbClr val="FF0000"/>
+              </a:solidFill>
+            </a:ln>
+          </p:spPr>
+          <p:style>
+            <a:lnRef idx="2">
+              <a:schemeClr val="accent1">
+                <a:shade val="15000"/>
+              </a:schemeClr>
+            </a:lnRef>
+            <a:fillRef idx="1">
+              <a:schemeClr val="accent1"/>
+            </a:fillRef>
+            <a:effectRef idx="0">
+              <a:schemeClr val="accent1"/>
+            </a:effectRef>
+            <a:fontRef idx="minor">
+              <a:schemeClr val="lt1"/>
+            </a:fontRef>
+          </p:style>
+          <p:txBody>
+            <a:bodyPr rtlCol="0" anchor="ctr"/>
+            <a:lstStyle/>
+            <a:p>
+              <a:pPr algn="ctr"/>
+              <a:endParaRPr kumimoji="1" lang="ja-JP" altLang="en-US">
+                <a:solidFill>
+                  <a:schemeClr val="tx1"/>
+                </a:solidFill>
+              </a:endParaRPr>
+            </a:p>
+          </p:txBody>
+        </p:sp>
+        <p:sp>
+          <p:nvSpPr>
+            <p:cNvPr id="46" name="テキスト ボックス 45">
+              <a:extLst>
+                <a:ext uri="{FF2B5EF4-FFF2-40B4-BE49-F238E27FC236}">
+                  <a16:creationId xmlns:a16="http://schemas.microsoft.com/office/drawing/2014/main" id="{362A1B6C-6E35-1E14-051A-E82B70E85941}"/>
+                </a:ext>
+              </a:extLst>
+            </p:cNvPr>
+            <p:cNvSpPr txBox="1"/>
+            <p:nvPr/>
+          </p:nvSpPr>
+          <p:spPr>
+            <a:xfrm>
+              <a:off x="6807019" y="5111317"/>
+              <a:ext cx="2593583" cy="646331"/>
+            </a:xfrm>
+            <a:prstGeom prst="rect">
+              <a:avLst/>
+            </a:prstGeom>
+            <a:noFill/>
+          </p:spPr>
+          <p:txBody>
+            <a:bodyPr wrap="square" rtlCol="0">
+              <a:spAutoFit/>
+            </a:bodyPr>
+            <a:lstStyle/>
+            <a:p>
+              <a:r>
+                <a:rPr kumimoji="1" lang="ja-JP" altLang="en-US" b="1">
+                  <a:solidFill>
+                    <a:srgbClr val="FF0000"/>
+                  </a:solidFill>
+                </a:rPr>
+                <a:t>傾き：</a:t>
+              </a:r>
+              <a:r>
+                <a:rPr kumimoji="1" lang="en-US" altLang="ja-JP" b="1" dirty="0">
+                  <a:solidFill>
+                    <a:srgbClr val="FF0000"/>
+                  </a:solidFill>
+                </a:rPr>
+                <a:t>2</a:t>
+              </a:r>
+            </a:p>
+            <a:p>
+              <a:r>
+                <a:rPr lang="ja-JP" altLang="en-US" b="1">
+                  <a:solidFill>
+                    <a:srgbClr val="FF0000"/>
+                  </a:solidFill>
+                </a:rPr>
+                <a:t>（＝貿易前相対価格）</a:t>
+              </a:r>
+              <a:endParaRPr kumimoji="1" lang="ja-JP" altLang="en-US" b="1">
+                <a:solidFill>
+                  <a:srgbClr val="FF0000"/>
+                </a:solidFill>
+              </a:endParaRPr>
+            </a:p>
+          </p:txBody>
+        </p:sp>
+      </p:grpSp>
+    </p:spTree>
+    <p:extLst>
+      <p:ext uri="{BB962C8B-B14F-4D97-AF65-F5344CB8AC3E}">
+        <p14:creationId xmlns:p14="http://schemas.microsoft.com/office/powerpoint/2010/main" val="2111424130"/>
+      </p:ext>
+    </p:extLst>
+  </p:cSld>
+  <p:clrMapOvr>
+    <a:masterClrMapping/>
+  </p:clrMapOvr>
+</p:sld>
+</file>
+
+<file path=ppt/slides/slide4.xml><?xml version="1.0" encoding="utf-8"?>
+<p:sld xmlns:a="http://schemas.openxmlformats.org/drawingml/2006/main" xmlns:r="http://schemas.openxmlformats.org/officeDocument/2006/relationships" xmlns:p="http://schemas.openxmlformats.org/presentationml/2006/main">
+  <p:cSld>
+    <p:spTree>
+      <p:nvGrpSpPr>
+        <p:cNvPr id="1" name="">
+          <a:extLst>
+            <a:ext uri="{FF2B5EF4-FFF2-40B4-BE49-F238E27FC236}">
+              <a16:creationId xmlns:a16="http://schemas.microsoft.com/office/drawing/2014/main" id="{CECB74BF-3907-F2DD-6C2C-AF95B719C2D7}"/>
+            </a:ext>
+          </a:extLst>
+        </p:cNvPr>
+        <p:cNvGrpSpPr/>
+        <p:nvPr/>
+      </p:nvGrpSpPr>
+      <p:grpSpPr>
+        <a:xfrm>
+          <a:off x="0" y="0"/>
+          <a:ext cx="0" cy="0"/>
+          <a:chOff x="0" y="0"/>
+          <a:chExt cx="0" cy="0"/>
+        </a:xfrm>
+      </p:grpSpPr>
+      <p:grpSp>
+        <p:nvGrpSpPr>
+          <p:cNvPr id="43" name="グループ化 42">
+            <a:extLst>
+              <a:ext uri="{FF2B5EF4-FFF2-40B4-BE49-F238E27FC236}">
+                <a16:creationId xmlns:a16="http://schemas.microsoft.com/office/drawing/2014/main" id="{8B510120-B4FE-1F2A-988A-0068534962F5}"/>
+              </a:ext>
+            </a:extLst>
+          </p:cNvPr>
+          <p:cNvGrpSpPr/>
+          <p:nvPr/>
+        </p:nvGrpSpPr>
+        <p:grpSpPr>
+          <a:xfrm>
+            <a:off x="193535" y="841016"/>
+            <a:ext cx="10892085" cy="5238489"/>
+            <a:chOff x="193535" y="841016"/>
+            <a:chExt cx="10892085" cy="5238489"/>
+          </a:xfrm>
+        </p:grpSpPr>
+        <p:cxnSp>
+          <p:nvCxnSpPr>
+            <p:cNvPr id="3" name="直線矢印コネクタ 2">
+              <a:extLst>
+                <a:ext uri="{FF2B5EF4-FFF2-40B4-BE49-F238E27FC236}">
+                  <a16:creationId xmlns:a16="http://schemas.microsoft.com/office/drawing/2014/main" id="{077B0307-75CE-1C1B-2F72-20779EB2D3D9}"/>
+                </a:ext>
+              </a:extLst>
+            </p:cNvPr>
+            <p:cNvCxnSpPr/>
+            <p:nvPr/>
+          </p:nvCxnSpPr>
+          <p:spPr>
+            <a:xfrm flipV="1">
+              <a:off x="1254398" y="854182"/>
+              <a:ext cx="0" cy="4824248"/>
+            </a:xfrm>
+            <a:prstGeom prst="straightConnector1">
+              <a:avLst/>
+            </a:prstGeom>
+            <a:ln w="22225">
+              <a:tailEnd type="triangle"/>
+            </a:ln>
+          </p:spPr>
+          <p:style>
+            <a:lnRef idx="2">
+              <a:schemeClr val="dk1"/>
+            </a:lnRef>
+            <a:fillRef idx="0">
+              <a:schemeClr val="dk1"/>
+            </a:fillRef>
+            <a:effectRef idx="1">
+              <a:schemeClr val="dk1"/>
+            </a:effectRef>
+            <a:fontRef idx="minor">
+              <a:schemeClr val="tx1"/>
+            </a:fontRef>
+          </p:style>
+        </p:cxnSp>
+        <p:cxnSp>
+          <p:nvCxnSpPr>
+            <p:cNvPr id="4" name="直線矢印コネクタ 3">
+              <a:extLst>
+                <a:ext uri="{FF2B5EF4-FFF2-40B4-BE49-F238E27FC236}">
+                  <a16:creationId xmlns:a16="http://schemas.microsoft.com/office/drawing/2014/main" id="{032ABDE1-AB73-D82A-9B8C-1EAF18567880}"/>
+                </a:ext>
+              </a:extLst>
+            </p:cNvPr>
+            <p:cNvCxnSpPr>
+              <a:cxnSpLocks/>
+            </p:cNvCxnSpPr>
+            <p:nvPr/>
+          </p:nvCxnSpPr>
+          <p:spPr>
+            <a:xfrm>
+              <a:off x="1254398" y="5678430"/>
+              <a:ext cx="4477407" cy="0"/>
+            </a:xfrm>
+            <a:prstGeom prst="straightConnector1">
+              <a:avLst/>
+            </a:prstGeom>
+            <a:ln w="22225">
+              <a:tailEnd type="triangle"/>
+            </a:ln>
+          </p:spPr>
+          <p:style>
+            <a:lnRef idx="2">
+              <a:schemeClr val="dk1"/>
+            </a:lnRef>
+            <a:fillRef idx="0">
+              <a:schemeClr val="dk1"/>
+            </a:fillRef>
+            <a:effectRef idx="1">
+              <a:schemeClr val="dk1"/>
+            </a:effectRef>
+            <a:fontRef idx="minor">
+              <a:schemeClr val="tx1"/>
+            </a:fontRef>
+          </p:style>
+        </p:cxnSp>
+        <p:sp>
+          <p:nvSpPr>
+            <p:cNvPr id="5" name="テキスト ボックス 4">
+              <a:extLst>
+                <a:ext uri="{FF2B5EF4-FFF2-40B4-BE49-F238E27FC236}">
+                  <a16:creationId xmlns:a16="http://schemas.microsoft.com/office/drawing/2014/main" id="{BF7F6DAC-CF86-FD0C-1939-08DC86B3333F}"/>
+                </a:ext>
+              </a:extLst>
+            </p:cNvPr>
+            <p:cNvSpPr txBox="1"/>
+            <p:nvPr/>
+          </p:nvSpPr>
+          <p:spPr>
+            <a:xfrm>
+              <a:off x="4212247" y="5678430"/>
+              <a:ext cx="1647685" cy="338554"/>
+            </a:xfrm>
+            <a:prstGeom prst="rect">
+              <a:avLst/>
+            </a:prstGeom>
+            <a:noFill/>
+          </p:spPr>
+          <p:txBody>
+            <a:bodyPr wrap="square" rtlCol="0">
+              <a:spAutoFit/>
+            </a:bodyPr>
+            <a:lstStyle/>
+            <a:p>
+              <a:r>
+                <a:rPr kumimoji="1" lang="ja-JP" altLang="en-US" sz="1600">
+                  <a:latin typeface="Hiragino Sans W4" panose="020B0400000000000000" pitchFamily="34" charset="-128"/>
+                  <a:ea typeface="Hiragino Sans W4" panose="020B0400000000000000" pitchFamily="34" charset="-128"/>
+                </a:rPr>
+                <a:t>車の生産量</a:t>
+              </a:r>
+              <a:r>
+                <a:rPr kumimoji="1" lang="en-US" altLang="ja-JP" sz="1600" dirty="0">
+                  <a:latin typeface="Hiragino Sans W4" panose="020B0400000000000000" pitchFamily="34" charset="-128"/>
+                  <a:ea typeface="Hiragino Sans W4" panose="020B0400000000000000" pitchFamily="34" charset="-128"/>
+                </a:rPr>
+                <a:t> (</a:t>
+              </a:r>
+              <a:r>
+                <a:rPr kumimoji="1" lang="ja-JP" altLang="en-US" sz="1600">
+                  <a:latin typeface="Hiragino Sans W4" panose="020B0400000000000000" pitchFamily="34" charset="-128"/>
+                  <a:ea typeface="Hiragino Sans W4" panose="020B0400000000000000" pitchFamily="34" charset="-128"/>
+                </a:rPr>
+                <a:t>台</a:t>
+              </a:r>
+              <a:r>
+                <a:rPr kumimoji="1" lang="en-US" altLang="ja-JP" sz="1600" dirty="0">
+                  <a:latin typeface="Hiragino Sans W4" panose="020B0400000000000000" pitchFamily="34" charset="-128"/>
+                  <a:ea typeface="Hiragino Sans W4" panose="020B0400000000000000" pitchFamily="34" charset="-128"/>
+                </a:rPr>
+                <a:t>)</a:t>
+              </a:r>
+              <a:endParaRPr kumimoji="1" lang="ja-JP" altLang="en-US" sz="1600">
+                <a:latin typeface="Hiragino Sans W4" panose="020B0400000000000000" pitchFamily="34" charset="-128"/>
+                <a:ea typeface="Hiragino Sans W4" panose="020B0400000000000000" pitchFamily="34" charset="-128"/>
+              </a:endParaRPr>
+            </a:p>
+          </p:txBody>
+        </p:sp>
+        <p:cxnSp>
+          <p:nvCxnSpPr>
+            <p:cNvPr id="6" name="直線コネクタ 5">
+              <a:extLst>
+                <a:ext uri="{FF2B5EF4-FFF2-40B4-BE49-F238E27FC236}">
+                  <a16:creationId xmlns:a16="http://schemas.microsoft.com/office/drawing/2014/main" id="{EFCD4649-70D8-B095-96ED-C0A64F4F3F44}"/>
+                </a:ext>
+              </a:extLst>
+            </p:cNvPr>
+            <p:cNvCxnSpPr/>
+            <p:nvPr/>
+          </p:nvCxnSpPr>
+          <p:spPr>
+            <a:xfrm>
+              <a:off x="6500158" y="2522076"/>
+              <a:ext cx="2034022" cy="3156354"/>
+            </a:xfrm>
+            <a:prstGeom prst="line">
+              <a:avLst/>
+            </a:prstGeom>
+            <a:ln w="22225"/>
+          </p:spPr>
+          <p:style>
+            <a:lnRef idx="2">
+              <a:schemeClr val="dk1"/>
+            </a:lnRef>
+            <a:fillRef idx="0">
+              <a:schemeClr val="dk1"/>
+            </a:fillRef>
+            <a:effectRef idx="1">
+              <a:schemeClr val="dk1"/>
+            </a:effectRef>
+            <a:fontRef idx="minor">
+              <a:schemeClr val="tx1"/>
+            </a:fontRef>
+          </p:style>
+        </p:cxnSp>
+        <p:sp>
+          <p:nvSpPr>
+            <p:cNvPr id="7" name="テキスト ボックス 6">
+              <a:extLst>
+                <a:ext uri="{FF2B5EF4-FFF2-40B4-BE49-F238E27FC236}">
+                  <a16:creationId xmlns:a16="http://schemas.microsoft.com/office/drawing/2014/main" id="{84667061-22E7-0293-719B-ABBAB19060F4}"/>
+                </a:ext>
+              </a:extLst>
+            </p:cNvPr>
+            <p:cNvSpPr txBox="1"/>
+            <p:nvPr/>
+          </p:nvSpPr>
+          <p:spPr>
+            <a:xfrm>
+              <a:off x="5400383" y="2399929"/>
+              <a:ext cx="1111202" cy="369332"/>
+            </a:xfrm>
+            <a:prstGeom prst="rect">
+              <a:avLst/>
+            </a:prstGeom>
+            <a:noFill/>
+          </p:spPr>
+          <p:txBody>
+            <a:bodyPr wrap="none" rtlCol="0">
+              <a:spAutoFit/>
+            </a:bodyPr>
+            <a:lstStyle/>
+            <a:p>
+              <a:r>
+                <a:rPr kumimoji="1" lang="en-US" altLang="ja-JP" dirty="0">
+                  <a:latin typeface="Hiragino Sans W4" panose="020B0400000000000000" pitchFamily="34" charset="-128"/>
+                  <a:ea typeface="Hiragino Sans W4" panose="020B0400000000000000" pitchFamily="34" charset="-128"/>
+                </a:rPr>
+                <a:t>(0, 700)</a:t>
+              </a:r>
+              <a:endParaRPr kumimoji="1" lang="ja-JP" altLang="en-US">
+                <a:latin typeface="Hiragino Sans W4" panose="020B0400000000000000" pitchFamily="34" charset="-128"/>
+                <a:ea typeface="Hiragino Sans W4" panose="020B0400000000000000" pitchFamily="34" charset="-128"/>
+              </a:endParaRPr>
+            </a:p>
+          </p:txBody>
+        </p:sp>
+        <p:sp>
+          <p:nvSpPr>
+            <p:cNvPr id="8" name="テキスト ボックス 7">
+              <a:extLst>
+                <a:ext uri="{FF2B5EF4-FFF2-40B4-BE49-F238E27FC236}">
+                  <a16:creationId xmlns:a16="http://schemas.microsoft.com/office/drawing/2014/main" id="{CC50E83B-B474-DD90-A6BE-DD1F15D03F13}"/>
+                </a:ext>
+              </a:extLst>
+            </p:cNvPr>
+            <p:cNvSpPr txBox="1"/>
+            <p:nvPr/>
+          </p:nvSpPr>
+          <p:spPr>
+            <a:xfrm>
+              <a:off x="7955016" y="5710173"/>
+              <a:ext cx="1111202" cy="369332"/>
+            </a:xfrm>
+            <a:prstGeom prst="rect">
+              <a:avLst/>
+            </a:prstGeom>
+            <a:noFill/>
+          </p:spPr>
+          <p:txBody>
+            <a:bodyPr wrap="none" rtlCol="0">
+              <a:spAutoFit/>
+            </a:bodyPr>
+            <a:lstStyle/>
+            <a:p>
+              <a:r>
+                <a:rPr kumimoji="1" lang="en-US" altLang="ja-JP" dirty="0">
+                  <a:latin typeface="Hiragino Sans W4" panose="020B0400000000000000" pitchFamily="34" charset="-128"/>
+                  <a:ea typeface="Hiragino Sans W4" panose="020B0400000000000000" pitchFamily="34" charset="-128"/>
+                </a:rPr>
+                <a:t>(350, 0)</a:t>
+              </a:r>
+              <a:endParaRPr kumimoji="1" lang="ja-JP" altLang="en-US">
+                <a:latin typeface="Hiragino Sans W4" panose="020B0400000000000000" pitchFamily="34" charset="-128"/>
+                <a:ea typeface="Hiragino Sans W4" panose="020B0400000000000000" pitchFamily="34" charset="-128"/>
+              </a:endParaRPr>
+            </a:p>
+          </p:txBody>
+        </p:sp>
+        <p:cxnSp>
+          <p:nvCxnSpPr>
+            <p:cNvPr id="9" name="直線矢印コネクタ 8">
+              <a:extLst>
+                <a:ext uri="{FF2B5EF4-FFF2-40B4-BE49-F238E27FC236}">
+                  <a16:creationId xmlns:a16="http://schemas.microsoft.com/office/drawing/2014/main" id="{67A23711-0A72-7E2E-97DC-9C2BDF0DE069}"/>
+                </a:ext>
+              </a:extLst>
+            </p:cNvPr>
+            <p:cNvCxnSpPr/>
+            <p:nvPr/>
+          </p:nvCxnSpPr>
+          <p:spPr>
+            <a:xfrm flipV="1">
+              <a:off x="6480087" y="854181"/>
+              <a:ext cx="0" cy="4824248"/>
+            </a:xfrm>
+            <a:prstGeom prst="straightConnector1">
+              <a:avLst/>
+            </a:prstGeom>
+            <a:ln w="22225">
+              <a:tailEnd type="triangle"/>
+            </a:ln>
+          </p:spPr>
+          <p:style>
+            <a:lnRef idx="2">
+              <a:schemeClr val="dk1"/>
+            </a:lnRef>
+            <a:fillRef idx="0">
+              <a:schemeClr val="dk1"/>
+            </a:fillRef>
+            <a:effectRef idx="1">
+              <a:schemeClr val="dk1"/>
+            </a:effectRef>
+            <a:fontRef idx="minor">
+              <a:schemeClr val="tx1"/>
+            </a:fontRef>
+          </p:style>
+        </p:cxnSp>
+        <p:cxnSp>
+          <p:nvCxnSpPr>
+            <p:cNvPr id="10" name="直線矢印コネクタ 9">
+              <a:extLst>
+                <a:ext uri="{FF2B5EF4-FFF2-40B4-BE49-F238E27FC236}">
+                  <a16:creationId xmlns:a16="http://schemas.microsoft.com/office/drawing/2014/main" id="{8C07DF7D-A4AC-281D-30F4-33A8D32670FE}"/>
+                </a:ext>
+              </a:extLst>
+            </p:cNvPr>
+            <p:cNvCxnSpPr>
+              <a:cxnSpLocks/>
+            </p:cNvCxnSpPr>
+            <p:nvPr/>
+          </p:nvCxnSpPr>
+          <p:spPr>
+            <a:xfrm>
+              <a:off x="6480087" y="5678429"/>
+              <a:ext cx="4477407" cy="0"/>
+            </a:xfrm>
+            <a:prstGeom prst="straightConnector1">
+              <a:avLst/>
+            </a:prstGeom>
+            <a:ln w="22225">
+              <a:tailEnd type="triangle"/>
+            </a:ln>
+          </p:spPr>
+          <p:style>
+            <a:lnRef idx="2">
+              <a:schemeClr val="dk1"/>
+            </a:lnRef>
+            <a:fillRef idx="0">
+              <a:schemeClr val="dk1"/>
+            </a:fillRef>
+            <a:effectRef idx="1">
+              <a:schemeClr val="dk1"/>
+            </a:effectRef>
+            <a:fontRef idx="minor">
+              <a:schemeClr val="tx1"/>
+            </a:fontRef>
+          </p:style>
+        </p:cxnSp>
+        <p:sp>
+          <p:nvSpPr>
+            <p:cNvPr id="11" name="テキスト ボックス 10">
+              <a:extLst>
+                <a:ext uri="{FF2B5EF4-FFF2-40B4-BE49-F238E27FC236}">
+                  <a16:creationId xmlns:a16="http://schemas.microsoft.com/office/drawing/2014/main" id="{62F53491-50C3-B63A-4C95-A258016341D7}"/>
+                </a:ext>
+              </a:extLst>
+            </p:cNvPr>
+            <p:cNvSpPr txBox="1"/>
+            <p:nvPr/>
+          </p:nvSpPr>
+          <p:spPr>
+            <a:xfrm>
+              <a:off x="2163443" y="884958"/>
+              <a:ext cx="1903085" cy="400110"/>
+            </a:xfrm>
+            <a:prstGeom prst="rect">
+              <a:avLst/>
+            </a:prstGeom>
+            <a:noFill/>
+          </p:spPr>
+          <p:txBody>
+            <a:bodyPr wrap="none" rtlCol="0">
+              <a:spAutoFit/>
+            </a:bodyPr>
+            <a:lstStyle/>
+            <a:p>
+              <a:r>
+                <a:rPr kumimoji="1" lang="ja-JP" altLang="en-US" sz="2000">
+                  <a:latin typeface="Hiragino Sans W4" panose="020B0400000000000000" pitchFamily="34" charset="-128"/>
+                  <a:ea typeface="Hiragino Sans W4" panose="020B0400000000000000" pitchFamily="34" charset="-128"/>
+                </a:rPr>
+                <a:t>労働力</a:t>
+              </a:r>
+              <a:r>
+                <a:rPr kumimoji="1" lang="en-US" altLang="ja-JP" sz="2000" dirty="0">
+                  <a:latin typeface="Hiragino Sans W4" panose="020B0400000000000000" pitchFamily="34" charset="-128"/>
+                  <a:ea typeface="Hiragino Sans W4" panose="020B0400000000000000" pitchFamily="34" charset="-128"/>
+                </a:rPr>
+                <a:t>1400</a:t>
+              </a:r>
+              <a:r>
+                <a:rPr kumimoji="1" lang="ja-JP" altLang="en-US" sz="2000">
+                  <a:latin typeface="Hiragino Sans W4" panose="020B0400000000000000" pitchFamily="34" charset="-128"/>
+                  <a:ea typeface="Hiragino Sans W4" panose="020B0400000000000000" pitchFamily="34" charset="-128"/>
+                </a:rPr>
+                <a:t>人</a:t>
+              </a:r>
+              <a:endParaRPr kumimoji="1" lang="en-US" altLang="ja-JP" sz="1400" dirty="0">
+                <a:latin typeface="Hiragino Sans W4" panose="020B0400000000000000" pitchFamily="34" charset="-128"/>
+                <a:ea typeface="Hiragino Sans W4" panose="020B0400000000000000" pitchFamily="34" charset="-128"/>
+              </a:endParaRPr>
+            </a:p>
+          </p:txBody>
+        </p:sp>
+        <p:sp>
+          <p:nvSpPr>
+            <p:cNvPr id="12" name="テキスト ボックス 11">
+              <a:extLst>
+                <a:ext uri="{FF2B5EF4-FFF2-40B4-BE49-F238E27FC236}">
+                  <a16:creationId xmlns:a16="http://schemas.microsoft.com/office/drawing/2014/main" id="{5D2C8C10-E092-F0A4-F9BD-A18B972FB6BB}"/>
+                </a:ext>
+              </a:extLst>
+            </p:cNvPr>
+            <p:cNvSpPr txBox="1"/>
+            <p:nvPr/>
+          </p:nvSpPr>
+          <p:spPr>
+            <a:xfrm>
+              <a:off x="4911414" y="5288467"/>
+              <a:ext cx="1111202" cy="369332"/>
+            </a:xfrm>
+            <a:prstGeom prst="rect">
+              <a:avLst/>
+            </a:prstGeom>
+            <a:noFill/>
+          </p:spPr>
+          <p:txBody>
+            <a:bodyPr wrap="none" rtlCol="0">
+              <a:spAutoFit/>
+            </a:bodyPr>
+            <a:lstStyle/>
+            <a:p>
+              <a:r>
+                <a:rPr kumimoji="1" lang="en-US" altLang="ja-JP" dirty="0">
+                  <a:latin typeface="Hiragino Sans W4" panose="020B0400000000000000" pitchFamily="34" charset="-128"/>
+                  <a:ea typeface="Hiragino Sans W4" panose="020B0400000000000000" pitchFamily="34" charset="-128"/>
+                </a:rPr>
+                <a:t>(700, 0)</a:t>
+              </a:r>
+              <a:endParaRPr kumimoji="1" lang="ja-JP" altLang="en-US">
+                <a:latin typeface="Hiragino Sans W4" panose="020B0400000000000000" pitchFamily="34" charset="-128"/>
+                <a:ea typeface="Hiragino Sans W4" panose="020B0400000000000000" pitchFamily="34" charset="-128"/>
+              </a:endParaRPr>
+            </a:p>
+          </p:txBody>
+        </p:sp>
+        <p:sp>
+          <p:nvSpPr>
+            <p:cNvPr id="13" name="テキスト ボックス 12">
+              <a:extLst>
+                <a:ext uri="{FF2B5EF4-FFF2-40B4-BE49-F238E27FC236}">
+                  <a16:creationId xmlns:a16="http://schemas.microsoft.com/office/drawing/2014/main" id="{EECD6C4B-63E1-57CF-CBE8-1FF5EDE7FD03}"/>
+                </a:ext>
+              </a:extLst>
+            </p:cNvPr>
+            <p:cNvSpPr txBox="1"/>
+            <p:nvPr/>
+          </p:nvSpPr>
+          <p:spPr>
+            <a:xfrm>
+              <a:off x="800992" y="845404"/>
+              <a:ext cx="461665" cy="1522781"/>
+            </a:xfrm>
+            <a:prstGeom prst="rect">
+              <a:avLst/>
+            </a:prstGeom>
+            <a:noFill/>
+          </p:spPr>
+          <p:txBody>
+            <a:bodyPr vert="eaVert" wrap="square" rtlCol="0">
+              <a:spAutoFit/>
+            </a:bodyPr>
+            <a:lstStyle/>
+            <a:p>
+              <a:r>
+                <a:rPr lang="ja-JP" altLang="en-US">
+                  <a:latin typeface="Hiragino Sans W4" panose="020B0400000000000000" pitchFamily="34" charset="-128"/>
+                  <a:ea typeface="Hiragino Sans W4" panose="020B0400000000000000" pitchFamily="34" charset="-128"/>
+                </a:rPr>
+                <a:t>米の生産量</a:t>
+              </a:r>
+              <a:r>
+                <a:rPr lang="en-US" altLang="ja-JP" dirty="0">
+                  <a:latin typeface="Hiragino Sans W4" panose="020B0400000000000000" pitchFamily="34" charset="-128"/>
+                  <a:ea typeface="Hiragino Sans W4" panose="020B0400000000000000" pitchFamily="34" charset="-128"/>
+                </a:rPr>
+                <a:t>(t)</a:t>
+              </a:r>
+              <a:endParaRPr kumimoji="1" lang="ja-JP" altLang="en-US">
+                <a:latin typeface="Hiragino Sans W4" panose="020B0400000000000000" pitchFamily="34" charset="-128"/>
+                <a:ea typeface="Hiragino Sans W4" panose="020B0400000000000000" pitchFamily="34" charset="-128"/>
+              </a:endParaRPr>
+            </a:p>
+          </p:txBody>
+        </p:sp>
+        <p:sp>
+          <p:nvSpPr>
+            <p:cNvPr id="14" name="テキスト ボックス 13">
+              <a:extLst>
+                <a:ext uri="{FF2B5EF4-FFF2-40B4-BE49-F238E27FC236}">
+                  <a16:creationId xmlns:a16="http://schemas.microsoft.com/office/drawing/2014/main" id="{EF7178D6-DB52-8D5F-40E9-5E5D91920E47}"/>
+                </a:ext>
+              </a:extLst>
+            </p:cNvPr>
+            <p:cNvSpPr txBox="1"/>
+            <p:nvPr/>
+          </p:nvSpPr>
+          <p:spPr>
+            <a:xfrm>
+              <a:off x="6018422" y="841016"/>
+              <a:ext cx="461665" cy="1522781"/>
+            </a:xfrm>
+            <a:prstGeom prst="rect">
+              <a:avLst/>
+            </a:prstGeom>
+            <a:noFill/>
+          </p:spPr>
+          <p:txBody>
+            <a:bodyPr vert="eaVert" wrap="square" rtlCol="0">
+              <a:spAutoFit/>
+            </a:bodyPr>
+            <a:lstStyle/>
+            <a:p>
+              <a:r>
+                <a:rPr lang="ja-JP" altLang="en-US">
+                  <a:latin typeface="Hiragino Sans W4" panose="020B0400000000000000" pitchFamily="34" charset="-128"/>
+                  <a:ea typeface="Hiragino Sans W4" panose="020B0400000000000000" pitchFamily="34" charset="-128"/>
+                </a:rPr>
+                <a:t>米の生産量</a:t>
+              </a:r>
+              <a:r>
+                <a:rPr lang="en-US" altLang="ja-JP" dirty="0">
+                  <a:latin typeface="Hiragino Sans W4" panose="020B0400000000000000" pitchFamily="34" charset="-128"/>
+                  <a:ea typeface="Hiragino Sans W4" panose="020B0400000000000000" pitchFamily="34" charset="-128"/>
+                </a:rPr>
+                <a:t>(t)</a:t>
+              </a:r>
+              <a:endParaRPr kumimoji="1" lang="ja-JP" altLang="en-US">
+                <a:latin typeface="Hiragino Sans W4" panose="020B0400000000000000" pitchFamily="34" charset="-128"/>
+                <a:ea typeface="Hiragino Sans W4" panose="020B0400000000000000" pitchFamily="34" charset="-128"/>
+              </a:endParaRPr>
+            </a:p>
+          </p:txBody>
+        </p:sp>
+        <p:sp>
+          <p:nvSpPr>
+            <p:cNvPr id="15" name="テキスト ボックス 14">
+              <a:extLst>
+                <a:ext uri="{FF2B5EF4-FFF2-40B4-BE49-F238E27FC236}">
+                  <a16:creationId xmlns:a16="http://schemas.microsoft.com/office/drawing/2014/main" id="{1C1777C6-D066-6B2E-4361-C0E6466995B2}"/>
+                </a:ext>
+              </a:extLst>
+            </p:cNvPr>
+            <p:cNvSpPr txBox="1"/>
+            <p:nvPr/>
+          </p:nvSpPr>
+          <p:spPr>
+            <a:xfrm>
+              <a:off x="9368711" y="5678430"/>
+              <a:ext cx="1716909" cy="338554"/>
+            </a:xfrm>
+            <a:prstGeom prst="rect">
+              <a:avLst/>
+            </a:prstGeom>
+            <a:noFill/>
+          </p:spPr>
+          <p:txBody>
+            <a:bodyPr wrap="square" rtlCol="0">
+              <a:spAutoFit/>
+            </a:bodyPr>
+            <a:lstStyle/>
+            <a:p>
+              <a:r>
+                <a:rPr kumimoji="1" lang="ja-JP" altLang="en-US" sz="1600">
+                  <a:latin typeface="Hiragino Sans W4" panose="020B0400000000000000" pitchFamily="34" charset="-128"/>
+                  <a:ea typeface="Hiragino Sans W4" panose="020B0400000000000000" pitchFamily="34" charset="-128"/>
+                </a:rPr>
+                <a:t>車の生産量</a:t>
+              </a:r>
+              <a:r>
+                <a:rPr kumimoji="1" lang="en-US" altLang="ja-JP" sz="1600" dirty="0">
+                  <a:latin typeface="Hiragino Sans W4" panose="020B0400000000000000" pitchFamily="34" charset="-128"/>
+                  <a:ea typeface="Hiragino Sans W4" panose="020B0400000000000000" pitchFamily="34" charset="-128"/>
+                </a:rPr>
+                <a:t> (</a:t>
+              </a:r>
+              <a:r>
+                <a:rPr kumimoji="1" lang="ja-JP" altLang="en-US" sz="1600">
+                  <a:latin typeface="Hiragino Sans W4" panose="020B0400000000000000" pitchFamily="34" charset="-128"/>
+                  <a:ea typeface="Hiragino Sans W4" panose="020B0400000000000000" pitchFamily="34" charset="-128"/>
+                </a:rPr>
+                <a:t>台</a:t>
+              </a:r>
+              <a:r>
+                <a:rPr kumimoji="1" lang="en-US" altLang="ja-JP" sz="1600" dirty="0">
+                  <a:latin typeface="Hiragino Sans W4" panose="020B0400000000000000" pitchFamily="34" charset="-128"/>
+                  <a:ea typeface="Hiragino Sans W4" panose="020B0400000000000000" pitchFamily="34" charset="-128"/>
+                </a:rPr>
+                <a:t>)</a:t>
+              </a:r>
+              <a:endParaRPr kumimoji="1" lang="ja-JP" altLang="en-US" sz="1600">
+                <a:latin typeface="Hiragino Sans W4" panose="020B0400000000000000" pitchFamily="34" charset="-128"/>
+                <a:ea typeface="Hiragino Sans W4" panose="020B0400000000000000" pitchFamily="34" charset="-128"/>
+              </a:endParaRPr>
+            </a:p>
+          </p:txBody>
+        </p:sp>
+        <p:sp>
+          <p:nvSpPr>
+            <p:cNvPr id="16" name="テキスト ボックス 15">
+              <a:extLst>
+                <a:ext uri="{FF2B5EF4-FFF2-40B4-BE49-F238E27FC236}">
+                  <a16:creationId xmlns:a16="http://schemas.microsoft.com/office/drawing/2014/main" id="{F1F40E8B-E603-DDB8-0A32-0EBCC64B5402}"/>
+                </a:ext>
+              </a:extLst>
+            </p:cNvPr>
+            <p:cNvSpPr txBox="1"/>
+            <p:nvPr/>
+          </p:nvSpPr>
+          <p:spPr>
+            <a:xfrm>
+              <a:off x="1323969" y="854181"/>
+              <a:ext cx="800219" cy="461665"/>
+            </a:xfrm>
+            <a:prstGeom prst="rect">
+              <a:avLst/>
+            </a:prstGeom>
+            <a:solidFill>
+              <a:schemeClr val="bg1"/>
+            </a:solidFill>
+            <a:ln>
+              <a:solidFill>
+                <a:schemeClr val="tx1"/>
+              </a:solidFill>
+            </a:ln>
+          </p:spPr>
+          <p:txBody>
+            <a:bodyPr wrap="none" rtlCol="0">
+              <a:spAutoFit/>
+            </a:bodyPr>
+            <a:lstStyle/>
+            <a:p>
+              <a:pPr algn="ctr"/>
+              <a:r>
+                <a:rPr kumimoji="1" lang="ja-JP" altLang="en-US" sz="2400" b="1"/>
+                <a:t>日本</a:t>
+              </a:r>
+            </a:p>
+          </p:txBody>
+        </p:sp>
+        <p:sp>
+          <p:nvSpPr>
+            <p:cNvPr id="17" name="テキスト ボックス 16">
+              <a:extLst>
+                <a:ext uri="{FF2B5EF4-FFF2-40B4-BE49-F238E27FC236}">
+                  <a16:creationId xmlns:a16="http://schemas.microsoft.com/office/drawing/2014/main" id="{E04A5367-C1BA-DACC-2286-AE785351BDAC}"/>
+                </a:ext>
+              </a:extLst>
+            </p:cNvPr>
+            <p:cNvSpPr txBox="1"/>
+            <p:nvPr/>
+          </p:nvSpPr>
+          <p:spPr>
+            <a:xfrm>
+              <a:off x="6566861" y="854181"/>
+              <a:ext cx="800219" cy="461665"/>
+            </a:xfrm>
+            <a:prstGeom prst="rect">
+              <a:avLst/>
+            </a:prstGeom>
+            <a:solidFill>
+              <a:schemeClr val="bg1"/>
+            </a:solidFill>
+            <a:ln>
+              <a:solidFill>
+                <a:schemeClr val="tx1"/>
+              </a:solidFill>
+            </a:ln>
+          </p:spPr>
+          <p:txBody>
+            <a:bodyPr wrap="none" rtlCol="0">
+              <a:spAutoFit/>
+            </a:bodyPr>
+            <a:lstStyle/>
+            <a:p>
+              <a:pPr algn="ctr"/>
+              <a:r>
+                <a:rPr kumimoji="1" lang="ja-JP" altLang="en-US" sz="2400" b="1"/>
+                <a:t>中国</a:t>
+              </a:r>
+            </a:p>
+          </p:txBody>
+        </p:sp>
+        <p:cxnSp>
+          <p:nvCxnSpPr>
+            <p:cNvPr id="22" name="直線コネクタ 21">
+              <a:extLst>
+                <a:ext uri="{FF2B5EF4-FFF2-40B4-BE49-F238E27FC236}">
+                  <a16:creationId xmlns:a16="http://schemas.microsoft.com/office/drawing/2014/main" id="{C225DD86-0EDE-3135-9402-5FED825DB29F}"/>
+                </a:ext>
+              </a:extLst>
+            </p:cNvPr>
+            <p:cNvCxnSpPr>
+              <a:cxnSpLocks/>
+            </p:cNvCxnSpPr>
+            <p:nvPr/>
+          </p:nvCxnSpPr>
+          <p:spPr>
+            <a:xfrm>
+              <a:off x="1241418" y="3987416"/>
+              <a:ext cx="3834319" cy="1685772"/>
+            </a:xfrm>
+            <a:prstGeom prst="line">
+              <a:avLst/>
+            </a:prstGeom>
+            <a:ln w="22225"/>
+          </p:spPr>
+          <p:style>
+            <a:lnRef idx="2">
+              <a:schemeClr val="dk1"/>
+            </a:lnRef>
+            <a:fillRef idx="0">
+              <a:schemeClr val="dk1"/>
+            </a:fillRef>
+            <a:effectRef idx="1">
+              <a:schemeClr val="dk1"/>
+            </a:effectRef>
+            <a:fontRef idx="minor">
+              <a:schemeClr val="tx1"/>
+            </a:fontRef>
+          </p:style>
+        </p:cxnSp>
+        <p:sp>
+          <p:nvSpPr>
+            <p:cNvPr id="27" name="テキスト ボックス 26">
+              <a:extLst>
+                <a:ext uri="{FF2B5EF4-FFF2-40B4-BE49-F238E27FC236}">
+                  <a16:creationId xmlns:a16="http://schemas.microsoft.com/office/drawing/2014/main" id="{8193ECC6-116F-443B-3850-0FA66ED79517}"/>
+                </a:ext>
+              </a:extLst>
+            </p:cNvPr>
+            <p:cNvSpPr txBox="1"/>
+            <p:nvPr/>
+          </p:nvSpPr>
+          <p:spPr>
+            <a:xfrm>
+              <a:off x="193535" y="3798361"/>
+              <a:ext cx="1111202" cy="369332"/>
+            </a:xfrm>
+            <a:prstGeom prst="rect">
+              <a:avLst/>
+            </a:prstGeom>
+            <a:noFill/>
+          </p:spPr>
+          <p:txBody>
+            <a:bodyPr wrap="none" rtlCol="0">
+              <a:spAutoFit/>
+            </a:bodyPr>
+            <a:lstStyle/>
+            <a:p>
+              <a:r>
+                <a:rPr kumimoji="1" lang="en-US" altLang="ja-JP" dirty="0">
+                  <a:latin typeface="Hiragino Sans W4" panose="020B0400000000000000" pitchFamily="34" charset="-128"/>
+                  <a:ea typeface="Hiragino Sans W4" panose="020B0400000000000000" pitchFamily="34" charset="-128"/>
+                </a:rPr>
+                <a:t>(0, 350)</a:t>
+              </a:r>
+            </a:p>
+          </p:txBody>
+        </p:sp>
+        <p:sp>
+          <p:nvSpPr>
+            <p:cNvPr id="28" name="テキスト ボックス 27">
+              <a:extLst>
+                <a:ext uri="{FF2B5EF4-FFF2-40B4-BE49-F238E27FC236}">
+                  <a16:creationId xmlns:a16="http://schemas.microsoft.com/office/drawing/2014/main" id="{8D84F631-9C5D-AC3C-A830-A3542905B862}"/>
+                </a:ext>
+              </a:extLst>
+            </p:cNvPr>
+            <p:cNvSpPr txBox="1"/>
+            <p:nvPr/>
+          </p:nvSpPr>
+          <p:spPr>
+            <a:xfrm>
+              <a:off x="7386346" y="894671"/>
+              <a:ext cx="1903085" cy="400110"/>
+            </a:xfrm>
+            <a:prstGeom prst="rect">
+              <a:avLst/>
+            </a:prstGeom>
+            <a:noFill/>
+          </p:spPr>
+          <p:txBody>
+            <a:bodyPr wrap="none" rtlCol="0">
+              <a:spAutoFit/>
+            </a:bodyPr>
+            <a:lstStyle/>
+            <a:p>
+              <a:r>
+                <a:rPr kumimoji="1" lang="ja-JP" altLang="en-US" sz="2000">
+                  <a:latin typeface="Hiragino Sans W4" panose="020B0400000000000000" pitchFamily="34" charset="-128"/>
+                  <a:ea typeface="Hiragino Sans W4" panose="020B0400000000000000" pitchFamily="34" charset="-128"/>
+                </a:rPr>
+                <a:t>労働力</a:t>
+              </a:r>
+              <a:r>
+                <a:rPr kumimoji="1" lang="en-US" altLang="ja-JP" sz="2000" dirty="0">
+                  <a:latin typeface="Hiragino Sans W4" panose="020B0400000000000000" pitchFamily="34" charset="-128"/>
+                  <a:ea typeface="Hiragino Sans W4" panose="020B0400000000000000" pitchFamily="34" charset="-128"/>
+                </a:rPr>
+                <a:t>3500</a:t>
+              </a:r>
+              <a:r>
+                <a:rPr kumimoji="1" lang="ja-JP" altLang="en-US" sz="2000">
+                  <a:latin typeface="Hiragino Sans W4" panose="020B0400000000000000" pitchFamily="34" charset="-128"/>
+                  <a:ea typeface="Hiragino Sans W4" panose="020B0400000000000000" pitchFamily="34" charset="-128"/>
+                </a:rPr>
+                <a:t>人</a:t>
+              </a:r>
+              <a:endParaRPr kumimoji="1" lang="en-US" altLang="ja-JP" sz="1400" dirty="0">
+                <a:latin typeface="Hiragino Sans W4" panose="020B0400000000000000" pitchFamily="34" charset="-128"/>
+                <a:ea typeface="Hiragino Sans W4" panose="020B0400000000000000" pitchFamily="34" charset="-128"/>
+              </a:endParaRPr>
+            </a:p>
+          </p:txBody>
+        </p:sp>
+        <p:cxnSp>
+          <p:nvCxnSpPr>
+            <p:cNvPr id="18" name="直線コネクタ 17">
+              <a:extLst>
+                <a:ext uri="{FF2B5EF4-FFF2-40B4-BE49-F238E27FC236}">
+                  <a16:creationId xmlns:a16="http://schemas.microsoft.com/office/drawing/2014/main" id="{91609CDF-92B2-F8C6-2D64-4F25BB4A4FA8}"/>
+                </a:ext>
+              </a:extLst>
+            </p:cNvPr>
+            <p:cNvCxnSpPr>
+              <a:cxnSpLocks/>
+            </p:cNvCxnSpPr>
+            <p:nvPr/>
+          </p:nvCxnSpPr>
+          <p:spPr>
+            <a:xfrm flipH="1" flipV="1">
+              <a:off x="6475597" y="2502618"/>
+              <a:ext cx="3334012" cy="3148577"/>
+            </a:xfrm>
+            <a:prstGeom prst="line">
+              <a:avLst/>
+            </a:prstGeom>
+            <a:ln w="38100">
+              <a:solidFill>
+                <a:srgbClr val="0070C0"/>
+              </a:solidFill>
+            </a:ln>
+          </p:spPr>
+          <p:style>
+            <a:lnRef idx="2">
+              <a:schemeClr val="accent1"/>
+            </a:lnRef>
+            <a:fillRef idx="0">
+              <a:schemeClr val="accent1"/>
+            </a:fillRef>
+            <a:effectRef idx="1">
+              <a:schemeClr val="accent1"/>
+            </a:effectRef>
+            <a:fontRef idx="minor">
+              <a:schemeClr val="tx1"/>
+            </a:fontRef>
+          </p:style>
+        </p:cxnSp>
+        <p:sp>
+          <p:nvSpPr>
+            <p:cNvPr id="20" name="三角形 19">
+              <a:extLst>
+                <a:ext uri="{FF2B5EF4-FFF2-40B4-BE49-F238E27FC236}">
+                  <a16:creationId xmlns:a16="http://schemas.microsoft.com/office/drawing/2014/main" id="{B206B8FC-EEC0-E0BC-E984-1E5C36BE065B}"/>
+                </a:ext>
+              </a:extLst>
+            </p:cNvPr>
+            <p:cNvSpPr/>
+            <p:nvPr/>
+          </p:nvSpPr>
+          <p:spPr>
+            <a:xfrm>
+              <a:off x="2585945" y="3325001"/>
+              <a:ext cx="774878" cy="727533"/>
+            </a:xfrm>
+            <a:prstGeom prst="triangle">
+              <a:avLst>
+                <a:gd name="adj" fmla="val 0"/>
+              </a:avLst>
+            </a:prstGeom>
+            <a:noFill/>
+            <a:ln w="38100">
+              <a:solidFill>
+                <a:srgbClr val="0070C0"/>
+              </a:solidFill>
+            </a:ln>
+          </p:spPr>
+          <p:style>
+            <a:lnRef idx="2">
+              <a:schemeClr val="accent1">
+                <a:shade val="15000"/>
+              </a:schemeClr>
+            </a:lnRef>
+            <a:fillRef idx="1">
+              <a:schemeClr val="accent1"/>
+            </a:fillRef>
+            <a:effectRef idx="0">
+              <a:schemeClr val="accent1"/>
+            </a:effectRef>
+            <a:fontRef idx="minor">
+              <a:schemeClr val="lt1"/>
+            </a:fontRef>
+          </p:style>
+          <p:txBody>
+            <a:bodyPr rtlCol="0" anchor="ctr"/>
+            <a:lstStyle/>
+            <a:p>
+              <a:pPr algn="ctr"/>
+              <a:endParaRPr kumimoji="1" lang="ja-JP" altLang="en-US">
+                <a:solidFill>
+                  <a:schemeClr val="tx1"/>
+                </a:solidFill>
+              </a:endParaRPr>
+            </a:p>
+          </p:txBody>
+        </p:sp>
+        <p:sp>
+          <p:nvSpPr>
+            <p:cNvPr id="21" name="三角形 20">
+              <a:extLst>
+                <a:ext uri="{FF2B5EF4-FFF2-40B4-BE49-F238E27FC236}">
+                  <a16:creationId xmlns:a16="http://schemas.microsoft.com/office/drawing/2014/main" id="{DC1D008B-E0C7-0343-6CD9-5FD1092726C1}"/>
+                </a:ext>
+              </a:extLst>
+            </p:cNvPr>
+            <p:cNvSpPr/>
+            <p:nvPr/>
+          </p:nvSpPr>
+          <p:spPr>
+            <a:xfrm>
+              <a:off x="7663762" y="3623742"/>
+              <a:ext cx="774878" cy="727533"/>
+            </a:xfrm>
+            <a:prstGeom prst="triangle">
+              <a:avLst>
+                <a:gd name="adj" fmla="val 0"/>
+              </a:avLst>
+            </a:prstGeom>
+            <a:noFill/>
+            <a:ln w="38100">
+              <a:solidFill>
+                <a:srgbClr val="0070C0"/>
+              </a:solidFill>
+            </a:ln>
+          </p:spPr>
+          <p:style>
+            <a:lnRef idx="2">
+              <a:schemeClr val="accent1">
+                <a:shade val="15000"/>
+              </a:schemeClr>
+            </a:lnRef>
+            <a:fillRef idx="1">
+              <a:schemeClr val="accent1"/>
+            </a:fillRef>
+            <a:effectRef idx="0">
+              <a:schemeClr val="accent1"/>
+            </a:effectRef>
+            <a:fontRef idx="minor">
+              <a:schemeClr val="lt1"/>
+            </a:fontRef>
+          </p:style>
+          <p:txBody>
+            <a:bodyPr rtlCol="0" anchor="ctr"/>
+            <a:lstStyle/>
+            <a:p>
+              <a:pPr algn="ctr"/>
+              <a:endParaRPr kumimoji="1" lang="ja-JP" altLang="en-US">
+                <a:solidFill>
+                  <a:schemeClr val="tx1"/>
+                </a:solidFill>
+              </a:endParaRPr>
+            </a:p>
+          </p:txBody>
+        </p:sp>
+        <p:sp>
+          <p:nvSpPr>
+            <p:cNvPr id="23" name="テキスト ボックス 22">
+              <a:extLst>
+                <a:ext uri="{FF2B5EF4-FFF2-40B4-BE49-F238E27FC236}">
+                  <a16:creationId xmlns:a16="http://schemas.microsoft.com/office/drawing/2014/main" id="{85398D44-C841-B18C-0DA0-7CC582C1F2D1}"/>
+                </a:ext>
+              </a:extLst>
+            </p:cNvPr>
+            <p:cNvSpPr txBox="1"/>
+            <p:nvPr/>
+          </p:nvSpPr>
+          <p:spPr>
+            <a:xfrm>
+              <a:off x="3776335" y="2765437"/>
+              <a:ext cx="2723823" cy="923330"/>
+            </a:xfrm>
+            <a:prstGeom prst="rect">
+              <a:avLst/>
+            </a:prstGeom>
+            <a:noFill/>
+          </p:spPr>
+          <p:txBody>
+            <a:bodyPr wrap="none" rtlCol="0">
+              <a:spAutoFit/>
+            </a:bodyPr>
+            <a:lstStyle/>
+            <a:p>
+              <a:r>
+                <a:rPr kumimoji="1" lang="ja-JP" altLang="en-US" b="1" u="sng">
+                  <a:solidFill>
+                    <a:srgbClr val="0070C0"/>
+                  </a:solidFill>
+                </a:rPr>
+                <a:t>消費可能性フロンティア</a:t>
+              </a:r>
+              <a:endParaRPr kumimoji="1" lang="en-US" altLang="ja-JP" b="1" u="sng" dirty="0">
+                <a:solidFill>
+                  <a:srgbClr val="0070C0"/>
+                </a:solidFill>
+              </a:endParaRPr>
+            </a:p>
+            <a:p>
+              <a:r>
+                <a:rPr kumimoji="1" lang="ja-JP" altLang="en-US" b="1">
+                  <a:solidFill>
+                    <a:srgbClr val="0070C0"/>
+                  </a:solidFill>
+                </a:rPr>
+                <a:t>傾き：</a:t>
+              </a:r>
+              <a:r>
+                <a:rPr kumimoji="1" lang="en-US" altLang="ja-JP" b="1" dirty="0">
+                  <a:solidFill>
+                    <a:srgbClr val="0070C0"/>
+                  </a:solidFill>
+                </a:rPr>
+                <a:t>0.5〜2</a:t>
+              </a:r>
+            </a:p>
+            <a:p>
+              <a:r>
+                <a:rPr lang="ja-JP" altLang="en-US" b="1">
+                  <a:solidFill>
+                    <a:srgbClr val="0070C0"/>
+                  </a:solidFill>
+                </a:rPr>
+                <a:t>（＝貿易後相対価格）</a:t>
+              </a:r>
+              <a:endParaRPr kumimoji="1" lang="ja-JP" altLang="en-US" b="1">
+                <a:solidFill>
+                  <a:srgbClr val="0070C0"/>
+                </a:solidFill>
+              </a:endParaRPr>
+            </a:p>
+          </p:txBody>
+        </p:sp>
+        <p:cxnSp>
+          <p:nvCxnSpPr>
+            <p:cNvPr id="24" name="曲線コネクタ 23">
+              <a:extLst>
+                <a:ext uri="{FF2B5EF4-FFF2-40B4-BE49-F238E27FC236}">
+                  <a16:creationId xmlns:a16="http://schemas.microsoft.com/office/drawing/2014/main" id="{6BB3912B-FFC3-431D-5477-B64065C5826B}"/>
+                </a:ext>
+              </a:extLst>
+            </p:cNvPr>
+            <p:cNvCxnSpPr>
+              <a:cxnSpLocks/>
+              <a:stCxn id="23" idx="3"/>
+              <a:endCxn id="21" idx="1"/>
+            </p:cNvCxnSpPr>
+            <p:nvPr/>
+          </p:nvCxnSpPr>
+          <p:spPr>
+            <a:xfrm>
+              <a:off x="6500158" y="3227102"/>
+              <a:ext cx="1163604" cy="760407"/>
+            </a:xfrm>
+            <a:prstGeom prst="curvedConnector3">
+              <a:avLst>
+                <a:gd name="adj1" fmla="val 50000"/>
+              </a:avLst>
+            </a:prstGeom>
+            <a:ln w="38100">
+              <a:solidFill>
+                <a:srgbClr val="0070C0"/>
+              </a:solidFill>
+              <a:tailEnd type="triangle"/>
+            </a:ln>
+          </p:spPr>
+          <p:style>
+            <a:lnRef idx="2">
+              <a:schemeClr val="accent1"/>
+            </a:lnRef>
+            <a:fillRef idx="0">
+              <a:schemeClr val="accent1"/>
+            </a:fillRef>
+            <a:effectRef idx="1">
+              <a:schemeClr val="accent1"/>
+            </a:effectRef>
+            <a:fontRef idx="minor">
+              <a:schemeClr val="tx1"/>
+            </a:fontRef>
+          </p:style>
+        </p:cxnSp>
+        <p:cxnSp>
+          <p:nvCxnSpPr>
+            <p:cNvPr id="25" name="曲線コネクタ 24">
+              <a:extLst>
+                <a:ext uri="{FF2B5EF4-FFF2-40B4-BE49-F238E27FC236}">
+                  <a16:creationId xmlns:a16="http://schemas.microsoft.com/office/drawing/2014/main" id="{4F45B140-40E3-E63D-138F-4E13D5543C5E}"/>
+                </a:ext>
+              </a:extLst>
+            </p:cNvPr>
+            <p:cNvCxnSpPr>
+              <a:cxnSpLocks/>
+              <a:stCxn id="23" idx="1"/>
+              <a:endCxn id="20" idx="5"/>
+            </p:cNvCxnSpPr>
+            <p:nvPr/>
+          </p:nvCxnSpPr>
+          <p:spPr>
+            <a:xfrm rot="10800000" flipV="1">
+              <a:off x="2973385" y="3227102"/>
+              <a:ext cx="802951" cy="461666"/>
+            </a:xfrm>
+            <a:prstGeom prst="curvedConnector3">
+              <a:avLst/>
+            </a:prstGeom>
+            <a:ln w="38100">
+              <a:solidFill>
+                <a:srgbClr val="0070C0"/>
+              </a:solidFill>
+              <a:tailEnd type="triangle"/>
+            </a:ln>
+          </p:spPr>
+          <p:style>
+            <a:lnRef idx="2">
+              <a:schemeClr val="accent1"/>
+            </a:lnRef>
+            <a:fillRef idx="0">
+              <a:schemeClr val="accent1"/>
+            </a:fillRef>
+            <a:effectRef idx="1">
+              <a:schemeClr val="accent1"/>
+            </a:effectRef>
+            <a:fontRef idx="minor">
+              <a:schemeClr val="tx1"/>
+            </a:fontRef>
+          </p:style>
+        </p:cxnSp>
+        <p:cxnSp>
+          <p:nvCxnSpPr>
+            <p:cNvPr id="19" name="直線コネクタ 18">
+              <a:extLst>
+                <a:ext uri="{FF2B5EF4-FFF2-40B4-BE49-F238E27FC236}">
+                  <a16:creationId xmlns:a16="http://schemas.microsoft.com/office/drawing/2014/main" id="{D8AC888A-1014-EA71-74E9-BA16F587DE6D}"/>
+                </a:ext>
+              </a:extLst>
+            </p:cNvPr>
+            <p:cNvCxnSpPr>
+              <a:cxnSpLocks/>
+            </p:cNvCxnSpPr>
+            <p:nvPr/>
+          </p:nvCxnSpPr>
+          <p:spPr>
+            <a:xfrm flipH="1" flipV="1">
+              <a:off x="1241418" y="2050103"/>
+              <a:ext cx="3800400" cy="3589025"/>
+            </a:xfrm>
+            <a:prstGeom prst="line">
+              <a:avLst/>
+            </a:prstGeom>
+            <a:ln w="38100">
+              <a:solidFill>
+                <a:srgbClr val="0070C0"/>
+              </a:solidFill>
+            </a:ln>
+          </p:spPr>
+          <p:style>
+            <a:lnRef idx="2">
+              <a:schemeClr val="accent1"/>
+            </a:lnRef>
+            <a:fillRef idx="0">
+              <a:schemeClr val="accent1"/>
+            </a:fillRef>
+            <a:effectRef idx="1">
+              <a:schemeClr val="accent1"/>
+            </a:effectRef>
+            <a:fontRef idx="minor">
+              <a:schemeClr val="tx1"/>
+            </a:fontRef>
+          </p:style>
+        </p:cxnSp>
+        <p:sp>
+          <p:nvSpPr>
+            <p:cNvPr id="33" name="円/楕円 32">
+              <a:extLst>
+                <a:ext uri="{FF2B5EF4-FFF2-40B4-BE49-F238E27FC236}">
+                  <a16:creationId xmlns:a16="http://schemas.microsoft.com/office/drawing/2014/main" id="{D14C4FAA-B387-778D-A27D-207C367155D9}"/>
+                </a:ext>
+              </a:extLst>
+            </p:cNvPr>
+            <p:cNvSpPr/>
+            <p:nvPr/>
+          </p:nvSpPr>
+          <p:spPr>
+            <a:xfrm>
+              <a:off x="4954115" y="5549085"/>
+              <a:ext cx="195476" cy="195476"/>
+            </a:xfrm>
+            <a:prstGeom prst="ellipse">
+              <a:avLst/>
+            </a:prstGeom>
+            <a:solidFill>
+              <a:srgbClr val="FF0000"/>
+            </a:solidFill>
+            <a:ln>
+              <a:noFill/>
+            </a:ln>
+          </p:spPr>
+          <p:style>
+            <a:lnRef idx="2">
+              <a:schemeClr val="accent1">
+                <a:shade val="15000"/>
+              </a:schemeClr>
+            </a:lnRef>
+            <a:fillRef idx="1">
+              <a:schemeClr val="accent1"/>
+            </a:fillRef>
+            <a:effectRef idx="0">
+              <a:schemeClr val="accent1"/>
+            </a:effectRef>
+            <a:fontRef idx="minor">
+              <a:schemeClr val="lt1"/>
+            </a:fontRef>
+          </p:style>
+          <p:txBody>
+            <a:bodyPr rtlCol="0" anchor="ctr"/>
+            <a:lstStyle/>
+            <a:p>
+              <a:pPr algn="ctr"/>
+              <a:endParaRPr kumimoji="1" lang="ja-JP" altLang="en-US"/>
+            </a:p>
+          </p:txBody>
+        </p:sp>
+        <p:sp>
+          <p:nvSpPr>
+            <p:cNvPr id="36" name="円/楕円 35">
+              <a:extLst>
+                <a:ext uri="{FF2B5EF4-FFF2-40B4-BE49-F238E27FC236}">
+                  <a16:creationId xmlns:a16="http://schemas.microsoft.com/office/drawing/2014/main" id="{EAEDCCEC-0AA6-2A34-71F1-B9F432D9E470}"/>
+                </a:ext>
+              </a:extLst>
+            </p:cNvPr>
+            <p:cNvSpPr/>
+            <p:nvPr/>
+          </p:nvSpPr>
+          <p:spPr>
+            <a:xfrm>
+              <a:off x="6392385" y="2431140"/>
+              <a:ext cx="195476" cy="195476"/>
+            </a:xfrm>
+            <a:prstGeom prst="ellipse">
+              <a:avLst/>
+            </a:prstGeom>
+            <a:solidFill>
+              <a:srgbClr val="FF0000"/>
+            </a:solidFill>
+            <a:ln>
+              <a:noFill/>
+            </a:ln>
+          </p:spPr>
+          <p:style>
+            <a:lnRef idx="2">
+              <a:schemeClr val="accent1">
+                <a:shade val="15000"/>
+              </a:schemeClr>
+            </a:lnRef>
+            <a:fillRef idx="1">
+              <a:schemeClr val="accent1"/>
+            </a:fillRef>
+            <a:effectRef idx="0">
+              <a:schemeClr val="accent1"/>
+            </a:effectRef>
+            <a:fontRef idx="minor">
+              <a:schemeClr val="lt1"/>
+            </a:fontRef>
+          </p:style>
+          <p:txBody>
+            <a:bodyPr rtlCol="0" anchor="ctr"/>
+            <a:lstStyle/>
+            <a:p>
+              <a:pPr algn="ctr"/>
+              <a:endParaRPr kumimoji="1" lang="ja-JP" altLang="en-US"/>
+            </a:p>
+          </p:txBody>
+        </p:sp>
+        <p:sp>
+          <p:nvSpPr>
+            <p:cNvPr id="37" name="三角形 36">
+              <a:extLst>
+                <a:ext uri="{FF2B5EF4-FFF2-40B4-BE49-F238E27FC236}">
+                  <a16:creationId xmlns:a16="http://schemas.microsoft.com/office/drawing/2014/main" id="{7407BF9F-4ACA-D435-BC0F-6B67D05073FB}"/>
+                </a:ext>
+              </a:extLst>
+            </p:cNvPr>
+            <p:cNvSpPr/>
+            <p:nvPr/>
+          </p:nvSpPr>
+          <p:spPr>
+            <a:xfrm>
+              <a:off x="2414473" y="4530081"/>
+              <a:ext cx="1057877" cy="463693"/>
+            </a:xfrm>
+            <a:prstGeom prst="triangle">
+              <a:avLst>
+                <a:gd name="adj" fmla="val 0"/>
+              </a:avLst>
+            </a:prstGeom>
+            <a:noFill/>
+            <a:ln w="38100">
+              <a:solidFill>
+                <a:srgbClr val="FF0000"/>
+              </a:solidFill>
+            </a:ln>
+          </p:spPr>
+          <p:style>
+            <a:lnRef idx="2">
+              <a:schemeClr val="accent1">
+                <a:shade val="15000"/>
+              </a:schemeClr>
+            </a:lnRef>
+            <a:fillRef idx="1">
+              <a:schemeClr val="accent1"/>
+            </a:fillRef>
+            <a:effectRef idx="0">
+              <a:schemeClr val="accent1"/>
+            </a:effectRef>
+            <a:fontRef idx="minor">
+              <a:schemeClr val="lt1"/>
+            </a:fontRef>
+          </p:style>
+          <p:txBody>
+            <a:bodyPr rtlCol="0" anchor="ctr"/>
+            <a:lstStyle/>
+            <a:p>
+              <a:pPr algn="ctr"/>
+              <a:endParaRPr kumimoji="1" lang="ja-JP" altLang="en-US">
+                <a:solidFill>
+                  <a:schemeClr val="tx1"/>
+                </a:solidFill>
+              </a:endParaRPr>
+            </a:p>
+          </p:txBody>
+        </p:sp>
+        <p:sp>
+          <p:nvSpPr>
+            <p:cNvPr id="38" name="テキスト ボックス 37">
+              <a:extLst>
+                <a:ext uri="{FF2B5EF4-FFF2-40B4-BE49-F238E27FC236}">
+                  <a16:creationId xmlns:a16="http://schemas.microsoft.com/office/drawing/2014/main" id="{E5AEE830-A99B-B147-A23B-7D9EFBBEE562}"/>
+                </a:ext>
+              </a:extLst>
+            </p:cNvPr>
+            <p:cNvSpPr txBox="1"/>
+            <p:nvPr/>
+          </p:nvSpPr>
+          <p:spPr>
+            <a:xfrm>
+              <a:off x="2301411" y="5024320"/>
+              <a:ext cx="2274982" cy="646331"/>
+            </a:xfrm>
+            <a:prstGeom prst="rect">
+              <a:avLst/>
+            </a:prstGeom>
+            <a:noFill/>
+          </p:spPr>
+          <p:txBody>
+            <a:bodyPr wrap="none" rtlCol="0">
+              <a:spAutoFit/>
+            </a:bodyPr>
+            <a:lstStyle/>
+            <a:p>
+              <a:r>
+                <a:rPr kumimoji="1" lang="ja-JP" altLang="en-US" b="1">
+                  <a:solidFill>
+                    <a:srgbClr val="FF0000"/>
+                  </a:solidFill>
+                </a:rPr>
+                <a:t>傾き：</a:t>
+              </a:r>
+              <a:r>
+                <a:rPr kumimoji="1" lang="en-US" altLang="ja-JP" b="1" dirty="0">
+                  <a:solidFill>
+                    <a:srgbClr val="FF0000"/>
+                  </a:solidFill>
+                </a:rPr>
+                <a:t>0.5</a:t>
+              </a:r>
+            </a:p>
+            <a:p>
+              <a:r>
+                <a:rPr lang="en-US" altLang="ja-JP" b="1" dirty="0">
+                  <a:solidFill>
+                    <a:srgbClr val="FF0000"/>
+                  </a:solidFill>
+                </a:rPr>
+                <a:t>(=</a:t>
+              </a:r>
+              <a:r>
+                <a:rPr lang="ja-JP" altLang="en-US" b="1">
+                  <a:solidFill>
+                    <a:srgbClr val="FF0000"/>
+                  </a:solidFill>
+                </a:rPr>
+                <a:t>貿易前相対価格）</a:t>
+              </a:r>
+              <a:endParaRPr kumimoji="1" lang="ja-JP" altLang="en-US" b="1">
+                <a:solidFill>
+                  <a:srgbClr val="FF0000"/>
+                </a:solidFill>
+              </a:endParaRPr>
+            </a:p>
+          </p:txBody>
+        </p:sp>
+        <p:sp>
+          <p:nvSpPr>
+            <p:cNvPr id="41" name="三角形 40">
+              <a:extLst>
+                <a:ext uri="{FF2B5EF4-FFF2-40B4-BE49-F238E27FC236}">
+                  <a16:creationId xmlns:a16="http://schemas.microsoft.com/office/drawing/2014/main" id="{B43E7168-2B00-D7A0-55DE-28C881504DFF}"/>
+                </a:ext>
+              </a:extLst>
+            </p:cNvPr>
+            <p:cNvSpPr/>
+            <p:nvPr/>
+          </p:nvSpPr>
+          <p:spPr>
+            <a:xfrm>
+              <a:off x="7524884" y="4177216"/>
+              <a:ext cx="599776" cy="913924"/>
+            </a:xfrm>
+            <a:prstGeom prst="triangle">
+              <a:avLst>
+                <a:gd name="adj" fmla="val 0"/>
+              </a:avLst>
+            </a:prstGeom>
+            <a:noFill/>
+            <a:ln w="38100">
+              <a:solidFill>
+                <a:srgbClr val="FF0000"/>
+              </a:solidFill>
+            </a:ln>
+          </p:spPr>
+          <p:style>
+            <a:lnRef idx="2">
+              <a:schemeClr val="accent1">
+                <a:shade val="15000"/>
+              </a:schemeClr>
+            </a:lnRef>
+            <a:fillRef idx="1">
+              <a:schemeClr val="accent1"/>
+            </a:fillRef>
+            <a:effectRef idx="0">
+              <a:schemeClr val="accent1"/>
+            </a:effectRef>
+            <a:fontRef idx="minor">
+              <a:schemeClr val="lt1"/>
+            </a:fontRef>
+          </p:style>
+          <p:txBody>
+            <a:bodyPr rtlCol="0" anchor="ctr"/>
+            <a:lstStyle/>
+            <a:p>
+              <a:pPr algn="ctr"/>
+              <a:endParaRPr kumimoji="1" lang="ja-JP" altLang="en-US">
+                <a:solidFill>
+                  <a:schemeClr val="tx1"/>
+                </a:solidFill>
+              </a:endParaRPr>
+            </a:p>
+          </p:txBody>
+        </p:sp>
+        <p:sp>
+          <p:nvSpPr>
+            <p:cNvPr id="42" name="テキスト ボックス 41">
+              <a:extLst>
+                <a:ext uri="{FF2B5EF4-FFF2-40B4-BE49-F238E27FC236}">
+                  <a16:creationId xmlns:a16="http://schemas.microsoft.com/office/drawing/2014/main" id="{EDE78F58-8FA8-0265-429D-C8BCABE17826}"/>
+                </a:ext>
+              </a:extLst>
+            </p:cNvPr>
+            <p:cNvSpPr txBox="1"/>
+            <p:nvPr/>
+          </p:nvSpPr>
+          <p:spPr>
+            <a:xfrm>
+              <a:off x="6807019" y="5111317"/>
+              <a:ext cx="2593583" cy="646331"/>
+            </a:xfrm>
+            <a:prstGeom prst="rect">
+              <a:avLst/>
+            </a:prstGeom>
+            <a:noFill/>
+          </p:spPr>
+          <p:txBody>
+            <a:bodyPr wrap="square" rtlCol="0">
+              <a:spAutoFit/>
+            </a:bodyPr>
+            <a:lstStyle/>
+            <a:p>
+              <a:r>
+                <a:rPr kumimoji="1" lang="ja-JP" altLang="en-US" b="1">
+                  <a:solidFill>
+                    <a:srgbClr val="FF0000"/>
+                  </a:solidFill>
+                </a:rPr>
+                <a:t>傾き：</a:t>
+              </a:r>
+              <a:r>
+                <a:rPr kumimoji="1" lang="en-US" altLang="ja-JP" b="1" dirty="0">
+                  <a:solidFill>
+                    <a:srgbClr val="FF0000"/>
+                  </a:solidFill>
+                </a:rPr>
+                <a:t>2</a:t>
+              </a:r>
+            </a:p>
+            <a:p>
+              <a:r>
+                <a:rPr lang="ja-JP" altLang="en-US" b="1">
+                  <a:solidFill>
+                    <a:srgbClr val="FF0000"/>
+                  </a:solidFill>
+                </a:rPr>
+                <a:t>（＝貿易前相対価格）</a:t>
+              </a:r>
+              <a:endParaRPr kumimoji="1" lang="ja-JP" altLang="en-US" b="1">
+                <a:solidFill>
+                  <a:srgbClr val="FF0000"/>
+                </a:solidFill>
+              </a:endParaRPr>
+            </a:p>
+          </p:txBody>
+        </p:sp>
+      </p:grpSp>
+    </p:spTree>
+    <p:extLst>
+      <p:ext uri="{BB962C8B-B14F-4D97-AF65-F5344CB8AC3E}">
+        <p14:creationId xmlns:p14="http://schemas.microsoft.com/office/powerpoint/2010/main" val="352350301"/>
+      </p:ext>
+    </p:extLst>
+  </p:cSld>
+  <p:clrMapOvr>
+    <a:masterClrMapping/>
+  </p:clrMapOvr>
+</p:sld>
+</file>
+
+<file path=ppt/slides/slide5.xml><?xml version="1.0" encoding="utf-8"?>
+<p:sld xmlns:a="http://schemas.openxmlformats.org/drawingml/2006/main" xmlns:r="http://schemas.openxmlformats.org/officeDocument/2006/relationships" xmlns:p="http://schemas.openxmlformats.org/presentationml/2006/main">
+  <p:cSld>
+    <p:spTree>
+      <p:nvGrpSpPr>
+        <p:cNvPr id="1" name=""/>
+        <p:cNvGrpSpPr/>
+        <p:nvPr/>
+      </p:nvGrpSpPr>
+      <p:grpSpPr>
+        <a:xfrm>
+          <a:off x="0" y="0"/>
+          <a:ext cx="0" cy="0"/>
+          <a:chOff x="0" y="0"/>
+          <a:chExt cx="0" cy="0"/>
+        </a:xfrm>
+      </p:grpSpPr>
+      <p:grpSp>
+        <p:nvGrpSpPr>
+          <p:cNvPr id="14" name="グループ化 13">
+            <a:extLst>
+              <a:ext uri="{FF2B5EF4-FFF2-40B4-BE49-F238E27FC236}">
+                <a16:creationId xmlns:a16="http://schemas.microsoft.com/office/drawing/2014/main" id="{929E4EC7-E422-D6CF-3D99-02C1163595AD}"/>
+              </a:ext>
+            </a:extLst>
+          </p:cNvPr>
+          <p:cNvGrpSpPr/>
+          <p:nvPr/>
+        </p:nvGrpSpPr>
+        <p:grpSpPr>
+          <a:xfrm>
+            <a:off x="2745402" y="1360418"/>
+            <a:ext cx="7393653" cy="4137163"/>
+            <a:chOff x="3872110" y="845404"/>
+            <a:chExt cx="5302143" cy="5171580"/>
+          </a:xfrm>
+        </p:grpSpPr>
+        <p:cxnSp>
+          <p:nvCxnSpPr>
+            <p:cNvPr id="2" name="直線矢印コネクタ 1">
+              <a:extLst>
+                <a:ext uri="{FF2B5EF4-FFF2-40B4-BE49-F238E27FC236}">
+                  <a16:creationId xmlns:a16="http://schemas.microsoft.com/office/drawing/2014/main" id="{3310553A-A0E8-62FA-96D3-44E48BE71F98}"/>
+                </a:ext>
+              </a:extLst>
+            </p:cNvPr>
+            <p:cNvCxnSpPr/>
+            <p:nvPr/>
+          </p:nvCxnSpPr>
+          <p:spPr>
+            <a:xfrm flipV="1">
+              <a:off x="4333775" y="854182"/>
+              <a:ext cx="0" cy="4824248"/>
+            </a:xfrm>
+            <a:prstGeom prst="straightConnector1">
+              <a:avLst/>
+            </a:prstGeom>
+            <a:ln w="22225">
+              <a:tailEnd type="triangle"/>
+            </a:ln>
+          </p:spPr>
+          <p:style>
+            <a:lnRef idx="2">
+              <a:schemeClr val="dk1"/>
+            </a:lnRef>
+            <a:fillRef idx="0">
+              <a:schemeClr val="dk1"/>
+            </a:fillRef>
+            <a:effectRef idx="1">
+              <a:schemeClr val="dk1"/>
+            </a:effectRef>
+            <a:fontRef idx="minor">
+              <a:schemeClr val="tx1"/>
+            </a:fontRef>
+          </p:style>
+        </p:cxnSp>
+        <p:cxnSp>
+          <p:nvCxnSpPr>
+            <p:cNvPr id="3" name="直線矢印コネクタ 2">
+              <a:extLst>
+                <a:ext uri="{FF2B5EF4-FFF2-40B4-BE49-F238E27FC236}">
+                  <a16:creationId xmlns:a16="http://schemas.microsoft.com/office/drawing/2014/main" id="{7384C4A8-DB33-6296-997E-1D7197536C60}"/>
+                </a:ext>
+              </a:extLst>
+            </p:cNvPr>
+            <p:cNvCxnSpPr>
+              <a:cxnSpLocks/>
+            </p:cNvCxnSpPr>
+            <p:nvPr/>
+          </p:nvCxnSpPr>
+          <p:spPr>
+            <a:xfrm>
+              <a:off x="4333775" y="5678430"/>
+              <a:ext cx="4477407" cy="0"/>
+            </a:xfrm>
+            <a:prstGeom prst="straightConnector1">
+              <a:avLst/>
+            </a:prstGeom>
+            <a:ln w="22225">
+              <a:tailEnd type="triangle"/>
+            </a:ln>
+          </p:spPr>
+          <p:style>
+            <a:lnRef idx="2">
+              <a:schemeClr val="dk1"/>
+            </a:lnRef>
+            <a:fillRef idx="0">
+              <a:schemeClr val="dk1"/>
+            </a:fillRef>
+            <a:effectRef idx="1">
+              <a:schemeClr val="dk1"/>
+            </a:effectRef>
+            <a:fontRef idx="minor">
+              <a:schemeClr val="tx1"/>
+            </a:fontRef>
+          </p:style>
+        </p:cxnSp>
+        <p:sp>
+          <p:nvSpPr>
+            <p:cNvPr id="8" name="テキスト ボックス 7">
+              <a:extLst>
+                <a:ext uri="{FF2B5EF4-FFF2-40B4-BE49-F238E27FC236}">
+                  <a16:creationId xmlns:a16="http://schemas.microsoft.com/office/drawing/2014/main" id="{DEC918E0-8147-C04B-3025-957619E40673}"/>
+                </a:ext>
+              </a:extLst>
+            </p:cNvPr>
+            <p:cNvSpPr txBox="1"/>
+            <p:nvPr/>
+          </p:nvSpPr>
+          <p:spPr>
+            <a:xfrm>
+              <a:off x="7526568" y="5678430"/>
+              <a:ext cx="1647685" cy="338554"/>
+            </a:xfrm>
+            <a:prstGeom prst="rect">
+              <a:avLst/>
+            </a:prstGeom>
+            <a:noFill/>
+          </p:spPr>
+          <p:txBody>
+            <a:bodyPr wrap="square" rtlCol="0">
+              <a:spAutoFit/>
+            </a:bodyPr>
+            <a:lstStyle/>
+            <a:p>
+              <a:r>
+                <a:rPr lang="ja-JP" altLang="en-US" sz="1600">
+                  <a:latin typeface="Hiragino Sans W4" panose="020B0400000000000000" pitchFamily="34" charset="-128"/>
+                  <a:ea typeface="Hiragino Sans W4" panose="020B0400000000000000" pitchFamily="34" charset="-128"/>
+                </a:rPr>
+                <a:t>投入労働量</a:t>
+              </a:r>
+              <a:endParaRPr kumimoji="1" lang="ja-JP" altLang="en-US" sz="1600">
+                <a:latin typeface="Hiragino Sans W4" panose="020B0400000000000000" pitchFamily="34" charset="-128"/>
+                <a:ea typeface="Hiragino Sans W4" panose="020B0400000000000000" pitchFamily="34" charset="-128"/>
+              </a:endParaRPr>
+            </a:p>
+          </p:txBody>
+        </p:sp>
+        <p:sp>
+          <p:nvSpPr>
+            <p:cNvPr id="9" name="テキスト ボックス 8">
+              <a:extLst>
+                <a:ext uri="{FF2B5EF4-FFF2-40B4-BE49-F238E27FC236}">
+                  <a16:creationId xmlns:a16="http://schemas.microsoft.com/office/drawing/2014/main" id="{A503A722-7666-5A1A-F3AF-5CE6F8E54158}"/>
+                </a:ext>
+              </a:extLst>
+            </p:cNvPr>
+            <p:cNvSpPr txBox="1"/>
+            <p:nvPr/>
+          </p:nvSpPr>
+          <p:spPr>
+            <a:xfrm>
+              <a:off x="3872110" y="845404"/>
+              <a:ext cx="461665" cy="1522781"/>
+            </a:xfrm>
+            <a:prstGeom prst="rect">
+              <a:avLst/>
+            </a:prstGeom>
+            <a:noFill/>
+          </p:spPr>
+          <p:txBody>
+            <a:bodyPr vert="eaVert" wrap="square" rtlCol="0">
+              <a:spAutoFit/>
+            </a:bodyPr>
+            <a:lstStyle/>
+            <a:p>
+              <a:r>
+                <a:rPr lang="ja-JP" altLang="en-US">
+                  <a:latin typeface="Hiragino Sans W4" panose="020B0400000000000000" pitchFamily="34" charset="-128"/>
+                  <a:ea typeface="Hiragino Sans W4" panose="020B0400000000000000" pitchFamily="34" charset="-128"/>
+                </a:rPr>
+                <a:t>生産量</a:t>
+              </a:r>
+              <a:endParaRPr kumimoji="1" lang="ja-JP" altLang="en-US">
+                <a:latin typeface="Hiragino Sans W4" panose="020B0400000000000000" pitchFamily="34" charset="-128"/>
+                <a:ea typeface="Hiragino Sans W4" panose="020B0400000000000000" pitchFamily="34" charset="-128"/>
+              </a:endParaRPr>
+            </a:p>
+          </p:txBody>
+        </p:sp>
+        <p:sp>
+          <p:nvSpPr>
+            <p:cNvPr id="13" name="フリーフォーム 12">
+              <a:extLst>
+                <a:ext uri="{FF2B5EF4-FFF2-40B4-BE49-F238E27FC236}">
+                  <a16:creationId xmlns:a16="http://schemas.microsoft.com/office/drawing/2014/main" id="{A6D18045-720E-9987-1573-819576E34B31}"/>
+                </a:ext>
+              </a:extLst>
+            </p:cNvPr>
+            <p:cNvSpPr/>
+            <p:nvPr/>
+          </p:nvSpPr>
+          <p:spPr>
+            <a:xfrm>
+              <a:off x="4358936" y="1748907"/>
+              <a:ext cx="4305670" cy="3915046"/>
+            </a:xfrm>
+            <a:custGeom>
+              <a:avLst/>
+              <a:gdLst>
+                <a:gd name="csX0" fmla="*/ 0 w 4305670"/>
+                <a:gd name="csY0" fmla="*/ 3542190 h 3542190"/>
+                <a:gd name="csX1" fmla="*/ 1358283 w 4305670"/>
+                <a:gd name="csY1" fmla="*/ 1074198 h 3542190"/>
+                <a:gd name="csX2" fmla="*/ 4305670 w 4305670"/>
+                <a:gd name="csY2" fmla="*/ 0 h 3542190"/>
+              </a:gdLst>
+              <a:ahLst/>
+              <a:cxnLst>
+                <a:cxn ang="0">
+                  <a:pos x="csX0" y="csY0"/>
+                </a:cxn>
+                <a:cxn ang="0">
+                  <a:pos x="csX1" y="csY1"/>
+                </a:cxn>
+                <a:cxn ang="0">
+                  <a:pos x="csX2" y="csY2"/>
+                </a:cxn>
+              </a:cxnLst>
+              <a:rect l="l" t="t" r="r" b="b"/>
+              <a:pathLst>
+                <a:path w="4305670" h="3542190">
+                  <a:moveTo>
+                    <a:pt x="0" y="3542190"/>
+                  </a:moveTo>
+                  <a:cubicBezTo>
+                    <a:pt x="320335" y="2603376"/>
+                    <a:pt x="640671" y="1664563"/>
+                    <a:pt x="1358283" y="1074198"/>
+                  </a:cubicBezTo>
+                  <a:cubicBezTo>
+                    <a:pt x="2075895" y="483833"/>
+                    <a:pt x="3190782" y="241916"/>
+                    <a:pt x="4305670" y="0"/>
+                  </a:cubicBezTo>
+                </a:path>
+              </a:pathLst>
+            </a:custGeom>
+            <a:noFill/>
+            <a:ln w="28575"/>
+          </p:spPr>
+          <p:style>
+            <a:lnRef idx="2">
+              <a:schemeClr val="accent1">
+                <a:shade val="15000"/>
+              </a:schemeClr>
+            </a:lnRef>
+            <a:fillRef idx="1">
+              <a:schemeClr val="accent1"/>
+            </a:fillRef>
+            <a:effectRef idx="0">
+              <a:schemeClr val="accent1"/>
+            </a:effectRef>
+            <a:fontRef idx="minor">
+              <a:schemeClr val="lt1"/>
+            </a:fontRef>
+          </p:style>
+          <p:txBody>
+            <a:bodyPr rtlCol="0" anchor="ctr"/>
+            <a:lstStyle/>
+            <a:p>
+              <a:pPr algn="ctr"/>
+              <a:endParaRPr kumimoji="1" lang="ja-JP" altLang="en-US"/>
+            </a:p>
+          </p:txBody>
+        </p:sp>
+      </p:grpSp>
+    </p:spTree>
+    <p:extLst>
+      <p:ext uri="{BB962C8B-B14F-4D97-AF65-F5344CB8AC3E}">
+        <p14:creationId xmlns:p14="http://schemas.microsoft.com/office/powerpoint/2010/main" val="2076967431"/>
+      </p:ext>
+    </p:extLst>
+  </p:cSld>
+  <p:clrMapOvr>
+    <a:masterClrMapping/>
+  </p:clrMapOvr>
+</p:sld>
+</file>
+
 <file path=ppt/theme/theme1.xml><?xml version="1.0" encoding="utf-8"?>
 <a:theme xmlns:a="http://schemas.openxmlformats.org/drawingml/2006/main" name="Office テーマ">
   <a:themeElements>

--- a/figs/DIYfigures_ipe1.pptx
+++ b/figs/DIYfigures_ipe1.pptx
@@ -10,6 +10,10 @@
     <p:sldId id="259" r:id="rId4"/>
     <p:sldId id="260" r:id="rId5"/>
     <p:sldId id="261" r:id="rId6"/>
+    <p:sldId id="263" r:id="rId7"/>
+    <p:sldId id="262" r:id="rId8"/>
+    <p:sldId id="264" r:id="rId9"/>
+    <p:sldId id="265" r:id="rId10"/>
   </p:sldIdLst>
   <p:sldSz cx="12192000" cy="6858000"/>
   <p:notesSz cx="6858000" cy="9144000"/>
@@ -3765,7 +3769,7 @@
           <a:p>
             <a:fld id="{29D38AE0-A022-EC4B-ADED-C3987264F154}" type="datetimeFigureOut">
               <a:rPr kumimoji="1" lang="ja-JP" altLang="en-US" smtClean="0"/>
-              <a:t>2026/4/29</a:t>
+              <a:t>2026/5/25</a:t>
             </a:fld>
             <a:endParaRPr kumimoji="1" lang="ja-JP" altLang="en-US"/>
           </a:p>
@@ -3995,7 +3999,7 @@
           <a:p>
             <a:fld id="{29D38AE0-A022-EC4B-ADED-C3987264F154}" type="datetimeFigureOut">
               <a:rPr kumimoji="1" lang="ja-JP" altLang="en-US" smtClean="0"/>
-              <a:t>2026/4/29</a:t>
+              <a:t>2026/5/25</a:t>
             </a:fld>
             <a:endParaRPr kumimoji="1" lang="ja-JP" altLang="en-US"/>
           </a:p>
@@ -4235,7 +4239,7 @@
           <a:p>
             <a:fld id="{29D38AE0-A022-EC4B-ADED-C3987264F154}" type="datetimeFigureOut">
               <a:rPr kumimoji="1" lang="ja-JP" altLang="en-US" smtClean="0"/>
-              <a:t>2026/4/29</a:t>
+              <a:t>2026/5/25</a:t>
             </a:fld>
             <a:endParaRPr kumimoji="1" lang="ja-JP" altLang="en-US"/>
           </a:p>
@@ -4465,7 +4469,7 @@
           <a:p>
             <a:fld id="{29D38AE0-A022-EC4B-ADED-C3987264F154}" type="datetimeFigureOut">
               <a:rPr kumimoji="1" lang="ja-JP" altLang="en-US" smtClean="0"/>
-              <a:t>2026/4/29</a:t>
+              <a:t>2026/5/25</a:t>
             </a:fld>
             <a:endParaRPr kumimoji="1" lang="ja-JP" altLang="en-US"/>
           </a:p>
@@ -4740,7 +4744,7 @@
           <a:p>
             <a:fld id="{29D38AE0-A022-EC4B-ADED-C3987264F154}" type="datetimeFigureOut">
               <a:rPr kumimoji="1" lang="ja-JP" altLang="en-US" smtClean="0"/>
-              <a:t>2026/4/29</a:t>
+              <a:t>2026/5/25</a:t>
             </a:fld>
             <a:endParaRPr kumimoji="1" lang="ja-JP" altLang="en-US"/>
           </a:p>
@@ -5069,7 +5073,7 @@
           <a:p>
             <a:fld id="{29D38AE0-A022-EC4B-ADED-C3987264F154}" type="datetimeFigureOut">
               <a:rPr kumimoji="1" lang="ja-JP" altLang="en-US" smtClean="0"/>
-              <a:t>2026/4/29</a:t>
+              <a:t>2026/5/25</a:t>
             </a:fld>
             <a:endParaRPr kumimoji="1" lang="ja-JP" altLang="en-US"/>
           </a:p>
@@ -5545,7 +5549,7 @@
           <a:p>
             <a:fld id="{29D38AE0-A022-EC4B-ADED-C3987264F154}" type="datetimeFigureOut">
               <a:rPr kumimoji="1" lang="ja-JP" altLang="en-US" smtClean="0"/>
-              <a:t>2026/4/29</a:t>
+              <a:t>2026/5/25</a:t>
             </a:fld>
             <a:endParaRPr kumimoji="1" lang="ja-JP" altLang="en-US"/>
           </a:p>
@@ -5686,7 +5690,7 @@
           <a:p>
             <a:fld id="{29D38AE0-A022-EC4B-ADED-C3987264F154}" type="datetimeFigureOut">
               <a:rPr kumimoji="1" lang="ja-JP" altLang="en-US" smtClean="0"/>
-              <a:t>2026/4/29</a:t>
+              <a:t>2026/5/25</a:t>
             </a:fld>
             <a:endParaRPr kumimoji="1" lang="ja-JP" altLang="en-US"/>
           </a:p>
@@ -5799,7 +5803,7 @@
           <a:p>
             <a:fld id="{29D38AE0-A022-EC4B-ADED-C3987264F154}" type="datetimeFigureOut">
               <a:rPr kumimoji="1" lang="ja-JP" altLang="en-US" smtClean="0"/>
-              <a:t>2026/4/29</a:t>
+              <a:t>2026/5/25</a:t>
             </a:fld>
             <a:endParaRPr kumimoji="1" lang="ja-JP" altLang="en-US"/>
           </a:p>
@@ -6142,7 +6146,7 @@
           <a:p>
             <a:fld id="{29D38AE0-A022-EC4B-ADED-C3987264F154}" type="datetimeFigureOut">
               <a:rPr kumimoji="1" lang="ja-JP" altLang="en-US" smtClean="0"/>
-              <a:t>2026/4/29</a:t>
+              <a:t>2026/5/25</a:t>
             </a:fld>
             <a:endParaRPr kumimoji="1" lang="ja-JP" altLang="en-US"/>
           </a:p>
@@ -6430,7 +6434,7 @@
           <a:p>
             <a:fld id="{29D38AE0-A022-EC4B-ADED-C3987264F154}" type="datetimeFigureOut">
               <a:rPr kumimoji="1" lang="ja-JP" altLang="en-US" smtClean="0"/>
-              <a:t>2026/4/29</a:t>
+              <a:t>2026/5/25</a:t>
             </a:fld>
             <a:endParaRPr kumimoji="1" lang="ja-JP" altLang="en-US"/>
           </a:p>
@@ -6703,7 +6707,7 @@
           <a:p>
             <a:fld id="{29D38AE0-A022-EC4B-ADED-C3987264F154}" type="datetimeFigureOut">
               <a:rPr kumimoji="1" lang="ja-JP" altLang="en-US" smtClean="0"/>
-              <a:t>2026/4/29</a:t>
+              <a:t>2026/5/25</a:t>
             </a:fld>
             <a:endParaRPr kumimoji="1" lang="ja-JP" altLang="en-US"/>
           </a:p>
@@ -12496,6 +12500,4005 @@
 </p:sld>
 </file>
 
+<file path=ppt/slides/slide6.xml><?xml version="1.0" encoding="utf-8"?>
+<p:sld xmlns:a="http://schemas.openxmlformats.org/drawingml/2006/main" xmlns:r="http://schemas.openxmlformats.org/officeDocument/2006/relationships" xmlns:p="http://schemas.openxmlformats.org/presentationml/2006/main">
+  <p:cSld>
+    <p:spTree>
+      <p:nvGrpSpPr>
+        <p:cNvPr id="1" name=""/>
+        <p:cNvGrpSpPr/>
+        <p:nvPr/>
+      </p:nvGrpSpPr>
+      <p:grpSpPr>
+        <a:xfrm>
+          <a:off x="0" y="0"/>
+          <a:ext cx="0" cy="0"/>
+          <a:chOff x="0" y="0"/>
+          <a:chExt cx="0" cy="0"/>
+        </a:xfrm>
+      </p:grpSpPr>
+      <p:grpSp>
+        <p:nvGrpSpPr>
+          <p:cNvPr id="2" name="グループ化 1">
+            <a:extLst>
+              <a:ext uri="{FF2B5EF4-FFF2-40B4-BE49-F238E27FC236}">
+                <a16:creationId xmlns:a16="http://schemas.microsoft.com/office/drawing/2014/main" id="{DE2C9751-1CBE-6F75-3A0E-B1B815D4585A}"/>
+              </a:ext>
+            </a:extLst>
+          </p:cNvPr>
+          <p:cNvGrpSpPr/>
+          <p:nvPr/>
+        </p:nvGrpSpPr>
+        <p:grpSpPr>
+          <a:xfrm>
+            <a:off x="766152" y="390292"/>
+            <a:ext cx="9994775" cy="6304768"/>
+            <a:chOff x="766152" y="390292"/>
+            <a:chExt cx="9994775" cy="6304768"/>
+          </a:xfrm>
+        </p:grpSpPr>
+        <p:cxnSp>
+          <p:nvCxnSpPr>
+            <p:cNvPr id="3" name="直線矢印コネクタ 2">
+              <a:extLst>
+                <a:ext uri="{FF2B5EF4-FFF2-40B4-BE49-F238E27FC236}">
+                  <a16:creationId xmlns:a16="http://schemas.microsoft.com/office/drawing/2014/main" id="{5D974A56-BE31-F991-3AB0-48BB409C0071}"/>
+                </a:ext>
+              </a:extLst>
+            </p:cNvPr>
+            <p:cNvCxnSpPr>
+              <a:cxnSpLocks/>
+            </p:cNvCxnSpPr>
+            <p:nvPr/>
+          </p:nvCxnSpPr>
+          <p:spPr>
+            <a:xfrm>
+              <a:off x="1320150" y="6216979"/>
+              <a:ext cx="9440777" cy="0"/>
+            </a:xfrm>
+            <a:prstGeom prst="straightConnector1">
+              <a:avLst/>
+            </a:prstGeom>
+            <a:ln w="28575">
+              <a:solidFill>
+                <a:schemeClr val="tx1"/>
+              </a:solidFill>
+              <a:tailEnd type="triangle"/>
+            </a:ln>
+          </p:spPr>
+          <p:style>
+            <a:lnRef idx="1">
+              <a:schemeClr val="accent1"/>
+            </a:lnRef>
+            <a:fillRef idx="0">
+              <a:schemeClr val="accent1"/>
+            </a:fillRef>
+            <a:effectRef idx="0">
+              <a:schemeClr val="accent1"/>
+            </a:effectRef>
+            <a:fontRef idx="minor">
+              <a:schemeClr val="tx1"/>
+            </a:fontRef>
+          </p:style>
+        </p:cxnSp>
+        <p:cxnSp>
+          <p:nvCxnSpPr>
+            <p:cNvPr id="4" name="直線矢印コネクタ 3">
+              <a:extLst>
+                <a:ext uri="{FF2B5EF4-FFF2-40B4-BE49-F238E27FC236}">
+                  <a16:creationId xmlns:a16="http://schemas.microsoft.com/office/drawing/2014/main" id="{1C121E92-E783-AFAE-BA62-4111B1CBB6FE}"/>
+                </a:ext>
+              </a:extLst>
+            </p:cNvPr>
+            <p:cNvCxnSpPr>
+              <a:cxnSpLocks/>
+            </p:cNvCxnSpPr>
+            <p:nvPr/>
+          </p:nvCxnSpPr>
+          <p:spPr>
+            <a:xfrm flipV="1">
+              <a:off x="1320150" y="390293"/>
+              <a:ext cx="0" cy="5826686"/>
+            </a:xfrm>
+            <a:prstGeom prst="straightConnector1">
+              <a:avLst/>
+            </a:prstGeom>
+            <a:ln w="28575">
+              <a:solidFill>
+                <a:schemeClr val="tx1"/>
+              </a:solidFill>
+              <a:tailEnd type="triangle"/>
+            </a:ln>
+          </p:spPr>
+          <p:style>
+            <a:lnRef idx="1">
+              <a:schemeClr val="accent1"/>
+            </a:lnRef>
+            <a:fillRef idx="0">
+              <a:schemeClr val="accent1"/>
+            </a:fillRef>
+            <a:effectRef idx="0">
+              <a:schemeClr val="accent1"/>
+            </a:effectRef>
+            <a:fontRef idx="minor">
+              <a:schemeClr val="tx1"/>
+            </a:fontRef>
+          </p:style>
+        </p:cxnSp>
+        <p:sp>
+          <p:nvSpPr>
+            <p:cNvPr id="5" name="テキスト ボックス 4">
+              <a:extLst>
+                <a:ext uri="{FF2B5EF4-FFF2-40B4-BE49-F238E27FC236}">
+                  <a16:creationId xmlns:a16="http://schemas.microsoft.com/office/drawing/2014/main" id="{FF810532-EDE3-6DE0-72BA-7387C86A936D}"/>
+                </a:ext>
+              </a:extLst>
+            </p:cNvPr>
+            <p:cNvSpPr txBox="1"/>
+            <p:nvPr/>
+          </p:nvSpPr>
+          <p:spPr>
+            <a:xfrm>
+              <a:off x="9248061" y="6233395"/>
+              <a:ext cx="1512866" cy="461665"/>
+            </a:xfrm>
+            <a:prstGeom prst="rect">
+              <a:avLst/>
+            </a:prstGeom>
+            <a:noFill/>
+          </p:spPr>
+          <p:txBody>
+            <a:bodyPr wrap="square" rtlCol="0">
+              <a:spAutoFit/>
+            </a:bodyPr>
+            <a:lstStyle/>
+            <a:p>
+              <a:pPr algn="ctr"/>
+              <a:r>
+                <a:rPr kumimoji="1" lang="ja-JP" altLang="en-US" sz="2400">
+                  <a:latin typeface="Hiragino Kaku Gothic StdN W8" panose="020B0800000000000000" pitchFamily="34" charset="-128"/>
+                  <a:ea typeface="Hiragino Kaku Gothic StdN W8" panose="020B0800000000000000" pitchFamily="34" charset="-128"/>
+                </a:rPr>
+                <a:t>車関税率</a:t>
+              </a:r>
+            </a:p>
+          </p:txBody>
+        </p:sp>
+        <p:sp>
+          <p:nvSpPr>
+            <p:cNvPr id="6" name="テキスト ボックス 5">
+              <a:extLst>
+                <a:ext uri="{FF2B5EF4-FFF2-40B4-BE49-F238E27FC236}">
+                  <a16:creationId xmlns:a16="http://schemas.microsoft.com/office/drawing/2014/main" id="{6520EFE3-8F6F-F8FD-0B1A-55AB9411BDF6}"/>
+                </a:ext>
+              </a:extLst>
+            </p:cNvPr>
+            <p:cNvSpPr txBox="1"/>
+            <p:nvPr/>
+          </p:nvSpPr>
+          <p:spPr>
+            <a:xfrm>
+              <a:off x="766152" y="390292"/>
+              <a:ext cx="553998" cy="1323439"/>
+            </a:xfrm>
+            <a:prstGeom prst="rect">
+              <a:avLst/>
+            </a:prstGeom>
+            <a:noFill/>
+          </p:spPr>
+          <p:txBody>
+            <a:bodyPr vert="eaVert" wrap="none" rtlCol="0">
+              <a:spAutoFit/>
+            </a:bodyPr>
+            <a:lstStyle/>
+            <a:p>
+              <a:r>
+                <a:rPr kumimoji="1" lang="ja-JP" altLang="en-US" sz="2400">
+                  <a:latin typeface="Hiragino Kaku Gothic StdN W8" panose="020B0800000000000000" pitchFamily="34" charset="-128"/>
+                  <a:ea typeface="Hiragino Kaku Gothic StdN W8" panose="020B0800000000000000" pitchFamily="34" charset="-128"/>
+                </a:rPr>
+                <a:t>肉関税率</a:t>
+              </a:r>
+            </a:p>
+          </p:txBody>
+        </p:sp>
+        <p:grpSp>
+          <p:nvGrpSpPr>
+            <p:cNvPr id="11" name="グループ化 10">
+              <a:extLst>
+                <a:ext uri="{FF2B5EF4-FFF2-40B4-BE49-F238E27FC236}">
+                  <a16:creationId xmlns:a16="http://schemas.microsoft.com/office/drawing/2014/main" id="{4E1AEB85-1349-32C4-F02E-23263C73DE24}"/>
+                </a:ext>
+              </a:extLst>
+            </p:cNvPr>
+            <p:cNvGrpSpPr/>
+            <p:nvPr/>
+          </p:nvGrpSpPr>
+          <p:grpSpPr>
+            <a:xfrm>
+              <a:off x="2354479" y="390292"/>
+              <a:ext cx="4180231" cy="4180231"/>
+              <a:chOff x="1930271" y="273182"/>
+              <a:chExt cx="4180231" cy="4180231"/>
+            </a:xfrm>
+          </p:grpSpPr>
+          <p:sp>
+            <p:nvSpPr>
+              <p:cNvPr id="21" name="円/楕円 20">
+                <a:extLst>
+                  <a:ext uri="{FF2B5EF4-FFF2-40B4-BE49-F238E27FC236}">
+                    <a16:creationId xmlns:a16="http://schemas.microsoft.com/office/drawing/2014/main" id="{32BFC14F-9012-DF12-D0A5-22BC6E45FCE6}"/>
+                  </a:ext>
+                </a:extLst>
+              </p:cNvPr>
+              <p:cNvSpPr/>
+              <p:nvPr/>
+            </p:nvSpPr>
+            <p:spPr>
+              <a:xfrm>
+                <a:off x="3945487" y="2247163"/>
+                <a:ext cx="186550" cy="186550"/>
+              </a:xfrm>
+              <a:prstGeom prst="ellipse">
+                <a:avLst/>
+              </a:prstGeom>
+              <a:solidFill>
+                <a:schemeClr val="tx1"/>
+              </a:solidFill>
+              <a:ln>
+                <a:noFill/>
+              </a:ln>
+            </p:spPr>
+            <p:style>
+              <a:lnRef idx="2">
+                <a:schemeClr val="accent1">
+                  <a:shade val="50000"/>
+                </a:schemeClr>
+              </a:lnRef>
+              <a:fillRef idx="1">
+                <a:schemeClr val="accent1"/>
+              </a:fillRef>
+              <a:effectRef idx="0">
+                <a:schemeClr val="accent1"/>
+              </a:effectRef>
+              <a:fontRef idx="minor">
+                <a:schemeClr val="lt1"/>
+              </a:fontRef>
+            </p:style>
+            <p:txBody>
+              <a:bodyPr rtlCol="0" anchor="ctr"/>
+              <a:lstStyle/>
+              <a:p>
+                <a:pPr algn="ctr"/>
+                <a:endParaRPr kumimoji="1" lang="ja-JP" altLang="en-US"/>
+              </a:p>
+            </p:txBody>
+          </p:sp>
+          <p:sp>
+            <p:nvSpPr>
+              <p:cNvPr id="22" name="テキスト ボックス 21">
+                <a:extLst>
+                  <a:ext uri="{FF2B5EF4-FFF2-40B4-BE49-F238E27FC236}">
+                    <a16:creationId xmlns:a16="http://schemas.microsoft.com/office/drawing/2014/main" id="{7712D7F2-2353-03CB-F249-ECBCE4248A01}"/>
+                  </a:ext>
+                </a:extLst>
+              </p:cNvPr>
+              <p:cNvSpPr txBox="1"/>
+              <p:nvPr/>
+            </p:nvSpPr>
+            <p:spPr>
+              <a:xfrm>
+                <a:off x="3491129" y="2441089"/>
+                <a:ext cx="1024577" cy="461665"/>
+              </a:xfrm>
+              <a:prstGeom prst="rect">
+                <a:avLst/>
+              </a:prstGeom>
+              <a:noFill/>
+            </p:spPr>
+            <p:txBody>
+              <a:bodyPr wrap="square" rtlCol="0">
+                <a:spAutoFit/>
+              </a:bodyPr>
+              <a:lstStyle/>
+              <a:p>
+                <a:pPr algn="ctr"/>
+                <a:r>
+                  <a:rPr kumimoji="1" lang="ja-JP" altLang="en-US" sz="2400">
+                    <a:latin typeface="Hiragino Kaku Gothic StdN W8" panose="020B0800000000000000" pitchFamily="34" charset="-128"/>
+                    <a:ea typeface="Hiragino Kaku Gothic StdN W8" panose="020B0800000000000000" pitchFamily="34" charset="-128"/>
+                  </a:rPr>
+                  <a:t>日本</a:t>
+                </a:r>
+              </a:p>
+            </p:txBody>
+          </p:sp>
+          <p:sp>
+            <p:nvSpPr>
+              <p:cNvPr id="23" name="円/楕円 22">
+                <a:extLst>
+                  <a:ext uri="{FF2B5EF4-FFF2-40B4-BE49-F238E27FC236}">
+                    <a16:creationId xmlns:a16="http://schemas.microsoft.com/office/drawing/2014/main" id="{34B8D924-6630-E7A4-D42E-C2685DC7E19E}"/>
+                  </a:ext>
+                </a:extLst>
+              </p:cNvPr>
+              <p:cNvSpPr/>
+              <p:nvPr/>
+            </p:nvSpPr>
+            <p:spPr>
+              <a:xfrm>
+                <a:off x="1930271" y="273182"/>
+                <a:ext cx="4180231" cy="4180231"/>
+              </a:xfrm>
+              <a:prstGeom prst="ellipse">
+                <a:avLst/>
+              </a:prstGeom>
+              <a:noFill/>
+              <a:ln w="19050">
+                <a:solidFill>
+                  <a:schemeClr val="tx1"/>
+                </a:solidFill>
+              </a:ln>
+            </p:spPr>
+            <p:style>
+              <a:lnRef idx="2">
+                <a:schemeClr val="accent1">
+                  <a:shade val="15000"/>
+                </a:schemeClr>
+              </a:lnRef>
+              <a:fillRef idx="1">
+                <a:schemeClr val="accent1"/>
+              </a:fillRef>
+              <a:effectRef idx="0">
+                <a:schemeClr val="accent1"/>
+              </a:effectRef>
+              <a:fontRef idx="minor">
+                <a:schemeClr val="lt1"/>
+              </a:fontRef>
+            </p:style>
+            <p:txBody>
+              <a:bodyPr rtlCol="0" anchor="ctr"/>
+              <a:lstStyle/>
+              <a:p>
+                <a:pPr algn="ctr"/>
+                <a:endParaRPr kumimoji="1" lang="ja-JP" altLang="en-US"/>
+              </a:p>
+            </p:txBody>
+          </p:sp>
+        </p:grpSp>
+        <p:grpSp>
+          <p:nvGrpSpPr>
+            <p:cNvPr id="12" name="グループ化 11">
+              <a:extLst>
+                <a:ext uri="{FF2B5EF4-FFF2-40B4-BE49-F238E27FC236}">
+                  <a16:creationId xmlns:a16="http://schemas.microsoft.com/office/drawing/2014/main" id="{6413FA51-F5E2-45D5-7FC5-9410F8585A91}"/>
+                </a:ext>
+              </a:extLst>
+            </p:cNvPr>
+            <p:cNvGrpSpPr/>
+            <p:nvPr/>
+          </p:nvGrpSpPr>
+          <p:grpSpPr>
+            <a:xfrm>
+              <a:off x="5433827" y="1926096"/>
+              <a:ext cx="4180231" cy="4180231"/>
+              <a:chOff x="5450156" y="1722167"/>
+              <a:chExt cx="4180231" cy="4180231"/>
+            </a:xfrm>
+          </p:grpSpPr>
+          <p:sp>
+            <p:nvSpPr>
+              <p:cNvPr id="18" name="テキスト ボックス 17">
+                <a:extLst>
+                  <a:ext uri="{FF2B5EF4-FFF2-40B4-BE49-F238E27FC236}">
+                    <a16:creationId xmlns:a16="http://schemas.microsoft.com/office/drawing/2014/main" id="{64AD0313-0D9B-8EC7-E479-8DFF12994DA7}"/>
+                  </a:ext>
+                </a:extLst>
+              </p:cNvPr>
+              <p:cNvSpPr txBox="1"/>
+              <p:nvPr/>
+            </p:nvSpPr>
+            <p:spPr>
+              <a:xfrm>
+                <a:off x="7012666" y="3887531"/>
+                <a:ext cx="1024577" cy="461665"/>
+              </a:xfrm>
+              <a:prstGeom prst="rect">
+                <a:avLst/>
+              </a:prstGeom>
+              <a:noFill/>
+            </p:spPr>
+            <p:txBody>
+              <a:bodyPr wrap="square" rtlCol="0">
+                <a:spAutoFit/>
+              </a:bodyPr>
+              <a:lstStyle/>
+              <a:p>
+                <a:r>
+                  <a:rPr kumimoji="1" lang="ja-JP" altLang="en-US" sz="2400">
+                    <a:latin typeface="Hiragino Kaku Gothic StdN W8" panose="020B0800000000000000" pitchFamily="34" charset="-128"/>
+                    <a:ea typeface="Hiragino Kaku Gothic StdN W8" panose="020B0800000000000000" pitchFamily="34" charset="-128"/>
+                  </a:rPr>
+                  <a:t>米国</a:t>
+                </a:r>
+              </a:p>
+            </p:txBody>
+          </p:sp>
+          <p:sp>
+            <p:nvSpPr>
+              <p:cNvPr id="19" name="円/楕円 18">
+                <a:extLst>
+                  <a:ext uri="{FF2B5EF4-FFF2-40B4-BE49-F238E27FC236}">
+                    <a16:creationId xmlns:a16="http://schemas.microsoft.com/office/drawing/2014/main" id="{565CDA8B-1956-CAB7-5632-FD4D23D94485}"/>
+                  </a:ext>
+                </a:extLst>
+              </p:cNvPr>
+              <p:cNvSpPr/>
+              <p:nvPr/>
+            </p:nvSpPr>
+            <p:spPr>
+              <a:xfrm>
+                <a:off x="7467024" y="3716507"/>
+                <a:ext cx="186550" cy="186550"/>
+              </a:xfrm>
+              <a:prstGeom prst="ellipse">
+                <a:avLst/>
+              </a:prstGeom>
+              <a:solidFill>
+                <a:schemeClr val="tx1"/>
+              </a:solidFill>
+              <a:ln>
+                <a:noFill/>
+              </a:ln>
+            </p:spPr>
+            <p:style>
+              <a:lnRef idx="2">
+                <a:schemeClr val="accent1">
+                  <a:shade val="50000"/>
+                </a:schemeClr>
+              </a:lnRef>
+              <a:fillRef idx="1">
+                <a:schemeClr val="accent1"/>
+              </a:fillRef>
+              <a:effectRef idx="0">
+                <a:schemeClr val="accent1"/>
+              </a:effectRef>
+              <a:fontRef idx="minor">
+                <a:schemeClr val="lt1"/>
+              </a:fontRef>
+            </p:style>
+            <p:txBody>
+              <a:bodyPr rtlCol="0" anchor="ctr"/>
+              <a:lstStyle/>
+              <a:p>
+                <a:pPr algn="ctr"/>
+                <a:endParaRPr kumimoji="1" lang="ja-JP" altLang="en-US"/>
+              </a:p>
+            </p:txBody>
+          </p:sp>
+          <p:sp>
+            <p:nvSpPr>
+              <p:cNvPr id="20" name="円/楕円 19">
+                <a:extLst>
+                  <a:ext uri="{FF2B5EF4-FFF2-40B4-BE49-F238E27FC236}">
+                    <a16:creationId xmlns:a16="http://schemas.microsoft.com/office/drawing/2014/main" id="{B947CB25-D875-77C0-7C86-F0F87C6D6D4D}"/>
+                  </a:ext>
+                </a:extLst>
+              </p:cNvPr>
+              <p:cNvSpPr/>
+              <p:nvPr/>
+            </p:nvSpPr>
+            <p:spPr>
+              <a:xfrm>
+                <a:off x="5450156" y="1722167"/>
+                <a:ext cx="4180231" cy="4180231"/>
+              </a:xfrm>
+              <a:prstGeom prst="ellipse">
+                <a:avLst/>
+              </a:prstGeom>
+              <a:noFill/>
+              <a:ln w="19050">
+                <a:solidFill>
+                  <a:schemeClr val="tx1"/>
+                </a:solidFill>
+              </a:ln>
+            </p:spPr>
+            <p:style>
+              <a:lnRef idx="2">
+                <a:schemeClr val="accent1">
+                  <a:shade val="15000"/>
+                </a:schemeClr>
+              </a:lnRef>
+              <a:fillRef idx="1">
+                <a:schemeClr val="accent1"/>
+              </a:fillRef>
+              <a:effectRef idx="0">
+                <a:schemeClr val="accent1"/>
+              </a:effectRef>
+              <a:fontRef idx="minor">
+                <a:schemeClr val="lt1"/>
+              </a:fontRef>
+            </p:style>
+            <p:txBody>
+              <a:bodyPr rtlCol="0" anchor="ctr"/>
+              <a:lstStyle/>
+              <a:p>
+                <a:pPr algn="ctr"/>
+                <a:endParaRPr kumimoji="1" lang="ja-JP" altLang="en-US"/>
+              </a:p>
+            </p:txBody>
+          </p:sp>
+        </p:grpSp>
+        <p:grpSp>
+          <p:nvGrpSpPr>
+            <p:cNvPr id="13" name="グループ化 12">
+              <a:extLst>
+                <a:ext uri="{FF2B5EF4-FFF2-40B4-BE49-F238E27FC236}">
+                  <a16:creationId xmlns:a16="http://schemas.microsoft.com/office/drawing/2014/main" id="{7581442C-8033-310B-3808-75A04AA81A27}"/>
+                </a:ext>
+              </a:extLst>
+            </p:cNvPr>
+            <p:cNvGrpSpPr/>
+            <p:nvPr/>
+          </p:nvGrpSpPr>
+          <p:grpSpPr>
+            <a:xfrm>
+              <a:off x="6270771" y="1711020"/>
+              <a:ext cx="1024577" cy="555608"/>
+              <a:chOff x="6270771" y="1711020"/>
+              <a:chExt cx="1024577" cy="555608"/>
+            </a:xfrm>
+          </p:grpSpPr>
+          <p:sp>
+            <p:nvSpPr>
+              <p:cNvPr id="16" name="テキスト ボックス 15">
+                <a:extLst>
+                  <a:ext uri="{FF2B5EF4-FFF2-40B4-BE49-F238E27FC236}">
+                    <a16:creationId xmlns:a16="http://schemas.microsoft.com/office/drawing/2014/main" id="{71828FA5-061C-AF5C-9C35-16A412F921AC}"/>
+                  </a:ext>
+                </a:extLst>
+              </p:cNvPr>
+              <p:cNvSpPr txBox="1"/>
+              <p:nvPr/>
+            </p:nvSpPr>
+            <p:spPr>
+              <a:xfrm>
+                <a:off x="6270771" y="1711020"/>
+                <a:ext cx="1024577" cy="461665"/>
+              </a:xfrm>
+              <a:prstGeom prst="rect">
+                <a:avLst/>
+              </a:prstGeom>
+              <a:noFill/>
+            </p:spPr>
+            <p:txBody>
+              <a:bodyPr wrap="square" rtlCol="0">
+                <a:spAutoFit/>
+              </a:bodyPr>
+              <a:lstStyle/>
+              <a:p>
+                <a:r>
+                  <a:rPr kumimoji="1" lang="ja-JP" altLang="en-US" sz="2400">
+                    <a:latin typeface="Hiragino Kaku Gothic StdN W8" panose="020B0800000000000000" pitchFamily="34" charset="-128"/>
+                    <a:ea typeface="Hiragino Kaku Gothic StdN W8" panose="020B0800000000000000" pitchFamily="34" charset="-128"/>
+                  </a:rPr>
+                  <a:t>現状</a:t>
+                </a:r>
+              </a:p>
+            </p:txBody>
+          </p:sp>
+          <p:sp>
+            <p:nvSpPr>
+              <p:cNvPr id="17" name="円/楕円 16">
+                <a:extLst>
+                  <a:ext uri="{FF2B5EF4-FFF2-40B4-BE49-F238E27FC236}">
+                    <a16:creationId xmlns:a16="http://schemas.microsoft.com/office/drawing/2014/main" id="{527F636E-5B5D-DA3F-C107-8D5B20B7C845}"/>
+                  </a:ext>
+                </a:extLst>
+              </p:cNvPr>
+              <p:cNvSpPr/>
+              <p:nvPr/>
+            </p:nvSpPr>
+            <p:spPr>
+              <a:xfrm>
+                <a:off x="6419541" y="2080078"/>
+                <a:ext cx="186550" cy="186550"/>
+              </a:xfrm>
+              <a:prstGeom prst="ellipse">
+                <a:avLst/>
+              </a:prstGeom>
+              <a:solidFill>
+                <a:schemeClr val="tx1"/>
+              </a:solidFill>
+              <a:ln>
+                <a:noFill/>
+              </a:ln>
+            </p:spPr>
+            <p:style>
+              <a:lnRef idx="2">
+                <a:schemeClr val="accent1">
+                  <a:shade val="50000"/>
+                </a:schemeClr>
+              </a:lnRef>
+              <a:fillRef idx="1">
+                <a:schemeClr val="accent1"/>
+              </a:fillRef>
+              <a:effectRef idx="0">
+                <a:schemeClr val="accent1"/>
+              </a:effectRef>
+              <a:fontRef idx="minor">
+                <a:schemeClr val="lt1"/>
+              </a:fontRef>
+            </p:style>
+            <p:txBody>
+              <a:bodyPr rtlCol="0" anchor="ctr"/>
+              <a:lstStyle/>
+              <a:p>
+                <a:pPr algn="ctr"/>
+                <a:endParaRPr kumimoji="1" lang="ja-JP" altLang="en-US"/>
+              </a:p>
+            </p:txBody>
+          </p:sp>
+        </p:grpSp>
+      </p:grpSp>
+    </p:spTree>
+    <p:extLst>
+      <p:ext uri="{BB962C8B-B14F-4D97-AF65-F5344CB8AC3E}">
+        <p14:creationId xmlns:p14="http://schemas.microsoft.com/office/powerpoint/2010/main" val="2655794605"/>
+      </p:ext>
+    </p:extLst>
+  </p:cSld>
+  <p:clrMapOvr>
+    <a:masterClrMapping/>
+  </p:clrMapOvr>
+</p:sld>
+</file>
+
+<file path=ppt/slides/slide7.xml><?xml version="1.0" encoding="utf-8"?>
+<p:sld xmlns:a="http://schemas.openxmlformats.org/drawingml/2006/main" xmlns:r="http://schemas.openxmlformats.org/officeDocument/2006/relationships" xmlns:p="http://schemas.openxmlformats.org/presentationml/2006/main">
+  <p:cSld>
+    <p:spTree>
+      <p:nvGrpSpPr>
+        <p:cNvPr id="1" name=""/>
+        <p:cNvGrpSpPr/>
+        <p:nvPr/>
+      </p:nvGrpSpPr>
+      <p:grpSpPr>
+        <a:xfrm>
+          <a:off x="0" y="0"/>
+          <a:ext cx="0" cy="0"/>
+          <a:chOff x="0" y="0"/>
+          <a:chExt cx="0" cy="0"/>
+        </a:xfrm>
+      </p:grpSpPr>
+      <p:grpSp>
+        <p:nvGrpSpPr>
+          <p:cNvPr id="86" name="グループ化 85">
+            <a:extLst>
+              <a:ext uri="{FF2B5EF4-FFF2-40B4-BE49-F238E27FC236}">
+                <a16:creationId xmlns:a16="http://schemas.microsoft.com/office/drawing/2014/main" id="{F057E61F-C13B-435C-BE32-D177B1444EEF}"/>
+              </a:ext>
+            </a:extLst>
+          </p:cNvPr>
+          <p:cNvGrpSpPr/>
+          <p:nvPr/>
+        </p:nvGrpSpPr>
+        <p:grpSpPr>
+          <a:xfrm>
+            <a:off x="766152" y="390292"/>
+            <a:ext cx="9994775" cy="6304768"/>
+            <a:chOff x="766152" y="390292"/>
+            <a:chExt cx="9994775" cy="6304768"/>
+          </a:xfrm>
+        </p:grpSpPr>
+        <p:cxnSp>
+          <p:nvCxnSpPr>
+            <p:cNvPr id="5" name="直線矢印コネクタ 4">
+              <a:extLst>
+                <a:ext uri="{FF2B5EF4-FFF2-40B4-BE49-F238E27FC236}">
+                  <a16:creationId xmlns:a16="http://schemas.microsoft.com/office/drawing/2014/main" id="{EB33F547-F7D8-7A97-03FB-4FAED7CA71DD}"/>
+                </a:ext>
+              </a:extLst>
+            </p:cNvPr>
+            <p:cNvCxnSpPr>
+              <a:cxnSpLocks/>
+            </p:cNvCxnSpPr>
+            <p:nvPr/>
+          </p:nvCxnSpPr>
+          <p:spPr>
+            <a:xfrm>
+              <a:off x="1320150" y="6216979"/>
+              <a:ext cx="9440777" cy="0"/>
+            </a:xfrm>
+            <a:prstGeom prst="straightConnector1">
+              <a:avLst/>
+            </a:prstGeom>
+            <a:ln w="28575">
+              <a:solidFill>
+                <a:schemeClr val="tx1"/>
+              </a:solidFill>
+              <a:tailEnd type="triangle"/>
+            </a:ln>
+          </p:spPr>
+          <p:style>
+            <a:lnRef idx="1">
+              <a:schemeClr val="accent1"/>
+            </a:lnRef>
+            <a:fillRef idx="0">
+              <a:schemeClr val="accent1"/>
+            </a:fillRef>
+            <a:effectRef idx="0">
+              <a:schemeClr val="accent1"/>
+            </a:effectRef>
+            <a:fontRef idx="minor">
+              <a:schemeClr val="tx1"/>
+            </a:fontRef>
+          </p:style>
+        </p:cxnSp>
+        <p:cxnSp>
+          <p:nvCxnSpPr>
+            <p:cNvPr id="6" name="直線矢印コネクタ 5">
+              <a:extLst>
+                <a:ext uri="{FF2B5EF4-FFF2-40B4-BE49-F238E27FC236}">
+                  <a16:creationId xmlns:a16="http://schemas.microsoft.com/office/drawing/2014/main" id="{FD2BB151-BE11-1FD6-A469-149633D783E5}"/>
+                </a:ext>
+              </a:extLst>
+            </p:cNvPr>
+            <p:cNvCxnSpPr>
+              <a:cxnSpLocks/>
+            </p:cNvCxnSpPr>
+            <p:nvPr/>
+          </p:nvCxnSpPr>
+          <p:spPr>
+            <a:xfrm flipV="1">
+              <a:off x="1320150" y="390293"/>
+              <a:ext cx="0" cy="5826686"/>
+            </a:xfrm>
+            <a:prstGeom prst="straightConnector1">
+              <a:avLst/>
+            </a:prstGeom>
+            <a:ln w="28575">
+              <a:solidFill>
+                <a:schemeClr val="tx1"/>
+              </a:solidFill>
+              <a:tailEnd type="triangle"/>
+            </a:ln>
+          </p:spPr>
+          <p:style>
+            <a:lnRef idx="1">
+              <a:schemeClr val="accent1"/>
+            </a:lnRef>
+            <a:fillRef idx="0">
+              <a:schemeClr val="accent1"/>
+            </a:fillRef>
+            <a:effectRef idx="0">
+              <a:schemeClr val="accent1"/>
+            </a:effectRef>
+            <a:fontRef idx="minor">
+              <a:schemeClr val="tx1"/>
+            </a:fontRef>
+          </p:style>
+        </p:cxnSp>
+        <p:sp>
+          <p:nvSpPr>
+            <p:cNvPr id="7" name="テキスト ボックス 6">
+              <a:extLst>
+                <a:ext uri="{FF2B5EF4-FFF2-40B4-BE49-F238E27FC236}">
+                  <a16:creationId xmlns:a16="http://schemas.microsoft.com/office/drawing/2014/main" id="{BEB57F3C-0323-CCA4-7F64-727AD8DB7DF5}"/>
+                </a:ext>
+              </a:extLst>
+            </p:cNvPr>
+            <p:cNvSpPr txBox="1"/>
+            <p:nvPr/>
+          </p:nvSpPr>
+          <p:spPr>
+            <a:xfrm>
+              <a:off x="9248061" y="6233395"/>
+              <a:ext cx="1512866" cy="461665"/>
+            </a:xfrm>
+            <a:prstGeom prst="rect">
+              <a:avLst/>
+            </a:prstGeom>
+            <a:noFill/>
+          </p:spPr>
+          <p:txBody>
+            <a:bodyPr wrap="square" rtlCol="0">
+              <a:spAutoFit/>
+            </a:bodyPr>
+            <a:lstStyle/>
+            <a:p>
+              <a:pPr algn="ctr"/>
+              <a:r>
+                <a:rPr kumimoji="1" lang="ja-JP" altLang="en-US" sz="2400">
+                  <a:latin typeface="Hiragino Kaku Gothic StdN W8" panose="020B0800000000000000" pitchFamily="34" charset="-128"/>
+                  <a:ea typeface="Hiragino Kaku Gothic StdN W8" panose="020B0800000000000000" pitchFamily="34" charset="-128"/>
+                </a:rPr>
+                <a:t>車関税率</a:t>
+              </a:r>
+            </a:p>
+          </p:txBody>
+        </p:sp>
+        <p:sp>
+          <p:nvSpPr>
+            <p:cNvPr id="8" name="テキスト ボックス 7">
+              <a:extLst>
+                <a:ext uri="{FF2B5EF4-FFF2-40B4-BE49-F238E27FC236}">
+                  <a16:creationId xmlns:a16="http://schemas.microsoft.com/office/drawing/2014/main" id="{3E19D6D4-DC2F-6F64-086A-3235F44D82DE}"/>
+                </a:ext>
+              </a:extLst>
+            </p:cNvPr>
+            <p:cNvSpPr txBox="1"/>
+            <p:nvPr/>
+          </p:nvSpPr>
+          <p:spPr>
+            <a:xfrm>
+              <a:off x="766152" y="390292"/>
+              <a:ext cx="553998" cy="1323439"/>
+            </a:xfrm>
+            <a:prstGeom prst="rect">
+              <a:avLst/>
+            </a:prstGeom>
+            <a:noFill/>
+          </p:spPr>
+          <p:txBody>
+            <a:bodyPr vert="eaVert" wrap="none" rtlCol="0">
+              <a:spAutoFit/>
+            </a:bodyPr>
+            <a:lstStyle/>
+            <a:p>
+              <a:r>
+                <a:rPr kumimoji="1" lang="ja-JP" altLang="en-US" sz="2400">
+                  <a:latin typeface="Hiragino Kaku Gothic StdN W8" panose="020B0800000000000000" pitchFamily="34" charset="-128"/>
+                  <a:ea typeface="Hiragino Kaku Gothic StdN W8" panose="020B0800000000000000" pitchFamily="34" charset="-128"/>
+                </a:rPr>
+                <a:t>肉関税率</a:t>
+              </a:r>
+            </a:p>
+          </p:txBody>
+        </p:sp>
+        <p:cxnSp>
+          <p:nvCxnSpPr>
+            <p:cNvPr id="16" name="直線矢印コネクタ 15">
+              <a:extLst>
+                <a:ext uri="{FF2B5EF4-FFF2-40B4-BE49-F238E27FC236}">
+                  <a16:creationId xmlns:a16="http://schemas.microsoft.com/office/drawing/2014/main" id="{FF4AA89A-8567-F5F1-E3C2-3E6CBF59A7C7}"/>
+                </a:ext>
+              </a:extLst>
+            </p:cNvPr>
+            <p:cNvCxnSpPr>
+              <a:cxnSpLocks/>
+              <a:stCxn id="18" idx="0"/>
+              <a:endCxn id="69" idx="3"/>
+            </p:cNvCxnSpPr>
+            <p:nvPr/>
+          </p:nvCxnSpPr>
+          <p:spPr>
+            <a:xfrm flipV="1">
+              <a:off x="3821015" y="5494146"/>
+              <a:ext cx="2224993" cy="94562"/>
+            </a:xfrm>
+            <a:prstGeom prst="straightConnector1">
+              <a:avLst/>
+            </a:prstGeom>
+            <a:ln w="57150">
+              <a:solidFill>
+                <a:schemeClr val="tx1"/>
+              </a:solidFill>
+              <a:tailEnd type="triangle"/>
+            </a:ln>
+          </p:spPr>
+          <p:style>
+            <a:lnRef idx="1">
+              <a:schemeClr val="accent1"/>
+            </a:lnRef>
+            <a:fillRef idx="0">
+              <a:schemeClr val="accent1"/>
+            </a:fillRef>
+            <a:effectRef idx="0">
+              <a:schemeClr val="accent1"/>
+            </a:effectRef>
+            <a:fontRef idx="minor">
+              <a:schemeClr val="tx1"/>
+            </a:fontRef>
+          </p:style>
+        </p:cxnSp>
+        <p:cxnSp>
+          <p:nvCxnSpPr>
+            <p:cNvPr id="17" name="直線矢印コネクタ 16">
+              <a:extLst>
+                <a:ext uri="{FF2B5EF4-FFF2-40B4-BE49-F238E27FC236}">
+                  <a16:creationId xmlns:a16="http://schemas.microsoft.com/office/drawing/2014/main" id="{CA4D3983-B276-B546-7750-72A6A245F87C}"/>
+                </a:ext>
+              </a:extLst>
+            </p:cNvPr>
+            <p:cNvCxnSpPr>
+              <a:cxnSpLocks/>
+              <a:stCxn id="18" idx="0"/>
+              <a:endCxn id="56" idx="4"/>
+            </p:cNvCxnSpPr>
+            <p:nvPr/>
+          </p:nvCxnSpPr>
+          <p:spPr>
+            <a:xfrm flipV="1">
+              <a:off x="3821015" y="4570523"/>
+              <a:ext cx="623580" cy="1018185"/>
+            </a:xfrm>
+            <a:prstGeom prst="straightConnector1">
+              <a:avLst/>
+            </a:prstGeom>
+            <a:ln w="57150">
+              <a:solidFill>
+                <a:schemeClr val="tx1"/>
+              </a:solidFill>
+              <a:tailEnd type="triangle"/>
+            </a:ln>
+          </p:spPr>
+          <p:style>
+            <a:lnRef idx="1">
+              <a:schemeClr val="accent1"/>
+            </a:lnRef>
+            <a:fillRef idx="0">
+              <a:schemeClr val="accent1"/>
+            </a:fillRef>
+            <a:effectRef idx="0">
+              <a:schemeClr val="accent1"/>
+            </a:effectRef>
+            <a:fontRef idx="minor">
+              <a:schemeClr val="tx1"/>
+            </a:fontRef>
+          </p:style>
+        </p:cxnSp>
+        <p:cxnSp>
+          <p:nvCxnSpPr>
+            <p:cNvPr id="39" name="直線矢印コネクタ 38">
+              <a:extLst>
+                <a:ext uri="{FF2B5EF4-FFF2-40B4-BE49-F238E27FC236}">
+                  <a16:creationId xmlns:a16="http://schemas.microsoft.com/office/drawing/2014/main" id="{451AFBC7-7AC4-ECA0-2AF2-E5F9B8AE017F}"/>
+                </a:ext>
+              </a:extLst>
+            </p:cNvPr>
+            <p:cNvCxnSpPr>
+              <a:cxnSpLocks/>
+              <a:stCxn id="36" idx="1"/>
+              <a:endCxn id="10" idx="7"/>
+            </p:cNvCxnSpPr>
+            <p:nvPr/>
+          </p:nvCxnSpPr>
+          <p:spPr>
+            <a:xfrm flipH="1">
+              <a:off x="4528925" y="817807"/>
+              <a:ext cx="1390612" cy="1573786"/>
+            </a:xfrm>
+            <a:prstGeom prst="straightConnector1">
+              <a:avLst/>
+            </a:prstGeom>
+            <a:ln w="57150">
+              <a:solidFill>
+                <a:schemeClr val="tx1"/>
+              </a:solidFill>
+              <a:tailEnd type="triangle"/>
+            </a:ln>
+          </p:spPr>
+          <p:style>
+            <a:lnRef idx="1">
+              <a:schemeClr val="accent1"/>
+            </a:lnRef>
+            <a:fillRef idx="0">
+              <a:schemeClr val="accent1"/>
+            </a:fillRef>
+            <a:effectRef idx="0">
+              <a:schemeClr val="accent1"/>
+            </a:effectRef>
+            <a:fontRef idx="minor">
+              <a:schemeClr val="tx1"/>
+            </a:fontRef>
+          </p:style>
+        </p:cxnSp>
+        <p:cxnSp>
+          <p:nvCxnSpPr>
+            <p:cNvPr id="45" name="直線矢印コネクタ 44">
+              <a:extLst>
+                <a:ext uri="{FF2B5EF4-FFF2-40B4-BE49-F238E27FC236}">
+                  <a16:creationId xmlns:a16="http://schemas.microsoft.com/office/drawing/2014/main" id="{01C2DD67-94EA-CF0B-E8C8-8CE605839F57}"/>
+                </a:ext>
+              </a:extLst>
+            </p:cNvPr>
+            <p:cNvCxnSpPr>
+              <a:cxnSpLocks/>
+              <a:stCxn id="36" idx="2"/>
+              <a:endCxn id="54" idx="0"/>
+            </p:cNvCxnSpPr>
+            <p:nvPr/>
+          </p:nvCxnSpPr>
+          <p:spPr>
+            <a:xfrm flipH="1">
+              <a:off x="7543970" y="1233305"/>
+              <a:ext cx="796262" cy="2687131"/>
+            </a:xfrm>
+            <a:prstGeom prst="straightConnector1">
+              <a:avLst/>
+            </a:prstGeom>
+            <a:ln w="57150">
+              <a:solidFill>
+                <a:schemeClr val="tx1"/>
+              </a:solidFill>
+              <a:tailEnd type="triangle"/>
+            </a:ln>
+          </p:spPr>
+          <p:style>
+            <a:lnRef idx="1">
+              <a:schemeClr val="accent1"/>
+            </a:lnRef>
+            <a:fillRef idx="0">
+              <a:schemeClr val="accent1"/>
+            </a:fillRef>
+            <a:effectRef idx="0">
+              <a:schemeClr val="accent1"/>
+            </a:effectRef>
+            <a:fontRef idx="minor">
+              <a:schemeClr val="tx1"/>
+            </a:fontRef>
+          </p:style>
+        </p:cxnSp>
+        <p:grpSp>
+          <p:nvGrpSpPr>
+            <p:cNvPr id="61" name="グループ化 60">
+              <a:extLst>
+                <a:ext uri="{FF2B5EF4-FFF2-40B4-BE49-F238E27FC236}">
+                  <a16:creationId xmlns:a16="http://schemas.microsoft.com/office/drawing/2014/main" id="{5AFAEE14-22A3-B364-BD5A-FAAFFB4371CD}"/>
+                </a:ext>
+              </a:extLst>
+            </p:cNvPr>
+            <p:cNvGrpSpPr/>
+            <p:nvPr/>
+          </p:nvGrpSpPr>
+          <p:grpSpPr>
+            <a:xfrm>
+              <a:off x="2354479" y="390292"/>
+              <a:ext cx="4180231" cy="4180231"/>
+              <a:chOff x="1930271" y="273182"/>
+              <a:chExt cx="4180231" cy="4180231"/>
+            </a:xfrm>
+          </p:grpSpPr>
+          <p:sp>
+            <p:nvSpPr>
+              <p:cNvPr id="10" name="円/楕円 9">
+                <a:extLst>
+                  <a:ext uri="{FF2B5EF4-FFF2-40B4-BE49-F238E27FC236}">
+                    <a16:creationId xmlns:a16="http://schemas.microsoft.com/office/drawing/2014/main" id="{2C54090F-5BDF-8E1A-9525-728FC811FC67}"/>
+                  </a:ext>
+                </a:extLst>
+              </p:cNvPr>
+              <p:cNvSpPr/>
+              <p:nvPr/>
+            </p:nvSpPr>
+            <p:spPr>
+              <a:xfrm>
+                <a:off x="3945487" y="2247163"/>
+                <a:ext cx="186550" cy="186550"/>
+              </a:xfrm>
+              <a:prstGeom prst="ellipse">
+                <a:avLst/>
+              </a:prstGeom>
+              <a:solidFill>
+                <a:schemeClr val="tx1"/>
+              </a:solidFill>
+              <a:ln>
+                <a:noFill/>
+              </a:ln>
+            </p:spPr>
+            <p:style>
+              <a:lnRef idx="2">
+                <a:schemeClr val="accent1">
+                  <a:shade val="50000"/>
+                </a:schemeClr>
+              </a:lnRef>
+              <a:fillRef idx="1">
+                <a:schemeClr val="accent1"/>
+              </a:fillRef>
+              <a:effectRef idx="0">
+                <a:schemeClr val="accent1"/>
+              </a:effectRef>
+              <a:fontRef idx="minor">
+                <a:schemeClr val="lt1"/>
+              </a:fontRef>
+            </p:style>
+            <p:txBody>
+              <a:bodyPr rtlCol="0" anchor="ctr"/>
+              <a:lstStyle/>
+              <a:p>
+                <a:pPr algn="ctr"/>
+                <a:endParaRPr kumimoji="1" lang="ja-JP" altLang="en-US"/>
+              </a:p>
+            </p:txBody>
+          </p:sp>
+          <p:sp>
+            <p:nvSpPr>
+              <p:cNvPr id="12" name="テキスト ボックス 11">
+                <a:extLst>
+                  <a:ext uri="{FF2B5EF4-FFF2-40B4-BE49-F238E27FC236}">
+                    <a16:creationId xmlns:a16="http://schemas.microsoft.com/office/drawing/2014/main" id="{6306C529-4AB1-A3A4-9578-23E6532D7165}"/>
+                  </a:ext>
+                </a:extLst>
+              </p:cNvPr>
+              <p:cNvSpPr txBox="1"/>
+              <p:nvPr/>
+            </p:nvSpPr>
+            <p:spPr>
+              <a:xfrm>
+                <a:off x="3491129" y="2441089"/>
+                <a:ext cx="1024577" cy="461665"/>
+              </a:xfrm>
+              <a:prstGeom prst="rect">
+                <a:avLst/>
+              </a:prstGeom>
+              <a:noFill/>
+            </p:spPr>
+            <p:txBody>
+              <a:bodyPr wrap="square" rtlCol="0">
+                <a:spAutoFit/>
+              </a:bodyPr>
+              <a:lstStyle/>
+              <a:p>
+                <a:pPr algn="ctr"/>
+                <a:r>
+                  <a:rPr kumimoji="1" lang="ja-JP" altLang="en-US" sz="2400">
+                    <a:latin typeface="Hiragino Kaku Gothic StdN W8" panose="020B0800000000000000" pitchFamily="34" charset="-128"/>
+                    <a:ea typeface="Hiragino Kaku Gothic StdN W8" panose="020B0800000000000000" pitchFamily="34" charset="-128"/>
+                  </a:rPr>
+                  <a:t>日本</a:t>
+                </a:r>
+              </a:p>
+            </p:txBody>
+          </p:sp>
+          <p:sp>
+            <p:nvSpPr>
+              <p:cNvPr id="56" name="円/楕円 55">
+                <a:extLst>
+                  <a:ext uri="{FF2B5EF4-FFF2-40B4-BE49-F238E27FC236}">
+                    <a16:creationId xmlns:a16="http://schemas.microsoft.com/office/drawing/2014/main" id="{9CF91C15-1008-EE4A-1A57-2081DB87EBBF}"/>
+                  </a:ext>
+                </a:extLst>
+              </p:cNvPr>
+              <p:cNvSpPr/>
+              <p:nvPr/>
+            </p:nvSpPr>
+            <p:spPr>
+              <a:xfrm>
+                <a:off x="1930271" y="273182"/>
+                <a:ext cx="4180231" cy="4180231"/>
+              </a:xfrm>
+              <a:prstGeom prst="ellipse">
+                <a:avLst/>
+              </a:prstGeom>
+              <a:noFill/>
+              <a:ln w="19050">
+                <a:solidFill>
+                  <a:schemeClr val="tx1"/>
+                </a:solidFill>
+              </a:ln>
+            </p:spPr>
+            <p:style>
+              <a:lnRef idx="2">
+                <a:schemeClr val="accent1">
+                  <a:shade val="15000"/>
+                </a:schemeClr>
+              </a:lnRef>
+              <a:fillRef idx="1">
+                <a:schemeClr val="accent1"/>
+              </a:fillRef>
+              <a:effectRef idx="0">
+                <a:schemeClr val="accent1"/>
+              </a:effectRef>
+              <a:fontRef idx="minor">
+                <a:schemeClr val="lt1"/>
+              </a:fontRef>
+            </p:style>
+            <p:txBody>
+              <a:bodyPr rtlCol="0" anchor="ctr"/>
+              <a:lstStyle/>
+              <a:p>
+                <a:pPr algn="ctr"/>
+                <a:endParaRPr kumimoji="1" lang="ja-JP" altLang="en-US"/>
+              </a:p>
+            </p:txBody>
+          </p:sp>
+        </p:grpSp>
+        <p:grpSp>
+          <p:nvGrpSpPr>
+            <p:cNvPr id="70" name="グループ化 69">
+              <a:extLst>
+                <a:ext uri="{FF2B5EF4-FFF2-40B4-BE49-F238E27FC236}">
+                  <a16:creationId xmlns:a16="http://schemas.microsoft.com/office/drawing/2014/main" id="{D1A10B28-3450-9483-7F89-685300AF3A07}"/>
+                </a:ext>
+              </a:extLst>
+            </p:cNvPr>
+            <p:cNvGrpSpPr/>
+            <p:nvPr/>
+          </p:nvGrpSpPr>
+          <p:grpSpPr>
+            <a:xfrm>
+              <a:off x="5433827" y="1926096"/>
+              <a:ext cx="4180231" cy="4180231"/>
+              <a:chOff x="5450156" y="1722167"/>
+              <a:chExt cx="4180231" cy="4180231"/>
+            </a:xfrm>
+          </p:grpSpPr>
+          <p:sp>
+            <p:nvSpPr>
+              <p:cNvPr id="11" name="テキスト ボックス 10">
+                <a:extLst>
+                  <a:ext uri="{FF2B5EF4-FFF2-40B4-BE49-F238E27FC236}">
+                    <a16:creationId xmlns:a16="http://schemas.microsoft.com/office/drawing/2014/main" id="{1C37FCF3-51F2-CB0F-D820-E7CB21A8EAD9}"/>
+                  </a:ext>
+                </a:extLst>
+              </p:cNvPr>
+              <p:cNvSpPr txBox="1"/>
+              <p:nvPr/>
+            </p:nvSpPr>
+            <p:spPr>
+              <a:xfrm>
+                <a:off x="7012666" y="3887531"/>
+                <a:ext cx="1024577" cy="461665"/>
+              </a:xfrm>
+              <a:prstGeom prst="rect">
+                <a:avLst/>
+              </a:prstGeom>
+              <a:noFill/>
+            </p:spPr>
+            <p:txBody>
+              <a:bodyPr wrap="square" rtlCol="0">
+                <a:spAutoFit/>
+              </a:bodyPr>
+              <a:lstStyle/>
+              <a:p>
+                <a:r>
+                  <a:rPr kumimoji="1" lang="ja-JP" altLang="en-US" sz="2400">
+                    <a:latin typeface="Hiragino Kaku Gothic StdN W8" panose="020B0800000000000000" pitchFamily="34" charset="-128"/>
+                    <a:ea typeface="Hiragino Kaku Gothic StdN W8" panose="020B0800000000000000" pitchFamily="34" charset="-128"/>
+                  </a:rPr>
+                  <a:t>米国</a:t>
+                </a:r>
+              </a:p>
+            </p:txBody>
+          </p:sp>
+          <p:sp>
+            <p:nvSpPr>
+              <p:cNvPr id="54" name="円/楕円 53">
+                <a:extLst>
+                  <a:ext uri="{FF2B5EF4-FFF2-40B4-BE49-F238E27FC236}">
+                    <a16:creationId xmlns:a16="http://schemas.microsoft.com/office/drawing/2014/main" id="{EC3FF6CC-06A8-D43E-95AF-BD94DEB76569}"/>
+                  </a:ext>
+                </a:extLst>
+              </p:cNvPr>
+              <p:cNvSpPr/>
+              <p:nvPr/>
+            </p:nvSpPr>
+            <p:spPr>
+              <a:xfrm>
+                <a:off x="7467024" y="3716507"/>
+                <a:ext cx="186550" cy="186550"/>
+              </a:xfrm>
+              <a:prstGeom prst="ellipse">
+                <a:avLst/>
+              </a:prstGeom>
+              <a:solidFill>
+                <a:schemeClr val="tx1"/>
+              </a:solidFill>
+              <a:ln>
+                <a:noFill/>
+              </a:ln>
+            </p:spPr>
+            <p:style>
+              <a:lnRef idx="2">
+                <a:schemeClr val="accent1">
+                  <a:shade val="50000"/>
+                </a:schemeClr>
+              </a:lnRef>
+              <a:fillRef idx="1">
+                <a:schemeClr val="accent1"/>
+              </a:fillRef>
+              <a:effectRef idx="0">
+                <a:schemeClr val="accent1"/>
+              </a:effectRef>
+              <a:fontRef idx="minor">
+                <a:schemeClr val="lt1"/>
+              </a:fontRef>
+            </p:style>
+            <p:txBody>
+              <a:bodyPr rtlCol="0" anchor="ctr"/>
+              <a:lstStyle/>
+              <a:p>
+                <a:pPr algn="ctr"/>
+                <a:endParaRPr kumimoji="1" lang="ja-JP" altLang="en-US"/>
+              </a:p>
+            </p:txBody>
+          </p:sp>
+          <p:sp>
+            <p:nvSpPr>
+              <p:cNvPr id="69" name="円/楕円 68">
+                <a:extLst>
+                  <a:ext uri="{FF2B5EF4-FFF2-40B4-BE49-F238E27FC236}">
+                    <a16:creationId xmlns:a16="http://schemas.microsoft.com/office/drawing/2014/main" id="{098F2BBD-4268-2151-1436-68F4912F76F0}"/>
+                  </a:ext>
+                </a:extLst>
+              </p:cNvPr>
+              <p:cNvSpPr/>
+              <p:nvPr/>
+            </p:nvSpPr>
+            <p:spPr>
+              <a:xfrm>
+                <a:off x="5450156" y="1722167"/>
+                <a:ext cx="4180231" cy="4180231"/>
+              </a:xfrm>
+              <a:prstGeom prst="ellipse">
+                <a:avLst/>
+              </a:prstGeom>
+              <a:noFill/>
+              <a:ln w="19050">
+                <a:solidFill>
+                  <a:schemeClr val="tx1"/>
+                </a:solidFill>
+              </a:ln>
+            </p:spPr>
+            <p:style>
+              <a:lnRef idx="2">
+                <a:schemeClr val="accent1">
+                  <a:shade val="15000"/>
+                </a:schemeClr>
+              </a:lnRef>
+              <a:fillRef idx="1">
+                <a:schemeClr val="accent1"/>
+              </a:fillRef>
+              <a:effectRef idx="0">
+                <a:schemeClr val="accent1"/>
+              </a:effectRef>
+              <a:fontRef idx="minor">
+                <a:schemeClr val="lt1"/>
+              </a:fontRef>
+            </p:style>
+            <p:txBody>
+              <a:bodyPr rtlCol="0" anchor="ctr"/>
+              <a:lstStyle/>
+              <a:p>
+                <a:pPr algn="ctr"/>
+                <a:endParaRPr kumimoji="1" lang="ja-JP" altLang="en-US"/>
+              </a:p>
+            </p:txBody>
+          </p:sp>
+        </p:grpSp>
+        <p:grpSp>
+          <p:nvGrpSpPr>
+            <p:cNvPr id="85" name="グループ化 84">
+              <a:extLst>
+                <a:ext uri="{FF2B5EF4-FFF2-40B4-BE49-F238E27FC236}">
+                  <a16:creationId xmlns:a16="http://schemas.microsoft.com/office/drawing/2014/main" id="{AA92FCEE-3E88-E65B-FFEB-F64CAC1511AA}"/>
+                </a:ext>
+              </a:extLst>
+            </p:cNvPr>
+            <p:cNvGrpSpPr/>
+            <p:nvPr/>
+          </p:nvGrpSpPr>
+          <p:grpSpPr>
+            <a:xfrm>
+              <a:off x="6270771" y="1711020"/>
+              <a:ext cx="1024577" cy="555608"/>
+              <a:chOff x="6270771" y="1711020"/>
+              <a:chExt cx="1024577" cy="555608"/>
+            </a:xfrm>
+          </p:grpSpPr>
+          <p:sp>
+            <p:nvSpPr>
+              <p:cNvPr id="14" name="テキスト ボックス 13">
+                <a:extLst>
+                  <a:ext uri="{FF2B5EF4-FFF2-40B4-BE49-F238E27FC236}">
+                    <a16:creationId xmlns:a16="http://schemas.microsoft.com/office/drawing/2014/main" id="{6D192728-DE81-0704-0633-94CC9340E4C1}"/>
+                  </a:ext>
+                </a:extLst>
+              </p:cNvPr>
+              <p:cNvSpPr txBox="1"/>
+              <p:nvPr/>
+            </p:nvSpPr>
+            <p:spPr>
+              <a:xfrm>
+                <a:off x="6270771" y="1711020"/>
+                <a:ext cx="1024577" cy="461665"/>
+              </a:xfrm>
+              <a:prstGeom prst="rect">
+                <a:avLst/>
+              </a:prstGeom>
+              <a:noFill/>
+            </p:spPr>
+            <p:txBody>
+              <a:bodyPr wrap="square" rtlCol="0">
+                <a:spAutoFit/>
+              </a:bodyPr>
+              <a:lstStyle/>
+              <a:p>
+                <a:r>
+                  <a:rPr kumimoji="1" lang="ja-JP" altLang="en-US" sz="2400">
+                    <a:latin typeface="Hiragino Kaku Gothic StdN W8" panose="020B0800000000000000" pitchFamily="34" charset="-128"/>
+                    <a:ea typeface="Hiragino Kaku Gothic StdN W8" panose="020B0800000000000000" pitchFamily="34" charset="-128"/>
+                  </a:rPr>
+                  <a:t>現状</a:t>
+                </a:r>
+              </a:p>
+            </p:txBody>
+          </p:sp>
+          <p:sp>
+            <p:nvSpPr>
+              <p:cNvPr id="83" name="円/楕円 82">
+                <a:extLst>
+                  <a:ext uri="{FF2B5EF4-FFF2-40B4-BE49-F238E27FC236}">
+                    <a16:creationId xmlns:a16="http://schemas.microsoft.com/office/drawing/2014/main" id="{E5931750-6C45-5E24-F2F5-628DB08F9727}"/>
+                  </a:ext>
+                </a:extLst>
+              </p:cNvPr>
+              <p:cNvSpPr/>
+              <p:nvPr/>
+            </p:nvSpPr>
+            <p:spPr>
+              <a:xfrm>
+                <a:off x="6419541" y="2080078"/>
+                <a:ext cx="186550" cy="186550"/>
+              </a:xfrm>
+              <a:prstGeom prst="ellipse">
+                <a:avLst/>
+              </a:prstGeom>
+              <a:solidFill>
+                <a:schemeClr val="tx1"/>
+              </a:solidFill>
+              <a:ln>
+                <a:noFill/>
+              </a:ln>
+            </p:spPr>
+            <p:style>
+              <a:lnRef idx="2">
+                <a:schemeClr val="accent1">
+                  <a:shade val="50000"/>
+                </a:schemeClr>
+              </a:lnRef>
+              <a:fillRef idx="1">
+                <a:schemeClr val="accent1"/>
+              </a:fillRef>
+              <a:effectRef idx="0">
+                <a:schemeClr val="accent1"/>
+              </a:effectRef>
+              <a:fontRef idx="minor">
+                <a:schemeClr val="lt1"/>
+              </a:fontRef>
+            </p:style>
+            <p:txBody>
+              <a:bodyPr rtlCol="0" anchor="ctr"/>
+              <a:lstStyle/>
+              <a:p>
+                <a:pPr algn="ctr"/>
+                <a:endParaRPr kumimoji="1" lang="ja-JP" altLang="en-US"/>
+              </a:p>
+            </p:txBody>
+          </p:sp>
+        </p:grpSp>
+        <p:sp>
+          <p:nvSpPr>
+            <p:cNvPr id="36" name="テキスト ボックス 35">
+              <a:extLst>
+                <a:ext uri="{FF2B5EF4-FFF2-40B4-BE49-F238E27FC236}">
+                  <a16:creationId xmlns:a16="http://schemas.microsoft.com/office/drawing/2014/main" id="{D8E5F7C8-44BC-6DCA-C1C4-BEF58A338DDE}"/>
+                </a:ext>
+              </a:extLst>
+            </p:cNvPr>
+            <p:cNvSpPr txBox="1"/>
+            <p:nvPr/>
+          </p:nvSpPr>
+          <p:spPr>
+            <a:xfrm>
+              <a:off x="5919537" y="402308"/>
+              <a:ext cx="4841390" cy="830997"/>
+            </a:xfrm>
+            <a:prstGeom prst="rect">
+              <a:avLst/>
+            </a:prstGeom>
+            <a:solidFill>
+              <a:schemeClr val="bg1"/>
+            </a:solidFill>
+            <a:ln>
+              <a:solidFill>
+                <a:schemeClr val="tx1"/>
+              </a:solidFill>
+            </a:ln>
+          </p:spPr>
+          <p:txBody>
+            <a:bodyPr wrap="square" rtlCol="0">
+              <a:spAutoFit/>
+            </a:bodyPr>
+            <a:lstStyle/>
+            <a:p>
+              <a:r>
+                <a:rPr kumimoji="1" lang="ja-JP" altLang="en-US" sz="2400" b="1">
+                  <a:latin typeface="Hiragino Sans W4" panose="020B0400000000000000" pitchFamily="34" charset="-128"/>
+                  <a:ea typeface="Hiragino Sans W4" panose="020B0400000000000000" pitchFamily="34" charset="-128"/>
+                </a:rPr>
+                <a:t>理想点</a:t>
+              </a:r>
+              <a:r>
+                <a:rPr kumimoji="1" lang="ja-JP" altLang="en-US" sz="2400">
+                  <a:latin typeface="Hiragino Sans W4" panose="020B0400000000000000" pitchFamily="34" charset="-128"/>
+                  <a:ea typeface="Hiragino Sans W4" panose="020B0400000000000000" pitchFamily="34" charset="-128"/>
+                </a:rPr>
+                <a:t>（</a:t>
+              </a:r>
+              <a:r>
+                <a:rPr kumimoji="1" lang="en-US" altLang="ja-JP" sz="2400" dirty="0">
+                  <a:latin typeface="Hiragino Sans W4" panose="020B0400000000000000" pitchFamily="34" charset="-128"/>
+                  <a:ea typeface="Hiragino Sans W4" panose="020B0400000000000000" pitchFamily="34" charset="-128"/>
+                </a:rPr>
+                <a:t>ideal point</a:t>
+              </a:r>
+              <a:r>
+                <a:rPr kumimoji="1" lang="ja-JP" altLang="en-US" sz="2400">
+                  <a:latin typeface="Hiragino Sans W4" panose="020B0400000000000000" pitchFamily="34" charset="-128"/>
+                  <a:ea typeface="Hiragino Sans W4" panose="020B0400000000000000" pitchFamily="34" charset="-128"/>
+                </a:rPr>
+                <a:t>）</a:t>
+              </a:r>
+              <a:endParaRPr kumimoji="1" lang="en-US" altLang="ja-JP" sz="2400" dirty="0">
+                <a:latin typeface="Hiragino Sans W4" panose="020B0400000000000000" pitchFamily="34" charset="-128"/>
+                <a:ea typeface="Hiragino Sans W4" panose="020B0400000000000000" pitchFamily="34" charset="-128"/>
+              </a:endParaRPr>
+            </a:p>
+            <a:p>
+              <a:r>
+                <a:rPr kumimoji="1" lang="ja-JP" altLang="en-US" sz="2400">
+                  <a:latin typeface="Hiragino Sans W4" panose="020B0400000000000000" pitchFamily="34" charset="-128"/>
+                  <a:ea typeface="Hiragino Sans W4" panose="020B0400000000000000" pitchFamily="34" charset="-128"/>
+                </a:rPr>
+                <a:t>＝各国にとって最も望ましい結果</a:t>
+              </a:r>
+            </a:p>
+          </p:txBody>
+        </p:sp>
+        <p:sp>
+          <p:nvSpPr>
+            <p:cNvPr id="18" name="テキスト ボックス 17">
+              <a:extLst>
+                <a:ext uri="{FF2B5EF4-FFF2-40B4-BE49-F238E27FC236}">
+                  <a16:creationId xmlns:a16="http://schemas.microsoft.com/office/drawing/2014/main" id="{8FC79F9D-8DCF-5373-C297-B45DB8017F1A}"/>
+                </a:ext>
+              </a:extLst>
+            </p:cNvPr>
+            <p:cNvSpPr txBox="1"/>
+            <p:nvPr/>
+          </p:nvSpPr>
+          <p:spPr>
+            <a:xfrm>
+              <a:off x="1107322" y="5588708"/>
+              <a:ext cx="5427385" cy="830997"/>
+            </a:xfrm>
+            <a:prstGeom prst="rect">
+              <a:avLst/>
+            </a:prstGeom>
+            <a:solidFill>
+              <a:schemeClr val="bg1"/>
+            </a:solidFill>
+            <a:ln>
+              <a:solidFill>
+                <a:schemeClr val="tx1"/>
+              </a:solidFill>
+            </a:ln>
+          </p:spPr>
+          <p:txBody>
+            <a:bodyPr wrap="square" rtlCol="0">
+              <a:spAutoFit/>
+            </a:bodyPr>
+            <a:lstStyle/>
+            <a:p>
+              <a:r>
+                <a:rPr kumimoji="1" lang="ja-JP" altLang="en-US" sz="2400" b="1">
+                  <a:latin typeface="Hiragino Sans W4" panose="020B0400000000000000" pitchFamily="34" charset="-128"/>
+                  <a:ea typeface="Hiragino Sans W4" panose="020B0400000000000000" pitchFamily="34" charset="-128"/>
+                </a:rPr>
+                <a:t>無差別曲線</a:t>
+              </a:r>
+              <a:r>
+                <a:rPr kumimoji="1" lang="ja-JP" altLang="en-US" sz="2400">
+                  <a:latin typeface="Hiragino Sans W4" panose="020B0400000000000000" pitchFamily="34" charset="-128"/>
+                  <a:ea typeface="Hiragino Sans W4" panose="020B0400000000000000" pitchFamily="34" charset="-128"/>
+                </a:rPr>
+                <a:t>（</a:t>
+              </a:r>
+              <a:r>
+                <a:rPr kumimoji="1" lang="en-US" altLang="ja-JP" sz="2400" dirty="0">
+                  <a:latin typeface="Hiragino Sans W4" panose="020B0400000000000000" pitchFamily="34" charset="-128"/>
+                  <a:ea typeface="Hiragino Sans W4" panose="020B0400000000000000" pitchFamily="34" charset="-128"/>
+                </a:rPr>
+                <a:t>indifference curve</a:t>
+              </a:r>
+              <a:r>
+                <a:rPr kumimoji="1" lang="ja-JP" altLang="en-US" sz="2400">
+                  <a:latin typeface="Hiragino Sans W4" panose="020B0400000000000000" pitchFamily="34" charset="-128"/>
+                  <a:ea typeface="Hiragino Sans W4" panose="020B0400000000000000" pitchFamily="34" charset="-128"/>
+                </a:rPr>
+                <a:t>）</a:t>
+              </a:r>
+              <a:endParaRPr kumimoji="1" lang="en-US" altLang="ja-JP" sz="2400" dirty="0">
+                <a:latin typeface="Hiragino Sans W4" panose="020B0400000000000000" pitchFamily="34" charset="-128"/>
+                <a:ea typeface="Hiragino Sans W4" panose="020B0400000000000000" pitchFamily="34" charset="-128"/>
+              </a:endParaRPr>
+            </a:p>
+            <a:p>
+              <a:r>
+                <a:rPr kumimoji="1" lang="ja-JP" altLang="en-US" sz="2400">
+                  <a:latin typeface="Hiragino Sans W4" panose="020B0400000000000000" pitchFamily="34" charset="-128"/>
+                  <a:ea typeface="Hiragino Sans W4" panose="020B0400000000000000" pitchFamily="34" charset="-128"/>
+                </a:rPr>
+                <a:t>＝各国にとっての受け入れ可能な範囲</a:t>
+              </a:r>
+            </a:p>
+          </p:txBody>
+        </p:sp>
+      </p:grpSp>
+    </p:spTree>
+    <p:extLst>
+      <p:ext uri="{BB962C8B-B14F-4D97-AF65-F5344CB8AC3E}">
+        <p14:creationId xmlns:p14="http://schemas.microsoft.com/office/powerpoint/2010/main" val="2536978197"/>
+      </p:ext>
+    </p:extLst>
+  </p:cSld>
+  <p:clrMapOvr>
+    <a:masterClrMapping/>
+  </p:clrMapOvr>
+</p:sld>
+</file>
+
+<file path=ppt/slides/slide8.xml><?xml version="1.0" encoding="utf-8"?>
+<p:sld xmlns:a="http://schemas.openxmlformats.org/drawingml/2006/main" xmlns:r="http://schemas.openxmlformats.org/officeDocument/2006/relationships" xmlns:p="http://schemas.openxmlformats.org/presentationml/2006/main">
+  <p:cSld>
+    <p:spTree>
+      <p:nvGrpSpPr>
+        <p:cNvPr id="1" name=""/>
+        <p:cNvGrpSpPr/>
+        <p:nvPr/>
+      </p:nvGrpSpPr>
+      <p:grpSpPr>
+        <a:xfrm>
+          <a:off x="0" y="0"/>
+          <a:ext cx="0" cy="0"/>
+          <a:chOff x="0" y="0"/>
+          <a:chExt cx="0" cy="0"/>
+        </a:xfrm>
+      </p:grpSpPr>
+      <p:grpSp>
+        <p:nvGrpSpPr>
+          <p:cNvPr id="27" name="グループ化 26">
+            <a:extLst>
+              <a:ext uri="{FF2B5EF4-FFF2-40B4-BE49-F238E27FC236}">
+                <a16:creationId xmlns:a16="http://schemas.microsoft.com/office/drawing/2014/main" id="{2D0E64CE-CDA6-3E7B-6763-43E891648623}"/>
+              </a:ext>
+            </a:extLst>
+          </p:cNvPr>
+          <p:cNvGrpSpPr/>
+          <p:nvPr/>
+        </p:nvGrpSpPr>
+        <p:grpSpPr>
+          <a:xfrm>
+            <a:off x="766152" y="390292"/>
+            <a:ext cx="9994775" cy="6304768"/>
+            <a:chOff x="766152" y="390292"/>
+            <a:chExt cx="9994775" cy="6304768"/>
+          </a:xfrm>
+        </p:grpSpPr>
+        <p:sp>
+          <p:nvSpPr>
+            <p:cNvPr id="21" name="フリーフォーム 20">
+              <a:extLst>
+                <a:ext uri="{FF2B5EF4-FFF2-40B4-BE49-F238E27FC236}">
+                  <a16:creationId xmlns:a16="http://schemas.microsoft.com/office/drawing/2014/main" id="{B1326135-3B09-5D0C-67BF-514AA535DBBF}"/>
+                </a:ext>
+              </a:extLst>
+            </p:cNvPr>
+            <p:cNvSpPr/>
+            <p:nvPr/>
+          </p:nvSpPr>
+          <p:spPr>
+            <a:xfrm>
+              <a:off x="5430308" y="2201557"/>
+              <a:ext cx="1100884" cy="2120735"/>
+            </a:xfrm>
+            <a:custGeom>
+              <a:avLst/>
+              <a:gdLst>
+                <a:gd name="csX0" fmla="*/ 1078073 w 1100884"/>
+                <a:gd name="csY0" fmla="*/ 0 h 2120735"/>
+                <a:gd name="csX1" fmla="*/ 1090093 w 1100884"/>
+                <a:gd name="csY1" fmla="*/ 78763 h 2120735"/>
+                <a:gd name="csX2" fmla="*/ 1100884 w 1100884"/>
+                <a:gd name="csY2" fmla="*/ 292465 h 2120735"/>
+                <a:gd name="csX3" fmla="*/ 179372 w 1100884"/>
+                <a:gd name="csY3" fmla="*/ 2025622 h 2120735"/>
+                <a:gd name="csX4" fmla="*/ 22812 w 1100884"/>
+                <a:gd name="csY4" fmla="*/ 2120735 h 2120735"/>
+                <a:gd name="csX5" fmla="*/ 10791 w 1100884"/>
+                <a:gd name="csY5" fmla="*/ 2041971 h 2120735"/>
+                <a:gd name="csX6" fmla="*/ 0 w 1100884"/>
+                <a:gd name="csY6" fmla="*/ 1828269 h 2120735"/>
+                <a:gd name="csX7" fmla="*/ 921513 w 1100884"/>
+                <a:gd name="csY7" fmla="*/ 95112 h 2120735"/>
+              </a:gdLst>
+              <a:ahLst/>
+              <a:cxnLst>
+                <a:cxn ang="0">
+                  <a:pos x="csX0" y="csY0"/>
+                </a:cxn>
+                <a:cxn ang="0">
+                  <a:pos x="csX1" y="csY1"/>
+                </a:cxn>
+                <a:cxn ang="0">
+                  <a:pos x="csX2" y="csY2"/>
+                </a:cxn>
+                <a:cxn ang="0">
+                  <a:pos x="csX3" y="csY3"/>
+                </a:cxn>
+                <a:cxn ang="0">
+                  <a:pos x="csX4" y="csY4"/>
+                </a:cxn>
+                <a:cxn ang="0">
+                  <a:pos x="csX5" y="csY5"/>
+                </a:cxn>
+                <a:cxn ang="0">
+                  <a:pos x="csX6" y="csY6"/>
+                </a:cxn>
+                <a:cxn ang="0">
+                  <a:pos x="csX7" y="csY7"/>
+                </a:cxn>
+              </a:cxnLst>
+              <a:rect l="l" t="t" r="r" b="b"/>
+              <a:pathLst>
+                <a:path w="1100884" h="2120735">
+                  <a:moveTo>
+                    <a:pt x="1078073" y="0"/>
+                  </a:moveTo>
+                  <a:lnTo>
+                    <a:pt x="1090093" y="78763"/>
+                  </a:lnTo>
+                  <a:cubicBezTo>
+                    <a:pt x="1097229" y="149027"/>
+                    <a:pt x="1100884" y="220319"/>
+                    <a:pt x="1100884" y="292465"/>
+                  </a:cubicBezTo>
+                  <a:cubicBezTo>
+                    <a:pt x="1100884" y="1013927"/>
+                    <a:pt x="735346" y="1650013"/>
+                    <a:pt x="179372" y="2025622"/>
+                  </a:cubicBezTo>
+                  <a:lnTo>
+                    <a:pt x="22812" y="2120735"/>
+                  </a:lnTo>
+                  <a:lnTo>
+                    <a:pt x="10791" y="2041971"/>
+                  </a:lnTo>
+                  <a:cubicBezTo>
+                    <a:pt x="3656" y="1971708"/>
+                    <a:pt x="0" y="1900415"/>
+                    <a:pt x="0" y="1828269"/>
+                  </a:cubicBezTo>
+                  <a:cubicBezTo>
+                    <a:pt x="0" y="1106807"/>
+                    <a:pt x="365538" y="470721"/>
+                    <a:pt x="921513" y="95112"/>
+                  </a:cubicBezTo>
+                  <a:close/>
+                </a:path>
+              </a:pathLst>
+            </a:custGeom>
+            <a:solidFill>
+              <a:srgbClr val="FF0000">
+                <a:alpha val="45999"/>
+              </a:srgbClr>
+            </a:solidFill>
+            <a:ln w="19050">
+              <a:noFill/>
+            </a:ln>
+          </p:spPr>
+          <p:style>
+            <a:lnRef idx="2">
+              <a:schemeClr val="accent1">
+                <a:shade val="15000"/>
+              </a:schemeClr>
+            </a:lnRef>
+            <a:fillRef idx="1">
+              <a:schemeClr val="accent1"/>
+            </a:fillRef>
+            <a:effectRef idx="0">
+              <a:schemeClr val="accent1"/>
+            </a:effectRef>
+            <a:fontRef idx="minor">
+              <a:schemeClr val="lt1"/>
+            </a:fontRef>
+          </p:style>
+          <p:txBody>
+            <a:bodyPr wrap="square" rtlCol="0" anchor="ctr">
+              <a:noAutofit/>
+            </a:bodyPr>
+            <a:lstStyle/>
+            <a:p>
+              <a:pPr algn="ctr"/>
+              <a:endParaRPr kumimoji="1" lang="ja-JP" altLang="en-US"/>
+            </a:p>
+          </p:txBody>
+        </p:sp>
+        <p:cxnSp>
+          <p:nvCxnSpPr>
+            <p:cNvPr id="3" name="直線矢印コネクタ 2">
+              <a:extLst>
+                <a:ext uri="{FF2B5EF4-FFF2-40B4-BE49-F238E27FC236}">
+                  <a16:creationId xmlns:a16="http://schemas.microsoft.com/office/drawing/2014/main" id="{F053167C-2D65-C1F4-DD2E-918546E80D30}"/>
+                </a:ext>
+              </a:extLst>
+            </p:cNvPr>
+            <p:cNvCxnSpPr>
+              <a:cxnSpLocks/>
+            </p:cNvCxnSpPr>
+            <p:nvPr/>
+          </p:nvCxnSpPr>
+          <p:spPr>
+            <a:xfrm>
+              <a:off x="1320150" y="6216979"/>
+              <a:ext cx="9440777" cy="0"/>
+            </a:xfrm>
+            <a:prstGeom prst="straightConnector1">
+              <a:avLst/>
+            </a:prstGeom>
+            <a:ln w="28575">
+              <a:solidFill>
+                <a:schemeClr val="tx1"/>
+              </a:solidFill>
+              <a:tailEnd type="triangle"/>
+            </a:ln>
+          </p:spPr>
+          <p:style>
+            <a:lnRef idx="1">
+              <a:schemeClr val="accent1"/>
+            </a:lnRef>
+            <a:fillRef idx="0">
+              <a:schemeClr val="accent1"/>
+            </a:fillRef>
+            <a:effectRef idx="0">
+              <a:schemeClr val="accent1"/>
+            </a:effectRef>
+            <a:fontRef idx="minor">
+              <a:schemeClr val="tx1"/>
+            </a:fontRef>
+          </p:style>
+        </p:cxnSp>
+        <p:cxnSp>
+          <p:nvCxnSpPr>
+            <p:cNvPr id="4" name="直線矢印コネクタ 3">
+              <a:extLst>
+                <a:ext uri="{FF2B5EF4-FFF2-40B4-BE49-F238E27FC236}">
+                  <a16:creationId xmlns:a16="http://schemas.microsoft.com/office/drawing/2014/main" id="{9AF80579-EA06-BAF8-035A-8E5FF46B6302}"/>
+                </a:ext>
+              </a:extLst>
+            </p:cNvPr>
+            <p:cNvCxnSpPr>
+              <a:cxnSpLocks/>
+            </p:cNvCxnSpPr>
+            <p:nvPr/>
+          </p:nvCxnSpPr>
+          <p:spPr>
+            <a:xfrm flipV="1">
+              <a:off x="1320150" y="390293"/>
+              <a:ext cx="0" cy="5826686"/>
+            </a:xfrm>
+            <a:prstGeom prst="straightConnector1">
+              <a:avLst/>
+            </a:prstGeom>
+            <a:ln w="28575">
+              <a:solidFill>
+                <a:schemeClr val="tx1"/>
+              </a:solidFill>
+              <a:tailEnd type="triangle"/>
+            </a:ln>
+          </p:spPr>
+          <p:style>
+            <a:lnRef idx="1">
+              <a:schemeClr val="accent1"/>
+            </a:lnRef>
+            <a:fillRef idx="0">
+              <a:schemeClr val="accent1"/>
+            </a:fillRef>
+            <a:effectRef idx="0">
+              <a:schemeClr val="accent1"/>
+            </a:effectRef>
+            <a:fontRef idx="minor">
+              <a:schemeClr val="tx1"/>
+            </a:fontRef>
+          </p:style>
+        </p:cxnSp>
+        <p:sp>
+          <p:nvSpPr>
+            <p:cNvPr id="5" name="テキスト ボックス 4">
+              <a:extLst>
+                <a:ext uri="{FF2B5EF4-FFF2-40B4-BE49-F238E27FC236}">
+                  <a16:creationId xmlns:a16="http://schemas.microsoft.com/office/drawing/2014/main" id="{E27D69AB-99C6-76D3-4974-4D040D287331}"/>
+                </a:ext>
+              </a:extLst>
+            </p:cNvPr>
+            <p:cNvSpPr txBox="1"/>
+            <p:nvPr/>
+          </p:nvSpPr>
+          <p:spPr>
+            <a:xfrm>
+              <a:off x="9248061" y="6233395"/>
+              <a:ext cx="1512866" cy="461665"/>
+            </a:xfrm>
+            <a:prstGeom prst="rect">
+              <a:avLst/>
+            </a:prstGeom>
+            <a:noFill/>
+          </p:spPr>
+          <p:txBody>
+            <a:bodyPr wrap="square" rtlCol="0">
+              <a:spAutoFit/>
+            </a:bodyPr>
+            <a:lstStyle/>
+            <a:p>
+              <a:pPr algn="ctr"/>
+              <a:r>
+                <a:rPr kumimoji="1" lang="ja-JP" altLang="en-US" sz="2400">
+                  <a:latin typeface="Hiragino Kaku Gothic StdN W8" panose="020B0800000000000000" pitchFamily="34" charset="-128"/>
+                  <a:ea typeface="Hiragino Kaku Gothic StdN W8" panose="020B0800000000000000" pitchFamily="34" charset="-128"/>
+                </a:rPr>
+                <a:t>車関税率</a:t>
+              </a:r>
+            </a:p>
+          </p:txBody>
+        </p:sp>
+        <p:sp>
+          <p:nvSpPr>
+            <p:cNvPr id="6" name="テキスト ボックス 5">
+              <a:extLst>
+                <a:ext uri="{FF2B5EF4-FFF2-40B4-BE49-F238E27FC236}">
+                  <a16:creationId xmlns:a16="http://schemas.microsoft.com/office/drawing/2014/main" id="{95FC9B2C-353A-C779-21AD-CC70229FCFF3}"/>
+                </a:ext>
+              </a:extLst>
+            </p:cNvPr>
+            <p:cNvSpPr txBox="1"/>
+            <p:nvPr/>
+          </p:nvSpPr>
+          <p:spPr>
+            <a:xfrm>
+              <a:off x="766152" y="390292"/>
+              <a:ext cx="553998" cy="1323439"/>
+            </a:xfrm>
+            <a:prstGeom prst="rect">
+              <a:avLst/>
+            </a:prstGeom>
+            <a:noFill/>
+          </p:spPr>
+          <p:txBody>
+            <a:bodyPr vert="eaVert" wrap="none" rtlCol="0">
+              <a:spAutoFit/>
+            </a:bodyPr>
+            <a:lstStyle/>
+            <a:p>
+              <a:r>
+                <a:rPr kumimoji="1" lang="ja-JP" altLang="en-US" sz="2400">
+                  <a:latin typeface="Hiragino Kaku Gothic StdN W8" panose="020B0800000000000000" pitchFamily="34" charset="-128"/>
+                  <a:ea typeface="Hiragino Kaku Gothic StdN W8" panose="020B0800000000000000" pitchFamily="34" charset="-128"/>
+                </a:rPr>
+                <a:t>肉関税率</a:t>
+              </a:r>
+            </a:p>
+          </p:txBody>
+        </p:sp>
+        <p:sp>
+          <p:nvSpPr>
+            <p:cNvPr id="15" name="円/楕円 14">
+              <a:extLst>
+                <a:ext uri="{FF2B5EF4-FFF2-40B4-BE49-F238E27FC236}">
+                  <a16:creationId xmlns:a16="http://schemas.microsoft.com/office/drawing/2014/main" id="{9BCA4DC2-E16D-3947-E359-71719137B8DF}"/>
+                </a:ext>
+              </a:extLst>
+            </p:cNvPr>
+            <p:cNvSpPr/>
+            <p:nvPr/>
+          </p:nvSpPr>
+          <p:spPr>
+            <a:xfrm>
+              <a:off x="4369695" y="2364273"/>
+              <a:ext cx="186550" cy="186550"/>
+            </a:xfrm>
+            <a:prstGeom prst="ellipse">
+              <a:avLst/>
+            </a:prstGeom>
+            <a:solidFill>
+              <a:schemeClr val="tx1"/>
+            </a:solidFill>
+            <a:ln>
+              <a:noFill/>
+            </a:ln>
+          </p:spPr>
+          <p:style>
+            <a:lnRef idx="2">
+              <a:schemeClr val="accent1">
+                <a:shade val="50000"/>
+              </a:schemeClr>
+            </a:lnRef>
+            <a:fillRef idx="1">
+              <a:schemeClr val="accent1"/>
+            </a:fillRef>
+            <a:effectRef idx="0">
+              <a:schemeClr val="accent1"/>
+            </a:effectRef>
+            <a:fontRef idx="minor">
+              <a:schemeClr val="lt1"/>
+            </a:fontRef>
+          </p:style>
+          <p:txBody>
+            <a:bodyPr rtlCol="0" anchor="ctr"/>
+            <a:lstStyle/>
+            <a:p>
+              <a:pPr algn="ctr"/>
+              <a:endParaRPr kumimoji="1" lang="ja-JP" altLang="en-US"/>
+            </a:p>
+          </p:txBody>
+        </p:sp>
+        <p:sp>
+          <p:nvSpPr>
+            <p:cNvPr id="16" name="テキスト ボックス 15">
+              <a:extLst>
+                <a:ext uri="{FF2B5EF4-FFF2-40B4-BE49-F238E27FC236}">
+                  <a16:creationId xmlns:a16="http://schemas.microsoft.com/office/drawing/2014/main" id="{0535611D-3D6A-35D7-617C-4EBCBE257007}"/>
+                </a:ext>
+              </a:extLst>
+            </p:cNvPr>
+            <p:cNvSpPr txBox="1"/>
+            <p:nvPr/>
+          </p:nvSpPr>
+          <p:spPr>
+            <a:xfrm>
+              <a:off x="3915337" y="2558199"/>
+              <a:ext cx="1024577" cy="461665"/>
+            </a:xfrm>
+            <a:prstGeom prst="rect">
+              <a:avLst/>
+            </a:prstGeom>
+            <a:noFill/>
+          </p:spPr>
+          <p:txBody>
+            <a:bodyPr wrap="square" rtlCol="0">
+              <a:spAutoFit/>
+            </a:bodyPr>
+            <a:lstStyle/>
+            <a:p>
+              <a:pPr algn="ctr"/>
+              <a:r>
+                <a:rPr kumimoji="1" lang="ja-JP" altLang="en-US" sz="2400">
+                  <a:latin typeface="Hiragino Kaku Gothic StdN W8" panose="020B0800000000000000" pitchFamily="34" charset="-128"/>
+                  <a:ea typeface="Hiragino Kaku Gothic StdN W8" panose="020B0800000000000000" pitchFamily="34" charset="-128"/>
+                </a:rPr>
+                <a:t>日本</a:t>
+              </a:r>
+            </a:p>
+          </p:txBody>
+        </p:sp>
+        <p:sp>
+          <p:nvSpPr>
+            <p:cNvPr id="17" name="円/楕円 16">
+              <a:extLst>
+                <a:ext uri="{FF2B5EF4-FFF2-40B4-BE49-F238E27FC236}">
+                  <a16:creationId xmlns:a16="http://schemas.microsoft.com/office/drawing/2014/main" id="{BB147123-0E8F-2C10-0C77-34492678BE04}"/>
+                </a:ext>
+              </a:extLst>
+            </p:cNvPr>
+            <p:cNvSpPr/>
+            <p:nvPr/>
+          </p:nvSpPr>
+          <p:spPr>
+            <a:xfrm>
+              <a:off x="2354479" y="390292"/>
+              <a:ext cx="4180231" cy="4180231"/>
+            </a:xfrm>
+            <a:prstGeom prst="ellipse">
+              <a:avLst/>
+            </a:prstGeom>
+            <a:noFill/>
+            <a:ln w="19050">
+              <a:solidFill>
+                <a:schemeClr val="tx1"/>
+              </a:solidFill>
+            </a:ln>
+          </p:spPr>
+          <p:style>
+            <a:lnRef idx="2">
+              <a:schemeClr val="accent1">
+                <a:shade val="15000"/>
+              </a:schemeClr>
+            </a:lnRef>
+            <a:fillRef idx="1">
+              <a:schemeClr val="accent1"/>
+            </a:fillRef>
+            <a:effectRef idx="0">
+              <a:schemeClr val="accent1"/>
+            </a:effectRef>
+            <a:fontRef idx="minor">
+              <a:schemeClr val="lt1"/>
+            </a:fontRef>
+          </p:style>
+          <p:txBody>
+            <a:bodyPr rtlCol="0" anchor="ctr"/>
+            <a:lstStyle/>
+            <a:p>
+              <a:pPr algn="ctr"/>
+              <a:endParaRPr kumimoji="1" lang="ja-JP" altLang="en-US"/>
+            </a:p>
+          </p:txBody>
+        </p:sp>
+        <p:sp>
+          <p:nvSpPr>
+            <p:cNvPr id="12" name="テキスト ボックス 11">
+              <a:extLst>
+                <a:ext uri="{FF2B5EF4-FFF2-40B4-BE49-F238E27FC236}">
+                  <a16:creationId xmlns:a16="http://schemas.microsoft.com/office/drawing/2014/main" id="{CEB6F196-94AD-3346-91C5-54606213F811}"/>
+                </a:ext>
+              </a:extLst>
+            </p:cNvPr>
+            <p:cNvSpPr txBox="1"/>
+            <p:nvPr/>
+          </p:nvSpPr>
+          <p:spPr>
+            <a:xfrm>
+              <a:off x="6996337" y="4091460"/>
+              <a:ext cx="1024577" cy="461665"/>
+            </a:xfrm>
+            <a:prstGeom prst="rect">
+              <a:avLst/>
+            </a:prstGeom>
+            <a:noFill/>
+          </p:spPr>
+          <p:txBody>
+            <a:bodyPr wrap="square" rtlCol="0">
+              <a:spAutoFit/>
+            </a:bodyPr>
+            <a:lstStyle/>
+            <a:p>
+              <a:r>
+                <a:rPr kumimoji="1" lang="ja-JP" altLang="en-US" sz="2400">
+                  <a:latin typeface="Hiragino Kaku Gothic StdN W8" panose="020B0800000000000000" pitchFamily="34" charset="-128"/>
+                  <a:ea typeface="Hiragino Kaku Gothic StdN W8" panose="020B0800000000000000" pitchFamily="34" charset="-128"/>
+                </a:rPr>
+                <a:t>米国</a:t>
+              </a:r>
+            </a:p>
+          </p:txBody>
+        </p:sp>
+        <p:sp>
+          <p:nvSpPr>
+            <p:cNvPr id="13" name="円/楕円 12">
+              <a:extLst>
+                <a:ext uri="{FF2B5EF4-FFF2-40B4-BE49-F238E27FC236}">
+                  <a16:creationId xmlns:a16="http://schemas.microsoft.com/office/drawing/2014/main" id="{1BAB4AA8-156E-4D83-DA59-4C6F2A7F254C}"/>
+                </a:ext>
+              </a:extLst>
+            </p:cNvPr>
+            <p:cNvSpPr/>
+            <p:nvPr/>
+          </p:nvSpPr>
+          <p:spPr>
+            <a:xfrm>
+              <a:off x="7450695" y="3920436"/>
+              <a:ext cx="186550" cy="186550"/>
+            </a:xfrm>
+            <a:prstGeom prst="ellipse">
+              <a:avLst/>
+            </a:prstGeom>
+            <a:solidFill>
+              <a:schemeClr val="tx1"/>
+            </a:solidFill>
+            <a:ln>
+              <a:noFill/>
+            </a:ln>
+          </p:spPr>
+          <p:style>
+            <a:lnRef idx="2">
+              <a:schemeClr val="accent1">
+                <a:shade val="50000"/>
+              </a:schemeClr>
+            </a:lnRef>
+            <a:fillRef idx="1">
+              <a:schemeClr val="accent1"/>
+            </a:fillRef>
+            <a:effectRef idx="0">
+              <a:schemeClr val="accent1"/>
+            </a:effectRef>
+            <a:fontRef idx="minor">
+              <a:schemeClr val="lt1"/>
+            </a:fontRef>
+          </p:style>
+          <p:txBody>
+            <a:bodyPr rtlCol="0" anchor="ctr"/>
+            <a:lstStyle/>
+            <a:p>
+              <a:pPr algn="ctr"/>
+              <a:endParaRPr kumimoji="1" lang="ja-JP" altLang="en-US"/>
+            </a:p>
+          </p:txBody>
+        </p:sp>
+        <p:sp>
+          <p:nvSpPr>
+            <p:cNvPr id="14" name="円/楕円 13">
+              <a:extLst>
+                <a:ext uri="{FF2B5EF4-FFF2-40B4-BE49-F238E27FC236}">
+                  <a16:creationId xmlns:a16="http://schemas.microsoft.com/office/drawing/2014/main" id="{A283B04F-6648-3F29-F787-5058E4E59D24}"/>
+                </a:ext>
+              </a:extLst>
+            </p:cNvPr>
+            <p:cNvSpPr/>
+            <p:nvPr/>
+          </p:nvSpPr>
+          <p:spPr>
+            <a:xfrm>
+              <a:off x="5433827" y="1926096"/>
+              <a:ext cx="4180231" cy="4180231"/>
+            </a:xfrm>
+            <a:prstGeom prst="ellipse">
+              <a:avLst/>
+            </a:prstGeom>
+            <a:noFill/>
+            <a:ln w="19050">
+              <a:solidFill>
+                <a:schemeClr val="tx1"/>
+              </a:solidFill>
+            </a:ln>
+          </p:spPr>
+          <p:style>
+            <a:lnRef idx="2">
+              <a:schemeClr val="accent1">
+                <a:shade val="15000"/>
+              </a:schemeClr>
+            </a:lnRef>
+            <a:fillRef idx="1">
+              <a:schemeClr val="accent1"/>
+            </a:fillRef>
+            <a:effectRef idx="0">
+              <a:schemeClr val="accent1"/>
+            </a:effectRef>
+            <a:fontRef idx="minor">
+              <a:schemeClr val="lt1"/>
+            </a:fontRef>
+          </p:style>
+          <p:txBody>
+            <a:bodyPr rtlCol="0" anchor="ctr"/>
+            <a:lstStyle/>
+            <a:p>
+              <a:pPr algn="ctr"/>
+              <a:endParaRPr kumimoji="1" lang="ja-JP" altLang="en-US"/>
+            </a:p>
+          </p:txBody>
+        </p:sp>
+        <p:grpSp>
+          <p:nvGrpSpPr>
+            <p:cNvPr id="9" name="グループ化 8">
+              <a:extLst>
+                <a:ext uri="{FF2B5EF4-FFF2-40B4-BE49-F238E27FC236}">
+                  <a16:creationId xmlns:a16="http://schemas.microsoft.com/office/drawing/2014/main" id="{C6FE73ED-90C9-E426-45AA-C15FF1B35F81}"/>
+                </a:ext>
+              </a:extLst>
+            </p:cNvPr>
+            <p:cNvGrpSpPr/>
+            <p:nvPr/>
+          </p:nvGrpSpPr>
+          <p:grpSpPr>
+            <a:xfrm>
+              <a:off x="6270771" y="1711020"/>
+              <a:ext cx="1024577" cy="555608"/>
+              <a:chOff x="6270771" y="1711020"/>
+              <a:chExt cx="1024577" cy="555608"/>
+            </a:xfrm>
+          </p:grpSpPr>
+          <p:sp>
+            <p:nvSpPr>
+              <p:cNvPr id="10" name="テキスト ボックス 9">
+                <a:extLst>
+                  <a:ext uri="{FF2B5EF4-FFF2-40B4-BE49-F238E27FC236}">
+                    <a16:creationId xmlns:a16="http://schemas.microsoft.com/office/drawing/2014/main" id="{9B0B7F9D-1073-76F1-CFB2-9AB6ED7296ED}"/>
+                  </a:ext>
+                </a:extLst>
+              </p:cNvPr>
+              <p:cNvSpPr txBox="1"/>
+              <p:nvPr/>
+            </p:nvSpPr>
+            <p:spPr>
+              <a:xfrm>
+                <a:off x="6270771" y="1711020"/>
+                <a:ext cx="1024577" cy="461665"/>
+              </a:xfrm>
+              <a:prstGeom prst="rect">
+                <a:avLst/>
+              </a:prstGeom>
+              <a:noFill/>
+            </p:spPr>
+            <p:txBody>
+              <a:bodyPr wrap="square" rtlCol="0">
+                <a:spAutoFit/>
+              </a:bodyPr>
+              <a:lstStyle/>
+              <a:p>
+                <a:r>
+                  <a:rPr kumimoji="1" lang="ja-JP" altLang="en-US" sz="2400">
+                    <a:latin typeface="Hiragino Kaku Gothic StdN W8" panose="020B0800000000000000" pitchFamily="34" charset="-128"/>
+                    <a:ea typeface="Hiragino Kaku Gothic StdN W8" panose="020B0800000000000000" pitchFamily="34" charset="-128"/>
+                  </a:rPr>
+                  <a:t>現状</a:t>
+                </a:r>
+              </a:p>
+            </p:txBody>
+          </p:sp>
+          <p:sp>
+            <p:nvSpPr>
+              <p:cNvPr id="11" name="円/楕円 10">
+                <a:extLst>
+                  <a:ext uri="{FF2B5EF4-FFF2-40B4-BE49-F238E27FC236}">
+                    <a16:creationId xmlns:a16="http://schemas.microsoft.com/office/drawing/2014/main" id="{192FAEB4-7B5F-9F13-4D7D-3C0C5612F497}"/>
+                  </a:ext>
+                </a:extLst>
+              </p:cNvPr>
+              <p:cNvSpPr/>
+              <p:nvPr/>
+            </p:nvSpPr>
+            <p:spPr>
+              <a:xfrm>
+                <a:off x="6419541" y="2080078"/>
+                <a:ext cx="186550" cy="186550"/>
+              </a:xfrm>
+              <a:prstGeom prst="ellipse">
+                <a:avLst/>
+              </a:prstGeom>
+              <a:solidFill>
+                <a:schemeClr val="tx1"/>
+              </a:solidFill>
+              <a:ln>
+                <a:noFill/>
+              </a:ln>
+            </p:spPr>
+            <p:style>
+              <a:lnRef idx="2">
+                <a:schemeClr val="accent1">
+                  <a:shade val="50000"/>
+                </a:schemeClr>
+              </a:lnRef>
+              <a:fillRef idx="1">
+                <a:schemeClr val="accent1"/>
+              </a:fillRef>
+              <a:effectRef idx="0">
+                <a:schemeClr val="accent1"/>
+              </a:effectRef>
+              <a:fontRef idx="minor">
+                <a:schemeClr val="lt1"/>
+              </a:fontRef>
+            </p:style>
+            <p:txBody>
+              <a:bodyPr rtlCol="0" anchor="ctr"/>
+              <a:lstStyle/>
+              <a:p>
+                <a:pPr algn="ctr"/>
+                <a:endParaRPr kumimoji="1" lang="ja-JP" altLang="en-US"/>
+              </a:p>
+            </p:txBody>
+          </p:sp>
+        </p:grpSp>
+        <p:cxnSp>
+          <p:nvCxnSpPr>
+            <p:cNvPr id="22" name="直線矢印コネクタ 21">
+              <a:extLst>
+                <a:ext uri="{FF2B5EF4-FFF2-40B4-BE49-F238E27FC236}">
+                  <a16:creationId xmlns:a16="http://schemas.microsoft.com/office/drawing/2014/main" id="{D6819D70-EBE4-EC0B-D5B4-24573AAB134C}"/>
+                </a:ext>
+              </a:extLst>
+            </p:cNvPr>
+            <p:cNvCxnSpPr>
+              <a:cxnSpLocks/>
+              <a:stCxn id="23" idx="0"/>
+              <a:endCxn id="14" idx="2"/>
+            </p:cNvCxnSpPr>
+            <p:nvPr/>
+          </p:nvCxnSpPr>
+          <p:spPr>
+            <a:xfrm flipV="1">
+              <a:off x="4033842" y="4016212"/>
+              <a:ext cx="1399985" cy="728124"/>
+            </a:xfrm>
+            <a:prstGeom prst="straightConnector1">
+              <a:avLst/>
+            </a:prstGeom>
+            <a:ln w="57150">
+              <a:solidFill>
+                <a:schemeClr val="tx1"/>
+              </a:solidFill>
+              <a:tailEnd type="triangle"/>
+            </a:ln>
+          </p:spPr>
+          <p:style>
+            <a:lnRef idx="1">
+              <a:schemeClr val="accent1"/>
+            </a:lnRef>
+            <a:fillRef idx="0">
+              <a:schemeClr val="accent1"/>
+            </a:fillRef>
+            <a:effectRef idx="0">
+              <a:schemeClr val="accent1"/>
+            </a:effectRef>
+            <a:fontRef idx="minor">
+              <a:schemeClr val="tx1"/>
+            </a:fontRef>
+          </p:style>
+        </p:cxnSp>
+        <p:sp>
+          <p:nvSpPr>
+            <p:cNvPr id="23" name="テキスト ボックス 22">
+              <a:extLst>
+                <a:ext uri="{FF2B5EF4-FFF2-40B4-BE49-F238E27FC236}">
+                  <a16:creationId xmlns:a16="http://schemas.microsoft.com/office/drawing/2014/main" id="{41CE7F9A-23B9-95EB-A64E-46AEAEE2F35F}"/>
+                </a:ext>
+              </a:extLst>
+            </p:cNvPr>
+            <p:cNvSpPr txBox="1"/>
+            <p:nvPr/>
+          </p:nvSpPr>
+          <p:spPr>
+            <a:xfrm>
+              <a:off x="1320149" y="4744336"/>
+              <a:ext cx="5427385" cy="1569660"/>
+            </a:xfrm>
+            <a:prstGeom prst="rect">
+              <a:avLst/>
+            </a:prstGeom>
+            <a:solidFill>
+              <a:schemeClr val="bg1"/>
+            </a:solidFill>
+            <a:ln>
+              <a:solidFill>
+                <a:schemeClr val="tx1"/>
+              </a:solidFill>
+            </a:ln>
+          </p:spPr>
+          <p:txBody>
+            <a:bodyPr wrap="square" rtlCol="0">
+              <a:spAutoFit/>
+            </a:bodyPr>
+            <a:lstStyle/>
+            <a:p>
+              <a:r>
+                <a:rPr kumimoji="1" lang="ja-JP" altLang="en-US" sz="2400" b="1">
+                  <a:latin typeface="Hiragino Sans W4" panose="020B0400000000000000" pitchFamily="34" charset="-128"/>
+                  <a:ea typeface="Hiragino Sans W4" panose="020B0400000000000000" pitchFamily="34" charset="-128"/>
+                </a:rPr>
+                <a:t>勝利集合</a:t>
+              </a:r>
+              <a:r>
+                <a:rPr kumimoji="1" lang="ja-JP" altLang="en-US" sz="2400">
+                  <a:latin typeface="Hiragino Sans W4" panose="020B0400000000000000" pitchFamily="34" charset="-128"/>
+                  <a:ea typeface="Hiragino Sans W4" panose="020B0400000000000000" pitchFamily="34" charset="-128"/>
+                </a:rPr>
+                <a:t>（</a:t>
+              </a:r>
+              <a:r>
+                <a:rPr kumimoji="1" lang="en-US" altLang="ja-JP" sz="2400" dirty="0" err="1">
+                  <a:latin typeface="Hiragino Sans W4" panose="020B0400000000000000" pitchFamily="34" charset="-128"/>
+                  <a:ea typeface="Hiragino Sans W4" panose="020B0400000000000000" pitchFamily="34" charset="-128"/>
+                </a:rPr>
+                <a:t>winset</a:t>
+              </a:r>
+              <a:r>
+                <a:rPr kumimoji="1" lang="ja-JP" altLang="en-US" sz="2400">
+                  <a:latin typeface="Hiragino Sans W4" panose="020B0400000000000000" pitchFamily="34" charset="-128"/>
+                  <a:ea typeface="Hiragino Sans W4" panose="020B0400000000000000" pitchFamily="34" charset="-128"/>
+                </a:rPr>
+                <a:t>）</a:t>
+              </a:r>
+              <a:endParaRPr kumimoji="1" lang="en-US" altLang="ja-JP" sz="2400" dirty="0">
+                <a:latin typeface="Hiragino Sans W4" panose="020B0400000000000000" pitchFamily="34" charset="-128"/>
+                <a:ea typeface="Hiragino Sans W4" panose="020B0400000000000000" pitchFamily="34" charset="-128"/>
+              </a:endParaRPr>
+            </a:p>
+            <a:p>
+              <a:r>
+                <a:rPr kumimoji="1" lang="ja-JP" altLang="en-US" sz="2400">
+                  <a:latin typeface="Hiragino Sans W4" panose="020B0400000000000000" pitchFamily="34" charset="-128"/>
+                  <a:ea typeface="Hiragino Sans W4" panose="020B0400000000000000" pitchFamily="34" charset="-128"/>
+                </a:rPr>
+                <a:t>＝両者が合意できる範囲</a:t>
+              </a:r>
+              <a:endParaRPr kumimoji="1" lang="en-US" altLang="ja-JP" sz="2400" dirty="0">
+                <a:latin typeface="Hiragino Sans W4" panose="020B0400000000000000" pitchFamily="34" charset="-128"/>
+                <a:ea typeface="Hiragino Sans W4" panose="020B0400000000000000" pitchFamily="34" charset="-128"/>
+              </a:endParaRPr>
+            </a:p>
+            <a:p>
+              <a:pPr marL="342900" indent="-342900">
+                <a:buFont typeface="Arial" panose="020B0604020202020204" pitchFamily="34" charset="0"/>
+                <a:buChar char="•"/>
+              </a:pPr>
+              <a:r>
+                <a:rPr kumimoji="1" lang="ja-JP" altLang="en-US" sz="2400">
+                  <a:latin typeface="Hiragino Sans W4" panose="020B0400000000000000" pitchFamily="34" charset="-128"/>
+                  <a:ea typeface="Hiragino Sans W4" panose="020B0400000000000000" pitchFamily="34" charset="-128"/>
+                </a:rPr>
+                <a:t>現状よりも望ましい</a:t>
+              </a:r>
+              <a:endParaRPr kumimoji="1" lang="en-US" altLang="ja-JP" sz="2400" dirty="0">
+                <a:latin typeface="Hiragino Sans W4" panose="020B0400000000000000" pitchFamily="34" charset="-128"/>
+                <a:ea typeface="Hiragino Sans W4" panose="020B0400000000000000" pitchFamily="34" charset="-128"/>
+              </a:endParaRPr>
+            </a:p>
+            <a:p>
+              <a:pPr marL="342900" indent="-342900">
+                <a:buFont typeface="Arial" panose="020B0604020202020204" pitchFamily="34" charset="0"/>
+                <a:buChar char="•"/>
+              </a:pPr>
+              <a:r>
+                <a:rPr lang="ja-JP" altLang="en-US" sz="2400">
+                  <a:latin typeface="Hiragino Sans W4" panose="020B0400000000000000" pitchFamily="34" charset="-128"/>
+                  <a:ea typeface="Hiragino Sans W4" panose="020B0400000000000000" pitchFamily="34" charset="-128"/>
+                </a:rPr>
+                <a:t>広さが合意のしやすさを表す</a:t>
+              </a:r>
+              <a:endParaRPr kumimoji="1" lang="ja-JP" altLang="en-US" sz="2400">
+                <a:latin typeface="Hiragino Sans W4" panose="020B0400000000000000" pitchFamily="34" charset="-128"/>
+                <a:ea typeface="Hiragino Sans W4" panose="020B0400000000000000" pitchFamily="34" charset="-128"/>
+              </a:endParaRPr>
+            </a:p>
+          </p:txBody>
+        </p:sp>
+      </p:grpSp>
+    </p:spTree>
+    <p:extLst>
+      <p:ext uri="{BB962C8B-B14F-4D97-AF65-F5344CB8AC3E}">
+        <p14:creationId xmlns:p14="http://schemas.microsoft.com/office/powerpoint/2010/main" val="2567997111"/>
+      </p:ext>
+    </p:extLst>
+  </p:cSld>
+  <p:clrMapOvr>
+    <a:masterClrMapping/>
+  </p:clrMapOvr>
+</p:sld>
+</file>
+
+<file path=ppt/slides/slide9.xml><?xml version="1.0" encoding="utf-8"?>
+<p:sld xmlns:a="http://schemas.openxmlformats.org/drawingml/2006/main" xmlns:r="http://schemas.openxmlformats.org/officeDocument/2006/relationships" xmlns:p="http://schemas.openxmlformats.org/presentationml/2006/main">
+  <p:cSld>
+    <p:spTree>
+      <p:nvGrpSpPr>
+        <p:cNvPr id="1" name=""/>
+        <p:cNvGrpSpPr/>
+        <p:nvPr/>
+      </p:nvGrpSpPr>
+      <p:grpSpPr>
+        <a:xfrm>
+          <a:off x="0" y="0"/>
+          <a:ext cx="0" cy="0"/>
+          <a:chOff x="0" y="0"/>
+          <a:chExt cx="0" cy="0"/>
+        </a:xfrm>
+      </p:grpSpPr>
+      <p:grpSp>
+        <p:nvGrpSpPr>
+          <p:cNvPr id="58" name="グループ化 57">
+            <a:extLst>
+              <a:ext uri="{FF2B5EF4-FFF2-40B4-BE49-F238E27FC236}">
+                <a16:creationId xmlns:a16="http://schemas.microsoft.com/office/drawing/2014/main" id="{8C50C00B-D171-09FE-6CA8-E94F2CB13D43}"/>
+              </a:ext>
+            </a:extLst>
+          </p:cNvPr>
+          <p:cNvGrpSpPr/>
+          <p:nvPr/>
+        </p:nvGrpSpPr>
+        <p:grpSpPr>
+          <a:xfrm>
+            <a:off x="766152" y="390292"/>
+            <a:ext cx="9994775" cy="6304768"/>
+            <a:chOff x="766152" y="390292"/>
+            <a:chExt cx="9994775" cy="6304768"/>
+          </a:xfrm>
+        </p:grpSpPr>
+        <p:sp>
+          <p:nvSpPr>
+            <p:cNvPr id="52" name="フリーフォーム 51">
+              <a:extLst>
+                <a:ext uri="{FF2B5EF4-FFF2-40B4-BE49-F238E27FC236}">
+                  <a16:creationId xmlns:a16="http://schemas.microsoft.com/office/drawing/2014/main" id="{B84C41E5-FE30-59A8-EB75-54D7B6459018}"/>
+                </a:ext>
+              </a:extLst>
+            </p:cNvPr>
+            <p:cNvSpPr/>
+            <p:nvPr/>
+          </p:nvSpPr>
+          <p:spPr>
+            <a:xfrm>
+              <a:off x="4665375" y="1532167"/>
+              <a:ext cx="1859303" cy="2975393"/>
+            </a:xfrm>
+            <a:custGeom>
+              <a:avLst/>
+              <a:gdLst>
+                <a:gd name="csX0" fmla="*/ 1827440 w 1859303"/>
+                <a:gd name="csY0" fmla="*/ 1298000 h 2975393"/>
+                <a:gd name="csX1" fmla="*/ 1819666 w 1859303"/>
+                <a:gd name="csY1" fmla="*/ 1346839 h 2975393"/>
+                <a:gd name="csX2" fmla="*/ 935553 w 1859303"/>
+                <a:gd name="csY2" fmla="*/ 2684332 h 2975393"/>
+                <a:gd name="csX3" fmla="*/ 778993 w 1859303"/>
+                <a:gd name="csY3" fmla="*/ 2779445 h 2975393"/>
+                <a:gd name="csX4" fmla="*/ 776932 w 1859303"/>
+                <a:gd name="csY4" fmla="*/ 2765944 h 2975393"/>
+                <a:gd name="csX5" fmla="*/ 842194 w 1859303"/>
+                <a:gd name="csY5" fmla="*/ 2730240 h 2975393"/>
+                <a:gd name="csX6" fmla="*/ 1796685 w 1859303"/>
+                <a:gd name="csY6" fmla="*/ 1446018 h 2975393"/>
+                <a:gd name="csX7" fmla="*/ 1834091 w 1859303"/>
+                <a:gd name="csY7" fmla="*/ 1256216 h 2975393"/>
+                <a:gd name="csX8" fmla="*/ 1831097 w 1859303"/>
+                <a:gd name="csY8" fmla="*/ 1280400 h 2975393"/>
+                <a:gd name="csX9" fmla="*/ 1827440 w 1859303"/>
+                <a:gd name="csY9" fmla="*/ 1298000 h 2975393"/>
+                <a:gd name="csX10" fmla="*/ 1844827 w 1859303"/>
+                <a:gd name="csY10" fmla="*/ 1169487 h 2975393"/>
+                <a:gd name="csX11" fmla="*/ 1840272 w 1859303"/>
+                <a:gd name="csY11" fmla="*/ 1217379 h 2975393"/>
+                <a:gd name="csX12" fmla="*/ 1834091 w 1859303"/>
+                <a:gd name="csY12" fmla="*/ 1256216 h 2975393"/>
+                <a:gd name="csX13" fmla="*/ 1635975 w 1859303"/>
+                <a:gd name="csY13" fmla="*/ 0 h 2975393"/>
+                <a:gd name="csX14" fmla="*/ 1695052 w 1859303"/>
+                <a:gd name="csY14" fmla="*/ 122635 h 2975393"/>
+                <a:gd name="csX15" fmla="*/ 1859303 w 1859303"/>
+                <a:gd name="csY15" fmla="*/ 936202 h 2975393"/>
+                <a:gd name="csX16" fmla="*/ 1852158 w 1859303"/>
+                <a:gd name="csY16" fmla="*/ 1110274 h 2975393"/>
+                <a:gd name="csX17" fmla="*/ 1844827 w 1859303"/>
+                <a:gd name="csY17" fmla="*/ 1169487 h 2975393"/>
+                <a:gd name="csX18" fmla="*/ 1852824 w 1859303"/>
+                <a:gd name="csY18" fmla="*/ 1085406 h 2975393"/>
+                <a:gd name="csX19" fmla="*/ 1857065 w 1859303"/>
+                <a:gd name="csY19" fmla="*/ 951175 h 2975393"/>
+                <a:gd name="csX20" fmla="*/ 1846274 w 1859303"/>
+                <a:gd name="csY20" fmla="*/ 737473 h 2975393"/>
+                <a:gd name="csX21" fmla="*/ 1834254 w 1859303"/>
+                <a:gd name="csY21" fmla="*/ 658710 h 2975393"/>
+                <a:gd name="csX22" fmla="*/ 1677694 w 1859303"/>
+                <a:gd name="csY22" fmla="*/ 753822 h 2975393"/>
+                <a:gd name="csX23" fmla="*/ 756181 w 1859303"/>
+                <a:gd name="csY23" fmla="*/ 2486979 h 2975393"/>
+                <a:gd name="csX24" fmla="*/ 766972 w 1859303"/>
+                <a:gd name="csY24" fmla="*/ 2700681 h 2975393"/>
+                <a:gd name="csX25" fmla="*/ 776932 w 1859303"/>
+                <a:gd name="csY25" fmla="*/ 2765944 h 2975393"/>
+                <a:gd name="csX26" fmla="*/ 698105 w 1859303"/>
+                <a:gd name="csY26" fmla="*/ 2809069 h 2975393"/>
+                <a:gd name="csX27" fmla="*/ 390724 w 1859303"/>
+                <a:gd name="csY27" fmla="*/ 2932351 h 2975393"/>
+                <a:gd name="csX28" fmla="*/ 223328 w 1859303"/>
+                <a:gd name="csY28" fmla="*/ 2975393 h 2975393"/>
+                <a:gd name="csX29" fmla="*/ 164252 w 1859303"/>
+                <a:gd name="csY29" fmla="*/ 2852758 h 2975393"/>
+                <a:gd name="csX30" fmla="*/ 0 w 1859303"/>
+                <a:gd name="csY30" fmla="*/ 2039190 h 2975393"/>
+                <a:gd name="csX31" fmla="*/ 1468580 w 1859303"/>
+                <a:gd name="csY31" fmla="*/ 43042 h 2975393"/>
+              </a:gdLst>
+              <a:ahLst/>
+              <a:cxnLst>
+                <a:cxn ang="0">
+                  <a:pos x="csX0" y="csY0"/>
+                </a:cxn>
+                <a:cxn ang="0">
+                  <a:pos x="csX1" y="csY1"/>
+                </a:cxn>
+                <a:cxn ang="0">
+                  <a:pos x="csX2" y="csY2"/>
+                </a:cxn>
+                <a:cxn ang="0">
+                  <a:pos x="csX3" y="csY3"/>
+                </a:cxn>
+                <a:cxn ang="0">
+                  <a:pos x="csX4" y="csY4"/>
+                </a:cxn>
+                <a:cxn ang="0">
+                  <a:pos x="csX5" y="csY5"/>
+                </a:cxn>
+                <a:cxn ang="0">
+                  <a:pos x="csX6" y="csY6"/>
+                </a:cxn>
+                <a:cxn ang="0">
+                  <a:pos x="csX7" y="csY7"/>
+                </a:cxn>
+                <a:cxn ang="0">
+                  <a:pos x="csX8" y="csY8"/>
+                </a:cxn>
+                <a:cxn ang="0">
+                  <a:pos x="csX9" y="csY9"/>
+                </a:cxn>
+                <a:cxn ang="0">
+                  <a:pos x="csX10" y="csY10"/>
+                </a:cxn>
+                <a:cxn ang="0">
+                  <a:pos x="csX11" y="csY11"/>
+                </a:cxn>
+                <a:cxn ang="0">
+                  <a:pos x="csX12" y="csY12"/>
+                </a:cxn>
+                <a:cxn ang="0">
+                  <a:pos x="csX13" y="csY13"/>
+                </a:cxn>
+                <a:cxn ang="0">
+                  <a:pos x="csX14" y="csY14"/>
+                </a:cxn>
+                <a:cxn ang="0">
+                  <a:pos x="csX15" y="csY15"/>
+                </a:cxn>
+                <a:cxn ang="0">
+                  <a:pos x="csX16" y="csY16"/>
+                </a:cxn>
+                <a:cxn ang="0">
+                  <a:pos x="csX17" y="csY17"/>
+                </a:cxn>
+                <a:cxn ang="0">
+                  <a:pos x="csX18" y="csY18"/>
+                </a:cxn>
+                <a:cxn ang="0">
+                  <a:pos x="csX19" y="csY19"/>
+                </a:cxn>
+                <a:cxn ang="0">
+                  <a:pos x="csX20" y="csY20"/>
+                </a:cxn>
+                <a:cxn ang="0">
+                  <a:pos x="csX21" y="csY21"/>
+                </a:cxn>
+                <a:cxn ang="0">
+                  <a:pos x="csX22" y="csY22"/>
+                </a:cxn>
+                <a:cxn ang="0">
+                  <a:pos x="csX23" y="csY23"/>
+                </a:cxn>
+                <a:cxn ang="0">
+                  <a:pos x="csX24" y="csY24"/>
+                </a:cxn>
+                <a:cxn ang="0">
+                  <a:pos x="csX25" y="csY25"/>
+                </a:cxn>
+                <a:cxn ang="0">
+                  <a:pos x="csX26" y="csY26"/>
+                </a:cxn>
+                <a:cxn ang="0">
+                  <a:pos x="csX27" y="csY27"/>
+                </a:cxn>
+                <a:cxn ang="0">
+                  <a:pos x="csX28" y="csY28"/>
+                </a:cxn>
+                <a:cxn ang="0">
+                  <a:pos x="csX29" y="csY29"/>
+                </a:cxn>
+                <a:cxn ang="0">
+                  <a:pos x="csX30" y="csY30"/>
+                </a:cxn>
+                <a:cxn ang="0">
+                  <a:pos x="csX31" y="csY31"/>
+                </a:cxn>
+              </a:cxnLst>
+              <a:rect l="l" t="t" r="r" b="b"/>
+              <a:pathLst>
+                <a:path w="1859303" h="2975393">
+                  <a:moveTo>
+                    <a:pt x="1827440" y="1298000"/>
+                  </a:moveTo>
+                  <a:lnTo>
+                    <a:pt x="1819666" y="1346839"/>
+                  </a:lnTo>
+                  <a:cubicBezTo>
+                    <a:pt x="1713293" y="1902012"/>
+                    <a:pt x="1387282" y="2379150"/>
+                    <a:pt x="935553" y="2684332"/>
+                  </a:cubicBezTo>
+                  <a:lnTo>
+                    <a:pt x="778993" y="2779445"/>
+                  </a:lnTo>
+                  <a:lnTo>
+                    <a:pt x="776932" y="2765944"/>
+                  </a:lnTo>
+                  <a:lnTo>
+                    <a:pt x="842194" y="2730240"/>
+                  </a:lnTo>
+                  <a:cubicBezTo>
+                    <a:pt x="1310880" y="2449317"/>
+                    <a:pt x="1660350" y="1989936"/>
+                    <a:pt x="1796685" y="1446018"/>
+                  </a:cubicBezTo>
+                  <a:close/>
+                  <a:moveTo>
+                    <a:pt x="1834091" y="1256216"/>
+                  </a:moveTo>
+                  <a:lnTo>
+                    <a:pt x="1831097" y="1280400"/>
+                  </a:lnTo>
+                  <a:lnTo>
+                    <a:pt x="1827440" y="1298000"/>
+                  </a:lnTo>
+                  <a:close/>
+                  <a:moveTo>
+                    <a:pt x="1844827" y="1169487"/>
+                  </a:moveTo>
+                  <a:lnTo>
+                    <a:pt x="1840272" y="1217379"/>
+                  </a:lnTo>
+                  <a:lnTo>
+                    <a:pt x="1834091" y="1256216"/>
+                  </a:lnTo>
+                  <a:close/>
+                  <a:moveTo>
+                    <a:pt x="1635975" y="0"/>
+                  </a:moveTo>
+                  <a:lnTo>
+                    <a:pt x="1695052" y="122635"/>
+                  </a:lnTo>
+                  <a:cubicBezTo>
+                    <a:pt x="1800817" y="372693"/>
+                    <a:pt x="1859303" y="647617"/>
+                    <a:pt x="1859303" y="936202"/>
+                  </a:cubicBezTo>
+                  <a:cubicBezTo>
+                    <a:pt x="1859303" y="994821"/>
+                    <a:pt x="1856890" y="1052876"/>
+                    <a:pt x="1852158" y="1110274"/>
+                  </a:cubicBezTo>
+                  <a:lnTo>
+                    <a:pt x="1844827" y="1169487"/>
+                  </a:lnTo>
+                  <a:lnTo>
+                    <a:pt x="1852824" y="1085406"/>
+                  </a:lnTo>
+                  <a:cubicBezTo>
+                    <a:pt x="1855637" y="1041024"/>
+                    <a:pt x="1857065" y="996266"/>
+                    <a:pt x="1857065" y="951175"/>
+                  </a:cubicBezTo>
+                  <a:cubicBezTo>
+                    <a:pt x="1857065" y="879029"/>
+                    <a:pt x="1853410" y="807737"/>
+                    <a:pt x="1846274" y="737473"/>
+                  </a:cubicBezTo>
+                  <a:lnTo>
+                    <a:pt x="1834254" y="658710"/>
+                  </a:lnTo>
+                  <a:lnTo>
+                    <a:pt x="1677694" y="753822"/>
+                  </a:lnTo>
+                  <a:cubicBezTo>
+                    <a:pt x="1121719" y="1129431"/>
+                    <a:pt x="756181" y="1765517"/>
+                    <a:pt x="756181" y="2486979"/>
+                  </a:cubicBezTo>
+                  <a:cubicBezTo>
+                    <a:pt x="756181" y="2559125"/>
+                    <a:pt x="759837" y="2630418"/>
+                    <a:pt x="766972" y="2700681"/>
+                  </a:cubicBezTo>
+                  <a:lnTo>
+                    <a:pt x="776932" y="2765944"/>
+                  </a:lnTo>
+                  <a:lnTo>
+                    <a:pt x="698105" y="2809069"/>
+                  </a:lnTo>
+                  <a:cubicBezTo>
+                    <a:pt x="599787" y="2857928"/>
+                    <a:pt x="497077" y="2899272"/>
+                    <a:pt x="390724" y="2932351"/>
+                  </a:cubicBezTo>
+                  <a:lnTo>
+                    <a:pt x="223328" y="2975393"/>
+                  </a:lnTo>
+                  <a:lnTo>
+                    <a:pt x="164252" y="2852758"/>
+                  </a:lnTo>
+                  <a:cubicBezTo>
+                    <a:pt x="58486" y="2602700"/>
+                    <a:pt x="0" y="2327775"/>
+                    <a:pt x="0" y="2039190"/>
+                  </a:cubicBezTo>
+                  <a:cubicBezTo>
+                    <a:pt x="0" y="1101290"/>
+                    <a:pt x="617759" y="307674"/>
+                    <a:pt x="1468580" y="43042"/>
+                  </a:cubicBezTo>
+                  <a:close/>
+                </a:path>
+              </a:pathLst>
+            </a:custGeom>
+            <a:solidFill>
+              <a:srgbClr val="FFC000">
+                <a:alpha val="71084"/>
+              </a:srgbClr>
+            </a:solidFill>
+            <a:ln w="19050">
+              <a:noFill/>
+            </a:ln>
+          </p:spPr>
+          <p:style>
+            <a:lnRef idx="2">
+              <a:schemeClr val="accent1">
+                <a:shade val="15000"/>
+              </a:schemeClr>
+            </a:lnRef>
+            <a:fillRef idx="1">
+              <a:schemeClr val="accent1"/>
+            </a:fillRef>
+            <a:effectRef idx="0">
+              <a:schemeClr val="accent1"/>
+            </a:effectRef>
+            <a:fontRef idx="minor">
+              <a:schemeClr val="lt1"/>
+            </a:fontRef>
+          </p:style>
+          <p:txBody>
+            <a:bodyPr wrap="square" rtlCol="0" anchor="ctr">
+              <a:noAutofit/>
+            </a:bodyPr>
+            <a:lstStyle/>
+            <a:p>
+              <a:pPr algn="ctr"/>
+              <a:endParaRPr kumimoji="1" lang="ja-JP" altLang="en-US"/>
+            </a:p>
+          </p:txBody>
+        </p:sp>
+        <p:cxnSp>
+          <p:nvCxnSpPr>
+            <p:cNvPr id="3" name="直線矢印コネクタ 2">
+              <a:extLst>
+                <a:ext uri="{FF2B5EF4-FFF2-40B4-BE49-F238E27FC236}">
+                  <a16:creationId xmlns:a16="http://schemas.microsoft.com/office/drawing/2014/main" id="{8E50B84C-C853-4812-86F4-BEE7A900DD84}"/>
+                </a:ext>
+              </a:extLst>
+            </p:cNvPr>
+            <p:cNvCxnSpPr>
+              <a:cxnSpLocks/>
+            </p:cNvCxnSpPr>
+            <p:nvPr/>
+          </p:nvCxnSpPr>
+          <p:spPr>
+            <a:xfrm>
+              <a:off x="1320150" y="6216979"/>
+              <a:ext cx="9440777" cy="0"/>
+            </a:xfrm>
+            <a:prstGeom prst="straightConnector1">
+              <a:avLst/>
+            </a:prstGeom>
+            <a:ln w="28575">
+              <a:solidFill>
+                <a:schemeClr val="tx1"/>
+              </a:solidFill>
+              <a:tailEnd type="triangle"/>
+            </a:ln>
+          </p:spPr>
+          <p:style>
+            <a:lnRef idx="1">
+              <a:schemeClr val="accent1"/>
+            </a:lnRef>
+            <a:fillRef idx="0">
+              <a:schemeClr val="accent1"/>
+            </a:fillRef>
+            <a:effectRef idx="0">
+              <a:schemeClr val="accent1"/>
+            </a:effectRef>
+            <a:fontRef idx="minor">
+              <a:schemeClr val="tx1"/>
+            </a:fontRef>
+          </p:style>
+        </p:cxnSp>
+        <p:cxnSp>
+          <p:nvCxnSpPr>
+            <p:cNvPr id="4" name="直線矢印コネクタ 3">
+              <a:extLst>
+                <a:ext uri="{FF2B5EF4-FFF2-40B4-BE49-F238E27FC236}">
+                  <a16:creationId xmlns:a16="http://schemas.microsoft.com/office/drawing/2014/main" id="{628093D9-278A-1AAB-3DA9-73F8C9665EE3}"/>
+                </a:ext>
+              </a:extLst>
+            </p:cNvPr>
+            <p:cNvCxnSpPr>
+              <a:cxnSpLocks/>
+            </p:cNvCxnSpPr>
+            <p:nvPr/>
+          </p:nvCxnSpPr>
+          <p:spPr>
+            <a:xfrm flipV="1">
+              <a:off x="1320150" y="390293"/>
+              <a:ext cx="0" cy="5826686"/>
+            </a:xfrm>
+            <a:prstGeom prst="straightConnector1">
+              <a:avLst/>
+            </a:prstGeom>
+            <a:ln w="28575">
+              <a:solidFill>
+                <a:schemeClr val="tx1"/>
+              </a:solidFill>
+              <a:tailEnd type="triangle"/>
+            </a:ln>
+          </p:spPr>
+          <p:style>
+            <a:lnRef idx="1">
+              <a:schemeClr val="accent1"/>
+            </a:lnRef>
+            <a:fillRef idx="0">
+              <a:schemeClr val="accent1"/>
+            </a:fillRef>
+            <a:effectRef idx="0">
+              <a:schemeClr val="accent1"/>
+            </a:effectRef>
+            <a:fontRef idx="minor">
+              <a:schemeClr val="tx1"/>
+            </a:fontRef>
+          </p:style>
+        </p:cxnSp>
+        <p:sp>
+          <p:nvSpPr>
+            <p:cNvPr id="5" name="テキスト ボックス 4">
+              <a:extLst>
+                <a:ext uri="{FF2B5EF4-FFF2-40B4-BE49-F238E27FC236}">
+                  <a16:creationId xmlns:a16="http://schemas.microsoft.com/office/drawing/2014/main" id="{D1F0698F-591E-EF5D-E8ED-9BE194B5801E}"/>
+                </a:ext>
+              </a:extLst>
+            </p:cNvPr>
+            <p:cNvSpPr txBox="1"/>
+            <p:nvPr/>
+          </p:nvSpPr>
+          <p:spPr>
+            <a:xfrm>
+              <a:off x="9248061" y="6233395"/>
+              <a:ext cx="1512866" cy="461665"/>
+            </a:xfrm>
+            <a:prstGeom prst="rect">
+              <a:avLst/>
+            </a:prstGeom>
+            <a:noFill/>
+          </p:spPr>
+          <p:txBody>
+            <a:bodyPr wrap="square" rtlCol="0">
+              <a:spAutoFit/>
+            </a:bodyPr>
+            <a:lstStyle/>
+            <a:p>
+              <a:pPr algn="ctr"/>
+              <a:r>
+                <a:rPr kumimoji="1" lang="ja-JP" altLang="en-US" sz="2400">
+                  <a:latin typeface="Hiragino Kaku Gothic StdN W8" panose="020B0800000000000000" pitchFamily="34" charset="-128"/>
+                  <a:ea typeface="Hiragino Kaku Gothic StdN W8" panose="020B0800000000000000" pitchFamily="34" charset="-128"/>
+                </a:rPr>
+                <a:t>車関税率</a:t>
+              </a:r>
+            </a:p>
+          </p:txBody>
+        </p:sp>
+        <p:sp>
+          <p:nvSpPr>
+            <p:cNvPr id="6" name="テキスト ボックス 5">
+              <a:extLst>
+                <a:ext uri="{FF2B5EF4-FFF2-40B4-BE49-F238E27FC236}">
+                  <a16:creationId xmlns:a16="http://schemas.microsoft.com/office/drawing/2014/main" id="{BB4F823E-E516-E0B2-DE67-0126D2C4481D}"/>
+                </a:ext>
+              </a:extLst>
+            </p:cNvPr>
+            <p:cNvSpPr txBox="1"/>
+            <p:nvPr/>
+          </p:nvSpPr>
+          <p:spPr>
+            <a:xfrm>
+              <a:off x="766152" y="390292"/>
+              <a:ext cx="553998" cy="1323439"/>
+            </a:xfrm>
+            <a:prstGeom prst="rect">
+              <a:avLst/>
+            </a:prstGeom>
+            <a:noFill/>
+          </p:spPr>
+          <p:txBody>
+            <a:bodyPr vert="eaVert" wrap="none" rtlCol="0">
+              <a:spAutoFit/>
+            </a:bodyPr>
+            <a:lstStyle/>
+            <a:p>
+              <a:r>
+                <a:rPr kumimoji="1" lang="ja-JP" altLang="en-US" sz="2400">
+                  <a:latin typeface="Hiragino Kaku Gothic StdN W8" panose="020B0800000000000000" pitchFamily="34" charset="-128"/>
+                  <a:ea typeface="Hiragino Kaku Gothic StdN W8" panose="020B0800000000000000" pitchFamily="34" charset="-128"/>
+                </a:rPr>
+                <a:t>肉関税率</a:t>
+              </a:r>
+            </a:p>
+          </p:txBody>
+        </p:sp>
+        <p:sp>
+          <p:nvSpPr>
+            <p:cNvPr id="15" name="円/楕円 14">
+              <a:extLst>
+                <a:ext uri="{FF2B5EF4-FFF2-40B4-BE49-F238E27FC236}">
+                  <a16:creationId xmlns:a16="http://schemas.microsoft.com/office/drawing/2014/main" id="{D20B4CFD-2820-11E1-B86C-3652D7098355}"/>
+                </a:ext>
+              </a:extLst>
+            </p:cNvPr>
+            <p:cNvSpPr/>
+            <p:nvPr/>
+          </p:nvSpPr>
+          <p:spPr>
+            <a:xfrm>
+              <a:off x="4369695" y="2364273"/>
+              <a:ext cx="186550" cy="186550"/>
+            </a:xfrm>
+            <a:prstGeom prst="ellipse">
+              <a:avLst/>
+            </a:prstGeom>
+            <a:solidFill>
+              <a:schemeClr val="tx1"/>
+            </a:solidFill>
+            <a:ln>
+              <a:noFill/>
+            </a:ln>
+          </p:spPr>
+          <p:style>
+            <a:lnRef idx="2">
+              <a:schemeClr val="accent1">
+                <a:shade val="50000"/>
+              </a:schemeClr>
+            </a:lnRef>
+            <a:fillRef idx="1">
+              <a:schemeClr val="accent1"/>
+            </a:fillRef>
+            <a:effectRef idx="0">
+              <a:schemeClr val="accent1"/>
+            </a:effectRef>
+            <a:fontRef idx="minor">
+              <a:schemeClr val="lt1"/>
+            </a:fontRef>
+          </p:style>
+          <p:txBody>
+            <a:bodyPr rtlCol="0" anchor="ctr"/>
+            <a:lstStyle/>
+            <a:p>
+              <a:pPr algn="ctr"/>
+              <a:endParaRPr kumimoji="1" lang="ja-JP" altLang="en-US"/>
+            </a:p>
+          </p:txBody>
+        </p:sp>
+        <p:sp>
+          <p:nvSpPr>
+            <p:cNvPr id="16" name="テキスト ボックス 15">
+              <a:extLst>
+                <a:ext uri="{FF2B5EF4-FFF2-40B4-BE49-F238E27FC236}">
+                  <a16:creationId xmlns:a16="http://schemas.microsoft.com/office/drawing/2014/main" id="{5B91290B-4C95-58E8-2E33-83272CC00089}"/>
+                </a:ext>
+              </a:extLst>
+            </p:cNvPr>
+            <p:cNvSpPr txBox="1"/>
+            <p:nvPr/>
+          </p:nvSpPr>
+          <p:spPr>
+            <a:xfrm>
+              <a:off x="3915337" y="2558199"/>
+              <a:ext cx="1024577" cy="461665"/>
+            </a:xfrm>
+            <a:prstGeom prst="rect">
+              <a:avLst/>
+            </a:prstGeom>
+            <a:noFill/>
+          </p:spPr>
+          <p:txBody>
+            <a:bodyPr wrap="square" rtlCol="0">
+              <a:spAutoFit/>
+            </a:bodyPr>
+            <a:lstStyle/>
+            <a:p>
+              <a:pPr algn="ctr"/>
+              <a:r>
+                <a:rPr kumimoji="1" lang="ja-JP" altLang="en-US" sz="2400">
+                  <a:latin typeface="Hiragino Kaku Gothic StdN W8" panose="020B0800000000000000" pitchFamily="34" charset="-128"/>
+                  <a:ea typeface="Hiragino Kaku Gothic StdN W8" panose="020B0800000000000000" pitchFamily="34" charset="-128"/>
+                </a:rPr>
+                <a:t>日本</a:t>
+              </a:r>
+            </a:p>
+          </p:txBody>
+        </p:sp>
+        <p:sp>
+          <p:nvSpPr>
+            <p:cNvPr id="17" name="円/楕円 16">
+              <a:extLst>
+                <a:ext uri="{FF2B5EF4-FFF2-40B4-BE49-F238E27FC236}">
+                  <a16:creationId xmlns:a16="http://schemas.microsoft.com/office/drawing/2014/main" id="{91219053-A682-2395-1220-FAF897F6001D}"/>
+                </a:ext>
+              </a:extLst>
+            </p:cNvPr>
+            <p:cNvSpPr/>
+            <p:nvPr/>
+          </p:nvSpPr>
+          <p:spPr>
+            <a:xfrm>
+              <a:off x="2354479" y="390292"/>
+              <a:ext cx="4180231" cy="4180231"/>
+            </a:xfrm>
+            <a:prstGeom prst="ellipse">
+              <a:avLst/>
+            </a:prstGeom>
+            <a:noFill/>
+            <a:ln w="19050">
+              <a:solidFill>
+                <a:schemeClr val="tx1"/>
+              </a:solidFill>
+            </a:ln>
+          </p:spPr>
+          <p:style>
+            <a:lnRef idx="2">
+              <a:schemeClr val="accent1">
+                <a:shade val="15000"/>
+              </a:schemeClr>
+            </a:lnRef>
+            <a:fillRef idx="1">
+              <a:schemeClr val="accent1"/>
+            </a:fillRef>
+            <a:effectRef idx="0">
+              <a:schemeClr val="accent1"/>
+            </a:effectRef>
+            <a:fontRef idx="minor">
+              <a:schemeClr val="lt1"/>
+            </a:fontRef>
+          </p:style>
+          <p:txBody>
+            <a:bodyPr rtlCol="0" anchor="ctr"/>
+            <a:lstStyle/>
+            <a:p>
+              <a:pPr algn="ctr"/>
+              <a:endParaRPr kumimoji="1" lang="ja-JP" altLang="en-US"/>
+            </a:p>
+          </p:txBody>
+        </p:sp>
+        <p:sp>
+          <p:nvSpPr>
+            <p:cNvPr id="12" name="テキスト ボックス 11">
+              <a:extLst>
+                <a:ext uri="{FF2B5EF4-FFF2-40B4-BE49-F238E27FC236}">
+                  <a16:creationId xmlns:a16="http://schemas.microsoft.com/office/drawing/2014/main" id="{2EE82621-0CE9-0A3A-8CD5-0EDA64DFA946}"/>
+                </a:ext>
+              </a:extLst>
+            </p:cNvPr>
+            <p:cNvSpPr txBox="1"/>
+            <p:nvPr/>
+          </p:nvSpPr>
+          <p:spPr>
+            <a:xfrm>
+              <a:off x="6996337" y="4091460"/>
+              <a:ext cx="1024577" cy="461665"/>
+            </a:xfrm>
+            <a:prstGeom prst="rect">
+              <a:avLst/>
+            </a:prstGeom>
+            <a:noFill/>
+          </p:spPr>
+          <p:txBody>
+            <a:bodyPr wrap="square" rtlCol="0">
+              <a:spAutoFit/>
+            </a:bodyPr>
+            <a:lstStyle/>
+            <a:p>
+              <a:r>
+                <a:rPr kumimoji="1" lang="ja-JP" altLang="en-US" sz="2400">
+                  <a:solidFill>
+                    <a:schemeClr val="tx1">
+                      <a:alpha val="25000"/>
+                    </a:schemeClr>
+                  </a:solidFill>
+                  <a:latin typeface="Hiragino Kaku Gothic StdN W8" panose="020B0800000000000000" pitchFamily="34" charset="-128"/>
+                  <a:ea typeface="Hiragino Kaku Gothic StdN W8" panose="020B0800000000000000" pitchFamily="34" charset="-128"/>
+                </a:rPr>
+                <a:t>米国</a:t>
+              </a:r>
+            </a:p>
+          </p:txBody>
+        </p:sp>
+        <p:sp>
+          <p:nvSpPr>
+            <p:cNvPr id="13" name="円/楕円 12">
+              <a:extLst>
+                <a:ext uri="{FF2B5EF4-FFF2-40B4-BE49-F238E27FC236}">
+                  <a16:creationId xmlns:a16="http://schemas.microsoft.com/office/drawing/2014/main" id="{98647350-4841-B76C-2D7F-F6C73FF326BA}"/>
+                </a:ext>
+              </a:extLst>
+            </p:cNvPr>
+            <p:cNvSpPr/>
+            <p:nvPr/>
+          </p:nvSpPr>
+          <p:spPr>
+            <a:xfrm>
+              <a:off x="7450695" y="3920436"/>
+              <a:ext cx="186550" cy="186550"/>
+            </a:xfrm>
+            <a:prstGeom prst="ellipse">
+              <a:avLst/>
+            </a:prstGeom>
+            <a:solidFill>
+              <a:schemeClr val="tx1">
+                <a:alpha val="30000"/>
+              </a:schemeClr>
+            </a:solidFill>
+            <a:ln>
+              <a:noFill/>
+            </a:ln>
+          </p:spPr>
+          <p:style>
+            <a:lnRef idx="2">
+              <a:schemeClr val="accent1">
+                <a:shade val="50000"/>
+              </a:schemeClr>
+            </a:lnRef>
+            <a:fillRef idx="1">
+              <a:schemeClr val="accent1"/>
+            </a:fillRef>
+            <a:effectRef idx="0">
+              <a:schemeClr val="accent1"/>
+            </a:effectRef>
+            <a:fontRef idx="minor">
+              <a:schemeClr val="lt1"/>
+            </a:fontRef>
+          </p:style>
+          <p:txBody>
+            <a:bodyPr rtlCol="0" anchor="ctr"/>
+            <a:lstStyle/>
+            <a:p>
+              <a:pPr algn="ctr"/>
+              <a:endParaRPr kumimoji="1" lang="ja-JP" altLang="en-US">
+                <a:solidFill>
+                  <a:schemeClr val="lt1">
+                    <a:alpha val="25000"/>
+                  </a:schemeClr>
+                </a:solidFill>
+              </a:endParaRPr>
+            </a:p>
+          </p:txBody>
+        </p:sp>
+        <p:sp>
+          <p:nvSpPr>
+            <p:cNvPr id="14" name="円/楕円 13">
+              <a:extLst>
+                <a:ext uri="{FF2B5EF4-FFF2-40B4-BE49-F238E27FC236}">
+                  <a16:creationId xmlns:a16="http://schemas.microsoft.com/office/drawing/2014/main" id="{82E29A12-C297-75F9-A376-5AD6BAF0347D}"/>
+                </a:ext>
+              </a:extLst>
+            </p:cNvPr>
+            <p:cNvSpPr/>
+            <p:nvPr/>
+          </p:nvSpPr>
+          <p:spPr>
+            <a:xfrm>
+              <a:off x="5433827" y="1926096"/>
+              <a:ext cx="4180231" cy="4180231"/>
+            </a:xfrm>
+            <a:prstGeom prst="ellipse">
+              <a:avLst/>
+            </a:prstGeom>
+            <a:noFill/>
+            <a:ln w="19050">
+              <a:solidFill>
+                <a:schemeClr val="tx1">
+                  <a:alpha val="29949"/>
+                </a:schemeClr>
+              </a:solidFill>
+            </a:ln>
+          </p:spPr>
+          <p:style>
+            <a:lnRef idx="2">
+              <a:schemeClr val="accent1">
+                <a:shade val="15000"/>
+              </a:schemeClr>
+            </a:lnRef>
+            <a:fillRef idx="1">
+              <a:schemeClr val="accent1"/>
+            </a:fillRef>
+            <a:effectRef idx="0">
+              <a:schemeClr val="accent1"/>
+            </a:effectRef>
+            <a:fontRef idx="minor">
+              <a:schemeClr val="lt1"/>
+            </a:fontRef>
+          </p:style>
+          <p:txBody>
+            <a:bodyPr rtlCol="0" anchor="ctr"/>
+            <a:lstStyle/>
+            <a:p>
+              <a:pPr algn="ctr"/>
+              <a:endParaRPr kumimoji="1" lang="ja-JP" altLang="en-US">
+                <a:solidFill>
+                  <a:schemeClr val="lt1">
+                    <a:alpha val="25000"/>
+                  </a:schemeClr>
+                </a:solidFill>
+              </a:endParaRPr>
+            </a:p>
+          </p:txBody>
+        </p:sp>
+        <p:sp>
+          <p:nvSpPr>
+            <p:cNvPr id="10" name="テキスト ボックス 9">
+              <a:extLst>
+                <a:ext uri="{FF2B5EF4-FFF2-40B4-BE49-F238E27FC236}">
+                  <a16:creationId xmlns:a16="http://schemas.microsoft.com/office/drawing/2014/main" id="{28E46E79-332D-2817-9451-247EB1EFAD89}"/>
+                </a:ext>
+              </a:extLst>
+            </p:cNvPr>
+            <p:cNvSpPr txBox="1"/>
+            <p:nvPr/>
+          </p:nvSpPr>
+          <p:spPr>
+            <a:xfrm>
+              <a:off x="6270771" y="1711020"/>
+              <a:ext cx="1024577" cy="461665"/>
+            </a:xfrm>
+            <a:prstGeom prst="rect">
+              <a:avLst/>
+            </a:prstGeom>
+            <a:noFill/>
+          </p:spPr>
+          <p:txBody>
+            <a:bodyPr wrap="square" rtlCol="0">
+              <a:spAutoFit/>
+            </a:bodyPr>
+            <a:lstStyle/>
+            <a:p>
+              <a:r>
+                <a:rPr kumimoji="1" lang="ja-JP" altLang="en-US" sz="2400">
+                  <a:latin typeface="Hiragino Kaku Gothic StdN W8" panose="020B0800000000000000" pitchFamily="34" charset="-128"/>
+                  <a:ea typeface="Hiragino Kaku Gothic StdN W8" panose="020B0800000000000000" pitchFamily="34" charset="-128"/>
+                </a:rPr>
+                <a:t>現状</a:t>
+              </a:r>
+            </a:p>
+          </p:txBody>
+        </p:sp>
+        <p:sp>
+          <p:nvSpPr>
+            <p:cNvPr id="11" name="円/楕円 10">
+              <a:extLst>
+                <a:ext uri="{FF2B5EF4-FFF2-40B4-BE49-F238E27FC236}">
+                  <a16:creationId xmlns:a16="http://schemas.microsoft.com/office/drawing/2014/main" id="{7D5E2134-9CD2-F121-E2B2-91CCE81015E3}"/>
+                </a:ext>
+              </a:extLst>
+            </p:cNvPr>
+            <p:cNvSpPr/>
+            <p:nvPr/>
+          </p:nvSpPr>
+          <p:spPr>
+            <a:xfrm>
+              <a:off x="6419541" y="2080078"/>
+              <a:ext cx="186550" cy="186550"/>
+            </a:xfrm>
+            <a:prstGeom prst="ellipse">
+              <a:avLst/>
+            </a:prstGeom>
+            <a:solidFill>
+              <a:schemeClr val="tx1"/>
+            </a:solidFill>
+            <a:ln>
+              <a:noFill/>
+            </a:ln>
+          </p:spPr>
+          <p:style>
+            <a:lnRef idx="2">
+              <a:schemeClr val="accent1">
+                <a:shade val="50000"/>
+              </a:schemeClr>
+            </a:lnRef>
+            <a:fillRef idx="1">
+              <a:schemeClr val="accent1"/>
+            </a:fillRef>
+            <a:effectRef idx="0">
+              <a:schemeClr val="accent1"/>
+            </a:effectRef>
+            <a:fontRef idx="minor">
+              <a:schemeClr val="lt1"/>
+            </a:fontRef>
+          </p:style>
+          <p:txBody>
+            <a:bodyPr rtlCol="0" anchor="ctr"/>
+            <a:lstStyle/>
+            <a:p>
+              <a:pPr algn="ctr"/>
+              <a:endParaRPr kumimoji="1" lang="ja-JP" altLang="en-US"/>
+            </a:p>
+          </p:txBody>
+        </p:sp>
+        <p:sp>
+          <p:nvSpPr>
+            <p:cNvPr id="19" name="テキスト ボックス 18">
+              <a:extLst>
+                <a:ext uri="{FF2B5EF4-FFF2-40B4-BE49-F238E27FC236}">
+                  <a16:creationId xmlns:a16="http://schemas.microsoft.com/office/drawing/2014/main" id="{897DCD65-BD94-6D54-72A4-D4EF2EA5BC28}"/>
+                </a:ext>
+              </a:extLst>
+            </p:cNvPr>
+            <p:cNvSpPr txBox="1"/>
+            <p:nvPr/>
+          </p:nvSpPr>
+          <p:spPr>
+            <a:xfrm>
+              <a:off x="6237918" y="3658644"/>
+              <a:ext cx="1024577" cy="461665"/>
+            </a:xfrm>
+            <a:prstGeom prst="rect">
+              <a:avLst/>
+            </a:prstGeom>
+            <a:noFill/>
+          </p:spPr>
+          <p:txBody>
+            <a:bodyPr wrap="square" rtlCol="0">
+              <a:spAutoFit/>
+            </a:bodyPr>
+            <a:lstStyle/>
+            <a:p>
+              <a:r>
+                <a:rPr kumimoji="1" lang="ja-JP" altLang="en-US" sz="2400">
+                  <a:latin typeface="Hiragino Kaku Gothic StdN W8" panose="020B0800000000000000" pitchFamily="34" charset="-128"/>
+                  <a:ea typeface="Hiragino Kaku Gothic StdN W8" panose="020B0800000000000000" pitchFamily="34" charset="-128"/>
+                </a:rPr>
+                <a:t>米国</a:t>
+              </a:r>
+              <a:r>
+                <a:rPr kumimoji="1" lang="en-US" altLang="ja-JP" sz="2400" dirty="0">
+                  <a:latin typeface="Hiragino Kaku Gothic StdN W8" panose="020B0800000000000000" pitchFamily="34" charset="-128"/>
+                  <a:ea typeface="Hiragino Kaku Gothic StdN W8" panose="020B0800000000000000" pitchFamily="34" charset="-128"/>
+                </a:rPr>
+                <a:t>’</a:t>
+              </a:r>
+              <a:endParaRPr kumimoji="1" lang="ja-JP" altLang="en-US" sz="2400">
+                <a:latin typeface="Hiragino Kaku Gothic StdN W8" panose="020B0800000000000000" pitchFamily="34" charset="-128"/>
+                <a:ea typeface="Hiragino Kaku Gothic StdN W8" panose="020B0800000000000000" pitchFamily="34" charset="-128"/>
+              </a:endParaRPr>
+            </a:p>
+          </p:txBody>
+        </p:sp>
+        <p:sp>
+          <p:nvSpPr>
+            <p:cNvPr id="20" name="円/楕円 19">
+              <a:extLst>
+                <a:ext uri="{FF2B5EF4-FFF2-40B4-BE49-F238E27FC236}">
+                  <a16:creationId xmlns:a16="http://schemas.microsoft.com/office/drawing/2014/main" id="{9833CFBC-6BBE-A6C0-25C8-C39967373FE3}"/>
+                </a:ext>
+              </a:extLst>
+            </p:cNvPr>
+            <p:cNvSpPr/>
+            <p:nvPr/>
+          </p:nvSpPr>
+          <p:spPr>
+            <a:xfrm>
+              <a:off x="6692276" y="3487620"/>
+              <a:ext cx="186550" cy="186550"/>
+            </a:xfrm>
+            <a:prstGeom prst="ellipse">
+              <a:avLst/>
+            </a:prstGeom>
+            <a:solidFill>
+              <a:schemeClr val="tx1"/>
+            </a:solidFill>
+            <a:ln>
+              <a:noFill/>
+            </a:ln>
+          </p:spPr>
+          <p:style>
+            <a:lnRef idx="2">
+              <a:schemeClr val="accent1">
+                <a:shade val="50000"/>
+              </a:schemeClr>
+            </a:lnRef>
+            <a:fillRef idx="1">
+              <a:schemeClr val="accent1"/>
+            </a:fillRef>
+            <a:effectRef idx="0">
+              <a:schemeClr val="accent1"/>
+            </a:effectRef>
+            <a:fontRef idx="minor">
+              <a:schemeClr val="lt1"/>
+            </a:fontRef>
+          </p:style>
+          <p:txBody>
+            <a:bodyPr rtlCol="0" anchor="ctr"/>
+            <a:lstStyle/>
+            <a:p>
+              <a:pPr algn="ctr"/>
+              <a:endParaRPr kumimoji="1" lang="ja-JP" altLang="en-US"/>
+            </a:p>
+          </p:txBody>
+        </p:sp>
+        <p:sp>
+          <p:nvSpPr>
+            <p:cNvPr id="21" name="円/楕円 20">
+              <a:extLst>
+                <a:ext uri="{FF2B5EF4-FFF2-40B4-BE49-F238E27FC236}">
+                  <a16:creationId xmlns:a16="http://schemas.microsoft.com/office/drawing/2014/main" id="{DFA29273-0D89-A1FD-A0FF-FD85E7D81973}"/>
+                </a:ext>
+              </a:extLst>
+            </p:cNvPr>
+            <p:cNvSpPr/>
+            <p:nvPr/>
+          </p:nvSpPr>
+          <p:spPr>
+            <a:xfrm>
+              <a:off x="4675408" y="1493280"/>
+              <a:ext cx="4180231" cy="4180231"/>
+            </a:xfrm>
+            <a:prstGeom prst="ellipse">
+              <a:avLst/>
+            </a:prstGeom>
+            <a:noFill/>
+            <a:ln w="19050">
+              <a:solidFill>
+                <a:schemeClr val="tx1"/>
+              </a:solidFill>
+            </a:ln>
+          </p:spPr>
+          <p:style>
+            <a:lnRef idx="2">
+              <a:schemeClr val="accent1">
+                <a:shade val="15000"/>
+              </a:schemeClr>
+            </a:lnRef>
+            <a:fillRef idx="1">
+              <a:schemeClr val="accent1"/>
+            </a:fillRef>
+            <a:effectRef idx="0">
+              <a:schemeClr val="accent1"/>
+            </a:effectRef>
+            <a:fontRef idx="minor">
+              <a:schemeClr val="lt1"/>
+            </a:fontRef>
+          </p:style>
+          <p:txBody>
+            <a:bodyPr rtlCol="0" anchor="ctr"/>
+            <a:lstStyle/>
+            <a:p>
+              <a:pPr algn="ctr"/>
+              <a:endParaRPr kumimoji="1" lang="ja-JP" altLang="en-US"/>
+            </a:p>
+          </p:txBody>
+        </p:sp>
+        <p:sp>
+          <p:nvSpPr>
+            <p:cNvPr id="32" name="フリーフォーム 31">
+              <a:extLst>
+                <a:ext uri="{FF2B5EF4-FFF2-40B4-BE49-F238E27FC236}">
+                  <a16:creationId xmlns:a16="http://schemas.microsoft.com/office/drawing/2014/main" id="{1EBBB627-C008-55C2-171F-20C48D9D8D3C}"/>
+                </a:ext>
+              </a:extLst>
+            </p:cNvPr>
+            <p:cNvSpPr/>
+            <p:nvPr/>
+          </p:nvSpPr>
+          <p:spPr>
+            <a:xfrm>
+              <a:off x="5440520" y="2209997"/>
+              <a:ext cx="1100884" cy="2120735"/>
+            </a:xfrm>
+            <a:custGeom>
+              <a:avLst/>
+              <a:gdLst>
+                <a:gd name="csX0" fmla="*/ 1078073 w 1100884"/>
+                <a:gd name="csY0" fmla="*/ 0 h 2120735"/>
+                <a:gd name="csX1" fmla="*/ 1090093 w 1100884"/>
+                <a:gd name="csY1" fmla="*/ 78763 h 2120735"/>
+                <a:gd name="csX2" fmla="*/ 1100884 w 1100884"/>
+                <a:gd name="csY2" fmla="*/ 292465 h 2120735"/>
+                <a:gd name="csX3" fmla="*/ 179372 w 1100884"/>
+                <a:gd name="csY3" fmla="*/ 2025622 h 2120735"/>
+                <a:gd name="csX4" fmla="*/ 22812 w 1100884"/>
+                <a:gd name="csY4" fmla="*/ 2120735 h 2120735"/>
+                <a:gd name="csX5" fmla="*/ 10791 w 1100884"/>
+                <a:gd name="csY5" fmla="*/ 2041971 h 2120735"/>
+                <a:gd name="csX6" fmla="*/ 0 w 1100884"/>
+                <a:gd name="csY6" fmla="*/ 1828269 h 2120735"/>
+                <a:gd name="csX7" fmla="*/ 921513 w 1100884"/>
+                <a:gd name="csY7" fmla="*/ 95112 h 2120735"/>
+              </a:gdLst>
+              <a:ahLst/>
+              <a:cxnLst>
+                <a:cxn ang="0">
+                  <a:pos x="csX0" y="csY0"/>
+                </a:cxn>
+                <a:cxn ang="0">
+                  <a:pos x="csX1" y="csY1"/>
+                </a:cxn>
+                <a:cxn ang="0">
+                  <a:pos x="csX2" y="csY2"/>
+                </a:cxn>
+                <a:cxn ang="0">
+                  <a:pos x="csX3" y="csY3"/>
+                </a:cxn>
+                <a:cxn ang="0">
+                  <a:pos x="csX4" y="csY4"/>
+                </a:cxn>
+                <a:cxn ang="0">
+                  <a:pos x="csX5" y="csY5"/>
+                </a:cxn>
+                <a:cxn ang="0">
+                  <a:pos x="csX6" y="csY6"/>
+                </a:cxn>
+                <a:cxn ang="0">
+                  <a:pos x="csX7" y="csY7"/>
+                </a:cxn>
+              </a:cxnLst>
+              <a:rect l="l" t="t" r="r" b="b"/>
+              <a:pathLst>
+                <a:path w="1100884" h="2120735">
+                  <a:moveTo>
+                    <a:pt x="1078073" y="0"/>
+                  </a:moveTo>
+                  <a:lnTo>
+                    <a:pt x="1090093" y="78763"/>
+                  </a:lnTo>
+                  <a:cubicBezTo>
+                    <a:pt x="1097229" y="149027"/>
+                    <a:pt x="1100884" y="220319"/>
+                    <a:pt x="1100884" y="292465"/>
+                  </a:cubicBezTo>
+                  <a:cubicBezTo>
+                    <a:pt x="1100884" y="1013927"/>
+                    <a:pt x="735346" y="1650013"/>
+                    <a:pt x="179372" y="2025622"/>
+                  </a:cubicBezTo>
+                  <a:lnTo>
+                    <a:pt x="22812" y="2120735"/>
+                  </a:lnTo>
+                  <a:lnTo>
+                    <a:pt x="10791" y="2041971"/>
+                  </a:lnTo>
+                  <a:cubicBezTo>
+                    <a:pt x="3656" y="1971708"/>
+                    <a:pt x="0" y="1900415"/>
+                    <a:pt x="0" y="1828269"/>
+                  </a:cubicBezTo>
+                  <a:cubicBezTo>
+                    <a:pt x="0" y="1106807"/>
+                    <a:pt x="365538" y="470721"/>
+                    <a:pt x="921513" y="95112"/>
+                  </a:cubicBezTo>
+                  <a:close/>
+                </a:path>
+              </a:pathLst>
+            </a:custGeom>
+            <a:solidFill>
+              <a:srgbClr val="FF0000">
+                <a:alpha val="30000"/>
+              </a:srgbClr>
+            </a:solidFill>
+            <a:ln w="19050">
+              <a:noFill/>
+            </a:ln>
+          </p:spPr>
+          <p:style>
+            <a:lnRef idx="2">
+              <a:schemeClr val="accent1">
+                <a:shade val="15000"/>
+              </a:schemeClr>
+            </a:lnRef>
+            <a:fillRef idx="1">
+              <a:schemeClr val="accent1"/>
+            </a:fillRef>
+            <a:effectRef idx="0">
+              <a:schemeClr val="accent1"/>
+            </a:effectRef>
+            <a:fontRef idx="minor">
+              <a:schemeClr val="lt1"/>
+            </a:fontRef>
+          </p:style>
+          <p:txBody>
+            <a:bodyPr wrap="square" rtlCol="0" anchor="ctr">
+              <a:noAutofit/>
+            </a:bodyPr>
+            <a:lstStyle/>
+            <a:p>
+              <a:pPr algn="ctr"/>
+              <a:endParaRPr kumimoji="1" lang="ja-JP" altLang="en-US"/>
+            </a:p>
+          </p:txBody>
+        </p:sp>
+        <p:sp>
+          <p:nvSpPr>
+            <p:cNvPr id="45" name="フリーフォーム 44">
+              <a:extLst>
+                <a:ext uri="{FF2B5EF4-FFF2-40B4-BE49-F238E27FC236}">
+                  <a16:creationId xmlns:a16="http://schemas.microsoft.com/office/drawing/2014/main" id="{47FF85BA-74E9-0166-697C-EBA1B6F213E8}"/>
+                </a:ext>
+              </a:extLst>
+            </p:cNvPr>
+            <p:cNvSpPr/>
+            <p:nvPr/>
+          </p:nvSpPr>
+          <p:spPr>
+            <a:xfrm>
+              <a:off x="4675408" y="1544206"/>
+              <a:ext cx="1859303" cy="2975393"/>
+            </a:xfrm>
+            <a:custGeom>
+              <a:avLst/>
+              <a:gdLst>
+                <a:gd name="csX0" fmla="*/ 1635975 w 1859303"/>
+                <a:gd name="csY0" fmla="*/ 0 h 2975393"/>
+                <a:gd name="csX1" fmla="*/ 1695052 w 1859303"/>
+                <a:gd name="csY1" fmla="*/ 122635 h 2975393"/>
+                <a:gd name="csX2" fmla="*/ 1859303 w 1859303"/>
+                <a:gd name="csY2" fmla="*/ 936202 h 2975393"/>
+                <a:gd name="csX3" fmla="*/ 390724 w 1859303"/>
+                <a:gd name="csY3" fmla="*/ 2932351 h 2975393"/>
+                <a:gd name="csX4" fmla="*/ 223328 w 1859303"/>
+                <a:gd name="csY4" fmla="*/ 2975393 h 2975393"/>
+                <a:gd name="csX5" fmla="*/ 164252 w 1859303"/>
+                <a:gd name="csY5" fmla="*/ 2852758 h 2975393"/>
+                <a:gd name="csX6" fmla="*/ 0 w 1859303"/>
+                <a:gd name="csY6" fmla="*/ 2039190 h 2975393"/>
+                <a:gd name="csX7" fmla="*/ 1468580 w 1859303"/>
+                <a:gd name="csY7" fmla="*/ 43042 h 2975393"/>
+              </a:gdLst>
+              <a:ahLst/>
+              <a:cxnLst>
+                <a:cxn ang="0">
+                  <a:pos x="csX0" y="csY0"/>
+                </a:cxn>
+                <a:cxn ang="0">
+                  <a:pos x="csX1" y="csY1"/>
+                </a:cxn>
+                <a:cxn ang="0">
+                  <a:pos x="csX2" y="csY2"/>
+                </a:cxn>
+                <a:cxn ang="0">
+                  <a:pos x="csX3" y="csY3"/>
+                </a:cxn>
+                <a:cxn ang="0">
+                  <a:pos x="csX4" y="csY4"/>
+                </a:cxn>
+                <a:cxn ang="0">
+                  <a:pos x="csX5" y="csY5"/>
+                </a:cxn>
+                <a:cxn ang="0">
+                  <a:pos x="csX6" y="csY6"/>
+                </a:cxn>
+                <a:cxn ang="0">
+                  <a:pos x="csX7" y="csY7"/>
+                </a:cxn>
+              </a:cxnLst>
+              <a:rect l="l" t="t" r="r" b="b"/>
+              <a:pathLst>
+                <a:path w="1859303" h="2975393">
+                  <a:moveTo>
+                    <a:pt x="1635975" y="0"/>
+                  </a:moveTo>
+                  <a:lnTo>
+                    <a:pt x="1695052" y="122635"/>
+                  </a:lnTo>
+                  <a:cubicBezTo>
+                    <a:pt x="1800817" y="372693"/>
+                    <a:pt x="1859303" y="647617"/>
+                    <a:pt x="1859303" y="936202"/>
+                  </a:cubicBezTo>
+                  <a:cubicBezTo>
+                    <a:pt x="1859303" y="1874103"/>
+                    <a:pt x="1241544" y="2667718"/>
+                    <a:pt x="390724" y="2932351"/>
+                  </a:cubicBezTo>
+                  <a:lnTo>
+                    <a:pt x="223328" y="2975393"/>
+                  </a:lnTo>
+                  <a:lnTo>
+                    <a:pt x="164252" y="2852758"/>
+                  </a:lnTo>
+                  <a:cubicBezTo>
+                    <a:pt x="58486" y="2602700"/>
+                    <a:pt x="0" y="2327775"/>
+                    <a:pt x="0" y="2039190"/>
+                  </a:cubicBezTo>
+                  <a:cubicBezTo>
+                    <a:pt x="0" y="1101290"/>
+                    <a:pt x="617759" y="307674"/>
+                    <a:pt x="1468580" y="43042"/>
+                  </a:cubicBezTo>
+                  <a:close/>
+                </a:path>
+              </a:pathLst>
+            </a:custGeom>
+            <a:noFill/>
+            <a:ln w="19050">
+              <a:solidFill>
+                <a:schemeClr val="tx1"/>
+              </a:solidFill>
+            </a:ln>
+          </p:spPr>
+          <p:style>
+            <a:lnRef idx="2">
+              <a:schemeClr val="accent1">
+                <a:shade val="15000"/>
+              </a:schemeClr>
+            </a:lnRef>
+            <a:fillRef idx="1">
+              <a:schemeClr val="accent1"/>
+            </a:fillRef>
+            <a:effectRef idx="0">
+              <a:schemeClr val="accent1"/>
+            </a:effectRef>
+            <a:fontRef idx="minor">
+              <a:schemeClr val="lt1"/>
+            </a:fontRef>
+          </p:style>
+          <p:txBody>
+            <a:bodyPr wrap="square" rtlCol="0" anchor="ctr">
+              <a:noAutofit/>
+            </a:bodyPr>
+            <a:lstStyle/>
+            <a:p>
+              <a:pPr algn="ctr"/>
+              <a:endParaRPr kumimoji="1" lang="ja-JP" altLang="en-US"/>
+            </a:p>
+          </p:txBody>
+        </p:sp>
+        <p:cxnSp>
+          <p:nvCxnSpPr>
+            <p:cNvPr id="53" name="直線矢印コネクタ 52">
+              <a:extLst>
+                <a:ext uri="{FF2B5EF4-FFF2-40B4-BE49-F238E27FC236}">
+                  <a16:creationId xmlns:a16="http://schemas.microsoft.com/office/drawing/2014/main" id="{3398C511-889B-B909-07E1-A24AA66861FE}"/>
+                </a:ext>
+              </a:extLst>
+            </p:cNvPr>
+            <p:cNvCxnSpPr>
+              <a:cxnSpLocks/>
+              <a:stCxn id="13" idx="1"/>
+              <a:endCxn id="20" idx="6"/>
+            </p:cNvCxnSpPr>
+            <p:nvPr/>
+          </p:nvCxnSpPr>
+          <p:spPr>
+            <a:xfrm flipH="1" flipV="1">
+              <a:off x="6878826" y="3580895"/>
+              <a:ext cx="599189" cy="366861"/>
+            </a:xfrm>
+            <a:prstGeom prst="straightConnector1">
+              <a:avLst/>
+            </a:prstGeom>
+            <a:ln w="57150">
+              <a:solidFill>
+                <a:schemeClr val="tx1"/>
+              </a:solidFill>
+              <a:tailEnd type="triangle"/>
+            </a:ln>
+          </p:spPr>
+          <p:style>
+            <a:lnRef idx="1">
+              <a:schemeClr val="accent1"/>
+            </a:lnRef>
+            <a:fillRef idx="0">
+              <a:schemeClr val="accent1"/>
+            </a:fillRef>
+            <a:effectRef idx="0">
+              <a:schemeClr val="accent1"/>
+            </a:effectRef>
+            <a:fontRef idx="minor">
+              <a:schemeClr val="tx1"/>
+            </a:fontRef>
+          </p:style>
+        </p:cxnSp>
+      </p:grpSp>
+    </p:spTree>
+    <p:extLst>
+      <p:ext uri="{BB962C8B-B14F-4D97-AF65-F5344CB8AC3E}">
+        <p14:creationId xmlns:p14="http://schemas.microsoft.com/office/powerpoint/2010/main" val="1593770684"/>
+      </p:ext>
+    </p:extLst>
+  </p:cSld>
+  <p:clrMapOvr>
+    <a:masterClrMapping/>
+  </p:clrMapOvr>
+</p:sld>
+</file>
+
 <file path=ppt/theme/theme1.xml><?xml version="1.0" encoding="utf-8"?>
 <a:theme xmlns:a="http://schemas.openxmlformats.org/drawingml/2006/main" name="Office テーマ">
   <a:themeElements>

--- a/figs/DIYfigures_ipe1.pptx
+++ b/figs/DIYfigures_ipe1.pptx
@@ -14,6 +14,13 @@
     <p:sldId id="262" r:id="rId8"/>
     <p:sldId id="264" r:id="rId9"/>
     <p:sldId id="265" r:id="rId10"/>
+    <p:sldId id="266" r:id="rId11"/>
+    <p:sldId id="267" r:id="rId12"/>
+    <p:sldId id="268" r:id="rId13"/>
+    <p:sldId id="269" r:id="rId14"/>
+    <p:sldId id="270" r:id="rId15"/>
+    <p:sldId id="271" r:id="rId16"/>
+    <p:sldId id="272" r:id="rId17"/>
   </p:sldIdLst>
   <p:sldSz cx="12192000" cy="6858000"/>
   <p:notesSz cx="6858000" cy="9144000"/>
@@ -3769,7 +3776,7 @@
           <a:p>
             <a:fld id="{29D38AE0-A022-EC4B-ADED-C3987264F154}" type="datetimeFigureOut">
               <a:rPr kumimoji="1" lang="ja-JP" altLang="en-US" smtClean="0"/>
-              <a:t>2026/5/25</a:t>
+              <a:t>2026/5/26</a:t>
             </a:fld>
             <a:endParaRPr kumimoji="1" lang="ja-JP" altLang="en-US"/>
           </a:p>
@@ -3999,7 +4006,7 @@
           <a:p>
             <a:fld id="{29D38AE0-A022-EC4B-ADED-C3987264F154}" type="datetimeFigureOut">
               <a:rPr kumimoji="1" lang="ja-JP" altLang="en-US" smtClean="0"/>
-              <a:t>2026/5/25</a:t>
+              <a:t>2026/5/26</a:t>
             </a:fld>
             <a:endParaRPr kumimoji="1" lang="ja-JP" altLang="en-US"/>
           </a:p>
@@ -4239,7 +4246,7 @@
           <a:p>
             <a:fld id="{29D38AE0-A022-EC4B-ADED-C3987264F154}" type="datetimeFigureOut">
               <a:rPr kumimoji="1" lang="ja-JP" altLang="en-US" smtClean="0"/>
-              <a:t>2026/5/25</a:t>
+              <a:t>2026/5/26</a:t>
             </a:fld>
             <a:endParaRPr kumimoji="1" lang="ja-JP" altLang="en-US"/>
           </a:p>
@@ -4469,7 +4476,7 @@
           <a:p>
             <a:fld id="{29D38AE0-A022-EC4B-ADED-C3987264F154}" type="datetimeFigureOut">
               <a:rPr kumimoji="1" lang="ja-JP" altLang="en-US" smtClean="0"/>
-              <a:t>2026/5/25</a:t>
+              <a:t>2026/5/26</a:t>
             </a:fld>
             <a:endParaRPr kumimoji="1" lang="ja-JP" altLang="en-US"/>
           </a:p>
@@ -4744,7 +4751,7 @@
           <a:p>
             <a:fld id="{29D38AE0-A022-EC4B-ADED-C3987264F154}" type="datetimeFigureOut">
               <a:rPr kumimoji="1" lang="ja-JP" altLang="en-US" smtClean="0"/>
-              <a:t>2026/5/25</a:t>
+              <a:t>2026/5/26</a:t>
             </a:fld>
             <a:endParaRPr kumimoji="1" lang="ja-JP" altLang="en-US"/>
           </a:p>
@@ -5073,7 +5080,7 @@
           <a:p>
             <a:fld id="{29D38AE0-A022-EC4B-ADED-C3987264F154}" type="datetimeFigureOut">
               <a:rPr kumimoji="1" lang="ja-JP" altLang="en-US" smtClean="0"/>
-              <a:t>2026/5/25</a:t>
+              <a:t>2026/5/26</a:t>
             </a:fld>
             <a:endParaRPr kumimoji="1" lang="ja-JP" altLang="en-US"/>
           </a:p>
@@ -5549,7 +5556,7 @@
           <a:p>
             <a:fld id="{29D38AE0-A022-EC4B-ADED-C3987264F154}" type="datetimeFigureOut">
               <a:rPr kumimoji="1" lang="ja-JP" altLang="en-US" smtClean="0"/>
-              <a:t>2026/5/25</a:t>
+              <a:t>2026/5/26</a:t>
             </a:fld>
             <a:endParaRPr kumimoji="1" lang="ja-JP" altLang="en-US"/>
           </a:p>
@@ -5690,7 +5697,7 @@
           <a:p>
             <a:fld id="{29D38AE0-A022-EC4B-ADED-C3987264F154}" type="datetimeFigureOut">
               <a:rPr kumimoji="1" lang="ja-JP" altLang="en-US" smtClean="0"/>
-              <a:t>2026/5/25</a:t>
+              <a:t>2026/5/26</a:t>
             </a:fld>
             <a:endParaRPr kumimoji="1" lang="ja-JP" altLang="en-US"/>
           </a:p>
@@ -5803,7 +5810,7 @@
           <a:p>
             <a:fld id="{29D38AE0-A022-EC4B-ADED-C3987264F154}" type="datetimeFigureOut">
               <a:rPr kumimoji="1" lang="ja-JP" altLang="en-US" smtClean="0"/>
-              <a:t>2026/5/25</a:t>
+              <a:t>2026/5/26</a:t>
             </a:fld>
             <a:endParaRPr kumimoji="1" lang="ja-JP" altLang="en-US"/>
           </a:p>
@@ -6146,7 +6153,7 @@
           <a:p>
             <a:fld id="{29D38AE0-A022-EC4B-ADED-C3987264F154}" type="datetimeFigureOut">
               <a:rPr kumimoji="1" lang="ja-JP" altLang="en-US" smtClean="0"/>
-              <a:t>2026/5/25</a:t>
+              <a:t>2026/5/26</a:t>
             </a:fld>
             <a:endParaRPr kumimoji="1" lang="ja-JP" altLang="en-US"/>
           </a:p>
@@ -6434,7 +6441,7 @@
           <a:p>
             <a:fld id="{29D38AE0-A022-EC4B-ADED-C3987264F154}" type="datetimeFigureOut">
               <a:rPr kumimoji="1" lang="ja-JP" altLang="en-US" smtClean="0"/>
-              <a:t>2026/5/25</a:t>
+              <a:t>2026/5/26</a:t>
             </a:fld>
             <a:endParaRPr kumimoji="1" lang="ja-JP" altLang="en-US"/>
           </a:p>
@@ -6707,7 +6714,7 @@
           <a:p>
             <a:fld id="{29D38AE0-A022-EC4B-ADED-C3987264F154}" type="datetimeFigureOut">
               <a:rPr kumimoji="1" lang="ja-JP" altLang="en-US" smtClean="0"/>
-              <a:t>2026/5/25</a:t>
+              <a:t>2026/5/26</a:t>
             </a:fld>
             <a:endParaRPr kumimoji="1" lang="ja-JP" altLang="en-US"/>
           </a:p>
@@ -9130,6 +9137,6261 @@
 </p:sld>
 </file>
 
+<file path=ppt/slides/slide10.xml><?xml version="1.0" encoding="utf-8"?>
+<p:sld xmlns:a="http://schemas.openxmlformats.org/drawingml/2006/main" xmlns:r="http://schemas.openxmlformats.org/officeDocument/2006/relationships" xmlns:p="http://schemas.openxmlformats.org/presentationml/2006/main">
+  <p:cSld>
+    <p:spTree>
+      <p:nvGrpSpPr>
+        <p:cNvPr id="1" name=""/>
+        <p:cNvGrpSpPr/>
+        <p:nvPr/>
+      </p:nvGrpSpPr>
+      <p:grpSpPr>
+        <a:xfrm>
+          <a:off x="0" y="0"/>
+          <a:ext cx="0" cy="0"/>
+          <a:chOff x="0" y="0"/>
+          <a:chExt cx="0" cy="0"/>
+        </a:xfrm>
+      </p:grpSpPr>
+      <p:grpSp>
+        <p:nvGrpSpPr>
+          <p:cNvPr id="71" name="グループ化 70">
+            <a:extLst>
+              <a:ext uri="{FF2B5EF4-FFF2-40B4-BE49-F238E27FC236}">
+                <a16:creationId xmlns:a16="http://schemas.microsoft.com/office/drawing/2014/main" id="{FBD109EC-1AC4-B66A-0929-02A6FB53AFD1}"/>
+              </a:ext>
+            </a:extLst>
+          </p:cNvPr>
+          <p:cNvGrpSpPr/>
+          <p:nvPr/>
+        </p:nvGrpSpPr>
+        <p:grpSpPr>
+          <a:xfrm>
+            <a:off x="766152" y="390292"/>
+            <a:ext cx="9994775" cy="6304768"/>
+            <a:chOff x="766152" y="390292"/>
+            <a:chExt cx="9994775" cy="6304768"/>
+          </a:xfrm>
+        </p:grpSpPr>
+        <p:sp>
+          <p:nvSpPr>
+            <p:cNvPr id="69" name="フリーフォーム 68">
+              <a:extLst>
+                <a:ext uri="{FF2B5EF4-FFF2-40B4-BE49-F238E27FC236}">
+                  <a16:creationId xmlns:a16="http://schemas.microsoft.com/office/drawing/2014/main" id="{210CC617-8154-331D-EC16-BAE6A064A01D}"/>
+                </a:ext>
+              </a:extLst>
+            </p:cNvPr>
+            <p:cNvSpPr/>
+            <p:nvPr/>
+          </p:nvSpPr>
+          <p:spPr>
+            <a:xfrm>
+              <a:off x="5425027" y="2212649"/>
+              <a:ext cx="1099818" cy="2120735"/>
+            </a:xfrm>
+            <a:custGeom>
+              <a:avLst/>
+              <a:gdLst>
+                <a:gd name="csX0" fmla="*/ 969348 w 1099818"/>
+                <a:gd name="csY0" fmla="*/ 1021430 h 2120735"/>
+                <a:gd name="csX1" fmla="*/ 955907 w 1099818"/>
+                <a:gd name="csY1" fmla="*/ 1058858 h 2120735"/>
+                <a:gd name="csX2" fmla="*/ 936615 w 1099818"/>
+                <a:gd name="csY2" fmla="*/ 1100194 h 2120735"/>
+                <a:gd name="csX3" fmla="*/ 1078073 w 1099818"/>
+                <a:gd name="csY3" fmla="*/ 0 h 2120735"/>
+                <a:gd name="csX4" fmla="*/ 1090093 w 1099818"/>
+                <a:gd name="csY4" fmla="*/ 78763 h 2120735"/>
+                <a:gd name="csX5" fmla="*/ 1099818 w 1099818"/>
+                <a:gd name="csY5" fmla="*/ 271345 h 2120735"/>
+                <a:gd name="csX6" fmla="*/ 1073057 w 1099818"/>
+                <a:gd name="csY6" fmla="*/ 287602 h 2120735"/>
+                <a:gd name="csX7" fmla="*/ 261109 w 1099818"/>
+                <a:gd name="csY7" fmla="*/ 1814692 h 2120735"/>
+                <a:gd name="csX8" fmla="*/ 267491 w 1099818"/>
+                <a:gd name="csY8" fmla="*/ 1941078 h 2120735"/>
+                <a:gd name="csX9" fmla="*/ 352878 w 1099818"/>
+                <a:gd name="csY9" fmla="*/ 1877227 h 2120735"/>
+                <a:gd name="csX10" fmla="*/ 797675 w 1099818"/>
+                <a:gd name="csY10" fmla="*/ 1369655 h 2120735"/>
+                <a:gd name="csX11" fmla="*/ 883856 w 1099818"/>
+                <a:gd name="csY11" fmla="*/ 1213236 h 2120735"/>
+                <a:gd name="csX12" fmla="*/ 848619 w 1099818"/>
+                <a:gd name="csY12" fmla="*/ 1288739 h 2120735"/>
+                <a:gd name="csX13" fmla="*/ 179372 w 1099818"/>
+                <a:gd name="csY13" fmla="*/ 2025622 h 2120735"/>
+                <a:gd name="csX14" fmla="*/ 22812 w 1099818"/>
+                <a:gd name="csY14" fmla="*/ 2120735 h 2120735"/>
+                <a:gd name="csX15" fmla="*/ 10791 w 1099818"/>
+                <a:gd name="csY15" fmla="*/ 2041971 h 2120735"/>
+                <a:gd name="csX16" fmla="*/ 0 w 1099818"/>
+                <a:gd name="csY16" fmla="*/ 1828269 h 2120735"/>
+                <a:gd name="csX17" fmla="*/ 921513 w 1099818"/>
+                <a:gd name="csY17" fmla="*/ 95112 h 2120735"/>
+              </a:gdLst>
+              <a:ahLst/>
+              <a:cxnLst>
+                <a:cxn ang="0">
+                  <a:pos x="csX0" y="csY0"/>
+                </a:cxn>
+                <a:cxn ang="0">
+                  <a:pos x="csX1" y="csY1"/>
+                </a:cxn>
+                <a:cxn ang="0">
+                  <a:pos x="csX2" y="csY2"/>
+                </a:cxn>
+                <a:cxn ang="0">
+                  <a:pos x="csX3" y="csY3"/>
+                </a:cxn>
+                <a:cxn ang="0">
+                  <a:pos x="csX4" y="csY4"/>
+                </a:cxn>
+                <a:cxn ang="0">
+                  <a:pos x="csX5" y="csY5"/>
+                </a:cxn>
+                <a:cxn ang="0">
+                  <a:pos x="csX6" y="csY6"/>
+                </a:cxn>
+                <a:cxn ang="0">
+                  <a:pos x="csX7" y="csY7"/>
+                </a:cxn>
+                <a:cxn ang="0">
+                  <a:pos x="csX8" y="csY8"/>
+                </a:cxn>
+                <a:cxn ang="0">
+                  <a:pos x="csX9" y="csY9"/>
+                </a:cxn>
+                <a:cxn ang="0">
+                  <a:pos x="csX10" y="csY10"/>
+                </a:cxn>
+                <a:cxn ang="0">
+                  <a:pos x="csX11" y="csY11"/>
+                </a:cxn>
+                <a:cxn ang="0">
+                  <a:pos x="csX12" y="csY12"/>
+                </a:cxn>
+                <a:cxn ang="0">
+                  <a:pos x="csX13" y="csY13"/>
+                </a:cxn>
+                <a:cxn ang="0">
+                  <a:pos x="csX14" y="csY14"/>
+                </a:cxn>
+                <a:cxn ang="0">
+                  <a:pos x="csX15" y="csY15"/>
+                </a:cxn>
+                <a:cxn ang="0">
+                  <a:pos x="csX16" y="csY16"/>
+                </a:cxn>
+                <a:cxn ang="0">
+                  <a:pos x="csX17" y="csY17"/>
+                </a:cxn>
+              </a:cxnLst>
+              <a:rect l="l" t="t" r="r" b="b"/>
+              <a:pathLst>
+                <a:path w="1099818" h="2120735">
+                  <a:moveTo>
+                    <a:pt x="969348" y="1021430"/>
+                  </a:moveTo>
+                  <a:lnTo>
+                    <a:pt x="955907" y="1058858"/>
+                  </a:lnTo>
+                  <a:lnTo>
+                    <a:pt x="936615" y="1100194"/>
+                  </a:lnTo>
+                  <a:close/>
+                  <a:moveTo>
+                    <a:pt x="1078073" y="0"/>
+                  </a:moveTo>
+                  <a:lnTo>
+                    <a:pt x="1090093" y="78763"/>
+                  </a:lnTo>
+                  <a:lnTo>
+                    <a:pt x="1099818" y="271345"/>
+                  </a:lnTo>
+                  <a:lnTo>
+                    <a:pt x="1073057" y="287602"/>
+                  </a:lnTo>
+                  <a:cubicBezTo>
+                    <a:pt x="583186" y="618552"/>
+                    <a:pt x="261109" y="1179010"/>
+                    <a:pt x="261109" y="1814692"/>
+                  </a:cubicBezTo>
+                  <a:lnTo>
+                    <a:pt x="267491" y="1941078"/>
+                  </a:lnTo>
+                  <a:lnTo>
+                    <a:pt x="352878" y="1877227"/>
+                  </a:lnTo>
+                  <a:cubicBezTo>
+                    <a:pt x="527074" y="1733468"/>
+                    <a:pt x="677584" y="1562033"/>
+                    <a:pt x="797675" y="1369655"/>
+                  </a:cubicBezTo>
+                  <a:lnTo>
+                    <a:pt x="883856" y="1213236"/>
+                  </a:lnTo>
+                  <a:lnTo>
+                    <a:pt x="848619" y="1288739"/>
+                  </a:lnTo>
+                  <a:cubicBezTo>
+                    <a:pt x="687737" y="1584894"/>
+                    <a:pt x="457359" y="1837818"/>
+                    <a:pt x="179372" y="2025622"/>
+                  </a:cubicBezTo>
+                  <a:lnTo>
+                    <a:pt x="22812" y="2120735"/>
+                  </a:lnTo>
+                  <a:lnTo>
+                    <a:pt x="10791" y="2041971"/>
+                  </a:lnTo>
+                  <a:cubicBezTo>
+                    <a:pt x="3656" y="1971708"/>
+                    <a:pt x="0" y="1900415"/>
+                    <a:pt x="0" y="1828269"/>
+                  </a:cubicBezTo>
+                  <a:cubicBezTo>
+                    <a:pt x="0" y="1106807"/>
+                    <a:pt x="365538" y="470721"/>
+                    <a:pt x="921513" y="95112"/>
+                  </a:cubicBezTo>
+                  <a:close/>
+                </a:path>
+              </a:pathLst>
+            </a:custGeom>
+            <a:solidFill>
+              <a:schemeClr val="bg2">
+                <a:lumMod val="90000"/>
+              </a:schemeClr>
+            </a:solidFill>
+            <a:ln w="19050">
+              <a:noFill/>
+            </a:ln>
+          </p:spPr>
+          <p:style>
+            <a:lnRef idx="2">
+              <a:schemeClr val="accent1">
+                <a:shade val="15000"/>
+              </a:schemeClr>
+            </a:lnRef>
+            <a:fillRef idx="1">
+              <a:schemeClr val="accent1"/>
+            </a:fillRef>
+            <a:effectRef idx="0">
+              <a:schemeClr val="accent1"/>
+            </a:effectRef>
+            <a:fontRef idx="minor">
+              <a:schemeClr val="lt1"/>
+            </a:fontRef>
+          </p:style>
+          <p:txBody>
+            <a:bodyPr wrap="square" rtlCol="0" anchor="ctr">
+              <a:noAutofit/>
+            </a:bodyPr>
+            <a:lstStyle/>
+            <a:p>
+              <a:pPr algn="ctr"/>
+              <a:endParaRPr kumimoji="1" lang="ja-JP" altLang="en-US"/>
+            </a:p>
+          </p:txBody>
+        </p:sp>
+        <p:cxnSp>
+          <p:nvCxnSpPr>
+            <p:cNvPr id="3" name="直線矢印コネクタ 2">
+              <a:extLst>
+                <a:ext uri="{FF2B5EF4-FFF2-40B4-BE49-F238E27FC236}">
+                  <a16:creationId xmlns:a16="http://schemas.microsoft.com/office/drawing/2014/main" id="{8120019B-7C59-A454-0DC9-27F0DFCC6344}"/>
+                </a:ext>
+              </a:extLst>
+            </p:cNvPr>
+            <p:cNvCxnSpPr>
+              <a:cxnSpLocks/>
+            </p:cNvCxnSpPr>
+            <p:nvPr/>
+          </p:nvCxnSpPr>
+          <p:spPr>
+            <a:xfrm>
+              <a:off x="1320150" y="6216979"/>
+              <a:ext cx="9440777" cy="0"/>
+            </a:xfrm>
+            <a:prstGeom prst="straightConnector1">
+              <a:avLst/>
+            </a:prstGeom>
+            <a:ln w="28575">
+              <a:solidFill>
+                <a:schemeClr val="tx1"/>
+              </a:solidFill>
+              <a:tailEnd type="triangle"/>
+            </a:ln>
+          </p:spPr>
+          <p:style>
+            <a:lnRef idx="1">
+              <a:schemeClr val="accent1"/>
+            </a:lnRef>
+            <a:fillRef idx="0">
+              <a:schemeClr val="accent1"/>
+            </a:fillRef>
+            <a:effectRef idx="0">
+              <a:schemeClr val="accent1"/>
+            </a:effectRef>
+            <a:fontRef idx="minor">
+              <a:schemeClr val="tx1"/>
+            </a:fontRef>
+          </p:style>
+        </p:cxnSp>
+        <p:cxnSp>
+          <p:nvCxnSpPr>
+            <p:cNvPr id="4" name="直線矢印コネクタ 3">
+              <a:extLst>
+                <a:ext uri="{FF2B5EF4-FFF2-40B4-BE49-F238E27FC236}">
+                  <a16:creationId xmlns:a16="http://schemas.microsoft.com/office/drawing/2014/main" id="{7C2AC89A-3A0B-ADDD-64B5-F857120D44CE}"/>
+                </a:ext>
+              </a:extLst>
+            </p:cNvPr>
+            <p:cNvCxnSpPr>
+              <a:cxnSpLocks/>
+            </p:cNvCxnSpPr>
+            <p:nvPr/>
+          </p:nvCxnSpPr>
+          <p:spPr>
+            <a:xfrm flipV="1">
+              <a:off x="1320150" y="390293"/>
+              <a:ext cx="0" cy="5826686"/>
+            </a:xfrm>
+            <a:prstGeom prst="straightConnector1">
+              <a:avLst/>
+            </a:prstGeom>
+            <a:ln w="28575">
+              <a:solidFill>
+                <a:schemeClr val="tx1"/>
+              </a:solidFill>
+              <a:tailEnd type="triangle"/>
+            </a:ln>
+          </p:spPr>
+          <p:style>
+            <a:lnRef idx="1">
+              <a:schemeClr val="accent1"/>
+            </a:lnRef>
+            <a:fillRef idx="0">
+              <a:schemeClr val="accent1"/>
+            </a:fillRef>
+            <a:effectRef idx="0">
+              <a:schemeClr val="accent1"/>
+            </a:effectRef>
+            <a:fontRef idx="minor">
+              <a:schemeClr val="tx1"/>
+            </a:fontRef>
+          </p:style>
+        </p:cxnSp>
+        <p:sp>
+          <p:nvSpPr>
+            <p:cNvPr id="5" name="テキスト ボックス 4">
+              <a:extLst>
+                <a:ext uri="{FF2B5EF4-FFF2-40B4-BE49-F238E27FC236}">
+                  <a16:creationId xmlns:a16="http://schemas.microsoft.com/office/drawing/2014/main" id="{A9D68A7F-9F55-5C0C-1D46-6BDF7D35F7D4}"/>
+                </a:ext>
+              </a:extLst>
+            </p:cNvPr>
+            <p:cNvSpPr txBox="1"/>
+            <p:nvPr/>
+          </p:nvSpPr>
+          <p:spPr>
+            <a:xfrm>
+              <a:off x="9248061" y="6233395"/>
+              <a:ext cx="1512866" cy="461665"/>
+            </a:xfrm>
+            <a:prstGeom prst="rect">
+              <a:avLst/>
+            </a:prstGeom>
+            <a:noFill/>
+          </p:spPr>
+          <p:txBody>
+            <a:bodyPr wrap="square" rtlCol="0">
+              <a:spAutoFit/>
+            </a:bodyPr>
+            <a:lstStyle/>
+            <a:p>
+              <a:pPr algn="ctr"/>
+              <a:r>
+                <a:rPr kumimoji="1" lang="ja-JP" altLang="en-US" sz="2400">
+                  <a:latin typeface="Hiragino Kaku Gothic StdN W8" panose="020B0800000000000000" pitchFamily="34" charset="-128"/>
+                  <a:ea typeface="Hiragino Kaku Gothic StdN W8" panose="020B0800000000000000" pitchFamily="34" charset="-128"/>
+                </a:rPr>
+                <a:t>車関税率</a:t>
+              </a:r>
+            </a:p>
+          </p:txBody>
+        </p:sp>
+        <p:sp>
+          <p:nvSpPr>
+            <p:cNvPr id="6" name="テキスト ボックス 5">
+              <a:extLst>
+                <a:ext uri="{FF2B5EF4-FFF2-40B4-BE49-F238E27FC236}">
+                  <a16:creationId xmlns:a16="http://schemas.microsoft.com/office/drawing/2014/main" id="{D8DBE6BA-BC16-7711-B6F3-7B6B392E10B7}"/>
+                </a:ext>
+              </a:extLst>
+            </p:cNvPr>
+            <p:cNvSpPr txBox="1"/>
+            <p:nvPr/>
+          </p:nvSpPr>
+          <p:spPr>
+            <a:xfrm>
+              <a:off x="766152" y="390292"/>
+              <a:ext cx="553998" cy="1323439"/>
+            </a:xfrm>
+            <a:prstGeom prst="rect">
+              <a:avLst/>
+            </a:prstGeom>
+            <a:noFill/>
+          </p:spPr>
+          <p:txBody>
+            <a:bodyPr vert="eaVert" wrap="none" rtlCol="0">
+              <a:spAutoFit/>
+            </a:bodyPr>
+            <a:lstStyle/>
+            <a:p>
+              <a:r>
+                <a:rPr kumimoji="1" lang="ja-JP" altLang="en-US" sz="2400">
+                  <a:latin typeface="Hiragino Kaku Gothic StdN W8" panose="020B0800000000000000" pitchFamily="34" charset="-128"/>
+                  <a:ea typeface="Hiragino Kaku Gothic StdN W8" panose="020B0800000000000000" pitchFamily="34" charset="-128"/>
+                </a:rPr>
+                <a:t>肉関税率</a:t>
+              </a:r>
+            </a:p>
+          </p:txBody>
+        </p:sp>
+        <p:grpSp>
+          <p:nvGrpSpPr>
+            <p:cNvPr id="7" name="グループ化 6">
+              <a:extLst>
+                <a:ext uri="{FF2B5EF4-FFF2-40B4-BE49-F238E27FC236}">
+                  <a16:creationId xmlns:a16="http://schemas.microsoft.com/office/drawing/2014/main" id="{315745EF-73DF-9962-7224-81327106250E}"/>
+                </a:ext>
+              </a:extLst>
+            </p:cNvPr>
+            <p:cNvGrpSpPr/>
+            <p:nvPr/>
+          </p:nvGrpSpPr>
+          <p:grpSpPr>
+            <a:xfrm>
+              <a:off x="2354479" y="390292"/>
+              <a:ext cx="4180231" cy="4180231"/>
+              <a:chOff x="1930271" y="273182"/>
+              <a:chExt cx="4180231" cy="4180231"/>
+            </a:xfrm>
+          </p:grpSpPr>
+          <p:sp>
+            <p:nvSpPr>
+              <p:cNvPr id="15" name="円/楕円 14">
+                <a:extLst>
+                  <a:ext uri="{FF2B5EF4-FFF2-40B4-BE49-F238E27FC236}">
+                    <a16:creationId xmlns:a16="http://schemas.microsoft.com/office/drawing/2014/main" id="{24B10D17-745C-BB2E-9E08-AA269ACEBF8C}"/>
+                  </a:ext>
+                </a:extLst>
+              </p:cNvPr>
+              <p:cNvSpPr/>
+              <p:nvPr/>
+            </p:nvSpPr>
+            <p:spPr>
+              <a:xfrm>
+                <a:off x="3945487" y="2247163"/>
+                <a:ext cx="186550" cy="186550"/>
+              </a:xfrm>
+              <a:prstGeom prst="ellipse">
+                <a:avLst/>
+              </a:prstGeom>
+              <a:solidFill>
+                <a:schemeClr val="tx1"/>
+              </a:solidFill>
+              <a:ln>
+                <a:noFill/>
+              </a:ln>
+            </p:spPr>
+            <p:style>
+              <a:lnRef idx="2">
+                <a:schemeClr val="accent1">
+                  <a:shade val="50000"/>
+                </a:schemeClr>
+              </a:lnRef>
+              <a:fillRef idx="1">
+                <a:schemeClr val="accent1"/>
+              </a:fillRef>
+              <a:effectRef idx="0">
+                <a:schemeClr val="accent1"/>
+              </a:effectRef>
+              <a:fontRef idx="minor">
+                <a:schemeClr val="lt1"/>
+              </a:fontRef>
+            </p:style>
+            <p:txBody>
+              <a:bodyPr rtlCol="0" anchor="ctr"/>
+              <a:lstStyle/>
+              <a:p>
+                <a:pPr algn="ctr"/>
+                <a:endParaRPr kumimoji="1" lang="ja-JP" altLang="en-US"/>
+              </a:p>
+            </p:txBody>
+          </p:sp>
+          <p:sp>
+            <p:nvSpPr>
+              <p:cNvPr id="16" name="テキスト ボックス 15">
+                <a:extLst>
+                  <a:ext uri="{FF2B5EF4-FFF2-40B4-BE49-F238E27FC236}">
+                    <a16:creationId xmlns:a16="http://schemas.microsoft.com/office/drawing/2014/main" id="{44A3F028-3406-C943-6E49-A4E06E0FE66F}"/>
+                  </a:ext>
+                </a:extLst>
+              </p:cNvPr>
+              <p:cNvSpPr txBox="1"/>
+              <p:nvPr/>
+            </p:nvSpPr>
+            <p:spPr>
+              <a:xfrm>
+                <a:off x="3491129" y="2441089"/>
+                <a:ext cx="1024577" cy="461665"/>
+              </a:xfrm>
+              <a:prstGeom prst="rect">
+                <a:avLst/>
+              </a:prstGeom>
+              <a:noFill/>
+            </p:spPr>
+            <p:txBody>
+              <a:bodyPr wrap="square" rtlCol="0">
+                <a:spAutoFit/>
+              </a:bodyPr>
+              <a:lstStyle/>
+              <a:p>
+                <a:pPr algn="ctr"/>
+                <a:r>
+                  <a:rPr kumimoji="1" lang="ja-JP" altLang="en-US" sz="2400">
+                    <a:latin typeface="Hiragino Kaku Gothic StdN W8" panose="020B0800000000000000" pitchFamily="34" charset="-128"/>
+                    <a:ea typeface="Hiragino Kaku Gothic StdN W8" panose="020B0800000000000000" pitchFamily="34" charset="-128"/>
+                  </a:rPr>
+                  <a:t>日本</a:t>
+                </a:r>
+              </a:p>
+            </p:txBody>
+          </p:sp>
+          <p:sp>
+            <p:nvSpPr>
+              <p:cNvPr id="17" name="円/楕円 16">
+                <a:extLst>
+                  <a:ext uri="{FF2B5EF4-FFF2-40B4-BE49-F238E27FC236}">
+                    <a16:creationId xmlns:a16="http://schemas.microsoft.com/office/drawing/2014/main" id="{DAD37A57-1AB5-11C6-2BC3-A96FF880EA97}"/>
+                  </a:ext>
+                </a:extLst>
+              </p:cNvPr>
+              <p:cNvSpPr/>
+              <p:nvPr/>
+            </p:nvSpPr>
+            <p:spPr>
+              <a:xfrm>
+                <a:off x="1930271" y="273182"/>
+                <a:ext cx="4180231" cy="4180231"/>
+              </a:xfrm>
+              <a:prstGeom prst="ellipse">
+                <a:avLst/>
+              </a:prstGeom>
+              <a:noFill/>
+              <a:ln w="19050">
+                <a:solidFill>
+                  <a:schemeClr val="tx1"/>
+                </a:solidFill>
+              </a:ln>
+            </p:spPr>
+            <p:style>
+              <a:lnRef idx="2">
+                <a:schemeClr val="accent1">
+                  <a:shade val="15000"/>
+                </a:schemeClr>
+              </a:lnRef>
+              <a:fillRef idx="1">
+                <a:schemeClr val="accent1"/>
+              </a:fillRef>
+              <a:effectRef idx="0">
+                <a:schemeClr val="accent1"/>
+              </a:effectRef>
+              <a:fontRef idx="minor">
+                <a:schemeClr val="lt1"/>
+              </a:fontRef>
+            </p:style>
+            <p:txBody>
+              <a:bodyPr rtlCol="0" anchor="ctr"/>
+              <a:lstStyle/>
+              <a:p>
+                <a:pPr algn="ctr"/>
+                <a:endParaRPr kumimoji="1" lang="ja-JP" altLang="en-US"/>
+              </a:p>
+            </p:txBody>
+          </p:sp>
+        </p:grpSp>
+        <p:sp>
+          <p:nvSpPr>
+            <p:cNvPr id="13" name="円/楕円 12">
+              <a:extLst>
+                <a:ext uri="{FF2B5EF4-FFF2-40B4-BE49-F238E27FC236}">
+                  <a16:creationId xmlns:a16="http://schemas.microsoft.com/office/drawing/2014/main" id="{BE3A5AE1-8589-B863-CE47-B617DA3199C6}"/>
+                </a:ext>
+              </a:extLst>
+            </p:cNvPr>
+            <p:cNvSpPr/>
+            <p:nvPr/>
+          </p:nvSpPr>
+          <p:spPr>
+            <a:xfrm>
+              <a:off x="7450695" y="3920436"/>
+              <a:ext cx="186550" cy="186550"/>
+            </a:xfrm>
+            <a:prstGeom prst="ellipse">
+              <a:avLst/>
+            </a:prstGeom>
+            <a:solidFill>
+              <a:schemeClr val="tx1"/>
+            </a:solidFill>
+            <a:ln>
+              <a:noFill/>
+            </a:ln>
+          </p:spPr>
+          <p:style>
+            <a:lnRef idx="2">
+              <a:schemeClr val="accent1">
+                <a:shade val="50000"/>
+              </a:schemeClr>
+            </a:lnRef>
+            <a:fillRef idx="1">
+              <a:schemeClr val="accent1"/>
+            </a:fillRef>
+            <a:effectRef idx="0">
+              <a:schemeClr val="accent1"/>
+            </a:effectRef>
+            <a:fontRef idx="minor">
+              <a:schemeClr val="lt1"/>
+            </a:fontRef>
+          </p:style>
+          <p:txBody>
+            <a:bodyPr rtlCol="0" anchor="ctr"/>
+            <a:lstStyle/>
+            <a:p>
+              <a:pPr algn="ctr"/>
+              <a:endParaRPr kumimoji="1" lang="ja-JP" altLang="en-US"/>
+            </a:p>
+          </p:txBody>
+        </p:sp>
+        <p:grpSp>
+          <p:nvGrpSpPr>
+            <p:cNvPr id="9" name="グループ化 8">
+              <a:extLst>
+                <a:ext uri="{FF2B5EF4-FFF2-40B4-BE49-F238E27FC236}">
+                  <a16:creationId xmlns:a16="http://schemas.microsoft.com/office/drawing/2014/main" id="{A3452040-05E8-D7F7-ED16-CA1714CAEE69}"/>
+                </a:ext>
+              </a:extLst>
+            </p:cNvPr>
+            <p:cNvGrpSpPr/>
+            <p:nvPr/>
+          </p:nvGrpSpPr>
+          <p:grpSpPr>
+            <a:xfrm>
+              <a:off x="6270771" y="1711020"/>
+              <a:ext cx="1024577" cy="555608"/>
+              <a:chOff x="6270771" y="1711020"/>
+              <a:chExt cx="1024577" cy="555608"/>
+            </a:xfrm>
+          </p:grpSpPr>
+          <p:sp>
+            <p:nvSpPr>
+              <p:cNvPr id="10" name="テキスト ボックス 9">
+                <a:extLst>
+                  <a:ext uri="{FF2B5EF4-FFF2-40B4-BE49-F238E27FC236}">
+                    <a16:creationId xmlns:a16="http://schemas.microsoft.com/office/drawing/2014/main" id="{E1D2D73B-314C-18B9-DBED-077526329EA6}"/>
+                  </a:ext>
+                </a:extLst>
+              </p:cNvPr>
+              <p:cNvSpPr txBox="1"/>
+              <p:nvPr/>
+            </p:nvSpPr>
+            <p:spPr>
+              <a:xfrm>
+                <a:off x="6270771" y="1711020"/>
+                <a:ext cx="1024577" cy="461665"/>
+              </a:xfrm>
+              <a:prstGeom prst="rect">
+                <a:avLst/>
+              </a:prstGeom>
+              <a:noFill/>
+            </p:spPr>
+            <p:txBody>
+              <a:bodyPr wrap="square" rtlCol="0">
+                <a:spAutoFit/>
+              </a:bodyPr>
+              <a:lstStyle/>
+              <a:p>
+                <a:r>
+                  <a:rPr kumimoji="1" lang="ja-JP" altLang="en-US" sz="2400">
+                    <a:latin typeface="Hiragino Kaku Gothic StdN W8" panose="020B0800000000000000" pitchFamily="34" charset="-128"/>
+                    <a:ea typeface="Hiragino Kaku Gothic StdN W8" panose="020B0800000000000000" pitchFamily="34" charset="-128"/>
+                  </a:rPr>
+                  <a:t>現状</a:t>
+                </a:r>
+              </a:p>
+            </p:txBody>
+          </p:sp>
+          <p:sp>
+            <p:nvSpPr>
+              <p:cNvPr id="11" name="円/楕円 10">
+                <a:extLst>
+                  <a:ext uri="{FF2B5EF4-FFF2-40B4-BE49-F238E27FC236}">
+                    <a16:creationId xmlns:a16="http://schemas.microsoft.com/office/drawing/2014/main" id="{B80E8429-8929-49AA-B422-08CF366D5329}"/>
+                  </a:ext>
+                </a:extLst>
+              </p:cNvPr>
+              <p:cNvSpPr/>
+              <p:nvPr/>
+            </p:nvSpPr>
+            <p:spPr>
+              <a:xfrm>
+                <a:off x="6419541" y="2080078"/>
+                <a:ext cx="186550" cy="186550"/>
+              </a:xfrm>
+              <a:prstGeom prst="ellipse">
+                <a:avLst/>
+              </a:prstGeom>
+              <a:solidFill>
+                <a:schemeClr val="tx1"/>
+              </a:solidFill>
+              <a:ln>
+                <a:noFill/>
+              </a:ln>
+            </p:spPr>
+            <p:style>
+              <a:lnRef idx="2">
+                <a:schemeClr val="accent1">
+                  <a:shade val="50000"/>
+                </a:schemeClr>
+              </a:lnRef>
+              <a:fillRef idx="1">
+                <a:schemeClr val="accent1"/>
+              </a:fillRef>
+              <a:effectRef idx="0">
+                <a:schemeClr val="accent1"/>
+              </a:effectRef>
+              <a:fontRef idx="minor">
+                <a:schemeClr val="lt1"/>
+              </a:fontRef>
+            </p:style>
+            <p:txBody>
+              <a:bodyPr rtlCol="0" anchor="ctr"/>
+              <a:lstStyle/>
+              <a:p>
+                <a:pPr algn="ctr"/>
+                <a:endParaRPr kumimoji="1" lang="ja-JP" altLang="en-US"/>
+              </a:p>
+            </p:txBody>
+          </p:sp>
+        </p:grpSp>
+        <p:grpSp>
+          <p:nvGrpSpPr>
+            <p:cNvPr id="70" name="グループ化 69">
+              <a:extLst>
+                <a:ext uri="{FF2B5EF4-FFF2-40B4-BE49-F238E27FC236}">
+                  <a16:creationId xmlns:a16="http://schemas.microsoft.com/office/drawing/2014/main" id="{BAB4E67D-9230-FB03-C682-9C83490A86F2}"/>
+                </a:ext>
+              </a:extLst>
+            </p:cNvPr>
+            <p:cNvGrpSpPr/>
+            <p:nvPr/>
+          </p:nvGrpSpPr>
+          <p:grpSpPr>
+            <a:xfrm>
+              <a:off x="5433827" y="1926096"/>
+              <a:ext cx="4180231" cy="4180231"/>
+              <a:chOff x="5433827" y="1926096"/>
+              <a:chExt cx="4180231" cy="4180231"/>
+            </a:xfrm>
+          </p:grpSpPr>
+          <p:sp>
+            <p:nvSpPr>
+              <p:cNvPr id="12" name="テキスト ボックス 11">
+                <a:extLst>
+                  <a:ext uri="{FF2B5EF4-FFF2-40B4-BE49-F238E27FC236}">
+                    <a16:creationId xmlns:a16="http://schemas.microsoft.com/office/drawing/2014/main" id="{A9A1BC21-6D80-D772-2231-21AB2D05F686}"/>
+                  </a:ext>
+                </a:extLst>
+              </p:cNvPr>
+              <p:cNvSpPr txBox="1"/>
+              <p:nvPr/>
+            </p:nvSpPr>
+            <p:spPr>
+              <a:xfrm>
+                <a:off x="6996337" y="4091460"/>
+                <a:ext cx="1024577" cy="461665"/>
+              </a:xfrm>
+              <a:prstGeom prst="rect">
+                <a:avLst/>
+              </a:prstGeom>
+              <a:noFill/>
+            </p:spPr>
+            <p:txBody>
+              <a:bodyPr wrap="square" rtlCol="0">
+                <a:spAutoFit/>
+              </a:bodyPr>
+              <a:lstStyle/>
+              <a:p>
+                <a:r>
+                  <a:rPr kumimoji="1" lang="ja-JP" altLang="en-US" sz="2400">
+                    <a:latin typeface="Hiragino Kaku Gothic StdN W8" panose="020B0800000000000000" pitchFamily="34" charset="-128"/>
+                    <a:ea typeface="Hiragino Kaku Gothic StdN W8" panose="020B0800000000000000" pitchFamily="34" charset="-128"/>
+                  </a:rPr>
+                  <a:t>米国</a:t>
+                </a:r>
+              </a:p>
+            </p:txBody>
+          </p:sp>
+          <p:sp>
+            <p:nvSpPr>
+              <p:cNvPr id="14" name="円/楕円 13">
+                <a:extLst>
+                  <a:ext uri="{FF2B5EF4-FFF2-40B4-BE49-F238E27FC236}">
+                    <a16:creationId xmlns:a16="http://schemas.microsoft.com/office/drawing/2014/main" id="{FA2CB520-5345-795B-E9AE-744A03FA2DE8}"/>
+                  </a:ext>
+                </a:extLst>
+              </p:cNvPr>
+              <p:cNvSpPr/>
+              <p:nvPr/>
+            </p:nvSpPr>
+            <p:spPr>
+              <a:xfrm>
+                <a:off x="5433827" y="1926096"/>
+                <a:ext cx="4180231" cy="4180231"/>
+              </a:xfrm>
+              <a:prstGeom prst="ellipse">
+                <a:avLst/>
+              </a:prstGeom>
+              <a:noFill/>
+              <a:ln w="19050">
+                <a:solidFill>
+                  <a:schemeClr val="tx1">
+                    <a:alpha val="16000"/>
+                  </a:schemeClr>
+                </a:solidFill>
+              </a:ln>
+            </p:spPr>
+            <p:style>
+              <a:lnRef idx="2">
+                <a:schemeClr val="accent1">
+                  <a:shade val="15000"/>
+                </a:schemeClr>
+              </a:lnRef>
+              <a:fillRef idx="1">
+                <a:schemeClr val="accent1"/>
+              </a:fillRef>
+              <a:effectRef idx="0">
+                <a:schemeClr val="accent1"/>
+              </a:effectRef>
+              <a:fontRef idx="minor">
+                <a:schemeClr val="lt1"/>
+              </a:fontRef>
+            </p:style>
+            <p:txBody>
+              <a:bodyPr rtlCol="0" anchor="ctr"/>
+              <a:lstStyle/>
+              <a:p>
+                <a:pPr algn="ctr"/>
+                <a:endParaRPr kumimoji="1" lang="ja-JP" altLang="en-US"/>
+              </a:p>
+            </p:txBody>
+          </p:sp>
+          <p:sp>
+            <p:nvSpPr>
+              <p:cNvPr id="22" name="円/楕円 21">
+                <a:extLst>
+                  <a:ext uri="{FF2B5EF4-FFF2-40B4-BE49-F238E27FC236}">
+                    <a16:creationId xmlns:a16="http://schemas.microsoft.com/office/drawing/2014/main" id="{0193A1DB-F72C-FDDC-3BA7-8EE9900CC7A8}"/>
+                  </a:ext>
+                </a:extLst>
+              </p:cNvPr>
+              <p:cNvSpPr/>
+              <p:nvPr/>
+            </p:nvSpPr>
+            <p:spPr>
+              <a:xfrm>
+                <a:off x="5682334" y="2189100"/>
+                <a:ext cx="3683216" cy="3683216"/>
+              </a:xfrm>
+              <a:prstGeom prst="ellipse">
+                <a:avLst/>
+              </a:prstGeom>
+              <a:noFill/>
+              <a:ln w="19050">
+                <a:solidFill>
+                  <a:schemeClr val="tx1"/>
+                </a:solidFill>
+              </a:ln>
+            </p:spPr>
+            <p:style>
+              <a:lnRef idx="2">
+                <a:schemeClr val="accent1">
+                  <a:shade val="15000"/>
+                </a:schemeClr>
+              </a:lnRef>
+              <a:fillRef idx="1">
+                <a:schemeClr val="accent1"/>
+              </a:fillRef>
+              <a:effectRef idx="0">
+                <a:schemeClr val="accent1"/>
+              </a:effectRef>
+              <a:fontRef idx="minor">
+                <a:schemeClr val="lt1"/>
+              </a:fontRef>
+            </p:style>
+            <p:txBody>
+              <a:bodyPr rtlCol="0" anchor="ctr"/>
+              <a:lstStyle/>
+              <a:p>
+                <a:pPr algn="ctr"/>
+                <a:endParaRPr kumimoji="1" lang="ja-JP" altLang="en-US"/>
+              </a:p>
+            </p:txBody>
+          </p:sp>
+        </p:grpSp>
+        <p:sp>
+          <p:nvSpPr>
+            <p:cNvPr id="38" name="フリーフォーム 37">
+              <a:extLst>
+                <a:ext uri="{FF2B5EF4-FFF2-40B4-BE49-F238E27FC236}">
+                  <a16:creationId xmlns:a16="http://schemas.microsoft.com/office/drawing/2014/main" id="{0C79E5B4-3BE7-039C-6C70-4C6237E65637}"/>
+                </a:ext>
+              </a:extLst>
+            </p:cNvPr>
+            <p:cNvSpPr/>
+            <p:nvPr/>
+          </p:nvSpPr>
+          <p:spPr>
+            <a:xfrm>
+              <a:off x="5694935" y="2464638"/>
+              <a:ext cx="852377" cy="1677997"/>
+            </a:xfrm>
+            <a:custGeom>
+              <a:avLst/>
+              <a:gdLst>
+                <a:gd name="csX0" fmla="*/ 852311 w 852377"/>
+                <a:gd name="csY0" fmla="*/ 0 h 1677997"/>
+                <a:gd name="csX1" fmla="*/ 852377 w 852377"/>
+                <a:gd name="csY1" fmla="*/ 1311 h 1677997"/>
+                <a:gd name="csX2" fmla="*/ 91769 w 852377"/>
+                <a:gd name="csY2" fmla="*/ 1614146 h 1677997"/>
+                <a:gd name="csX3" fmla="*/ 6382 w 852377"/>
+                <a:gd name="csY3" fmla="*/ 1677997 h 1677997"/>
+                <a:gd name="csX4" fmla="*/ 0 w 852377"/>
+                <a:gd name="csY4" fmla="*/ 1551611 h 1677997"/>
+                <a:gd name="csX5" fmla="*/ 811948 w 852377"/>
+                <a:gd name="csY5" fmla="*/ 24521 h 1677997"/>
+              </a:gdLst>
+              <a:ahLst/>
+              <a:cxnLst>
+                <a:cxn ang="0">
+                  <a:pos x="csX0" y="csY0"/>
+                </a:cxn>
+                <a:cxn ang="0">
+                  <a:pos x="csX1" y="csY1"/>
+                </a:cxn>
+                <a:cxn ang="0">
+                  <a:pos x="csX2" y="csY2"/>
+                </a:cxn>
+                <a:cxn ang="0">
+                  <a:pos x="csX3" y="csY3"/>
+                </a:cxn>
+                <a:cxn ang="0">
+                  <a:pos x="csX4" y="csY4"/>
+                </a:cxn>
+                <a:cxn ang="0">
+                  <a:pos x="csX5" y="csY5"/>
+                </a:cxn>
+              </a:cxnLst>
+              <a:rect l="l" t="t" r="r" b="b"/>
+              <a:pathLst>
+                <a:path w="852377" h="1677997">
+                  <a:moveTo>
+                    <a:pt x="852311" y="0"/>
+                  </a:moveTo>
+                  <a:lnTo>
+                    <a:pt x="852377" y="1311"/>
+                  </a:lnTo>
+                  <a:cubicBezTo>
+                    <a:pt x="852377" y="650627"/>
+                    <a:pt x="556292" y="1230788"/>
+                    <a:pt x="91769" y="1614146"/>
+                  </a:cubicBezTo>
+                  <a:lnTo>
+                    <a:pt x="6382" y="1677997"/>
+                  </a:lnTo>
+                  <a:lnTo>
+                    <a:pt x="0" y="1551611"/>
+                  </a:lnTo>
+                  <a:cubicBezTo>
+                    <a:pt x="0" y="915929"/>
+                    <a:pt x="322077" y="355471"/>
+                    <a:pt x="811948" y="24521"/>
+                  </a:cubicBezTo>
+                  <a:close/>
+                </a:path>
+              </a:pathLst>
+            </a:custGeom>
+            <a:solidFill>
+              <a:srgbClr val="FF0000">
+                <a:alpha val="36000"/>
+              </a:srgbClr>
+            </a:solidFill>
+            <a:ln w="19050">
+              <a:noFill/>
+            </a:ln>
+          </p:spPr>
+          <p:style>
+            <a:lnRef idx="2">
+              <a:schemeClr val="accent1">
+                <a:shade val="15000"/>
+              </a:schemeClr>
+            </a:lnRef>
+            <a:fillRef idx="1">
+              <a:schemeClr val="accent1"/>
+            </a:fillRef>
+            <a:effectRef idx="0">
+              <a:schemeClr val="accent1"/>
+            </a:effectRef>
+            <a:fontRef idx="minor">
+              <a:schemeClr val="lt1"/>
+            </a:fontRef>
+          </p:style>
+          <p:txBody>
+            <a:bodyPr wrap="square" rtlCol="0" anchor="ctr">
+              <a:noAutofit/>
+            </a:bodyPr>
+            <a:lstStyle/>
+            <a:p>
+              <a:pPr algn="ctr"/>
+              <a:endParaRPr kumimoji="1" lang="ja-JP" altLang="en-US"/>
+            </a:p>
+          </p:txBody>
+        </p:sp>
+      </p:grpSp>
+    </p:spTree>
+    <p:extLst>
+      <p:ext uri="{BB962C8B-B14F-4D97-AF65-F5344CB8AC3E}">
+        <p14:creationId xmlns:p14="http://schemas.microsoft.com/office/powerpoint/2010/main" val="1723439971"/>
+      </p:ext>
+    </p:extLst>
+  </p:cSld>
+  <p:clrMapOvr>
+    <a:masterClrMapping/>
+  </p:clrMapOvr>
+</p:sld>
+</file>
+
+<file path=ppt/slides/slide11.xml><?xml version="1.0" encoding="utf-8"?>
+<p:sld xmlns:a="http://schemas.openxmlformats.org/drawingml/2006/main" xmlns:r="http://schemas.openxmlformats.org/officeDocument/2006/relationships" xmlns:p="http://schemas.openxmlformats.org/presentationml/2006/main">
+  <p:cSld>
+    <p:spTree>
+      <p:nvGrpSpPr>
+        <p:cNvPr id="1" name=""/>
+        <p:cNvGrpSpPr/>
+        <p:nvPr/>
+      </p:nvGrpSpPr>
+      <p:grpSpPr>
+        <a:xfrm>
+          <a:off x="0" y="0"/>
+          <a:ext cx="0" cy="0"/>
+          <a:chOff x="0" y="0"/>
+          <a:chExt cx="0" cy="0"/>
+        </a:xfrm>
+      </p:grpSpPr>
+      <p:grpSp>
+        <p:nvGrpSpPr>
+          <p:cNvPr id="48" name="グループ化 47">
+            <a:extLst>
+              <a:ext uri="{FF2B5EF4-FFF2-40B4-BE49-F238E27FC236}">
+                <a16:creationId xmlns:a16="http://schemas.microsoft.com/office/drawing/2014/main" id="{F4E85AE5-6051-EF59-FD0E-8459BBE800C6}"/>
+              </a:ext>
+            </a:extLst>
+          </p:cNvPr>
+          <p:cNvGrpSpPr/>
+          <p:nvPr/>
+        </p:nvGrpSpPr>
+        <p:grpSpPr>
+          <a:xfrm>
+            <a:off x="766152" y="390292"/>
+            <a:ext cx="9994775" cy="6304768"/>
+            <a:chOff x="766152" y="390292"/>
+            <a:chExt cx="9994775" cy="6304768"/>
+          </a:xfrm>
+        </p:grpSpPr>
+        <p:sp>
+          <p:nvSpPr>
+            <p:cNvPr id="3" name="フリーフォーム 2">
+              <a:extLst>
+                <a:ext uri="{FF2B5EF4-FFF2-40B4-BE49-F238E27FC236}">
+                  <a16:creationId xmlns:a16="http://schemas.microsoft.com/office/drawing/2014/main" id="{E5454E52-49E9-A8DD-C7A7-15E0117D33F3}"/>
+                </a:ext>
+              </a:extLst>
+            </p:cNvPr>
+            <p:cNvSpPr/>
+            <p:nvPr/>
+          </p:nvSpPr>
+          <p:spPr>
+            <a:xfrm>
+              <a:off x="5430308" y="2201557"/>
+              <a:ext cx="1100884" cy="2120735"/>
+            </a:xfrm>
+            <a:custGeom>
+              <a:avLst/>
+              <a:gdLst>
+                <a:gd name="csX0" fmla="*/ 1078073 w 1100884"/>
+                <a:gd name="csY0" fmla="*/ 0 h 2120735"/>
+                <a:gd name="csX1" fmla="*/ 1090093 w 1100884"/>
+                <a:gd name="csY1" fmla="*/ 78763 h 2120735"/>
+                <a:gd name="csX2" fmla="*/ 1100884 w 1100884"/>
+                <a:gd name="csY2" fmla="*/ 292465 h 2120735"/>
+                <a:gd name="csX3" fmla="*/ 179372 w 1100884"/>
+                <a:gd name="csY3" fmla="*/ 2025622 h 2120735"/>
+                <a:gd name="csX4" fmla="*/ 22812 w 1100884"/>
+                <a:gd name="csY4" fmla="*/ 2120735 h 2120735"/>
+                <a:gd name="csX5" fmla="*/ 10791 w 1100884"/>
+                <a:gd name="csY5" fmla="*/ 2041971 h 2120735"/>
+                <a:gd name="csX6" fmla="*/ 0 w 1100884"/>
+                <a:gd name="csY6" fmla="*/ 1828269 h 2120735"/>
+                <a:gd name="csX7" fmla="*/ 921513 w 1100884"/>
+                <a:gd name="csY7" fmla="*/ 95112 h 2120735"/>
+              </a:gdLst>
+              <a:ahLst/>
+              <a:cxnLst>
+                <a:cxn ang="0">
+                  <a:pos x="csX0" y="csY0"/>
+                </a:cxn>
+                <a:cxn ang="0">
+                  <a:pos x="csX1" y="csY1"/>
+                </a:cxn>
+                <a:cxn ang="0">
+                  <a:pos x="csX2" y="csY2"/>
+                </a:cxn>
+                <a:cxn ang="0">
+                  <a:pos x="csX3" y="csY3"/>
+                </a:cxn>
+                <a:cxn ang="0">
+                  <a:pos x="csX4" y="csY4"/>
+                </a:cxn>
+                <a:cxn ang="0">
+                  <a:pos x="csX5" y="csY5"/>
+                </a:cxn>
+                <a:cxn ang="0">
+                  <a:pos x="csX6" y="csY6"/>
+                </a:cxn>
+                <a:cxn ang="0">
+                  <a:pos x="csX7" y="csY7"/>
+                </a:cxn>
+              </a:cxnLst>
+              <a:rect l="l" t="t" r="r" b="b"/>
+              <a:pathLst>
+                <a:path w="1100884" h="2120735">
+                  <a:moveTo>
+                    <a:pt x="1078073" y="0"/>
+                  </a:moveTo>
+                  <a:lnTo>
+                    <a:pt x="1090093" y="78763"/>
+                  </a:lnTo>
+                  <a:cubicBezTo>
+                    <a:pt x="1097229" y="149027"/>
+                    <a:pt x="1100884" y="220319"/>
+                    <a:pt x="1100884" y="292465"/>
+                  </a:cubicBezTo>
+                  <a:cubicBezTo>
+                    <a:pt x="1100884" y="1013927"/>
+                    <a:pt x="735346" y="1650013"/>
+                    <a:pt x="179372" y="2025622"/>
+                  </a:cubicBezTo>
+                  <a:lnTo>
+                    <a:pt x="22812" y="2120735"/>
+                  </a:lnTo>
+                  <a:lnTo>
+                    <a:pt x="10791" y="2041971"/>
+                  </a:lnTo>
+                  <a:cubicBezTo>
+                    <a:pt x="3656" y="1971708"/>
+                    <a:pt x="0" y="1900415"/>
+                    <a:pt x="0" y="1828269"/>
+                  </a:cubicBezTo>
+                  <a:cubicBezTo>
+                    <a:pt x="0" y="1106807"/>
+                    <a:pt x="365538" y="470721"/>
+                    <a:pt x="921513" y="95112"/>
+                  </a:cubicBezTo>
+                  <a:close/>
+                </a:path>
+              </a:pathLst>
+            </a:custGeom>
+            <a:solidFill>
+              <a:srgbClr val="FF0000">
+                <a:alpha val="45999"/>
+              </a:srgbClr>
+            </a:solidFill>
+            <a:ln w="19050">
+              <a:noFill/>
+            </a:ln>
+          </p:spPr>
+          <p:style>
+            <a:lnRef idx="2">
+              <a:schemeClr val="accent1">
+                <a:shade val="15000"/>
+              </a:schemeClr>
+            </a:lnRef>
+            <a:fillRef idx="1">
+              <a:schemeClr val="accent1"/>
+            </a:fillRef>
+            <a:effectRef idx="0">
+              <a:schemeClr val="accent1"/>
+            </a:effectRef>
+            <a:fontRef idx="minor">
+              <a:schemeClr val="lt1"/>
+            </a:fontRef>
+          </p:style>
+          <p:txBody>
+            <a:bodyPr wrap="square" rtlCol="0" anchor="ctr">
+              <a:noAutofit/>
+            </a:bodyPr>
+            <a:lstStyle/>
+            <a:p>
+              <a:pPr algn="ctr"/>
+              <a:endParaRPr kumimoji="1" lang="ja-JP" altLang="en-US"/>
+            </a:p>
+          </p:txBody>
+        </p:sp>
+        <p:cxnSp>
+          <p:nvCxnSpPr>
+            <p:cNvPr id="4" name="直線矢印コネクタ 3">
+              <a:extLst>
+                <a:ext uri="{FF2B5EF4-FFF2-40B4-BE49-F238E27FC236}">
+                  <a16:creationId xmlns:a16="http://schemas.microsoft.com/office/drawing/2014/main" id="{4E151D69-B31D-3277-7361-506A1D5904EF}"/>
+                </a:ext>
+              </a:extLst>
+            </p:cNvPr>
+            <p:cNvCxnSpPr>
+              <a:cxnSpLocks/>
+            </p:cNvCxnSpPr>
+            <p:nvPr/>
+          </p:nvCxnSpPr>
+          <p:spPr>
+            <a:xfrm>
+              <a:off x="1320150" y="6216979"/>
+              <a:ext cx="9440777" cy="0"/>
+            </a:xfrm>
+            <a:prstGeom prst="straightConnector1">
+              <a:avLst/>
+            </a:prstGeom>
+            <a:ln w="28575">
+              <a:solidFill>
+                <a:schemeClr val="tx1"/>
+              </a:solidFill>
+              <a:tailEnd type="triangle"/>
+            </a:ln>
+          </p:spPr>
+          <p:style>
+            <a:lnRef idx="1">
+              <a:schemeClr val="accent1"/>
+            </a:lnRef>
+            <a:fillRef idx="0">
+              <a:schemeClr val="accent1"/>
+            </a:fillRef>
+            <a:effectRef idx="0">
+              <a:schemeClr val="accent1"/>
+            </a:effectRef>
+            <a:fontRef idx="minor">
+              <a:schemeClr val="tx1"/>
+            </a:fontRef>
+          </p:style>
+        </p:cxnSp>
+        <p:cxnSp>
+          <p:nvCxnSpPr>
+            <p:cNvPr id="5" name="直線矢印コネクタ 4">
+              <a:extLst>
+                <a:ext uri="{FF2B5EF4-FFF2-40B4-BE49-F238E27FC236}">
+                  <a16:creationId xmlns:a16="http://schemas.microsoft.com/office/drawing/2014/main" id="{784ACAAE-302C-0CB8-A65E-3DBB3A97AB66}"/>
+                </a:ext>
+              </a:extLst>
+            </p:cNvPr>
+            <p:cNvCxnSpPr>
+              <a:cxnSpLocks/>
+            </p:cNvCxnSpPr>
+            <p:nvPr/>
+          </p:nvCxnSpPr>
+          <p:spPr>
+            <a:xfrm flipV="1">
+              <a:off x="1320150" y="390293"/>
+              <a:ext cx="0" cy="5826686"/>
+            </a:xfrm>
+            <a:prstGeom prst="straightConnector1">
+              <a:avLst/>
+            </a:prstGeom>
+            <a:ln w="28575">
+              <a:solidFill>
+                <a:schemeClr val="tx1"/>
+              </a:solidFill>
+              <a:tailEnd type="triangle"/>
+            </a:ln>
+          </p:spPr>
+          <p:style>
+            <a:lnRef idx="1">
+              <a:schemeClr val="accent1"/>
+            </a:lnRef>
+            <a:fillRef idx="0">
+              <a:schemeClr val="accent1"/>
+            </a:fillRef>
+            <a:effectRef idx="0">
+              <a:schemeClr val="accent1"/>
+            </a:effectRef>
+            <a:fontRef idx="minor">
+              <a:schemeClr val="tx1"/>
+            </a:fontRef>
+          </p:style>
+        </p:cxnSp>
+        <p:sp>
+          <p:nvSpPr>
+            <p:cNvPr id="6" name="テキスト ボックス 5">
+              <a:extLst>
+                <a:ext uri="{FF2B5EF4-FFF2-40B4-BE49-F238E27FC236}">
+                  <a16:creationId xmlns:a16="http://schemas.microsoft.com/office/drawing/2014/main" id="{50895C3F-CD38-89D7-7967-0F187E63969A}"/>
+                </a:ext>
+              </a:extLst>
+            </p:cNvPr>
+            <p:cNvSpPr txBox="1"/>
+            <p:nvPr/>
+          </p:nvSpPr>
+          <p:spPr>
+            <a:xfrm>
+              <a:off x="9248061" y="6233395"/>
+              <a:ext cx="1512866" cy="461665"/>
+            </a:xfrm>
+            <a:prstGeom prst="rect">
+              <a:avLst/>
+            </a:prstGeom>
+            <a:noFill/>
+          </p:spPr>
+          <p:txBody>
+            <a:bodyPr wrap="square" rtlCol="0">
+              <a:spAutoFit/>
+            </a:bodyPr>
+            <a:lstStyle/>
+            <a:p>
+              <a:pPr algn="ctr"/>
+              <a:r>
+                <a:rPr kumimoji="1" lang="ja-JP" altLang="en-US" sz="2400">
+                  <a:latin typeface="Hiragino Kaku Gothic StdN W8" panose="020B0800000000000000" pitchFamily="34" charset="-128"/>
+                  <a:ea typeface="Hiragino Kaku Gothic StdN W8" panose="020B0800000000000000" pitchFamily="34" charset="-128"/>
+                </a:rPr>
+                <a:t>車関税率</a:t>
+              </a:r>
+            </a:p>
+          </p:txBody>
+        </p:sp>
+        <p:sp>
+          <p:nvSpPr>
+            <p:cNvPr id="7" name="テキスト ボックス 6">
+              <a:extLst>
+                <a:ext uri="{FF2B5EF4-FFF2-40B4-BE49-F238E27FC236}">
+                  <a16:creationId xmlns:a16="http://schemas.microsoft.com/office/drawing/2014/main" id="{01E5A6A4-B182-AEB3-761A-B1768759B7FA}"/>
+                </a:ext>
+              </a:extLst>
+            </p:cNvPr>
+            <p:cNvSpPr txBox="1"/>
+            <p:nvPr/>
+          </p:nvSpPr>
+          <p:spPr>
+            <a:xfrm>
+              <a:off x="766152" y="390292"/>
+              <a:ext cx="553998" cy="1323439"/>
+            </a:xfrm>
+            <a:prstGeom prst="rect">
+              <a:avLst/>
+            </a:prstGeom>
+            <a:noFill/>
+          </p:spPr>
+          <p:txBody>
+            <a:bodyPr vert="eaVert" wrap="none" rtlCol="0">
+              <a:spAutoFit/>
+            </a:bodyPr>
+            <a:lstStyle/>
+            <a:p>
+              <a:r>
+                <a:rPr kumimoji="1" lang="ja-JP" altLang="en-US" sz="2400">
+                  <a:latin typeface="Hiragino Kaku Gothic StdN W8" panose="020B0800000000000000" pitchFamily="34" charset="-128"/>
+                  <a:ea typeface="Hiragino Kaku Gothic StdN W8" panose="020B0800000000000000" pitchFamily="34" charset="-128"/>
+                </a:rPr>
+                <a:t>肉関税率</a:t>
+              </a:r>
+            </a:p>
+          </p:txBody>
+        </p:sp>
+        <p:sp>
+          <p:nvSpPr>
+            <p:cNvPr id="8" name="円/楕円 7">
+              <a:extLst>
+                <a:ext uri="{FF2B5EF4-FFF2-40B4-BE49-F238E27FC236}">
+                  <a16:creationId xmlns:a16="http://schemas.microsoft.com/office/drawing/2014/main" id="{D5C63E5B-692D-2B2C-3CE9-3AF995BB007B}"/>
+                </a:ext>
+              </a:extLst>
+            </p:cNvPr>
+            <p:cNvSpPr/>
+            <p:nvPr/>
+          </p:nvSpPr>
+          <p:spPr>
+            <a:xfrm>
+              <a:off x="4369695" y="2364273"/>
+              <a:ext cx="186550" cy="186550"/>
+            </a:xfrm>
+            <a:prstGeom prst="ellipse">
+              <a:avLst/>
+            </a:prstGeom>
+            <a:solidFill>
+              <a:schemeClr val="tx1"/>
+            </a:solidFill>
+            <a:ln>
+              <a:noFill/>
+            </a:ln>
+          </p:spPr>
+          <p:style>
+            <a:lnRef idx="2">
+              <a:schemeClr val="accent1">
+                <a:shade val="50000"/>
+              </a:schemeClr>
+            </a:lnRef>
+            <a:fillRef idx="1">
+              <a:schemeClr val="accent1"/>
+            </a:fillRef>
+            <a:effectRef idx="0">
+              <a:schemeClr val="accent1"/>
+            </a:effectRef>
+            <a:fontRef idx="minor">
+              <a:schemeClr val="lt1"/>
+            </a:fontRef>
+          </p:style>
+          <p:txBody>
+            <a:bodyPr rtlCol="0" anchor="ctr"/>
+            <a:lstStyle/>
+            <a:p>
+              <a:pPr algn="ctr"/>
+              <a:endParaRPr kumimoji="1" lang="ja-JP" altLang="en-US"/>
+            </a:p>
+          </p:txBody>
+        </p:sp>
+        <p:sp>
+          <p:nvSpPr>
+            <p:cNvPr id="9" name="テキスト ボックス 8">
+              <a:extLst>
+                <a:ext uri="{FF2B5EF4-FFF2-40B4-BE49-F238E27FC236}">
+                  <a16:creationId xmlns:a16="http://schemas.microsoft.com/office/drawing/2014/main" id="{B953EC5E-B9E8-AD83-C788-3E7532EFC60E}"/>
+                </a:ext>
+              </a:extLst>
+            </p:cNvPr>
+            <p:cNvSpPr txBox="1"/>
+            <p:nvPr/>
+          </p:nvSpPr>
+          <p:spPr>
+            <a:xfrm>
+              <a:off x="3915337" y="2558199"/>
+              <a:ext cx="1024577" cy="461665"/>
+            </a:xfrm>
+            <a:prstGeom prst="rect">
+              <a:avLst/>
+            </a:prstGeom>
+            <a:noFill/>
+          </p:spPr>
+          <p:txBody>
+            <a:bodyPr wrap="square" rtlCol="0">
+              <a:spAutoFit/>
+            </a:bodyPr>
+            <a:lstStyle/>
+            <a:p>
+              <a:pPr algn="ctr"/>
+              <a:r>
+                <a:rPr kumimoji="1" lang="ja-JP" altLang="en-US" sz="2400">
+                  <a:latin typeface="Hiragino Kaku Gothic StdN W8" panose="020B0800000000000000" pitchFamily="34" charset="-128"/>
+                  <a:ea typeface="Hiragino Kaku Gothic StdN W8" panose="020B0800000000000000" pitchFamily="34" charset="-128"/>
+                </a:rPr>
+                <a:t>日本</a:t>
+              </a:r>
+            </a:p>
+          </p:txBody>
+        </p:sp>
+        <p:sp>
+          <p:nvSpPr>
+            <p:cNvPr id="10" name="円/楕円 9">
+              <a:extLst>
+                <a:ext uri="{FF2B5EF4-FFF2-40B4-BE49-F238E27FC236}">
+                  <a16:creationId xmlns:a16="http://schemas.microsoft.com/office/drawing/2014/main" id="{0136DDD4-DFD2-A49C-795B-8FBE6777A86D}"/>
+                </a:ext>
+              </a:extLst>
+            </p:cNvPr>
+            <p:cNvSpPr/>
+            <p:nvPr/>
+          </p:nvSpPr>
+          <p:spPr>
+            <a:xfrm>
+              <a:off x="2354479" y="390292"/>
+              <a:ext cx="4180231" cy="4180231"/>
+            </a:xfrm>
+            <a:prstGeom prst="ellipse">
+              <a:avLst/>
+            </a:prstGeom>
+            <a:noFill/>
+            <a:ln w="19050">
+              <a:solidFill>
+                <a:schemeClr val="tx1"/>
+              </a:solidFill>
+            </a:ln>
+          </p:spPr>
+          <p:style>
+            <a:lnRef idx="2">
+              <a:schemeClr val="accent1">
+                <a:shade val="15000"/>
+              </a:schemeClr>
+            </a:lnRef>
+            <a:fillRef idx="1">
+              <a:schemeClr val="accent1"/>
+            </a:fillRef>
+            <a:effectRef idx="0">
+              <a:schemeClr val="accent1"/>
+            </a:effectRef>
+            <a:fontRef idx="minor">
+              <a:schemeClr val="lt1"/>
+            </a:fontRef>
+          </p:style>
+          <p:txBody>
+            <a:bodyPr rtlCol="0" anchor="ctr"/>
+            <a:lstStyle/>
+            <a:p>
+              <a:pPr algn="ctr"/>
+              <a:endParaRPr kumimoji="1" lang="ja-JP" altLang="en-US"/>
+            </a:p>
+          </p:txBody>
+        </p:sp>
+        <p:sp>
+          <p:nvSpPr>
+            <p:cNvPr id="11" name="テキスト ボックス 10">
+              <a:extLst>
+                <a:ext uri="{FF2B5EF4-FFF2-40B4-BE49-F238E27FC236}">
+                  <a16:creationId xmlns:a16="http://schemas.microsoft.com/office/drawing/2014/main" id="{F48A6AE7-0946-C834-1169-4C158D4120EA}"/>
+                </a:ext>
+              </a:extLst>
+            </p:cNvPr>
+            <p:cNvSpPr txBox="1"/>
+            <p:nvPr/>
+          </p:nvSpPr>
+          <p:spPr>
+            <a:xfrm>
+              <a:off x="6996337" y="4091460"/>
+              <a:ext cx="1024577" cy="461665"/>
+            </a:xfrm>
+            <a:prstGeom prst="rect">
+              <a:avLst/>
+            </a:prstGeom>
+            <a:noFill/>
+          </p:spPr>
+          <p:txBody>
+            <a:bodyPr wrap="square" rtlCol="0">
+              <a:spAutoFit/>
+            </a:bodyPr>
+            <a:lstStyle/>
+            <a:p>
+              <a:r>
+                <a:rPr kumimoji="1" lang="ja-JP" altLang="en-US" sz="2400">
+                  <a:latin typeface="Hiragino Kaku Gothic StdN W8" panose="020B0800000000000000" pitchFamily="34" charset="-128"/>
+                  <a:ea typeface="Hiragino Kaku Gothic StdN W8" panose="020B0800000000000000" pitchFamily="34" charset="-128"/>
+                </a:rPr>
+                <a:t>米国</a:t>
+              </a:r>
+            </a:p>
+          </p:txBody>
+        </p:sp>
+        <p:sp>
+          <p:nvSpPr>
+            <p:cNvPr id="12" name="円/楕円 11">
+              <a:extLst>
+                <a:ext uri="{FF2B5EF4-FFF2-40B4-BE49-F238E27FC236}">
+                  <a16:creationId xmlns:a16="http://schemas.microsoft.com/office/drawing/2014/main" id="{7681348B-BBEF-DB6A-F1CB-F6C73388D23B}"/>
+                </a:ext>
+              </a:extLst>
+            </p:cNvPr>
+            <p:cNvSpPr/>
+            <p:nvPr/>
+          </p:nvSpPr>
+          <p:spPr>
+            <a:xfrm>
+              <a:off x="7450695" y="3920436"/>
+              <a:ext cx="186550" cy="186550"/>
+            </a:xfrm>
+            <a:prstGeom prst="ellipse">
+              <a:avLst/>
+            </a:prstGeom>
+            <a:solidFill>
+              <a:schemeClr val="tx1"/>
+            </a:solidFill>
+            <a:ln>
+              <a:noFill/>
+            </a:ln>
+          </p:spPr>
+          <p:style>
+            <a:lnRef idx="2">
+              <a:schemeClr val="accent1">
+                <a:shade val="50000"/>
+              </a:schemeClr>
+            </a:lnRef>
+            <a:fillRef idx="1">
+              <a:schemeClr val="accent1"/>
+            </a:fillRef>
+            <a:effectRef idx="0">
+              <a:schemeClr val="accent1"/>
+            </a:effectRef>
+            <a:fontRef idx="minor">
+              <a:schemeClr val="lt1"/>
+            </a:fontRef>
+          </p:style>
+          <p:txBody>
+            <a:bodyPr rtlCol="0" anchor="ctr"/>
+            <a:lstStyle/>
+            <a:p>
+              <a:pPr algn="ctr"/>
+              <a:endParaRPr kumimoji="1" lang="ja-JP" altLang="en-US"/>
+            </a:p>
+          </p:txBody>
+        </p:sp>
+        <p:sp>
+          <p:nvSpPr>
+            <p:cNvPr id="13" name="円/楕円 12">
+              <a:extLst>
+                <a:ext uri="{FF2B5EF4-FFF2-40B4-BE49-F238E27FC236}">
+                  <a16:creationId xmlns:a16="http://schemas.microsoft.com/office/drawing/2014/main" id="{CBFA7FEE-19AF-480E-AC9E-1CF4AB64580A}"/>
+                </a:ext>
+              </a:extLst>
+            </p:cNvPr>
+            <p:cNvSpPr/>
+            <p:nvPr/>
+          </p:nvSpPr>
+          <p:spPr>
+            <a:xfrm>
+              <a:off x="5433827" y="1926096"/>
+              <a:ext cx="4180231" cy="4180231"/>
+            </a:xfrm>
+            <a:prstGeom prst="ellipse">
+              <a:avLst/>
+            </a:prstGeom>
+            <a:noFill/>
+            <a:ln w="19050">
+              <a:solidFill>
+                <a:schemeClr val="tx1"/>
+              </a:solidFill>
+            </a:ln>
+          </p:spPr>
+          <p:style>
+            <a:lnRef idx="2">
+              <a:schemeClr val="accent1">
+                <a:shade val="15000"/>
+              </a:schemeClr>
+            </a:lnRef>
+            <a:fillRef idx="1">
+              <a:schemeClr val="accent1"/>
+            </a:fillRef>
+            <a:effectRef idx="0">
+              <a:schemeClr val="accent1"/>
+            </a:effectRef>
+            <a:fontRef idx="minor">
+              <a:schemeClr val="lt1"/>
+            </a:fontRef>
+          </p:style>
+          <p:txBody>
+            <a:bodyPr rtlCol="0" anchor="ctr"/>
+            <a:lstStyle/>
+            <a:p>
+              <a:pPr algn="ctr"/>
+              <a:endParaRPr kumimoji="1" lang="ja-JP" altLang="en-US"/>
+            </a:p>
+          </p:txBody>
+        </p:sp>
+        <p:grpSp>
+          <p:nvGrpSpPr>
+            <p:cNvPr id="14" name="グループ化 13">
+              <a:extLst>
+                <a:ext uri="{FF2B5EF4-FFF2-40B4-BE49-F238E27FC236}">
+                  <a16:creationId xmlns:a16="http://schemas.microsoft.com/office/drawing/2014/main" id="{5BDB9DB2-C654-DC04-9BF6-75596D13F4F3}"/>
+                </a:ext>
+              </a:extLst>
+            </p:cNvPr>
+            <p:cNvGrpSpPr/>
+            <p:nvPr/>
+          </p:nvGrpSpPr>
+          <p:grpSpPr>
+            <a:xfrm>
+              <a:off x="6270771" y="1711020"/>
+              <a:ext cx="1024577" cy="555608"/>
+              <a:chOff x="6270771" y="1711020"/>
+              <a:chExt cx="1024577" cy="555608"/>
+            </a:xfrm>
+          </p:grpSpPr>
+          <p:sp>
+            <p:nvSpPr>
+              <p:cNvPr id="17" name="テキスト ボックス 16">
+                <a:extLst>
+                  <a:ext uri="{FF2B5EF4-FFF2-40B4-BE49-F238E27FC236}">
+                    <a16:creationId xmlns:a16="http://schemas.microsoft.com/office/drawing/2014/main" id="{9B9B4822-B59F-B0C2-0864-456CD6D2991B}"/>
+                  </a:ext>
+                </a:extLst>
+              </p:cNvPr>
+              <p:cNvSpPr txBox="1"/>
+              <p:nvPr/>
+            </p:nvSpPr>
+            <p:spPr>
+              <a:xfrm>
+                <a:off x="6270771" y="1711020"/>
+                <a:ext cx="1024577" cy="461665"/>
+              </a:xfrm>
+              <a:prstGeom prst="rect">
+                <a:avLst/>
+              </a:prstGeom>
+              <a:noFill/>
+            </p:spPr>
+            <p:txBody>
+              <a:bodyPr wrap="square" rtlCol="0">
+                <a:spAutoFit/>
+              </a:bodyPr>
+              <a:lstStyle/>
+              <a:p>
+                <a:r>
+                  <a:rPr kumimoji="1" lang="ja-JP" altLang="en-US" sz="2400">
+                    <a:latin typeface="Hiragino Kaku Gothic StdN W8" panose="020B0800000000000000" pitchFamily="34" charset="-128"/>
+                    <a:ea typeface="Hiragino Kaku Gothic StdN W8" panose="020B0800000000000000" pitchFamily="34" charset="-128"/>
+                  </a:rPr>
+                  <a:t>現状</a:t>
+                </a:r>
+              </a:p>
+            </p:txBody>
+          </p:sp>
+          <p:sp>
+            <p:nvSpPr>
+              <p:cNvPr id="18" name="円/楕円 17">
+                <a:extLst>
+                  <a:ext uri="{FF2B5EF4-FFF2-40B4-BE49-F238E27FC236}">
+                    <a16:creationId xmlns:a16="http://schemas.microsoft.com/office/drawing/2014/main" id="{5EB2BA54-6639-ACE9-A89D-D44D4B3541A7}"/>
+                  </a:ext>
+                </a:extLst>
+              </p:cNvPr>
+              <p:cNvSpPr/>
+              <p:nvPr/>
+            </p:nvSpPr>
+            <p:spPr>
+              <a:xfrm>
+                <a:off x="6419541" y="2080078"/>
+                <a:ext cx="186550" cy="186550"/>
+              </a:xfrm>
+              <a:prstGeom prst="ellipse">
+                <a:avLst/>
+              </a:prstGeom>
+              <a:solidFill>
+                <a:schemeClr val="tx1"/>
+              </a:solidFill>
+              <a:ln>
+                <a:noFill/>
+              </a:ln>
+            </p:spPr>
+            <p:style>
+              <a:lnRef idx="2">
+                <a:schemeClr val="accent1">
+                  <a:shade val="50000"/>
+                </a:schemeClr>
+              </a:lnRef>
+              <a:fillRef idx="1">
+                <a:schemeClr val="accent1"/>
+              </a:fillRef>
+              <a:effectRef idx="0">
+                <a:schemeClr val="accent1"/>
+              </a:effectRef>
+              <a:fontRef idx="minor">
+                <a:schemeClr val="lt1"/>
+              </a:fontRef>
+            </p:style>
+            <p:txBody>
+              <a:bodyPr rtlCol="0" anchor="ctr"/>
+              <a:lstStyle/>
+              <a:p>
+                <a:pPr algn="ctr"/>
+                <a:endParaRPr kumimoji="1" lang="ja-JP" altLang="en-US"/>
+              </a:p>
+            </p:txBody>
+          </p:sp>
+        </p:grpSp>
+        <p:cxnSp>
+          <p:nvCxnSpPr>
+            <p:cNvPr id="15" name="直線矢印コネクタ 14">
+              <a:extLst>
+                <a:ext uri="{FF2B5EF4-FFF2-40B4-BE49-F238E27FC236}">
+                  <a16:creationId xmlns:a16="http://schemas.microsoft.com/office/drawing/2014/main" id="{C2923DBE-51CE-C65C-27B2-3F7721C05613}"/>
+                </a:ext>
+              </a:extLst>
+            </p:cNvPr>
+            <p:cNvCxnSpPr>
+              <a:cxnSpLocks/>
+              <a:stCxn id="16" idx="0"/>
+            </p:cNvCxnSpPr>
+            <p:nvPr/>
+          </p:nvCxnSpPr>
+          <p:spPr>
+            <a:xfrm flipV="1">
+              <a:off x="4158241" y="3279228"/>
+              <a:ext cx="1801125" cy="1465108"/>
+            </a:xfrm>
+            <a:prstGeom prst="straightConnector1">
+              <a:avLst/>
+            </a:prstGeom>
+            <a:ln w="57150">
+              <a:solidFill>
+                <a:schemeClr val="tx1"/>
+              </a:solidFill>
+              <a:tailEnd type="triangle"/>
+            </a:ln>
+          </p:spPr>
+          <p:style>
+            <a:lnRef idx="1">
+              <a:schemeClr val="accent1"/>
+            </a:lnRef>
+            <a:fillRef idx="0">
+              <a:schemeClr val="accent1"/>
+            </a:fillRef>
+            <a:effectRef idx="0">
+              <a:schemeClr val="accent1"/>
+            </a:effectRef>
+            <a:fontRef idx="minor">
+              <a:schemeClr val="tx1"/>
+            </a:fontRef>
+          </p:style>
+        </p:cxnSp>
+        <p:sp>
+          <p:nvSpPr>
+            <p:cNvPr id="16" name="テキスト ボックス 15">
+              <a:extLst>
+                <a:ext uri="{FF2B5EF4-FFF2-40B4-BE49-F238E27FC236}">
+                  <a16:creationId xmlns:a16="http://schemas.microsoft.com/office/drawing/2014/main" id="{B8AD853D-7882-07F4-0752-39724B22B4C6}"/>
+                </a:ext>
+              </a:extLst>
+            </p:cNvPr>
+            <p:cNvSpPr txBox="1"/>
+            <p:nvPr/>
+          </p:nvSpPr>
+          <p:spPr>
+            <a:xfrm>
+              <a:off x="1320149" y="4744336"/>
+              <a:ext cx="5676184" cy="1200329"/>
+            </a:xfrm>
+            <a:prstGeom prst="rect">
+              <a:avLst/>
+            </a:prstGeom>
+            <a:solidFill>
+              <a:schemeClr val="bg1"/>
+            </a:solidFill>
+            <a:ln>
+              <a:solidFill>
+                <a:schemeClr val="tx1"/>
+              </a:solidFill>
+            </a:ln>
+          </p:spPr>
+          <p:txBody>
+            <a:bodyPr wrap="square" rtlCol="0">
+              <a:spAutoFit/>
+            </a:bodyPr>
+            <a:lstStyle/>
+            <a:p>
+              <a:r>
+                <a:rPr kumimoji="1" lang="ja-JP" altLang="en-US" sz="2400" b="1">
+                  <a:latin typeface="Hiragino Sans W4" panose="020B0400000000000000" pitchFamily="34" charset="-128"/>
+                  <a:ea typeface="Hiragino Sans W4" panose="020B0400000000000000" pitchFamily="34" charset="-128"/>
+                </a:rPr>
+                <a:t>契約曲線</a:t>
+              </a:r>
+              <a:r>
+                <a:rPr kumimoji="1" lang="ja-JP" altLang="en-US" sz="2400">
+                  <a:latin typeface="Hiragino Sans W4" panose="020B0400000000000000" pitchFamily="34" charset="-128"/>
+                  <a:ea typeface="Hiragino Sans W4" panose="020B0400000000000000" pitchFamily="34" charset="-128"/>
+                </a:rPr>
+                <a:t>（</a:t>
+              </a:r>
+              <a:r>
+                <a:rPr kumimoji="1" lang="en-US" altLang="ja-JP" sz="2400" dirty="0">
+                  <a:latin typeface="Hiragino Sans W4" panose="020B0400000000000000" pitchFamily="34" charset="-128"/>
+                  <a:ea typeface="Hiragino Sans W4" panose="020B0400000000000000" pitchFamily="34" charset="-128"/>
+                </a:rPr>
+                <a:t>contract curve</a:t>
+              </a:r>
+              <a:r>
+                <a:rPr kumimoji="1" lang="ja-JP" altLang="en-US" sz="2400">
+                  <a:latin typeface="Hiragino Sans W4" panose="020B0400000000000000" pitchFamily="34" charset="-128"/>
+                  <a:ea typeface="Hiragino Sans W4" panose="020B0400000000000000" pitchFamily="34" charset="-128"/>
+                </a:rPr>
+                <a:t>）</a:t>
+              </a:r>
+              <a:endParaRPr kumimoji="1" lang="en-US" altLang="ja-JP" sz="2400" dirty="0">
+                <a:latin typeface="Hiragino Sans W4" panose="020B0400000000000000" pitchFamily="34" charset="-128"/>
+                <a:ea typeface="Hiragino Sans W4" panose="020B0400000000000000" pitchFamily="34" charset="-128"/>
+              </a:endParaRPr>
+            </a:p>
+            <a:p>
+              <a:r>
+                <a:rPr kumimoji="1" lang="ja-JP" altLang="en-US" sz="2400">
+                  <a:latin typeface="Hiragino Sans W4" panose="020B0400000000000000" pitchFamily="34" charset="-128"/>
+                  <a:ea typeface="Hiragino Sans W4" panose="020B0400000000000000" pitchFamily="34" charset="-128"/>
+                </a:rPr>
+                <a:t>＝片方の得か片方の損になる状況の集合</a:t>
+              </a:r>
+              <a:br>
+                <a:rPr kumimoji="1" lang="en-US" altLang="ja-JP" sz="2400" dirty="0">
+                  <a:latin typeface="Hiragino Sans W4" panose="020B0400000000000000" pitchFamily="34" charset="-128"/>
+                  <a:ea typeface="Hiragino Sans W4" panose="020B0400000000000000" pitchFamily="34" charset="-128"/>
+                </a:rPr>
+              </a:br>
+              <a:r>
+                <a:rPr kumimoji="1" lang="ja-JP" altLang="en-US" sz="2400">
+                  <a:latin typeface="Hiragino Sans W4" panose="020B0400000000000000" pitchFamily="34" charset="-128"/>
+                  <a:ea typeface="Hiragino Sans W4" panose="020B0400000000000000" pitchFamily="34" charset="-128"/>
+                </a:rPr>
+                <a:t>（→</a:t>
+              </a:r>
+              <a:r>
+                <a:rPr kumimoji="1" lang="ja-JP" altLang="en-US" sz="2400" b="1">
+                  <a:latin typeface="Hiragino Sans W4" panose="020B0400000000000000" pitchFamily="34" charset="-128"/>
+                  <a:ea typeface="Hiragino Sans W4" panose="020B0400000000000000" pitchFamily="34" charset="-128"/>
+                </a:rPr>
+                <a:t>パレート最適</a:t>
+              </a:r>
+              <a:r>
+                <a:rPr kumimoji="1" lang="ja-JP" altLang="en-US" sz="2400">
+                  <a:latin typeface="Hiragino Sans W4" panose="020B0400000000000000" pitchFamily="34" charset="-128"/>
+                  <a:ea typeface="Hiragino Sans W4" panose="020B0400000000000000" pitchFamily="34" charset="-128"/>
+                </a:rPr>
+                <a:t>な状態）</a:t>
+              </a:r>
+              <a:endParaRPr kumimoji="1" lang="en-US" altLang="ja-JP" sz="2400" dirty="0">
+                <a:latin typeface="Hiragino Sans W4" panose="020B0400000000000000" pitchFamily="34" charset="-128"/>
+                <a:ea typeface="Hiragino Sans W4" panose="020B0400000000000000" pitchFamily="34" charset="-128"/>
+              </a:endParaRPr>
+            </a:p>
+          </p:txBody>
+        </p:sp>
+        <p:cxnSp>
+          <p:nvCxnSpPr>
+            <p:cNvPr id="20" name="直線コネクタ 19">
+              <a:extLst>
+                <a:ext uri="{FF2B5EF4-FFF2-40B4-BE49-F238E27FC236}">
+                  <a16:creationId xmlns:a16="http://schemas.microsoft.com/office/drawing/2014/main" id="{A1D356CC-1D4E-8A6A-0BED-0FF77FAA54BF}"/>
+                </a:ext>
+              </a:extLst>
+            </p:cNvPr>
+            <p:cNvCxnSpPr>
+              <a:cxnSpLocks/>
+              <a:stCxn id="8" idx="6"/>
+              <a:endCxn id="12" idx="2"/>
+            </p:cNvCxnSpPr>
+            <p:nvPr/>
+          </p:nvCxnSpPr>
+          <p:spPr>
+            <a:xfrm>
+              <a:off x="4556245" y="2457548"/>
+              <a:ext cx="2894450" cy="1556163"/>
+            </a:xfrm>
+            <a:prstGeom prst="line">
+              <a:avLst/>
+            </a:prstGeom>
+            <a:ln w="38100">
+              <a:prstDash val="sysDash"/>
+            </a:ln>
+          </p:spPr>
+          <p:style>
+            <a:lnRef idx="2">
+              <a:schemeClr val="dk1"/>
+            </a:lnRef>
+            <a:fillRef idx="0">
+              <a:schemeClr val="dk1"/>
+            </a:fillRef>
+            <a:effectRef idx="1">
+              <a:schemeClr val="dk1"/>
+            </a:effectRef>
+            <a:fontRef idx="minor">
+              <a:schemeClr val="tx1"/>
+            </a:fontRef>
+          </p:style>
+        </p:cxnSp>
+        <p:cxnSp>
+          <p:nvCxnSpPr>
+            <p:cNvPr id="22" name="直線コネクタ 21">
+              <a:extLst>
+                <a:ext uri="{FF2B5EF4-FFF2-40B4-BE49-F238E27FC236}">
+                  <a16:creationId xmlns:a16="http://schemas.microsoft.com/office/drawing/2014/main" id="{C8B4559A-D62E-E818-793A-02E7FCF94ADD}"/>
+                </a:ext>
+              </a:extLst>
+            </p:cNvPr>
+            <p:cNvCxnSpPr>
+              <a:cxnSpLocks/>
+            </p:cNvCxnSpPr>
+            <p:nvPr/>
+          </p:nvCxnSpPr>
+          <p:spPr>
+            <a:xfrm>
+              <a:off x="5667270" y="3054028"/>
+              <a:ext cx="655447" cy="349572"/>
+            </a:xfrm>
+            <a:prstGeom prst="line">
+              <a:avLst/>
+            </a:prstGeom>
+            <a:ln w="57150"/>
+          </p:spPr>
+          <p:style>
+            <a:lnRef idx="2">
+              <a:schemeClr val="dk1"/>
+            </a:lnRef>
+            <a:fillRef idx="0">
+              <a:schemeClr val="dk1"/>
+            </a:fillRef>
+            <a:effectRef idx="1">
+              <a:schemeClr val="dk1"/>
+            </a:effectRef>
+            <a:fontRef idx="minor">
+              <a:schemeClr val="tx1"/>
+            </a:fontRef>
+          </p:style>
+        </p:cxnSp>
+      </p:grpSp>
+    </p:spTree>
+    <p:extLst>
+      <p:ext uri="{BB962C8B-B14F-4D97-AF65-F5344CB8AC3E}">
+        <p14:creationId xmlns:p14="http://schemas.microsoft.com/office/powerpoint/2010/main" val="991014228"/>
+      </p:ext>
+    </p:extLst>
+  </p:cSld>
+  <p:clrMapOvr>
+    <a:masterClrMapping/>
+  </p:clrMapOvr>
+</p:sld>
+</file>
+
+<file path=ppt/slides/slide12.xml><?xml version="1.0" encoding="utf-8"?>
+<p:sld xmlns:a="http://schemas.openxmlformats.org/drawingml/2006/main" xmlns:r="http://schemas.openxmlformats.org/officeDocument/2006/relationships" xmlns:p="http://schemas.openxmlformats.org/presentationml/2006/main">
+  <p:cSld>
+    <p:spTree>
+      <p:nvGrpSpPr>
+        <p:cNvPr id="1" name=""/>
+        <p:cNvGrpSpPr/>
+        <p:nvPr/>
+      </p:nvGrpSpPr>
+      <p:grpSpPr>
+        <a:xfrm>
+          <a:off x="0" y="0"/>
+          <a:ext cx="0" cy="0"/>
+          <a:chOff x="0" y="0"/>
+          <a:chExt cx="0" cy="0"/>
+        </a:xfrm>
+      </p:grpSpPr>
+      <p:grpSp>
+        <p:nvGrpSpPr>
+          <p:cNvPr id="26" name="グループ化 25">
+            <a:extLst>
+              <a:ext uri="{FF2B5EF4-FFF2-40B4-BE49-F238E27FC236}">
+                <a16:creationId xmlns:a16="http://schemas.microsoft.com/office/drawing/2014/main" id="{3C88464A-9395-BB4E-370C-29D773A81985}"/>
+              </a:ext>
+            </a:extLst>
+          </p:cNvPr>
+          <p:cNvGrpSpPr/>
+          <p:nvPr/>
+        </p:nvGrpSpPr>
+        <p:grpSpPr>
+          <a:xfrm>
+            <a:off x="766152" y="390292"/>
+            <a:ext cx="9994775" cy="6304768"/>
+            <a:chOff x="766152" y="390292"/>
+            <a:chExt cx="9994775" cy="6304768"/>
+          </a:xfrm>
+        </p:grpSpPr>
+        <p:sp>
+          <p:nvSpPr>
+            <p:cNvPr id="3" name="フリーフォーム 2">
+              <a:extLst>
+                <a:ext uri="{FF2B5EF4-FFF2-40B4-BE49-F238E27FC236}">
+                  <a16:creationId xmlns:a16="http://schemas.microsoft.com/office/drawing/2014/main" id="{61E6E7CC-0365-FD7B-E37E-157251213AA3}"/>
+                </a:ext>
+              </a:extLst>
+            </p:cNvPr>
+            <p:cNvSpPr/>
+            <p:nvPr/>
+          </p:nvSpPr>
+          <p:spPr>
+            <a:xfrm>
+              <a:off x="5430308" y="2201557"/>
+              <a:ext cx="1100884" cy="2120735"/>
+            </a:xfrm>
+            <a:custGeom>
+              <a:avLst/>
+              <a:gdLst>
+                <a:gd name="csX0" fmla="*/ 1078073 w 1100884"/>
+                <a:gd name="csY0" fmla="*/ 0 h 2120735"/>
+                <a:gd name="csX1" fmla="*/ 1090093 w 1100884"/>
+                <a:gd name="csY1" fmla="*/ 78763 h 2120735"/>
+                <a:gd name="csX2" fmla="*/ 1100884 w 1100884"/>
+                <a:gd name="csY2" fmla="*/ 292465 h 2120735"/>
+                <a:gd name="csX3" fmla="*/ 179372 w 1100884"/>
+                <a:gd name="csY3" fmla="*/ 2025622 h 2120735"/>
+                <a:gd name="csX4" fmla="*/ 22812 w 1100884"/>
+                <a:gd name="csY4" fmla="*/ 2120735 h 2120735"/>
+                <a:gd name="csX5" fmla="*/ 10791 w 1100884"/>
+                <a:gd name="csY5" fmla="*/ 2041971 h 2120735"/>
+                <a:gd name="csX6" fmla="*/ 0 w 1100884"/>
+                <a:gd name="csY6" fmla="*/ 1828269 h 2120735"/>
+                <a:gd name="csX7" fmla="*/ 921513 w 1100884"/>
+                <a:gd name="csY7" fmla="*/ 95112 h 2120735"/>
+              </a:gdLst>
+              <a:ahLst/>
+              <a:cxnLst>
+                <a:cxn ang="0">
+                  <a:pos x="csX0" y="csY0"/>
+                </a:cxn>
+                <a:cxn ang="0">
+                  <a:pos x="csX1" y="csY1"/>
+                </a:cxn>
+                <a:cxn ang="0">
+                  <a:pos x="csX2" y="csY2"/>
+                </a:cxn>
+                <a:cxn ang="0">
+                  <a:pos x="csX3" y="csY3"/>
+                </a:cxn>
+                <a:cxn ang="0">
+                  <a:pos x="csX4" y="csY4"/>
+                </a:cxn>
+                <a:cxn ang="0">
+                  <a:pos x="csX5" y="csY5"/>
+                </a:cxn>
+                <a:cxn ang="0">
+                  <a:pos x="csX6" y="csY6"/>
+                </a:cxn>
+                <a:cxn ang="0">
+                  <a:pos x="csX7" y="csY7"/>
+                </a:cxn>
+              </a:cxnLst>
+              <a:rect l="l" t="t" r="r" b="b"/>
+              <a:pathLst>
+                <a:path w="1100884" h="2120735">
+                  <a:moveTo>
+                    <a:pt x="1078073" y="0"/>
+                  </a:moveTo>
+                  <a:lnTo>
+                    <a:pt x="1090093" y="78763"/>
+                  </a:lnTo>
+                  <a:cubicBezTo>
+                    <a:pt x="1097229" y="149027"/>
+                    <a:pt x="1100884" y="220319"/>
+                    <a:pt x="1100884" y="292465"/>
+                  </a:cubicBezTo>
+                  <a:cubicBezTo>
+                    <a:pt x="1100884" y="1013927"/>
+                    <a:pt x="735346" y="1650013"/>
+                    <a:pt x="179372" y="2025622"/>
+                  </a:cubicBezTo>
+                  <a:lnTo>
+                    <a:pt x="22812" y="2120735"/>
+                  </a:lnTo>
+                  <a:lnTo>
+                    <a:pt x="10791" y="2041971"/>
+                  </a:lnTo>
+                  <a:cubicBezTo>
+                    <a:pt x="3656" y="1971708"/>
+                    <a:pt x="0" y="1900415"/>
+                    <a:pt x="0" y="1828269"/>
+                  </a:cubicBezTo>
+                  <a:cubicBezTo>
+                    <a:pt x="0" y="1106807"/>
+                    <a:pt x="365538" y="470721"/>
+                    <a:pt x="921513" y="95112"/>
+                  </a:cubicBezTo>
+                  <a:close/>
+                </a:path>
+              </a:pathLst>
+            </a:custGeom>
+            <a:solidFill>
+              <a:srgbClr val="FF0000">
+                <a:alpha val="45999"/>
+              </a:srgbClr>
+            </a:solidFill>
+            <a:ln w="19050">
+              <a:noFill/>
+            </a:ln>
+          </p:spPr>
+          <p:style>
+            <a:lnRef idx="2">
+              <a:schemeClr val="accent1">
+                <a:shade val="15000"/>
+              </a:schemeClr>
+            </a:lnRef>
+            <a:fillRef idx="1">
+              <a:schemeClr val="accent1"/>
+            </a:fillRef>
+            <a:effectRef idx="0">
+              <a:schemeClr val="accent1"/>
+            </a:effectRef>
+            <a:fontRef idx="minor">
+              <a:schemeClr val="lt1"/>
+            </a:fontRef>
+          </p:style>
+          <p:txBody>
+            <a:bodyPr wrap="square" rtlCol="0" anchor="ctr">
+              <a:noAutofit/>
+            </a:bodyPr>
+            <a:lstStyle/>
+            <a:p>
+              <a:pPr algn="ctr"/>
+              <a:endParaRPr kumimoji="1" lang="ja-JP" altLang="en-US"/>
+            </a:p>
+          </p:txBody>
+        </p:sp>
+        <p:cxnSp>
+          <p:nvCxnSpPr>
+            <p:cNvPr id="4" name="直線矢印コネクタ 3">
+              <a:extLst>
+                <a:ext uri="{FF2B5EF4-FFF2-40B4-BE49-F238E27FC236}">
+                  <a16:creationId xmlns:a16="http://schemas.microsoft.com/office/drawing/2014/main" id="{B9377C3D-4D2A-71FD-1794-DFDB9677B685}"/>
+                </a:ext>
+              </a:extLst>
+            </p:cNvPr>
+            <p:cNvCxnSpPr>
+              <a:cxnSpLocks/>
+            </p:cNvCxnSpPr>
+            <p:nvPr/>
+          </p:nvCxnSpPr>
+          <p:spPr>
+            <a:xfrm>
+              <a:off x="1320150" y="6216979"/>
+              <a:ext cx="9440777" cy="0"/>
+            </a:xfrm>
+            <a:prstGeom prst="straightConnector1">
+              <a:avLst/>
+            </a:prstGeom>
+            <a:ln w="28575">
+              <a:solidFill>
+                <a:schemeClr val="tx1"/>
+              </a:solidFill>
+              <a:tailEnd type="triangle"/>
+            </a:ln>
+          </p:spPr>
+          <p:style>
+            <a:lnRef idx="1">
+              <a:schemeClr val="accent1"/>
+            </a:lnRef>
+            <a:fillRef idx="0">
+              <a:schemeClr val="accent1"/>
+            </a:fillRef>
+            <a:effectRef idx="0">
+              <a:schemeClr val="accent1"/>
+            </a:effectRef>
+            <a:fontRef idx="minor">
+              <a:schemeClr val="tx1"/>
+            </a:fontRef>
+          </p:style>
+        </p:cxnSp>
+        <p:cxnSp>
+          <p:nvCxnSpPr>
+            <p:cNvPr id="5" name="直線矢印コネクタ 4">
+              <a:extLst>
+                <a:ext uri="{FF2B5EF4-FFF2-40B4-BE49-F238E27FC236}">
+                  <a16:creationId xmlns:a16="http://schemas.microsoft.com/office/drawing/2014/main" id="{B8F53641-82B5-25E7-ADEE-EAED700169B0}"/>
+                </a:ext>
+              </a:extLst>
+            </p:cNvPr>
+            <p:cNvCxnSpPr>
+              <a:cxnSpLocks/>
+            </p:cNvCxnSpPr>
+            <p:nvPr/>
+          </p:nvCxnSpPr>
+          <p:spPr>
+            <a:xfrm flipV="1">
+              <a:off x="1320150" y="390293"/>
+              <a:ext cx="0" cy="5826686"/>
+            </a:xfrm>
+            <a:prstGeom prst="straightConnector1">
+              <a:avLst/>
+            </a:prstGeom>
+            <a:ln w="28575">
+              <a:solidFill>
+                <a:schemeClr val="tx1"/>
+              </a:solidFill>
+              <a:tailEnd type="triangle"/>
+            </a:ln>
+          </p:spPr>
+          <p:style>
+            <a:lnRef idx="1">
+              <a:schemeClr val="accent1"/>
+            </a:lnRef>
+            <a:fillRef idx="0">
+              <a:schemeClr val="accent1"/>
+            </a:fillRef>
+            <a:effectRef idx="0">
+              <a:schemeClr val="accent1"/>
+            </a:effectRef>
+            <a:fontRef idx="minor">
+              <a:schemeClr val="tx1"/>
+            </a:fontRef>
+          </p:style>
+        </p:cxnSp>
+        <p:sp>
+          <p:nvSpPr>
+            <p:cNvPr id="6" name="テキスト ボックス 5">
+              <a:extLst>
+                <a:ext uri="{FF2B5EF4-FFF2-40B4-BE49-F238E27FC236}">
+                  <a16:creationId xmlns:a16="http://schemas.microsoft.com/office/drawing/2014/main" id="{86116F70-DB13-C461-6969-83EDE1E54319}"/>
+                </a:ext>
+              </a:extLst>
+            </p:cNvPr>
+            <p:cNvSpPr txBox="1"/>
+            <p:nvPr/>
+          </p:nvSpPr>
+          <p:spPr>
+            <a:xfrm>
+              <a:off x="9248061" y="6233395"/>
+              <a:ext cx="1512866" cy="461665"/>
+            </a:xfrm>
+            <a:prstGeom prst="rect">
+              <a:avLst/>
+            </a:prstGeom>
+            <a:noFill/>
+          </p:spPr>
+          <p:txBody>
+            <a:bodyPr wrap="square" rtlCol="0">
+              <a:spAutoFit/>
+            </a:bodyPr>
+            <a:lstStyle/>
+            <a:p>
+              <a:pPr algn="ctr"/>
+              <a:r>
+                <a:rPr kumimoji="1" lang="ja-JP" altLang="en-US" sz="2400">
+                  <a:latin typeface="Hiragino Kaku Gothic StdN W8" panose="020B0800000000000000" pitchFamily="34" charset="-128"/>
+                  <a:ea typeface="Hiragino Kaku Gothic StdN W8" panose="020B0800000000000000" pitchFamily="34" charset="-128"/>
+                </a:rPr>
+                <a:t>車関税率</a:t>
+              </a:r>
+            </a:p>
+          </p:txBody>
+        </p:sp>
+        <p:sp>
+          <p:nvSpPr>
+            <p:cNvPr id="7" name="テキスト ボックス 6">
+              <a:extLst>
+                <a:ext uri="{FF2B5EF4-FFF2-40B4-BE49-F238E27FC236}">
+                  <a16:creationId xmlns:a16="http://schemas.microsoft.com/office/drawing/2014/main" id="{3233262C-ED73-FD61-3149-E85C60098166}"/>
+                </a:ext>
+              </a:extLst>
+            </p:cNvPr>
+            <p:cNvSpPr txBox="1"/>
+            <p:nvPr/>
+          </p:nvSpPr>
+          <p:spPr>
+            <a:xfrm>
+              <a:off x="766152" y="390292"/>
+              <a:ext cx="553998" cy="1323439"/>
+            </a:xfrm>
+            <a:prstGeom prst="rect">
+              <a:avLst/>
+            </a:prstGeom>
+            <a:noFill/>
+          </p:spPr>
+          <p:txBody>
+            <a:bodyPr vert="eaVert" wrap="none" rtlCol="0">
+              <a:spAutoFit/>
+            </a:bodyPr>
+            <a:lstStyle/>
+            <a:p>
+              <a:r>
+                <a:rPr kumimoji="1" lang="ja-JP" altLang="en-US" sz="2400">
+                  <a:latin typeface="Hiragino Kaku Gothic StdN W8" panose="020B0800000000000000" pitchFamily="34" charset="-128"/>
+                  <a:ea typeface="Hiragino Kaku Gothic StdN W8" panose="020B0800000000000000" pitchFamily="34" charset="-128"/>
+                </a:rPr>
+                <a:t>肉関税率</a:t>
+              </a:r>
+            </a:p>
+          </p:txBody>
+        </p:sp>
+        <p:sp>
+          <p:nvSpPr>
+            <p:cNvPr id="8" name="円/楕円 7">
+              <a:extLst>
+                <a:ext uri="{FF2B5EF4-FFF2-40B4-BE49-F238E27FC236}">
+                  <a16:creationId xmlns:a16="http://schemas.microsoft.com/office/drawing/2014/main" id="{8C11CBAB-25C6-3AD4-438F-EEEA9CBE0ABF}"/>
+                </a:ext>
+              </a:extLst>
+            </p:cNvPr>
+            <p:cNvSpPr/>
+            <p:nvPr/>
+          </p:nvSpPr>
+          <p:spPr>
+            <a:xfrm>
+              <a:off x="4369695" y="2364273"/>
+              <a:ext cx="186550" cy="186550"/>
+            </a:xfrm>
+            <a:prstGeom prst="ellipse">
+              <a:avLst/>
+            </a:prstGeom>
+            <a:solidFill>
+              <a:schemeClr val="tx1"/>
+            </a:solidFill>
+            <a:ln>
+              <a:noFill/>
+            </a:ln>
+          </p:spPr>
+          <p:style>
+            <a:lnRef idx="2">
+              <a:schemeClr val="accent1">
+                <a:shade val="50000"/>
+              </a:schemeClr>
+            </a:lnRef>
+            <a:fillRef idx="1">
+              <a:schemeClr val="accent1"/>
+            </a:fillRef>
+            <a:effectRef idx="0">
+              <a:schemeClr val="accent1"/>
+            </a:effectRef>
+            <a:fontRef idx="minor">
+              <a:schemeClr val="lt1"/>
+            </a:fontRef>
+          </p:style>
+          <p:txBody>
+            <a:bodyPr rtlCol="0" anchor="ctr"/>
+            <a:lstStyle/>
+            <a:p>
+              <a:pPr algn="ctr"/>
+              <a:endParaRPr kumimoji="1" lang="ja-JP" altLang="en-US"/>
+            </a:p>
+          </p:txBody>
+        </p:sp>
+        <p:sp>
+          <p:nvSpPr>
+            <p:cNvPr id="9" name="テキスト ボックス 8">
+              <a:extLst>
+                <a:ext uri="{FF2B5EF4-FFF2-40B4-BE49-F238E27FC236}">
+                  <a16:creationId xmlns:a16="http://schemas.microsoft.com/office/drawing/2014/main" id="{B1DD09F2-B482-AA40-9126-0DD85DEB6FD1}"/>
+                </a:ext>
+              </a:extLst>
+            </p:cNvPr>
+            <p:cNvSpPr txBox="1"/>
+            <p:nvPr/>
+          </p:nvSpPr>
+          <p:spPr>
+            <a:xfrm>
+              <a:off x="3915337" y="2558199"/>
+              <a:ext cx="1024577" cy="461665"/>
+            </a:xfrm>
+            <a:prstGeom prst="rect">
+              <a:avLst/>
+            </a:prstGeom>
+            <a:noFill/>
+          </p:spPr>
+          <p:txBody>
+            <a:bodyPr wrap="square" rtlCol="0">
+              <a:spAutoFit/>
+            </a:bodyPr>
+            <a:lstStyle/>
+            <a:p>
+              <a:pPr algn="ctr"/>
+              <a:r>
+                <a:rPr kumimoji="1" lang="ja-JP" altLang="en-US" sz="2400">
+                  <a:latin typeface="Hiragino Kaku Gothic StdN W8" panose="020B0800000000000000" pitchFamily="34" charset="-128"/>
+                  <a:ea typeface="Hiragino Kaku Gothic StdN W8" panose="020B0800000000000000" pitchFamily="34" charset="-128"/>
+                </a:rPr>
+                <a:t>日本</a:t>
+              </a:r>
+            </a:p>
+          </p:txBody>
+        </p:sp>
+        <p:sp>
+          <p:nvSpPr>
+            <p:cNvPr id="10" name="円/楕円 9">
+              <a:extLst>
+                <a:ext uri="{FF2B5EF4-FFF2-40B4-BE49-F238E27FC236}">
+                  <a16:creationId xmlns:a16="http://schemas.microsoft.com/office/drawing/2014/main" id="{8700584B-872A-05AD-C98C-859A7C1637E1}"/>
+                </a:ext>
+              </a:extLst>
+            </p:cNvPr>
+            <p:cNvSpPr/>
+            <p:nvPr/>
+          </p:nvSpPr>
+          <p:spPr>
+            <a:xfrm>
+              <a:off x="2354479" y="390292"/>
+              <a:ext cx="4180231" cy="4180231"/>
+            </a:xfrm>
+            <a:prstGeom prst="ellipse">
+              <a:avLst/>
+            </a:prstGeom>
+            <a:noFill/>
+            <a:ln w="19050">
+              <a:solidFill>
+                <a:schemeClr val="tx1"/>
+              </a:solidFill>
+            </a:ln>
+          </p:spPr>
+          <p:style>
+            <a:lnRef idx="2">
+              <a:schemeClr val="accent1">
+                <a:shade val="15000"/>
+              </a:schemeClr>
+            </a:lnRef>
+            <a:fillRef idx="1">
+              <a:schemeClr val="accent1"/>
+            </a:fillRef>
+            <a:effectRef idx="0">
+              <a:schemeClr val="accent1"/>
+            </a:effectRef>
+            <a:fontRef idx="minor">
+              <a:schemeClr val="lt1"/>
+            </a:fontRef>
+          </p:style>
+          <p:txBody>
+            <a:bodyPr rtlCol="0" anchor="ctr"/>
+            <a:lstStyle/>
+            <a:p>
+              <a:pPr algn="ctr"/>
+              <a:endParaRPr kumimoji="1" lang="ja-JP" altLang="en-US"/>
+            </a:p>
+          </p:txBody>
+        </p:sp>
+        <p:sp>
+          <p:nvSpPr>
+            <p:cNvPr id="11" name="テキスト ボックス 10">
+              <a:extLst>
+                <a:ext uri="{FF2B5EF4-FFF2-40B4-BE49-F238E27FC236}">
+                  <a16:creationId xmlns:a16="http://schemas.microsoft.com/office/drawing/2014/main" id="{DE9F0037-CC82-985F-9256-895AFCB3702C}"/>
+                </a:ext>
+              </a:extLst>
+            </p:cNvPr>
+            <p:cNvSpPr txBox="1"/>
+            <p:nvPr/>
+          </p:nvSpPr>
+          <p:spPr>
+            <a:xfrm>
+              <a:off x="6996337" y="4091460"/>
+              <a:ext cx="1024577" cy="461665"/>
+            </a:xfrm>
+            <a:prstGeom prst="rect">
+              <a:avLst/>
+            </a:prstGeom>
+            <a:noFill/>
+          </p:spPr>
+          <p:txBody>
+            <a:bodyPr wrap="square" rtlCol="0">
+              <a:spAutoFit/>
+            </a:bodyPr>
+            <a:lstStyle/>
+            <a:p>
+              <a:r>
+                <a:rPr kumimoji="1" lang="ja-JP" altLang="en-US" sz="2400">
+                  <a:latin typeface="Hiragino Kaku Gothic StdN W8" panose="020B0800000000000000" pitchFamily="34" charset="-128"/>
+                  <a:ea typeface="Hiragino Kaku Gothic StdN W8" panose="020B0800000000000000" pitchFamily="34" charset="-128"/>
+                </a:rPr>
+                <a:t>米国</a:t>
+              </a:r>
+            </a:p>
+          </p:txBody>
+        </p:sp>
+        <p:sp>
+          <p:nvSpPr>
+            <p:cNvPr id="12" name="円/楕円 11">
+              <a:extLst>
+                <a:ext uri="{FF2B5EF4-FFF2-40B4-BE49-F238E27FC236}">
+                  <a16:creationId xmlns:a16="http://schemas.microsoft.com/office/drawing/2014/main" id="{90FA50F0-7D8C-2052-7643-DA14DA208615}"/>
+                </a:ext>
+              </a:extLst>
+            </p:cNvPr>
+            <p:cNvSpPr/>
+            <p:nvPr/>
+          </p:nvSpPr>
+          <p:spPr>
+            <a:xfrm>
+              <a:off x="7450695" y="3920436"/>
+              <a:ext cx="186550" cy="186550"/>
+            </a:xfrm>
+            <a:prstGeom prst="ellipse">
+              <a:avLst/>
+            </a:prstGeom>
+            <a:solidFill>
+              <a:schemeClr val="tx1"/>
+            </a:solidFill>
+            <a:ln>
+              <a:noFill/>
+            </a:ln>
+          </p:spPr>
+          <p:style>
+            <a:lnRef idx="2">
+              <a:schemeClr val="accent1">
+                <a:shade val="50000"/>
+              </a:schemeClr>
+            </a:lnRef>
+            <a:fillRef idx="1">
+              <a:schemeClr val="accent1"/>
+            </a:fillRef>
+            <a:effectRef idx="0">
+              <a:schemeClr val="accent1"/>
+            </a:effectRef>
+            <a:fontRef idx="minor">
+              <a:schemeClr val="lt1"/>
+            </a:fontRef>
+          </p:style>
+          <p:txBody>
+            <a:bodyPr rtlCol="0" anchor="ctr"/>
+            <a:lstStyle/>
+            <a:p>
+              <a:pPr algn="ctr"/>
+              <a:endParaRPr kumimoji="1" lang="ja-JP" altLang="en-US"/>
+            </a:p>
+          </p:txBody>
+        </p:sp>
+        <p:sp>
+          <p:nvSpPr>
+            <p:cNvPr id="13" name="円/楕円 12">
+              <a:extLst>
+                <a:ext uri="{FF2B5EF4-FFF2-40B4-BE49-F238E27FC236}">
+                  <a16:creationId xmlns:a16="http://schemas.microsoft.com/office/drawing/2014/main" id="{8007B004-25B6-845D-DE63-9B0357719EF0}"/>
+                </a:ext>
+              </a:extLst>
+            </p:cNvPr>
+            <p:cNvSpPr/>
+            <p:nvPr/>
+          </p:nvSpPr>
+          <p:spPr>
+            <a:xfrm>
+              <a:off x="5433827" y="1926096"/>
+              <a:ext cx="4180231" cy="4180231"/>
+            </a:xfrm>
+            <a:prstGeom prst="ellipse">
+              <a:avLst/>
+            </a:prstGeom>
+            <a:noFill/>
+            <a:ln w="19050">
+              <a:solidFill>
+                <a:schemeClr val="tx1"/>
+              </a:solidFill>
+            </a:ln>
+          </p:spPr>
+          <p:style>
+            <a:lnRef idx="2">
+              <a:schemeClr val="accent1">
+                <a:shade val="15000"/>
+              </a:schemeClr>
+            </a:lnRef>
+            <a:fillRef idx="1">
+              <a:schemeClr val="accent1"/>
+            </a:fillRef>
+            <a:effectRef idx="0">
+              <a:schemeClr val="accent1"/>
+            </a:effectRef>
+            <a:fontRef idx="minor">
+              <a:schemeClr val="lt1"/>
+            </a:fontRef>
+          </p:style>
+          <p:txBody>
+            <a:bodyPr rtlCol="0" anchor="ctr"/>
+            <a:lstStyle/>
+            <a:p>
+              <a:pPr algn="ctr"/>
+              <a:endParaRPr kumimoji="1" lang="ja-JP" altLang="en-US"/>
+            </a:p>
+          </p:txBody>
+        </p:sp>
+        <p:grpSp>
+          <p:nvGrpSpPr>
+            <p:cNvPr id="14" name="グループ化 13">
+              <a:extLst>
+                <a:ext uri="{FF2B5EF4-FFF2-40B4-BE49-F238E27FC236}">
+                  <a16:creationId xmlns:a16="http://schemas.microsoft.com/office/drawing/2014/main" id="{3D8C49CB-B2C2-EEBE-BD0B-4372F3BBF9A2}"/>
+                </a:ext>
+              </a:extLst>
+            </p:cNvPr>
+            <p:cNvGrpSpPr/>
+            <p:nvPr/>
+          </p:nvGrpSpPr>
+          <p:grpSpPr>
+            <a:xfrm>
+              <a:off x="6270771" y="1711020"/>
+              <a:ext cx="1024577" cy="555608"/>
+              <a:chOff x="6270771" y="1711020"/>
+              <a:chExt cx="1024577" cy="555608"/>
+            </a:xfrm>
+          </p:grpSpPr>
+          <p:sp>
+            <p:nvSpPr>
+              <p:cNvPr id="17" name="テキスト ボックス 16">
+                <a:extLst>
+                  <a:ext uri="{FF2B5EF4-FFF2-40B4-BE49-F238E27FC236}">
+                    <a16:creationId xmlns:a16="http://schemas.microsoft.com/office/drawing/2014/main" id="{7C16392A-B541-8F71-8860-616DAFD07A4D}"/>
+                  </a:ext>
+                </a:extLst>
+              </p:cNvPr>
+              <p:cNvSpPr txBox="1"/>
+              <p:nvPr/>
+            </p:nvSpPr>
+            <p:spPr>
+              <a:xfrm>
+                <a:off x="6270771" y="1711020"/>
+                <a:ext cx="1024577" cy="461665"/>
+              </a:xfrm>
+              <a:prstGeom prst="rect">
+                <a:avLst/>
+              </a:prstGeom>
+              <a:noFill/>
+            </p:spPr>
+            <p:txBody>
+              <a:bodyPr wrap="square" rtlCol="0">
+                <a:spAutoFit/>
+              </a:bodyPr>
+              <a:lstStyle/>
+              <a:p>
+                <a:r>
+                  <a:rPr kumimoji="1" lang="ja-JP" altLang="en-US" sz="2400">
+                    <a:latin typeface="Hiragino Kaku Gothic StdN W8" panose="020B0800000000000000" pitchFamily="34" charset="-128"/>
+                    <a:ea typeface="Hiragino Kaku Gothic StdN W8" panose="020B0800000000000000" pitchFamily="34" charset="-128"/>
+                  </a:rPr>
+                  <a:t>現状</a:t>
+                </a:r>
+              </a:p>
+            </p:txBody>
+          </p:sp>
+          <p:sp>
+            <p:nvSpPr>
+              <p:cNvPr id="18" name="円/楕円 17">
+                <a:extLst>
+                  <a:ext uri="{FF2B5EF4-FFF2-40B4-BE49-F238E27FC236}">
+                    <a16:creationId xmlns:a16="http://schemas.microsoft.com/office/drawing/2014/main" id="{03A912D8-F053-EDB4-6D38-EAA427851EA0}"/>
+                  </a:ext>
+                </a:extLst>
+              </p:cNvPr>
+              <p:cNvSpPr/>
+              <p:nvPr/>
+            </p:nvSpPr>
+            <p:spPr>
+              <a:xfrm>
+                <a:off x="6419541" y="2080078"/>
+                <a:ext cx="186550" cy="186550"/>
+              </a:xfrm>
+              <a:prstGeom prst="ellipse">
+                <a:avLst/>
+              </a:prstGeom>
+              <a:solidFill>
+                <a:schemeClr val="tx1"/>
+              </a:solidFill>
+              <a:ln>
+                <a:noFill/>
+              </a:ln>
+            </p:spPr>
+            <p:style>
+              <a:lnRef idx="2">
+                <a:schemeClr val="accent1">
+                  <a:shade val="50000"/>
+                </a:schemeClr>
+              </a:lnRef>
+              <a:fillRef idx="1">
+                <a:schemeClr val="accent1"/>
+              </a:fillRef>
+              <a:effectRef idx="0">
+                <a:schemeClr val="accent1"/>
+              </a:effectRef>
+              <a:fontRef idx="minor">
+                <a:schemeClr val="lt1"/>
+              </a:fontRef>
+            </p:style>
+            <p:txBody>
+              <a:bodyPr rtlCol="0" anchor="ctr"/>
+              <a:lstStyle/>
+              <a:p>
+                <a:pPr algn="ctr"/>
+                <a:endParaRPr kumimoji="1" lang="ja-JP" altLang="en-US"/>
+              </a:p>
+            </p:txBody>
+          </p:sp>
+        </p:grpSp>
+        <p:sp>
+          <p:nvSpPr>
+            <p:cNvPr id="16" name="テキスト ボックス 15">
+              <a:extLst>
+                <a:ext uri="{FF2B5EF4-FFF2-40B4-BE49-F238E27FC236}">
+                  <a16:creationId xmlns:a16="http://schemas.microsoft.com/office/drawing/2014/main" id="{B9014431-A99D-6E96-2CC8-AAA30D9F2549}"/>
+                </a:ext>
+              </a:extLst>
+            </p:cNvPr>
+            <p:cNvSpPr txBox="1"/>
+            <p:nvPr/>
+          </p:nvSpPr>
+          <p:spPr>
+            <a:xfrm>
+              <a:off x="1320149" y="4744336"/>
+              <a:ext cx="4006942" cy="1200329"/>
+            </a:xfrm>
+            <a:prstGeom prst="rect">
+              <a:avLst/>
+            </a:prstGeom>
+            <a:solidFill>
+              <a:schemeClr val="bg1"/>
+            </a:solidFill>
+            <a:ln>
+              <a:solidFill>
+                <a:schemeClr val="tx1"/>
+              </a:solidFill>
+            </a:ln>
+          </p:spPr>
+          <p:txBody>
+            <a:bodyPr wrap="square" rtlCol="0">
+              <a:spAutoFit/>
+            </a:bodyPr>
+            <a:lstStyle/>
+            <a:p>
+              <a:r>
+                <a:rPr lang="en-GB" altLang="ja-JP" sz="2400" b="1" dirty="0">
+                  <a:latin typeface="Hiragino Sans W4" panose="020B0400000000000000" pitchFamily="34" charset="-128"/>
+                  <a:ea typeface="Hiragino Sans W4" panose="020B0400000000000000" pitchFamily="34" charset="-128"/>
+                </a:rPr>
+                <a:t>a</a:t>
+              </a:r>
+              <a:r>
+                <a:rPr lang="ja-JP" altLang="en-US" sz="2400" b="1">
+                  <a:latin typeface="Hiragino Sans W4" panose="020B0400000000000000" pitchFamily="34" charset="-128"/>
+                  <a:ea typeface="Hiragino Sans W4" panose="020B0400000000000000" pitchFamily="34" charset="-128"/>
+                </a:rPr>
+                <a:t>点</a:t>
+              </a:r>
+              <a:r>
+                <a:rPr lang="en-US" altLang="ja-JP" sz="2400" dirty="0">
+                  <a:latin typeface="Hiragino Sans W4" panose="020B0400000000000000" pitchFamily="34" charset="-128"/>
+                  <a:ea typeface="Hiragino Sans W4" panose="020B0400000000000000" pitchFamily="34" charset="-128"/>
+                </a:rPr>
+                <a:t>…⽇</a:t>
+              </a:r>
+              <a:r>
+                <a:rPr lang="ja-JP" altLang="en-US" sz="2400">
+                  <a:latin typeface="Hiragino Sans W4" panose="020B0400000000000000" pitchFamily="34" charset="-128"/>
+                  <a:ea typeface="Hiragino Sans W4" panose="020B0400000000000000" pitchFamily="34" charset="-128"/>
+                </a:rPr>
+                <a:t>本の取り分が多い</a:t>
+              </a:r>
+            </a:p>
+            <a:p>
+              <a:r>
+                <a:rPr lang="en-GB" altLang="ja-JP" sz="2400" b="1" dirty="0">
+                  <a:latin typeface="Hiragino Sans W4" panose="020B0400000000000000" pitchFamily="34" charset="-128"/>
+                  <a:ea typeface="Hiragino Sans W4" panose="020B0400000000000000" pitchFamily="34" charset="-128"/>
+                </a:rPr>
+                <a:t>m</a:t>
+              </a:r>
+              <a:r>
+                <a:rPr lang="ja-JP" altLang="en-US" sz="2400" b="1">
+                  <a:latin typeface="Hiragino Sans W4" panose="020B0400000000000000" pitchFamily="34" charset="-128"/>
+                  <a:ea typeface="Hiragino Sans W4" panose="020B0400000000000000" pitchFamily="34" charset="-128"/>
+                </a:rPr>
+                <a:t>点</a:t>
+              </a:r>
+              <a:r>
+                <a:rPr lang="en-US" altLang="ja-JP" sz="2400" dirty="0">
+                  <a:latin typeface="Hiragino Sans W4" panose="020B0400000000000000" pitchFamily="34" charset="-128"/>
+                  <a:ea typeface="Hiragino Sans W4" panose="020B0400000000000000" pitchFamily="34" charset="-128"/>
+                </a:rPr>
+                <a:t>…⽇⽶</a:t>
+              </a:r>
+              <a:r>
+                <a:rPr lang="ja-JP" altLang="en-US" sz="2400">
+                  <a:latin typeface="Hiragino Sans W4" panose="020B0400000000000000" pitchFamily="34" charset="-128"/>
+                  <a:ea typeface="Hiragino Sans W4" panose="020B0400000000000000" pitchFamily="34" charset="-128"/>
+                </a:rPr>
+                <a:t>の取り分は同じ</a:t>
+              </a:r>
+            </a:p>
+            <a:p>
+              <a:r>
+                <a:rPr lang="en-GB" altLang="ja-JP" sz="2400" b="1" dirty="0">
+                  <a:latin typeface="Hiragino Sans W4" panose="020B0400000000000000" pitchFamily="34" charset="-128"/>
+                  <a:ea typeface="Hiragino Sans W4" panose="020B0400000000000000" pitchFamily="34" charset="-128"/>
+                </a:rPr>
+                <a:t>b</a:t>
+              </a:r>
+              <a:r>
+                <a:rPr lang="ja-JP" altLang="en-US" sz="2400" b="1">
+                  <a:latin typeface="Hiragino Sans W4" panose="020B0400000000000000" pitchFamily="34" charset="-128"/>
+                  <a:ea typeface="Hiragino Sans W4" panose="020B0400000000000000" pitchFamily="34" charset="-128"/>
+                </a:rPr>
+                <a:t>点</a:t>
+              </a:r>
+              <a:r>
+                <a:rPr lang="en-US" altLang="ja-JP" sz="2400" dirty="0">
+                  <a:latin typeface="Hiragino Sans W4" panose="020B0400000000000000" pitchFamily="34" charset="-128"/>
+                  <a:ea typeface="Hiragino Sans W4" panose="020B0400000000000000" pitchFamily="34" charset="-128"/>
+                </a:rPr>
+                <a:t>…⽶</a:t>
+              </a:r>
+              <a:r>
+                <a:rPr lang="ja-JP" altLang="en-US" sz="2400">
+                  <a:latin typeface="Hiragino Sans W4" panose="020B0400000000000000" pitchFamily="34" charset="-128"/>
+                  <a:ea typeface="Hiragino Sans W4" panose="020B0400000000000000" pitchFamily="34" charset="-128"/>
+                </a:rPr>
+                <a:t>国の取り分が多い</a:t>
+              </a:r>
+              <a:endParaRPr kumimoji="1" lang="en-US" altLang="ja-JP" sz="2400" dirty="0">
+                <a:latin typeface="Hiragino Sans W4" panose="020B0400000000000000" pitchFamily="34" charset="-128"/>
+                <a:ea typeface="Hiragino Sans W4" panose="020B0400000000000000" pitchFamily="34" charset="-128"/>
+              </a:endParaRPr>
+            </a:p>
+          </p:txBody>
+        </p:sp>
+        <p:cxnSp>
+          <p:nvCxnSpPr>
+            <p:cNvPr id="19" name="直線コネクタ 18">
+              <a:extLst>
+                <a:ext uri="{FF2B5EF4-FFF2-40B4-BE49-F238E27FC236}">
+                  <a16:creationId xmlns:a16="http://schemas.microsoft.com/office/drawing/2014/main" id="{202F19A7-7168-7E93-F3A2-5C96746AEC42}"/>
+                </a:ext>
+              </a:extLst>
+            </p:cNvPr>
+            <p:cNvCxnSpPr>
+              <a:cxnSpLocks/>
+            </p:cNvCxnSpPr>
+            <p:nvPr/>
+          </p:nvCxnSpPr>
+          <p:spPr>
+            <a:xfrm>
+              <a:off x="5667270" y="3054028"/>
+              <a:ext cx="655447" cy="349572"/>
+            </a:xfrm>
+            <a:prstGeom prst="line">
+              <a:avLst/>
+            </a:prstGeom>
+            <a:ln w="57150"/>
+          </p:spPr>
+          <p:style>
+            <a:lnRef idx="2">
+              <a:schemeClr val="dk1"/>
+            </a:lnRef>
+            <a:fillRef idx="0">
+              <a:schemeClr val="dk1"/>
+            </a:fillRef>
+            <a:effectRef idx="1">
+              <a:schemeClr val="dk1"/>
+            </a:effectRef>
+            <a:fontRef idx="minor">
+              <a:schemeClr val="tx1"/>
+            </a:fontRef>
+          </p:style>
+        </p:cxnSp>
+        <p:sp>
+          <p:nvSpPr>
+            <p:cNvPr id="20" name="円/楕円 19">
+              <a:extLst>
+                <a:ext uri="{FF2B5EF4-FFF2-40B4-BE49-F238E27FC236}">
+                  <a16:creationId xmlns:a16="http://schemas.microsoft.com/office/drawing/2014/main" id="{59EE887E-1993-80CD-9686-CFC2A0ED0210}"/>
+                </a:ext>
+              </a:extLst>
+            </p:cNvPr>
+            <p:cNvSpPr/>
+            <p:nvPr/>
+          </p:nvSpPr>
+          <p:spPr>
+            <a:xfrm>
+              <a:off x="5595889" y="2960753"/>
+              <a:ext cx="157211" cy="157211"/>
+            </a:xfrm>
+            <a:prstGeom prst="ellipse">
+              <a:avLst/>
+            </a:prstGeom>
+            <a:solidFill>
+              <a:srgbClr val="FF0000"/>
+            </a:solidFill>
+            <a:ln>
+              <a:noFill/>
+            </a:ln>
+          </p:spPr>
+          <p:style>
+            <a:lnRef idx="2">
+              <a:schemeClr val="accent1">
+                <a:shade val="50000"/>
+              </a:schemeClr>
+            </a:lnRef>
+            <a:fillRef idx="1">
+              <a:schemeClr val="accent1"/>
+            </a:fillRef>
+            <a:effectRef idx="0">
+              <a:schemeClr val="accent1"/>
+            </a:effectRef>
+            <a:fontRef idx="minor">
+              <a:schemeClr val="lt1"/>
+            </a:fontRef>
+          </p:style>
+          <p:txBody>
+            <a:bodyPr rtlCol="0" anchor="ctr"/>
+            <a:lstStyle/>
+            <a:p>
+              <a:pPr algn="ctr"/>
+              <a:endParaRPr kumimoji="1" lang="ja-JP" altLang="en-US">
+                <a:solidFill>
+                  <a:srgbClr val="FF0000"/>
+                </a:solidFill>
+              </a:endParaRPr>
+            </a:p>
+          </p:txBody>
+        </p:sp>
+        <p:sp>
+          <p:nvSpPr>
+            <p:cNvPr id="21" name="円/楕円 20">
+              <a:extLst>
+                <a:ext uri="{FF2B5EF4-FFF2-40B4-BE49-F238E27FC236}">
+                  <a16:creationId xmlns:a16="http://schemas.microsoft.com/office/drawing/2014/main" id="{ECC26969-289C-5FA6-41D3-9EDBEAF19B29}"/>
+                </a:ext>
+              </a:extLst>
+            </p:cNvPr>
+            <p:cNvSpPr/>
+            <p:nvPr/>
+          </p:nvSpPr>
+          <p:spPr>
+            <a:xfrm>
+              <a:off x="5916387" y="3146425"/>
+              <a:ext cx="157211" cy="157211"/>
+            </a:xfrm>
+            <a:prstGeom prst="ellipse">
+              <a:avLst/>
+            </a:prstGeom>
+            <a:solidFill>
+              <a:srgbClr val="FF0000"/>
+            </a:solidFill>
+            <a:ln>
+              <a:noFill/>
+            </a:ln>
+          </p:spPr>
+          <p:style>
+            <a:lnRef idx="2">
+              <a:schemeClr val="accent1">
+                <a:shade val="50000"/>
+              </a:schemeClr>
+            </a:lnRef>
+            <a:fillRef idx="1">
+              <a:schemeClr val="accent1"/>
+            </a:fillRef>
+            <a:effectRef idx="0">
+              <a:schemeClr val="accent1"/>
+            </a:effectRef>
+            <a:fontRef idx="minor">
+              <a:schemeClr val="lt1"/>
+            </a:fontRef>
+          </p:style>
+          <p:txBody>
+            <a:bodyPr rtlCol="0" anchor="ctr"/>
+            <a:lstStyle/>
+            <a:p>
+              <a:pPr algn="ctr"/>
+              <a:endParaRPr kumimoji="1" lang="ja-JP" altLang="en-US">
+                <a:solidFill>
+                  <a:srgbClr val="FF0000"/>
+                </a:solidFill>
+              </a:endParaRPr>
+            </a:p>
+          </p:txBody>
+        </p:sp>
+        <p:sp>
+          <p:nvSpPr>
+            <p:cNvPr id="22" name="円/楕円 21">
+              <a:extLst>
+                <a:ext uri="{FF2B5EF4-FFF2-40B4-BE49-F238E27FC236}">
+                  <a16:creationId xmlns:a16="http://schemas.microsoft.com/office/drawing/2014/main" id="{0D50D751-9D11-9825-45D1-754D181D898A}"/>
+                </a:ext>
+              </a:extLst>
+            </p:cNvPr>
+            <p:cNvSpPr/>
+            <p:nvPr/>
+          </p:nvSpPr>
+          <p:spPr>
+            <a:xfrm>
+              <a:off x="6262330" y="3324994"/>
+              <a:ext cx="157211" cy="157211"/>
+            </a:xfrm>
+            <a:prstGeom prst="ellipse">
+              <a:avLst/>
+            </a:prstGeom>
+            <a:solidFill>
+              <a:srgbClr val="FF0000"/>
+            </a:solidFill>
+            <a:ln>
+              <a:noFill/>
+            </a:ln>
+          </p:spPr>
+          <p:style>
+            <a:lnRef idx="2">
+              <a:schemeClr val="accent1">
+                <a:shade val="50000"/>
+              </a:schemeClr>
+            </a:lnRef>
+            <a:fillRef idx="1">
+              <a:schemeClr val="accent1"/>
+            </a:fillRef>
+            <a:effectRef idx="0">
+              <a:schemeClr val="accent1"/>
+            </a:effectRef>
+            <a:fontRef idx="minor">
+              <a:schemeClr val="lt1"/>
+            </a:fontRef>
+          </p:style>
+          <p:txBody>
+            <a:bodyPr rtlCol="0" anchor="ctr"/>
+            <a:lstStyle/>
+            <a:p>
+              <a:pPr algn="ctr"/>
+              <a:endParaRPr kumimoji="1" lang="ja-JP" altLang="en-US">
+                <a:solidFill>
+                  <a:srgbClr val="FF0000"/>
+                </a:solidFill>
+              </a:endParaRPr>
+            </a:p>
+          </p:txBody>
+        </p:sp>
+        <p:sp>
+          <p:nvSpPr>
+            <p:cNvPr id="23" name="テキスト ボックス 22">
+              <a:extLst>
+                <a:ext uri="{FF2B5EF4-FFF2-40B4-BE49-F238E27FC236}">
+                  <a16:creationId xmlns:a16="http://schemas.microsoft.com/office/drawing/2014/main" id="{86266535-2C1C-3BEF-657B-C1B12ABEC081}"/>
+                </a:ext>
+              </a:extLst>
+            </p:cNvPr>
+            <p:cNvSpPr txBox="1"/>
+            <p:nvPr/>
+          </p:nvSpPr>
+          <p:spPr>
+            <a:xfrm>
+              <a:off x="5327098" y="2586740"/>
+              <a:ext cx="446902" cy="461665"/>
+            </a:xfrm>
+            <a:prstGeom prst="rect">
+              <a:avLst/>
+            </a:prstGeom>
+            <a:noFill/>
+          </p:spPr>
+          <p:txBody>
+            <a:bodyPr wrap="square" rtlCol="0">
+              <a:spAutoFit/>
+            </a:bodyPr>
+            <a:lstStyle/>
+            <a:p>
+              <a:pPr algn="ctr"/>
+              <a:r>
+                <a:rPr kumimoji="1" lang="en-US" altLang="ja-JP" sz="2400" dirty="0">
+                  <a:solidFill>
+                    <a:srgbClr val="FF0000"/>
+                  </a:solidFill>
+                  <a:latin typeface="Hiragino Kaku Gothic StdN W8" panose="020B0800000000000000" pitchFamily="34" charset="-128"/>
+                  <a:ea typeface="Hiragino Kaku Gothic StdN W8" panose="020B0800000000000000" pitchFamily="34" charset="-128"/>
+                </a:rPr>
+                <a:t>a</a:t>
+              </a:r>
+              <a:endParaRPr kumimoji="1" lang="ja-JP" altLang="en-US" sz="2400">
+                <a:solidFill>
+                  <a:srgbClr val="FF0000"/>
+                </a:solidFill>
+                <a:latin typeface="Hiragino Kaku Gothic StdN W8" panose="020B0800000000000000" pitchFamily="34" charset="-128"/>
+                <a:ea typeface="Hiragino Kaku Gothic StdN W8" panose="020B0800000000000000" pitchFamily="34" charset="-128"/>
+              </a:endParaRPr>
+            </a:p>
+          </p:txBody>
+        </p:sp>
+        <p:sp>
+          <p:nvSpPr>
+            <p:cNvPr id="24" name="テキスト ボックス 23">
+              <a:extLst>
+                <a:ext uri="{FF2B5EF4-FFF2-40B4-BE49-F238E27FC236}">
+                  <a16:creationId xmlns:a16="http://schemas.microsoft.com/office/drawing/2014/main" id="{05B3398C-20BF-FE2E-4AB9-7E2A2134BB75}"/>
+                </a:ext>
+              </a:extLst>
+            </p:cNvPr>
+            <p:cNvSpPr txBox="1"/>
+            <p:nvPr/>
+          </p:nvSpPr>
+          <p:spPr>
+            <a:xfrm>
+              <a:off x="5796592" y="2753930"/>
+              <a:ext cx="446902" cy="461665"/>
+            </a:xfrm>
+            <a:prstGeom prst="rect">
+              <a:avLst/>
+            </a:prstGeom>
+            <a:noFill/>
+          </p:spPr>
+          <p:txBody>
+            <a:bodyPr wrap="square" rtlCol="0">
+              <a:spAutoFit/>
+            </a:bodyPr>
+            <a:lstStyle/>
+            <a:p>
+              <a:pPr algn="ctr"/>
+              <a:r>
+                <a:rPr kumimoji="1" lang="en-US" altLang="ja-JP" sz="2400" dirty="0">
+                  <a:solidFill>
+                    <a:srgbClr val="FF0000"/>
+                  </a:solidFill>
+                  <a:latin typeface="Hiragino Kaku Gothic StdN W8" panose="020B0800000000000000" pitchFamily="34" charset="-128"/>
+                  <a:ea typeface="Hiragino Kaku Gothic StdN W8" panose="020B0800000000000000" pitchFamily="34" charset="-128"/>
+                </a:rPr>
+                <a:t>m</a:t>
+              </a:r>
+              <a:endParaRPr kumimoji="1" lang="ja-JP" altLang="en-US" sz="2400">
+                <a:solidFill>
+                  <a:srgbClr val="FF0000"/>
+                </a:solidFill>
+                <a:latin typeface="Hiragino Kaku Gothic StdN W8" panose="020B0800000000000000" pitchFamily="34" charset="-128"/>
+                <a:ea typeface="Hiragino Kaku Gothic StdN W8" panose="020B0800000000000000" pitchFamily="34" charset="-128"/>
+              </a:endParaRPr>
+            </a:p>
+          </p:txBody>
+        </p:sp>
+        <p:sp>
+          <p:nvSpPr>
+            <p:cNvPr id="25" name="テキスト ボックス 24">
+              <a:extLst>
+                <a:ext uri="{FF2B5EF4-FFF2-40B4-BE49-F238E27FC236}">
+                  <a16:creationId xmlns:a16="http://schemas.microsoft.com/office/drawing/2014/main" id="{B5ED4EB3-4ED1-1CA5-7140-0964AB7F551A}"/>
+                </a:ext>
+              </a:extLst>
+            </p:cNvPr>
+            <p:cNvSpPr txBox="1"/>
+            <p:nvPr/>
+          </p:nvSpPr>
+          <p:spPr>
+            <a:xfrm>
+              <a:off x="6345209" y="3146425"/>
+              <a:ext cx="446902" cy="461665"/>
+            </a:xfrm>
+            <a:prstGeom prst="rect">
+              <a:avLst/>
+            </a:prstGeom>
+            <a:noFill/>
+          </p:spPr>
+          <p:txBody>
+            <a:bodyPr wrap="square" rtlCol="0">
+              <a:spAutoFit/>
+            </a:bodyPr>
+            <a:lstStyle/>
+            <a:p>
+              <a:pPr algn="ctr"/>
+              <a:r>
+                <a:rPr kumimoji="1" lang="en-US" altLang="ja-JP" sz="2400" dirty="0">
+                  <a:solidFill>
+                    <a:srgbClr val="FF0000"/>
+                  </a:solidFill>
+                  <a:latin typeface="Hiragino Kaku Gothic StdN W8" panose="020B0800000000000000" pitchFamily="34" charset="-128"/>
+                  <a:ea typeface="Hiragino Kaku Gothic StdN W8" panose="020B0800000000000000" pitchFamily="34" charset="-128"/>
+                </a:rPr>
+                <a:t>b</a:t>
+              </a:r>
+              <a:endParaRPr kumimoji="1" lang="ja-JP" altLang="en-US" sz="2400">
+                <a:solidFill>
+                  <a:srgbClr val="FF0000"/>
+                </a:solidFill>
+                <a:latin typeface="Hiragino Kaku Gothic StdN W8" panose="020B0800000000000000" pitchFamily="34" charset="-128"/>
+                <a:ea typeface="Hiragino Kaku Gothic StdN W8" panose="020B0800000000000000" pitchFamily="34" charset="-128"/>
+              </a:endParaRPr>
+            </a:p>
+          </p:txBody>
+        </p:sp>
+      </p:grpSp>
+    </p:spTree>
+    <p:extLst>
+      <p:ext uri="{BB962C8B-B14F-4D97-AF65-F5344CB8AC3E}">
+        <p14:creationId xmlns:p14="http://schemas.microsoft.com/office/powerpoint/2010/main" val="3606223597"/>
+      </p:ext>
+    </p:extLst>
+  </p:cSld>
+  <p:clrMapOvr>
+    <a:masterClrMapping/>
+  </p:clrMapOvr>
+</p:sld>
+</file>
+
+<file path=ppt/slides/slide13.xml><?xml version="1.0" encoding="utf-8"?>
+<p:sld xmlns:a="http://schemas.openxmlformats.org/drawingml/2006/main" xmlns:r="http://schemas.openxmlformats.org/officeDocument/2006/relationships" xmlns:p="http://schemas.openxmlformats.org/presentationml/2006/main">
+  <p:cSld>
+    <p:spTree>
+      <p:nvGrpSpPr>
+        <p:cNvPr id="1" name=""/>
+        <p:cNvGrpSpPr/>
+        <p:nvPr/>
+      </p:nvGrpSpPr>
+      <p:grpSpPr>
+        <a:xfrm>
+          <a:off x="0" y="0"/>
+          <a:ext cx="0" cy="0"/>
+          <a:chOff x="0" y="0"/>
+          <a:chExt cx="0" cy="0"/>
+        </a:xfrm>
+      </p:grpSpPr>
+      <p:grpSp>
+        <p:nvGrpSpPr>
+          <p:cNvPr id="22" name="グループ化 21">
+            <a:extLst>
+              <a:ext uri="{FF2B5EF4-FFF2-40B4-BE49-F238E27FC236}">
+                <a16:creationId xmlns:a16="http://schemas.microsoft.com/office/drawing/2014/main" id="{4579EB51-CF4C-9852-533B-A46400EAE4F6}"/>
+              </a:ext>
+            </a:extLst>
+          </p:cNvPr>
+          <p:cNvGrpSpPr/>
+          <p:nvPr/>
+        </p:nvGrpSpPr>
+        <p:grpSpPr>
+          <a:xfrm>
+            <a:off x="766152" y="390292"/>
+            <a:ext cx="9994775" cy="6304768"/>
+            <a:chOff x="766152" y="390292"/>
+            <a:chExt cx="9994775" cy="6304768"/>
+          </a:xfrm>
+        </p:grpSpPr>
+        <p:sp>
+          <p:nvSpPr>
+            <p:cNvPr id="3" name="フリーフォーム 2">
+              <a:extLst>
+                <a:ext uri="{FF2B5EF4-FFF2-40B4-BE49-F238E27FC236}">
+                  <a16:creationId xmlns:a16="http://schemas.microsoft.com/office/drawing/2014/main" id="{60C23382-3A9A-C94D-36A6-6F65D4B4BC82}"/>
+                </a:ext>
+              </a:extLst>
+            </p:cNvPr>
+            <p:cNvSpPr/>
+            <p:nvPr/>
+          </p:nvSpPr>
+          <p:spPr>
+            <a:xfrm>
+              <a:off x="5430308" y="2201557"/>
+              <a:ext cx="1100884" cy="2120735"/>
+            </a:xfrm>
+            <a:custGeom>
+              <a:avLst/>
+              <a:gdLst>
+                <a:gd name="csX0" fmla="*/ 1078073 w 1100884"/>
+                <a:gd name="csY0" fmla="*/ 0 h 2120735"/>
+                <a:gd name="csX1" fmla="*/ 1090093 w 1100884"/>
+                <a:gd name="csY1" fmla="*/ 78763 h 2120735"/>
+                <a:gd name="csX2" fmla="*/ 1100884 w 1100884"/>
+                <a:gd name="csY2" fmla="*/ 292465 h 2120735"/>
+                <a:gd name="csX3" fmla="*/ 179372 w 1100884"/>
+                <a:gd name="csY3" fmla="*/ 2025622 h 2120735"/>
+                <a:gd name="csX4" fmla="*/ 22812 w 1100884"/>
+                <a:gd name="csY4" fmla="*/ 2120735 h 2120735"/>
+                <a:gd name="csX5" fmla="*/ 10791 w 1100884"/>
+                <a:gd name="csY5" fmla="*/ 2041971 h 2120735"/>
+                <a:gd name="csX6" fmla="*/ 0 w 1100884"/>
+                <a:gd name="csY6" fmla="*/ 1828269 h 2120735"/>
+                <a:gd name="csX7" fmla="*/ 921513 w 1100884"/>
+                <a:gd name="csY7" fmla="*/ 95112 h 2120735"/>
+              </a:gdLst>
+              <a:ahLst/>
+              <a:cxnLst>
+                <a:cxn ang="0">
+                  <a:pos x="csX0" y="csY0"/>
+                </a:cxn>
+                <a:cxn ang="0">
+                  <a:pos x="csX1" y="csY1"/>
+                </a:cxn>
+                <a:cxn ang="0">
+                  <a:pos x="csX2" y="csY2"/>
+                </a:cxn>
+                <a:cxn ang="0">
+                  <a:pos x="csX3" y="csY3"/>
+                </a:cxn>
+                <a:cxn ang="0">
+                  <a:pos x="csX4" y="csY4"/>
+                </a:cxn>
+                <a:cxn ang="0">
+                  <a:pos x="csX5" y="csY5"/>
+                </a:cxn>
+                <a:cxn ang="0">
+                  <a:pos x="csX6" y="csY6"/>
+                </a:cxn>
+                <a:cxn ang="0">
+                  <a:pos x="csX7" y="csY7"/>
+                </a:cxn>
+              </a:cxnLst>
+              <a:rect l="l" t="t" r="r" b="b"/>
+              <a:pathLst>
+                <a:path w="1100884" h="2120735">
+                  <a:moveTo>
+                    <a:pt x="1078073" y="0"/>
+                  </a:moveTo>
+                  <a:lnTo>
+                    <a:pt x="1090093" y="78763"/>
+                  </a:lnTo>
+                  <a:cubicBezTo>
+                    <a:pt x="1097229" y="149027"/>
+                    <a:pt x="1100884" y="220319"/>
+                    <a:pt x="1100884" y="292465"/>
+                  </a:cubicBezTo>
+                  <a:cubicBezTo>
+                    <a:pt x="1100884" y="1013927"/>
+                    <a:pt x="735346" y="1650013"/>
+                    <a:pt x="179372" y="2025622"/>
+                  </a:cubicBezTo>
+                  <a:lnTo>
+                    <a:pt x="22812" y="2120735"/>
+                  </a:lnTo>
+                  <a:lnTo>
+                    <a:pt x="10791" y="2041971"/>
+                  </a:lnTo>
+                  <a:cubicBezTo>
+                    <a:pt x="3656" y="1971708"/>
+                    <a:pt x="0" y="1900415"/>
+                    <a:pt x="0" y="1828269"/>
+                  </a:cubicBezTo>
+                  <a:cubicBezTo>
+                    <a:pt x="0" y="1106807"/>
+                    <a:pt x="365538" y="470721"/>
+                    <a:pt x="921513" y="95112"/>
+                  </a:cubicBezTo>
+                  <a:close/>
+                </a:path>
+              </a:pathLst>
+            </a:custGeom>
+            <a:solidFill>
+              <a:srgbClr val="FF0000">
+                <a:alpha val="45999"/>
+              </a:srgbClr>
+            </a:solidFill>
+            <a:ln w="19050">
+              <a:noFill/>
+            </a:ln>
+          </p:spPr>
+          <p:style>
+            <a:lnRef idx="2">
+              <a:schemeClr val="accent1">
+                <a:shade val="15000"/>
+              </a:schemeClr>
+            </a:lnRef>
+            <a:fillRef idx="1">
+              <a:schemeClr val="accent1"/>
+            </a:fillRef>
+            <a:effectRef idx="0">
+              <a:schemeClr val="accent1"/>
+            </a:effectRef>
+            <a:fontRef idx="minor">
+              <a:schemeClr val="lt1"/>
+            </a:fontRef>
+          </p:style>
+          <p:txBody>
+            <a:bodyPr wrap="square" rtlCol="0" anchor="ctr">
+              <a:noAutofit/>
+            </a:bodyPr>
+            <a:lstStyle/>
+            <a:p>
+              <a:pPr algn="ctr"/>
+              <a:endParaRPr kumimoji="1" lang="ja-JP" altLang="en-US"/>
+            </a:p>
+          </p:txBody>
+        </p:sp>
+        <p:cxnSp>
+          <p:nvCxnSpPr>
+            <p:cNvPr id="4" name="直線矢印コネクタ 3">
+              <a:extLst>
+                <a:ext uri="{FF2B5EF4-FFF2-40B4-BE49-F238E27FC236}">
+                  <a16:creationId xmlns:a16="http://schemas.microsoft.com/office/drawing/2014/main" id="{848D91C4-7FA1-137C-4D21-DC6C1818F510}"/>
+                </a:ext>
+              </a:extLst>
+            </p:cNvPr>
+            <p:cNvCxnSpPr>
+              <a:cxnSpLocks/>
+            </p:cNvCxnSpPr>
+            <p:nvPr/>
+          </p:nvCxnSpPr>
+          <p:spPr>
+            <a:xfrm>
+              <a:off x="1320150" y="6216979"/>
+              <a:ext cx="9440777" cy="0"/>
+            </a:xfrm>
+            <a:prstGeom prst="straightConnector1">
+              <a:avLst/>
+            </a:prstGeom>
+            <a:ln w="28575">
+              <a:solidFill>
+                <a:schemeClr val="tx1"/>
+              </a:solidFill>
+              <a:tailEnd type="triangle"/>
+            </a:ln>
+          </p:spPr>
+          <p:style>
+            <a:lnRef idx="1">
+              <a:schemeClr val="accent1"/>
+            </a:lnRef>
+            <a:fillRef idx="0">
+              <a:schemeClr val="accent1"/>
+            </a:fillRef>
+            <a:effectRef idx="0">
+              <a:schemeClr val="accent1"/>
+            </a:effectRef>
+            <a:fontRef idx="minor">
+              <a:schemeClr val="tx1"/>
+            </a:fontRef>
+          </p:style>
+        </p:cxnSp>
+        <p:cxnSp>
+          <p:nvCxnSpPr>
+            <p:cNvPr id="5" name="直線矢印コネクタ 4">
+              <a:extLst>
+                <a:ext uri="{FF2B5EF4-FFF2-40B4-BE49-F238E27FC236}">
+                  <a16:creationId xmlns:a16="http://schemas.microsoft.com/office/drawing/2014/main" id="{34DF99BE-70BA-935E-2AF2-9233FA8E348F}"/>
+                </a:ext>
+              </a:extLst>
+            </p:cNvPr>
+            <p:cNvCxnSpPr>
+              <a:cxnSpLocks/>
+            </p:cNvCxnSpPr>
+            <p:nvPr/>
+          </p:nvCxnSpPr>
+          <p:spPr>
+            <a:xfrm flipV="1">
+              <a:off x="1320150" y="390293"/>
+              <a:ext cx="0" cy="5826686"/>
+            </a:xfrm>
+            <a:prstGeom prst="straightConnector1">
+              <a:avLst/>
+            </a:prstGeom>
+            <a:ln w="28575">
+              <a:solidFill>
+                <a:schemeClr val="tx1"/>
+              </a:solidFill>
+              <a:tailEnd type="triangle"/>
+            </a:ln>
+          </p:spPr>
+          <p:style>
+            <a:lnRef idx="1">
+              <a:schemeClr val="accent1"/>
+            </a:lnRef>
+            <a:fillRef idx="0">
+              <a:schemeClr val="accent1"/>
+            </a:fillRef>
+            <a:effectRef idx="0">
+              <a:schemeClr val="accent1"/>
+            </a:effectRef>
+            <a:fontRef idx="minor">
+              <a:schemeClr val="tx1"/>
+            </a:fontRef>
+          </p:style>
+        </p:cxnSp>
+        <p:sp>
+          <p:nvSpPr>
+            <p:cNvPr id="6" name="テキスト ボックス 5">
+              <a:extLst>
+                <a:ext uri="{FF2B5EF4-FFF2-40B4-BE49-F238E27FC236}">
+                  <a16:creationId xmlns:a16="http://schemas.microsoft.com/office/drawing/2014/main" id="{77920265-C9C5-ED05-2D2A-6DC928FCE3DC}"/>
+                </a:ext>
+              </a:extLst>
+            </p:cNvPr>
+            <p:cNvSpPr txBox="1"/>
+            <p:nvPr/>
+          </p:nvSpPr>
+          <p:spPr>
+            <a:xfrm>
+              <a:off x="9248061" y="6233395"/>
+              <a:ext cx="1512866" cy="461665"/>
+            </a:xfrm>
+            <a:prstGeom prst="rect">
+              <a:avLst/>
+            </a:prstGeom>
+            <a:noFill/>
+          </p:spPr>
+          <p:txBody>
+            <a:bodyPr wrap="square" rtlCol="0">
+              <a:spAutoFit/>
+            </a:bodyPr>
+            <a:lstStyle/>
+            <a:p>
+              <a:pPr algn="ctr"/>
+              <a:r>
+                <a:rPr kumimoji="1" lang="ja-JP" altLang="en-US" sz="2400">
+                  <a:latin typeface="Hiragino Kaku Gothic StdN W8" panose="020B0800000000000000" pitchFamily="34" charset="-128"/>
+                  <a:ea typeface="Hiragino Kaku Gothic StdN W8" panose="020B0800000000000000" pitchFamily="34" charset="-128"/>
+                </a:rPr>
+                <a:t>車関税率</a:t>
+              </a:r>
+            </a:p>
+          </p:txBody>
+        </p:sp>
+        <p:sp>
+          <p:nvSpPr>
+            <p:cNvPr id="7" name="テキスト ボックス 6">
+              <a:extLst>
+                <a:ext uri="{FF2B5EF4-FFF2-40B4-BE49-F238E27FC236}">
+                  <a16:creationId xmlns:a16="http://schemas.microsoft.com/office/drawing/2014/main" id="{8A61F1EE-CBAF-D1B1-4E89-E094DDE6CFEB}"/>
+                </a:ext>
+              </a:extLst>
+            </p:cNvPr>
+            <p:cNvSpPr txBox="1"/>
+            <p:nvPr/>
+          </p:nvSpPr>
+          <p:spPr>
+            <a:xfrm>
+              <a:off x="766152" y="390292"/>
+              <a:ext cx="553998" cy="1323439"/>
+            </a:xfrm>
+            <a:prstGeom prst="rect">
+              <a:avLst/>
+            </a:prstGeom>
+            <a:noFill/>
+          </p:spPr>
+          <p:txBody>
+            <a:bodyPr vert="eaVert" wrap="none" rtlCol="0">
+              <a:spAutoFit/>
+            </a:bodyPr>
+            <a:lstStyle/>
+            <a:p>
+              <a:r>
+                <a:rPr kumimoji="1" lang="ja-JP" altLang="en-US" sz="2400">
+                  <a:latin typeface="Hiragino Kaku Gothic StdN W8" panose="020B0800000000000000" pitchFamily="34" charset="-128"/>
+                  <a:ea typeface="Hiragino Kaku Gothic StdN W8" panose="020B0800000000000000" pitchFamily="34" charset="-128"/>
+                </a:rPr>
+                <a:t>肉関税率</a:t>
+              </a:r>
+            </a:p>
+          </p:txBody>
+        </p:sp>
+        <p:sp>
+          <p:nvSpPr>
+            <p:cNvPr id="8" name="円/楕円 7">
+              <a:extLst>
+                <a:ext uri="{FF2B5EF4-FFF2-40B4-BE49-F238E27FC236}">
+                  <a16:creationId xmlns:a16="http://schemas.microsoft.com/office/drawing/2014/main" id="{112E332B-430F-3325-A388-08B00B29E357}"/>
+                </a:ext>
+              </a:extLst>
+            </p:cNvPr>
+            <p:cNvSpPr/>
+            <p:nvPr/>
+          </p:nvSpPr>
+          <p:spPr>
+            <a:xfrm>
+              <a:off x="4369695" y="2364273"/>
+              <a:ext cx="186550" cy="186550"/>
+            </a:xfrm>
+            <a:prstGeom prst="ellipse">
+              <a:avLst/>
+            </a:prstGeom>
+            <a:solidFill>
+              <a:schemeClr val="tx1"/>
+            </a:solidFill>
+            <a:ln>
+              <a:noFill/>
+            </a:ln>
+          </p:spPr>
+          <p:style>
+            <a:lnRef idx="2">
+              <a:schemeClr val="accent1">
+                <a:shade val="50000"/>
+              </a:schemeClr>
+            </a:lnRef>
+            <a:fillRef idx="1">
+              <a:schemeClr val="accent1"/>
+            </a:fillRef>
+            <a:effectRef idx="0">
+              <a:schemeClr val="accent1"/>
+            </a:effectRef>
+            <a:fontRef idx="minor">
+              <a:schemeClr val="lt1"/>
+            </a:fontRef>
+          </p:style>
+          <p:txBody>
+            <a:bodyPr rtlCol="0" anchor="ctr"/>
+            <a:lstStyle/>
+            <a:p>
+              <a:pPr algn="ctr"/>
+              <a:endParaRPr kumimoji="1" lang="ja-JP" altLang="en-US"/>
+            </a:p>
+          </p:txBody>
+        </p:sp>
+        <p:sp>
+          <p:nvSpPr>
+            <p:cNvPr id="9" name="テキスト ボックス 8">
+              <a:extLst>
+                <a:ext uri="{FF2B5EF4-FFF2-40B4-BE49-F238E27FC236}">
+                  <a16:creationId xmlns:a16="http://schemas.microsoft.com/office/drawing/2014/main" id="{C6652CB4-0252-58C0-B104-3A9AC7C7E6C2}"/>
+                </a:ext>
+              </a:extLst>
+            </p:cNvPr>
+            <p:cNvSpPr txBox="1"/>
+            <p:nvPr/>
+          </p:nvSpPr>
+          <p:spPr>
+            <a:xfrm>
+              <a:off x="3915337" y="2558199"/>
+              <a:ext cx="1024577" cy="461665"/>
+            </a:xfrm>
+            <a:prstGeom prst="rect">
+              <a:avLst/>
+            </a:prstGeom>
+            <a:noFill/>
+          </p:spPr>
+          <p:txBody>
+            <a:bodyPr wrap="square" rtlCol="0">
+              <a:spAutoFit/>
+            </a:bodyPr>
+            <a:lstStyle/>
+            <a:p>
+              <a:pPr algn="ctr"/>
+              <a:r>
+                <a:rPr kumimoji="1" lang="ja-JP" altLang="en-US" sz="2400">
+                  <a:latin typeface="Hiragino Kaku Gothic StdN W8" panose="020B0800000000000000" pitchFamily="34" charset="-128"/>
+                  <a:ea typeface="Hiragino Kaku Gothic StdN W8" panose="020B0800000000000000" pitchFamily="34" charset="-128"/>
+                </a:rPr>
+                <a:t>日本</a:t>
+              </a:r>
+            </a:p>
+          </p:txBody>
+        </p:sp>
+        <p:sp>
+          <p:nvSpPr>
+            <p:cNvPr id="10" name="円/楕円 9">
+              <a:extLst>
+                <a:ext uri="{FF2B5EF4-FFF2-40B4-BE49-F238E27FC236}">
+                  <a16:creationId xmlns:a16="http://schemas.microsoft.com/office/drawing/2014/main" id="{921E4656-C970-3B94-2695-CF54D31C2EBA}"/>
+                </a:ext>
+              </a:extLst>
+            </p:cNvPr>
+            <p:cNvSpPr/>
+            <p:nvPr/>
+          </p:nvSpPr>
+          <p:spPr>
+            <a:xfrm>
+              <a:off x="2354479" y="390292"/>
+              <a:ext cx="4180231" cy="4180231"/>
+            </a:xfrm>
+            <a:prstGeom prst="ellipse">
+              <a:avLst/>
+            </a:prstGeom>
+            <a:noFill/>
+            <a:ln w="19050">
+              <a:solidFill>
+                <a:schemeClr val="tx1"/>
+              </a:solidFill>
+            </a:ln>
+          </p:spPr>
+          <p:style>
+            <a:lnRef idx="2">
+              <a:schemeClr val="accent1">
+                <a:shade val="15000"/>
+              </a:schemeClr>
+            </a:lnRef>
+            <a:fillRef idx="1">
+              <a:schemeClr val="accent1"/>
+            </a:fillRef>
+            <a:effectRef idx="0">
+              <a:schemeClr val="accent1"/>
+            </a:effectRef>
+            <a:fontRef idx="minor">
+              <a:schemeClr val="lt1"/>
+            </a:fontRef>
+          </p:style>
+          <p:txBody>
+            <a:bodyPr rtlCol="0" anchor="ctr"/>
+            <a:lstStyle/>
+            <a:p>
+              <a:pPr algn="ctr"/>
+              <a:endParaRPr kumimoji="1" lang="ja-JP" altLang="en-US"/>
+            </a:p>
+          </p:txBody>
+        </p:sp>
+        <p:sp>
+          <p:nvSpPr>
+            <p:cNvPr id="11" name="テキスト ボックス 10">
+              <a:extLst>
+                <a:ext uri="{FF2B5EF4-FFF2-40B4-BE49-F238E27FC236}">
+                  <a16:creationId xmlns:a16="http://schemas.microsoft.com/office/drawing/2014/main" id="{BBE65FD7-B9F6-33A7-E288-E23ECDB64AB6}"/>
+                </a:ext>
+              </a:extLst>
+            </p:cNvPr>
+            <p:cNvSpPr txBox="1"/>
+            <p:nvPr/>
+          </p:nvSpPr>
+          <p:spPr>
+            <a:xfrm>
+              <a:off x="6996337" y="4091460"/>
+              <a:ext cx="1024577" cy="461665"/>
+            </a:xfrm>
+            <a:prstGeom prst="rect">
+              <a:avLst/>
+            </a:prstGeom>
+            <a:noFill/>
+          </p:spPr>
+          <p:txBody>
+            <a:bodyPr wrap="square" rtlCol="0">
+              <a:spAutoFit/>
+            </a:bodyPr>
+            <a:lstStyle/>
+            <a:p>
+              <a:r>
+                <a:rPr kumimoji="1" lang="ja-JP" altLang="en-US" sz="2400">
+                  <a:latin typeface="Hiragino Kaku Gothic StdN W8" panose="020B0800000000000000" pitchFamily="34" charset="-128"/>
+                  <a:ea typeface="Hiragino Kaku Gothic StdN W8" panose="020B0800000000000000" pitchFamily="34" charset="-128"/>
+                </a:rPr>
+                <a:t>米国</a:t>
+              </a:r>
+            </a:p>
+          </p:txBody>
+        </p:sp>
+        <p:sp>
+          <p:nvSpPr>
+            <p:cNvPr id="12" name="円/楕円 11">
+              <a:extLst>
+                <a:ext uri="{FF2B5EF4-FFF2-40B4-BE49-F238E27FC236}">
+                  <a16:creationId xmlns:a16="http://schemas.microsoft.com/office/drawing/2014/main" id="{D9245954-F094-FC5D-A5BE-3268980E97D7}"/>
+                </a:ext>
+              </a:extLst>
+            </p:cNvPr>
+            <p:cNvSpPr/>
+            <p:nvPr/>
+          </p:nvSpPr>
+          <p:spPr>
+            <a:xfrm>
+              <a:off x="7450695" y="3920436"/>
+              <a:ext cx="186550" cy="186550"/>
+            </a:xfrm>
+            <a:prstGeom prst="ellipse">
+              <a:avLst/>
+            </a:prstGeom>
+            <a:solidFill>
+              <a:schemeClr val="tx1"/>
+            </a:solidFill>
+            <a:ln>
+              <a:noFill/>
+            </a:ln>
+          </p:spPr>
+          <p:style>
+            <a:lnRef idx="2">
+              <a:schemeClr val="accent1">
+                <a:shade val="50000"/>
+              </a:schemeClr>
+            </a:lnRef>
+            <a:fillRef idx="1">
+              <a:schemeClr val="accent1"/>
+            </a:fillRef>
+            <a:effectRef idx="0">
+              <a:schemeClr val="accent1"/>
+            </a:effectRef>
+            <a:fontRef idx="minor">
+              <a:schemeClr val="lt1"/>
+            </a:fontRef>
+          </p:style>
+          <p:txBody>
+            <a:bodyPr rtlCol="0" anchor="ctr"/>
+            <a:lstStyle/>
+            <a:p>
+              <a:pPr algn="ctr"/>
+              <a:endParaRPr kumimoji="1" lang="ja-JP" altLang="en-US"/>
+            </a:p>
+          </p:txBody>
+        </p:sp>
+        <p:sp>
+          <p:nvSpPr>
+            <p:cNvPr id="13" name="円/楕円 12">
+              <a:extLst>
+                <a:ext uri="{FF2B5EF4-FFF2-40B4-BE49-F238E27FC236}">
+                  <a16:creationId xmlns:a16="http://schemas.microsoft.com/office/drawing/2014/main" id="{F5B11BCA-1BC2-A618-0AB4-064D724FE5EC}"/>
+                </a:ext>
+              </a:extLst>
+            </p:cNvPr>
+            <p:cNvSpPr/>
+            <p:nvPr/>
+          </p:nvSpPr>
+          <p:spPr>
+            <a:xfrm>
+              <a:off x="5433827" y="1926096"/>
+              <a:ext cx="4180231" cy="4180231"/>
+            </a:xfrm>
+            <a:prstGeom prst="ellipse">
+              <a:avLst/>
+            </a:prstGeom>
+            <a:noFill/>
+            <a:ln w="19050">
+              <a:solidFill>
+                <a:schemeClr val="tx1"/>
+              </a:solidFill>
+            </a:ln>
+          </p:spPr>
+          <p:style>
+            <a:lnRef idx="2">
+              <a:schemeClr val="accent1">
+                <a:shade val="15000"/>
+              </a:schemeClr>
+            </a:lnRef>
+            <a:fillRef idx="1">
+              <a:schemeClr val="accent1"/>
+            </a:fillRef>
+            <a:effectRef idx="0">
+              <a:schemeClr val="accent1"/>
+            </a:effectRef>
+            <a:fontRef idx="minor">
+              <a:schemeClr val="lt1"/>
+            </a:fontRef>
+          </p:style>
+          <p:txBody>
+            <a:bodyPr rtlCol="0" anchor="ctr"/>
+            <a:lstStyle/>
+            <a:p>
+              <a:pPr algn="ctr"/>
+              <a:endParaRPr kumimoji="1" lang="ja-JP" altLang="en-US"/>
+            </a:p>
+          </p:txBody>
+        </p:sp>
+        <p:grpSp>
+          <p:nvGrpSpPr>
+            <p:cNvPr id="14" name="グループ化 13">
+              <a:extLst>
+                <a:ext uri="{FF2B5EF4-FFF2-40B4-BE49-F238E27FC236}">
+                  <a16:creationId xmlns:a16="http://schemas.microsoft.com/office/drawing/2014/main" id="{3D83866B-1418-93EA-D88E-CC4B72335825}"/>
+                </a:ext>
+              </a:extLst>
+            </p:cNvPr>
+            <p:cNvGrpSpPr/>
+            <p:nvPr/>
+          </p:nvGrpSpPr>
+          <p:grpSpPr>
+            <a:xfrm>
+              <a:off x="6270771" y="1711020"/>
+              <a:ext cx="1024577" cy="555608"/>
+              <a:chOff x="6270771" y="1711020"/>
+              <a:chExt cx="1024577" cy="555608"/>
+            </a:xfrm>
+          </p:grpSpPr>
+          <p:sp>
+            <p:nvSpPr>
+              <p:cNvPr id="19" name="テキスト ボックス 18">
+                <a:extLst>
+                  <a:ext uri="{FF2B5EF4-FFF2-40B4-BE49-F238E27FC236}">
+                    <a16:creationId xmlns:a16="http://schemas.microsoft.com/office/drawing/2014/main" id="{4BC8E6CE-59B7-D196-7E4D-3F45727A9E85}"/>
+                  </a:ext>
+                </a:extLst>
+              </p:cNvPr>
+              <p:cNvSpPr txBox="1"/>
+              <p:nvPr/>
+            </p:nvSpPr>
+            <p:spPr>
+              <a:xfrm>
+                <a:off x="6270771" y="1711020"/>
+                <a:ext cx="1024577" cy="461665"/>
+              </a:xfrm>
+              <a:prstGeom prst="rect">
+                <a:avLst/>
+              </a:prstGeom>
+              <a:noFill/>
+            </p:spPr>
+            <p:txBody>
+              <a:bodyPr wrap="square" rtlCol="0">
+                <a:spAutoFit/>
+              </a:bodyPr>
+              <a:lstStyle/>
+              <a:p>
+                <a:r>
+                  <a:rPr kumimoji="1" lang="ja-JP" altLang="en-US" sz="2400">
+                    <a:latin typeface="Hiragino Kaku Gothic StdN W8" panose="020B0800000000000000" pitchFamily="34" charset="-128"/>
+                    <a:ea typeface="Hiragino Kaku Gothic StdN W8" panose="020B0800000000000000" pitchFamily="34" charset="-128"/>
+                  </a:rPr>
+                  <a:t>現状</a:t>
+                </a:r>
+              </a:p>
+            </p:txBody>
+          </p:sp>
+          <p:sp>
+            <p:nvSpPr>
+              <p:cNvPr id="20" name="円/楕円 19">
+                <a:extLst>
+                  <a:ext uri="{FF2B5EF4-FFF2-40B4-BE49-F238E27FC236}">
+                    <a16:creationId xmlns:a16="http://schemas.microsoft.com/office/drawing/2014/main" id="{0CA3205C-C655-7C64-9994-600CD4FDE626}"/>
+                  </a:ext>
+                </a:extLst>
+              </p:cNvPr>
+              <p:cNvSpPr/>
+              <p:nvPr/>
+            </p:nvSpPr>
+            <p:spPr>
+              <a:xfrm>
+                <a:off x="6419541" y="2080078"/>
+                <a:ext cx="186550" cy="186550"/>
+              </a:xfrm>
+              <a:prstGeom prst="ellipse">
+                <a:avLst/>
+              </a:prstGeom>
+              <a:solidFill>
+                <a:schemeClr val="tx1"/>
+              </a:solidFill>
+              <a:ln>
+                <a:noFill/>
+              </a:ln>
+            </p:spPr>
+            <p:style>
+              <a:lnRef idx="2">
+                <a:schemeClr val="accent1">
+                  <a:shade val="50000"/>
+                </a:schemeClr>
+              </a:lnRef>
+              <a:fillRef idx="1">
+                <a:schemeClr val="accent1"/>
+              </a:fillRef>
+              <a:effectRef idx="0">
+                <a:schemeClr val="accent1"/>
+              </a:effectRef>
+              <a:fontRef idx="minor">
+                <a:schemeClr val="lt1"/>
+              </a:fontRef>
+            </p:style>
+            <p:txBody>
+              <a:bodyPr rtlCol="0" anchor="ctr"/>
+              <a:lstStyle/>
+              <a:p>
+                <a:pPr algn="ctr"/>
+                <a:endParaRPr kumimoji="1" lang="ja-JP" altLang="en-US"/>
+              </a:p>
+            </p:txBody>
+          </p:sp>
+        </p:grpSp>
+        <p:cxnSp>
+          <p:nvCxnSpPr>
+            <p:cNvPr id="15" name="直線矢印コネクタ 14">
+              <a:extLst>
+                <a:ext uri="{FF2B5EF4-FFF2-40B4-BE49-F238E27FC236}">
+                  <a16:creationId xmlns:a16="http://schemas.microsoft.com/office/drawing/2014/main" id="{E6373A83-A4F1-7D6D-085C-4EDDF5046AB1}"/>
+                </a:ext>
+              </a:extLst>
+            </p:cNvPr>
+            <p:cNvCxnSpPr>
+              <a:cxnSpLocks/>
+              <a:stCxn id="16" idx="0"/>
+            </p:cNvCxnSpPr>
+            <p:nvPr/>
+          </p:nvCxnSpPr>
+          <p:spPr>
+            <a:xfrm flipV="1">
+              <a:off x="4158241" y="3279228"/>
+              <a:ext cx="1801125" cy="1465108"/>
+            </a:xfrm>
+            <a:prstGeom prst="straightConnector1">
+              <a:avLst/>
+            </a:prstGeom>
+            <a:ln w="57150">
+              <a:solidFill>
+                <a:schemeClr val="tx1"/>
+              </a:solidFill>
+              <a:tailEnd type="triangle"/>
+            </a:ln>
+          </p:spPr>
+          <p:style>
+            <a:lnRef idx="1">
+              <a:schemeClr val="accent1"/>
+            </a:lnRef>
+            <a:fillRef idx="0">
+              <a:schemeClr val="accent1"/>
+            </a:fillRef>
+            <a:effectRef idx="0">
+              <a:schemeClr val="accent1"/>
+            </a:effectRef>
+            <a:fontRef idx="minor">
+              <a:schemeClr val="tx1"/>
+            </a:fontRef>
+          </p:style>
+        </p:cxnSp>
+        <p:sp>
+          <p:nvSpPr>
+            <p:cNvPr id="16" name="テキスト ボックス 15">
+              <a:extLst>
+                <a:ext uri="{FF2B5EF4-FFF2-40B4-BE49-F238E27FC236}">
+                  <a16:creationId xmlns:a16="http://schemas.microsoft.com/office/drawing/2014/main" id="{81F050CE-C6CC-474C-0231-7E2AADB485B8}"/>
+                </a:ext>
+              </a:extLst>
+            </p:cNvPr>
+            <p:cNvSpPr txBox="1"/>
+            <p:nvPr/>
+          </p:nvSpPr>
+          <p:spPr>
+            <a:xfrm>
+              <a:off x="1320149" y="4744336"/>
+              <a:ext cx="5676184" cy="1200329"/>
+            </a:xfrm>
+            <a:prstGeom prst="rect">
+              <a:avLst/>
+            </a:prstGeom>
+            <a:solidFill>
+              <a:schemeClr val="bg1"/>
+            </a:solidFill>
+            <a:ln>
+              <a:solidFill>
+                <a:schemeClr val="tx1"/>
+              </a:solidFill>
+            </a:ln>
+          </p:spPr>
+          <p:txBody>
+            <a:bodyPr wrap="square" rtlCol="0">
+              <a:spAutoFit/>
+            </a:bodyPr>
+            <a:lstStyle/>
+            <a:p>
+              <a:r>
+                <a:rPr kumimoji="1" lang="ja-JP" altLang="en-US" sz="2400" b="1">
+                  <a:latin typeface="Hiragino Sans W4" panose="020B0400000000000000" pitchFamily="34" charset="-128"/>
+                  <a:ea typeface="Hiragino Sans W4" panose="020B0400000000000000" pitchFamily="34" charset="-128"/>
+                </a:rPr>
+                <a:t>契約曲線</a:t>
+              </a:r>
+              <a:r>
+                <a:rPr kumimoji="1" lang="ja-JP" altLang="en-US" sz="2400">
+                  <a:latin typeface="Hiragino Sans W4" panose="020B0400000000000000" pitchFamily="34" charset="-128"/>
+                  <a:ea typeface="Hiragino Sans W4" panose="020B0400000000000000" pitchFamily="34" charset="-128"/>
+                </a:rPr>
+                <a:t>（</a:t>
+              </a:r>
+              <a:r>
+                <a:rPr kumimoji="1" lang="en-US" altLang="ja-JP" sz="2400" dirty="0">
+                  <a:latin typeface="Hiragino Sans W4" panose="020B0400000000000000" pitchFamily="34" charset="-128"/>
+                  <a:ea typeface="Hiragino Sans W4" panose="020B0400000000000000" pitchFamily="34" charset="-128"/>
+                </a:rPr>
+                <a:t>contract curve</a:t>
+              </a:r>
+              <a:r>
+                <a:rPr kumimoji="1" lang="ja-JP" altLang="en-US" sz="2400">
+                  <a:latin typeface="Hiragino Sans W4" panose="020B0400000000000000" pitchFamily="34" charset="-128"/>
+                  <a:ea typeface="Hiragino Sans W4" panose="020B0400000000000000" pitchFamily="34" charset="-128"/>
+                </a:rPr>
+                <a:t>）</a:t>
+              </a:r>
+              <a:endParaRPr kumimoji="1" lang="en-US" altLang="ja-JP" sz="2400" dirty="0">
+                <a:latin typeface="Hiragino Sans W4" panose="020B0400000000000000" pitchFamily="34" charset="-128"/>
+                <a:ea typeface="Hiragino Sans W4" panose="020B0400000000000000" pitchFamily="34" charset="-128"/>
+              </a:endParaRPr>
+            </a:p>
+            <a:p>
+              <a:r>
+                <a:rPr kumimoji="1" lang="ja-JP" altLang="en-US" sz="2400">
+                  <a:latin typeface="Hiragino Sans W4" panose="020B0400000000000000" pitchFamily="34" charset="-128"/>
+                  <a:ea typeface="Hiragino Sans W4" panose="020B0400000000000000" pitchFamily="34" charset="-128"/>
+                </a:rPr>
+                <a:t>＝片方の得か片方の損になる状況の集合</a:t>
+              </a:r>
+              <a:br>
+                <a:rPr kumimoji="1" lang="en-US" altLang="ja-JP" sz="2400" dirty="0">
+                  <a:latin typeface="Hiragino Sans W4" panose="020B0400000000000000" pitchFamily="34" charset="-128"/>
+                  <a:ea typeface="Hiragino Sans W4" panose="020B0400000000000000" pitchFamily="34" charset="-128"/>
+                </a:rPr>
+              </a:br>
+              <a:r>
+                <a:rPr kumimoji="1" lang="ja-JP" altLang="en-US" sz="2400">
+                  <a:latin typeface="Hiragino Sans W4" panose="020B0400000000000000" pitchFamily="34" charset="-128"/>
+                  <a:ea typeface="Hiragino Sans W4" panose="020B0400000000000000" pitchFamily="34" charset="-128"/>
+                </a:rPr>
+                <a:t>（→</a:t>
+              </a:r>
+              <a:r>
+                <a:rPr kumimoji="1" lang="ja-JP" altLang="en-US" sz="2400" b="1">
+                  <a:latin typeface="Hiragino Sans W4" panose="020B0400000000000000" pitchFamily="34" charset="-128"/>
+                  <a:ea typeface="Hiragino Sans W4" panose="020B0400000000000000" pitchFamily="34" charset="-128"/>
+                </a:rPr>
+                <a:t>パレート最適</a:t>
+              </a:r>
+              <a:r>
+                <a:rPr kumimoji="1" lang="ja-JP" altLang="en-US" sz="2400">
+                  <a:latin typeface="Hiragino Sans W4" panose="020B0400000000000000" pitchFamily="34" charset="-128"/>
+                  <a:ea typeface="Hiragino Sans W4" panose="020B0400000000000000" pitchFamily="34" charset="-128"/>
+                </a:rPr>
+                <a:t>な状態）</a:t>
+              </a:r>
+              <a:endParaRPr kumimoji="1" lang="en-US" altLang="ja-JP" sz="2400" dirty="0">
+                <a:latin typeface="Hiragino Sans W4" panose="020B0400000000000000" pitchFamily="34" charset="-128"/>
+                <a:ea typeface="Hiragino Sans W4" panose="020B0400000000000000" pitchFamily="34" charset="-128"/>
+              </a:endParaRPr>
+            </a:p>
+          </p:txBody>
+        </p:sp>
+        <p:cxnSp>
+          <p:nvCxnSpPr>
+            <p:cNvPr id="17" name="直線コネクタ 16">
+              <a:extLst>
+                <a:ext uri="{FF2B5EF4-FFF2-40B4-BE49-F238E27FC236}">
+                  <a16:creationId xmlns:a16="http://schemas.microsoft.com/office/drawing/2014/main" id="{D6AAE2C2-114D-4A51-A8F5-26C3F6DB1438}"/>
+                </a:ext>
+              </a:extLst>
+            </p:cNvPr>
+            <p:cNvCxnSpPr>
+              <a:cxnSpLocks/>
+              <a:stCxn id="8" idx="6"/>
+              <a:endCxn id="12" idx="2"/>
+            </p:cNvCxnSpPr>
+            <p:nvPr/>
+          </p:nvCxnSpPr>
+          <p:spPr>
+            <a:xfrm>
+              <a:off x="4556245" y="2457548"/>
+              <a:ext cx="2894450" cy="1556163"/>
+            </a:xfrm>
+            <a:prstGeom prst="line">
+              <a:avLst/>
+            </a:prstGeom>
+            <a:ln w="38100">
+              <a:prstDash val="sysDash"/>
+            </a:ln>
+          </p:spPr>
+          <p:style>
+            <a:lnRef idx="2">
+              <a:schemeClr val="dk1"/>
+            </a:lnRef>
+            <a:fillRef idx="0">
+              <a:schemeClr val="dk1"/>
+            </a:fillRef>
+            <a:effectRef idx="1">
+              <a:schemeClr val="dk1"/>
+            </a:effectRef>
+            <a:fontRef idx="minor">
+              <a:schemeClr val="tx1"/>
+            </a:fontRef>
+          </p:style>
+        </p:cxnSp>
+        <p:cxnSp>
+          <p:nvCxnSpPr>
+            <p:cNvPr id="18" name="直線コネクタ 17">
+              <a:extLst>
+                <a:ext uri="{FF2B5EF4-FFF2-40B4-BE49-F238E27FC236}">
+                  <a16:creationId xmlns:a16="http://schemas.microsoft.com/office/drawing/2014/main" id="{FE155AE7-13E9-EF28-39D6-AE6AA8D5BC10}"/>
+                </a:ext>
+              </a:extLst>
+            </p:cNvPr>
+            <p:cNvCxnSpPr>
+              <a:cxnSpLocks/>
+            </p:cNvCxnSpPr>
+            <p:nvPr/>
+          </p:nvCxnSpPr>
+          <p:spPr>
+            <a:xfrm>
+              <a:off x="5667270" y="3054028"/>
+              <a:ext cx="655447" cy="349572"/>
+            </a:xfrm>
+            <a:prstGeom prst="line">
+              <a:avLst/>
+            </a:prstGeom>
+            <a:ln w="57150"/>
+          </p:spPr>
+          <p:style>
+            <a:lnRef idx="2">
+              <a:schemeClr val="dk1"/>
+            </a:lnRef>
+            <a:fillRef idx="0">
+              <a:schemeClr val="dk1"/>
+            </a:fillRef>
+            <a:effectRef idx="1">
+              <a:schemeClr val="dk1"/>
+            </a:effectRef>
+            <a:fontRef idx="minor">
+              <a:schemeClr val="tx1"/>
+            </a:fontRef>
+          </p:style>
+        </p:cxnSp>
+        <p:sp>
+          <p:nvSpPr>
+            <p:cNvPr id="21" name="正方形/長方形 20">
+              <a:extLst>
+                <a:ext uri="{FF2B5EF4-FFF2-40B4-BE49-F238E27FC236}">
+                  <a16:creationId xmlns:a16="http://schemas.microsoft.com/office/drawing/2014/main" id="{B056B60C-A174-CE02-A359-52A77A102F03}"/>
+                </a:ext>
+              </a:extLst>
+            </p:cNvPr>
+            <p:cNvSpPr/>
+            <p:nvPr/>
+          </p:nvSpPr>
+          <p:spPr>
+            <a:xfrm rot="17793104">
+              <a:off x="5895041" y="1320218"/>
+              <a:ext cx="242886" cy="3836514"/>
+            </a:xfrm>
+            <a:prstGeom prst="rect">
+              <a:avLst/>
+            </a:prstGeom>
+            <a:noFill/>
+            <a:ln w="38100">
+              <a:solidFill>
+                <a:srgbClr val="FF0000"/>
+              </a:solidFill>
+            </a:ln>
+          </p:spPr>
+          <p:style>
+            <a:lnRef idx="2">
+              <a:schemeClr val="accent1">
+                <a:shade val="15000"/>
+              </a:schemeClr>
+            </a:lnRef>
+            <a:fillRef idx="1">
+              <a:schemeClr val="accent1"/>
+            </a:fillRef>
+            <a:effectRef idx="0">
+              <a:schemeClr val="accent1"/>
+            </a:effectRef>
+            <a:fontRef idx="minor">
+              <a:schemeClr val="lt1"/>
+            </a:fontRef>
+          </p:style>
+          <p:txBody>
+            <a:bodyPr rtlCol="0" anchor="ctr"/>
+            <a:lstStyle/>
+            <a:p>
+              <a:pPr algn="ctr"/>
+              <a:endParaRPr kumimoji="1" lang="ja-JP" altLang="en-US"/>
+            </a:p>
+          </p:txBody>
+        </p:sp>
+      </p:grpSp>
+    </p:spTree>
+    <p:extLst>
+      <p:ext uri="{BB962C8B-B14F-4D97-AF65-F5344CB8AC3E}">
+        <p14:creationId xmlns:p14="http://schemas.microsoft.com/office/powerpoint/2010/main" val="486696542"/>
+      </p:ext>
+    </p:extLst>
+  </p:cSld>
+  <p:clrMapOvr>
+    <a:masterClrMapping/>
+  </p:clrMapOvr>
+</p:sld>
+</file>
+
+<file path=ppt/slides/slide14.xml><?xml version="1.0" encoding="utf-8"?>
+<p:sld xmlns:a="http://schemas.openxmlformats.org/drawingml/2006/main" xmlns:r="http://schemas.openxmlformats.org/officeDocument/2006/relationships" xmlns:p="http://schemas.openxmlformats.org/presentationml/2006/main">
+  <p:cSld>
+    <p:spTree>
+      <p:nvGrpSpPr>
+        <p:cNvPr id="1" name=""/>
+        <p:cNvGrpSpPr/>
+        <p:nvPr/>
+      </p:nvGrpSpPr>
+      <p:grpSpPr>
+        <a:xfrm>
+          <a:off x="0" y="0"/>
+          <a:ext cx="0" cy="0"/>
+          <a:chOff x="0" y="0"/>
+          <a:chExt cx="0" cy="0"/>
+        </a:xfrm>
+      </p:grpSpPr>
+      <p:grpSp>
+        <p:nvGrpSpPr>
+          <p:cNvPr id="28" name="グループ化 27">
+            <a:extLst>
+              <a:ext uri="{FF2B5EF4-FFF2-40B4-BE49-F238E27FC236}">
+                <a16:creationId xmlns:a16="http://schemas.microsoft.com/office/drawing/2014/main" id="{346A0947-132E-37D2-C73D-25272AABF9F4}"/>
+              </a:ext>
+            </a:extLst>
+          </p:cNvPr>
+          <p:cNvGrpSpPr/>
+          <p:nvPr/>
+        </p:nvGrpSpPr>
+        <p:grpSpPr>
+          <a:xfrm>
+            <a:off x="751281" y="1810872"/>
+            <a:ext cx="10689437" cy="3725754"/>
+            <a:chOff x="1108168" y="2015589"/>
+            <a:chExt cx="10689437" cy="3725754"/>
+          </a:xfrm>
+        </p:grpSpPr>
+        <p:sp>
+          <p:nvSpPr>
+            <p:cNvPr id="2" name="テキスト ボックス 1">
+              <a:extLst>
+                <a:ext uri="{FF2B5EF4-FFF2-40B4-BE49-F238E27FC236}">
+                  <a16:creationId xmlns:a16="http://schemas.microsoft.com/office/drawing/2014/main" id="{050B3DEC-04D6-157B-7242-31EB979C9B73}"/>
+                </a:ext>
+              </a:extLst>
+            </p:cNvPr>
+            <p:cNvSpPr txBox="1"/>
+            <p:nvPr/>
+          </p:nvSpPr>
+          <p:spPr>
+            <a:xfrm>
+              <a:off x="1108168" y="2979553"/>
+              <a:ext cx="1024577" cy="461665"/>
+            </a:xfrm>
+            <a:prstGeom prst="rect">
+              <a:avLst/>
+            </a:prstGeom>
+            <a:noFill/>
+          </p:spPr>
+          <p:txBody>
+            <a:bodyPr wrap="square" rtlCol="0">
+              <a:spAutoFit/>
+            </a:bodyPr>
+            <a:lstStyle/>
+            <a:p>
+              <a:pPr algn="ctr"/>
+              <a:r>
+                <a:rPr kumimoji="1" lang="ja-JP" altLang="en-US" sz="2400">
+                  <a:latin typeface="Hiragino Kaku Gothic StdN W8" panose="020B0800000000000000" pitchFamily="34" charset="-128"/>
+                  <a:ea typeface="Hiragino Kaku Gothic StdN W8" panose="020B0800000000000000" pitchFamily="34" charset="-128"/>
+                </a:rPr>
+                <a:t>日本</a:t>
+              </a:r>
+            </a:p>
+          </p:txBody>
+        </p:sp>
+        <p:sp>
+          <p:nvSpPr>
+            <p:cNvPr id="3" name="テキスト ボックス 2">
+              <a:extLst>
+                <a:ext uri="{FF2B5EF4-FFF2-40B4-BE49-F238E27FC236}">
+                  <a16:creationId xmlns:a16="http://schemas.microsoft.com/office/drawing/2014/main" id="{1331C9E2-501A-CC44-19EC-F3FCD069203D}"/>
+                </a:ext>
+              </a:extLst>
+            </p:cNvPr>
+            <p:cNvSpPr txBox="1"/>
+            <p:nvPr/>
+          </p:nvSpPr>
+          <p:spPr>
+            <a:xfrm>
+              <a:off x="10773028" y="2979553"/>
+              <a:ext cx="1024577" cy="461665"/>
+            </a:xfrm>
+            <a:prstGeom prst="rect">
+              <a:avLst/>
+            </a:prstGeom>
+            <a:noFill/>
+          </p:spPr>
+          <p:txBody>
+            <a:bodyPr wrap="square" rtlCol="0">
+              <a:spAutoFit/>
+            </a:bodyPr>
+            <a:lstStyle/>
+            <a:p>
+              <a:pPr algn="ctr"/>
+              <a:r>
+                <a:rPr kumimoji="1" lang="ja-JP" altLang="en-US" sz="2400">
+                  <a:latin typeface="Hiragino Kaku Gothic StdN W8" panose="020B0800000000000000" pitchFamily="34" charset="-128"/>
+                  <a:ea typeface="Hiragino Kaku Gothic StdN W8" panose="020B0800000000000000" pitchFamily="34" charset="-128"/>
+                </a:rPr>
+                <a:t>米国</a:t>
+              </a:r>
+            </a:p>
+          </p:txBody>
+        </p:sp>
+        <p:cxnSp>
+          <p:nvCxnSpPr>
+            <p:cNvPr id="4" name="直線コネクタ 3">
+              <a:extLst>
+                <a:ext uri="{FF2B5EF4-FFF2-40B4-BE49-F238E27FC236}">
+                  <a16:creationId xmlns:a16="http://schemas.microsoft.com/office/drawing/2014/main" id="{A035C91D-F04C-0BE9-EB75-B45485EBD967}"/>
+                </a:ext>
+              </a:extLst>
+            </p:cNvPr>
+            <p:cNvCxnSpPr>
+              <a:cxnSpLocks/>
+            </p:cNvCxnSpPr>
+            <p:nvPr/>
+          </p:nvCxnSpPr>
+          <p:spPr>
+            <a:xfrm>
+              <a:off x="1620457" y="3441218"/>
+              <a:ext cx="9664860" cy="0"/>
+            </a:xfrm>
+            <a:prstGeom prst="line">
+              <a:avLst/>
+            </a:prstGeom>
+            <a:ln w="57150"/>
+          </p:spPr>
+          <p:style>
+            <a:lnRef idx="2">
+              <a:schemeClr val="dk1"/>
+            </a:lnRef>
+            <a:fillRef idx="0">
+              <a:schemeClr val="dk1"/>
+            </a:fillRef>
+            <a:effectRef idx="1">
+              <a:schemeClr val="dk1"/>
+            </a:effectRef>
+            <a:fontRef idx="minor">
+              <a:schemeClr val="tx1"/>
+            </a:fontRef>
+          </p:style>
+        </p:cxnSp>
+        <p:sp>
+          <p:nvSpPr>
+            <p:cNvPr id="15" name="正方形/長方形 14">
+              <a:extLst>
+                <a:ext uri="{FF2B5EF4-FFF2-40B4-BE49-F238E27FC236}">
+                  <a16:creationId xmlns:a16="http://schemas.microsoft.com/office/drawing/2014/main" id="{904583B9-70FA-D8F1-42E8-CB951C678CB6}"/>
+                </a:ext>
+              </a:extLst>
+            </p:cNvPr>
+            <p:cNvSpPr/>
+            <p:nvPr/>
+          </p:nvSpPr>
+          <p:spPr>
+            <a:xfrm>
+              <a:off x="4781286" y="3171395"/>
+              <a:ext cx="45719" cy="539645"/>
+            </a:xfrm>
+            <a:prstGeom prst="rect">
+              <a:avLst/>
+            </a:prstGeom>
+            <a:solidFill>
+              <a:schemeClr val="tx1"/>
+            </a:solidFill>
+            <a:ln>
+              <a:noFill/>
+            </a:ln>
+          </p:spPr>
+          <p:style>
+            <a:lnRef idx="2">
+              <a:schemeClr val="accent1">
+                <a:shade val="15000"/>
+              </a:schemeClr>
+            </a:lnRef>
+            <a:fillRef idx="1">
+              <a:schemeClr val="accent1"/>
+            </a:fillRef>
+            <a:effectRef idx="0">
+              <a:schemeClr val="accent1"/>
+            </a:effectRef>
+            <a:fontRef idx="minor">
+              <a:schemeClr val="lt1"/>
+            </a:fontRef>
+          </p:style>
+          <p:txBody>
+            <a:bodyPr rtlCol="0" anchor="ctr"/>
+            <a:lstStyle/>
+            <a:p>
+              <a:pPr algn="ctr"/>
+              <a:endParaRPr kumimoji="1" lang="ja-JP" altLang="en-US"/>
+            </a:p>
+          </p:txBody>
+        </p:sp>
+        <p:sp>
+          <p:nvSpPr>
+            <p:cNvPr id="16" name="正方形/長方形 15">
+              <a:extLst>
+                <a:ext uri="{FF2B5EF4-FFF2-40B4-BE49-F238E27FC236}">
+                  <a16:creationId xmlns:a16="http://schemas.microsoft.com/office/drawing/2014/main" id="{3FD7F6C3-19B5-BE00-B973-889FC6A6D13E}"/>
+                </a:ext>
+              </a:extLst>
+            </p:cNvPr>
+            <p:cNvSpPr/>
+            <p:nvPr/>
+          </p:nvSpPr>
+          <p:spPr>
+            <a:xfrm>
+              <a:off x="8069167" y="3159177"/>
+              <a:ext cx="55320" cy="539645"/>
+            </a:xfrm>
+            <a:prstGeom prst="rect">
+              <a:avLst/>
+            </a:prstGeom>
+            <a:solidFill>
+              <a:schemeClr val="tx1"/>
+            </a:solidFill>
+            <a:ln>
+              <a:noFill/>
+            </a:ln>
+          </p:spPr>
+          <p:style>
+            <a:lnRef idx="2">
+              <a:schemeClr val="accent1">
+                <a:shade val="15000"/>
+              </a:schemeClr>
+            </a:lnRef>
+            <a:fillRef idx="1">
+              <a:schemeClr val="accent1"/>
+            </a:fillRef>
+            <a:effectRef idx="0">
+              <a:schemeClr val="accent1"/>
+            </a:effectRef>
+            <a:fontRef idx="minor">
+              <a:schemeClr val="lt1"/>
+            </a:fontRef>
+          </p:style>
+          <p:txBody>
+            <a:bodyPr rtlCol="0" anchor="ctr"/>
+            <a:lstStyle/>
+            <a:p>
+              <a:pPr algn="ctr"/>
+              <a:endParaRPr kumimoji="1" lang="ja-JP" altLang="en-US"/>
+            </a:p>
+          </p:txBody>
+        </p:sp>
+        <p:cxnSp>
+          <p:nvCxnSpPr>
+            <p:cNvPr id="17" name="直線コネクタ 16">
+              <a:extLst>
+                <a:ext uri="{FF2B5EF4-FFF2-40B4-BE49-F238E27FC236}">
+                  <a16:creationId xmlns:a16="http://schemas.microsoft.com/office/drawing/2014/main" id="{5741CAF3-666B-E45F-49CA-5CBEA4956766}"/>
+                </a:ext>
+              </a:extLst>
+            </p:cNvPr>
+            <p:cNvCxnSpPr>
+              <a:cxnSpLocks/>
+            </p:cNvCxnSpPr>
+            <p:nvPr/>
+          </p:nvCxnSpPr>
+          <p:spPr>
+            <a:xfrm>
+              <a:off x="4827005" y="3441218"/>
+              <a:ext cx="3242162" cy="0"/>
+            </a:xfrm>
+            <a:prstGeom prst="line">
+              <a:avLst/>
+            </a:prstGeom>
+            <a:ln w="57150">
+              <a:solidFill>
+                <a:srgbClr val="FF0000"/>
+              </a:solidFill>
+            </a:ln>
+          </p:spPr>
+          <p:style>
+            <a:lnRef idx="2">
+              <a:schemeClr val="dk1"/>
+            </a:lnRef>
+            <a:fillRef idx="0">
+              <a:schemeClr val="dk1"/>
+            </a:fillRef>
+            <a:effectRef idx="1">
+              <a:schemeClr val="dk1"/>
+            </a:effectRef>
+            <a:fontRef idx="minor">
+              <a:schemeClr val="tx1"/>
+            </a:fontRef>
+          </p:style>
+        </p:cxnSp>
+        <p:sp>
+          <p:nvSpPr>
+            <p:cNvPr id="22" name="左中かっこ 21">
+              <a:extLst>
+                <a:ext uri="{FF2B5EF4-FFF2-40B4-BE49-F238E27FC236}">
+                  <a16:creationId xmlns:a16="http://schemas.microsoft.com/office/drawing/2014/main" id="{0CA38B36-E588-B728-F134-59DE233E176D}"/>
+                </a:ext>
+              </a:extLst>
+            </p:cNvPr>
+            <p:cNvSpPr/>
+            <p:nvPr/>
+          </p:nvSpPr>
+          <p:spPr>
+            <a:xfrm rot="5400000">
+              <a:off x="4506409" y="-352681"/>
+              <a:ext cx="539645" cy="6311550"/>
+            </a:xfrm>
+            <a:prstGeom prst="leftBrace">
+              <a:avLst/>
+            </a:prstGeom>
+            <a:ln w="38100">
+              <a:solidFill>
+                <a:schemeClr val="tx1"/>
+              </a:solidFill>
+            </a:ln>
+          </p:spPr>
+          <p:style>
+            <a:lnRef idx="2">
+              <a:schemeClr val="accent1"/>
+            </a:lnRef>
+            <a:fillRef idx="0">
+              <a:schemeClr val="accent1"/>
+            </a:fillRef>
+            <a:effectRef idx="1">
+              <a:schemeClr val="accent1"/>
+            </a:effectRef>
+            <a:fontRef idx="minor">
+              <a:schemeClr val="tx1"/>
+            </a:fontRef>
+          </p:style>
+          <p:txBody>
+            <a:bodyPr rtlCol="0" anchor="ctr"/>
+            <a:lstStyle/>
+            <a:p>
+              <a:pPr algn="ctr"/>
+              <a:endParaRPr kumimoji="1" lang="ja-JP" altLang="en-US"/>
+            </a:p>
+          </p:txBody>
+        </p:sp>
+        <p:sp>
+          <p:nvSpPr>
+            <p:cNvPr id="23" name="左中かっこ 22">
+              <a:extLst>
+                <a:ext uri="{FF2B5EF4-FFF2-40B4-BE49-F238E27FC236}">
+                  <a16:creationId xmlns:a16="http://schemas.microsoft.com/office/drawing/2014/main" id="{A74F3A8E-7530-9E77-3DA6-3338512E381A}"/>
+                </a:ext>
+              </a:extLst>
+            </p:cNvPr>
+            <p:cNvSpPr/>
+            <p:nvPr/>
+          </p:nvSpPr>
+          <p:spPr>
+            <a:xfrm rot="5400000" flipH="1">
+              <a:off x="7758978" y="1650313"/>
+              <a:ext cx="551212" cy="6501466"/>
+            </a:xfrm>
+            <a:prstGeom prst="leftBrace">
+              <a:avLst/>
+            </a:prstGeom>
+            <a:ln w="38100">
+              <a:solidFill>
+                <a:schemeClr val="tx1"/>
+              </a:solidFill>
+            </a:ln>
+          </p:spPr>
+          <p:style>
+            <a:lnRef idx="2">
+              <a:schemeClr val="accent1"/>
+            </a:lnRef>
+            <a:fillRef idx="0">
+              <a:schemeClr val="accent1"/>
+            </a:fillRef>
+            <a:effectRef idx="1">
+              <a:schemeClr val="accent1"/>
+            </a:effectRef>
+            <a:fontRef idx="minor">
+              <a:schemeClr val="tx1"/>
+            </a:fontRef>
+          </p:style>
+          <p:txBody>
+            <a:bodyPr rtlCol="0" anchor="ctr"/>
+            <a:lstStyle/>
+            <a:p>
+              <a:pPr algn="ctr"/>
+              <a:endParaRPr kumimoji="1" lang="ja-JP" altLang="en-US"/>
+            </a:p>
+          </p:txBody>
+        </p:sp>
+        <p:sp>
+          <p:nvSpPr>
+            <p:cNvPr id="24" name="テキスト ボックス 23">
+              <a:extLst>
+                <a:ext uri="{FF2B5EF4-FFF2-40B4-BE49-F238E27FC236}">
+                  <a16:creationId xmlns:a16="http://schemas.microsoft.com/office/drawing/2014/main" id="{4673902D-5643-043A-B108-3AA2DB559637}"/>
+                </a:ext>
+              </a:extLst>
+            </p:cNvPr>
+            <p:cNvSpPr txBox="1"/>
+            <p:nvPr/>
+          </p:nvSpPr>
+          <p:spPr>
+            <a:xfrm>
+              <a:off x="3382317" y="2015589"/>
+              <a:ext cx="2787827" cy="461665"/>
+            </a:xfrm>
+            <a:prstGeom prst="rect">
+              <a:avLst/>
+            </a:prstGeom>
+            <a:solidFill>
+              <a:schemeClr val="bg1"/>
+            </a:solidFill>
+            <a:ln>
+              <a:solidFill>
+                <a:schemeClr val="tx1"/>
+              </a:solidFill>
+            </a:ln>
+          </p:spPr>
+          <p:txBody>
+            <a:bodyPr wrap="square" rtlCol="0">
+              <a:spAutoFit/>
+            </a:bodyPr>
+            <a:lstStyle/>
+            <a:p>
+              <a:pPr algn="ctr"/>
+              <a:r>
+                <a:rPr kumimoji="1" lang="ja-JP" altLang="en-US" sz="2400" b="1">
+                  <a:latin typeface="Hiragino Sans W4" panose="020B0400000000000000" pitchFamily="34" charset="-128"/>
+                  <a:ea typeface="Hiragino Sans W4" panose="020B0400000000000000" pitchFamily="34" charset="-128"/>
+                </a:rPr>
+                <a:t>日本</a:t>
+              </a:r>
+              <a:r>
+                <a:rPr kumimoji="1" lang="ja-JP" altLang="en-US" sz="2400">
+                  <a:latin typeface="Hiragino Sans W4" panose="020B0400000000000000" pitchFamily="34" charset="-128"/>
+                  <a:ea typeface="Hiragino Sans W4" panose="020B0400000000000000" pitchFamily="34" charset="-128"/>
+                </a:rPr>
+                <a:t>の</a:t>
+              </a:r>
+              <a:r>
+                <a:rPr kumimoji="1" lang="ja-JP" altLang="en-US" sz="2400" b="1">
+                  <a:latin typeface="Hiragino Sans W4" panose="020B0400000000000000" pitchFamily="34" charset="-128"/>
+                  <a:ea typeface="Hiragino Sans W4" panose="020B0400000000000000" pitchFamily="34" charset="-128"/>
+                </a:rPr>
+                <a:t>無差別曲線</a:t>
+              </a:r>
+              <a:endParaRPr kumimoji="1" lang="en-US" altLang="ja-JP" sz="2400" dirty="0">
+                <a:latin typeface="Hiragino Sans W4" panose="020B0400000000000000" pitchFamily="34" charset="-128"/>
+                <a:ea typeface="Hiragino Sans W4" panose="020B0400000000000000" pitchFamily="34" charset="-128"/>
+              </a:endParaRPr>
+            </a:p>
+          </p:txBody>
+        </p:sp>
+        <p:sp>
+          <p:nvSpPr>
+            <p:cNvPr id="25" name="テキスト ボックス 24">
+              <a:extLst>
+                <a:ext uri="{FF2B5EF4-FFF2-40B4-BE49-F238E27FC236}">
+                  <a16:creationId xmlns:a16="http://schemas.microsoft.com/office/drawing/2014/main" id="{CB4FFCC5-9E00-32EF-8A50-AC668C9BFD99}"/>
+                </a:ext>
+              </a:extLst>
+            </p:cNvPr>
+            <p:cNvSpPr txBox="1"/>
+            <p:nvPr/>
+          </p:nvSpPr>
+          <p:spPr>
+            <a:xfrm>
+              <a:off x="6640670" y="5279678"/>
+              <a:ext cx="2787827" cy="461665"/>
+            </a:xfrm>
+            <a:prstGeom prst="rect">
+              <a:avLst/>
+            </a:prstGeom>
+            <a:solidFill>
+              <a:schemeClr val="bg1"/>
+            </a:solidFill>
+            <a:ln>
+              <a:solidFill>
+                <a:schemeClr val="tx1"/>
+              </a:solidFill>
+            </a:ln>
+          </p:spPr>
+          <p:txBody>
+            <a:bodyPr wrap="square" rtlCol="0">
+              <a:spAutoFit/>
+            </a:bodyPr>
+            <a:lstStyle/>
+            <a:p>
+              <a:pPr algn="ctr"/>
+              <a:r>
+                <a:rPr lang="ja-JP" altLang="en-US" sz="2400" b="1">
+                  <a:latin typeface="Hiragino Sans W4" panose="020B0400000000000000" pitchFamily="34" charset="-128"/>
+                  <a:ea typeface="Hiragino Sans W4" panose="020B0400000000000000" pitchFamily="34" charset="-128"/>
+                </a:rPr>
+                <a:t>米国</a:t>
+              </a:r>
+              <a:r>
+                <a:rPr kumimoji="1" lang="ja-JP" altLang="en-US" sz="2400">
+                  <a:latin typeface="Hiragino Sans W4" panose="020B0400000000000000" pitchFamily="34" charset="-128"/>
+                  <a:ea typeface="Hiragino Sans W4" panose="020B0400000000000000" pitchFamily="34" charset="-128"/>
+                </a:rPr>
+                <a:t>の</a:t>
+              </a:r>
+              <a:r>
+                <a:rPr kumimoji="1" lang="ja-JP" altLang="en-US" sz="2400" b="1">
+                  <a:latin typeface="Hiragino Sans W4" panose="020B0400000000000000" pitchFamily="34" charset="-128"/>
+                  <a:ea typeface="Hiragino Sans W4" panose="020B0400000000000000" pitchFamily="34" charset="-128"/>
+                </a:rPr>
+                <a:t>無差別曲線</a:t>
+              </a:r>
+              <a:endParaRPr kumimoji="1" lang="en-US" altLang="ja-JP" sz="2400" dirty="0">
+                <a:latin typeface="Hiragino Sans W4" panose="020B0400000000000000" pitchFamily="34" charset="-128"/>
+                <a:ea typeface="Hiragino Sans W4" panose="020B0400000000000000" pitchFamily="34" charset="-128"/>
+              </a:endParaRPr>
+            </a:p>
+          </p:txBody>
+        </p:sp>
+        <p:sp>
+          <p:nvSpPr>
+            <p:cNvPr id="26" name="左中かっこ 25">
+              <a:extLst>
+                <a:ext uri="{FF2B5EF4-FFF2-40B4-BE49-F238E27FC236}">
+                  <a16:creationId xmlns:a16="http://schemas.microsoft.com/office/drawing/2014/main" id="{C917D14D-E54C-D6BD-422D-AD090A689663}"/>
+                </a:ext>
+              </a:extLst>
+            </p:cNvPr>
+            <p:cNvSpPr/>
+            <p:nvPr/>
+          </p:nvSpPr>
+          <p:spPr>
+            <a:xfrm rot="5400000" flipH="1">
+              <a:off x="6298566" y="2241201"/>
+              <a:ext cx="349302" cy="3302539"/>
+            </a:xfrm>
+            <a:prstGeom prst="leftBrace">
+              <a:avLst/>
+            </a:prstGeom>
+            <a:ln w="38100">
+              <a:solidFill>
+                <a:srgbClr val="FF0000"/>
+              </a:solidFill>
+            </a:ln>
+          </p:spPr>
+          <p:style>
+            <a:lnRef idx="2">
+              <a:schemeClr val="accent1"/>
+            </a:lnRef>
+            <a:fillRef idx="0">
+              <a:schemeClr val="accent1"/>
+            </a:fillRef>
+            <a:effectRef idx="1">
+              <a:schemeClr val="accent1"/>
+            </a:effectRef>
+            <a:fontRef idx="minor">
+              <a:schemeClr val="tx1"/>
+            </a:fontRef>
+          </p:style>
+          <p:txBody>
+            <a:bodyPr rtlCol="0" anchor="ctr"/>
+            <a:lstStyle/>
+            <a:p>
+              <a:pPr algn="ctr"/>
+              <a:endParaRPr kumimoji="1" lang="ja-JP" altLang="en-US"/>
+            </a:p>
+          </p:txBody>
+        </p:sp>
+        <p:sp>
+          <p:nvSpPr>
+            <p:cNvPr id="27" name="テキスト ボックス 26">
+              <a:extLst>
+                <a:ext uri="{FF2B5EF4-FFF2-40B4-BE49-F238E27FC236}">
+                  <a16:creationId xmlns:a16="http://schemas.microsoft.com/office/drawing/2014/main" id="{FCC9BD7C-7598-A3E4-2495-40D301799643}"/>
+                </a:ext>
+              </a:extLst>
+            </p:cNvPr>
+            <p:cNvSpPr txBox="1"/>
+            <p:nvPr/>
+          </p:nvSpPr>
+          <p:spPr>
+            <a:xfrm>
+              <a:off x="5652594" y="4163775"/>
+              <a:ext cx="1641246" cy="461665"/>
+            </a:xfrm>
+            <a:prstGeom prst="rect">
+              <a:avLst/>
+            </a:prstGeom>
+            <a:solidFill>
+              <a:schemeClr val="bg1"/>
+            </a:solidFill>
+            <a:ln>
+              <a:solidFill>
+                <a:schemeClr val="tx1"/>
+              </a:solidFill>
+            </a:ln>
+          </p:spPr>
+          <p:txBody>
+            <a:bodyPr wrap="square" rtlCol="0">
+              <a:spAutoFit/>
+            </a:bodyPr>
+            <a:lstStyle/>
+            <a:p>
+              <a:pPr algn="ctr"/>
+              <a:r>
+                <a:rPr kumimoji="1" lang="ja-JP" altLang="en-US" sz="2400" b="1">
+                  <a:latin typeface="Hiragino Sans W4" panose="020B0400000000000000" pitchFamily="34" charset="-128"/>
+                  <a:ea typeface="Hiragino Sans W4" panose="020B0400000000000000" pitchFamily="34" charset="-128"/>
+                </a:rPr>
+                <a:t>勝利集合</a:t>
+              </a:r>
+              <a:endParaRPr kumimoji="1" lang="en-US" altLang="ja-JP" sz="2400" b="1" dirty="0">
+                <a:latin typeface="Hiragino Sans W4" panose="020B0400000000000000" pitchFamily="34" charset="-128"/>
+                <a:ea typeface="Hiragino Sans W4" panose="020B0400000000000000" pitchFamily="34" charset="-128"/>
+              </a:endParaRPr>
+            </a:p>
+          </p:txBody>
+        </p:sp>
+      </p:grpSp>
+    </p:spTree>
+    <p:extLst>
+      <p:ext uri="{BB962C8B-B14F-4D97-AF65-F5344CB8AC3E}">
+        <p14:creationId xmlns:p14="http://schemas.microsoft.com/office/powerpoint/2010/main" val="3455379992"/>
+      </p:ext>
+    </p:extLst>
+  </p:cSld>
+  <p:clrMapOvr>
+    <a:masterClrMapping/>
+  </p:clrMapOvr>
+</p:sld>
+</file>
+
+<file path=ppt/slides/slide15.xml><?xml version="1.0" encoding="utf-8"?>
+<p:sld xmlns:a="http://schemas.openxmlformats.org/drawingml/2006/main" xmlns:r="http://schemas.openxmlformats.org/officeDocument/2006/relationships" xmlns:p="http://schemas.openxmlformats.org/presentationml/2006/main">
+  <p:cSld>
+    <p:spTree>
+      <p:nvGrpSpPr>
+        <p:cNvPr id="1" name=""/>
+        <p:cNvGrpSpPr/>
+        <p:nvPr/>
+      </p:nvGrpSpPr>
+      <p:grpSpPr>
+        <a:xfrm>
+          <a:off x="0" y="0"/>
+          <a:ext cx="0" cy="0"/>
+          <a:chOff x="0" y="0"/>
+          <a:chExt cx="0" cy="0"/>
+        </a:xfrm>
+      </p:grpSpPr>
+      <p:grpSp>
+        <p:nvGrpSpPr>
+          <p:cNvPr id="32" name="グループ化 31">
+            <a:extLst>
+              <a:ext uri="{FF2B5EF4-FFF2-40B4-BE49-F238E27FC236}">
+                <a16:creationId xmlns:a16="http://schemas.microsoft.com/office/drawing/2014/main" id="{2026FF18-1577-83A7-0168-2A3FA9EF31D0}"/>
+              </a:ext>
+            </a:extLst>
+          </p:cNvPr>
+          <p:cNvGrpSpPr/>
+          <p:nvPr/>
+        </p:nvGrpSpPr>
+        <p:grpSpPr>
+          <a:xfrm>
+            <a:off x="751281" y="1827900"/>
+            <a:ext cx="10689437" cy="3708726"/>
+            <a:chOff x="751281" y="1827900"/>
+            <a:chExt cx="10689437" cy="3708726"/>
+          </a:xfrm>
+        </p:grpSpPr>
+        <p:sp>
+          <p:nvSpPr>
+            <p:cNvPr id="16" name="テキスト ボックス 15">
+              <a:extLst>
+                <a:ext uri="{FF2B5EF4-FFF2-40B4-BE49-F238E27FC236}">
+                  <a16:creationId xmlns:a16="http://schemas.microsoft.com/office/drawing/2014/main" id="{C108C12F-6AA1-4EEA-43F3-4E5EC4A58FFC}"/>
+                </a:ext>
+              </a:extLst>
+            </p:cNvPr>
+            <p:cNvSpPr txBox="1"/>
+            <p:nvPr/>
+          </p:nvSpPr>
+          <p:spPr>
+            <a:xfrm>
+              <a:off x="751281" y="2774836"/>
+              <a:ext cx="1024577" cy="461665"/>
+            </a:xfrm>
+            <a:prstGeom prst="rect">
+              <a:avLst/>
+            </a:prstGeom>
+            <a:noFill/>
+          </p:spPr>
+          <p:txBody>
+            <a:bodyPr wrap="square" rtlCol="0">
+              <a:spAutoFit/>
+            </a:bodyPr>
+            <a:lstStyle/>
+            <a:p>
+              <a:pPr algn="ctr"/>
+              <a:r>
+                <a:rPr kumimoji="1" lang="ja-JP" altLang="en-US" sz="2400">
+                  <a:latin typeface="Hiragino Kaku Gothic StdN W8" panose="020B0800000000000000" pitchFamily="34" charset="-128"/>
+                  <a:ea typeface="Hiragino Kaku Gothic StdN W8" panose="020B0800000000000000" pitchFamily="34" charset="-128"/>
+                </a:rPr>
+                <a:t>日本</a:t>
+              </a:r>
+            </a:p>
+          </p:txBody>
+        </p:sp>
+        <p:sp>
+          <p:nvSpPr>
+            <p:cNvPr id="17" name="テキスト ボックス 16">
+              <a:extLst>
+                <a:ext uri="{FF2B5EF4-FFF2-40B4-BE49-F238E27FC236}">
+                  <a16:creationId xmlns:a16="http://schemas.microsoft.com/office/drawing/2014/main" id="{CEBB2BF8-C566-B92E-1526-0FA335B6CCE4}"/>
+                </a:ext>
+              </a:extLst>
+            </p:cNvPr>
+            <p:cNvSpPr txBox="1"/>
+            <p:nvPr/>
+          </p:nvSpPr>
+          <p:spPr>
+            <a:xfrm>
+              <a:off x="10416141" y="2774836"/>
+              <a:ext cx="1024577" cy="461665"/>
+            </a:xfrm>
+            <a:prstGeom prst="rect">
+              <a:avLst/>
+            </a:prstGeom>
+            <a:noFill/>
+          </p:spPr>
+          <p:txBody>
+            <a:bodyPr wrap="square" rtlCol="0">
+              <a:spAutoFit/>
+            </a:bodyPr>
+            <a:lstStyle/>
+            <a:p>
+              <a:pPr algn="ctr"/>
+              <a:r>
+                <a:rPr kumimoji="1" lang="ja-JP" altLang="en-US" sz="2400">
+                  <a:latin typeface="Hiragino Kaku Gothic StdN W8" panose="020B0800000000000000" pitchFamily="34" charset="-128"/>
+                  <a:ea typeface="Hiragino Kaku Gothic StdN W8" panose="020B0800000000000000" pitchFamily="34" charset="-128"/>
+                </a:rPr>
+                <a:t>米国</a:t>
+              </a:r>
+            </a:p>
+          </p:txBody>
+        </p:sp>
+        <p:cxnSp>
+          <p:nvCxnSpPr>
+            <p:cNvPr id="18" name="直線コネクタ 17">
+              <a:extLst>
+                <a:ext uri="{FF2B5EF4-FFF2-40B4-BE49-F238E27FC236}">
+                  <a16:creationId xmlns:a16="http://schemas.microsoft.com/office/drawing/2014/main" id="{FA58B12D-EBD6-0CED-7FA1-2CC8A78E7922}"/>
+                </a:ext>
+              </a:extLst>
+            </p:cNvPr>
+            <p:cNvCxnSpPr>
+              <a:cxnSpLocks/>
+            </p:cNvCxnSpPr>
+            <p:nvPr/>
+          </p:nvCxnSpPr>
+          <p:spPr>
+            <a:xfrm>
+              <a:off x="1263570" y="3236501"/>
+              <a:ext cx="9664860" cy="0"/>
+            </a:xfrm>
+            <a:prstGeom prst="line">
+              <a:avLst/>
+            </a:prstGeom>
+            <a:ln w="57150"/>
+          </p:spPr>
+          <p:style>
+            <a:lnRef idx="2">
+              <a:schemeClr val="dk1"/>
+            </a:lnRef>
+            <a:fillRef idx="0">
+              <a:schemeClr val="dk1"/>
+            </a:fillRef>
+            <a:effectRef idx="1">
+              <a:schemeClr val="dk1"/>
+            </a:effectRef>
+            <a:fontRef idx="minor">
+              <a:schemeClr val="tx1"/>
+            </a:fontRef>
+          </p:style>
+        </p:cxnSp>
+        <p:sp>
+          <p:nvSpPr>
+            <p:cNvPr id="19" name="正方形/長方形 18">
+              <a:extLst>
+                <a:ext uri="{FF2B5EF4-FFF2-40B4-BE49-F238E27FC236}">
+                  <a16:creationId xmlns:a16="http://schemas.microsoft.com/office/drawing/2014/main" id="{97B75DFC-6C8E-749E-BB1D-3958FF242C30}"/>
+                </a:ext>
+              </a:extLst>
+            </p:cNvPr>
+            <p:cNvSpPr/>
+            <p:nvPr/>
+          </p:nvSpPr>
+          <p:spPr>
+            <a:xfrm>
+              <a:off x="4424399" y="2966678"/>
+              <a:ext cx="45719" cy="539645"/>
+            </a:xfrm>
+            <a:prstGeom prst="rect">
+              <a:avLst/>
+            </a:prstGeom>
+            <a:solidFill>
+              <a:schemeClr val="tx1"/>
+            </a:solidFill>
+            <a:ln>
+              <a:noFill/>
+            </a:ln>
+          </p:spPr>
+          <p:style>
+            <a:lnRef idx="2">
+              <a:schemeClr val="accent1">
+                <a:shade val="15000"/>
+              </a:schemeClr>
+            </a:lnRef>
+            <a:fillRef idx="1">
+              <a:schemeClr val="accent1"/>
+            </a:fillRef>
+            <a:effectRef idx="0">
+              <a:schemeClr val="accent1"/>
+            </a:effectRef>
+            <a:fontRef idx="minor">
+              <a:schemeClr val="lt1"/>
+            </a:fontRef>
+          </p:style>
+          <p:txBody>
+            <a:bodyPr rtlCol="0" anchor="ctr"/>
+            <a:lstStyle/>
+            <a:p>
+              <a:pPr algn="ctr"/>
+              <a:endParaRPr kumimoji="1" lang="ja-JP" altLang="en-US"/>
+            </a:p>
+          </p:txBody>
+        </p:sp>
+        <p:sp>
+          <p:nvSpPr>
+            <p:cNvPr id="20" name="正方形/長方形 19">
+              <a:extLst>
+                <a:ext uri="{FF2B5EF4-FFF2-40B4-BE49-F238E27FC236}">
+                  <a16:creationId xmlns:a16="http://schemas.microsoft.com/office/drawing/2014/main" id="{4B111B67-2A09-C3FB-5489-0ECD359B4CC7}"/>
+                </a:ext>
+              </a:extLst>
+            </p:cNvPr>
+            <p:cNvSpPr/>
+            <p:nvPr/>
+          </p:nvSpPr>
+          <p:spPr>
+            <a:xfrm>
+              <a:off x="7712280" y="2954460"/>
+              <a:ext cx="55320" cy="539645"/>
+            </a:xfrm>
+            <a:prstGeom prst="rect">
+              <a:avLst/>
+            </a:prstGeom>
+            <a:solidFill>
+              <a:schemeClr val="tx1"/>
+            </a:solidFill>
+            <a:ln>
+              <a:noFill/>
+            </a:ln>
+          </p:spPr>
+          <p:style>
+            <a:lnRef idx="2">
+              <a:schemeClr val="accent1">
+                <a:shade val="15000"/>
+              </a:schemeClr>
+            </a:lnRef>
+            <a:fillRef idx="1">
+              <a:schemeClr val="accent1"/>
+            </a:fillRef>
+            <a:effectRef idx="0">
+              <a:schemeClr val="accent1"/>
+            </a:effectRef>
+            <a:fontRef idx="minor">
+              <a:schemeClr val="lt1"/>
+            </a:fontRef>
+          </p:style>
+          <p:txBody>
+            <a:bodyPr rtlCol="0" anchor="ctr"/>
+            <a:lstStyle/>
+            <a:p>
+              <a:pPr algn="ctr"/>
+              <a:endParaRPr kumimoji="1" lang="ja-JP" altLang="en-US"/>
+            </a:p>
+          </p:txBody>
+        </p:sp>
+        <p:cxnSp>
+          <p:nvCxnSpPr>
+            <p:cNvPr id="21" name="直線コネクタ 20">
+              <a:extLst>
+                <a:ext uri="{FF2B5EF4-FFF2-40B4-BE49-F238E27FC236}">
+                  <a16:creationId xmlns:a16="http://schemas.microsoft.com/office/drawing/2014/main" id="{CA353BE0-CFBF-2314-B93E-1D24F9399A74}"/>
+                </a:ext>
+              </a:extLst>
+            </p:cNvPr>
+            <p:cNvCxnSpPr>
+              <a:cxnSpLocks/>
+            </p:cNvCxnSpPr>
+            <p:nvPr/>
+          </p:nvCxnSpPr>
+          <p:spPr>
+            <a:xfrm>
+              <a:off x="1241946" y="3236501"/>
+              <a:ext cx="6470334" cy="0"/>
+            </a:xfrm>
+            <a:prstGeom prst="line">
+              <a:avLst/>
+            </a:prstGeom>
+            <a:ln w="57150">
+              <a:solidFill>
+                <a:srgbClr val="00B0F0"/>
+              </a:solidFill>
+            </a:ln>
+          </p:spPr>
+          <p:style>
+            <a:lnRef idx="2">
+              <a:schemeClr val="dk1"/>
+            </a:lnRef>
+            <a:fillRef idx="0">
+              <a:schemeClr val="dk1"/>
+            </a:fillRef>
+            <a:effectRef idx="1">
+              <a:schemeClr val="dk1"/>
+            </a:effectRef>
+            <a:fontRef idx="minor">
+              <a:schemeClr val="tx1"/>
+            </a:fontRef>
+          </p:style>
+        </p:cxnSp>
+        <p:sp>
+          <p:nvSpPr>
+            <p:cNvPr id="22" name="左中かっこ 21">
+              <a:extLst>
+                <a:ext uri="{FF2B5EF4-FFF2-40B4-BE49-F238E27FC236}">
+                  <a16:creationId xmlns:a16="http://schemas.microsoft.com/office/drawing/2014/main" id="{1B508567-7EDA-A317-F390-EAEA2BE20759}"/>
+                </a:ext>
+              </a:extLst>
+            </p:cNvPr>
+            <p:cNvSpPr/>
+            <p:nvPr/>
+          </p:nvSpPr>
+          <p:spPr>
+            <a:xfrm rot="5400000">
+              <a:off x="4149522" y="-557398"/>
+              <a:ext cx="539645" cy="6311550"/>
+            </a:xfrm>
+            <a:prstGeom prst="leftBrace">
+              <a:avLst/>
+            </a:prstGeom>
+            <a:ln w="38100">
+              <a:solidFill>
+                <a:srgbClr val="00B0F0"/>
+              </a:solidFill>
+            </a:ln>
+          </p:spPr>
+          <p:style>
+            <a:lnRef idx="2">
+              <a:schemeClr val="accent1"/>
+            </a:lnRef>
+            <a:fillRef idx="0">
+              <a:schemeClr val="accent1"/>
+            </a:fillRef>
+            <a:effectRef idx="1">
+              <a:schemeClr val="accent1"/>
+            </a:effectRef>
+            <a:fontRef idx="minor">
+              <a:schemeClr val="tx1"/>
+            </a:fontRef>
+          </p:style>
+          <p:txBody>
+            <a:bodyPr rtlCol="0" anchor="ctr"/>
+            <a:lstStyle/>
+            <a:p>
+              <a:pPr algn="ctr"/>
+              <a:endParaRPr kumimoji="1" lang="ja-JP" altLang="en-US"/>
+            </a:p>
+          </p:txBody>
+        </p:sp>
+        <p:sp>
+          <p:nvSpPr>
+            <p:cNvPr id="23" name="左中かっこ 22">
+              <a:extLst>
+                <a:ext uri="{FF2B5EF4-FFF2-40B4-BE49-F238E27FC236}">
+                  <a16:creationId xmlns:a16="http://schemas.microsoft.com/office/drawing/2014/main" id="{567D003A-65A5-C1A5-FAB0-7309A21B8325}"/>
+                </a:ext>
+              </a:extLst>
+            </p:cNvPr>
+            <p:cNvSpPr/>
+            <p:nvPr/>
+          </p:nvSpPr>
+          <p:spPr>
+            <a:xfrm rot="5400000" flipH="1">
+              <a:off x="3221667" y="2474120"/>
+              <a:ext cx="542282" cy="4453348"/>
+            </a:xfrm>
+            <a:prstGeom prst="leftBrace">
+              <a:avLst/>
+            </a:prstGeom>
+            <a:ln w="38100">
+              <a:solidFill>
+                <a:schemeClr val="tx1"/>
+              </a:solidFill>
+            </a:ln>
+          </p:spPr>
+          <p:style>
+            <a:lnRef idx="2">
+              <a:schemeClr val="accent1"/>
+            </a:lnRef>
+            <a:fillRef idx="0">
+              <a:schemeClr val="accent1"/>
+            </a:fillRef>
+            <a:effectRef idx="1">
+              <a:schemeClr val="accent1"/>
+            </a:effectRef>
+            <a:fontRef idx="minor">
+              <a:schemeClr val="tx1"/>
+            </a:fontRef>
+          </p:style>
+          <p:txBody>
+            <a:bodyPr rtlCol="0" anchor="ctr"/>
+            <a:lstStyle/>
+            <a:p>
+              <a:pPr algn="ctr"/>
+              <a:endParaRPr kumimoji="1" lang="ja-JP" altLang="en-US"/>
+            </a:p>
+          </p:txBody>
+        </p:sp>
+        <p:sp>
+          <p:nvSpPr>
+            <p:cNvPr id="24" name="テキスト ボックス 23">
+              <a:extLst>
+                <a:ext uri="{FF2B5EF4-FFF2-40B4-BE49-F238E27FC236}">
+                  <a16:creationId xmlns:a16="http://schemas.microsoft.com/office/drawing/2014/main" id="{0F3FE58D-24B5-3AAF-25EE-924469FC206E}"/>
+                </a:ext>
+              </a:extLst>
+            </p:cNvPr>
+            <p:cNvSpPr txBox="1"/>
+            <p:nvPr/>
+          </p:nvSpPr>
+          <p:spPr>
+            <a:xfrm>
+              <a:off x="2634073" y="1827900"/>
+              <a:ext cx="3661973" cy="461665"/>
+            </a:xfrm>
+            <a:prstGeom prst="rect">
+              <a:avLst/>
+            </a:prstGeom>
+            <a:solidFill>
+              <a:schemeClr val="bg1"/>
+            </a:solidFill>
+            <a:ln>
+              <a:solidFill>
+                <a:schemeClr val="tx1"/>
+              </a:solidFill>
+            </a:ln>
+          </p:spPr>
+          <p:txBody>
+            <a:bodyPr wrap="square" rtlCol="0">
+              <a:spAutoFit/>
+            </a:bodyPr>
+            <a:lstStyle/>
+            <a:p>
+              <a:pPr algn="ctr"/>
+              <a:r>
+                <a:rPr kumimoji="1" lang="ja-JP" altLang="en-US" sz="2400" b="1">
+                  <a:latin typeface="Hiragino Sans W4" panose="020B0400000000000000" pitchFamily="34" charset="-128"/>
+                  <a:ea typeface="Hiragino Sans W4" panose="020B0400000000000000" pitchFamily="34" charset="-128"/>
+                </a:rPr>
+                <a:t>自動車産業</a:t>
+              </a:r>
+              <a:r>
+                <a:rPr kumimoji="1" lang="ja-JP" altLang="en-US" sz="2400">
+                  <a:latin typeface="Hiragino Sans W4" panose="020B0400000000000000" pitchFamily="34" charset="-128"/>
+                  <a:ea typeface="Hiragino Sans W4" panose="020B0400000000000000" pitchFamily="34" charset="-128"/>
+                </a:rPr>
+                <a:t>の</a:t>
+              </a:r>
+              <a:r>
+                <a:rPr kumimoji="1" lang="ja-JP" altLang="en-US" sz="2400" b="1">
+                  <a:latin typeface="Hiragino Sans W4" panose="020B0400000000000000" pitchFamily="34" charset="-128"/>
+                  <a:ea typeface="Hiragino Sans W4" panose="020B0400000000000000" pitchFamily="34" charset="-128"/>
+                </a:rPr>
+                <a:t>無差別曲線</a:t>
+              </a:r>
+              <a:endParaRPr kumimoji="1" lang="en-US" altLang="ja-JP" sz="2400" dirty="0">
+                <a:latin typeface="Hiragino Sans W4" panose="020B0400000000000000" pitchFamily="34" charset="-128"/>
+                <a:ea typeface="Hiragino Sans W4" panose="020B0400000000000000" pitchFamily="34" charset="-128"/>
+              </a:endParaRPr>
+            </a:p>
+          </p:txBody>
+        </p:sp>
+        <p:sp>
+          <p:nvSpPr>
+            <p:cNvPr id="25" name="テキスト ボックス 24">
+              <a:extLst>
+                <a:ext uri="{FF2B5EF4-FFF2-40B4-BE49-F238E27FC236}">
+                  <a16:creationId xmlns:a16="http://schemas.microsoft.com/office/drawing/2014/main" id="{44858CE2-89F0-3E6B-532C-5E6244E65B3B}"/>
+                </a:ext>
+              </a:extLst>
+            </p:cNvPr>
+            <p:cNvSpPr txBox="1"/>
+            <p:nvPr/>
+          </p:nvSpPr>
+          <p:spPr>
+            <a:xfrm>
+              <a:off x="2141495" y="5074961"/>
+              <a:ext cx="3012396" cy="461665"/>
+            </a:xfrm>
+            <a:prstGeom prst="rect">
+              <a:avLst/>
+            </a:prstGeom>
+            <a:solidFill>
+              <a:schemeClr val="bg1"/>
+            </a:solidFill>
+            <a:ln>
+              <a:solidFill>
+                <a:schemeClr val="tx1"/>
+              </a:solidFill>
+            </a:ln>
+          </p:spPr>
+          <p:txBody>
+            <a:bodyPr wrap="square" rtlCol="0">
+              <a:spAutoFit/>
+            </a:bodyPr>
+            <a:lstStyle/>
+            <a:p>
+              <a:pPr algn="ctr"/>
+              <a:r>
+                <a:rPr lang="ja-JP" altLang="en-US" sz="2400" b="1">
+                  <a:latin typeface="Hiragino Sans W4" panose="020B0400000000000000" pitchFamily="34" charset="-128"/>
+                  <a:ea typeface="Hiragino Sans W4" panose="020B0400000000000000" pitchFamily="34" charset="-128"/>
+                </a:rPr>
+                <a:t>レベル</a:t>
+              </a:r>
+              <a:r>
+                <a:rPr lang="en-US" altLang="ja-JP" sz="2400" b="1" dirty="0">
+                  <a:latin typeface="Hiragino Sans W4" panose="020B0400000000000000" pitchFamily="34" charset="-128"/>
+                  <a:ea typeface="Hiragino Sans W4" panose="020B0400000000000000" pitchFamily="34" charset="-128"/>
+                </a:rPr>
+                <a:t>2</a:t>
+              </a:r>
+              <a:r>
+                <a:rPr kumimoji="1" lang="ja-JP" altLang="en-US" sz="2400">
+                  <a:latin typeface="Hiragino Sans W4" panose="020B0400000000000000" pitchFamily="34" charset="-128"/>
+                  <a:ea typeface="Hiragino Sans W4" panose="020B0400000000000000" pitchFamily="34" charset="-128"/>
+                </a:rPr>
+                <a:t>の</a:t>
+              </a:r>
+              <a:r>
+                <a:rPr kumimoji="1" lang="ja-JP" altLang="en-US" sz="2400" b="1">
+                  <a:latin typeface="Hiragino Sans W4" panose="020B0400000000000000" pitchFamily="34" charset="-128"/>
+                  <a:ea typeface="Hiragino Sans W4" panose="020B0400000000000000" pitchFamily="34" charset="-128"/>
+                </a:rPr>
+                <a:t>勝利集合</a:t>
+              </a:r>
+              <a:endParaRPr kumimoji="1" lang="en-US" altLang="ja-JP" sz="2400" dirty="0">
+                <a:latin typeface="Hiragino Sans W4" panose="020B0400000000000000" pitchFamily="34" charset="-128"/>
+                <a:ea typeface="Hiragino Sans W4" panose="020B0400000000000000" pitchFamily="34" charset="-128"/>
+              </a:endParaRPr>
+            </a:p>
+          </p:txBody>
+        </p:sp>
+        <p:sp>
+          <p:nvSpPr>
+            <p:cNvPr id="26" name="左中かっこ 25">
+              <a:extLst>
+                <a:ext uri="{FF2B5EF4-FFF2-40B4-BE49-F238E27FC236}">
+                  <a16:creationId xmlns:a16="http://schemas.microsoft.com/office/drawing/2014/main" id="{985651C7-9909-F6D7-0FE4-96370BD9C3D7}"/>
+                </a:ext>
+              </a:extLst>
+            </p:cNvPr>
+            <p:cNvSpPr/>
+            <p:nvPr/>
+          </p:nvSpPr>
+          <p:spPr>
+            <a:xfrm rot="5400000" flipH="1">
+              <a:off x="3306063" y="1448986"/>
+              <a:ext cx="349302" cy="4477536"/>
+            </a:xfrm>
+            <a:prstGeom prst="leftBrace">
+              <a:avLst/>
+            </a:prstGeom>
+            <a:ln w="38100">
+              <a:solidFill>
+                <a:srgbClr val="00B050"/>
+              </a:solidFill>
+            </a:ln>
+          </p:spPr>
+          <p:style>
+            <a:lnRef idx="2">
+              <a:schemeClr val="accent1"/>
+            </a:lnRef>
+            <a:fillRef idx="0">
+              <a:schemeClr val="accent1"/>
+            </a:fillRef>
+            <a:effectRef idx="1">
+              <a:schemeClr val="accent1"/>
+            </a:effectRef>
+            <a:fontRef idx="minor">
+              <a:schemeClr val="tx1"/>
+            </a:fontRef>
+          </p:style>
+          <p:txBody>
+            <a:bodyPr rtlCol="0" anchor="ctr"/>
+            <a:lstStyle/>
+            <a:p>
+              <a:pPr algn="ctr"/>
+              <a:endParaRPr kumimoji="1" lang="ja-JP" altLang="en-US"/>
+            </a:p>
+          </p:txBody>
+        </p:sp>
+        <p:sp>
+          <p:nvSpPr>
+            <p:cNvPr id="27" name="テキスト ボックス 26">
+              <a:extLst>
+                <a:ext uri="{FF2B5EF4-FFF2-40B4-BE49-F238E27FC236}">
+                  <a16:creationId xmlns:a16="http://schemas.microsoft.com/office/drawing/2014/main" id="{B8A2556C-7335-9685-0C65-36662EA7CAFF}"/>
+                </a:ext>
+              </a:extLst>
+            </p:cNvPr>
+            <p:cNvSpPr txBox="1"/>
+            <p:nvPr/>
+          </p:nvSpPr>
+          <p:spPr>
+            <a:xfrm>
+              <a:off x="2032106" y="3967988"/>
+              <a:ext cx="2897216" cy="461665"/>
+            </a:xfrm>
+            <a:prstGeom prst="rect">
+              <a:avLst/>
+            </a:prstGeom>
+            <a:solidFill>
+              <a:schemeClr val="bg1"/>
+            </a:solidFill>
+            <a:ln>
+              <a:solidFill>
+                <a:schemeClr val="tx1"/>
+              </a:solidFill>
+            </a:ln>
+          </p:spPr>
+          <p:txBody>
+            <a:bodyPr wrap="square" rtlCol="0">
+              <a:spAutoFit/>
+            </a:bodyPr>
+            <a:lstStyle/>
+            <a:p>
+              <a:pPr algn="ctr"/>
+              <a:r>
+                <a:rPr kumimoji="1" lang="ja-JP" altLang="en-US" sz="2400" b="1">
+                  <a:latin typeface="Hiragino Sans W4" panose="020B0400000000000000" pitchFamily="34" charset="-128"/>
+                  <a:ea typeface="Hiragino Sans W4" panose="020B0400000000000000" pitchFamily="34" charset="-128"/>
+                </a:rPr>
+                <a:t>農家</a:t>
+              </a:r>
+              <a:r>
+                <a:rPr kumimoji="1" lang="ja-JP" altLang="en-US" sz="2400">
+                  <a:latin typeface="Hiragino Sans W4" panose="020B0400000000000000" pitchFamily="34" charset="-128"/>
+                  <a:ea typeface="Hiragino Sans W4" panose="020B0400000000000000" pitchFamily="34" charset="-128"/>
+                </a:rPr>
+                <a:t>の</a:t>
+              </a:r>
+              <a:r>
+                <a:rPr kumimoji="1" lang="ja-JP" altLang="en-US" sz="2400" b="1">
+                  <a:latin typeface="Hiragino Sans W4" panose="020B0400000000000000" pitchFamily="34" charset="-128"/>
+                  <a:ea typeface="Hiragino Sans W4" panose="020B0400000000000000" pitchFamily="34" charset="-128"/>
+                </a:rPr>
+                <a:t>無差別曲線</a:t>
+              </a:r>
+              <a:endParaRPr kumimoji="1" lang="en-US" altLang="ja-JP" sz="2400" b="1" dirty="0">
+                <a:latin typeface="Hiragino Sans W4" panose="020B0400000000000000" pitchFamily="34" charset="-128"/>
+                <a:ea typeface="Hiragino Sans W4" panose="020B0400000000000000" pitchFamily="34" charset="-128"/>
+              </a:endParaRPr>
+            </a:p>
+          </p:txBody>
+        </p:sp>
+        <p:cxnSp>
+          <p:nvCxnSpPr>
+            <p:cNvPr id="30" name="直線コネクタ 29">
+              <a:extLst>
+                <a:ext uri="{FF2B5EF4-FFF2-40B4-BE49-F238E27FC236}">
+                  <a16:creationId xmlns:a16="http://schemas.microsoft.com/office/drawing/2014/main" id="{D7345F29-994C-8770-2F42-E505AD3DED38}"/>
+                </a:ext>
+              </a:extLst>
+            </p:cNvPr>
+            <p:cNvCxnSpPr>
+              <a:cxnSpLocks/>
+            </p:cNvCxnSpPr>
+            <p:nvPr/>
+          </p:nvCxnSpPr>
+          <p:spPr>
+            <a:xfrm>
+              <a:off x="1241946" y="3293701"/>
+              <a:ext cx="4477536" cy="0"/>
+            </a:xfrm>
+            <a:prstGeom prst="line">
+              <a:avLst/>
+            </a:prstGeom>
+            <a:ln w="57150">
+              <a:solidFill>
+                <a:srgbClr val="00B050"/>
+              </a:solidFill>
+            </a:ln>
+          </p:spPr>
+          <p:style>
+            <a:lnRef idx="2">
+              <a:schemeClr val="dk1"/>
+            </a:lnRef>
+            <a:fillRef idx="0">
+              <a:schemeClr val="dk1"/>
+            </a:fillRef>
+            <a:effectRef idx="1">
+              <a:schemeClr val="dk1"/>
+            </a:effectRef>
+            <a:fontRef idx="minor">
+              <a:schemeClr val="tx1"/>
+            </a:fontRef>
+          </p:style>
+        </p:cxnSp>
+      </p:grpSp>
+    </p:spTree>
+    <p:extLst>
+      <p:ext uri="{BB962C8B-B14F-4D97-AF65-F5344CB8AC3E}">
+        <p14:creationId xmlns:p14="http://schemas.microsoft.com/office/powerpoint/2010/main" val="2855691000"/>
+      </p:ext>
+    </p:extLst>
+  </p:cSld>
+  <p:clrMapOvr>
+    <a:masterClrMapping/>
+  </p:clrMapOvr>
+</p:sld>
+</file>
+
+<file path=ppt/slides/slide16.xml><?xml version="1.0" encoding="utf-8"?>
+<p:sld xmlns:a="http://schemas.openxmlformats.org/drawingml/2006/main" xmlns:r="http://schemas.openxmlformats.org/officeDocument/2006/relationships" xmlns:p="http://schemas.openxmlformats.org/presentationml/2006/main">
+  <p:cSld>
+    <p:spTree>
+      <p:nvGrpSpPr>
+        <p:cNvPr id="1" name=""/>
+        <p:cNvGrpSpPr/>
+        <p:nvPr/>
+      </p:nvGrpSpPr>
+      <p:grpSpPr>
+        <a:xfrm>
+          <a:off x="0" y="0"/>
+          <a:ext cx="0" cy="0"/>
+          <a:chOff x="0" y="0"/>
+          <a:chExt cx="0" cy="0"/>
+        </a:xfrm>
+      </p:grpSpPr>
+      <p:grpSp>
+        <p:nvGrpSpPr>
+          <p:cNvPr id="2" name="グループ化 1">
+            <a:extLst>
+              <a:ext uri="{FF2B5EF4-FFF2-40B4-BE49-F238E27FC236}">
+                <a16:creationId xmlns:a16="http://schemas.microsoft.com/office/drawing/2014/main" id="{2005DD43-09BE-250C-A348-43CBA10BBFB5}"/>
+              </a:ext>
+            </a:extLst>
+          </p:cNvPr>
+          <p:cNvGrpSpPr/>
+          <p:nvPr/>
+        </p:nvGrpSpPr>
+        <p:grpSpPr>
+          <a:xfrm>
+            <a:off x="751281" y="1838290"/>
+            <a:ext cx="10689437" cy="3700892"/>
+            <a:chOff x="751281" y="1838290"/>
+            <a:chExt cx="10689437" cy="3700892"/>
+          </a:xfrm>
+        </p:grpSpPr>
+        <p:sp>
+          <p:nvSpPr>
+            <p:cNvPr id="3" name="テキスト ボックス 2">
+              <a:extLst>
+                <a:ext uri="{FF2B5EF4-FFF2-40B4-BE49-F238E27FC236}">
+                  <a16:creationId xmlns:a16="http://schemas.microsoft.com/office/drawing/2014/main" id="{7199FA93-0A7C-0B02-5DC1-A22F8E794272}"/>
+                </a:ext>
+              </a:extLst>
+            </p:cNvPr>
+            <p:cNvSpPr txBox="1"/>
+            <p:nvPr/>
+          </p:nvSpPr>
+          <p:spPr>
+            <a:xfrm>
+              <a:off x="751281" y="2774836"/>
+              <a:ext cx="1024577" cy="461665"/>
+            </a:xfrm>
+            <a:prstGeom prst="rect">
+              <a:avLst/>
+            </a:prstGeom>
+            <a:noFill/>
+          </p:spPr>
+          <p:txBody>
+            <a:bodyPr wrap="square" rtlCol="0">
+              <a:spAutoFit/>
+            </a:bodyPr>
+            <a:lstStyle/>
+            <a:p>
+              <a:pPr algn="ctr"/>
+              <a:r>
+                <a:rPr kumimoji="1" lang="ja-JP" altLang="en-US" sz="2400">
+                  <a:latin typeface="Hiragino Kaku Gothic StdN W8" panose="020B0800000000000000" pitchFamily="34" charset="-128"/>
+                  <a:ea typeface="Hiragino Kaku Gothic StdN W8" panose="020B0800000000000000" pitchFamily="34" charset="-128"/>
+                </a:rPr>
+                <a:t>日本</a:t>
+              </a:r>
+            </a:p>
+          </p:txBody>
+        </p:sp>
+        <p:sp>
+          <p:nvSpPr>
+            <p:cNvPr id="4" name="テキスト ボックス 3">
+              <a:extLst>
+                <a:ext uri="{FF2B5EF4-FFF2-40B4-BE49-F238E27FC236}">
+                  <a16:creationId xmlns:a16="http://schemas.microsoft.com/office/drawing/2014/main" id="{C1DE3DB5-ADC0-E38C-E5DD-A031D6133278}"/>
+                </a:ext>
+              </a:extLst>
+            </p:cNvPr>
+            <p:cNvSpPr txBox="1"/>
+            <p:nvPr/>
+          </p:nvSpPr>
+          <p:spPr>
+            <a:xfrm>
+              <a:off x="10416141" y="2774836"/>
+              <a:ext cx="1024577" cy="461665"/>
+            </a:xfrm>
+            <a:prstGeom prst="rect">
+              <a:avLst/>
+            </a:prstGeom>
+            <a:noFill/>
+          </p:spPr>
+          <p:txBody>
+            <a:bodyPr wrap="square" rtlCol="0">
+              <a:spAutoFit/>
+            </a:bodyPr>
+            <a:lstStyle/>
+            <a:p>
+              <a:pPr algn="ctr"/>
+              <a:r>
+                <a:rPr kumimoji="1" lang="ja-JP" altLang="en-US" sz="2400">
+                  <a:latin typeface="Hiragino Kaku Gothic StdN W8" panose="020B0800000000000000" pitchFamily="34" charset="-128"/>
+                  <a:ea typeface="Hiragino Kaku Gothic StdN W8" panose="020B0800000000000000" pitchFamily="34" charset="-128"/>
+                </a:rPr>
+                <a:t>米国</a:t>
+              </a:r>
+            </a:p>
+          </p:txBody>
+        </p:sp>
+        <p:cxnSp>
+          <p:nvCxnSpPr>
+            <p:cNvPr id="5" name="直線コネクタ 4">
+              <a:extLst>
+                <a:ext uri="{FF2B5EF4-FFF2-40B4-BE49-F238E27FC236}">
+                  <a16:creationId xmlns:a16="http://schemas.microsoft.com/office/drawing/2014/main" id="{FF9DF667-FA73-B646-0269-F478F887ABEF}"/>
+                </a:ext>
+              </a:extLst>
+            </p:cNvPr>
+            <p:cNvCxnSpPr>
+              <a:cxnSpLocks/>
+            </p:cNvCxnSpPr>
+            <p:nvPr/>
+          </p:nvCxnSpPr>
+          <p:spPr>
+            <a:xfrm>
+              <a:off x="1263570" y="3236501"/>
+              <a:ext cx="9664860" cy="0"/>
+            </a:xfrm>
+            <a:prstGeom prst="line">
+              <a:avLst/>
+            </a:prstGeom>
+            <a:ln w="57150"/>
+          </p:spPr>
+          <p:style>
+            <a:lnRef idx="2">
+              <a:schemeClr val="dk1"/>
+            </a:lnRef>
+            <a:fillRef idx="0">
+              <a:schemeClr val="dk1"/>
+            </a:fillRef>
+            <a:effectRef idx="1">
+              <a:schemeClr val="dk1"/>
+            </a:effectRef>
+            <a:fontRef idx="minor">
+              <a:schemeClr val="tx1"/>
+            </a:fontRef>
+          </p:style>
+        </p:cxnSp>
+        <p:sp>
+          <p:nvSpPr>
+            <p:cNvPr id="6" name="正方形/長方形 5">
+              <a:extLst>
+                <a:ext uri="{FF2B5EF4-FFF2-40B4-BE49-F238E27FC236}">
+                  <a16:creationId xmlns:a16="http://schemas.microsoft.com/office/drawing/2014/main" id="{031DBD57-980D-AA3F-4B94-13C5866C18C7}"/>
+                </a:ext>
+              </a:extLst>
+            </p:cNvPr>
+            <p:cNvSpPr/>
+            <p:nvPr/>
+          </p:nvSpPr>
+          <p:spPr>
+            <a:xfrm>
+              <a:off x="4424399" y="2966678"/>
+              <a:ext cx="45719" cy="539645"/>
+            </a:xfrm>
+            <a:prstGeom prst="rect">
+              <a:avLst/>
+            </a:prstGeom>
+            <a:solidFill>
+              <a:schemeClr val="tx1"/>
+            </a:solidFill>
+            <a:ln>
+              <a:noFill/>
+            </a:ln>
+          </p:spPr>
+          <p:style>
+            <a:lnRef idx="2">
+              <a:schemeClr val="accent1">
+                <a:shade val="15000"/>
+              </a:schemeClr>
+            </a:lnRef>
+            <a:fillRef idx="1">
+              <a:schemeClr val="accent1"/>
+            </a:fillRef>
+            <a:effectRef idx="0">
+              <a:schemeClr val="accent1"/>
+            </a:effectRef>
+            <a:fontRef idx="minor">
+              <a:schemeClr val="lt1"/>
+            </a:fontRef>
+          </p:style>
+          <p:txBody>
+            <a:bodyPr rtlCol="0" anchor="ctr"/>
+            <a:lstStyle/>
+            <a:p>
+              <a:pPr algn="ctr"/>
+              <a:endParaRPr kumimoji="1" lang="ja-JP" altLang="en-US"/>
+            </a:p>
+          </p:txBody>
+        </p:sp>
+        <p:sp>
+          <p:nvSpPr>
+            <p:cNvPr id="7" name="正方形/長方形 6">
+              <a:extLst>
+                <a:ext uri="{FF2B5EF4-FFF2-40B4-BE49-F238E27FC236}">
+                  <a16:creationId xmlns:a16="http://schemas.microsoft.com/office/drawing/2014/main" id="{F47D7D34-079E-C7AC-C137-52379667B16B}"/>
+                </a:ext>
+              </a:extLst>
+            </p:cNvPr>
+            <p:cNvSpPr/>
+            <p:nvPr/>
+          </p:nvSpPr>
+          <p:spPr>
+            <a:xfrm>
+              <a:off x="7712280" y="2954460"/>
+              <a:ext cx="55320" cy="539645"/>
+            </a:xfrm>
+            <a:prstGeom prst="rect">
+              <a:avLst/>
+            </a:prstGeom>
+            <a:solidFill>
+              <a:schemeClr val="tx1"/>
+            </a:solidFill>
+            <a:ln>
+              <a:noFill/>
+            </a:ln>
+          </p:spPr>
+          <p:style>
+            <a:lnRef idx="2">
+              <a:schemeClr val="accent1">
+                <a:shade val="15000"/>
+              </a:schemeClr>
+            </a:lnRef>
+            <a:fillRef idx="1">
+              <a:schemeClr val="accent1"/>
+            </a:fillRef>
+            <a:effectRef idx="0">
+              <a:schemeClr val="accent1"/>
+            </a:effectRef>
+            <a:fontRef idx="minor">
+              <a:schemeClr val="lt1"/>
+            </a:fontRef>
+          </p:style>
+          <p:txBody>
+            <a:bodyPr rtlCol="0" anchor="ctr"/>
+            <a:lstStyle/>
+            <a:p>
+              <a:pPr algn="ctr"/>
+              <a:endParaRPr kumimoji="1" lang="ja-JP" altLang="en-US"/>
+            </a:p>
+          </p:txBody>
+        </p:sp>
+        <p:cxnSp>
+          <p:nvCxnSpPr>
+            <p:cNvPr id="8" name="直線コネクタ 7">
+              <a:extLst>
+                <a:ext uri="{FF2B5EF4-FFF2-40B4-BE49-F238E27FC236}">
+                  <a16:creationId xmlns:a16="http://schemas.microsoft.com/office/drawing/2014/main" id="{82C2D106-F7CA-84FF-DC07-BC26A78BD4B5}"/>
+                </a:ext>
+              </a:extLst>
+            </p:cNvPr>
+            <p:cNvCxnSpPr>
+              <a:cxnSpLocks/>
+            </p:cNvCxnSpPr>
+            <p:nvPr/>
+          </p:nvCxnSpPr>
+          <p:spPr>
+            <a:xfrm>
+              <a:off x="1241946" y="3236501"/>
+              <a:ext cx="6470334" cy="0"/>
+            </a:xfrm>
+            <a:prstGeom prst="line">
+              <a:avLst/>
+            </a:prstGeom>
+            <a:ln w="57150">
+              <a:solidFill>
+                <a:srgbClr val="00B0F0"/>
+              </a:solidFill>
+            </a:ln>
+          </p:spPr>
+          <p:style>
+            <a:lnRef idx="2">
+              <a:schemeClr val="dk1"/>
+            </a:lnRef>
+            <a:fillRef idx="0">
+              <a:schemeClr val="dk1"/>
+            </a:fillRef>
+            <a:effectRef idx="1">
+              <a:schemeClr val="dk1"/>
+            </a:effectRef>
+            <a:fontRef idx="minor">
+              <a:schemeClr val="tx1"/>
+            </a:fontRef>
+          </p:style>
+        </p:cxnSp>
+        <p:sp>
+          <p:nvSpPr>
+            <p:cNvPr id="9" name="左中かっこ 8">
+              <a:extLst>
+                <a:ext uri="{FF2B5EF4-FFF2-40B4-BE49-F238E27FC236}">
+                  <a16:creationId xmlns:a16="http://schemas.microsoft.com/office/drawing/2014/main" id="{95D9B733-DC17-B1C9-A4C0-BDEB34378E48}"/>
+                </a:ext>
+              </a:extLst>
+            </p:cNvPr>
+            <p:cNvSpPr/>
+            <p:nvPr/>
+          </p:nvSpPr>
+          <p:spPr>
+            <a:xfrm rot="5400000">
+              <a:off x="4802117" y="1950836"/>
+              <a:ext cx="539645" cy="1295084"/>
+            </a:xfrm>
+            <a:prstGeom prst="leftBrace">
+              <a:avLst/>
+            </a:prstGeom>
+            <a:ln w="38100">
+              <a:solidFill>
+                <a:srgbClr val="FF0000"/>
+              </a:solidFill>
+            </a:ln>
+          </p:spPr>
+          <p:style>
+            <a:lnRef idx="2">
+              <a:schemeClr val="accent1"/>
+            </a:lnRef>
+            <a:fillRef idx="0">
+              <a:schemeClr val="accent1"/>
+            </a:fillRef>
+            <a:effectRef idx="1">
+              <a:schemeClr val="accent1"/>
+            </a:effectRef>
+            <a:fontRef idx="minor">
+              <a:schemeClr val="tx1"/>
+            </a:fontRef>
+          </p:style>
+          <p:txBody>
+            <a:bodyPr rtlCol="0" anchor="ctr"/>
+            <a:lstStyle/>
+            <a:p>
+              <a:pPr algn="ctr"/>
+              <a:endParaRPr kumimoji="1" lang="ja-JP" altLang="en-US"/>
+            </a:p>
+          </p:txBody>
+        </p:sp>
+        <p:sp>
+          <p:nvSpPr>
+            <p:cNvPr id="10" name="左中かっこ 9">
+              <a:extLst>
+                <a:ext uri="{FF2B5EF4-FFF2-40B4-BE49-F238E27FC236}">
+                  <a16:creationId xmlns:a16="http://schemas.microsoft.com/office/drawing/2014/main" id="{018F4A7E-BE45-21B5-D2C9-259A87E96FE9}"/>
+                </a:ext>
+              </a:extLst>
+            </p:cNvPr>
+            <p:cNvSpPr/>
+            <p:nvPr/>
+          </p:nvSpPr>
+          <p:spPr>
+            <a:xfrm rot="5400000" flipH="1">
+              <a:off x="2721340" y="1973794"/>
+              <a:ext cx="1542935" cy="4453348"/>
+            </a:xfrm>
+            <a:prstGeom prst="leftBrace">
+              <a:avLst/>
+            </a:prstGeom>
+            <a:ln w="38100">
+              <a:solidFill>
+                <a:srgbClr val="00B050"/>
+              </a:solidFill>
+            </a:ln>
+          </p:spPr>
+          <p:style>
+            <a:lnRef idx="2">
+              <a:schemeClr val="accent1"/>
+            </a:lnRef>
+            <a:fillRef idx="0">
+              <a:schemeClr val="accent1"/>
+            </a:fillRef>
+            <a:effectRef idx="1">
+              <a:schemeClr val="accent1"/>
+            </a:effectRef>
+            <a:fontRef idx="minor">
+              <a:schemeClr val="tx1"/>
+            </a:fontRef>
+          </p:style>
+          <p:txBody>
+            <a:bodyPr rtlCol="0" anchor="ctr"/>
+            <a:lstStyle/>
+            <a:p>
+              <a:pPr algn="ctr"/>
+              <a:endParaRPr kumimoji="1" lang="ja-JP" altLang="en-US"/>
+            </a:p>
+          </p:txBody>
+        </p:sp>
+        <p:sp>
+          <p:nvSpPr>
+            <p:cNvPr id="11" name="テキスト ボックス 10">
+              <a:extLst>
+                <a:ext uri="{FF2B5EF4-FFF2-40B4-BE49-F238E27FC236}">
+                  <a16:creationId xmlns:a16="http://schemas.microsoft.com/office/drawing/2014/main" id="{5282A378-9141-B379-7CC5-012CD043C952}"/>
+                </a:ext>
+              </a:extLst>
+            </p:cNvPr>
+            <p:cNvSpPr txBox="1"/>
+            <p:nvPr/>
+          </p:nvSpPr>
+          <p:spPr>
+            <a:xfrm>
+              <a:off x="3844924" y="1838290"/>
+              <a:ext cx="2454029" cy="461665"/>
+            </a:xfrm>
+            <a:prstGeom prst="rect">
+              <a:avLst/>
+            </a:prstGeom>
+            <a:solidFill>
+              <a:schemeClr val="bg1"/>
+            </a:solidFill>
+            <a:ln>
+              <a:solidFill>
+                <a:schemeClr val="tx1"/>
+              </a:solidFill>
+            </a:ln>
+          </p:spPr>
+          <p:txBody>
+            <a:bodyPr wrap="square" rtlCol="0">
+              <a:spAutoFit/>
+            </a:bodyPr>
+            <a:lstStyle/>
+            <a:p>
+              <a:pPr algn="ctr"/>
+              <a:r>
+                <a:rPr kumimoji="1" lang="ja-JP" altLang="en-US" sz="2400" b="1">
+                  <a:latin typeface="Hiragino Sans W4" panose="020B0400000000000000" pitchFamily="34" charset="-128"/>
+                  <a:ea typeface="Hiragino Sans W4" panose="020B0400000000000000" pitchFamily="34" charset="-128"/>
+                </a:rPr>
+                <a:t>新しい勝利集合</a:t>
+              </a:r>
+              <a:endParaRPr kumimoji="1" lang="en-US" altLang="ja-JP" sz="2400" dirty="0">
+                <a:latin typeface="Hiragino Sans W4" panose="020B0400000000000000" pitchFamily="34" charset="-128"/>
+                <a:ea typeface="Hiragino Sans W4" panose="020B0400000000000000" pitchFamily="34" charset="-128"/>
+              </a:endParaRPr>
+            </a:p>
+          </p:txBody>
+        </p:sp>
+        <p:sp>
+          <p:nvSpPr>
+            <p:cNvPr id="12" name="テキスト ボックス 11">
+              <a:extLst>
+                <a:ext uri="{FF2B5EF4-FFF2-40B4-BE49-F238E27FC236}">
+                  <a16:creationId xmlns:a16="http://schemas.microsoft.com/office/drawing/2014/main" id="{21C31E6A-0489-A4A7-6264-23E75BB0D3AC}"/>
+                </a:ext>
+              </a:extLst>
+            </p:cNvPr>
+            <p:cNvSpPr txBox="1"/>
+            <p:nvPr/>
+          </p:nvSpPr>
+          <p:spPr>
+            <a:xfrm>
+              <a:off x="1584828" y="5077517"/>
+              <a:ext cx="3815960" cy="461665"/>
+            </a:xfrm>
+            <a:prstGeom prst="rect">
+              <a:avLst/>
+            </a:prstGeom>
+            <a:solidFill>
+              <a:schemeClr val="bg1"/>
+            </a:solidFill>
+            <a:ln>
+              <a:solidFill>
+                <a:schemeClr val="tx1"/>
+              </a:solidFill>
+            </a:ln>
+          </p:spPr>
+          <p:txBody>
+            <a:bodyPr wrap="square" rtlCol="0">
+              <a:spAutoFit/>
+            </a:bodyPr>
+            <a:lstStyle/>
+            <a:p>
+              <a:pPr algn="ctr"/>
+              <a:r>
+                <a:rPr lang="ja-JP" altLang="en-US" sz="2400" b="1">
+                  <a:latin typeface="Hiragino Sans W4" panose="020B0400000000000000" pitchFamily="34" charset="-128"/>
+                  <a:ea typeface="Hiragino Sans W4" panose="020B0400000000000000" pitchFamily="34" charset="-128"/>
+                </a:rPr>
+                <a:t>新しい日本の無差別曲線</a:t>
+              </a:r>
+              <a:endParaRPr kumimoji="1" lang="en-US" altLang="ja-JP" sz="2400" dirty="0">
+                <a:latin typeface="Hiragino Sans W4" panose="020B0400000000000000" pitchFamily="34" charset="-128"/>
+                <a:ea typeface="Hiragino Sans W4" panose="020B0400000000000000" pitchFamily="34" charset="-128"/>
+              </a:endParaRPr>
+            </a:p>
+          </p:txBody>
+        </p:sp>
+        <p:cxnSp>
+          <p:nvCxnSpPr>
+            <p:cNvPr id="15" name="直線コネクタ 14">
+              <a:extLst>
+                <a:ext uri="{FF2B5EF4-FFF2-40B4-BE49-F238E27FC236}">
+                  <a16:creationId xmlns:a16="http://schemas.microsoft.com/office/drawing/2014/main" id="{59B5A3EB-7AAF-CCF3-24A0-E2BBCB87950A}"/>
+                </a:ext>
+              </a:extLst>
+            </p:cNvPr>
+            <p:cNvCxnSpPr>
+              <a:cxnSpLocks/>
+            </p:cNvCxnSpPr>
+            <p:nvPr/>
+          </p:nvCxnSpPr>
+          <p:spPr>
+            <a:xfrm>
+              <a:off x="1241946" y="3293701"/>
+              <a:ext cx="4477536" cy="0"/>
+            </a:xfrm>
+            <a:prstGeom prst="line">
+              <a:avLst/>
+            </a:prstGeom>
+            <a:ln w="57150">
+              <a:solidFill>
+                <a:srgbClr val="00B050"/>
+              </a:solidFill>
+            </a:ln>
+          </p:spPr>
+          <p:style>
+            <a:lnRef idx="2">
+              <a:schemeClr val="dk1"/>
+            </a:lnRef>
+            <a:fillRef idx="0">
+              <a:schemeClr val="dk1"/>
+            </a:fillRef>
+            <a:effectRef idx="1">
+              <a:schemeClr val="dk1"/>
+            </a:effectRef>
+            <a:fontRef idx="minor">
+              <a:schemeClr val="tx1"/>
+            </a:fontRef>
+          </p:style>
+        </p:cxnSp>
+      </p:grpSp>
+      <p:cxnSp>
+        <p:nvCxnSpPr>
+          <p:cNvPr id="16" name="直線コネクタ 15">
+            <a:extLst>
+              <a:ext uri="{FF2B5EF4-FFF2-40B4-BE49-F238E27FC236}">
+                <a16:creationId xmlns:a16="http://schemas.microsoft.com/office/drawing/2014/main" id="{6FF65E78-DB39-0554-5059-9E56FFE92796}"/>
+              </a:ext>
+            </a:extLst>
+          </p:cNvPr>
+          <p:cNvCxnSpPr>
+            <a:cxnSpLocks/>
+          </p:cNvCxnSpPr>
+          <p:nvPr/>
+        </p:nvCxnSpPr>
+        <p:spPr>
+          <a:xfrm>
+            <a:off x="4470118" y="3236501"/>
+            <a:ext cx="1249364" cy="0"/>
+          </a:xfrm>
+          <a:prstGeom prst="line">
+            <a:avLst/>
+          </a:prstGeom>
+          <a:ln w="57150">
+            <a:solidFill>
+              <a:srgbClr val="FF0000"/>
+            </a:solidFill>
+          </a:ln>
+        </p:spPr>
+        <p:style>
+          <a:lnRef idx="2">
+            <a:schemeClr val="dk1"/>
+          </a:lnRef>
+          <a:fillRef idx="0">
+            <a:schemeClr val="dk1"/>
+          </a:fillRef>
+          <a:effectRef idx="1">
+            <a:schemeClr val="dk1"/>
+          </a:effectRef>
+          <a:fontRef idx="minor">
+            <a:schemeClr val="tx1"/>
+          </a:fontRef>
+        </p:style>
+      </p:cxnSp>
+    </p:spTree>
+    <p:extLst>
+      <p:ext uri="{BB962C8B-B14F-4D97-AF65-F5344CB8AC3E}">
+        <p14:creationId xmlns:p14="http://schemas.microsoft.com/office/powerpoint/2010/main" val="1333495777"/>
+      </p:ext>
+    </p:extLst>
+  </p:cSld>
+  <p:clrMapOvr>
+    <a:masterClrMapping/>
+  </p:clrMapOvr>
+</p:sld>
+</file>
+
 <file path=ppt/slides/slide2.xml><?xml version="1.0" encoding="utf-8"?>
 <p:sld xmlns:a="http://schemas.openxmlformats.org/drawingml/2006/main" xmlns:r="http://schemas.openxmlformats.org/officeDocument/2006/relationships" xmlns:p="http://schemas.openxmlformats.org/presentationml/2006/main">
   <p:cSld>

--- a/figs/DIYfigures_ipe1.pptx
+++ b/figs/DIYfigures_ipe1.pptx
@@ -3776,7 +3776,7 @@
           <a:p>
             <a:fld id="{29D38AE0-A022-EC4B-ADED-C3987264F154}" type="datetimeFigureOut">
               <a:rPr kumimoji="1" lang="ja-JP" altLang="en-US" smtClean="0"/>
-              <a:t>2026/5/26</a:t>
+              <a:t>2026/6/5</a:t>
             </a:fld>
             <a:endParaRPr kumimoji="1" lang="ja-JP" altLang="en-US"/>
           </a:p>
@@ -4006,7 +4006,7 @@
           <a:p>
             <a:fld id="{29D38AE0-A022-EC4B-ADED-C3987264F154}" type="datetimeFigureOut">
               <a:rPr kumimoji="1" lang="ja-JP" altLang="en-US" smtClean="0"/>
-              <a:t>2026/5/26</a:t>
+              <a:t>2026/6/5</a:t>
             </a:fld>
             <a:endParaRPr kumimoji="1" lang="ja-JP" altLang="en-US"/>
           </a:p>
@@ -4246,7 +4246,7 @@
           <a:p>
             <a:fld id="{29D38AE0-A022-EC4B-ADED-C3987264F154}" type="datetimeFigureOut">
               <a:rPr kumimoji="1" lang="ja-JP" altLang="en-US" smtClean="0"/>
-              <a:t>2026/5/26</a:t>
+              <a:t>2026/6/5</a:t>
             </a:fld>
             <a:endParaRPr kumimoji="1" lang="ja-JP" altLang="en-US"/>
           </a:p>
@@ -4476,7 +4476,7 @@
           <a:p>
             <a:fld id="{29D38AE0-A022-EC4B-ADED-C3987264F154}" type="datetimeFigureOut">
               <a:rPr kumimoji="1" lang="ja-JP" altLang="en-US" smtClean="0"/>
-              <a:t>2026/5/26</a:t>
+              <a:t>2026/6/5</a:t>
             </a:fld>
             <a:endParaRPr kumimoji="1" lang="ja-JP" altLang="en-US"/>
           </a:p>
@@ -4751,7 +4751,7 @@
           <a:p>
             <a:fld id="{29D38AE0-A022-EC4B-ADED-C3987264F154}" type="datetimeFigureOut">
               <a:rPr kumimoji="1" lang="ja-JP" altLang="en-US" smtClean="0"/>
-              <a:t>2026/5/26</a:t>
+              <a:t>2026/6/5</a:t>
             </a:fld>
             <a:endParaRPr kumimoji="1" lang="ja-JP" altLang="en-US"/>
           </a:p>
@@ -5080,7 +5080,7 @@
           <a:p>
             <a:fld id="{29D38AE0-A022-EC4B-ADED-C3987264F154}" type="datetimeFigureOut">
               <a:rPr kumimoji="1" lang="ja-JP" altLang="en-US" smtClean="0"/>
-              <a:t>2026/5/26</a:t>
+              <a:t>2026/6/5</a:t>
             </a:fld>
             <a:endParaRPr kumimoji="1" lang="ja-JP" altLang="en-US"/>
           </a:p>
@@ -5556,7 +5556,7 @@
           <a:p>
             <a:fld id="{29D38AE0-A022-EC4B-ADED-C3987264F154}" type="datetimeFigureOut">
               <a:rPr kumimoji="1" lang="ja-JP" altLang="en-US" smtClean="0"/>
-              <a:t>2026/5/26</a:t>
+              <a:t>2026/6/5</a:t>
             </a:fld>
             <a:endParaRPr kumimoji="1" lang="ja-JP" altLang="en-US"/>
           </a:p>
@@ -5697,7 +5697,7 @@
           <a:p>
             <a:fld id="{29D38AE0-A022-EC4B-ADED-C3987264F154}" type="datetimeFigureOut">
               <a:rPr kumimoji="1" lang="ja-JP" altLang="en-US" smtClean="0"/>
-              <a:t>2026/5/26</a:t>
+              <a:t>2026/6/5</a:t>
             </a:fld>
             <a:endParaRPr kumimoji="1" lang="ja-JP" altLang="en-US"/>
           </a:p>
@@ -5810,7 +5810,7 @@
           <a:p>
             <a:fld id="{29D38AE0-A022-EC4B-ADED-C3987264F154}" type="datetimeFigureOut">
               <a:rPr kumimoji="1" lang="ja-JP" altLang="en-US" smtClean="0"/>
-              <a:t>2026/5/26</a:t>
+              <a:t>2026/6/5</a:t>
             </a:fld>
             <a:endParaRPr kumimoji="1" lang="ja-JP" altLang="en-US"/>
           </a:p>
@@ -6153,7 +6153,7 @@
           <a:p>
             <a:fld id="{29D38AE0-A022-EC4B-ADED-C3987264F154}" type="datetimeFigureOut">
               <a:rPr kumimoji="1" lang="ja-JP" altLang="en-US" smtClean="0"/>
-              <a:t>2026/5/26</a:t>
+              <a:t>2026/6/5</a:t>
             </a:fld>
             <a:endParaRPr kumimoji="1" lang="ja-JP" altLang="en-US"/>
           </a:p>
@@ -6441,7 +6441,7 @@
           <a:p>
             <a:fld id="{29D38AE0-A022-EC4B-ADED-C3987264F154}" type="datetimeFigureOut">
               <a:rPr kumimoji="1" lang="ja-JP" altLang="en-US" smtClean="0"/>
-              <a:t>2026/5/26</a:t>
+              <a:t>2026/6/5</a:t>
             </a:fld>
             <a:endParaRPr kumimoji="1" lang="ja-JP" altLang="en-US"/>
           </a:p>
@@ -6714,7 +6714,7 @@
           <a:p>
             <a:fld id="{29D38AE0-A022-EC4B-ADED-C3987264F154}" type="datetimeFigureOut">
               <a:rPr kumimoji="1" lang="ja-JP" altLang="en-US" smtClean="0"/>
-              <a:t>2026/5/26</a:t>
+              <a:t>2026/6/5</a:t>
             </a:fld>
             <a:endParaRPr kumimoji="1" lang="ja-JP" altLang="en-US"/>
           </a:p>
@@ -7957,7 +7957,7 @@
             <a:p>
               <a:pPr algn="ctr"/>
               <a:r>
-                <a:rPr kumimoji="1" lang="en-US" altLang="ja-JP" dirty="0">
+                <a:rPr kumimoji="1" lang="en-US" altLang="ja-JP">
                   <a:solidFill>
                     <a:schemeClr val="tx1"/>
                   </a:solidFill>
@@ -7965,26 +7965,6 @@
                   <a:ea typeface="HGPSoeiKakugothicUB" panose="020B0900000000000000" pitchFamily="34" charset="-128"/>
                 </a:rPr>
                 <a:t>GATT</a:t>
-              </a:r>
-              <a:r>
-                <a:rPr kumimoji="1" lang="ja-JP" altLang="en-US">
-                  <a:solidFill>
-                    <a:schemeClr val="tx1"/>
-                  </a:solidFill>
-                  <a:latin typeface="HGPSoeiKakugothicUB" panose="020B0900000000000000" pitchFamily="34" charset="-128"/>
-                  <a:ea typeface="HGPSoeiKakugothicUB" panose="020B0900000000000000" pitchFamily="34" charset="-128"/>
-                </a:rPr>
-                <a:t>／</a:t>
-              </a:r>
-              <a:r>
-                <a:rPr kumimoji="1" lang="en-US" altLang="ja-JP" dirty="0">
-                  <a:solidFill>
-                    <a:schemeClr val="tx1"/>
-                  </a:solidFill>
-                  <a:latin typeface="HGPSoeiKakugothicUB" panose="020B0900000000000000" pitchFamily="34" charset="-128"/>
-                  <a:ea typeface="HGPSoeiKakugothicUB" panose="020B0900000000000000" pitchFamily="34" charset="-128"/>
-                </a:rPr>
-                <a:t>WTO</a:t>
               </a:r>
               <a:r>
                 <a:rPr kumimoji="1" lang="ja-JP" altLang="en-US">

--- a/figs/DIYfigures_ipe1.pptx
+++ b/figs/DIYfigures_ipe1.pptx
@@ -21,6 +21,8 @@
     <p:sldId id="270" r:id="rId15"/>
     <p:sldId id="271" r:id="rId16"/>
     <p:sldId id="272" r:id="rId17"/>
+    <p:sldId id="273" r:id="rId18"/>
+    <p:sldId id="274" r:id="rId19"/>
   </p:sldIdLst>
   <p:sldSz cx="12192000" cy="6858000"/>
   <p:notesSz cx="6858000" cy="9144000"/>
@@ -934,6 +936,813 @@
 </dgm:colorsDef>
 </file>
 
+<file path=ppt/diagrams/colors2.xml><?xml version="1.0" encoding="utf-8"?>
+<dgm:colorsDef xmlns:dgm="http://schemas.openxmlformats.org/drawingml/2006/diagram" xmlns:a="http://schemas.openxmlformats.org/drawingml/2006/main" uniqueId="urn:microsoft.com/office/officeart/2005/8/colors/accent0_1">
+  <dgm:title val=""/>
+  <dgm:desc val=""/>
+  <dgm:catLst>
+    <dgm:cat type="mainScheme" pri="10100"/>
+  </dgm:catLst>
+  <dgm:styleLbl name="node0">
+    <dgm:fillClrLst meth="repeat">
+      <a:schemeClr val="lt1"/>
+    </dgm:fillClrLst>
+    <dgm:linClrLst meth="repeat">
+      <a:schemeClr val="dk1">
+        <a:shade val="80000"/>
+      </a:schemeClr>
+    </dgm:linClrLst>
+    <dgm:effectClrLst/>
+    <dgm:txLinClrLst/>
+    <dgm:txFillClrLst meth="repeat">
+      <a:schemeClr val="dk1"/>
+    </dgm:txFillClrLst>
+    <dgm:txEffectClrLst/>
+  </dgm:styleLbl>
+  <dgm:styleLbl name="node1">
+    <dgm:fillClrLst meth="repeat">
+      <a:schemeClr val="lt1"/>
+    </dgm:fillClrLst>
+    <dgm:linClrLst meth="repeat">
+      <a:schemeClr val="dk1">
+        <a:shade val="80000"/>
+      </a:schemeClr>
+    </dgm:linClrLst>
+    <dgm:effectClrLst/>
+    <dgm:txLinClrLst/>
+    <dgm:txFillClrLst meth="repeat">
+      <a:schemeClr val="dk1"/>
+    </dgm:txFillClrLst>
+    <dgm:txEffectClrLst/>
+  </dgm:styleLbl>
+  <dgm:styleLbl name="alignNode1">
+    <dgm:fillClrLst meth="repeat">
+      <a:schemeClr val="lt1"/>
+    </dgm:fillClrLst>
+    <dgm:linClrLst meth="repeat">
+      <a:schemeClr val="dk1">
+        <a:shade val="80000"/>
+      </a:schemeClr>
+    </dgm:linClrLst>
+    <dgm:effectClrLst/>
+    <dgm:txLinClrLst/>
+    <dgm:txFillClrLst meth="repeat">
+      <a:schemeClr val="dk1"/>
+    </dgm:txFillClrLst>
+    <dgm:txEffectClrLst/>
+  </dgm:styleLbl>
+  <dgm:styleLbl name="lnNode1">
+    <dgm:fillClrLst meth="repeat">
+      <a:schemeClr val="lt1"/>
+    </dgm:fillClrLst>
+    <dgm:linClrLst meth="repeat">
+      <a:schemeClr val="dk1">
+        <a:shade val="80000"/>
+      </a:schemeClr>
+    </dgm:linClrLst>
+    <dgm:effectClrLst/>
+    <dgm:txLinClrLst/>
+    <dgm:txFillClrLst meth="repeat">
+      <a:schemeClr val="dk1"/>
+    </dgm:txFillClrLst>
+    <dgm:txEffectClrLst/>
+  </dgm:styleLbl>
+  <dgm:styleLbl name="vennNode1">
+    <dgm:fillClrLst meth="repeat">
+      <a:schemeClr val="lt1">
+        <a:alpha val="50000"/>
+      </a:schemeClr>
+    </dgm:fillClrLst>
+    <dgm:linClrLst meth="repeat">
+      <a:schemeClr val="dk1">
+        <a:shade val="80000"/>
+      </a:schemeClr>
+    </dgm:linClrLst>
+    <dgm:effectClrLst/>
+    <dgm:txLinClrLst/>
+    <dgm:txFillClrLst/>
+    <dgm:txEffectClrLst/>
+  </dgm:styleLbl>
+  <dgm:styleLbl name="node2">
+    <dgm:fillClrLst meth="repeat">
+      <a:schemeClr val="lt1"/>
+    </dgm:fillClrLst>
+    <dgm:linClrLst meth="repeat">
+      <a:schemeClr val="dk1">
+        <a:shade val="80000"/>
+      </a:schemeClr>
+    </dgm:linClrLst>
+    <dgm:effectClrLst/>
+    <dgm:txLinClrLst/>
+    <dgm:txFillClrLst meth="repeat">
+      <a:schemeClr val="dk1"/>
+    </dgm:txFillClrLst>
+    <dgm:txEffectClrLst/>
+  </dgm:styleLbl>
+  <dgm:styleLbl name="node3">
+    <dgm:fillClrLst meth="repeat">
+      <a:schemeClr val="lt1"/>
+    </dgm:fillClrLst>
+    <dgm:linClrLst meth="repeat">
+      <a:schemeClr val="dk1">
+        <a:shade val="80000"/>
+      </a:schemeClr>
+    </dgm:linClrLst>
+    <dgm:effectClrLst/>
+    <dgm:txLinClrLst/>
+    <dgm:txFillClrLst meth="repeat">
+      <a:schemeClr val="dk1"/>
+    </dgm:txFillClrLst>
+    <dgm:txEffectClrLst/>
+  </dgm:styleLbl>
+  <dgm:styleLbl name="node4">
+    <dgm:fillClrLst meth="repeat">
+      <a:schemeClr val="lt1"/>
+    </dgm:fillClrLst>
+    <dgm:linClrLst meth="repeat">
+      <a:schemeClr val="dk1">
+        <a:shade val="80000"/>
+      </a:schemeClr>
+    </dgm:linClrLst>
+    <dgm:effectClrLst/>
+    <dgm:txLinClrLst/>
+    <dgm:txFillClrLst meth="repeat">
+      <a:schemeClr val="dk1"/>
+    </dgm:txFillClrLst>
+    <dgm:txEffectClrLst/>
+  </dgm:styleLbl>
+  <dgm:styleLbl name="fgImgPlace1">
+    <dgm:fillClrLst meth="repeat">
+      <a:schemeClr val="dk1">
+        <a:tint val="40000"/>
+      </a:schemeClr>
+    </dgm:fillClrLst>
+    <dgm:linClrLst meth="repeat">
+      <a:schemeClr val="dk1">
+        <a:shade val="80000"/>
+      </a:schemeClr>
+    </dgm:linClrLst>
+    <dgm:effectClrLst/>
+    <dgm:txLinClrLst/>
+    <dgm:txFillClrLst meth="repeat">
+      <a:schemeClr val="lt1"/>
+    </dgm:txFillClrLst>
+    <dgm:txEffectClrLst/>
+  </dgm:styleLbl>
+  <dgm:styleLbl name="alignImgPlace1">
+    <dgm:fillClrLst meth="repeat">
+      <a:schemeClr val="dk1">
+        <a:tint val="40000"/>
+      </a:schemeClr>
+    </dgm:fillClrLst>
+    <dgm:linClrLst meth="repeat">
+      <a:schemeClr val="dk1">
+        <a:shade val="80000"/>
+      </a:schemeClr>
+    </dgm:linClrLst>
+    <dgm:effectClrLst/>
+    <dgm:txLinClrLst/>
+    <dgm:txFillClrLst meth="repeat">
+      <a:schemeClr val="lt1"/>
+    </dgm:txFillClrLst>
+    <dgm:txEffectClrLst/>
+  </dgm:styleLbl>
+  <dgm:styleLbl name="bgImgPlace1">
+    <dgm:fillClrLst meth="repeat">
+      <a:schemeClr val="dk1">
+        <a:tint val="40000"/>
+      </a:schemeClr>
+    </dgm:fillClrLst>
+    <dgm:linClrLst meth="repeat">
+      <a:schemeClr val="dk1">
+        <a:shade val="80000"/>
+      </a:schemeClr>
+    </dgm:linClrLst>
+    <dgm:effectClrLst/>
+    <dgm:txLinClrLst/>
+    <dgm:txFillClrLst meth="repeat">
+      <a:schemeClr val="lt1"/>
+    </dgm:txFillClrLst>
+    <dgm:txEffectClrLst/>
+  </dgm:styleLbl>
+  <dgm:styleLbl name="sibTrans2D1">
+    <dgm:fillClrLst meth="repeat">
+      <a:schemeClr val="dk1">
+        <a:tint val="60000"/>
+      </a:schemeClr>
+    </dgm:fillClrLst>
+    <dgm:linClrLst meth="repeat">
+      <a:schemeClr val="dk1">
+        <a:tint val="60000"/>
+      </a:schemeClr>
+    </dgm:linClrLst>
+    <dgm:effectClrLst/>
+    <dgm:txLinClrLst/>
+    <dgm:txFillClrLst meth="repeat">
+      <a:schemeClr val="dk1"/>
+    </dgm:txFillClrLst>
+    <dgm:txEffectClrLst/>
+  </dgm:styleLbl>
+  <dgm:styleLbl name="fgSibTrans2D1">
+    <dgm:fillClrLst meth="repeat">
+      <a:schemeClr val="dk1">
+        <a:tint val="60000"/>
+      </a:schemeClr>
+    </dgm:fillClrLst>
+    <dgm:linClrLst meth="repeat">
+      <a:schemeClr val="dk1">
+        <a:tint val="60000"/>
+      </a:schemeClr>
+    </dgm:linClrLst>
+    <dgm:effectClrLst/>
+    <dgm:txLinClrLst/>
+    <dgm:txFillClrLst meth="repeat">
+      <a:schemeClr val="dk1"/>
+    </dgm:txFillClrLst>
+    <dgm:txEffectClrLst/>
+  </dgm:styleLbl>
+  <dgm:styleLbl name="bgSibTrans2D1">
+    <dgm:fillClrLst meth="repeat">
+      <a:schemeClr val="dk1">
+        <a:tint val="60000"/>
+      </a:schemeClr>
+    </dgm:fillClrLst>
+    <dgm:linClrLst meth="repeat">
+      <a:schemeClr val="dk1">
+        <a:tint val="60000"/>
+      </a:schemeClr>
+    </dgm:linClrLst>
+    <dgm:effectClrLst/>
+    <dgm:txLinClrLst/>
+    <dgm:txFillClrLst meth="repeat">
+      <a:schemeClr val="dk1"/>
+    </dgm:txFillClrLst>
+    <dgm:txEffectClrLst/>
+  </dgm:styleLbl>
+  <dgm:styleLbl name="sibTrans1D1">
+    <dgm:fillClrLst meth="repeat">
+      <a:schemeClr val="dk1"/>
+    </dgm:fillClrLst>
+    <dgm:linClrLst meth="repeat">
+      <a:schemeClr val="dk1"/>
+    </dgm:linClrLst>
+    <dgm:effectClrLst/>
+    <dgm:txLinClrLst/>
+    <dgm:txFillClrLst meth="repeat">
+      <a:schemeClr val="tx1"/>
+    </dgm:txFillClrLst>
+    <dgm:txEffectClrLst/>
+  </dgm:styleLbl>
+  <dgm:styleLbl name="callout">
+    <dgm:fillClrLst meth="repeat">
+      <a:schemeClr val="dk1"/>
+    </dgm:fillClrLst>
+    <dgm:linClrLst meth="repeat">
+      <a:schemeClr val="dk1"/>
+    </dgm:linClrLst>
+    <dgm:effectClrLst/>
+    <dgm:txLinClrLst/>
+    <dgm:txFillClrLst meth="repeat">
+      <a:schemeClr val="tx1"/>
+    </dgm:txFillClrLst>
+    <dgm:txEffectClrLst/>
+  </dgm:styleLbl>
+  <dgm:styleLbl name="asst0">
+    <dgm:fillClrLst meth="repeat">
+      <a:schemeClr val="lt1"/>
+    </dgm:fillClrLst>
+    <dgm:linClrLst meth="repeat">
+      <a:schemeClr val="dk1">
+        <a:shade val="80000"/>
+      </a:schemeClr>
+    </dgm:linClrLst>
+    <dgm:effectClrLst/>
+    <dgm:txLinClrLst/>
+    <dgm:txFillClrLst meth="repeat">
+      <a:schemeClr val="dk1"/>
+    </dgm:txFillClrLst>
+    <dgm:txEffectClrLst/>
+  </dgm:styleLbl>
+  <dgm:styleLbl name="asst1">
+    <dgm:fillClrLst meth="repeat">
+      <a:schemeClr val="lt1"/>
+    </dgm:fillClrLst>
+    <dgm:linClrLst meth="repeat">
+      <a:schemeClr val="dk1">
+        <a:shade val="80000"/>
+      </a:schemeClr>
+    </dgm:linClrLst>
+    <dgm:effectClrLst/>
+    <dgm:txLinClrLst/>
+    <dgm:txFillClrLst meth="repeat">
+      <a:schemeClr val="dk1"/>
+    </dgm:txFillClrLst>
+    <dgm:txEffectClrLst/>
+  </dgm:styleLbl>
+  <dgm:styleLbl name="asst2">
+    <dgm:fillClrLst meth="repeat">
+      <a:schemeClr val="lt1"/>
+    </dgm:fillClrLst>
+    <dgm:linClrLst meth="repeat">
+      <a:schemeClr val="dk1">
+        <a:shade val="80000"/>
+      </a:schemeClr>
+    </dgm:linClrLst>
+    <dgm:effectClrLst/>
+    <dgm:txLinClrLst/>
+    <dgm:txFillClrLst meth="repeat">
+      <a:schemeClr val="dk1"/>
+    </dgm:txFillClrLst>
+    <dgm:txEffectClrLst/>
+  </dgm:styleLbl>
+  <dgm:styleLbl name="asst3">
+    <dgm:fillClrLst meth="repeat">
+      <a:schemeClr val="lt1"/>
+    </dgm:fillClrLst>
+    <dgm:linClrLst meth="repeat">
+      <a:schemeClr val="dk1">
+        <a:shade val="80000"/>
+      </a:schemeClr>
+    </dgm:linClrLst>
+    <dgm:effectClrLst/>
+    <dgm:txLinClrLst/>
+    <dgm:txFillClrLst meth="repeat">
+      <a:schemeClr val="dk1"/>
+    </dgm:txFillClrLst>
+    <dgm:txEffectClrLst/>
+  </dgm:styleLbl>
+  <dgm:styleLbl name="asst4">
+    <dgm:fillClrLst meth="repeat">
+      <a:schemeClr val="lt1"/>
+    </dgm:fillClrLst>
+    <dgm:linClrLst meth="repeat">
+      <a:schemeClr val="dk1">
+        <a:shade val="80000"/>
+      </a:schemeClr>
+    </dgm:linClrLst>
+    <dgm:effectClrLst/>
+    <dgm:txLinClrLst/>
+    <dgm:txFillClrLst meth="repeat">
+      <a:schemeClr val="dk1"/>
+    </dgm:txFillClrLst>
+    <dgm:txEffectClrLst/>
+  </dgm:styleLbl>
+  <dgm:styleLbl name="parChTrans2D1">
+    <dgm:fillClrLst meth="repeat">
+      <a:schemeClr val="dk1">
+        <a:tint val="60000"/>
+      </a:schemeClr>
+    </dgm:fillClrLst>
+    <dgm:linClrLst meth="repeat">
+      <a:schemeClr val="dk1">
+        <a:tint val="60000"/>
+      </a:schemeClr>
+    </dgm:linClrLst>
+    <dgm:effectClrLst/>
+    <dgm:txLinClrLst/>
+    <dgm:txFillClrLst/>
+    <dgm:txEffectClrLst/>
+  </dgm:styleLbl>
+  <dgm:styleLbl name="parChTrans2D2">
+    <dgm:fillClrLst meth="repeat">
+      <a:schemeClr val="dk1"/>
+    </dgm:fillClrLst>
+    <dgm:linClrLst meth="repeat">
+      <a:schemeClr val="dk1"/>
+    </dgm:linClrLst>
+    <dgm:effectClrLst/>
+    <dgm:txLinClrLst/>
+    <dgm:txFillClrLst/>
+    <dgm:txEffectClrLst/>
+  </dgm:styleLbl>
+  <dgm:styleLbl name="parChTrans2D3">
+    <dgm:fillClrLst meth="repeat">
+      <a:schemeClr val="dk1"/>
+    </dgm:fillClrLst>
+    <dgm:linClrLst meth="repeat">
+      <a:schemeClr val="dk1"/>
+    </dgm:linClrLst>
+    <dgm:effectClrLst/>
+    <dgm:txLinClrLst/>
+    <dgm:txFillClrLst/>
+    <dgm:txEffectClrLst/>
+  </dgm:styleLbl>
+  <dgm:styleLbl name="parChTrans2D4">
+    <dgm:fillClrLst meth="repeat">
+      <a:schemeClr val="dk1"/>
+    </dgm:fillClrLst>
+    <dgm:linClrLst meth="repeat">
+      <a:schemeClr val="dk1"/>
+    </dgm:linClrLst>
+    <dgm:effectClrLst/>
+    <dgm:txLinClrLst/>
+    <dgm:txFillClrLst meth="repeat">
+      <a:schemeClr val="lt1"/>
+    </dgm:txFillClrLst>
+    <dgm:txEffectClrLst/>
+  </dgm:styleLbl>
+  <dgm:styleLbl name="parChTrans1D1">
+    <dgm:fillClrLst meth="repeat">
+      <a:schemeClr val="dk1"/>
+    </dgm:fillClrLst>
+    <dgm:linClrLst meth="repeat">
+      <a:schemeClr val="dk1">
+        <a:shade val="60000"/>
+      </a:schemeClr>
+    </dgm:linClrLst>
+    <dgm:effectClrLst/>
+    <dgm:txLinClrLst/>
+    <dgm:txFillClrLst meth="repeat">
+      <a:schemeClr val="tx1"/>
+    </dgm:txFillClrLst>
+    <dgm:txEffectClrLst/>
+  </dgm:styleLbl>
+  <dgm:styleLbl name="parChTrans1D2">
+    <dgm:fillClrLst meth="repeat">
+      <a:schemeClr val="dk1"/>
+    </dgm:fillClrLst>
+    <dgm:linClrLst meth="repeat">
+      <a:schemeClr val="dk1">
+        <a:shade val="60000"/>
+      </a:schemeClr>
+    </dgm:linClrLst>
+    <dgm:effectClrLst/>
+    <dgm:txLinClrLst/>
+    <dgm:txFillClrLst meth="repeat">
+      <a:schemeClr val="tx1"/>
+    </dgm:txFillClrLst>
+    <dgm:txEffectClrLst/>
+  </dgm:styleLbl>
+  <dgm:styleLbl name="parChTrans1D3">
+    <dgm:fillClrLst meth="repeat">
+      <a:schemeClr val="dk1"/>
+    </dgm:fillClrLst>
+    <dgm:linClrLst meth="repeat">
+      <a:schemeClr val="dk1">
+        <a:shade val="80000"/>
+      </a:schemeClr>
+    </dgm:linClrLst>
+    <dgm:effectClrLst/>
+    <dgm:txLinClrLst/>
+    <dgm:txFillClrLst meth="repeat">
+      <a:schemeClr val="tx1"/>
+    </dgm:txFillClrLst>
+    <dgm:txEffectClrLst/>
+  </dgm:styleLbl>
+  <dgm:styleLbl name="parChTrans1D4">
+    <dgm:fillClrLst meth="repeat">
+      <a:schemeClr val="dk1"/>
+    </dgm:fillClrLst>
+    <dgm:linClrLst meth="repeat">
+      <a:schemeClr val="dk1">
+        <a:shade val="80000"/>
+      </a:schemeClr>
+    </dgm:linClrLst>
+    <dgm:effectClrLst/>
+    <dgm:txLinClrLst/>
+    <dgm:txFillClrLst meth="repeat">
+      <a:schemeClr val="tx1"/>
+    </dgm:txFillClrLst>
+    <dgm:txEffectClrLst/>
+  </dgm:styleLbl>
+  <dgm:styleLbl name="fgAcc1">
+    <dgm:fillClrLst meth="repeat">
+      <a:schemeClr val="dk1">
+        <a:alpha val="90000"/>
+        <a:tint val="40000"/>
+      </a:schemeClr>
+    </dgm:fillClrLst>
+    <dgm:linClrLst meth="repeat">
+      <a:schemeClr val="dk1"/>
+    </dgm:linClrLst>
+    <dgm:effectClrLst/>
+    <dgm:txLinClrLst/>
+    <dgm:txFillClrLst meth="repeat">
+      <a:schemeClr val="dk1"/>
+    </dgm:txFillClrLst>
+    <dgm:txEffectClrLst/>
+  </dgm:styleLbl>
+  <dgm:styleLbl name="conFgAcc1">
+    <dgm:fillClrLst meth="repeat">
+      <a:schemeClr val="dk1">
+        <a:alpha val="90000"/>
+        <a:tint val="40000"/>
+      </a:schemeClr>
+    </dgm:fillClrLst>
+    <dgm:linClrLst meth="repeat">
+      <a:schemeClr val="dk1"/>
+    </dgm:linClrLst>
+    <dgm:effectClrLst/>
+    <dgm:txLinClrLst/>
+    <dgm:txFillClrLst meth="repeat">
+      <a:schemeClr val="dk1"/>
+    </dgm:txFillClrLst>
+    <dgm:txEffectClrLst/>
+  </dgm:styleLbl>
+  <dgm:styleLbl name="alignAcc1">
+    <dgm:fillClrLst meth="repeat">
+      <a:schemeClr val="dk1">
+        <a:alpha val="90000"/>
+        <a:tint val="40000"/>
+      </a:schemeClr>
+    </dgm:fillClrLst>
+    <dgm:linClrLst meth="repeat">
+      <a:schemeClr val="dk1"/>
+    </dgm:linClrLst>
+    <dgm:effectClrLst/>
+    <dgm:txLinClrLst/>
+    <dgm:txFillClrLst meth="repeat">
+      <a:schemeClr val="dk1"/>
+    </dgm:txFillClrLst>
+    <dgm:txEffectClrLst/>
+  </dgm:styleLbl>
+  <dgm:styleLbl name="trAlignAcc1">
+    <dgm:fillClrLst meth="repeat">
+      <a:schemeClr val="dk1">
+        <a:alpha val="40000"/>
+        <a:tint val="40000"/>
+      </a:schemeClr>
+    </dgm:fillClrLst>
+    <dgm:linClrLst meth="repeat">
+      <a:schemeClr val="dk1"/>
+    </dgm:linClrLst>
+    <dgm:effectClrLst/>
+    <dgm:txLinClrLst/>
+    <dgm:txFillClrLst meth="repeat">
+      <a:schemeClr val="dk1"/>
+    </dgm:txFillClrLst>
+    <dgm:txEffectClrLst/>
+  </dgm:styleLbl>
+  <dgm:styleLbl name="bgAcc1">
+    <dgm:fillClrLst meth="repeat">
+      <a:schemeClr val="dk1">
+        <a:alpha val="90000"/>
+        <a:tint val="40000"/>
+      </a:schemeClr>
+    </dgm:fillClrLst>
+    <dgm:linClrLst meth="repeat">
+      <a:schemeClr val="dk1"/>
+    </dgm:linClrLst>
+    <dgm:effectClrLst/>
+    <dgm:txLinClrLst/>
+    <dgm:txFillClrLst meth="repeat">
+      <a:schemeClr val="dk1"/>
+    </dgm:txFillClrLst>
+    <dgm:txEffectClrLst/>
+  </dgm:styleLbl>
+  <dgm:styleLbl name="solidFgAcc1">
+    <dgm:fillClrLst meth="repeat">
+      <a:schemeClr val="lt1"/>
+    </dgm:fillClrLst>
+    <dgm:linClrLst meth="repeat">
+      <a:schemeClr val="dk1"/>
+    </dgm:linClrLst>
+    <dgm:effectClrLst/>
+    <dgm:txLinClrLst/>
+    <dgm:txFillClrLst meth="repeat">
+      <a:schemeClr val="dk1"/>
+    </dgm:txFillClrLst>
+    <dgm:txEffectClrLst/>
+  </dgm:styleLbl>
+  <dgm:styleLbl name="solidAlignAcc1">
+    <dgm:fillClrLst meth="repeat">
+      <a:schemeClr val="lt1"/>
+    </dgm:fillClrLst>
+    <dgm:linClrLst meth="repeat">
+      <a:schemeClr val="dk1"/>
+    </dgm:linClrLst>
+    <dgm:effectClrLst/>
+    <dgm:txLinClrLst/>
+    <dgm:txFillClrLst meth="repeat">
+      <a:schemeClr val="dk1"/>
+    </dgm:txFillClrLst>
+    <dgm:txEffectClrLst/>
+  </dgm:styleLbl>
+  <dgm:styleLbl name="solidBgAcc1">
+    <dgm:fillClrLst meth="repeat">
+      <a:schemeClr val="lt1"/>
+    </dgm:fillClrLst>
+    <dgm:linClrLst meth="repeat">
+      <a:schemeClr val="dk1"/>
+    </dgm:linClrLst>
+    <dgm:effectClrLst/>
+    <dgm:txLinClrLst/>
+    <dgm:txFillClrLst meth="repeat">
+      <a:schemeClr val="dk1"/>
+    </dgm:txFillClrLst>
+    <dgm:txEffectClrLst/>
+  </dgm:styleLbl>
+  <dgm:styleLbl name="fgAccFollowNode1">
+    <dgm:fillClrLst meth="repeat">
+      <a:schemeClr val="lt1">
+        <a:alpha val="90000"/>
+        <a:tint val="40000"/>
+      </a:schemeClr>
+    </dgm:fillClrLst>
+    <dgm:linClrLst meth="repeat">
+      <a:schemeClr val="dk1">
+        <a:alpha val="90000"/>
+      </a:schemeClr>
+    </dgm:linClrLst>
+    <dgm:effectClrLst/>
+    <dgm:txLinClrLst/>
+    <dgm:txFillClrLst meth="repeat">
+      <a:schemeClr val="dk1"/>
+    </dgm:txFillClrLst>
+    <dgm:txEffectClrLst/>
+  </dgm:styleLbl>
+  <dgm:styleLbl name="alignAccFollowNode1">
+    <dgm:fillClrLst meth="repeat">
+      <a:schemeClr val="lt1">
+        <a:alpha val="90000"/>
+        <a:tint val="40000"/>
+      </a:schemeClr>
+    </dgm:fillClrLst>
+    <dgm:linClrLst meth="repeat">
+      <a:schemeClr val="dk1">
+        <a:alpha val="90000"/>
+      </a:schemeClr>
+    </dgm:linClrLst>
+    <dgm:effectClrLst/>
+    <dgm:txLinClrLst/>
+    <dgm:txFillClrLst meth="repeat">
+      <a:schemeClr val="dk1"/>
+    </dgm:txFillClrLst>
+    <dgm:txEffectClrLst/>
+  </dgm:styleLbl>
+  <dgm:styleLbl name="bgAccFollowNode1">
+    <dgm:fillClrLst meth="repeat">
+      <a:schemeClr val="lt1">
+        <a:alpha val="90000"/>
+        <a:tint val="40000"/>
+      </a:schemeClr>
+    </dgm:fillClrLst>
+    <dgm:linClrLst meth="repeat">
+      <a:schemeClr val="dk1">
+        <a:alpha val="90000"/>
+      </a:schemeClr>
+    </dgm:linClrLst>
+    <dgm:effectClrLst/>
+    <dgm:txLinClrLst/>
+    <dgm:txFillClrLst meth="repeat">
+      <a:schemeClr val="dk1"/>
+    </dgm:txFillClrLst>
+    <dgm:txEffectClrLst/>
+  </dgm:styleLbl>
+  <dgm:styleLbl name="fgAcc0">
+    <dgm:fillClrLst meth="repeat">
+      <a:schemeClr val="dk1">
+        <a:alpha val="90000"/>
+        <a:tint val="40000"/>
+      </a:schemeClr>
+    </dgm:fillClrLst>
+    <dgm:linClrLst meth="repeat">
+      <a:schemeClr val="dk1"/>
+    </dgm:linClrLst>
+    <dgm:effectClrLst/>
+    <dgm:txLinClrLst/>
+    <dgm:txFillClrLst meth="repeat">
+      <a:schemeClr val="dk1"/>
+    </dgm:txFillClrLst>
+    <dgm:txEffectClrLst/>
+  </dgm:styleLbl>
+  <dgm:styleLbl name="fgAcc2">
+    <dgm:fillClrLst meth="repeat">
+      <a:schemeClr val="dk1">
+        <a:alpha val="90000"/>
+        <a:tint val="40000"/>
+      </a:schemeClr>
+    </dgm:fillClrLst>
+    <dgm:linClrLst meth="repeat">
+      <a:schemeClr val="dk1"/>
+    </dgm:linClrLst>
+    <dgm:effectClrLst/>
+    <dgm:txLinClrLst/>
+    <dgm:txFillClrLst meth="repeat">
+      <a:schemeClr val="dk1"/>
+    </dgm:txFillClrLst>
+    <dgm:txEffectClrLst/>
+  </dgm:styleLbl>
+  <dgm:styleLbl name="fgAcc3">
+    <dgm:fillClrLst meth="repeat">
+      <a:schemeClr val="dk1">
+        <a:alpha val="90000"/>
+        <a:tint val="40000"/>
+      </a:schemeClr>
+    </dgm:fillClrLst>
+    <dgm:linClrLst meth="repeat">
+      <a:schemeClr val="dk1"/>
+    </dgm:linClrLst>
+    <dgm:effectClrLst/>
+    <dgm:txLinClrLst/>
+    <dgm:txFillClrLst meth="repeat">
+      <a:schemeClr val="dk1"/>
+    </dgm:txFillClrLst>
+    <dgm:txEffectClrLst/>
+  </dgm:styleLbl>
+  <dgm:styleLbl name="fgAcc4">
+    <dgm:fillClrLst meth="repeat">
+      <a:schemeClr val="dk1">
+        <a:alpha val="90000"/>
+        <a:tint val="40000"/>
+      </a:schemeClr>
+    </dgm:fillClrLst>
+    <dgm:linClrLst meth="repeat">
+      <a:schemeClr val="dk1"/>
+    </dgm:linClrLst>
+    <dgm:effectClrLst/>
+    <dgm:txLinClrLst/>
+    <dgm:txFillClrLst meth="repeat">
+      <a:schemeClr val="dk1"/>
+    </dgm:txFillClrLst>
+    <dgm:txEffectClrLst/>
+  </dgm:styleLbl>
+  <dgm:styleLbl name="bgShp">
+    <dgm:fillClrLst meth="repeat">
+      <a:schemeClr val="dk1">
+        <a:tint val="40000"/>
+      </a:schemeClr>
+    </dgm:fillClrLst>
+    <dgm:linClrLst meth="repeat">
+      <a:schemeClr val="dk1"/>
+    </dgm:linClrLst>
+    <dgm:effectClrLst/>
+    <dgm:txLinClrLst/>
+    <dgm:txFillClrLst meth="repeat">
+      <a:schemeClr val="dk1"/>
+    </dgm:txFillClrLst>
+    <dgm:txEffectClrLst/>
+  </dgm:styleLbl>
+  <dgm:styleLbl name="dkBgShp">
+    <dgm:fillClrLst meth="repeat">
+      <a:schemeClr val="dk1">
+        <a:shade val="80000"/>
+      </a:schemeClr>
+    </dgm:fillClrLst>
+    <dgm:linClrLst meth="repeat">
+      <a:schemeClr val="dk1"/>
+    </dgm:linClrLst>
+    <dgm:effectClrLst/>
+    <dgm:txLinClrLst/>
+    <dgm:txFillClrLst meth="repeat">
+      <a:schemeClr val="lt1"/>
+    </dgm:txFillClrLst>
+    <dgm:txEffectClrLst/>
+  </dgm:styleLbl>
+  <dgm:styleLbl name="trBgShp">
+    <dgm:fillClrLst meth="repeat">
+      <a:schemeClr val="dk1">
+        <a:tint val="50000"/>
+        <a:alpha val="40000"/>
+      </a:schemeClr>
+    </dgm:fillClrLst>
+    <dgm:linClrLst meth="repeat">
+      <a:schemeClr val="dk1"/>
+    </dgm:linClrLst>
+    <dgm:effectClrLst/>
+    <dgm:txLinClrLst/>
+    <dgm:txFillClrLst meth="repeat">
+      <a:schemeClr val="lt1"/>
+    </dgm:txFillClrLst>
+    <dgm:txEffectClrLst/>
+  </dgm:styleLbl>
+  <dgm:styleLbl name="fgShp">
+    <dgm:fillClrLst meth="repeat">
+      <a:schemeClr val="dk1">
+        <a:tint val="60000"/>
+      </a:schemeClr>
+    </dgm:fillClrLst>
+    <dgm:linClrLst meth="repeat">
+      <a:schemeClr val="lt1"/>
+    </dgm:linClrLst>
+    <dgm:effectClrLst/>
+    <dgm:txLinClrLst/>
+    <dgm:txFillClrLst meth="repeat">
+      <a:schemeClr val="dk1"/>
+    </dgm:txFillClrLst>
+    <dgm:txEffectClrLst/>
+  </dgm:styleLbl>
+  <dgm:styleLbl name="revTx">
+    <dgm:fillClrLst meth="repeat">
+      <a:schemeClr val="lt1">
+        <a:alpha val="0"/>
+      </a:schemeClr>
+    </dgm:fillClrLst>
+    <dgm:linClrLst meth="repeat">
+      <a:schemeClr val="dk1">
+        <a:alpha val="0"/>
+      </a:schemeClr>
+    </dgm:linClrLst>
+    <dgm:effectClrLst/>
+    <dgm:txLinClrLst/>
+    <dgm:txFillClrLst meth="repeat">
+      <a:schemeClr val="tx1"/>
+    </dgm:txFillClrLst>
+    <dgm:txEffectClrLst/>
+  </dgm:styleLbl>
+</dgm:colorsDef>
+</file>
+
 <file path=ppt/diagrams/data1.xml><?xml version="1.0" encoding="utf-8"?>
 <dgm:dataModel xmlns:dgm="http://schemas.openxmlformats.org/drawingml/2006/diagram" xmlns:a="http://schemas.openxmlformats.org/drawingml/2006/main">
   <dgm:ptLst>
@@ -959,10 +1768,17 @@
         <a:p>
           <a:r>
             <a:rPr kumimoji="1" lang="ja-JP" altLang="en-US">
-              <a:latin typeface="HGSSoeiKakugothicUB" panose="020B0900000000000000" pitchFamily="34" charset="-128"/>
-              <a:ea typeface="HGSSoeiKakugothicUB" panose="020B0900000000000000" pitchFamily="34" charset="-128"/>
+              <a:latin typeface="Hiragino Sans W4" panose="020B0400000000000000" pitchFamily="34" charset="-128"/>
+              <a:ea typeface="Hiragino Sans W4" panose="020B0400000000000000" pitchFamily="34" charset="-128"/>
             </a:rPr>
-            <a:t>貿易赤字</a:t>
+            <a:t>貿易</a:t>
+          </a:r>
+          <a:r>
+            <a:rPr kumimoji="1" lang="ja-JP" altLang="en-US" b="1">
+              <a:latin typeface="Hiragino Sans W4" panose="020B0400000000000000" pitchFamily="34" charset="-128"/>
+              <a:ea typeface="Hiragino Sans W4" panose="020B0400000000000000" pitchFamily="34" charset="-128"/>
+            </a:rPr>
+            <a:t>赤字</a:t>
           </a:r>
         </a:p>
       </dgm:t>
@@ -974,7 +1790,10 @@
         <a:bodyPr/>
         <a:lstStyle/>
         <a:p>
-          <a:endParaRPr kumimoji="1" lang="ja-JP" altLang="en-US"/>
+          <a:endParaRPr kumimoji="1" lang="ja-JP" altLang="en-US">
+            <a:latin typeface="Hiragino Sans W4" panose="020B0400000000000000" pitchFamily="34" charset="-128"/>
+            <a:ea typeface="Hiragino Sans W4" panose="020B0400000000000000" pitchFamily="34" charset="-128"/>
+          </a:endParaRPr>
         </a:p>
       </dgm:t>
     </dgm:pt>
@@ -985,7 +1804,10 @@
         <a:bodyPr/>
         <a:lstStyle/>
         <a:p>
-          <a:endParaRPr kumimoji="1" lang="ja-JP" altLang="en-US"/>
+          <a:endParaRPr kumimoji="1" lang="ja-JP" altLang="en-US">
+            <a:latin typeface="Hiragino Sans W4" panose="020B0400000000000000" pitchFamily="34" charset="-128"/>
+            <a:ea typeface="Hiragino Sans W4" panose="020B0400000000000000" pitchFamily="34" charset="-128"/>
+          </a:endParaRPr>
         </a:p>
       </dgm:t>
     </dgm:pt>
@@ -1000,10 +1822,17 @@
         <a:p>
           <a:r>
             <a:rPr kumimoji="1" lang="ja-JP" altLang="en-US">
-              <a:latin typeface="HGSSoeiKakugothicUB" panose="020B0900000000000000" pitchFamily="34" charset="-128"/>
-              <a:ea typeface="HGSSoeiKakugothicUB" panose="020B0900000000000000" pitchFamily="34" charset="-128"/>
+              <a:latin typeface="Hiragino Sans W4" panose="020B0400000000000000" pitchFamily="34" charset="-128"/>
+              <a:ea typeface="Hiragino Sans W4" panose="020B0400000000000000" pitchFamily="34" charset="-128"/>
             </a:rPr>
-            <a:t>金準備減少</a:t>
+            <a:t>金準備</a:t>
+          </a:r>
+          <a:r>
+            <a:rPr kumimoji="1" lang="ja-JP" altLang="en-US" b="1">
+              <a:latin typeface="Hiragino Sans W4" panose="020B0400000000000000" pitchFamily="34" charset="-128"/>
+              <a:ea typeface="Hiragino Sans W4" panose="020B0400000000000000" pitchFamily="34" charset="-128"/>
+            </a:rPr>
+            <a:t>減少</a:t>
           </a:r>
         </a:p>
       </dgm:t>
@@ -1015,7 +1844,10 @@
         <a:bodyPr/>
         <a:lstStyle/>
         <a:p>
-          <a:endParaRPr kumimoji="1" lang="ja-JP" altLang="en-US"/>
+          <a:endParaRPr kumimoji="1" lang="ja-JP" altLang="en-US">
+            <a:latin typeface="Hiragino Sans W4" panose="020B0400000000000000" pitchFamily="34" charset="-128"/>
+            <a:ea typeface="Hiragino Sans W4" panose="020B0400000000000000" pitchFamily="34" charset="-128"/>
+          </a:endParaRPr>
         </a:p>
       </dgm:t>
     </dgm:pt>
@@ -1026,7 +1858,10 @@
         <a:bodyPr/>
         <a:lstStyle/>
         <a:p>
-          <a:endParaRPr kumimoji="1" lang="ja-JP" altLang="en-US"/>
+          <a:endParaRPr kumimoji="1" lang="ja-JP" altLang="en-US">
+            <a:latin typeface="Hiragino Sans W4" panose="020B0400000000000000" pitchFamily="34" charset="-128"/>
+            <a:ea typeface="Hiragino Sans W4" panose="020B0400000000000000" pitchFamily="34" charset="-128"/>
+          </a:endParaRPr>
         </a:p>
       </dgm:t>
     </dgm:pt>
@@ -1041,21 +1876,21 @@
         <a:p>
           <a:r>
             <a:rPr kumimoji="1" lang="ja-JP" altLang="en-US">
-              <a:latin typeface="HGSSoeiKakugothicUB" panose="020B0900000000000000" pitchFamily="34" charset="-128"/>
-              <a:ea typeface="HGSSoeiKakugothicUB" panose="020B0900000000000000" pitchFamily="34" charset="-128"/>
+              <a:latin typeface="Hiragino Sans W4" panose="020B0400000000000000" pitchFamily="34" charset="-128"/>
+              <a:ea typeface="Hiragino Sans W4" panose="020B0400000000000000" pitchFamily="34" charset="-128"/>
             </a:rPr>
             <a:t>紙幣発行量</a:t>
           </a:r>
           <a:endParaRPr kumimoji="1" lang="en-US" altLang="ja-JP" dirty="0">
-            <a:latin typeface="HGSSoeiKakugothicUB" panose="020B0900000000000000" pitchFamily="34" charset="-128"/>
-            <a:ea typeface="HGSSoeiKakugothicUB" panose="020B0900000000000000" pitchFamily="34" charset="-128"/>
+            <a:latin typeface="Hiragino Sans W4" panose="020B0400000000000000" pitchFamily="34" charset="-128"/>
+            <a:ea typeface="Hiragino Sans W4" panose="020B0400000000000000" pitchFamily="34" charset="-128"/>
           </a:endParaRPr>
         </a:p>
         <a:p>
           <a:r>
-            <a:rPr kumimoji="1" lang="ja-JP" altLang="en-US">
-              <a:latin typeface="HGSSoeiKakugothicUB" panose="020B0900000000000000" pitchFamily="34" charset="-128"/>
-              <a:ea typeface="HGSSoeiKakugothicUB" panose="020B0900000000000000" pitchFamily="34" charset="-128"/>
+            <a:rPr kumimoji="1" lang="ja-JP" altLang="en-US" b="1">
+              <a:latin typeface="Hiragino Sans W4" panose="020B0400000000000000" pitchFamily="34" charset="-128"/>
+              <a:ea typeface="Hiragino Sans W4" panose="020B0400000000000000" pitchFamily="34" charset="-128"/>
             </a:rPr>
             <a:t>減少</a:t>
           </a:r>
@@ -1069,7 +1904,10 @@
         <a:bodyPr/>
         <a:lstStyle/>
         <a:p>
-          <a:endParaRPr kumimoji="1" lang="ja-JP" altLang="en-US"/>
+          <a:endParaRPr kumimoji="1" lang="ja-JP" altLang="en-US">
+            <a:latin typeface="Hiragino Sans W4" panose="020B0400000000000000" pitchFamily="34" charset="-128"/>
+            <a:ea typeface="Hiragino Sans W4" panose="020B0400000000000000" pitchFamily="34" charset="-128"/>
+          </a:endParaRPr>
         </a:p>
       </dgm:t>
     </dgm:pt>
@@ -1080,7 +1918,10 @@
         <a:bodyPr/>
         <a:lstStyle/>
         <a:p>
-          <a:endParaRPr kumimoji="1" lang="ja-JP" altLang="en-US"/>
+          <a:endParaRPr kumimoji="1" lang="ja-JP" altLang="en-US">
+            <a:latin typeface="Hiragino Sans W4" panose="020B0400000000000000" pitchFamily="34" charset="-128"/>
+            <a:ea typeface="Hiragino Sans W4" panose="020B0400000000000000" pitchFamily="34" charset="-128"/>
+          </a:endParaRPr>
         </a:p>
       </dgm:t>
     </dgm:pt>
@@ -1095,23 +1936,37 @@
         <a:p>
           <a:r>
             <a:rPr kumimoji="1" lang="ja-JP" altLang="en-US">
-              <a:latin typeface="HGSSoeiKakugothicUB" panose="020B0900000000000000" pitchFamily="34" charset="-128"/>
-              <a:ea typeface="HGSSoeiKakugothicUB" panose="020B0900000000000000" pitchFamily="34" charset="-128"/>
+              <a:latin typeface="Hiragino Sans W4" panose="020B0400000000000000" pitchFamily="34" charset="-128"/>
+              <a:ea typeface="Hiragino Sans W4" panose="020B0400000000000000" pitchFamily="34" charset="-128"/>
             </a:rPr>
             <a:t>物価安</a:t>
           </a:r>
           <a:br>
             <a:rPr kumimoji="1" lang="en-US" altLang="ja-JP" dirty="0">
-              <a:latin typeface="HGSSoeiKakugothicUB" panose="020B0900000000000000" pitchFamily="34" charset="-128"/>
-              <a:ea typeface="HGSSoeiKakugothicUB" panose="020B0900000000000000" pitchFamily="34" charset="-128"/>
+              <a:latin typeface="Hiragino Sans W4" panose="020B0400000000000000" pitchFamily="34" charset="-128"/>
+              <a:ea typeface="Hiragino Sans W4" panose="020B0400000000000000" pitchFamily="34" charset="-128"/>
             </a:rPr>
           </a:br>
           <a:r>
             <a:rPr kumimoji="1" lang="ja-JP" altLang="en-US">
-              <a:latin typeface="HGSSoeiKakugothicUB" panose="020B0900000000000000" pitchFamily="34" charset="-128"/>
-              <a:ea typeface="HGSSoeiKakugothicUB" panose="020B0900000000000000" pitchFamily="34" charset="-128"/>
+              <a:latin typeface="Hiragino Sans W4" panose="020B0400000000000000" pitchFamily="34" charset="-128"/>
+              <a:ea typeface="Hiragino Sans W4" panose="020B0400000000000000" pitchFamily="34" charset="-128"/>
             </a:rPr>
-            <a:t>（デフレ）</a:t>
+            <a:t>（</a:t>
+          </a:r>
+          <a:r>
+            <a:rPr kumimoji="1" lang="ja-JP" altLang="en-US" b="1">
+              <a:latin typeface="Hiragino Sans W4" panose="020B0400000000000000" pitchFamily="34" charset="-128"/>
+              <a:ea typeface="Hiragino Sans W4" panose="020B0400000000000000" pitchFamily="34" charset="-128"/>
+            </a:rPr>
+            <a:t>デフレ</a:t>
+          </a:r>
+          <a:r>
+            <a:rPr kumimoji="1" lang="ja-JP" altLang="en-US">
+              <a:latin typeface="Hiragino Sans W4" panose="020B0400000000000000" pitchFamily="34" charset="-128"/>
+              <a:ea typeface="Hiragino Sans W4" panose="020B0400000000000000" pitchFamily="34" charset="-128"/>
+            </a:rPr>
+            <a:t>）</a:t>
           </a:r>
         </a:p>
       </dgm:t>
@@ -1123,7 +1978,10 @@
         <a:bodyPr/>
         <a:lstStyle/>
         <a:p>
-          <a:endParaRPr kumimoji="1" lang="ja-JP" altLang="en-US"/>
+          <a:endParaRPr kumimoji="1" lang="ja-JP" altLang="en-US">
+            <a:latin typeface="Hiragino Sans W4" panose="020B0400000000000000" pitchFamily="34" charset="-128"/>
+            <a:ea typeface="Hiragino Sans W4" panose="020B0400000000000000" pitchFamily="34" charset="-128"/>
+          </a:endParaRPr>
         </a:p>
       </dgm:t>
     </dgm:pt>
@@ -1134,7 +1992,10 @@
         <a:bodyPr/>
         <a:lstStyle/>
         <a:p>
-          <a:endParaRPr kumimoji="1" lang="ja-JP" altLang="en-US"/>
+          <a:endParaRPr kumimoji="1" lang="ja-JP" altLang="en-US">
+            <a:latin typeface="Hiragino Sans W4" panose="020B0400000000000000" pitchFamily="34" charset="-128"/>
+            <a:ea typeface="Hiragino Sans W4" panose="020B0400000000000000" pitchFamily="34" charset="-128"/>
+          </a:endParaRPr>
         </a:p>
       </dgm:t>
     </dgm:pt>
@@ -1149,10 +2010,17 @@
         <a:p>
           <a:r>
             <a:rPr kumimoji="1" lang="ja-JP" altLang="en-US">
-              <a:latin typeface="HGSSoeiKakugothicUB" panose="020B0900000000000000" pitchFamily="34" charset="-128"/>
-              <a:ea typeface="HGSSoeiKakugothicUB" panose="020B0900000000000000" pitchFamily="34" charset="-128"/>
+              <a:latin typeface="Hiragino Sans W4" panose="020B0400000000000000" pitchFamily="34" charset="-128"/>
+              <a:ea typeface="Hiragino Sans W4" panose="020B0400000000000000" pitchFamily="34" charset="-128"/>
             </a:rPr>
-            <a:t>貿易黒字</a:t>
+            <a:t>貿易</a:t>
+          </a:r>
+          <a:r>
+            <a:rPr kumimoji="1" lang="ja-JP" altLang="en-US" b="1">
+              <a:latin typeface="Hiragino Sans W4" panose="020B0400000000000000" pitchFamily="34" charset="-128"/>
+              <a:ea typeface="Hiragino Sans W4" panose="020B0400000000000000" pitchFamily="34" charset="-128"/>
+            </a:rPr>
+            <a:t>黒字</a:t>
           </a:r>
         </a:p>
       </dgm:t>
@@ -1164,7 +2032,10 @@
         <a:bodyPr/>
         <a:lstStyle/>
         <a:p>
-          <a:endParaRPr kumimoji="1" lang="ja-JP" altLang="en-US"/>
+          <a:endParaRPr kumimoji="1" lang="ja-JP" altLang="en-US">
+            <a:latin typeface="Hiragino Sans W4" panose="020B0400000000000000" pitchFamily="34" charset="-128"/>
+            <a:ea typeface="Hiragino Sans W4" panose="020B0400000000000000" pitchFamily="34" charset="-128"/>
+          </a:endParaRPr>
         </a:p>
       </dgm:t>
     </dgm:pt>
@@ -1175,7 +2046,10 @@
         <a:bodyPr/>
         <a:lstStyle/>
         <a:p>
-          <a:endParaRPr kumimoji="1" lang="ja-JP" altLang="en-US"/>
+          <a:endParaRPr kumimoji="1" lang="ja-JP" altLang="en-US">
+            <a:latin typeface="Hiragino Sans W4" panose="020B0400000000000000" pitchFamily="34" charset="-128"/>
+            <a:ea typeface="Hiragino Sans W4" panose="020B0400000000000000" pitchFamily="34" charset="-128"/>
+          </a:endParaRPr>
         </a:p>
       </dgm:t>
     </dgm:pt>
@@ -1190,21 +2064,21 @@
         <a:p>
           <a:r>
             <a:rPr kumimoji="1" lang="ja-JP" altLang="en-US">
-              <a:latin typeface="HGSSoeiKakugothicUB" panose="020B0900000000000000" pitchFamily="34" charset="-128"/>
-              <a:ea typeface="HGSSoeiKakugothicUB" panose="020B0900000000000000" pitchFamily="34" charset="-128"/>
+              <a:latin typeface="Hiragino Sans W4" panose="020B0400000000000000" pitchFamily="34" charset="-128"/>
+              <a:ea typeface="Hiragino Sans W4" panose="020B0400000000000000" pitchFamily="34" charset="-128"/>
             </a:rPr>
             <a:t>紙幣発行量</a:t>
           </a:r>
           <a:endParaRPr kumimoji="1" lang="en-US" altLang="ja-JP" dirty="0">
-            <a:latin typeface="HGSSoeiKakugothicUB" panose="020B0900000000000000" pitchFamily="34" charset="-128"/>
-            <a:ea typeface="HGSSoeiKakugothicUB" panose="020B0900000000000000" pitchFamily="34" charset="-128"/>
+            <a:latin typeface="Hiragino Sans W4" panose="020B0400000000000000" pitchFamily="34" charset="-128"/>
+            <a:ea typeface="Hiragino Sans W4" panose="020B0400000000000000" pitchFamily="34" charset="-128"/>
           </a:endParaRPr>
         </a:p>
         <a:p>
           <a:r>
-            <a:rPr kumimoji="1" lang="ja-JP" altLang="en-US">
-              <a:latin typeface="HGSSoeiKakugothicUB" panose="020B0900000000000000" pitchFamily="34" charset="-128"/>
-              <a:ea typeface="HGSSoeiKakugothicUB" panose="020B0900000000000000" pitchFamily="34" charset="-128"/>
+            <a:rPr kumimoji="1" lang="ja-JP" altLang="en-US" b="1">
+              <a:latin typeface="Hiragino Sans W4" panose="020B0400000000000000" pitchFamily="34" charset="-128"/>
+              <a:ea typeface="Hiragino Sans W4" panose="020B0400000000000000" pitchFamily="34" charset="-128"/>
             </a:rPr>
             <a:t>増加</a:t>
           </a:r>
@@ -1218,7 +2092,10 @@
         <a:bodyPr/>
         <a:lstStyle/>
         <a:p>
-          <a:endParaRPr kumimoji="1" lang="ja-JP" altLang="en-US"/>
+          <a:endParaRPr kumimoji="1" lang="ja-JP" altLang="en-US">
+            <a:latin typeface="Hiragino Sans W4" panose="020B0400000000000000" pitchFamily="34" charset="-128"/>
+            <a:ea typeface="Hiragino Sans W4" panose="020B0400000000000000" pitchFamily="34" charset="-128"/>
+          </a:endParaRPr>
         </a:p>
       </dgm:t>
     </dgm:pt>
@@ -1229,7 +2106,10 @@
         <a:bodyPr/>
         <a:lstStyle/>
         <a:p>
-          <a:endParaRPr kumimoji="1" lang="ja-JP" altLang="en-US"/>
+          <a:endParaRPr kumimoji="1" lang="ja-JP" altLang="en-US">
+            <a:latin typeface="Hiragino Sans W4" panose="020B0400000000000000" pitchFamily="34" charset="-128"/>
+            <a:ea typeface="Hiragino Sans W4" panose="020B0400000000000000" pitchFamily="34" charset="-128"/>
+          </a:endParaRPr>
         </a:p>
       </dgm:t>
     </dgm:pt>
@@ -1244,23 +2124,37 @@
         <a:p>
           <a:r>
             <a:rPr kumimoji="1" lang="ja-JP" altLang="en-US">
-              <a:latin typeface="HGSSoeiKakugothicUB" panose="020B0900000000000000" pitchFamily="34" charset="-128"/>
-              <a:ea typeface="HGSSoeiKakugothicUB" panose="020B0900000000000000" pitchFamily="34" charset="-128"/>
+              <a:latin typeface="Hiragino Sans W4" panose="020B0400000000000000" pitchFamily="34" charset="-128"/>
+              <a:ea typeface="Hiragino Sans W4" panose="020B0400000000000000" pitchFamily="34" charset="-128"/>
             </a:rPr>
             <a:t>物価高</a:t>
           </a:r>
           <a:br>
             <a:rPr kumimoji="1" lang="en-US" altLang="ja-JP" dirty="0">
-              <a:latin typeface="HGSSoeiKakugothicUB" panose="020B0900000000000000" pitchFamily="34" charset="-128"/>
-              <a:ea typeface="HGSSoeiKakugothicUB" panose="020B0900000000000000" pitchFamily="34" charset="-128"/>
+              <a:latin typeface="Hiragino Sans W4" panose="020B0400000000000000" pitchFamily="34" charset="-128"/>
+              <a:ea typeface="Hiragino Sans W4" panose="020B0400000000000000" pitchFamily="34" charset="-128"/>
             </a:rPr>
           </a:br>
           <a:r>
             <a:rPr kumimoji="1" lang="ja-JP" altLang="en-US">
-              <a:latin typeface="HGSSoeiKakugothicUB" panose="020B0900000000000000" pitchFamily="34" charset="-128"/>
-              <a:ea typeface="HGSSoeiKakugothicUB" panose="020B0900000000000000" pitchFamily="34" charset="-128"/>
+              <a:latin typeface="Hiragino Sans W4" panose="020B0400000000000000" pitchFamily="34" charset="-128"/>
+              <a:ea typeface="Hiragino Sans W4" panose="020B0400000000000000" pitchFamily="34" charset="-128"/>
             </a:rPr>
-            <a:t>（インフレ）</a:t>
+            <a:t>（</a:t>
+          </a:r>
+          <a:r>
+            <a:rPr kumimoji="1" lang="ja-JP" altLang="en-US" b="1">
+              <a:latin typeface="Hiragino Sans W4" panose="020B0400000000000000" pitchFamily="34" charset="-128"/>
+              <a:ea typeface="Hiragino Sans W4" panose="020B0400000000000000" pitchFamily="34" charset="-128"/>
+            </a:rPr>
+            <a:t>インフレ</a:t>
+          </a:r>
+          <a:r>
+            <a:rPr kumimoji="1" lang="ja-JP" altLang="en-US">
+              <a:latin typeface="Hiragino Sans W4" panose="020B0400000000000000" pitchFamily="34" charset="-128"/>
+              <a:ea typeface="Hiragino Sans W4" panose="020B0400000000000000" pitchFamily="34" charset="-128"/>
+            </a:rPr>
+            <a:t>）</a:t>
           </a:r>
         </a:p>
       </dgm:t>
@@ -1272,7 +2166,10 @@
         <a:bodyPr/>
         <a:lstStyle/>
         <a:p>
-          <a:endParaRPr kumimoji="1" lang="ja-JP" altLang="en-US"/>
+          <a:endParaRPr kumimoji="1" lang="ja-JP" altLang="en-US">
+            <a:latin typeface="Hiragino Sans W4" panose="020B0400000000000000" pitchFamily="34" charset="-128"/>
+            <a:ea typeface="Hiragino Sans W4" panose="020B0400000000000000" pitchFamily="34" charset="-128"/>
+          </a:endParaRPr>
         </a:p>
       </dgm:t>
     </dgm:pt>
@@ -1283,7 +2180,10 @@
         <a:bodyPr/>
         <a:lstStyle/>
         <a:p>
-          <a:endParaRPr kumimoji="1" lang="ja-JP" altLang="en-US"/>
+          <a:endParaRPr kumimoji="1" lang="ja-JP" altLang="en-US">
+            <a:latin typeface="Hiragino Sans W4" panose="020B0400000000000000" pitchFamily="34" charset="-128"/>
+            <a:ea typeface="Hiragino Sans W4" panose="020B0400000000000000" pitchFamily="34" charset="-128"/>
+          </a:endParaRPr>
         </a:p>
       </dgm:t>
     </dgm:pt>
@@ -1298,10 +2198,17 @@
         <a:p>
           <a:r>
             <a:rPr kumimoji="1" lang="ja-JP" altLang="en-US">
-              <a:latin typeface="HGSSoeiKakugothicUB" panose="020B0900000000000000" pitchFamily="34" charset="-128"/>
-              <a:ea typeface="HGSSoeiKakugothicUB" panose="020B0900000000000000" pitchFamily="34" charset="-128"/>
+              <a:latin typeface="Hiragino Sans W4" panose="020B0400000000000000" pitchFamily="34" charset="-128"/>
+              <a:ea typeface="Hiragino Sans W4" panose="020B0400000000000000" pitchFamily="34" charset="-128"/>
             </a:rPr>
-            <a:t>金準備増加</a:t>
+            <a:t>金準備</a:t>
+          </a:r>
+          <a:r>
+            <a:rPr kumimoji="1" lang="ja-JP" altLang="en-US" b="1">
+              <a:latin typeface="Hiragino Sans W4" panose="020B0400000000000000" pitchFamily="34" charset="-128"/>
+              <a:ea typeface="Hiragino Sans W4" panose="020B0400000000000000" pitchFamily="34" charset="-128"/>
+            </a:rPr>
+            <a:t>増加</a:t>
           </a:r>
         </a:p>
       </dgm:t>
@@ -1313,11 +2220,153 @@
         <a:bodyPr/>
         <a:lstStyle/>
         <a:p>
+          <a:endParaRPr kumimoji="1" lang="ja-JP" altLang="en-US">
+            <a:latin typeface="Hiragino Sans W4" panose="020B0400000000000000" pitchFamily="34" charset="-128"/>
+            <a:ea typeface="Hiragino Sans W4" panose="020B0400000000000000" pitchFamily="34" charset="-128"/>
+          </a:endParaRPr>
+        </a:p>
+      </dgm:t>
+    </dgm:pt>
+    <dgm:pt modelId="{86A5A618-D0E0-BF4D-8C48-0331F40F0028}" type="sibTrans" cxnId="{2A45D999-46E5-E141-A889-E7E6724A1BEE}">
+      <dgm:prSet/>
+      <dgm:spPr/>
+      <dgm:t>
+        <a:bodyPr/>
+        <a:lstStyle/>
+        <a:p>
+          <a:endParaRPr kumimoji="1" lang="ja-JP" altLang="en-US">
+            <a:latin typeface="Hiragino Sans W4" panose="020B0400000000000000" pitchFamily="34" charset="-128"/>
+            <a:ea typeface="Hiragino Sans W4" panose="020B0400000000000000" pitchFamily="34" charset="-128"/>
+          </a:endParaRPr>
+        </a:p>
+      </dgm:t>
+    </dgm:pt>
+    <dgm:pt modelId="{7DD4AF64-A9A0-0447-B0C4-D6B9B3516151}">
+      <dgm:prSet phldrT="[テキスト]"/>
+      <dgm:spPr>
+        <a:ln w="12700"/>
+      </dgm:spPr>
+      <dgm:t>
+        <a:bodyPr/>
+        <a:lstStyle/>
+        <a:p>
+          <a:r>
+            <a:rPr kumimoji="1" lang="ja-JP" altLang="en-US">
+              <a:latin typeface="Hiragino Sans W4" panose="020B0400000000000000" pitchFamily="34" charset="-128"/>
+              <a:ea typeface="Hiragino Sans W4" panose="020B0400000000000000" pitchFamily="34" charset="-128"/>
+            </a:rPr>
+            <a:t>輸出</a:t>
+          </a:r>
+          <a:r>
+            <a:rPr kumimoji="1" lang="ja-JP" altLang="en-US" b="1">
+              <a:latin typeface="Hiragino Sans W4" panose="020B0400000000000000" pitchFamily="34" charset="-128"/>
+              <a:ea typeface="Hiragino Sans W4" panose="020B0400000000000000" pitchFamily="34" charset="-128"/>
+            </a:rPr>
+            <a:t>増加</a:t>
+          </a:r>
+          <a:br>
+            <a:rPr kumimoji="1" lang="en-US" altLang="ja-JP" dirty="0">
+              <a:latin typeface="Hiragino Sans W4" panose="020B0400000000000000" pitchFamily="34" charset="-128"/>
+              <a:ea typeface="Hiragino Sans W4" panose="020B0400000000000000" pitchFamily="34" charset="-128"/>
+            </a:rPr>
+          </a:br>
+          <a:r>
+            <a:rPr kumimoji="1" lang="ja-JP" altLang="en-US">
+              <a:latin typeface="Hiragino Sans W4" panose="020B0400000000000000" pitchFamily="34" charset="-128"/>
+              <a:ea typeface="Hiragino Sans W4" panose="020B0400000000000000" pitchFamily="34" charset="-128"/>
+            </a:rPr>
+            <a:t>輸入</a:t>
+          </a:r>
+          <a:r>
+            <a:rPr kumimoji="1" lang="ja-JP" altLang="en-US" b="1">
+              <a:latin typeface="Hiragino Sans W4" panose="020B0400000000000000" pitchFamily="34" charset="-128"/>
+              <a:ea typeface="Hiragino Sans W4" panose="020B0400000000000000" pitchFamily="34" charset="-128"/>
+            </a:rPr>
+            <a:t>減少</a:t>
+          </a:r>
+        </a:p>
+      </dgm:t>
+    </dgm:pt>
+    <dgm:pt modelId="{B57ED926-CE1F-4641-AA0C-C09D6349E256}" type="parTrans" cxnId="{1BB56B13-ED54-7F49-9C44-E54F0DF65363}">
+      <dgm:prSet/>
+      <dgm:spPr/>
+      <dgm:t>
+        <a:bodyPr/>
+        <a:lstStyle/>
+        <a:p>
           <a:endParaRPr kumimoji="1" lang="ja-JP" altLang="en-US"/>
         </a:p>
       </dgm:t>
     </dgm:pt>
-    <dgm:pt modelId="{86A5A618-D0E0-BF4D-8C48-0331F40F0028}" type="sibTrans" cxnId="{2A45D999-46E5-E141-A889-E7E6724A1BEE}">
+    <dgm:pt modelId="{ECF88FB9-0318-774B-B23E-647D9434C6E1}" type="sibTrans" cxnId="{1BB56B13-ED54-7F49-9C44-E54F0DF65363}">
+      <dgm:prSet/>
+      <dgm:spPr/>
+      <dgm:t>
+        <a:bodyPr/>
+        <a:lstStyle/>
+        <a:p>
+          <a:endParaRPr kumimoji="1" lang="ja-JP" altLang="en-US"/>
+        </a:p>
+      </dgm:t>
+    </dgm:pt>
+    <dgm:pt modelId="{10ABBA3C-4CBE-6A4D-9344-A61ED31E64BC}">
+      <dgm:prSet phldrT="[テキスト]"/>
+      <dgm:spPr>
+        <a:ln w="12700"/>
+      </dgm:spPr>
+      <dgm:t>
+        <a:bodyPr/>
+        <a:lstStyle/>
+        <a:p>
+          <a:r>
+            <a:rPr kumimoji="1" lang="ja-JP" altLang="en-US">
+              <a:latin typeface="Hiragino Sans W4" panose="020B0400000000000000" pitchFamily="34" charset="-128"/>
+              <a:ea typeface="Hiragino Sans W4" panose="020B0400000000000000" pitchFamily="34" charset="-128"/>
+            </a:rPr>
+            <a:t>輸出</a:t>
+          </a:r>
+          <a:r>
+            <a:rPr kumimoji="1" lang="ja-JP" altLang="en-US" b="1">
+              <a:latin typeface="Hiragino Sans W4" panose="020B0400000000000000" pitchFamily="34" charset="-128"/>
+              <a:ea typeface="Hiragino Sans W4" panose="020B0400000000000000" pitchFamily="34" charset="-128"/>
+            </a:rPr>
+            <a:t>減少</a:t>
+          </a:r>
+          <a:br>
+            <a:rPr kumimoji="1" lang="en-US" altLang="ja-JP" dirty="0">
+              <a:latin typeface="Hiragino Sans W4" panose="020B0400000000000000" pitchFamily="34" charset="-128"/>
+              <a:ea typeface="Hiragino Sans W4" panose="020B0400000000000000" pitchFamily="34" charset="-128"/>
+            </a:rPr>
+          </a:br>
+          <a:r>
+            <a:rPr kumimoji="1" lang="ja-JP" altLang="en-US">
+              <a:latin typeface="Hiragino Sans W4" panose="020B0400000000000000" pitchFamily="34" charset="-128"/>
+              <a:ea typeface="Hiragino Sans W4" panose="020B0400000000000000" pitchFamily="34" charset="-128"/>
+            </a:rPr>
+            <a:t>輸入</a:t>
+          </a:r>
+          <a:r>
+            <a:rPr kumimoji="1" lang="ja-JP" altLang="en-US" b="1">
+              <a:latin typeface="Hiragino Sans W4" panose="020B0400000000000000" pitchFamily="34" charset="-128"/>
+              <a:ea typeface="Hiragino Sans W4" panose="020B0400000000000000" pitchFamily="34" charset="-128"/>
+            </a:rPr>
+            <a:t>増加</a:t>
+          </a:r>
+        </a:p>
+      </dgm:t>
+    </dgm:pt>
+    <dgm:pt modelId="{9A064722-0612-A447-BDB7-330EC0904293}" type="parTrans" cxnId="{C0E784F6-C225-F145-A263-D8CED48EF51E}">
+      <dgm:prSet/>
+      <dgm:spPr/>
+      <dgm:t>
+        <a:bodyPr/>
+        <a:lstStyle/>
+        <a:p>
+          <a:endParaRPr kumimoji="1" lang="ja-JP" altLang="en-US"/>
+        </a:p>
+      </dgm:t>
+    </dgm:pt>
+    <dgm:pt modelId="{7289D30D-5B08-C740-8928-6C5502B260FE}" type="sibTrans" cxnId="{C0E784F6-C225-F145-A263-D8CED48EF51E}">
       <dgm:prSet/>
       <dgm:spPr/>
       <dgm:t>
@@ -1342,7 +2391,7 @@
       <dgm:spPr/>
     </dgm:pt>
     <dgm:pt modelId="{D94B10FC-86A6-FF4A-A1B2-1E5A15A9B8EC}" type="pres">
-      <dgm:prSet presAssocID="{409F7A24-5637-5243-801D-289994206447}" presName="nodeFirstNode" presStyleLbl="node1" presStyleIdx="0" presStyleCnt="8">
+      <dgm:prSet presAssocID="{409F7A24-5637-5243-801D-289994206447}" presName="nodeFirstNode" presStyleLbl="node1" presStyleIdx="0" presStyleCnt="10">
         <dgm:presLayoutVars>
           <dgm:bulletEnabled val="1"/>
         </dgm:presLayoutVars>
@@ -1354,7 +2403,7 @@
       <dgm:spPr/>
     </dgm:pt>
     <dgm:pt modelId="{A6D2C092-8BDD-184F-B60A-95002E1C617A}" type="pres">
-      <dgm:prSet presAssocID="{16418477-AF6E-7849-9D54-63386E430A36}" presName="nodeFollowingNodes" presStyleLbl="node1" presStyleIdx="1" presStyleCnt="8">
+      <dgm:prSet presAssocID="{16418477-AF6E-7849-9D54-63386E430A36}" presName="nodeFollowingNodes" presStyleLbl="node1" presStyleIdx="1" presStyleCnt="10">
         <dgm:presLayoutVars>
           <dgm:bulletEnabled val="1"/>
         </dgm:presLayoutVars>
@@ -1362,7 +2411,15 @@
       <dgm:spPr/>
     </dgm:pt>
     <dgm:pt modelId="{659FE536-1F1D-504E-930D-115BE2D22DCB}" type="pres">
-      <dgm:prSet presAssocID="{D56B6BE1-E4D0-394D-A3D2-CB5AA4024D55}" presName="nodeFollowingNodes" presStyleLbl="node1" presStyleIdx="2" presStyleCnt="8">
+      <dgm:prSet presAssocID="{D56B6BE1-E4D0-394D-A3D2-CB5AA4024D55}" presName="nodeFollowingNodes" presStyleLbl="node1" presStyleIdx="2" presStyleCnt="10">
+        <dgm:presLayoutVars>
+          <dgm:bulletEnabled val="1"/>
+        </dgm:presLayoutVars>
+      </dgm:prSet>
+      <dgm:spPr/>
+    </dgm:pt>
+    <dgm:pt modelId="{9C1F367D-4B7A-2E43-AB57-E2005CEC54C2}" type="pres">
+      <dgm:prSet presAssocID="{7DD4AF64-A9A0-0447-B0C4-D6B9B3516151}" presName="nodeFollowingNodes" presStyleLbl="node1" presStyleIdx="3" presStyleCnt="10">
         <dgm:presLayoutVars>
           <dgm:bulletEnabled val="1"/>
         </dgm:presLayoutVars>
@@ -1370,7 +2427,7 @@
       <dgm:spPr/>
     </dgm:pt>
     <dgm:pt modelId="{BC53A7EE-063F-0243-80AC-C4417FF60454}" type="pres">
-      <dgm:prSet presAssocID="{87C913A6-2A36-C840-8C34-44B345906945}" presName="nodeFollowingNodes" presStyleLbl="node1" presStyleIdx="3" presStyleCnt="8">
+      <dgm:prSet presAssocID="{87C913A6-2A36-C840-8C34-44B345906945}" presName="nodeFollowingNodes" presStyleLbl="node1" presStyleIdx="4" presStyleCnt="10">
         <dgm:presLayoutVars>
           <dgm:bulletEnabled val="1"/>
         </dgm:presLayoutVars>
@@ -1378,7 +2435,7 @@
       <dgm:spPr/>
     </dgm:pt>
     <dgm:pt modelId="{1DF87B89-7439-B148-B088-80277B1BDDD3}" type="pres">
-      <dgm:prSet presAssocID="{4326A752-E400-4E49-AD2E-BF0AD97A978D}" presName="nodeFollowingNodes" presStyleLbl="node1" presStyleIdx="4" presStyleCnt="8">
+      <dgm:prSet presAssocID="{4326A752-E400-4E49-AD2E-BF0AD97A978D}" presName="nodeFollowingNodes" presStyleLbl="node1" presStyleIdx="5" presStyleCnt="10">
         <dgm:presLayoutVars>
           <dgm:bulletEnabled val="1"/>
         </dgm:presLayoutVars>
@@ -1386,7 +2443,7 @@
       <dgm:spPr/>
     </dgm:pt>
     <dgm:pt modelId="{93260571-C263-5C47-A419-401F437055EE}" type="pres">
-      <dgm:prSet presAssocID="{D944F075-B569-C445-9131-D0B813F81D95}" presName="nodeFollowingNodes" presStyleLbl="node1" presStyleIdx="5" presStyleCnt="8">
+      <dgm:prSet presAssocID="{D944F075-B569-C445-9131-D0B813F81D95}" presName="nodeFollowingNodes" presStyleLbl="node1" presStyleIdx="6" presStyleCnt="10">
         <dgm:presLayoutVars>
           <dgm:bulletEnabled val="1"/>
         </dgm:presLayoutVars>
@@ -1394,7 +2451,7 @@
       <dgm:spPr/>
     </dgm:pt>
     <dgm:pt modelId="{5A043805-F757-CF4A-9485-BE4798BC4994}" type="pres">
-      <dgm:prSet presAssocID="{3C65A1CA-C348-8A46-854D-CB8C83D8A112}" presName="nodeFollowingNodes" presStyleLbl="node1" presStyleIdx="6" presStyleCnt="8">
+      <dgm:prSet presAssocID="{3C65A1CA-C348-8A46-854D-CB8C83D8A112}" presName="nodeFollowingNodes" presStyleLbl="node1" presStyleIdx="7" presStyleCnt="10">
         <dgm:presLayoutVars>
           <dgm:bulletEnabled val="1"/>
         </dgm:presLayoutVars>
@@ -1402,7 +2459,505 @@
       <dgm:spPr/>
     </dgm:pt>
     <dgm:pt modelId="{1A690F30-74B2-4847-B5F5-75A4E2E3AD9E}" type="pres">
-      <dgm:prSet presAssocID="{DF12632C-3DFF-0444-AEBA-90FAE8978665}" presName="nodeFollowingNodes" presStyleLbl="node1" presStyleIdx="7" presStyleCnt="8">
+      <dgm:prSet presAssocID="{DF12632C-3DFF-0444-AEBA-90FAE8978665}" presName="nodeFollowingNodes" presStyleLbl="node1" presStyleIdx="8" presStyleCnt="10">
+        <dgm:presLayoutVars>
+          <dgm:bulletEnabled val="1"/>
+        </dgm:presLayoutVars>
+      </dgm:prSet>
+      <dgm:spPr/>
+    </dgm:pt>
+    <dgm:pt modelId="{CAAC65CA-09FF-B642-B0C8-D19A7DEB4844}" type="pres">
+      <dgm:prSet presAssocID="{10ABBA3C-4CBE-6A4D-9344-A61ED31E64BC}" presName="nodeFollowingNodes" presStyleLbl="node1" presStyleIdx="9" presStyleCnt="10">
+        <dgm:presLayoutVars>
+          <dgm:bulletEnabled val="1"/>
+        </dgm:presLayoutVars>
+      </dgm:prSet>
+      <dgm:spPr/>
+    </dgm:pt>
+  </dgm:ptLst>
+  <dgm:cxnLst>
+    <dgm:cxn modelId="{1BB56B13-ED54-7F49-9C44-E54F0DF65363}" srcId="{056D782B-3AE9-6341-8054-2A504A814F31}" destId="{7DD4AF64-A9A0-0447-B0C4-D6B9B3516151}" srcOrd="3" destOrd="0" parTransId="{B57ED926-CE1F-4641-AA0C-C09D6349E256}" sibTransId="{ECF88FB9-0318-774B-B23E-647D9434C6E1}"/>
+    <dgm:cxn modelId="{F396E149-1945-6244-9732-13C1A68DBD32}" type="presOf" srcId="{7224B14F-880B-634F-A526-C4E35D50D1E3}" destId="{19409FAB-9ED0-024C-9BD3-FA3940064CB5}" srcOrd="0" destOrd="0" presId="urn:microsoft.com/office/officeart/2005/8/layout/cycle3"/>
+    <dgm:cxn modelId="{0126C255-FDFA-D24A-B385-8A484C4CB250}" type="presOf" srcId="{DF12632C-3DFF-0444-AEBA-90FAE8978665}" destId="{1A690F30-74B2-4847-B5F5-75A4E2E3AD9E}" srcOrd="0" destOrd="0" presId="urn:microsoft.com/office/officeart/2005/8/layout/cycle3"/>
+    <dgm:cxn modelId="{6C30B45B-8310-254F-9AAE-B9AD3AED63A7}" srcId="{056D782B-3AE9-6341-8054-2A504A814F31}" destId="{4326A752-E400-4E49-AD2E-BF0AD97A978D}" srcOrd="5" destOrd="0" parTransId="{8C968CE8-34FF-894B-AA65-CFAA90D070D2}" sibTransId="{2D7F8951-F8BF-6143-9646-1A76370E1C63}"/>
+    <dgm:cxn modelId="{5B2D995C-4229-074D-A910-AF2E78F79A75}" srcId="{056D782B-3AE9-6341-8054-2A504A814F31}" destId="{16418477-AF6E-7849-9D54-63386E430A36}" srcOrd="1" destOrd="0" parTransId="{9C786919-0F2A-6E4A-AEDF-D6709759B767}" sibTransId="{E53BBC97-B433-8C4B-B689-19334FF5366E}"/>
+    <dgm:cxn modelId="{A8226A73-0A2E-814D-A4FF-61D325853B73}" srcId="{056D782B-3AE9-6341-8054-2A504A814F31}" destId="{DF12632C-3DFF-0444-AEBA-90FAE8978665}" srcOrd="8" destOrd="0" parTransId="{8AA5A6E9-F9F8-0348-BDD0-7A4FF5DF3A1A}" sibTransId="{4D1C6FE3-0A91-4541-9BF5-1DA217B5C9DF}"/>
+    <dgm:cxn modelId="{30480581-8EA3-E94D-B8EF-456AAE914C33}" type="presOf" srcId="{D944F075-B569-C445-9131-D0B813F81D95}" destId="{93260571-C263-5C47-A419-401F437055EE}" srcOrd="0" destOrd="0" presId="urn:microsoft.com/office/officeart/2005/8/layout/cycle3"/>
+    <dgm:cxn modelId="{E7FF6F82-93E0-D245-A83F-620DB99CE8D3}" srcId="{056D782B-3AE9-6341-8054-2A504A814F31}" destId="{3C65A1CA-C348-8A46-854D-CB8C83D8A112}" srcOrd="7" destOrd="0" parTransId="{DDA734B1-D250-FF4A-9EFE-180B0BD9CCAF}" sibTransId="{2F07F163-A262-EB47-B21A-0E2F0E12D06A}"/>
+    <dgm:cxn modelId="{FA7A1992-F934-EC48-A675-5328B572D63D}" type="presOf" srcId="{3C65A1CA-C348-8A46-854D-CB8C83D8A112}" destId="{5A043805-F757-CF4A-9485-BE4798BC4994}" srcOrd="0" destOrd="0" presId="urn:microsoft.com/office/officeart/2005/8/layout/cycle3"/>
+    <dgm:cxn modelId="{E70A7B96-E081-FD44-8939-886A69748AA8}" type="presOf" srcId="{056D782B-3AE9-6341-8054-2A504A814F31}" destId="{CA38CAAF-4126-F842-9139-795E9B492809}" srcOrd="0" destOrd="0" presId="urn:microsoft.com/office/officeart/2005/8/layout/cycle3"/>
+    <dgm:cxn modelId="{9D35A697-CD78-E84D-ACD4-57979380DB8E}" srcId="{056D782B-3AE9-6341-8054-2A504A814F31}" destId="{D56B6BE1-E4D0-394D-A3D2-CB5AA4024D55}" srcOrd="2" destOrd="0" parTransId="{659AC1EE-6628-824A-B823-52F387E01033}" sibTransId="{486BE965-D079-354A-8A11-71412DC2A78D}"/>
+    <dgm:cxn modelId="{F9CE7798-BD42-3349-9408-17F59482892B}" srcId="{056D782B-3AE9-6341-8054-2A504A814F31}" destId="{87C913A6-2A36-C840-8C34-44B345906945}" srcOrd="4" destOrd="0" parTransId="{721C540D-DF5C-DF47-BE38-5DB2CA559E21}" sibTransId="{1E788998-85E9-D34F-801B-7347E3EB0C3E}"/>
+    <dgm:cxn modelId="{2A45D999-46E5-E141-A889-E7E6724A1BEE}" srcId="{056D782B-3AE9-6341-8054-2A504A814F31}" destId="{D944F075-B569-C445-9131-D0B813F81D95}" srcOrd="6" destOrd="0" parTransId="{2AB657AE-DE05-6642-A47F-D076DBCFE7BC}" sibTransId="{86A5A618-D0E0-BF4D-8C48-0331F40F0028}"/>
+    <dgm:cxn modelId="{33A28EA5-8B88-D546-A985-A8877D4AEA3C}" type="presOf" srcId="{D56B6BE1-E4D0-394D-A3D2-CB5AA4024D55}" destId="{659FE536-1F1D-504E-930D-115BE2D22DCB}" srcOrd="0" destOrd="0" presId="urn:microsoft.com/office/officeart/2005/8/layout/cycle3"/>
+    <dgm:cxn modelId="{30BAEFA9-5086-DA45-B1E2-F36E5C3AFBD2}" type="presOf" srcId="{7DD4AF64-A9A0-0447-B0C4-D6B9B3516151}" destId="{9C1F367D-4B7A-2E43-AB57-E2005CEC54C2}" srcOrd="0" destOrd="0" presId="urn:microsoft.com/office/officeart/2005/8/layout/cycle3"/>
+    <dgm:cxn modelId="{577D96AE-07E1-BE47-813A-2058F110D0DD}" srcId="{056D782B-3AE9-6341-8054-2A504A814F31}" destId="{409F7A24-5637-5243-801D-289994206447}" srcOrd="0" destOrd="0" parTransId="{2CE23994-248B-7D40-BED2-A70B6FE371A8}" sibTransId="{7224B14F-880B-634F-A526-C4E35D50D1E3}"/>
+    <dgm:cxn modelId="{A9CF93BE-2672-0946-970F-8E97FD0DAD8E}" type="presOf" srcId="{4326A752-E400-4E49-AD2E-BF0AD97A978D}" destId="{1DF87B89-7439-B148-B088-80277B1BDDD3}" srcOrd="0" destOrd="0" presId="urn:microsoft.com/office/officeart/2005/8/layout/cycle3"/>
+    <dgm:cxn modelId="{43135BC3-C5A6-F245-97FA-076300E7A0F9}" type="presOf" srcId="{409F7A24-5637-5243-801D-289994206447}" destId="{D94B10FC-86A6-FF4A-A1B2-1E5A15A9B8EC}" srcOrd="0" destOrd="0" presId="urn:microsoft.com/office/officeart/2005/8/layout/cycle3"/>
+    <dgm:cxn modelId="{72F39FC9-1C82-2D4A-A2D9-88C1BB9022EF}" type="presOf" srcId="{16418477-AF6E-7849-9D54-63386E430A36}" destId="{A6D2C092-8BDD-184F-B60A-95002E1C617A}" srcOrd="0" destOrd="0" presId="urn:microsoft.com/office/officeart/2005/8/layout/cycle3"/>
+    <dgm:cxn modelId="{EC49FCD9-C794-8549-8414-12C719311599}" type="presOf" srcId="{10ABBA3C-4CBE-6A4D-9344-A61ED31E64BC}" destId="{CAAC65CA-09FF-B642-B0C8-D19A7DEB4844}" srcOrd="0" destOrd="0" presId="urn:microsoft.com/office/officeart/2005/8/layout/cycle3"/>
+    <dgm:cxn modelId="{C0E784F6-C225-F145-A263-D8CED48EF51E}" srcId="{056D782B-3AE9-6341-8054-2A504A814F31}" destId="{10ABBA3C-4CBE-6A4D-9344-A61ED31E64BC}" srcOrd="9" destOrd="0" parTransId="{9A064722-0612-A447-BDB7-330EC0904293}" sibTransId="{7289D30D-5B08-C740-8928-6C5502B260FE}"/>
+    <dgm:cxn modelId="{15524BF9-6736-714B-8F41-7F25724B8F39}" type="presOf" srcId="{87C913A6-2A36-C840-8C34-44B345906945}" destId="{BC53A7EE-063F-0243-80AC-C4417FF60454}" srcOrd="0" destOrd="0" presId="urn:microsoft.com/office/officeart/2005/8/layout/cycle3"/>
+    <dgm:cxn modelId="{3874BEAC-FF92-A042-8B3B-5FC421D9B113}" type="presParOf" srcId="{CA38CAAF-4126-F842-9139-795E9B492809}" destId="{CE83B688-DEF8-2646-90E9-C08F8A3E70E7}" srcOrd="0" destOrd="0" presId="urn:microsoft.com/office/officeart/2005/8/layout/cycle3"/>
+    <dgm:cxn modelId="{0E8F0E7D-A4FA-4545-B15E-4B033D2618DB}" type="presParOf" srcId="{CE83B688-DEF8-2646-90E9-C08F8A3E70E7}" destId="{D94B10FC-86A6-FF4A-A1B2-1E5A15A9B8EC}" srcOrd="0" destOrd="0" presId="urn:microsoft.com/office/officeart/2005/8/layout/cycle3"/>
+    <dgm:cxn modelId="{CF08E2E7-584C-6247-B16B-C80F758DBF89}" type="presParOf" srcId="{CE83B688-DEF8-2646-90E9-C08F8A3E70E7}" destId="{19409FAB-9ED0-024C-9BD3-FA3940064CB5}" srcOrd="1" destOrd="0" presId="urn:microsoft.com/office/officeart/2005/8/layout/cycle3"/>
+    <dgm:cxn modelId="{9C04867F-3EB1-FB40-9BCB-4C9BB2D5FF0B}" type="presParOf" srcId="{CE83B688-DEF8-2646-90E9-C08F8A3E70E7}" destId="{A6D2C092-8BDD-184F-B60A-95002E1C617A}" srcOrd="2" destOrd="0" presId="urn:microsoft.com/office/officeart/2005/8/layout/cycle3"/>
+    <dgm:cxn modelId="{39E1BE29-A379-1B4C-82D2-458FC4CF61F2}" type="presParOf" srcId="{CE83B688-DEF8-2646-90E9-C08F8A3E70E7}" destId="{659FE536-1F1D-504E-930D-115BE2D22DCB}" srcOrd="3" destOrd="0" presId="urn:microsoft.com/office/officeart/2005/8/layout/cycle3"/>
+    <dgm:cxn modelId="{7BA0F49A-6244-CB44-8B24-14DE222807E5}" type="presParOf" srcId="{CE83B688-DEF8-2646-90E9-C08F8A3E70E7}" destId="{9C1F367D-4B7A-2E43-AB57-E2005CEC54C2}" srcOrd="4" destOrd="0" presId="urn:microsoft.com/office/officeart/2005/8/layout/cycle3"/>
+    <dgm:cxn modelId="{D32DEAAD-2BBA-8749-A731-9D89188F1347}" type="presParOf" srcId="{CE83B688-DEF8-2646-90E9-C08F8A3E70E7}" destId="{BC53A7EE-063F-0243-80AC-C4417FF60454}" srcOrd="5" destOrd="0" presId="urn:microsoft.com/office/officeart/2005/8/layout/cycle3"/>
+    <dgm:cxn modelId="{3D8EFCEA-529F-D64D-AB6E-93C194A0A067}" type="presParOf" srcId="{CE83B688-DEF8-2646-90E9-C08F8A3E70E7}" destId="{1DF87B89-7439-B148-B088-80277B1BDDD3}" srcOrd="6" destOrd="0" presId="urn:microsoft.com/office/officeart/2005/8/layout/cycle3"/>
+    <dgm:cxn modelId="{BC921CB3-193E-244B-8953-C9FB142FA41F}" type="presParOf" srcId="{CE83B688-DEF8-2646-90E9-C08F8A3E70E7}" destId="{93260571-C263-5C47-A419-401F437055EE}" srcOrd="7" destOrd="0" presId="urn:microsoft.com/office/officeart/2005/8/layout/cycle3"/>
+    <dgm:cxn modelId="{748B3F98-CE36-0B46-9ABF-1E9069495B16}" type="presParOf" srcId="{CE83B688-DEF8-2646-90E9-C08F8A3E70E7}" destId="{5A043805-F757-CF4A-9485-BE4798BC4994}" srcOrd="8" destOrd="0" presId="urn:microsoft.com/office/officeart/2005/8/layout/cycle3"/>
+    <dgm:cxn modelId="{86ECA832-43EB-D546-957D-15C5C6AE0728}" type="presParOf" srcId="{CE83B688-DEF8-2646-90E9-C08F8A3E70E7}" destId="{1A690F30-74B2-4847-B5F5-75A4E2E3AD9E}" srcOrd="9" destOrd="0" presId="urn:microsoft.com/office/officeart/2005/8/layout/cycle3"/>
+    <dgm:cxn modelId="{4CC50D84-EDFC-9F40-B77A-F4B364144AA6}" type="presParOf" srcId="{CE83B688-DEF8-2646-90E9-C08F8A3E70E7}" destId="{CAAC65CA-09FF-B642-B0C8-D19A7DEB4844}" srcOrd="10" destOrd="0" presId="urn:microsoft.com/office/officeart/2005/8/layout/cycle3"/>
+  </dgm:cxnLst>
+  <dgm:bg/>
+  <dgm:whole/>
+  <dgm:extLst>
+    <a:ext uri="http://schemas.microsoft.com/office/drawing/2008/diagram">
+      <dsp:dataModelExt xmlns:dsp="http://schemas.microsoft.com/office/drawing/2008/diagram" relId="rId6" minVer="http://schemas.openxmlformats.org/drawingml/2006/diagram"/>
+    </a:ext>
+  </dgm:extLst>
+</dgm:dataModel>
+</file>
+
+<file path=ppt/diagrams/data2.xml><?xml version="1.0" encoding="utf-8"?>
+<dgm:dataModel xmlns:dgm="http://schemas.openxmlformats.org/drawingml/2006/diagram" xmlns:a="http://schemas.openxmlformats.org/drawingml/2006/main">
+  <dgm:ptLst>
+    <dgm:pt modelId="{056D782B-3AE9-6341-8054-2A504A814F31}" type="doc">
+      <dgm:prSet loTypeId="urn:microsoft.com/office/officeart/2005/8/layout/cycle3" loCatId="" qsTypeId="urn:microsoft.com/office/officeart/2005/8/quickstyle/simple1" qsCatId="simple" csTypeId="urn:microsoft.com/office/officeart/2005/8/colors/accent0_1" csCatId="mainScheme" phldr="1"/>
+      <dgm:spPr/>
+      <dgm:t>
+        <a:bodyPr/>
+        <a:lstStyle/>
+        <a:p>
+          <a:endParaRPr kumimoji="1" lang="ja-JP" altLang="en-US"/>
+        </a:p>
+      </dgm:t>
+    </dgm:pt>
+    <dgm:pt modelId="{409F7A24-5637-5243-801D-289994206447}">
+      <dgm:prSet phldrT="[テキスト]"/>
+      <dgm:spPr>
+        <a:ln w="12700"/>
+      </dgm:spPr>
+      <dgm:t>
+        <a:bodyPr/>
+        <a:lstStyle/>
+        <a:p>
+          <a:r>
+            <a:rPr kumimoji="1" lang="ja-JP" altLang="en-US">
+              <a:latin typeface="Hiragino Sans W4" panose="020B0400000000000000" pitchFamily="34" charset="-128"/>
+              <a:ea typeface="Hiragino Sans W4" panose="020B0400000000000000" pitchFamily="34" charset="-128"/>
+            </a:rPr>
+            <a:t>貿易</a:t>
+          </a:r>
+          <a:r>
+            <a:rPr kumimoji="1" lang="ja-JP" altLang="en-US" b="1">
+              <a:latin typeface="Hiragino Sans W4" panose="020B0400000000000000" pitchFamily="34" charset="-128"/>
+              <a:ea typeface="Hiragino Sans W4" panose="020B0400000000000000" pitchFamily="34" charset="-128"/>
+            </a:rPr>
+            <a:t>赤字</a:t>
+          </a:r>
+        </a:p>
+      </dgm:t>
+    </dgm:pt>
+    <dgm:pt modelId="{2CE23994-248B-7D40-BED2-A70B6FE371A8}" type="parTrans" cxnId="{577D96AE-07E1-BE47-813A-2058F110D0DD}">
+      <dgm:prSet/>
+      <dgm:spPr/>
+      <dgm:t>
+        <a:bodyPr/>
+        <a:lstStyle/>
+        <a:p>
+          <a:endParaRPr kumimoji="1" lang="ja-JP" altLang="en-US">
+            <a:latin typeface="Hiragino Sans W4" panose="020B0400000000000000" pitchFamily="34" charset="-128"/>
+            <a:ea typeface="Hiragino Sans W4" panose="020B0400000000000000" pitchFamily="34" charset="-128"/>
+          </a:endParaRPr>
+        </a:p>
+      </dgm:t>
+    </dgm:pt>
+    <dgm:pt modelId="{7224B14F-880B-634F-A526-C4E35D50D1E3}" type="sibTrans" cxnId="{577D96AE-07E1-BE47-813A-2058F110D0DD}">
+      <dgm:prSet/>
+      <dgm:spPr/>
+      <dgm:t>
+        <a:bodyPr/>
+        <a:lstStyle/>
+        <a:p>
+          <a:endParaRPr kumimoji="1" lang="ja-JP" altLang="en-US">
+            <a:latin typeface="Hiragino Sans W4" panose="020B0400000000000000" pitchFamily="34" charset="-128"/>
+            <a:ea typeface="Hiragino Sans W4" panose="020B0400000000000000" pitchFamily="34" charset="-128"/>
+          </a:endParaRPr>
+        </a:p>
+      </dgm:t>
+    </dgm:pt>
+    <dgm:pt modelId="{16418477-AF6E-7849-9D54-63386E430A36}">
+      <dgm:prSet phldrT="[テキスト]"/>
+      <dgm:spPr>
+        <a:ln w="12700"/>
+      </dgm:spPr>
+      <dgm:t>
+        <a:bodyPr/>
+        <a:lstStyle/>
+        <a:p>
+          <a:r>
+            <a:rPr kumimoji="1" lang="ja-JP" altLang="en-US">
+              <a:latin typeface="Hiragino Sans W4" panose="020B0400000000000000" pitchFamily="34" charset="-128"/>
+              <a:ea typeface="Hiragino Sans W4" panose="020B0400000000000000" pitchFamily="34" charset="-128"/>
+            </a:rPr>
+            <a:t>通貨</a:t>
+          </a:r>
+          <a:r>
+            <a:rPr kumimoji="1" lang="ja-JP" altLang="en-US" b="1">
+              <a:latin typeface="Hiragino Sans W4" panose="020B0400000000000000" pitchFamily="34" charset="-128"/>
+              <a:ea typeface="Hiragino Sans W4" panose="020B0400000000000000" pitchFamily="34" charset="-128"/>
+            </a:rPr>
+            <a:t>減価</a:t>
+          </a:r>
+        </a:p>
+      </dgm:t>
+    </dgm:pt>
+    <dgm:pt modelId="{9C786919-0F2A-6E4A-AEDF-D6709759B767}" type="parTrans" cxnId="{5B2D995C-4229-074D-A910-AF2E78F79A75}">
+      <dgm:prSet/>
+      <dgm:spPr/>
+      <dgm:t>
+        <a:bodyPr/>
+        <a:lstStyle/>
+        <a:p>
+          <a:endParaRPr kumimoji="1" lang="ja-JP" altLang="en-US">
+            <a:latin typeface="Hiragino Sans W4" panose="020B0400000000000000" pitchFamily="34" charset="-128"/>
+            <a:ea typeface="Hiragino Sans W4" panose="020B0400000000000000" pitchFamily="34" charset="-128"/>
+          </a:endParaRPr>
+        </a:p>
+      </dgm:t>
+    </dgm:pt>
+    <dgm:pt modelId="{E53BBC97-B433-8C4B-B689-19334FF5366E}" type="sibTrans" cxnId="{5B2D995C-4229-074D-A910-AF2E78F79A75}">
+      <dgm:prSet/>
+      <dgm:spPr/>
+      <dgm:t>
+        <a:bodyPr/>
+        <a:lstStyle/>
+        <a:p>
+          <a:endParaRPr kumimoji="1" lang="ja-JP" altLang="en-US">
+            <a:latin typeface="Hiragino Sans W4" panose="020B0400000000000000" pitchFamily="34" charset="-128"/>
+            <a:ea typeface="Hiragino Sans W4" panose="020B0400000000000000" pitchFamily="34" charset="-128"/>
+          </a:endParaRPr>
+        </a:p>
+      </dgm:t>
+    </dgm:pt>
+    <dgm:pt modelId="{D56B6BE1-E4D0-394D-A3D2-CB5AA4024D55}">
+      <dgm:prSet phldrT="[テキスト]"/>
+      <dgm:spPr>
+        <a:ln w="12700"/>
+      </dgm:spPr>
+      <dgm:t>
+        <a:bodyPr/>
+        <a:lstStyle/>
+        <a:p>
+          <a:r>
+            <a:rPr kumimoji="1" lang="ja-JP" altLang="en-US">
+              <a:latin typeface="Hiragino Sans W4" panose="020B0400000000000000" pitchFamily="34" charset="-128"/>
+              <a:ea typeface="Hiragino Sans W4" panose="020B0400000000000000" pitchFamily="34" charset="-128"/>
+            </a:rPr>
+            <a:t>輸出</a:t>
+          </a:r>
+          <a:r>
+            <a:rPr kumimoji="1" lang="ja-JP" altLang="en-US" b="1">
+              <a:latin typeface="Hiragino Sans W4" panose="020B0400000000000000" pitchFamily="34" charset="-128"/>
+              <a:ea typeface="Hiragino Sans W4" panose="020B0400000000000000" pitchFamily="34" charset="-128"/>
+            </a:rPr>
+            <a:t>増加</a:t>
+          </a:r>
+          <a:br>
+            <a:rPr kumimoji="1" lang="en-US" altLang="ja-JP" dirty="0">
+              <a:latin typeface="Hiragino Sans W4" panose="020B0400000000000000" pitchFamily="34" charset="-128"/>
+              <a:ea typeface="Hiragino Sans W4" panose="020B0400000000000000" pitchFamily="34" charset="-128"/>
+            </a:rPr>
+          </a:br>
+          <a:r>
+            <a:rPr kumimoji="1" lang="ja-JP" altLang="en-US">
+              <a:latin typeface="Hiragino Sans W4" panose="020B0400000000000000" pitchFamily="34" charset="-128"/>
+              <a:ea typeface="Hiragino Sans W4" panose="020B0400000000000000" pitchFamily="34" charset="-128"/>
+            </a:rPr>
+            <a:t>輸入</a:t>
+          </a:r>
+          <a:r>
+            <a:rPr kumimoji="1" lang="ja-JP" altLang="en-US" b="1">
+              <a:latin typeface="Hiragino Sans W4" panose="020B0400000000000000" pitchFamily="34" charset="-128"/>
+              <a:ea typeface="Hiragino Sans W4" panose="020B0400000000000000" pitchFamily="34" charset="-128"/>
+            </a:rPr>
+            <a:t>減少</a:t>
+          </a:r>
+        </a:p>
+      </dgm:t>
+    </dgm:pt>
+    <dgm:pt modelId="{659AC1EE-6628-824A-B823-52F387E01033}" type="parTrans" cxnId="{9D35A697-CD78-E84D-ACD4-57979380DB8E}">
+      <dgm:prSet/>
+      <dgm:spPr/>
+      <dgm:t>
+        <a:bodyPr/>
+        <a:lstStyle/>
+        <a:p>
+          <a:endParaRPr kumimoji="1" lang="ja-JP" altLang="en-US">
+            <a:latin typeface="Hiragino Sans W4" panose="020B0400000000000000" pitchFamily="34" charset="-128"/>
+            <a:ea typeface="Hiragino Sans W4" panose="020B0400000000000000" pitchFamily="34" charset="-128"/>
+          </a:endParaRPr>
+        </a:p>
+      </dgm:t>
+    </dgm:pt>
+    <dgm:pt modelId="{486BE965-D079-354A-8A11-71412DC2A78D}" type="sibTrans" cxnId="{9D35A697-CD78-E84D-ACD4-57979380DB8E}">
+      <dgm:prSet/>
+      <dgm:spPr/>
+      <dgm:t>
+        <a:bodyPr/>
+        <a:lstStyle/>
+        <a:p>
+          <a:endParaRPr kumimoji="1" lang="ja-JP" altLang="en-US">
+            <a:latin typeface="Hiragino Sans W4" panose="020B0400000000000000" pitchFamily="34" charset="-128"/>
+            <a:ea typeface="Hiragino Sans W4" panose="020B0400000000000000" pitchFamily="34" charset="-128"/>
+          </a:endParaRPr>
+        </a:p>
+      </dgm:t>
+    </dgm:pt>
+    <dgm:pt modelId="{4326A752-E400-4E49-AD2E-BF0AD97A978D}">
+      <dgm:prSet phldrT="[テキスト]"/>
+      <dgm:spPr>
+        <a:ln w="12700"/>
+      </dgm:spPr>
+      <dgm:t>
+        <a:bodyPr/>
+        <a:lstStyle/>
+        <a:p>
+          <a:r>
+            <a:rPr kumimoji="1" lang="ja-JP" altLang="en-US">
+              <a:latin typeface="Hiragino Sans W4" panose="020B0400000000000000" pitchFamily="34" charset="-128"/>
+              <a:ea typeface="Hiragino Sans W4" panose="020B0400000000000000" pitchFamily="34" charset="-128"/>
+            </a:rPr>
+            <a:t>貿易</a:t>
+          </a:r>
+          <a:r>
+            <a:rPr kumimoji="1" lang="ja-JP" altLang="en-US" b="1">
+              <a:latin typeface="Hiragino Sans W4" panose="020B0400000000000000" pitchFamily="34" charset="-128"/>
+              <a:ea typeface="Hiragino Sans W4" panose="020B0400000000000000" pitchFamily="34" charset="-128"/>
+            </a:rPr>
+            <a:t>黒字</a:t>
+          </a:r>
+        </a:p>
+      </dgm:t>
+    </dgm:pt>
+    <dgm:pt modelId="{8C968CE8-34FF-894B-AA65-CFAA90D070D2}" type="parTrans" cxnId="{6C30B45B-8310-254F-9AAE-B9AD3AED63A7}">
+      <dgm:prSet/>
+      <dgm:spPr/>
+      <dgm:t>
+        <a:bodyPr/>
+        <a:lstStyle/>
+        <a:p>
+          <a:endParaRPr kumimoji="1" lang="ja-JP" altLang="en-US">
+            <a:latin typeface="Hiragino Sans W4" panose="020B0400000000000000" pitchFamily="34" charset="-128"/>
+            <a:ea typeface="Hiragino Sans W4" panose="020B0400000000000000" pitchFamily="34" charset="-128"/>
+          </a:endParaRPr>
+        </a:p>
+      </dgm:t>
+    </dgm:pt>
+    <dgm:pt modelId="{2D7F8951-F8BF-6143-9646-1A76370E1C63}" type="sibTrans" cxnId="{6C30B45B-8310-254F-9AAE-B9AD3AED63A7}">
+      <dgm:prSet/>
+      <dgm:spPr/>
+      <dgm:t>
+        <a:bodyPr/>
+        <a:lstStyle/>
+        <a:p>
+          <a:endParaRPr kumimoji="1" lang="ja-JP" altLang="en-US">
+            <a:latin typeface="Hiragino Sans W4" panose="020B0400000000000000" pitchFamily="34" charset="-128"/>
+            <a:ea typeface="Hiragino Sans W4" panose="020B0400000000000000" pitchFamily="34" charset="-128"/>
+          </a:endParaRPr>
+        </a:p>
+      </dgm:t>
+    </dgm:pt>
+    <dgm:pt modelId="{3C65A1CA-C348-8A46-854D-CB8C83D8A112}">
+      <dgm:prSet/>
+      <dgm:spPr>
+        <a:ln w="12700"/>
+      </dgm:spPr>
+      <dgm:t>
+        <a:bodyPr/>
+        <a:lstStyle/>
+        <a:p>
+          <a:r>
+            <a:rPr kumimoji="1" lang="ja-JP" altLang="en-US">
+              <a:latin typeface="Hiragino Sans W4" panose="020B0400000000000000" pitchFamily="34" charset="-128"/>
+              <a:ea typeface="Hiragino Sans W4" panose="020B0400000000000000" pitchFamily="34" charset="-128"/>
+            </a:rPr>
+            <a:t>輸出</a:t>
+          </a:r>
+          <a:r>
+            <a:rPr kumimoji="1" lang="ja-JP" altLang="en-US" b="1">
+              <a:latin typeface="Hiragino Sans W4" panose="020B0400000000000000" pitchFamily="34" charset="-128"/>
+              <a:ea typeface="Hiragino Sans W4" panose="020B0400000000000000" pitchFamily="34" charset="-128"/>
+            </a:rPr>
+            <a:t>減少</a:t>
+          </a:r>
+          <a:br>
+            <a:rPr kumimoji="1" lang="en-US" altLang="ja-JP" dirty="0">
+              <a:latin typeface="Hiragino Sans W4" panose="020B0400000000000000" pitchFamily="34" charset="-128"/>
+              <a:ea typeface="Hiragino Sans W4" panose="020B0400000000000000" pitchFamily="34" charset="-128"/>
+            </a:rPr>
+          </a:br>
+          <a:r>
+            <a:rPr kumimoji="1" lang="ja-JP" altLang="en-US">
+              <a:latin typeface="Hiragino Sans W4" panose="020B0400000000000000" pitchFamily="34" charset="-128"/>
+              <a:ea typeface="Hiragino Sans W4" panose="020B0400000000000000" pitchFamily="34" charset="-128"/>
+            </a:rPr>
+            <a:t>輸入</a:t>
+          </a:r>
+          <a:r>
+            <a:rPr kumimoji="1" lang="ja-JP" altLang="en-US" b="1">
+              <a:latin typeface="Hiragino Sans W4" panose="020B0400000000000000" pitchFamily="34" charset="-128"/>
+              <a:ea typeface="Hiragino Sans W4" panose="020B0400000000000000" pitchFamily="34" charset="-128"/>
+            </a:rPr>
+            <a:t>増加</a:t>
+          </a:r>
+        </a:p>
+      </dgm:t>
+    </dgm:pt>
+    <dgm:pt modelId="{DDA734B1-D250-FF4A-9EFE-180B0BD9CCAF}" type="parTrans" cxnId="{E7FF6F82-93E0-D245-A83F-620DB99CE8D3}">
+      <dgm:prSet/>
+      <dgm:spPr/>
+      <dgm:t>
+        <a:bodyPr/>
+        <a:lstStyle/>
+        <a:p>
+          <a:endParaRPr kumimoji="1" lang="ja-JP" altLang="en-US">
+            <a:latin typeface="Hiragino Sans W4" panose="020B0400000000000000" pitchFamily="34" charset="-128"/>
+            <a:ea typeface="Hiragino Sans W4" panose="020B0400000000000000" pitchFamily="34" charset="-128"/>
+          </a:endParaRPr>
+        </a:p>
+      </dgm:t>
+    </dgm:pt>
+    <dgm:pt modelId="{2F07F163-A262-EB47-B21A-0E2F0E12D06A}" type="sibTrans" cxnId="{E7FF6F82-93E0-D245-A83F-620DB99CE8D3}">
+      <dgm:prSet/>
+      <dgm:spPr/>
+      <dgm:t>
+        <a:bodyPr/>
+        <a:lstStyle/>
+        <a:p>
+          <a:endParaRPr kumimoji="1" lang="ja-JP" altLang="en-US">
+            <a:latin typeface="Hiragino Sans W4" panose="020B0400000000000000" pitchFamily="34" charset="-128"/>
+            <a:ea typeface="Hiragino Sans W4" panose="020B0400000000000000" pitchFamily="34" charset="-128"/>
+          </a:endParaRPr>
+        </a:p>
+      </dgm:t>
+    </dgm:pt>
+    <dgm:pt modelId="{D944F075-B569-C445-9131-D0B813F81D95}">
+      <dgm:prSet phldrT="[テキスト]"/>
+      <dgm:spPr>
+        <a:ln w="12700"/>
+      </dgm:spPr>
+      <dgm:t>
+        <a:bodyPr/>
+        <a:lstStyle/>
+        <a:p>
+          <a:r>
+            <a:rPr kumimoji="1" lang="ja-JP" altLang="en-US">
+              <a:latin typeface="Hiragino Sans W4" panose="020B0400000000000000" pitchFamily="34" charset="-128"/>
+              <a:ea typeface="Hiragino Sans W4" panose="020B0400000000000000" pitchFamily="34" charset="-128"/>
+            </a:rPr>
+            <a:t>通貨</a:t>
+          </a:r>
+          <a:r>
+            <a:rPr kumimoji="1" lang="ja-JP" altLang="en-US" b="1">
+              <a:latin typeface="Hiragino Sans W4" panose="020B0400000000000000" pitchFamily="34" charset="-128"/>
+              <a:ea typeface="Hiragino Sans W4" panose="020B0400000000000000" pitchFamily="34" charset="-128"/>
+            </a:rPr>
+            <a:t>増価</a:t>
+          </a:r>
+        </a:p>
+      </dgm:t>
+    </dgm:pt>
+    <dgm:pt modelId="{2AB657AE-DE05-6642-A47F-D076DBCFE7BC}" type="parTrans" cxnId="{2A45D999-46E5-E141-A889-E7E6724A1BEE}">
+      <dgm:prSet/>
+      <dgm:spPr/>
+      <dgm:t>
+        <a:bodyPr/>
+        <a:lstStyle/>
+        <a:p>
+          <a:endParaRPr kumimoji="1" lang="ja-JP" altLang="en-US">
+            <a:latin typeface="Hiragino Sans W4" panose="020B0400000000000000" pitchFamily="34" charset="-128"/>
+            <a:ea typeface="Hiragino Sans W4" panose="020B0400000000000000" pitchFamily="34" charset="-128"/>
+          </a:endParaRPr>
+        </a:p>
+      </dgm:t>
+    </dgm:pt>
+    <dgm:pt modelId="{86A5A618-D0E0-BF4D-8C48-0331F40F0028}" type="sibTrans" cxnId="{2A45D999-46E5-E141-A889-E7E6724A1BEE}">
+      <dgm:prSet/>
+      <dgm:spPr/>
+      <dgm:t>
+        <a:bodyPr/>
+        <a:lstStyle/>
+        <a:p>
+          <a:endParaRPr kumimoji="1" lang="ja-JP" altLang="en-US">
+            <a:latin typeface="Hiragino Sans W4" panose="020B0400000000000000" pitchFamily="34" charset="-128"/>
+            <a:ea typeface="Hiragino Sans W4" panose="020B0400000000000000" pitchFamily="34" charset="-128"/>
+          </a:endParaRPr>
+        </a:p>
+      </dgm:t>
+    </dgm:pt>
+    <dgm:pt modelId="{CA38CAAF-4126-F842-9139-795E9B492809}" type="pres">
+      <dgm:prSet presAssocID="{056D782B-3AE9-6341-8054-2A504A814F31}" presName="Name0" presStyleCnt="0">
+        <dgm:presLayoutVars>
+          <dgm:dir/>
+          <dgm:resizeHandles val="exact"/>
+        </dgm:presLayoutVars>
+      </dgm:prSet>
+      <dgm:spPr/>
+    </dgm:pt>
+    <dgm:pt modelId="{CE83B688-DEF8-2646-90E9-C08F8A3E70E7}" type="pres">
+      <dgm:prSet presAssocID="{056D782B-3AE9-6341-8054-2A504A814F31}" presName="cycle" presStyleCnt="0"/>
+      <dgm:spPr/>
+    </dgm:pt>
+    <dgm:pt modelId="{D94B10FC-86A6-FF4A-A1B2-1E5A15A9B8EC}" type="pres">
+      <dgm:prSet presAssocID="{409F7A24-5637-5243-801D-289994206447}" presName="nodeFirstNode" presStyleLbl="node1" presStyleIdx="0" presStyleCnt="6">
+        <dgm:presLayoutVars>
+          <dgm:bulletEnabled val="1"/>
+        </dgm:presLayoutVars>
+      </dgm:prSet>
+      <dgm:spPr/>
+    </dgm:pt>
+    <dgm:pt modelId="{19409FAB-9ED0-024C-9BD3-FA3940064CB5}" type="pres">
+      <dgm:prSet presAssocID="{7224B14F-880B-634F-A526-C4E35D50D1E3}" presName="sibTransFirstNode" presStyleLbl="bgShp" presStyleIdx="0" presStyleCnt="1"/>
+      <dgm:spPr/>
+    </dgm:pt>
+    <dgm:pt modelId="{A6D2C092-8BDD-184F-B60A-95002E1C617A}" type="pres">
+      <dgm:prSet presAssocID="{16418477-AF6E-7849-9D54-63386E430A36}" presName="nodeFollowingNodes" presStyleLbl="node1" presStyleIdx="1" presStyleCnt="6">
+        <dgm:presLayoutVars>
+          <dgm:bulletEnabled val="1"/>
+        </dgm:presLayoutVars>
+      </dgm:prSet>
+      <dgm:spPr/>
+    </dgm:pt>
+    <dgm:pt modelId="{659FE536-1F1D-504E-930D-115BE2D22DCB}" type="pres">
+      <dgm:prSet presAssocID="{D56B6BE1-E4D0-394D-A3D2-CB5AA4024D55}" presName="nodeFollowingNodes" presStyleLbl="node1" presStyleIdx="2" presStyleCnt="6">
+        <dgm:presLayoutVars>
+          <dgm:bulletEnabled val="1"/>
+        </dgm:presLayoutVars>
+      </dgm:prSet>
+      <dgm:spPr/>
+    </dgm:pt>
+    <dgm:pt modelId="{1DF87B89-7439-B148-B088-80277B1BDDD3}" type="pres">
+      <dgm:prSet presAssocID="{4326A752-E400-4E49-AD2E-BF0AD97A978D}" presName="nodeFollowingNodes" presStyleLbl="node1" presStyleIdx="3" presStyleCnt="6">
+        <dgm:presLayoutVars>
+          <dgm:bulletEnabled val="1"/>
+        </dgm:presLayoutVars>
+      </dgm:prSet>
+      <dgm:spPr/>
+    </dgm:pt>
+    <dgm:pt modelId="{93260571-C263-5C47-A419-401F437055EE}" type="pres">
+      <dgm:prSet presAssocID="{D944F075-B569-C445-9131-D0B813F81D95}" presName="nodeFollowingNodes" presStyleLbl="node1" presStyleIdx="4" presStyleCnt="6">
+        <dgm:presLayoutVars>
+          <dgm:bulletEnabled val="1"/>
+        </dgm:presLayoutVars>
+      </dgm:prSet>
+      <dgm:spPr/>
+    </dgm:pt>
+    <dgm:pt modelId="{5A043805-F757-CF4A-9485-BE4798BC4994}" type="pres">
+      <dgm:prSet presAssocID="{3C65A1CA-C348-8A46-854D-CB8C83D8A112}" presName="nodeFollowingNodes" presStyleLbl="node1" presStyleIdx="5" presStyleCnt="6">
         <dgm:presLayoutVars>
           <dgm:bulletEnabled val="1"/>
         </dgm:presLayoutVars>
@@ -1412,33 +2967,27 @@
   </dgm:ptLst>
   <dgm:cxnLst>
     <dgm:cxn modelId="{F396E149-1945-6244-9732-13C1A68DBD32}" type="presOf" srcId="{7224B14F-880B-634F-A526-C4E35D50D1E3}" destId="{19409FAB-9ED0-024C-9BD3-FA3940064CB5}" srcOrd="0" destOrd="0" presId="urn:microsoft.com/office/officeart/2005/8/layout/cycle3"/>
-    <dgm:cxn modelId="{0126C255-FDFA-D24A-B385-8A484C4CB250}" type="presOf" srcId="{DF12632C-3DFF-0444-AEBA-90FAE8978665}" destId="{1A690F30-74B2-4847-B5F5-75A4E2E3AD9E}" srcOrd="0" destOrd="0" presId="urn:microsoft.com/office/officeart/2005/8/layout/cycle3"/>
-    <dgm:cxn modelId="{6C30B45B-8310-254F-9AAE-B9AD3AED63A7}" srcId="{056D782B-3AE9-6341-8054-2A504A814F31}" destId="{4326A752-E400-4E49-AD2E-BF0AD97A978D}" srcOrd="4" destOrd="0" parTransId="{8C968CE8-34FF-894B-AA65-CFAA90D070D2}" sibTransId="{2D7F8951-F8BF-6143-9646-1A76370E1C63}"/>
+    <dgm:cxn modelId="{6C30B45B-8310-254F-9AAE-B9AD3AED63A7}" srcId="{056D782B-3AE9-6341-8054-2A504A814F31}" destId="{4326A752-E400-4E49-AD2E-BF0AD97A978D}" srcOrd="3" destOrd="0" parTransId="{8C968CE8-34FF-894B-AA65-CFAA90D070D2}" sibTransId="{2D7F8951-F8BF-6143-9646-1A76370E1C63}"/>
     <dgm:cxn modelId="{5B2D995C-4229-074D-A910-AF2E78F79A75}" srcId="{056D782B-3AE9-6341-8054-2A504A814F31}" destId="{16418477-AF6E-7849-9D54-63386E430A36}" srcOrd="1" destOrd="0" parTransId="{9C786919-0F2A-6E4A-AEDF-D6709759B767}" sibTransId="{E53BBC97-B433-8C4B-B689-19334FF5366E}"/>
-    <dgm:cxn modelId="{A8226A73-0A2E-814D-A4FF-61D325853B73}" srcId="{056D782B-3AE9-6341-8054-2A504A814F31}" destId="{DF12632C-3DFF-0444-AEBA-90FAE8978665}" srcOrd="7" destOrd="0" parTransId="{8AA5A6E9-F9F8-0348-BDD0-7A4FF5DF3A1A}" sibTransId="{4D1C6FE3-0A91-4541-9BF5-1DA217B5C9DF}"/>
     <dgm:cxn modelId="{30480581-8EA3-E94D-B8EF-456AAE914C33}" type="presOf" srcId="{D944F075-B569-C445-9131-D0B813F81D95}" destId="{93260571-C263-5C47-A419-401F437055EE}" srcOrd="0" destOrd="0" presId="urn:microsoft.com/office/officeart/2005/8/layout/cycle3"/>
-    <dgm:cxn modelId="{E7FF6F82-93E0-D245-A83F-620DB99CE8D3}" srcId="{056D782B-3AE9-6341-8054-2A504A814F31}" destId="{3C65A1CA-C348-8A46-854D-CB8C83D8A112}" srcOrd="6" destOrd="0" parTransId="{DDA734B1-D250-FF4A-9EFE-180B0BD9CCAF}" sibTransId="{2F07F163-A262-EB47-B21A-0E2F0E12D06A}"/>
+    <dgm:cxn modelId="{E7FF6F82-93E0-D245-A83F-620DB99CE8D3}" srcId="{056D782B-3AE9-6341-8054-2A504A814F31}" destId="{3C65A1CA-C348-8A46-854D-CB8C83D8A112}" srcOrd="5" destOrd="0" parTransId="{DDA734B1-D250-FF4A-9EFE-180B0BD9CCAF}" sibTransId="{2F07F163-A262-EB47-B21A-0E2F0E12D06A}"/>
     <dgm:cxn modelId="{FA7A1992-F934-EC48-A675-5328B572D63D}" type="presOf" srcId="{3C65A1CA-C348-8A46-854D-CB8C83D8A112}" destId="{5A043805-F757-CF4A-9485-BE4798BC4994}" srcOrd="0" destOrd="0" presId="urn:microsoft.com/office/officeart/2005/8/layout/cycle3"/>
     <dgm:cxn modelId="{E70A7B96-E081-FD44-8939-886A69748AA8}" type="presOf" srcId="{056D782B-3AE9-6341-8054-2A504A814F31}" destId="{CA38CAAF-4126-F842-9139-795E9B492809}" srcOrd="0" destOrd="0" presId="urn:microsoft.com/office/officeart/2005/8/layout/cycle3"/>
     <dgm:cxn modelId="{9D35A697-CD78-E84D-ACD4-57979380DB8E}" srcId="{056D782B-3AE9-6341-8054-2A504A814F31}" destId="{D56B6BE1-E4D0-394D-A3D2-CB5AA4024D55}" srcOrd="2" destOrd="0" parTransId="{659AC1EE-6628-824A-B823-52F387E01033}" sibTransId="{486BE965-D079-354A-8A11-71412DC2A78D}"/>
-    <dgm:cxn modelId="{F9CE7798-BD42-3349-9408-17F59482892B}" srcId="{056D782B-3AE9-6341-8054-2A504A814F31}" destId="{87C913A6-2A36-C840-8C34-44B345906945}" srcOrd="3" destOrd="0" parTransId="{721C540D-DF5C-DF47-BE38-5DB2CA559E21}" sibTransId="{1E788998-85E9-D34F-801B-7347E3EB0C3E}"/>
-    <dgm:cxn modelId="{2A45D999-46E5-E141-A889-E7E6724A1BEE}" srcId="{056D782B-3AE9-6341-8054-2A504A814F31}" destId="{D944F075-B569-C445-9131-D0B813F81D95}" srcOrd="5" destOrd="0" parTransId="{2AB657AE-DE05-6642-A47F-D076DBCFE7BC}" sibTransId="{86A5A618-D0E0-BF4D-8C48-0331F40F0028}"/>
+    <dgm:cxn modelId="{2A45D999-46E5-E141-A889-E7E6724A1BEE}" srcId="{056D782B-3AE9-6341-8054-2A504A814F31}" destId="{D944F075-B569-C445-9131-D0B813F81D95}" srcOrd="4" destOrd="0" parTransId="{2AB657AE-DE05-6642-A47F-D076DBCFE7BC}" sibTransId="{86A5A618-D0E0-BF4D-8C48-0331F40F0028}"/>
     <dgm:cxn modelId="{33A28EA5-8B88-D546-A985-A8877D4AEA3C}" type="presOf" srcId="{D56B6BE1-E4D0-394D-A3D2-CB5AA4024D55}" destId="{659FE536-1F1D-504E-930D-115BE2D22DCB}" srcOrd="0" destOrd="0" presId="urn:microsoft.com/office/officeart/2005/8/layout/cycle3"/>
     <dgm:cxn modelId="{577D96AE-07E1-BE47-813A-2058F110D0DD}" srcId="{056D782B-3AE9-6341-8054-2A504A814F31}" destId="{409F7A24-5637-5243-801D-289994206447}" srcOrd="0" destOrd="0" parTransId="{2CE23994-248B-7D40-BED2-A70B6FE371A8}" sibTransId="{7224B14F-880B-634F-A526-C4E35D50D1E3}"/>
     <dgm:cxn modelId="{A9CF93BE-2672-0946-970F-8E97FD0DAD8E}" type="presOf" srcId="{4326A752-E400-4E49-AD2E-BF0AD97A978D}" destId="{1DF87B89-7439-B148-B088-80277B1BDDD3}" srcOrd="0" destOrd="0" presId="urn:microsoft.com/office/officeart/2005/8/layout/cycle3"/>
     <dgm:cxn modelId="{43135BC3-C5A6-F245-97FA-076300E7A0F9}" type="presOf" srcId="{409F7A24-5637-5243-801D-289994206447}" destId="{D94B10FC-86A6-FF4A-A1B2-1E5A15A9B8EC}" srcOrd="0" destOrd="0" presId="urn:microsoft.com/office/officeart/2005/8/layout/cycle3"/>
     <dgm:cxn modelId="{72F39FC9-1C82-2D4A-A2D9-88C1BB9022EF}" type="presOf" srcId="{16418477-AF6E-7849-9D54-63386E430A36}" destId="{A6D2C092-8BDD-184F-B60A-95002E1C617A}" srcOrd="0" destOrd="0" presId="urn:microsoft.com/office/officeart/2005/8/layout/cycle3"/>
-    <dgm:cxn modelId="{15524BF9-6736-714B-8F41-7F25724B8F39}" type="presOf" srcId="{87C913A6-2A36-C840-8C34-44B345906945}" destId="{BC53A7EE-063F-0243-80AC-C4417FF60454}" srcOrd="0" destOrd="0" presId="urn:microsoft.com/office/officeart/2005/8/layout/cycle3"/>
     <dgm:cxn modelId="{3874BEAC-FF92-A042-8B3B-5FC421D9B113}" type="presParOf" srcId="{CA38CAAF-4126-F842-9139-795E9B492809}" destId="{CE83B688-DEF8-2646-90E9-C08F8A3E70E7}" srcOrd="0" destOrd="0" presId="urn:microsoft.com/office/officeart/2005/8/layout/cycle3"/>
     <dgm:cxn modelId="{0E8F0E7D-A4FA-4545-B15E-4B033D2618DB}" type="presParOf" srcId="{CE83B688-DEF8-2646-90E9-C08F8A3E70E7}" destId="{D94B10FC-86A6-FF4A-A1B2-1E5A15A9B8EC}" srcOrd="0" destOrd="0" presId="urn:microsoft.com/office/officeart/2005/8/layout/cycle3"/>
     <dgm:cxn modelId="{CF08E2E7-584C-6247-B16B-C80F758DBF89}" type="presParOf" srcId="{CE83B688-DEF8-2646-90E9-C08F8A3E70E7}" destId="{19409FAB-9ED0-024C-9BD3-FA3940064CB5}" srcOrd="1" destOrd="0" presId="urn:microsoft.com/office/officeart/2005/8/layout/cycle3"/>
     <dgm:cxn modelId="{9C04867F-3EB1-FB40-9BCB-4C9BB2D5FF0B}" type="presParOf" srcId="{CE83B688-DEF8-2646-90E9-C08F8A3E70E7}" destId="{A6D2C092-8BDD-184F-B60A-95002E1C617A}" srcOrd="2" destOrd="0" presId="urn:microsoft.com/office/officeart/2005/8/layout/cycle3"/>
     <dgm:cxn modelId="{39E1BE29-A379-1B4C-82D2-458FC4CF61F2}" type="presParOf" srcId="{CE83B688-DEF8-2646-90E9-C08F8A3E70E7}" destId="{659FE536-1F1D-504E-930D-115BE2D22DCB}" srcOrd="3" destOrd="0" presId="urn:microsoft.com/office/officeart/2005/8/layout/cycle3"/>
-    <dgm:cxn modelId="{D32DEAAD-2BBA-8749-A731-9D89188F1347}" type="presParOf" srcId="{CE83B688-DEF8-2646-90E9-C08F8A3E70E7}" destId="{BC53A7EE-063F-0243-80AC-C4417FF60454}" srcOrd="4" destOrd="0" presId="urn:microsoft.com/office/officeart/2005/8/layout/cycle3"/>
-    <dgm:cxn modelId="{3D8EFCEA-529F-D64D-AB6E-93C194A0A067}" type="presParOf" srcId="{CE83B688-DEF8-2646-90E9-C08F8A3E70E7}" destId="{1DF87B89-7439-B148-B088-80277B1BDDD3}" srcOrd="5" destOrd="0" presId="urn:microsoft.com/office/officeart/2005/8/layout/cycle3"/>
-    <dgm:cxn modelId="{BC921CB3-193E-244B-8953-C9FB142FA41F}" type="presParOf" srcId="{CE83B688-DEF8-2646-90E9-C08F8A3E70E7}" destId="{93260571-C263-5C47-A419-401F437055EE}" srcOrd="6" destOrd="0" presId="urn:microsoft.com/office/officeart/2005/8/layout/cycle3"/>
-    <dgm:cxn modelId="{748B3F98-CE36-0B46-9ABF-1E9069495B16}" type="presParOf" srcId="{CE83B688-DEF8-2646-90E9-C08F8A3E70E7}" destId="{5A043805-F757-CF4A-9485-BE4798BC4994}" srcOrd="7" destOrd="0" presId="urn:microsoft.com/office/officeart/2005/8/layout/cycle3"/>
-    <dgm:cxn modelId="{86ECA832-43EB-D546-957D-15C5C6AE0728}" type="presParOf" srcId="{CE83B688-DEF8-2646-90E9-C08F8A3E70E7}" destId="{1A690F30-74B2-4847-B5F5-75A4E2E3AD9E}" srcOrd="8" destOrd="0" presId="urn:microsoft.com/office/officeart/2005/8/layout/cycle3"/>
+    <dgm:cxn modelId="{3D8EFCEA-529F-D64D-AB6E-93C194A0A067}" type="presParOf" srcId="{CE83B688-DEF8-2646-90E9-C08F8A3E70E7}" destId="{1DF87B89-7439-B148-B088-80277B1BDDD3}" srcOrd="4" destOrd="0" presId="urn:microsoft.com/office/officeart/2005/8/layout/cycle3"/>
+    <dgm:cxn modelId="{BC921CB3-193E-244B-8953-C9FB142FA41F}" type="presParOf" srcId="{CE83B688-DEF8-2646-90E9-C08F8A3E70E7}" destId="{93260571-C263-5C47-A419-401F437055EE}" srcOrd="5" destOrd="0" presId="urn:microsoft.com/office/officeart/2005/8/layout/cycle3"/>
+    <dgm:cxn modelId="{748B3F98-CE36-0B46-9ABF-1E9069495B16}" type="presParOf" srcId="{CE83B688-DEF8-2646-90E9-C08F8A3E70E7}" destId="{5A043805-F757-CF4A-9485-BE4798BC4994}" srcOrd="6" destOrd="0" presId="urn:microsoft.com/office/officeart/2005/8/layout/cycle3"/>
   </dgm:cxnLst>
   <dgm:bg/>
   <dgm:whole/>
@@ -1465,15 +3014,15 @@
       </dsp:nvSpPr>
       <dsp:spPr>
         <a:xfrm>
-          <a:off x="1342118" y="-46420"/>
-          <a:ext cx="5443763" cy="5443763"/>
+          <a:off x="1274697" y="-73592"/>
+          <a:ext cx="5578605" cy="5578605"/>
         </a:xfrm>
         <a:prstGeom prst="circularArrow">
           <a:avLst>
             <a:gd name="adj1" fmla="val 5544"/>
             <a:gd name="adj2" fmla="val 330680"/>
-            <a:gd name="adj3" fmla="val 14640608"/>
-            <a:gd name="adj4" fmla="val 16879136"/>
+            <a:gd name="adj3" fmla="val 14854317"/>
+            <a:gd name="adj4" fmla="val 16758672"/>
             <a:gd name="adj5" fmla="val 5757"/>
           </a:avLst>
         </a:prstGeom>
@@ -1511,8 +3060,8 @@
       </dsp:nvSpPr>
       <dsp:spPr>
         <a:xfrm>
-          <a:off x="3292078" y="1938"/>
-          <a:ext cx="1543843" cy="771921"/>
+          <a:off x="3407171" y="1983"/>
+          <a:ext cx="1313656" cy="656828"/>
         </a:xfrm>
         <a:prstGeom prst="roundRect">
           <a:avLst/>
@@ -1549,12 +3098,12 @@
         </a:fontRef>
       </dsp:style>
       <dsp:txBody>
-        <a:bodyPr spcFirstLastPara="0" vert="horz" wrap="square" lIns="60960" tIns="60960" rIns="60960" bIns="60960" numCol="1" spcCol="1270" anchor="ctr" anchorCtr="0">
+        <a:bodyPr spcFirstLastPara="0" vert="horz" wrap="square" lIns="41910" tIns="41910" rIns="41910" bIns="41910" numCol="1" spcCol="1270" anchor="ctr" anchorCtr="0">
           <a:noAutofit/>
         </a:bodyPr>
         <a:lstStyle/>
         <a:p>
-          <a:pPr marL="0" lvl="0" indent="0" algn="ctr" defTabSz="711200">
+          <a:pPr marL="0" lvl="0" indent="0" algn="ctr" defTabSz="488950">
             <a:lnSpc>
               <a:spcPct val="90000"/>
             </a:lnSpc>
@@ -1567,17 +3116,24 @@
             <a:buNone/>
           </a:pPr>
           <a:r>
-            <a:rPr kumimoji="1" lang="ja-JP" altLang="en-US" sz="1600" kern="1200">
-              <a:latin typeface="HGSSoeiKakugothicUB" panose="020B0900000000000000" pitchFamily="34" charset="-128"/>
-              <a:ea typeface="HGSSoeiKakugothicUB" panose="020B0900000000000000" pitchFamily="34" charset="-128"/>
+            <a:rPr kumimoji="1" lang="ja-JP" altLang="en-US" sz="1100" kern="1200">
+              <a:latin typeface="Hiragino Sans W4" panose="020B0400000000000000" pitchFamily="34" charset="-128"/>
+              <a:ea typeface="Hiragino Sans W4" panose="020B0400000000000000" pitchFamily="34" charset="-128"/>
             </a:rPr>
-            <a:t>貿易赤字</a:t>
+            <a:t>貿易</a:t>
+          </a:r>
+          <a:r>
+            <a:rPr kumimoji="1" lang="ja-JP" altLang="en-US" sz="1100" b="1" kern="1200">
+              <a:latin typeface="Hiragino Sans W4" panose="020B0400000000000000" pitchFamily="34" charset="-128"/>
+              <a:ea typeface="Hiragino Sans W4" panose="020B0400000000000000" pitchFamily="34" charset="-128"/>
+            </a:rPr>
+            <a:t>赤字</a:t>
           </a:r>
         </a:p>
       </dsp:txBody>
       <dsp:txXfrm>
-        <a:off x="3329760" y="39620"/>
-        <a:ext cx="1468479" cy="696557"/>
+        <a:off x="3439235" y="34047"/>
+        <a:ext cx="1249528" cy="592700"/>
       </dsp:txXfrm>
     </dsp:sp>
     <dsp:sp modelId="{A6D2C092-8BDD-184F-B60A-95002E1C617A}">
@@ -1587,8 +3143,8 @@
       </dsp:nvSpPr>
       <dsp:spPr>
         <a:xfrm>
-          <a:off x="4933579" y="681870"/>
-          <a:ext cx="1543843" cy="771921"/>
+          <a:off x="4805475" y="456319"/>
+          <a:ext cx="1313656" cy="656828"/>
         </a:xfrm>
         <a:prstGeom prst="roundRect">
           <a:avLst/>
@@ -1625,12 +3181,12 @@
         </a:fontRef>
       </dsp:style>
       <dsp:txBody>
-        <a:bodyPr spcFirstLastPara="0" vert="horz" wrap="square" lIns="60960" tIns="60960" rIns="60960" bIns="60960" numCol="1" spcCol="1270" anchor="ctr" anchorCtr="0">
+        <a:bodyPr spcFirstLastPara="0" vert="horz" wrap="square" lIns="41910" tIns="41910" rIns="41910" bIns="41910" numCol="1" spcCol="1270" anchor="ctr" anchorCtr="0">
           <a:noAutofit/>
         </a:bodyPr>
         <a:lstStyle/>
         <a:p>
-          <a:pPr marL="0" lvl="0" indent="0" algn="ctr" defTabSz="711200">
+          <a:pPr marL="0" lvl="0" indent="0" algn="ctr" defTabSz="488950">
             <a:lnSpc>
               <a:spcPct val="90000"/>
             </a:lnSpc>
@@ -1643,17 +3199,24 @@
             <a:buNone/>
           </a:pPr>
           <a:r>
-            <a:rPr kumimoji="1" lang="ja-JP" altLang="en-US" sz="1600" kern="1200">
-              <a:latin typeface="HGSSoeiKakugothicUB" panose="020B0900000000000000" pitchFamily="34" charset="-128"/>
-              <a:ea typeface="HGSSoeiKakugothicUB" panose="020B0900000000000000" pitchFamily="34" charset="-128"/>
+            <a:rPr kumimoji="1" lang="ja-JP" altLang="en-US" sz="1100" kern="1200">
+              <a:latin typeface="Hiragino Sans W4" panose="020B0400000000000000" pitchFamily="34" charset="-128"/>
+              <a:ea typeface="Hiragino Sans W4" panose="020B0400000000000000" pitchFamily="34" charset="-128"/>
             </a:rPr>
-            <a:t>金準備減少</a:t>
+            <a:t>金準備</a:t>
+          </a:r>
+          <a:r>
+            <a:rPr kumimoji="1" lang="ja-JP" altLang="en-US" sz="1100" b="1" kern="1200">
+              <a:latin typeface="Hiragino Sans W4" panose="020B0400000000000000" pitchFamily="34" charset="-128"/>
+              <a:ea typeface="Hiragino Sans W4" panose="020B0400000000000000" pitchFamily="34" charset="-128"/>
+            </a:rPr>
+            <a:t>減少</a:t>
           </a:r>
         </a:p>
       </dsp:txBody>
       <dsp:txXfrm>
-        <a:off x="4971261" y="719552"/>
-        <a:ext cx="1468479" cy="696557"/>
+        <a:off x="4837539" y="488383"/>
+        <a:ext cx="1249528" cy="592700"/>
       </dsp:txXfrm>
     </dsp:sp>
     <dsp:sp modelId="{659FE536-1F1D-504E-930D-115BE2D22DCB}">
@@ -1663,8 +3226,8 @@
       </dsp:nvSpPr>
       <dsp:spPr>
         <a:xfrm>
-          <a:off x="5613512" y="2323372"/>
-          <a:ext cx="1543843" cy="771921"/>
+          <a:off x="5669674" y="1645787"/>
+          <a:ext cx="1313656" cy="656828"/>
         </a:xfrm>
         <a:prstGeom prst="roundRect">
           <a:avLst/>
@@ -1701,12 +3264,12 @@
         </a:fontRef>
       </dsp:style>
       <dsp:txBody>
-        <a:bodyPr spcFirstLastPara="0" vert="horz" wrap="square" lIns="60960" tIns="60960" rIns="60960" bIns="60960" numCol="1" spcCol="1270" anchor="ctr" anchorCtr="0">
+        <a:bodyPr spcFirstLastPara="0" vert="horz" wrap="square" lIns="41910" tIns="41910" rIns="41910" bIns="41910" numCol="1" spcCol="1270" anchor="ctr" anchorCtr="0">
           <a:noAutofit/>
         </a:bodyPr>
         <a:lstStyle/>
         <a:p>
-          <a:pPr marL="0" lvl="0" indent="0" algn="ctr" defTabSz="711200">
+          <a:pPr marL="0" lvl="0" indent="0" algn="ctr" defTabSz="488950">
             <a:lnSpc>
               <a:spcPct val="90000"/>
             </a:lnSpc>
@@ -1719,19 +3282,19 @@
             <a:buNone/>
           </a:pPr>
           <a:r>
-            <a:rPr kumimoji="1" lang="ja-JP" altLang="en-US" sz="1600" kern="1200">
-              <a:latin typeface="HGSSoeiKakugothicUB" panose="020B0900000000000000" pitchFamily="34" charset="-128"/>
-              <a:ea typeface="HGSSoeiKakugothicUB" panose="020B0900000000000000" pitchFamily="34" charset="-128"/>
+            <a:rPr kumimoji="1" lang="ja-JP" altLang="en-US" sz="1100" kern="1200">
+              <a:latin typeface="Hiragino Sans W4" panose="020B0400000000000000" pitchFamily="34" charset="-128"/>
+              <a:ea typeface="Hiragino Sans W4" panose="020B0400000000000000" pitchFamily="34" charset="-128"/>
             </a:rPr>
             <a:t>紙幣発行量</a:t>
           </a:r>
-          <a:endParaRPr kumimoji="1" lang="en-US" altLang="ja-JP" sz="1600" kern="1200" dirty="0">
-            <a:latin typeface="HGSSoeiKakugothicUB" panose="020B0900000000000000" pitchFamily="34" charset="-128"/>
-            <a:ea typeface="HGSSoeiKakugothicUB" panose="020B0900000000000000" pitchFamily="34" charset="-128"/>
+          <a:endParaRPr kumimoji="1" lang="en-US" altLang="ja-JP" sz="1100" kern="1200" dirty="0">
+            <a:latin typeface="Hiragino Sans W4" panose="020B0400000000000000" pitchFamily="34" charset="-128"/>
+            <a:ea typeface="Hiragino Sans W4" panose="020B0400000000000000" pitchFamily="34" charset="-128"/>
           </a:endParaRPr>
         </a:p>
         <a:p>
-          <a:pPr marL="0" lvl="0" indent="0" algn="ctr" defTabSz="711200">
+          <a:pPr marL="0" lvl="0" indent="0" algn="ctr" defTabSz="488950">
             <a:lnSpc>
               <a:spcPct val="90000"/>
             </a:lnSpc>
@@ -1744,28 +3307,28 @@
             <a:buNone/>
           </a:pPr>
           <a:r>
-            <a:rPr kumimoji="1" lang="ja-JP" altLang="en-US" sz="1600" kern="1200">
-              <a:latin typeface="HGSSoeiKakugothicUB" panose="020B0900000000000000" pitchFamily="34" charset="-128"/>
-              <a:ea typeface="HGSSoeiKakugothicUB" panose="020B0900000000000000" pitchFamily="34" charset="-128"/>
+            <a:rPr kumimoji="1" lang="ja-JP" altLang="en-US" sz="1100" b="1" kern="1200">
+              <a:latin typeface="Hiragino Sans W4" panose="020B0400000000000000" pitchFamily="34" charset="-128"/>
+              <a:ea typeface="Hiragino Sans W4" panose="020B0400000000000000" pitchFamily="34" charset="-128"/>
             </a:rPr>
             <a:t>減少</a:t>
           </a:r>
         </a:p>
       </dsp:txBody>
       <dsp:txXfrm>
-        <a:off x="5651194" y="2361054"/>
-        <a:ext cx="1468479" cy="696557"/>
+        <a:off x="5701738" y="1677851"/>
+        <a:ext cx="1249528" cy="592700"/>
       </dsp:txXfrm>
     </dsp:sp>
-    <dsp:sp modelId="{BC53A7EE-063F-0243-80AC-C4417FF60454}">
+    <dsp:sp modelId="{9C1F367D-4B7A-2E43-AB57-E2005CEC54C2}">
       <dsp:nvSpPr>
         <dsp:cNvPr id="0" name=""/>
         <dsp:cNvSpPr/>
       </dsp:nvSpPr>
       <dsp:spPr>
         <a:xfrm>
-          <a:off x="4933579" y="3964874"/>
-          <a:ext cx="1543843" cy="771921"/>
+          <a:off x="5669674" y="3116051"/>
+          <a:ext cx="1313656" cy="656828"/>
         </a:xfrm>
         <a:prstGeom prst="roundRect">
           <a:avLst/>
@@ -1802,12 +3365,12 @@
         </a:fontRef>
       </dsp:style>
       <dsp:txBody>
-        <a:bodyPr spcFirstLastPara="0" vert="horz" wrap="square" lIns="60960" tIns="60960" rIns="60960" bIns="60960" numCol="1" spcCol="1270" anchor="ctr" anchorCtr="0">
+        <a:bodyPr spcFirstLastPara="0" vert="horz" wrap="square" lIns="41910" tIns="41910" rIns="41910" bIns="41910" numCol="1" spcCol="1270" anchor="ctr" anchorCtr="0">
           <a:noAutofit/>
         </a:bodyPr>
         <a:lstStyle/>
         <a:p>
-          <a:pPr marL="0" lvl="0" indent="0" algn="ctr" defTabSz="711200">
+          <a:pPr marL="0" lvl="0" indent="0" algn="ctr" defTabSz="488950">
             <a:lnSpc>
               <a:spcPct val="90000"/>
             </a:lnSpc>
@@ -1820,41 +3383,55 @@
             <a:buNone/>
           </a:pPr>
           <a:r>
-            <a:rPr kumimoji="1" lang="ja-JP" altLang="en-US" sz="1600" kern="1200">
-              <a:latin typeface="HGSSoeiKakugothicUB" panose="020B0900000000000000" pitchFamily="34" charset="-128"/>
-              <a:ea typeface="HGSSoeiKakugothicUB" panose="020B0900000000000000" pitchFamily="34" charset="-128"/>
+            <a:rPr kumimoji="1" lang="ja-JP" altLang="en-US" sz="1100" kern="1200">
+              <a:latin typeface="Hiragino Sans W4" panose="020B0400000000000000" pitchFamily="34" charset="-128"/>
+              <a:ea typeface="Hiragino Sans W4" panose="020B0400000000000000" pitchFamily="34" charset="-128"/>
             </a:rPr>
-            <a:t>物価安</a:t>
+            <a:t>輸出</a:t>
+          </a:r>
+          <a:r>
+            <a:rPr kumimoji="1" lang="ja-JP" altLang="en-US" sz="1100" b="1" kern="1200">
+              <a:latin typeface="Hiragino Sans W4" panose="020B0400000000000000" pitchFamily="34" charset="-128"/>
+              <a:ea typeface="Hiragino Sans W4" panose="020B0400000000000000" pitchFamily="34" charset="-128"/>
+            </a:rPr>
+            <a:t>増加</a:t>
           </a:r>
           <a:br>
-            <a:rPr kumimoji="1" lang="en-US" altLang="ja-JP" sz="1600" kern="1200" dirty="0">
-              <a:latin typeface="HGSSoeiKakugothicUB" panose="020B0900000000000000" pitchFamily="34" charset="-128"/>
-              <a:ea typeface="HGSSoeiKakugothicUB" panose="020B0900000000000000" pitchFamily="34" charset="-128"/>
+            <a:rPr kumimoji="1" lang="en-US" altLang="ja-JP" sz="1100" kern="1200" dirty="0">
+              <a:latin typeface="Hiragino Sans W4" panose="020B0400000000000000" pitchFamily="34" charset="-128"/>
+              <a:ea typeface="Hiragino Sans W4" panose="020B0400000000000000" pitchFamily="34" charset="-128"/>
             </a:rPr>
           </a:br>
           <a:r>
-            <a:rPr kumimoji="1" lang="ja-JP" altLang="en-US" sz="1600" kern="1200">
-              <a:latin typeface="HGSSoeiKakugothicUB" panose="020B0900000000000000" pitchFamily="34" charset="-128"/>
-              <a:ea typeface="HGSSoeiKakugothicUB" panose="020B0900000000000000" pitchFamily="34" charset="-128"/>
+            <a:rPr kumimoji="1" lang="ja-JP" altLang="en-US" sz="1100" kern="1200">
+              <a:latin typeface="Hiragino Sans W4" panose="020B0400000000000000" pitchFamily="34" charset="-128"/>
+              <a:ea typeface="Hiragino Sans W4" panose="020B0400000000000000" pitchFamily="34" charset="-128"/>
             </a:rPr>
-            <a:t>（デフレ）</a:t>
+            <a:t>輸入</a:t>
+          </a:r>
+          <a:r>
+            <a:rPr kumimoji="1" lang="ja-JP" altLang="en-US" sz="1100" b="1" kern="1200">
+              <a:latin typeface="Hiragino Sans W4" panose="020B0400000000000000" pitchFamily="34" charset="-128"/>
+              <a:ea typeface="Hiragino Sans W4" panose="020B0400000000000000" pitchFamily="34" charset="-128"/>
+            </a:rPr>
+            <a:t>減少</a:t>
           </a:r>
         </a:p>
       </dsp:txBody>
       <dsp:txXfrm>
-        <a:off x="4971261" y="4002556"/>
-        <a:ext cx="1468479" cy="696557"/>
+        <a:off x="5701738" y="3148115"/>
+        <a:ext cx="1249528" cy="592700"/>
       </dsp:txXfrm>
     </dsp:sp>
-    <dsp:sp modelId="{1DF87B89-7439-B148-B088-80277B1BDDD3}">
+    <dsp:sp modelId="{BC53A7EE-063F-0243-80AC-C4417FF60454}">
       <dsp:nvSpPr>
         <dsp:cNvPr id="0" name=""/>
         <dsp:cNvSpPr/>
       </dsp:nvSpPr>
       <dsp:spPr>
         <a:xfrm>
-          <a:off x="3292078" y="4644806"/>
-          <a:ext cx="1543843" cy="771921"/>
+          <a:off x="4805475" y="4305519"/>
+          <a:ext cx="1313656" cy="656828"/>
         </a:xfrm>
         <a:prstGeom prst="roundRect">
           <a:avLst/>
@@ -1891,12 +3468,12 @@
         </a:fontRef>
       </dsp:style>
       <dsp:txBody>
-        <a:bodyPr spcFirstLastPara="0" vert="horz" wrap="square" lIns="60960" tIns="60960" rIns="60960" bIns="60960" numCol="1" spcCol="1270" anchor="ctr" anchorCtr="0">
+        <a:bodyPr spcFirstLastPara="0" vert="horz" wrap="square" lIns="41910" tIns="41910" rIns="41910" bIns="41910" numCol="1" spcCol="1270" anchor="ctr" anchorCtr="0">
           <a:noAutofit/>
         </a:bodyPr>
         <a:lstStyle/>
         <a:p>
-          <a:pPr marL="0" lvl="0" indent="0" algn="ctr" defTabSz="711200">
+          <a:pPr marL="0" lvl="0" indent="0" algn="ctr" defTabSz="488950">
             <a:lnSpc>
               <a:spcPct val="90000"/>
             </a:lnSpc>
@@ -1909,28 +3486,55 @@
             <a:buNone/>
           </a:pPr>
           <a:r>
-            <a:rPr kumimoji="1" lang="ja-JP" altLang="en-US" sz="1600" kern="1200">
-              <a:latin typeface="HGSSoeiKakugothicUB" panose="020B0900000000000000" pitchFamily="34" charset="-128"/>
-              <a:ea typeface="HGSSoeiKakugothicUB" panose="020B0900000000000000" pitchFamily="34" charset="-128"/>
+            <a:rPr kumimoji="1" lang="ja-JP" altLang="en-US" sz="1100" kern="1200">
+              <a:latin typeface="Hiragino Sans W4" panose="020B0400000000000000" pitchFamily="34" charset="-128"/>
+              <a:ea typeface="Hiragino Sans W4" panose="020B0400000000000000" pitchFamily="34" charset="-128"/>
             </a:rPr>
-            <a:t>貿易黒字</a:t>
+            <a:t>物価安</a:t>
+          </a:r>
+          <a:br>
+            <a:rPr kumimoji="1" lang="en-US" altLang="ja-JP" sz="1100" kern="1200" dirty="0">
+              <a:latin typeface="Hiragino Sans W4" panose="020B0400000000000000" pitchFamily="34" charset="-128"/>
+              <a:ea typeface="Hiragino Sans W4" panose="020B0400000000000000" pitchFamily="34" charset="-128"/>
+            </a:rPr>
+          </a:br>
+          <a:r>
+            <a:rPr kumimoji="1" lang="ja-JP" altLang="en-US" sz="1100" kern="1200">
+              <a:latin typeface="Hiragino Sans W4" panose="020B0400000000000000" pitchFamily="34" charset="-128"/>
+              <a:ea typeface="Hiragino Sans W4" panose="020B0400000000000000" pitchFamily="34" charset="-128"/>
+            </a:rPr>
+            <a:t>（</a:t>
+          </a:r>
+          <a:r>
+            <a:rPr kumimoji="1" lang="ja-JP" altLang="en-US" sz="1100" b="1" kern="1200">
+              <a:latin typeface="Hiragino Sans W4" panose="020B0400000000000000" pitchFamily="34" charset="-128"/>
+              <a:ea typeface="Hiragino Sans W4" panose="020B0400000000000000" pitchFamily="34" charset="-128"/>
+            </a:rPr>
+            <a:t>デフレ</a:t>
+          </a:r>
+          <a:r>
+            <a:rPr kumimoji="1" lang="ja-JP" altLang="en-US" sz="1100" kern="1200">
+              <a:latin typeface="Hiragino Sans W4" panose="020B0400000000000000" pitchFamily="34" charset="-128"/>
+              <a:ea typeface="Hiragino Sans W4" panose="020B0400000000000000" pitchFamily="34" charset="-128"/>
+            </a:rPr>
+            <a:t>）</a:t>
           </a:r>
         </a:p>
       </dsp:txBody>
       <dsp:txXfrm>
-        <a:off x="3329760" y="4682488"/>
-        <a:ext cx="1468479" cy="696557"/>
+        <a:off x="4837539" y="4337583"/>
+        <a:ext cx="1249528" cy="592700"/>
       </dsp:txXfrm>
     </dsp:sp>
-    <dsp:sp modelId="{93260571-C263-5C47-A419-401F437055EE}">
+    <dsp:sp modelId="{1DF87B89-7439-B148-B088-80277B1BDDD3}">
       <dsp:nvSpPr>
         <dsp:cNvPr id="0" name=""/>
         <dsp:cNvSpPr/>
       </dsp:nvSpPr>
       <dsp:spPr>
         <a:xfrm>
-          <a:off x="1650576" y="3964874"/>
-          <a:ext cx="1543843" cy="771921"/>
+          <a:off x="3407171" y="4759855"/>
+          <a:ext cx="1313656" cy="656828"/>
         </a:xfrm>
         <a:prstGeom prst="roundRect">
           <a:avLst/>
@@ -1967,12 +3571,12 @@
         </a:fontRef>
       </dsp:style>
       <dsp:txBody>
-        <a:bodyPr spcFirstLastPara="0" vert="horz" wrap="square" lIns="60960" tIns="60960" rIns="60960" bIns="60960" numCol="1" spcCol="1270" anchor="ctr" anchorCtr="0">
+        <a:bodyPr spcFirstLastPara="0" vert="horz" wrap="square" lIns="41910" tIns="41910" rIns="41910" bIns="41910" numCol="1" spcCol="1270" anchor="ctr" anchorCtr="0">
           <a:noAutofit/>
         </a:bodyPr>
         <a:lstStyle/>
         <a:p>
-          <a:pPr marL="0" lvl="0" indent="0" algn="ctr" defTabSz="711200">
+          <a:pPr marL="0" lvl="0" indent="0" algn="ctr" defTabSz="488950">
             <a:lnSpc>
               <a:spcPct val="90000"/>
             </a:lnSpc>
@@ -1985,28 +3589,35 @@
             <a:buNone/>
           </a:pPr>
           <a:r>
-            <a:rPr kumimoji="1" lang="ja-JP" altLang="en-US" sz="1600" kern="1200">
-              <a:latin typeface="HGSSoeiKakugothicUB" panose="020B0900000000000000" pitchFamily="34" charset="-128"/>
-              <a:ea typeface="HGSSoeiKakugothicUB" panose="020B0900000000000000" pitchFamily="34" charset="-128"/>
+            <a:rPr kumimoji="1" lang="ja-JP" altLang="en-US" sz="1100" kern="1200">
+              <a:latin typeface="Hiragino Sans W4" panose="020B0400000000000000" pitchFamily="34" charset="-128"/>
+              <a:ea typeface="Hiragino Sans W4" panose="020B0400000000000000" pitchFamily="34" charset="-128"/>
             </a:rPr>
-            <a:t>金準備増加</a:t>
+            <a:t>貿易</a:t>
+          </a:r>
+          <a:r>
+            <a:rPr kumimoji="1" lang="ja-JP" altLang="en-US" sz="1100" b="1" kern="1200">
+              <a:latin typeface="Hiragino Sans W4" panose="020B0400000000000000" pitchFamily="34" charset="-128"/>
+              <a:ea typeface="Hiragino Sans W4" panose="020B0400000000000000" pitchFamily="34" charset="-128"/>
+            </a:rPr>
+            <a:t>黒字</a:t>
           </a:r>
         </a:p>
       </dsp:txBody>
       <dsp:txXfrm>
-        <a:off x="1688258" y="4002556"/>
-        <a:ext cx="1468479" cy="696557"/>
+        <a:off x="3439235" y="4791919"/>
+        <a:ext cx="1249528" cy="592700"/>
       </dsp:txXfrm>
     </dsp:sp>
-    <dsp:sp modelId="{5A043805-F757-CF4A-9485-BE4798BC4994}">
+    <dsp:sp modelId="{93260571-C263-5C47-A419-401F437055EE}">
       <dsp:nvSpPr>
         <dsp:cNvPr id="0" name=""/>
         <dsp:cNvSpPr/>
       </dsp:nvSpPr>
       <dsp:spPr>
         <a:xfrm>
-          <a:off x="970643" y="2323372"/>
-          <a:ext cx="1543843" cy="771921"/>
+          <a:off x="2008868" y="4305519"/>
+          <a:ext cx="1313656" cy="656828"/>
         </a:xfrm>
         <a:prstGeom prst="roundRect">
           <a:avLst/>
@@ -2043,12 +3654,12 @@
         </a:fontRef>
       </dsp:style>
       <dsp:txBody>
-        <a:bodyPr spcFirstLastPara="0" vert="horz" wrap="square" lIns="60960" tIns="60960" rIns="60960" bIns="60960" numCol="1" spcCol="1270" anchor="ctr" anchorCtr="0">
+        <a:bodyPr spcFirstLastPara="0" vert="horz" wrap="square" lIns="41910" tIns="41910" rIns="41910" bIns="41910" numCol="1" spcCol="1270" anchor="ctr" anchorCtr="0">
           <a:noAutofit/>
         </a:bodyPr>
         <a:lstStyle/>
         <a:p>
-          <a:pPr marL="0" lvl="0" indent="0" algn="ctr" defTabSz="711200">
+          <a:pPr marL="0" lvl="0" indent="0" algn="ctr" defTabSz="488950">
             <a:lnSpc>
               <a:spcPct val="90000"/>
             </a:lnSpc>
@@ -2061,53 +3672,35 @@
             <a:buNone/>
           </a:pPr>
           <a:r>
-            <a:rPr kumimoji="1" lang="ja-JP" altLang="en-US" sz="1600" kern="1200">
-              <a:latin typeface="HGSSoeiKakugothicUB" panose="020B0900000000000000" pitchFamily="34" charset="-128"/>
-              <a:ea typeface="HGSSoeiKakugothicUB" panose="020B0900000000000000" pitchFamily="34" charset="-128"/>
+            <a:rPr kumimoji="1" lang="ja-JP" altLang="en-US" sz="1100" kern="1200">
+              <a:latin typeface="Hiragino Sans W4" panose="020B0400000000000000" pitchFamily="34" charset="-128"/>
+              <a:ea typeface="Hiragino Sans W4" panose="020B0400000000000000" pitchFamily="34" charset="-128"/>
             </a:rPr>
-            <a:t>紙幣発行量</a:t>
+            <a:t>金準備</a:t>
           </a:r>
-          <a:endParaRPr kumimoji="1" lang="en-US" altLang="ja-JP" sz="1600" kern="1200" dirty="0">
-            <a:latin typeface="HGSSoeiKakugothicUB" panose="020B0900000000000000" pitchFamily="34" charset="-128"/>
-            <a:ea typeface="HGSSoeiKakugothicUB" panose="020B0900000000000000" pitchFamily="34" charset="-128"/>
-          </a:endParaRPr>
-        </a:p>
-        <a:p>
-          <a:pPr marL="0" lvl="0" indent="0" algn="ctr" defTabSz="711200">
-            <a:lnSpc>
-              <a:spcPct val="90000"/>
-            </a:lnSpc>
-            <a:spcBef>
-              <a:spcPct val="0"/>
-            </a:spcBef>
-            <a:spcAft>
-              <a:spcPct val="35000"/>
-            </a:spcAft>
-            <a:buNone/>
-          </a:pPr>
           <a:r>
-            <a:rPr kumimoji="1" lang="ja-JP" altLang="en-US" sz="1600" kern="1200">
-              <a:latin typeface="HGSSoeiKakugothicUB" panose="020B0900000000000000" pitchFamily="34" charset="-128"/>
-              <a:ea typeface="HGSSoeiKakugothicUB" panose="020B0900000000000000" pitchFamily="34" charset="-128"/>
+            <a:rPr kumimoji="1" lang="ja-JP" altLang="en-US" sz="1100" b="1" kern="1200">
+              <a:latin typeface="Hiragino Sans W4" panose="020B0400000000000000" pitchFamily="34" charset="-128"/>
+              <a:ea typeface="Hiragino Sans W4" panose="020B0400000000000000" pitchFamily="34" charset="-128"/>
             </a:rPr>
             <a:t>増加</a:t>
           </a:r>
         </a:p>
       </dsp:txBody>
       <dsp:txXfrm>
-        <a:off x="1008325" y="2361054"/>
-        <a:ext cx="1468479" cy="696557"/>
+        <a:off x="2040932" y="4337583"/>
+        <a:ext cx="1249528" cy="592700"/>
       </dsp:txXfrm>
     </dsp:sp>
-    <dsp:sp modelId="{1A690F30-74B2-4847-B5F5-75A4E2E3AD9E}">
+    <dsp:sp modelId="{5A043805-F757-CF4A-9485-BE4798BC4994}">
       <dsp:nvSpPr>
         <dsp:cNvPr id="0" name=""/>
         <dsp:cNvSpPr/>
       </dsp:nvSpPr>
       <dsp:spPr>
         <a:xfrm>
-          <a:off x="1650576" y="681870"/>
-          <a:ext cx="1543843" cy="771921"/>
+          <a:off x="1144668" y="3116051"/>
+          <a:ext cx="1313656" cy="656828"/>
         </a:xfrm>
         <a:prstGeom prst="roundRect">
           <a:avLst/>
@@ -2144,12 +3737,12 @@
         </a:fontRef>
       </dsp:style>
       <dsp:txBody>
-        <a:bodyPr spcFirstLastPara="0" vert="horz" wrap="square" lIns="60960" tIns="60960" rIns="60960" bIns="60960" numCol="1" spcCol="1270" anchor="ctr" anchorCtr="0">
+        <a:bodyPr spcFirstLastPara="0" vert="horz" wrap="square" lIns="41910" tIns="41910" rIns="41910" bIns="41910" numCol="1" spcCol="1270" anchor="ctr" anchorCtr="0">
           <a:noAutofit/>
         </a:bodyPr>
         <a:lstStyle/>
         <a:p>
-          <a:pPr marL="0" lvl="0" indent="0" algn="ctr" defTabSz="711200">
+          <a:pPr marL="0" lvl="0" indent="0" algn="ctr" defTabSz="488950">
             <a:lnSpc>
               <a:spcPct val="90000"/>
             </a:lnSpc>
@@ -2162,30 +3755,844 @@
             <a:buNone/>
           </a:pPr>
           <a:r>
-            <a:rPr kumimoji="1" lang="ja-JP" altLang="en-US" sz="1600" kern="1200">
-              <a:latin typeface="HGSSoeiKakugothicUB" panose="020B0900000000000000" pitchFamily="34" charset="-128"/>
-              <a:ea typeface="HGSSoeiKakugothicUB" panose="020B0900000000000000" pitchFamily="34" charset="-128"/>
+            <a:rPr kumimoji="1" lang="ja-JP" altLang="en-US" sz="1100" kern="1200">
+              <a:latin typeface="Hiragino Sans W4" panose="020B0400000000000000" pitchFamily="34" charset="-128"/>
+              <a:ea typeface="Hiragino Sans W4" panose="020B0400000000000000" pitchFamily="34" charset="-128"/>
+            </a:rPr>
+            <a:t>紙幣発行量</a:t>
+          </a:r>
+          <a:endParaRPr kumimoji="1" lang="en-US" altLang="ja-JP" sz="1100" kern="1200" dirty="0">
+            <a:latin typeface="Hiragino Sans W4" panose="020B0400000000000000" pitchFamily="34" charset="-128"/>
+            <a:ea typeface="Hiragino Sans W4" panose="020B0400000000000000" pitchFamily="34" charset="-128"/>
+          </a:endParaRPr>
+        </a:p>
+        <a:p>
+          <a:pPr marL="0" lvl="0" indent="0" algn="ctr" defTabSz="488950">
+            <a:lnSpc>
+              <a:spcPct val="90000"/>
+            </a:lnSpc>
+            <a:spcBef>
+              <a:spcPct val="0"/>
+            </a:spcBef>
+            <a:spcAft>
+              <a:spcPct val="35000"/>
+            </a:spcAft>
+            <a:buNone/>
+          </a:pPr>
+          <a:r>
+            <a:rPr kumimoji="1" lang="ja-JP" altLang="en-US" sz="1100" b="1" kern="1200">
+              <a:latin typeface="Hiragino Sans W4" panose="020B0400000000000000" pitchFamily="34" charset="-128"/>
+              <a:ea typeface="Hiragino Sans W4" panose="020B0400000000000000" pitchFamily="34" charset="-128"/>
+            </a:rPr>
+            <a:t>増加</a:t>
+          </a:r>
+        </a:p>
+      </dsp:txBody>
+      <dsp:txXfrm>
+        <a:off x="1176732" y="3148115"/>
+        <a:ext cx="1249528" cy="592700"/>
+      </dsp:txXfrm>
+    </dsp:sp>
+    <dsp:sp modelId="{1A690F30-74B2-4847-B5F5-75A4E2E3AD9E}">
+      <dsp:nvSpPr>
+        <dsp:cNvPr id="0" name=""/>
+        <dsp:cNvSpPr/>
+      </dsp:nvSpPr>
+      <dsp:spPr>
+        <a:xfrm>
+          <a:off x="1144668" y="1645787"/>
+          <a:ext cx="1313656" cy="656828"/>
+        </a:xfrm>
+        <a:prstGeom prst="roundRect">
+          <a:avLst/>
+        </a:prstGeom>
+        <a:solidFill>
+          <a:schemeClr val="lt1">
+            <a:hueOff val="0"/>
+            <a:satOff val="0"/>
+            <a:lumOff val="0"/>
+            <a:alphaOff val="0"/>
+          </a:schemeClr>
+        </a:solidFill>
+        <a:ln w="12700" cap="flat" cmpd="sng" algn="ctr">
+          <a:solidFill>
+            <a:scrgbClr r="0" g="0" b="0"/>
+          </a:solidFill>
+          <a:prstDash val="solid"/>
+          <a:miter lim="800000"/>
+        </a:ln>
+        <a:effectLst/>
+      </dsp:spPr>
+      <dsp:style>
+        <a:lnRef idx="2">
+          <a:scrgbClr r="0" g="0" b="0"/>
+        </a:lnRef>
+        <a:fillRef idx="1">
+          <a:scrgbClr r="0" g="0" b="0"/>
+        </a:fillRef>
+        <a:effectRef idx="0">
+          <a:scrgbClr r="0" g="0" b="0"/>
+        </a:effectRef>
+        <a:fontRef idx="minor">
+          <a:schemeClr val="lt1"/>
+        </a:fontRef>
+      </dsp:style>
+      <dsp:txBody>
+        <a:bodyPr spcFirstLastPara="0" vert="horz" wrap="square" lIns="41910" tIns="41910" rIns="41910" bIns="41910" numCol="1" spcCol="1270" anchor="ctr" anchorCtr="0">
+          <a:noAutofit/>
+        </a:bodyPr>
+        <a:lstStyle/>
+        <a:p>
+          <a:pPr marL="0" lvl="0" indent="0" algn="ctr" defTabSz="488950">
+            <a:lnSpc>
+              <a:spcPct val="90000"/>
+            </a:lnSpc>
+            <a:spcBef>
+              <a:spcPct val="0"/>
+            </a:spcBef>
+            <a:spcAft>
+              <a:spcPct val="35000"/>
+            </a:spcAft>
+            <a:buNone/>
+          </a:pPr>
+          <a:r>
+            <a:rPr kumimoji="1" lang="ja-JP" altLang="en-US" sz="1100" kern="1200">
+              <a:latin typeface="Hiragino Sans W4" panose="020B0400000000000000" pitchFamily="34" charset="-128"/>
+              <a:ea typeface="Hiragino Sans W4" panose="020B0400000000000000" pitchFamily="34" charset="-128"/>
             </a:rPr>
             <a:t>物価高</a:t>
           </a:r>
           <a:br>
-            <a:rPr kumimoji="1" lang="en-US" altLang="ja-JP" sz="1600" kern="1200" dirty="0">
-              <a:latin typeface="HGSSoeiKakugothicUB" panose="020B0900000000000000" pitchFamily="34" charset="-128"/>
-              <a:ea typeface="HGSSoeiKakugothicUB" panose="020B0900000000000000" pitchFamily="34" charset="-128"/>
+            <a:rPr kumimoji="1" lang="en-US" altLang="ja-JP" sz="1100" kern="1200" dirty="0">
+              <a:latin typeface="Hiragino Sans W4" panose="020B0400000000000000" pitchFamily="34" charset="-128"/>
+              <a:ea typeface="Hiragino Sans W4" panose="020B0400000000000000" pitchFamily="34" charset="-128"/>
             </a:rPr>
           </a:br>
           <a:r>
-            <a:rPr kumimoji="1" lang="ja-JP" altLang="en-US" sz="1600" kern="1200">
-              <a:latin typeface="HGSSoeiKakugothicUB" panose="020B0900000000000000" pitchFamily="34" charset="-128"/>
-              <a:ea typeface="HGSSoeiKakugothicUB" panose="020B0900000000000000" pitchFamily="34" charset="-128"/>
+            <a:rPr kumimoji="1" lang="ja-JP" altLang="en-US" sz="1100" kern="1200">
+              <a:latin typeface="Hiragino Sans W4" panose="020B0400000000000000" pitchFamily="34" charset="-128"/>
+              <a:ea typeface="Hiragino Sans W4" panose="020B0400000000000000" pitchFamily="34" charset="-128"/>
             </a:rPr>
-            <a:t>（インフレ）</a:t>
+            <a:t>（</a:t>
+          </a:r>
+          <a:r>
+            <a:rPr kumimoji="1" lang="ja-JP" altLang="en-US" sz="1100" b="1" kern="1200">
+              <a:latin typeface="Hiragino Sans W4" panose="020B0400000000000000" pitchFamily="34" charset="-128"/>
+              <a:ea typeface="Hiragino Sans W4" panose="020B0400000000000000" pitchFamily="34" charset="-128"/>
+            </a:rPr>
+            <a:t>インフレ</a:t>
+          </a:r>
+          <a:r>
+            <a:rPr kumimoji="1" lang="ja-JP" altLang="en-US" sz="1100" kern="1200">
+              <a:latin typeface="Hiragino Sans W4" panose="020B0400000000000000" pitchFamily="34" charset="-128"/>
+              <a:ea typeface="Hiragino Sans W4" panose="020B0400000000000000" pitchFamily="34" charset="-128"/>
+            </a:rPr>
+            <a:t>）</a:t>
           </a:r>
         </a:p>
       </dsp:txBody>
       <dsp:txXfrm>
-        <a:off x="1688258" y="719552"/>
-        <a:ext cx="1468479" cy="696557"/>
+        <a:off x="1176732" y="1677851"/>
+        <a:ext cx="1249528" cy="592700"/>
+      </dsp:txXfrm>
+    </dsp:sp>
+    <dsp:sp modelId="{CAAC65CA-09FF-B642-B0C8-D19A7DEB4844}">
+      <dsp:nvSpPr>
+        <dsp:cNvPr id="0" name=""/>
+        <dsp:cNvSpPr/>
+      </dsp:nvSpPr>
+      <dsp:spPr>
+        <a:xfrm>
+          <a:off x="2008868" y="456319"/>
+          <a:ext cx="1313656" cy="656828"/>
+        </a:xfrm>
+        <a:prstGeom prst="roundRect">
+          <a:avLst/>
+        </a:prstGeom>
+        <a:solidFill>
+          <a:schemeClr val="lt1">
+            <a:hueOff val="0"/>
+            <a:satOff val="0"/>
+            <a:lumOff val="0"/>
+            <a:alphaOff val="0"/>
+          </a:schemeClr>
+        </a:solidFill>
+        <a:ln w="12700" cap="flat" cmpd="sng" algn="ctr">
+          <a:solidFill>
+            <a:scrgbClr r="0" g="0" b="0"/>
+          </a:solidFill>
+          <a:prstDash val="solid"/>
+          <a:miter lim="800000"/>
+        </a:ln>
+        <a:effectLst/>
+      </dsp:spPr>
+      <dsp:style>
+        <a:lnRef idx="2">
+          <a:scrgbClr r="0" g="0" b="0"/>
+        </a:lnRef>
+        <a:fillRef idx="1">
+          <a:scrgbClr r="0" g="0" b="0"/>
+        </a:fillRef>
+        <a:effectRef idx="0">
+          <a:scrgbClr r="0" g="0" b="0"/>
+        </a:effectRef>
+        <a:fontRef idx="minor">
+          <a:schemeClr val="lt1"/>
+        </a:fontRef>
+      </dsp:style>
+      <dsp:txBody>
+        <a:bodyPr spcFirstLastPara="0" vert="horz" wrap="square" lIns="41910" tIns="41910" rIns="41910" bIns="41910" numCol="1" spcCol="1270" anchor="ctr" anchorCtr="0">
+          <a:noAutofit/>
+        </a:bodyPr>
+        <a:lstStyle/>
+        <a:p>
+          <a:pPr marL="0" lvl="0" indent="0" algn="ctr" defTabSz="488950">
+            <a:lnSpc>
+              <a:spcPct val="90000"/>
+            </a:lnSpc>
+            <a:spcBef>
+              <a:spcPct val="0"/>
+            </a:spcBef>
+            <a:spcAft>
+              <a:spcPct val="35000"/>
+            </a:spcAft>
+            <a:buNone/>
+          </a:pPr>
+          <a:r>
+            <a:rPr kumimoji="1" lang="ja-JP" altLang="en-US" sz="1100" kern="1200">
+              <a:latin typeface="Hiragino Sans W4" panose="020B0400000000000000" pitchFamily="34" charset="-128"/>
+              <a:ea typeface="Hiragino Sans W4" panose="020B0400000000000000" pitchFamily="34" charset="-128"/>
+            </a:rPr>
+            <a:t>輸出</a:t>
+          </a:r>
+          <a:r>
+            <a:rPr kumimoji="1" lang="ja-JP" altLang="en-US" sz="1100" b="1" kern="1200">
+              <a:latin typeface="Hiragino Sans W4" panose="020B0400000000000000" pitchFamily="34" charset="-128"/>
+              <a:ea typeface="Hiragino Sans W4" panose="020B0400000000000000" pitchFamily="34" charset="-128"/>
+            </a:rPr>
+            <a:t>減少</a:t>
+          </a:r>
+          <a:br>
+            <a:rPr kumimoji="1" lang="en-US" altLang="ja-JP" sz="1100" kern="1200" dirty="0">
+              <a:latin typeface="Hiragino Sans W4" panose="020B0400000000000000" pitchFamily="34" charset="-128"/>
+              <a:ea typeface="Hiragino Sans W4" panose="020B0400000000000000" pitchFamily="34" charset="-128"/>
+            </a:rPr>
+          </a:br>
+          <a:r>
+            <a:rPr kumimoji="1" lang="ja-JP" altLang="en-US" sz="1100" kern="1200">
+              <a:latin typeface="Hiragino Sans W4" panose="020B0400000000000000" pitchFamily="34" charset="-128"/>
+              <a:ea typeface="Hiragino Sans W4" panose="020B0400000000000000" pitchFamily="34" charset="-128"/>
+            </a:rPr>
+            <a:t>輸入</a:t>
+          </a:r>
+          <a:r>
+            <a:rPr kumimoji="1" lang="ja-JP" altLang="en-US" sz="1100" b="1" kern="1200">
+              <a:latin typeface="Hiragino Sans W4" panose="020B0400000000000000" pitchFamily="34" charset="-128"/>
+              <a:ea typeface="Hiragino Sans W4" panose="020B0400000000000000" pitchFamily="34" charset="-128"/>
+            </a:rPr>
+            <a:t>増加</a:t>
+          </a:r>
+        </a:p>
+      </dsp:txBody>
+      <dsp:txXfrm>
+        <a:off x="2040932" y="488383"/>
+        <a:ext cx="1249528" cy="592700"/>
+      </dsp:txXfrm>
+    </dsp:sp>
+  </dsp:spTree>
+</dsp:drawing>
+</file>
+
+<file path=ppt/diagrams/drawing2.xml><?xml version="1.0" encoding="utf-8"?>
+<dsp:drawing xmlns:dgm="http://schemas.openxmlformats.org/drawingml/2006/diagram" xmlns:dsp="http://schemas.microsoft.com/office/drawing/2008/diagram" xmlns:a="http://schemas.openxmlformats.org/drawingml/2006/main">
+  <dsp:spTree>
+    <dsp:nvGrpSpPr>
+      <dsp:cNvPr id="0" name=""/>
+      <dsp:cNvGrpSpPr/>
+    </dsp:nvGrpSpPr>
+    <dsp:grpSpPr/>
+    <dsp:sp modelId="{19409FAB-9ED0-024C-9BD3-FA3940064CB5}">
+      <dsp:nvSpPr>
+        <dsp:cNvPr id="0" name=""/>
+        <dsp:cNvSpPr/>
+      </dsp:nvSpPr>
+      <dsp:spPr>
+        <a:xfrm>
+          <a:off x="1358799" y="-6120"/>
+          <a:ext cx="5410400" cy="5410400"/>
+        </a:xfrm>
+        <a:prstGeom prst="circularArrow">
+          <a:avLst>
+            <a:gd name="adj1" fmla="val 5274"/>
+            <a:gd name="adj2" fmla="val 312630"/>
+            <a:gd name="adj3" fmla="val 14229145"/>
+            <a:gd name="adj4" fmla="val 17126425"/>
+            <a:gd name="adj5" fmla="val 5477"/>
+          </a:avLst>
+        </a:prstGeom>
+        <a:solidFill>
+          <a:schemeClr val="dk1">
+            <a:tint val="40000"/>
+            <a:hueOff val="0"/>
+            <a:satOff val="0"/>
+            <a:lumOff val="0"/>
+            <a:alphaOff val="0"/>
+          </a:schemeClr>
+        </a:solidFill>
+        <a:ln>
+          <a:noFill/>
+        </a:ln>
+        <a:effectLst/>
+      </dsp:spPr>
+      <dsp:style>
+        <a:lnRef idx="0">
+          <a:scrgbClr r="0" g="0" b="0"/>
+        </a:lnRef>
+        <a:fillRef idx="1">
+          <a:scrgbClr r="0" g="0" b="0"/>
+        </a:fillRef>
+        <a:effectRef idx="0">
+          <a:scrgbClr r="0" g="0" b="0"/>
+        </a:effectRef>
+        <a:fontRef idx="minor"/>
+      </dsp:style>
+    </dsp:sp>
+    <dsp:sp modelId="{D94B10FC-86A6-FF4A-A1B2-1E5A15A9B8EC}">
+      <dsp:nvSpPr>
+        <dsp:cNvPr id="0" name=""/>
+        <dsp:cNvSpPr/>
+      </dsp:nvSpPr>
+      <dsp:spPr>
+        <a:xfrm>
+          <a:off x="3036093" y="491"/>
+          <a:ext cx="2055812" cy="1027906"/>
+        </a:xfrm>
+        <a:prstGeom prst="roundRect">
+          <a:avLst/>
+        </a:prstGeom>
+        <a:solidFill>
+          <a:schemeClr val="lt1">
+            <a:hueOff val="0"/>
+            <a:satOff val="0"/>
+            <a:lumOff val="0"/>
+            <a:alphaOff val="0"/>
+          </a:schemeClr>
+        </a:solidFill>
+        <a:ln w="12700" cap="flat" cmpd="sng" algn="ctr">
+          <a:solidFill>
+            <a:scrgbClr r="0" g="0" b="0"/>
+          </a:solidFill>
+          <a:prstDash val="solid"/>
+          <a:miter lim="800000"/>
+        </a:ln>
+        <a:effectLst/>
+      </dsp:spPr>
+      <dsp:style>
+        <a:lnRef idx="2">
+          <a:scrgbClr r="0" g="0" b="0"/>
+        </a:lnRef>
+        <a:fillRef idx="1">
+          <a:scrgbClr r="0" g="0" b="0"/>
+        </a:fillRef>
+        <a:effectRef idx="0">
+          <a:scrgbClr r="0" g="0" b="0"/>
+        </a:effectRef>
+        <a:fontRef idx="minor">
+          <a:schemeClr val="lt1"/>
+        </a:fontRef>
+      </dsp:style>
+      <dsp:txBody>
+        <a:bodyPr spcFirstLastPara="0" vert="horz" wrap="square" lIns="76200" tIns="76200" rIns="76200" bIns="76200" numCol="1" spcCol="1270" anchor="ctr" anchorCtr="0">
+          <a:noAutofit/>
+        </a:bodyPr>
+        <a:lstStyle/>
+        <a:p>
+          <a:pPr marL="0" lvl="0" indent="0" algn="ctr" defTabSz="889000">
+            <a:lnSpc>
+              <a:spcPct val="90000"/>
+            </a:lnSpc>
+            <a:spcBef>
+              <a:spcPct val="0"/>
+            </a:spcBef>
+            <a:spcAft>
+              <a:spcPct val="35000"/>
+            </a:spcAft>
+            <a:buNone/>
+          </a:pPr>
+          <a:r>
+            <a:rPr kumimoji="1" lang="ja-JP" altLang="en-US" sz="2000" kern="1200">
+              <a:latin typeface="Hiragino Sans W4" panose="020B0400000000000000" pitchFamily="34" charset="-128"/>
+              <a:ea typeface="Hiragino Sans W4" panose="020B0400000000000000" pitchFamily="34" charset="-128"/>
+            </a:rPr>
+            <a:t>貿易</a:t>
+          </a:r>
+          <a:r>
+            <a:rPr kumimoji="1" lang="ja-JP" altLang="en-US" sz="2000" b="1" kern="1200">
+              <a:latin typeface="Hiragino Sans W4" panose="020B0400000000000000" pitchFamily="34" charset="-128"/>
+              <a:ea typeface="Hiragino Sans W4" panose="020B0400000000000000" pitchFamily="34" charset="-128"/>
+            </a:rPr>
+            <a:t>赤字</a:t>
+          </a:r>
+        </a:p>
+      </dsp:txBody>
+      <dsp:txXfrm>
+        <a:off x="3086271" y="50669"/>
+        <a:ext cx="1955456" cy="927550"/>
+      </dsp:txXfrm>
+    </dsp:sp>
+    <dsp:sp modelId="{A6D2C092-8BDD-184F-B60A-95002E1C617A}">
+      <dsp:nvSpPr>
+        <dsp:cNvPr id="0" name=""/>
+        <dsp:cNvSpPr/>
+      </dsp:nvSpPr>
+      <dsp:spPr>
+        <a:xfrm>
+          <a:off x="4936922" y="1097936"/>
+          <a:ext cx="2055812" cy="1027906"/>
+        </a:xfrm>
+        <a:prstGeom prst="roundRect">
+          <a:avLst/>
+        </a:prstGeom>
+        <a:solidFill>
+          <a:schemeClr val="lt1">
+            <a:hueOff val="0"/>
+            <a:satOff val="0"/>
+            <a:lumOff val="0"/>
+            <a:alphaOff val="0"/>
+          </a:schemeClr>
+        </a:solidFill>
+        <a:ln w="12700" cap="flat" cmpd="sng" algn="ctr">
+          <a:solidFill>
+            <a:scrgbClr r="0" g="0" b="0"/>
+          </a:solidFill>
+          <a:prstDash val="solid"/>
+          <a:miter lim="800000"/>
+        </a:ln>
+        <a:effectLst/>
+      </dsp:spPr>
+      <dsp:style>
+        <a:lnRef idx="2">
+          <a:scrgbClr r="0" g="0" b="0"/>
+        </a:lnRef>
+        <a:fillRef idx="1">
+          <a:scrgbClr r="0" g="0" b="0"/>
+        </a:fillRef>
+        <a:effectRef idx="0">
+          <a:scrgbClr r="0" g="0" b="0"/>
+        </a:effectRef>
+        <a:fontRef idx="minor">
+          <a:schemeClr val="lt1"/>
+        </a:fontRef>
+      </dsp:style>
+      <dsp:txBody>
+        <a:bodyPr spcFirstLastPara="0" vert="horz" wrap="square" lIns="76200" tIns="76200" rIns="76200" bIns="76200" numCol="1" spcCol="1270" anchor="ctr" anchorCtr="0">
+          <a:noAutofit/>
+        </a:bodyPr>
+        <a:lstStyle/>
+        <a:p>
+          <a:pPr marL="0" lvl="0" indent="0" algn="ctr" defTabSz="889000">
+            <a:lnSpc>
+              <a:spcPct val="90000"/>
+            </a:lnSpc>
+            <a:spcBef>
+              <a:spcPct val="0"/>
+            </a:spcBef>
+            <a:spcAft>
+              <a:spcPct val="35000"/>
+            </a:spcAft>
+            <a:buNone/>
+          </a:pPr>
+          <a:r>
+            <a:rPr kumimoji="1" lang="ja-JP" altLang="en-US" sz="2000" kern="1200">
+              <a:latin typeface="Hiragino Sans W4" panose="020B0400000000000000" pitchFamily="34" charset="-128"/>
+              <a:ea typeface="Hiragino Sans W4" panose="020B0400000000000000" pitchFamily="34" charset="-128"/>
+            </a:rPr>
+            <a:t>通貨</a:t>
+          </a:r>
+          <a:r>
+            <a:rPr kumimoji="1" lang="ja-JP" altLang="en-US" sz="2000" b="1" kern="1200">
+              <a:latin typeface="Hiragino Sans W4" panose="020B0400000000000000" pitchFamily="34" charset="-128"/>
+              <a:ea typeface="Hiragino Sans W4" panose="020B0400000000000000" pitchFamily="34" charset="-128"/>
+            </a:rPr>
+            <a:t>減価</a:t>
+          </a:r>
+        </a:p>
+      </dsp:txBody>
+      <dsp:txXfrm>
+        <a:off x="4987100" y="1148114"/>
+        <a:ext cx="1955456" cy="927550"/>
+      </dsp:txXfrm>
+    </dsp:sp>
+    <dsp:sp modelId="{659FE536-1F1D-504E-930D-115BE2D22DCB}">
+      <dsp:nvSpPr>
+        <dsp:cNvPr id="0" name=""/>
+        <dsp:cNvSpPr/>
+      </dsp:nvSpPr>
+      <dsp:spPr>
+        <a:xfrm>
+          <a:off x="4936922" y="3292824"/>
+          <a:ext cx="2055812" cy="1027906"/>
+        </a:xfrm>
+        <a:prstGeom prst="roundRect">
+          <a:avLst/>
+        </a:prstGeom>
+        <a:solidFill>
+          <a:schemeClr val="lt1">
+            <a:hueOff val="0"/>
+            <a:satOff val="0"/>
+            <a:lumOff val="0"/>
+            <a:alphaOff val="0"/>
+          </a:schemeClr>
+        </a:solidFill>
+        <a:ln w="12700" cap="flat" cmpd="sng" algn="ctr">
+          <a:solidFill>
+            <a:scrgbClr r="0" g="0" b="0"/>
+          </a:solidFill>
+          <a:prstDash val="solid"/>
+          <a:miter lim="800000"/>
+        </a:ln>
+        <a:effectLst/>
+      </dsp:spPr>
+      <dsp:style>
+        <a:lnRef idx="2">
+          <a:scrgbClr r="0" g="0" b="0"/>
+        </a:lnRef>
+        <a:fillRef idx="1">
+          <a:scrgbClr r="0" g="0" b="0"/>
+        </a:fillRef>
+        <a:effectRef idx="0">
+          <a:scrgbClr r="0" g="0" b="0"/>
+        </a:effectRef>
+        <a:fontRef idx="minor">
+          <a:schemeClr val="lt1"/>
+        </a:fontRef>
+      </dsp:style>
+      <dsp:txBody>
+        <a:bodyPr spcFirstLastPara="0" vert="horz" wrap="square" lIns="76200" tIns="76200" rIns="76200" bIns="76200" numCol="1" spcCol="1270" anchor="ctr" anchorCtr="0">
+          <a:noAutofit/>
+        </a:bodyPr>
+        <a:lstStyle/>
+        <a:p>
+          <a:pPr marL="0" lvl="0" indent="0" algn="ctr" defTabSz="889000">
+            <a:lnSpc>
+              <a:spcPct val="90000"/>
+            </a:lnSpc>
+            <a:spcBef>
+              <a:spcPct val="0"/>
+            </a:spcBef>
+            <a:spcAft>
+              <a:spcPct val="35000"/>
+            </a:spcAft>
+            <a:buNone/>
+          </a:pPr>
+          <a:r>
+            <a:rPr kumimoji="1" lang="ja-JP" altLang="en-US" sz="2000" kern="1200">
+              <a:latin typeface="Hiragino Sans W4" panose="020B0400000000000000" pitchFamily="34" charset="-128"/>
+              <a:ea typeface="Hiragino Sans W4" panose="020B0400000000000000" pitchFamily="34" charset="-128"/>
+            </a:rPr>
+            <a:t>輸出</a:t>
+          </a:r>
+          <a:r>
+            <a:rPr kumimoji="1" lang="ja-JP" altLang="en-US" sz="2000" b="1" kern="1200">
+              <a:latin typeface="Hiragino Sans W4" panose="020B0400000000000000" pitchFamily="34" charset="-128"/>
+              <a:ea typeface="Hiragino Sans W4" panose="020B0400000000000000" pitchFamily="34" charset="-128"/>
+            </a:rPr>
+            <a:t>増加</a:t>
+          </a:r>
+          <a:br>
+            <a:rPr kumimoji="1" lang="en-US" altLang="ja-JP" sz="2000" kern="1200" dirty="0">
+              <a:latin typeface="Hiragino Sans W4" panose="020B0400000000000000" pitchFamily="34" charset="-128"/>
+              <a:ea typeface="Hiragino Sans W4" panose="020B0400000000000000" pitchFamily="34" charset="-128"/>
+            </a:rPr>
+          </a:br>
+          <a:r>
+            <a:rPr kumimoji="1" lang="ja-JP" altLang="en-US" sz="2000" kern="1200">
+              <a:latin typeface="Hiragino Sans W4" panose="020B0400000000000000" pitchFamily="34" charset="-128"/>
+              <a:ea typeface="Hiragino Sans W4" panose="020B0400000000000000" pitchFamily="34" charset="-128"/>
+            </a:rPr>
+            <a:t>輸入</a:t>
+          </a:r>
+          <a:r>
+            <a:rPr kumimoji="1" lang="ja-JP" altLang="en-US" sz="2000" b="1" kern="1200">
+              <a:latin typeface="Hiragino Sans W4" panose="020B0400000000000000" pitchFamily="34" charset="-128"/>
+              <a:ea typeface="Hiragino Sans W4" panose="020B0400000000000000" pitchFamily="34" charset="-128"/>
+            </a:rPr>
+            <a:t>減少</a:t>
+          </a:r>
+        </a:p>
+      </dsp:txBody>
+      <dsp:txXfrm>
+        <a:off x="4987100" y="3343002"/>
+        <a:ext cx="1955456" cy="927550"/>
+      </dsp:txXfrm>
+    </dsp:sp>
+    <dsp:sp modelId="{1DF87B89-7439-B148-B088-80277B1BDDD3}">
+      <dsp:nvSpPr>
+        <dsp:cNvPr id="0" name=""/>
+        <dsp:cNvSpPr/>
+      </dsp:nvSpPr>
+      <dsp:spPr>
+        <a:xfrm>
+          <a:off x="3036093" y="4390268"/>
+          <a:ext cx="2055812" cy="1027906"/>
+        </a:xfrm>
+        <a:prstGeom prst="roundRect">
+          <a:avLst/>
+        </a:prstGeom>
+        <a:solidFill>
+          <a:schemeClr val="lt1">
+            <a:hueOff val="0"/>
+            <a:satOff val="0"/>
+            <a:lumOff val="0"/>
+            <a:alphaOff val="0"/>
+          </a:schemeClr>
+        </a:solidFill>
+        <a:ln w="12700" cap="flat" cmpd="sng" algn="ctr">
+          <a:solidFill>
+            <a:scrgbClr r="0" g="0" b="0"/>
+          </a:solidFill>
+          <a:prstDash val="solid"/>
+          <a:miter lim="800000"/>
+        </a:ln>
+        <a:effectLst/>
+      </dsp:spPr>
+      <dsp:style>
+        <a:lnRef idx="2">
+          <a:scrgbClr r="0" g="0" b="0"/>
+        </a:lnRef>
+        <a:fillRef idx="1">
+          <a:scrgbClr r="0" g="0" b="0"/>
+        </a:fillRef>
+        <a:effectRef idx="0">
+          <a:scrgbClr r="0" g="0" b="0"/>
+        </a:effectRef>
+        <a:fontRef idx="minor">
+          <a:schemeClr val="lt1"/>
+        </a:fontRef>
+      </dsp:style>
+      <dsp:txBody>
+        <a:bodyPr spcFirstLastPara="0" vert="horz" wrap="square" lIns="76200" tIns="76200" rIns="76200" bIns="76200" numCol="1" spcCol="1270" anchor="ctr" anchorCtr="0">
+          <a:noAutofit/>
+        </a:bodyPr>
+        <a:lstStyle/>
+        <a:p>
+          <a:pPr marL="0" lvl="0" indent="0" algn="ctr" defTabSz="889000">
+            <a:lnSpc>
+              <a:spcPct val="90000"/>
+            </a:lnSpc>
+            <a:spcBef>
+              <a:spcPct val="0"/>
+            </a:spcBef>
+            <a:spcAft>
+              <a:spcPct val="35000"/>
+            </a:spcAft>
+            <a:buNone/>
+          </a:pPr>
+          <a:r>
+            <a:rPr kumimoji="1" lang="ja-JP" altLang="en-US" sz="2000" kern="1200">
+              <a:latin typeface="Hiragino Sans W4" panose="020B0400000000000000" pitchFamily="34" charset="-128"/>
+              <a:ea typeface="Hiragino Sans W4" panose="020B0400000000000000" pitchFamily="34" charset="-128"/>
+            </a:rPr>
+            <a:t>貿易</a:t>
+          </a:r>
+          <a:r>
+            <a:rPr kumimoji="1" lang="ja-JP" altLang="en-US" sz="2000" b="1" kern="1200">
+              <a:latin typeface="Hiragino Sans W4" panose="020B0400000000000000" pitchFamily="34" charset="-128"/>
+              <a:ea typeface="Hiragino Sans W4" panose="020B0400000000000000" pitchFamily="34" charset="-128"/>
+            </a:rPr>
+            <a:t>黒字</a:t>
+          </a:r>
+        </a:p>
+      </dsp:txBody>
+      <dsp:txXfrm>
+        <a:off x="3086271" y="4440446"/>
+        <a:ext cx="1955456" cy="927550"/>
+      </dsp:txXfrm>
+    </dsp:sp>
+    <dsp:sp modelId="{93260571-C263-5C47-A419-401F437055EE}">
+      <dsp:nvSpPr>
+        <dsp:cNvPr id="0" name=""/>
+        <dsp:cNvSpPr/>
+      </dsp:nvSpPr>
+      <dsp:spPr>
+        <a:xfrm>
+          <a:off x="1135264" y="3292824"/>
+          <a:ext cx="2055812" cy="1027906"/>
+        </a:xfrm>
+        <a:prstGeom prst="roundRect">
+          <a:avLst/>
+        </a:prstGeom>
+        <a:solidFill>
+          <a:schemeClr val="lt1">
+            <a:hueOff val="0"/>
+            <a:satOff val="0"/>
+            <a:lumOff val="0"/>
+            <a:alphaOff val="0"/>
+          </a:schemeClr>
+        </a:solidFill>
+        <a:ln w="12700" cap="flat" cmpd="sng" algn="ctr">
+          <a:solidFill>
+            <a:scrgbClr r="0" g="0" b="0"/>
+          </a:solidFill>
+          <a:prstDash val="solid"/>
+          <a:miter lim="800000"/>
+        </a:ln>
+        <a:effectLst/>
+      </dsp:spPr>
+      <dsp:style>
+        <a:lnRef idx="2">
+          <a:scrgbClr r="0" g="0" b="0"/>
+        </a:lnRef>
+        <a:fillRef idx="1">
+          <a:scrgbClr r="0" g="0" b="0"/>
+        </a:fillRef>
+        <a:effectRef idx="0">
+          <a:scrgbClr r="0" g="0" b="0"/>
+        </a:effectRef>
+        <a:fontRef idx="minor">
+          <a:schemeClr val="lt1"/>
+        </a:fontRef>
+      </dsp:style>
+      <dsp:txBody>
+        <a:bodyPr spcFirstLastPara="0" vert="horz" wrap="square" lIns="76200" tIns="76200" rIns="76200" bIns="76200" numCol="1" spcCol="1270" anchor="ctr" anchorCtr="0">
+          <a:noAutofit/>
+        </a:bodyPr>
+        <a:lstStyle/>
+        <a:p>
+          <a:pPr marL="0" lvl="0" indent="0" algn="ctr" defTabSz="889000">
+            <a:lnSpc>
+              <a:spcPct val="90000"/>
+            </a:lnSpc>
+            <a:spcBef>
+              <a:spcPct val="0"/>
+            </a:spcBef>
+            <a:spcAft>
+              <a:spcPct val="35000"/>
+            </a:spcAft>
+            <a:buNone/>
+          </a:pPr>
+          <a:r>
+            <a:rPr kumimoji="1" lang="ja-JP" altLang="en-US" sz="2000" kern="1200">
+              <a:latin typeface="Hiragino Sans W4" panose="020B0400000000000000" pitchFamily="34" charset="-128"/>
+              <a:ea typeface="Hiragino Sans W4" panose="020B0400000000000000" pitchFamily="34" charset="-128"/>
+            </a:rPr>
+            <a:t>通貨</a:t>
+          </a:r>
+          <a:r>
+            <a:rPr kumimoji="1" lang="ja-JP" altLang="en-US" sz="2000" b="1" kern="1200">
+              <a:latin typeface="Hiragino Sans W4" panose="020B0400000000000000" pitchFamily="34" charset="-128"/>
+              <a:ea typeface="Hiragino Sans W4" panose="020B0400000000000000" pitchFamily="34" charset="-128"/>
+            </a:rPr>
+            <a:t>増価</a:t>
+          </a:r>
+        </a:p>
+      </dsp:txBody>
+      <dsp:txXfrm>
+        <a:off x="1185442" y="3343002"/>
+        <a:ext cx="1955456" cy="927550"/>
+      </dsp:txXfrm>
+    </dsp:sp>
+    <dsp:sp modelId="{5A043805-F757-CF4A-9485-BE4798BC4994}">
+      <dsp:nvSpPr>
+        <dsp:cNvPr id="0" name=""/>
+        <dsp:cNvSpPr/>
+      </dsp:nvSpPr>
+      <dsp:spPr>
+        <a:xfrm>
+          <a:off x="1135264" y="1097936"/>
+          <a:ext cx="2055812" cy="1027906"/>
+        </a:xfrm>
+        <a:prstGeom prst="roundRect">
+          <a:avLst/>
+        </a:prstGeom>
+        <a:solidFill>
+          <a:schemeClr val="lt1">
+            <a:hueOff val="0"/>
+            <a:satOff val="0"/>
+            <a:lumOff val="0"/>
+            <a:alphaOff val="0"/>
+          </a:schemeClr>
+        </a:solidFill>
+        <a:ln w="12700" cap="flat" cmpd="sng" algn="ctr">
+          <a:solidFill>
+            <a:scrgbClr r="0" g="0" b="0"/>
+          </a:solidFill>
+          <a:prstDash val="solid"/>
+          <a:miter lim="800000"/>
+        </a:ln>
+        <a:effectLst/>
+      </dsp:spPr>
+      <dsp:style>
+        <a:lnRef idx="2">
+          <a:scrgbClr r="0" g="0" b="0"/>
+        </a:lnRef>
+        <a:fillRef idx="1">
+          <a:scrgbClr r="0" g="0" b="0"/>
+        </a:fillRef>
+        <a:effectRef idx="0">
+          <a:scrgbClr r="0" g="0" b="0"/>
+        </a:effectRef>
+        <a:fontRef idx="minor">
+          <a:schemeClr val="lt1"/>
+        </a:fontRef>
+      </dsp:style>
+      <dsp:txBody>
+        <a:bodyPr spcFirstLastPara="0" vert="horz" wrap="square" lIns="76200" tIns="76200" rIns="76200" bIns="76200" numCol="1" spcCol="1270" anchor="ctr" anchorCtr="0">
+          <a:noAutofit/>
+        </a:bodyPr>
+        <a:lstStyle/>
+        <a:p>
+          <a:pPr marL="0" lvl="0" indent="0" algn="ctr" defTabSz="889000">
+            <a:lnSpc>
+              <a:spcPct val="90000"/>
+            </a:lnSpc>
+            <a:spcBef>
+              <a:spcPct val="0"/>
+            </a:spcBef>
+            <a:spcAft>
+              <a:spcPct val="35000"/>
+            </a:spcAft>
+            <a:buNone/>
+          </a:pPr>
+          <a:r>
+            <a:rPr kumimoji="1" lang="ja-JP" altLang="en-US" sz="2000" kern="1200">
+              <a:latin typeface="Hiragino Sans W4" panose="020B0400000000000000" pitchFamily="34" charset="-128"/>
+              <a:ea typeface="Hiragino Sans W4" panose="020B0400000000000000" pitchFamily="34" charset="-128"/>
+            </a:rPr>
+            <a:t>輸出</a:t>
+          </a:r>
+          <a:r>
+            <a:rPr kumimoji="1" lang="ja-JP" altLang="en-US" sz="2000" b="1" kern="1200">
+              <a:latin typeface="Hiragino Sans W4" panose="020B0400000000000000" pitchFamily="34" charset="-128"/>
+              <a:ea typeface="Hiragino Sans W4" panose="020B0400000000000000" pitchFamily="34" charset="-128"/>
+            </a:rPr>
+            <a:t>減少</a:t>
+          </a:r>
+          <a:br>
+            <a:rPr kumimoji="1" lang="en-US" altLang="ja-JP" sz="2000" kern="1200" dirty="0">
+              <a:latin typeface="Hiragino Sans W4" panose="020B0400000000000000" pitchFamily="34" charset="-128"/>
+              <a:ea typeface="Hiragino Sans W4" panose="020B0400000000000000" pitchFamily="34" charset="-128"/>
+            </a:rPr>
+          </a:br>
+          <a:r>
+            <a:rPr kumimoji="1" lang="ja-JP" altLang="en-US" sz="2000" kern="1200">
+              <a:latin typeface="Hiragino Sans W4" panose="020B0400000000000000" pitchFamily="34" charset="-128"/>
+              <a:ea typeface="Hiragino Sans W4" panose="020B0400000000000000" pitchFamily="34" charset="-128"/>
+            </a:rPr>
+            <a:t>輸入</a:t>
+          </a:r>
+          <a:r>
+            <a:rPr kumimoji="1" lang="ja-JP" altLang="en-US" sz="2000" b="1" kern="1200">
+              <a:latin typeface="Hiragino Sans W4" panose="020B0400000000000000" pitchFamily="34" charset="-128"/>
+              <a:ea typeface="Hiragino Sans W4" panose="020B0400000000000000" pitchFamily="34" charset="-128"/>
+            </a:rPr>
+            <a:t>増加</a:t>
+          </a:r>
+        </a:p>
+      </dsp:txBody>
+      <dsp:txXfrm>
+        <a:off x="1185442" y="1148114"/>
+        <a:ext cx="1955456" cy="927550"/>
       </dsp:txXfrm>
     </dsp:sp>
   </dsp:spTree>
@@ -2193,6 +4600,409 @@
 </file>
 
 <file path=ppt/diagrams/layout1.xml><?xml version="1.0" encoding="utf-8"?>
+<dgm:layoutDef xmlns:dgm="http://schemas.openxmlformats.org/drawingml/2006/diagram" xmlns:a="http://schemas.openxmlformats.org/drawingml/2006/main" uniqueId="urn:microsoft.com/office/officeart/2005/8/layout/cycle3">
+  <dgm:title val=""/>
+  <dgm:desc val=""/>
+  <dgm:catLst>
+    <dgm:cat type="cycle" pri="5000"/>
+  </dgm:catLst>
+  <dgm:sampData>
+    <dgm:dataModel>
+      <dgm:ptLst>
+        <dgm:pt modelId="0" type="doc"/>
+        <dgm:pt modelId="1">
+          <dgm:prSet phldr="1"/>
+        </dgm:pt>
+        <dgm:pt modelId="2">
+          <dgm:prSet phldr="1"/>
+        </dgm:pt>
+        <dgm:pt modelId="3">
+          <dgm:prSet phldr="1"/>
+        </dgm:pt>
+        <dgm:pt modelId="4">
+          <dgm:prSet phldr="1"/>
+        </dgm:pt>
+        <dgm:pt modelId="5">
+          <dgm:prSet phldr="1"/>
+        </dgm:pt>
+      </dgm:ptLst>
+      <dgm:cxnLst>
+        <dgm:cxn modelId="6" srcId="0" destId="1" srcOrd="0" destOrd="0"/>
+        <dgm:cxn modelId="7" srcId="0" destId="2" srcOrd="1" destOrd="0"/>
+        <dgm:cxn modelId="8" srcId="0" destId="3" srcOrd="2" destOrd="0"/>
+        <dgm:cxn modelId="9" srcId="0" destId="4" srcOrd="3" destOrd="0"/>
+        <dgm:cxn modelId="10" srcId="0" destId="5" srcOrd="4" destOrd="0"/>
+      </dgm:cxnLst>
+      <dgm:bg/>
+      <dgm:whole/>
+    </dgm:dataModel>
+  </dgm:sampData>
+  <dgm:styleData>
+    <dgm:dataModel>
+      <dgm:ptLst>
+        <dgm:pt modelId="0" type="doc"/>
+        <dgm:pt modelId="1"/>
+        <dgm:pt modelId="2"/>
+        <dgm:pt modelId="3"/>
+      </dgm:ptLst>
+      <dgm:cxnLst>
+        <dgm:cxn modelId="4" srcId="0" destId="1" srcOrd="0" destOrd="0"/>
+        <dgm:cxn modelId="5" srcId="0" destId="2" srcOrd="1" destOrd="0"/>
+        <dgm:cxn modelId="6" srcId="0" destId="3" srcOrd="2" destOrd="0"/>
+      </dgm:cxnLst>
+      <dgm:bg/>
+      <dgm:whole/>
+    </dgm:dataModel>
+  </dgm:styleData>
+  <dgm:clrData>
+    <dgm:dataModel>
+      <dgm:ptLst>
+        <dgm:pt modelId="0" type="doc"/>
+        <dgm:pt modelId="1"/>
+        <dgm:pt modelId="2"/>
+        <dgm:pt modelId="3"/>
+        <dgm:pt modelId="4"/>
+        <dgm:pt modelId="5"/>
+        <dgm:pt modelId="6"/>
+      </dgm:ptLst>
+      <dgm:cxnLst>
+        <dgm:cxn modelId="7" srcId="0" destId="1" srcOrd="0" destOrd="0"/>
+        <dgm:cxn modelId="8" srcId="0" destId="2" srcOrd="1" destOrd="0"/>
+        <dgm:cxn modelId="9" srcId="0" destId="3" srcOrd="2" destOrd="0"/>
+        <dgm:cxn modelId="10" srcId="0" destId="4" srcOrd="3" destOrd="0"/>
+        <dgm:cxn modelId="11" srcId="0" destId="5" srcOrd="4" destOrd="0"/>
+        <dgm:cxn modelId="12" srcId="0" destId="6" srcOrd="5" destOrd="0"/>
+      </dgm:cxnLst>
+      <dgm:bg/>
+      <dgm:whole/>
+    </dgm:dataModel>
+  </dgm:clrData>
+  <dgm:layoutNode name="Name0">
+    <dgm:varLst>
+      <dgm:dir/>
+      <dgm:resizeHandles val="exact"/>
+    </dgm:varLst>
+    <dgm:choose name="Name1">
+      <dgm:if name="Name2" axis="ch" ptType="node" func="cnt" op="equ" val="2">
+        <dgm:alg type="composite">
+          <dgm:param type="ar" val="0.9"/>
+        </dgm:alg>
+        <dgm:shape xmlns:r="http://schemas.openxmlformats.org/officeDocument/2006/relationships" r:blip="">
+          <dgm:adjLst/>
+        </dgm:shape>
+        <dgm:presOf/>
+        <dgm:constrLst>
+          <dgm:constr type="primFontSz" for="ch" ptType="node" op="equ" val="65"/>
+          <dgm:constr type="ctrX" for="ch" forName="node1" refType="w" fact="0.5"/>
+          <dgm:constr type="t" for="ch" forName="node1"/>
+          <dgm:constr type="w" for="ch" forName="node1" refType="w" fact="0.8"/>
+          <dgm:constr type="h" for="ch" forName="node1" refType="w" refFor="ch" refForName="node1" fact="0.5"/>
+          <dgm:constr type="ctrX" for="ch" forName="sibTrans" refType="w" fact="0.5"/>
+          <dgm:constr type="t" for="ch" forName="sibTrans"/>
+          <dgm:constr type="w" for="ch" forName="sibTrans" refType="w" fact="0.8"/>
+          <dgm:constr type="h" for="ch" forName="sibTrans" refType="w" refFor="ch" refForName="node1" fact="0.5"/>
+          <dgm:constr type="userA" for="ch" forName="sibTrans" refType="w" fact="1.07"/>
+          <dgm:constr type="ctrX" for="ch" forName="node2" refType="w" fact="0.5"/>
+          <dgm:constr type="b" for="ch" forName="node2" refType="h"/>
+          <dgm:constr type="w" for="ch" forName="node2" refType="w" fact="0.8"/>
+          <dgm:constr type="h" for="ch" forName="node2" refType="w" refFor="ch" refForName="node1" fact="0.5"/>
+          <dgm:constr type="l" for="ch" forName="sp1"/>
+          <dgm:constr type="t" for="ch" forName="sp1" refType="h" fact="0.5"/>
+          <dgm:constr type="w" for="ch" forName="sp1" val="1"/>
+          <dgm:constr type="h" for="ch" forName="sp1" val="1"/>
+          <dgm:constr type="r" for="ch" forName="sp2" refType="w"/>
+          <dgm:constr type="t" for="ch" forName="sp2" refType="h" fact="0.5"/>
+          <dgm:constr type="w" for="ch" forName="sp2" val="1"/>
+          <dgm:constr type="h" for="ch" forName="sp2" val="1"/>
+        </dgm:constrLst>
+        <dgm:ruleLst/>
+      </dgm:if>
+      <dgm:else name="Name3">
+        <dgm:alg type="composite"/>
+        <dgm:shape xmlns:r="http://schemas.openxmlformats.org/officeDocument/2006/relationships" r:blip="">
+          <dgm:adjLst/>
+        </dgm:shape>
+        <dgm:presOf/>
+        <dgm:constrLst>
+          <dgm:constr type="primFontSz" for="ch" ptType="node" op="equ" val="65"/>
+        </dgm:constrLst>
+        <dgm:ruleLst/>
+      </dgm:else>
+    </dgm:choose>
+    <dgm:choose name="Name4">
+      <dgm:if name="Name5" axis="ch" ptType="node" func="cnt" op="equ" val="2">
+        <dgm:layoutNode name="node1">
+          <dgm:varLst>
+            <dgm:bulletEnabled val="1"/>
+          </dgm:varLst>
+          <dgm:alg type="tx"/>
+          <dgm:shape xmlns:r="http://schemas.openxmlformats.org/officeDocument/2006/relationships" type="roundRect" r:blip="">
+            <dgm:adjLst/>
+          </dgm:shape>
+          <dgm:presOf axis="ch desOrSelf" ptType="node node" st="1 1" cnt="1 0"/>
+          <dgm:constrLst>
+            <dgm:constr type="tMarg" refType="primFontSz" fact="0.3"/>
+            <dgm:constr type="bMarg" refType="primFontSz" fact="0.3"/>
+            <dgm:constr type="lMarg" refType="primFontSz" fact="0.3"/>
+            <dgm:constr type="rMarg" refType="primFontSz" fact="0.3"/>
+          </dgm:constrLst>
+          <dgm:ruleLst>
+            <dgm:rule type="primFontSz" val="5" fact="NaN" max="NaN"/>
+          </dgm:ruleLst>
+        </dgm:layoutNode>
+        <dgm:layoutNode name="sibTrans" styleLbl="bgShp">
+          <dgm:choose name="Name6">
+            <dgm:if name="Name7" func="var" arg="dir" op="equ" val="norm">
+              <dgm:alg type="conn">
+                <dgm:param type="connRout" val="longCurve"/>
+                <dgm:param type="begPts" val="midR"/>
+                <dgm:param type="endPts" val="midL"/>
+                <dgm:param type="dstNode" val="node1"/>
+              </dgm:alg>
+              <dgm:shape xmlns:r="http://schemas.openxmlformats.org/officeDocument/2006/relationships" type="conn" r:blip="" zOrderOff="-2">
+                <dgm:adjLst/>
+              </dgm:shape>
+              <dgm:presOf axis="ch" ptType="sibTrans"/>
+              <dgm:constrLst>
+                <dgm:constr type="userA"/>
+                <dgm:constr type="diam" refType="userA" fact="-1"/>
+                <dgm:constr type="wArH" refType="userA" fact="0.05"/>
+                <dgm:constr type="hArH" refType="userA" fact="0.1"/>
+                <dgm:constr type="stemThick" refType="userA" fact="0.06"/>
+                <dgm:constr type="begPad" refType="connDist" fact="-0.2"/>
+                <dgm:constr type="endPad" refType="connDist" fact="0.05"/>
+              </dgm:constrLst>
+            </dgm:if>
+            <dgm:else name="Name8">
+              <dgm:alg type="conn">
+                <dgm:param type="connRout" val="longCurve"/>
+                <dgm:param type="begPts" val="midL"/>
+                <dgm:param type="endPts" val="midR"/>
+                <dgm:param type="dstNode" val="node1"/>
+              </dgm:alg>
+              <dgm:shape xmlns:r="http://schemas.openxmlformats.org/officeDocument/2006/relationships" type="conn" r:blip="" zOrderOff="-2">
+                <dgm:adjLst/>
+              </dgm:shape>
+              <dgm:presOf axis="ch" ptType="sibTrans"/>
+              <dgm:constrLst>
+                <dgm:constr type="userA"/>
+                <dgm:constr type="diam" refType="userA"/>
+                <dgm:constr type="wArH" refType="userA" fact="0.05"/>
+                <dgm:constr type="hArH" refType="userA" fact="0.1"/>
+                <dgm:constr type="stemThick" refType="userA" fact="0.06"/>
+                <dgm:constr type="begPad" refType="connDist" fact="-0.2"/>
+                <dgm:constr type="endPad" refType="connDist" fact="0.05"/>
+              </dgm:constrLst>
+            </dgm:else>
+          </dgm:choose>
+          <dgm:ruleLst/>
+        </dgm:layoutNode>
+        <dgm:layoutNode name="node2">
+          <dgm:varLst>
+            <dgm:bulletEnabled val="1"/>
+          </dgm:varLst>
+          <dgm:alg type="tx"/>
+          <dgm:shape xmlns:r="http://schemas.openxmlformats.org/officeDocument/2006/relationships" type="roundRect" r:blip="">
+            <dgm:adjLst/>
+          </dgm:shape>
+          <dgm:presOf axis="ch desOrSelf" ptType="node node" st="2 1" cnt="1 0"/>
+          <dgm:constrLst>
+            <dgm:constr type="tMarg" refType="primFontSz" fact="0.3"/>
+            <dgm:constr type="bMarg" refType="primFontSz" fact="0.3"/>
+            <dgm:constr type="lMarg" refType="primFontSz" fact="0.3"/>
+            <dgm:constr type="rMarg" refType="primFontSz" fact="0.3"/>
+          </dgm:constrLst>
+          <dgm:ruleLst>
+            <dgm:rule type="primFontSz" val="5" fact="NaN" max="NaN"/>
+          </dgm:ruleLst>
+        </dgm:layoutNode>
+        <dgm:layoutNode name="sp1">
+          <dgm:alg type="sp"/>
+          <dgm:shape xmlns:r="http://schemas.openxmlformats.org/officeDocument/2006/relationships" r:blip="">
+            <dgm:adjLst/>
+          </dgm:shape>
+          <dgm:presOf/>
+          <dgm:constrLst/>
+          <dgm:ruleLst/>
+        </dgm:layoutNode>
+        <dgm:layoutNode name="sp2">
+          <dgm:alg type="sp"/>
+          <dgm:shape xmlns:r="http://schemas.openxmlformats.org/officeDocument/2006/relationships" r:blip="">
+            <dgm:adjLst/>
+          </dgm:shape>
+          <dgm:presOf/>
+          <dgm:constrLst/>
+          <dgm:ruleLst/>
+        </dgm:layoutNode>
+      </dgm:if>
+      <dgm:else name="Name9">
+        <dgm:layoutNode name="cycle">
+          <dgm:choose name="Name10">
+            <dgm:if name="Name11" func="var" arg="dir" op="equ" val="norm">
+              <dgm:alg type="cycle">
+                <dgm:param type="stAng" val="0"/>
+                <dgm:param type="spanAng" val="360"/>
+              </dgm:alg>
+              <dgm:shape xmlns:r="http://schemas.openxmlformats.org/officeDocument/2006/relationships" r:blip="">
+                <dgm:adjLst/>
+              </dgm:shape>
+              <dgm:presOf/>
+              <dgm:constrLst>
+                <dgm:constr type="diam" refType="w"/>
+                <dgm:constr type="w" for="ch" ptType="node" refType="w"/>
+                <dgm:constr type="sibSp" val="15"/>
+                <dgm:constr type="userA" for="ch" ptType="sibTrans" refType="diam" op="equ" fact="-1"/>
+                <dgm:constr type="wArH" for="ch" ptType="sibTrans" refType="diam" op="equ" fact="0.05"/>
+                <dgm:constr type="hArH" for="ch" ptType="sibTrans" refType="diam" op="equ" fact="0.1"/>
+                <dgm:constr type="stemThick" for="ch" ptType="sibTrans" refType="diam" op="equ" fact="0.065"/>
+                <dgm:constr type="primFontSz" for="ch" ptType="node" op="equ"/>
+              </dgm:constrLst>
+            </dgm:if>
+            <dgm:else name="Name12">
+              <dgm:alg type="cycle">
+                <dgm:param type="stAng" val="0"/>
+                <dgm:param type="spanAng" val="-360"/>
+              </dgm:alg>
+              <dgm:shape xmlns:r="http://schemas.openxmlformats.org/officeDocument/2006/relationships" r:blip="">
+                <dgm:adjLst/>
+              </dgm:shape>
+              <dgm:presOf/>
+              <dgm:constrLst>
+                <dgm:constr type="diam" refType="w"/>
+                <dgm:constr type="w" for="ch" ptType="node" refType="w"/>
+                <dgm:constr type="sibSp" val="15"/>
+                <dgm:constr type="userA" for="ch" ptType="sibTrans" refType="diam" op="equ"/>
+                <dgm:constr type="wArH" for="ch" ptType="sibTrans" refType="diam" op="equ" fact="0.05"/>
+                <dgm:constr type="hArH" for="ch" ptType="sibTrans" refType="diam" op="equ" fact="0.1"/>
+                <dgm:constr type="stemThick" for="ch" ptType="sibTrans" refType="diam" op="equ" fact="0.065"/>
+                <dgm:constr type="primFontSz" for="ch" ptType="node" op="equ"/>
+              </dgm:constrLst>
+            </dgm:else>
+          </dgm:choose>
+          <dgm:ruleLst/>
+          <dgm:forEach name="nodesFirstNodeForEach" axis="ch" ptType="node" cnt="1">
+            <dgm:layoutNode name="nodeFirstNode">
+              <dgm:varLst>
+                <dgm:bulletEnabled val="1"/>
+              </dgm:varLst>
+              <dgm:alg type="tx"/>
+              <dgm:shape xmlns:r="http://schemas.openxmlformats.org/officeDocument/2006/relationships" type="roundRect" r:blip="">
+                <dgm:adjLst/>
+              </dgm:shape>
+              <dgm:presOf axis="desOrSelf" ptType="node"/>
+              <dgm:constrLst>
+                <dgm:constr type="h" refType="w" fact="0.5"/>
+                <dgm:constr type="primFontSz" val="65"/>
+                <dgm:constr type="tMarg" refType="primFontSz" fact="0.3"/>
+                <dgm:constr type="bMarg" refType="primFontSz" fact="0.3"/>
+                <dgm:constr type="lMarg" refType="primFontSz" fact="0.3"/>
+                <dgm:constr type="rMarg" refType="primFontSz" fact="0.3"/>
+              </dgm:constrLst>
+              <dgm:ruleLst>
+                <dgm:rule type="primFontSz" val="5" fact="NaN" max="NaN"/>
+              </dgm:ruleLst>
+            </dgm:layoutNode>
+            <dgm:forEach name="sibTransForEach" axis="followSib" ptType="sibTrans" cnt="1">
+              <dgm:layoutNode name="sibTransFirstNode" styleLbl="bgShp">
+                <dgm:choose name="Name13">
+                  <dgm:if name="Name14" func="var" arg="dir" op="equ" val="norm">
+                    <dgm:alg type="conn">
+                      <dgm:param type="connRout" val="longCurve"/>
+                      <dgm:param type="begPts" val="midR"/>
+                      <dgm:param type="endPts" val="midL"/>
+                      <dgm:param type="dstNode" val="nodeFirstNode"/>
+                    </dgm:alg>
+                  </dgm:if>
+                  <dgm:else name="Name15">
+                    <dgm:alg type="conn">
+                      <dgm:param type="connRout" val="longCurve"/>
+                      <dgm:param type="begPts" val="midL"/>
+                      <dgm:param type="endPts" val="midR"/>
+                      <dgm:param type="dstNode" val="nodeFirstNode"/>
+                    </dgm:alg>
+                  </dgm:else>
+                </dgm:choose>
+                <dgm:shape xmlns:r="http://schemas.openxmlformats.org/officeDocument/2006/relationships" type="conn" r:blip="" zOrderOff="-2">
+                  <dgm:adjLst/>
+                </dgm:shape>
+                <dgm:presOf axis="self"/>
+                <dgm:choose name="Name16">
+                  <dgm:if name="Name17" axis="par ch" ptType="doc node" func="cnt" op="equ" val="3">
+                    <dgm:constrLst>
+                      <dgm:constr type="userA"/>
+                      <dgm:constr type="diam" refType="userA" fact="1.01"/>
+                      <dgm:constr type="begPad" refType="connDist" fact="-0.2"/>
+                      <dgm:constr type="endPad" refType="connDist" fact="0.05"/>
+                    </dgm:constrLst>
+                  </dgm:if>
+                  <dgm:if name="Name18" axis="par ch" ptType="doc node" func="cnt" op="equ" val="4">
+                    <dgm:constrLst>
+                      <dgm:constr type="userA"/>
+                      <dgm:constr type="diam" refType="userA" fact="1.26"/>
+                      <dgm:constr type="begPad" refType="connDist" fact="-0.2"/>
+                      <dgm:constr type="endPad" refType="connDist" fact="0.05"/>
+                    </dgm:constrLst>
+                  </dgm:if>
+                  <dgm:if name="Name19" axis="par ch" ptType="doc node" func="cnt" op="equ" val="5">
+                    <dgm:constrLst>
+                      <dgm:constr type="userA"/>
+                      <dgm:constr type="diam" refType="userA" fact="1.04"/>
+                      <dgm:constr type="begPad" refType="connDist" fact="-0.2"/>
+                      <dgm:constr type="endPad" refType="connDist" fact="0.05"/>
+                    </dgm:constrLst>
+                  </dgm:if>
+                  <dgm:if name="Name20" axis="par ch" ptType="doc node" func="cnt" op="equ" val="6">
+                    <dgm:constrLst>
+                      <dgm:constr type="userA"/>
+                      <dgm:constr type="diam" refType="userA" fact="1.1"/>
+                      <dgm:constr type="begPad" refType="connDist" fact="-0.2"/>
+                      <dgm:constr type="endPad" refType="connDist" fact="0.05"/>
+                    </dgm:constrLst>
+                  </dgm:if>
+                  <dgm:else name="Name21">
+                    <dgm:constrLst>
+                      <dgm:constr type="userA"/>
+                      <dgm:constr type="diam" refType="userA" fact="1.04"/>
+                      <dgm:constr type="begPad" refType="connDist" fact="-0.2"/>
+                      <dgm:constr type="endPad" refType="connDist" fact="0.05"/>
+                    </dgm:constrLst>
+                  </dgm:else>
+                </dgm:choose>
+                <dgm:ruleLst/>
+              </dgm:layoutNode>
+            </dgm:forEach>
+          </dgm:forEach>
+          <dgm:forEach name="followingNodesForEach" axis="ch" ptType="node" st="2">
+            <dgm:layoutNode name="nodeFollowingNodes">
+              <dgm:varLst>
+                <dgm:bulletEnabled val="1"/>
+              </dgm:varLst>
+              <dgm:alg type="tx"/>
+              <dgm:shape xmlns:r="http://schemas.openxmlformats.org/officeDocument/2006/relationships" type="roundRect" r:blip="">
+                <dgm:adjLst/>
+              </dgm:shape>
+              <dgm:presOf axis="desOrSelf" ptType="node"/>
+              <dgm:constrLst>
+                <dgm:constr type="h" refType="w" fact="0.5"/>
+                <dgm:constr type="primFontSz" val="65"/>
+                <dgm:constr type="tMarg" refType="primFontSz" fact="0.3"/>
+                <dgm:constr type="bMarg" refType="primFontSz" fact="0.3"/>
+                <dgm:constr type="lMarg" refType="primFontSz" fact="0.3"/>
+                <dgm:constr type="rMarg" refType="primFontSz" fact="0.3"/>
+              </dgm:constrLst>
+              <dgm:ruleLst>
+                <dgm:rule type="primFontSz" val="5" fact="NaN" max="NaN"/>
+              </dgm:ruleLst>
+            </dgm:layoutNode>
+          </dgm:forEach>
+        </dgm:layoutNode>
+      </dgm:else>
+    </dgm:choose>
+  </dgm:layoutNode>
+</dgm:layoutDef>
+</file>
+
+<file path=ppt/diagrams/layout2.xml><?xml version="1.0" encoding="utf-8"?>
 <dgm:layoutDef xmlns:dgm="http://schemas.openxmlformats.org/drawingml/2006/diagram" xmlns:a="http://schemas.openxmlformats.org/drawingml/2006/main" uniqueId="urn:microsoft.com/office/officeart/2005/8/layout/cycle3">
   <dgm:title val=""/>
   <dgm:desc val=""/>
@@ -3629,6 +6439,1040 @@
 </dgm:styleDef>
 </file>
 
+<file path=ppt/diagrams/quickStyle2.xml><?xml version="1.0" encoding="utf-8"?>
+<dgm:styleDef xmlns:dgm="http://schemas.openxmlformats.org/drawingml/2006/diagram" xmlns:a="http://schemas.openxmlformats.org/drawingml/2006/main" uniqueId="urn:microsoft.com/office/officeart/2005/8/quickstyle/simple1">
+  <dgm:title val=""/>
+  <dgm:desc val=""/>
+  <dgm:catLst>
+    <dgm:cat type="simple" pri="10100"/>
+  </dgm:catLst>
+  <dgm:scene3d>
+    <a:camera prst="orthographicFront"/>
+    <a:lightRig rig="threePt" dir="t"/>
+  </dgm:scene3d>
+  <dgm:styleLbl name="node0">
+    <dgm:scene3d>
+      <a:camera prst="orthographicFront"/>
+      <a:lightRig rig="threePt" dir="t"/>
+    </dgm:scene3d>
+    <dgm:sp3d/>
+    <dgm:txPr/>
+    <dgm:style>
+      <a:lnRef idx="2">
+        <a:scrgbClr r="0" g="0" b="0"/>
+      </a:lnRef>
+      <a:fillRef idx="1">
+        <a:scrgbClr r="0" g="0" b="0"/>
+      </a:fillRef>
+      <a:effectRef idx="0">
+        <a:scrgbClr r="0" g="0" b="0"/>
+      </a:effectRef>
+      <a:fontRef idx="minor">
+        <a:schemeClr val="lt1"/>
+      </a:fontRef>
+    </dgm:style>
+  </dgm:styleLbl>
+  <dgm:styleLbl name="lnNode1">
+    <dgm:scene3d>
+      <a:camera prst="orthographicFront"/>
+      <a:lightRig rig="threePt" dir="t"/>
+    </dgm:scene3d>
+    <dgm:sp3d/>
+    <dgm:txPr/>
+    <dgm:style>
+      <a:lnRef idx="2">
+        <a:scrgbClr r="0" g="0" b="0"/>
+      </a:lnRef>
+      <a:fillRef idx="1">
+        <a:scrgbClr r="0" g="0" b="0"/>
+      </a:fillRef>
+      <a:effectRef idx="0">
+        <a:scrgbClr r="0" g="0" b="0"/>
+      </a:effectRef>
+      <a:fontRef idx="minor">
+        <a:schemeClr val="lt1"/>
+      </a:fontRef>
+    </dgm:style>
+  </dgm:styleLbl>
+  <dgm:styleLbl name="vennNode1">
+    <dgm:scene3d>
+      <a:camera prst="orthographicFront"/>
+      <a:lightRig rig="threePt" dir="t"/>
+    </dgm:scene3d>
+    <dgm:sp3d/>
+    <dgm:txPr/>
+    <dgm:style>
+      <a:lnRef idx="2">
+        <a:scrgbClr r="0" g="0" b="0"/>
+      </a:lnRef>
+      <a:fillRef idx="1">
+        <a:scrgbClr r="0" g="0" b="0"/>
+      </a:fillRef>
+      <a:effectRef idx="0">
+        <a:scrgbClr r="0" g="0" b="0"/>
+      </a:effectRef>
+      <a:fontRef idx="minor">
+        <a:schemeClr val="tx1"/>
+      </a:fontRef>
+    </dgm:style>
+  </dgm:styleLbl>
+  <dgm:styleLbl name="alignNode1">
+    <dgm:scene3d>
+      <a:camera prst="orthographicFront"/>
+      <a:lightRig rig="threePt" dir="t"/>
+    </dgm:scene3d>
+    <dgm:sp3d/>
+    <dgm:txPr/>
+    <dgm:style>
+      <a:lnRef idx="2">
+        <a:scrgbClr r="0" g="0" b="0"/>
+      </a:lnRef>
+      <a:fillRef idx="1">
+        <a:scrgbClr r="0" g="0" b="0"/>
+      </a:fillRef>
+      <a:effectRef idx="0">
+        <a:scrgbClr r="0" g="0" b="0"/>
+      </a:effectRef>
+      <a:fontRef idx="minor">
+        <a:schemeClr val="lt1"/>
+      </a:fontRef>
+    </dgm:style>
+  </dgm:styleLbl>
+  <dgm:styleLbl name="node1">
+    <dgm:scene3d>
+      <a:camera prst="orthographicFront"/>
+      <a:lightRig rig="threePt" dir="t"/>
+    </dgm:scene3d>
+    <dgm:sp3d/>
+    <dgm:txPr/>
+    <dgm:style>
+      <a:lnRef idx="2">
+        <a:scrgbClr r="0" g="0" b="0"/>
+      </a:lnRef>
+      <a:fillRef idx="1">
+        <a:scrgbClr r="0" g="0" b="0"/>
+      </a:fillRef>
+      <a:effectRef idx="0">
+        <a:scrgbClr r="0" g="0" b="0"/>
+      </a:effectRef>
+      <a:fontRef idx="minor">
+        <a:schemeClr val="lt1"/>
+      </a:fontRef>
+    </dgm:style>
+  </dgm:styleLbl>
+  <dgm:styleLbl name="node2">
+    <dgm:scene3d>
+      <a:camera prst="orthographicFront"/>
+      <a:lightRig rig="threePt" dir="t"/>
+    </dgm:scene3d>
+    <dgm:sp3d/>
+    <dgm:txPr/>
+    <dgm:style>
+      <a:lnRef idx="2">
+        <a:scrgbClr r="0" g="0" b="0"/>
+      </a:lnRef>
+      <a:fillRef idx="1">
+        <a:scrgbClr r="0" g="0" b="0"/>
+      </a:fillRef>
+      <a:effectRef idx="0">
+        <a:scrgbClr r="0" g="0" b="0"/>
+      </a:effectRef>
+      <a:fontRef idx="minor">
+        <a:schemeClr val="lt1"/>
+      </a:fontRef>
+    </dgm:style>
+  </dgm:styleLbl>
+  <dgm:styleLbl name="node3">
+    <dgm:scene3d>
+      <a:camera prst="orthographicFront"/>
+      <a:lightRig rig="threePt" dir="t"/>
+    </dgm:scene3d>
+    <dgm:sp3d/>
+    <dgm:txPr/>
+    <dgm:style>
+      <a:lnRef idx="2">
+        <a:scrgbClr r="0" g="0" b="0"/>
+      </a:lnRef>
+      <a:fillRef idx="1">
+        <a:scrgbClr r="0" g="0" b="0"/>
+      </a:fillRef>
+      <a:effectRef idx="0">
+        <a:scrgbClr r="0" g="0" b="0"/>
+      </a:effectRef>
+      <a:fontRef idx="minor">
+        <a:schemeClr val="lt1"/>
+      </a:fontRef>
+    </dgm:style>
+  </dgm:styleLbl>
+  <dgm:styleLbl name="node4">
+    <dgm:scene3d>
+      <a:camera prst="orthographicFront"/>
+      <a:lightRig rig="threePt" dir="t"/>
+    </dgm:scene3d>
+    <dgm:sp3d/>
+    <dgm:txPr/>
+    <dgm:style>
+      <a:lnRef idx="2">
+        <a:scrgbClr r="0" g="0" b="0"/>
+      </a:lnRef>
+      <a:fillRef idx="1">
+        <a:scrgbClr r="0" g="0" b="0"/>
+      </a:fillRef>
+      <a:effectRef idx="0">
+        <a:scrgbClr r="0" g="0" b="0"/>
+      </a:effectRef>
+      <a:fontRef idx="minor">
+        <a:schemeClr val="lt1"/>
+      </a:fontRef>
+    </dgm:style>
+  </dgm:styleLbl>
+  <dgm:styleLbl name="fgImgPlace1">
+    <dgm:scene3d>
+      <a:camera prst="orthographicFront"/>
+      <a:lightRig rig="threePt" dir="t"/>
+    </dgm:scene3d>
+    <dgm:sp3d/>
+    <dgm:txPr/>
+    <dgm:style>
+      <a:lnRef idx="2">
+        <a:scrgbClr r="0" g="0" b="0"/>
+      </a:lnRef>
+      <a:fillRef idx="1">
+        <a:scrgbClr r="0" g="0" b="0"/>
+      </a:fillRef>
+      <a:effectRef idx="0">
+        <a:scrgbClr r="0" g="0" b="0"/>
+      </a:effectRef>
+      <a:fontRef idx="minor"/>
+    </dgm:style>
+  </dgm:styleLbl>
+  <dgm:styleLbl name="alignImgPlace1">
+    <dgm:scene3d>
+      <a:camera prst="orthographicFront"/>
+      <a:lightRig rig="threePt" dir="t"/>
+    </dgm:scene3d>
+    <dgm:sp3d/>
+    <dgm:txPr/>
+    <dgm:style>
+      <a:lnRef idx="2">
+        <a:scrgbClr r="0" g="0" b="0"/>
+      </a:lnRef>
+      <a:fillRef idx="1">
+        <a:scrgbClr r="0" g="0" b="0"/>
+      </a:fillRef>
+      <a:effectRef idx="0">
+        <a:scrgbClr r="0" g="0" b="0"/>
+      </a:effectRef>
+      <a:fontRef idx="minor"/>
+    </dgm:style>
+  </dgm:styleLbl>
+  <dgm:styleLbl name="bgImgPlace1">
+    <dgm:scene3d>
+      <a:camera prst="orthographicFront"/>
+      <a:lightRig rig="threePt" dir="t"/>
+    </dgm:scene3d>
+    <dgm:sp3d/>
+    <dgm:txPr/>
+    <dgm:style>
+      <a:lnRef idx="2">
+        <a:scrgbClr r="0" g="0" b="0"/>
+      </a:lnRef>
+      <a:fillRef idx="1">
+        <a:scrgbClr r="0" g="0" b="0"/>
+      </a:fillRef>
+      <a:effectRef idx="0">
+        <a:scrgbClr r="0" g="0" b="0"/>
+      </a:effectRef>
+      <a:fontRef idx="minor"/>
+    </dgm:style>
+  </dgm:styleLbl>
+  <dgm:styleLbl name="sibTrans2D1">
+    <dgm:scene3d>
+      <a:camera prst="orthographicFront"/>
+      <a:lightRig rig="threePt" dir="t"/>
+    </dgm:scene3d>
+    <dgm:sp3d/>
+    <dgm:txPr/>
+    <dgm:style>
+      <a:lnRef idx="0">
+        <a:scrgbClr r="0" g="0" b="0"/>
+      </a:lnRef>
+      <a:fillRef idx="1">
+        <a:scrgbClr r="0" g="0" b="0"/>
+      </a:fillRef>
+      <a:effectRef idx="0">
+        <a:scrgbClr r="0" g="0" b="0"/>
+      </a:effectRef>
+      <a:fontRef idx="minor">
+        <a:schemeClr val="lt1"/>
+      </a:fontRef>
+    </dgm:style>
+  </dgm:styleLbl>
+  <dgm:styleLbl name="fgSibTrans2D1">
+    <dgm:scene3d>
+      <a:camera prst="orthographicFront"/>
+      <a:lightRig rig="threePt" dir="t"/>
+    </dgm:scene3d>
+    <dgm:sp3d/>
+    <dgm:txPr/>
+    <dgm:style>
+      <a:lnRef idx="0">
+        <a:scrgbClr r="0" g="0" b="0"/>
+      </a:lnRef>
+      <a:fillRef idx="1">
+        <a:scrgbClr r="0" g="0" b="0"/>
+      </a:fillRef>
+      <a:effectRef idx="0">
+        <a:scrgbClr r="0" g="0" b="0"/>
+      </a:effectRef>
+      <a:fontRef idx="minor">
+        <a:schemeClr val="lt1"/>
+      </a:fontRef>
+    </dgm:style>
+  </dgm:styleLbl>
+  <dgm:styleLbl name="bgSibTrans2D1">
+    <dgm:scene3d>
+      <a:camera prst="orthographicFront"/>
+      <a:lightRig rig="threePt" dir="t"/>
+    </dgm:scene3d>
+    <dgm:sp3d/>
+    <dgm:txPr/>
+    <dgm:style>
+      <a:lnRef idx="0">
+        <a:scrgbClr r="0" g="0" b="0"/>
+      </a:lnRef>
+      <a:fillRef idx="1">
+        <a:scrgbClr r="0" g="0" b="0"/>
+      </a:fillRef>
+      <a:effectRef idx="0">
+        <a:scrgbClr r="0" g="0" b="0"/>
+      </a:effectRef>
+      <a:fontRef idx="minor">
+        <a:schemeClr val="lt1"/>
+      </a:fontRef>
+    </dgm:style>
+  </dgm:styleLbl>
+  <dgm:styleLbl name="sibTrans1D1">
+    <dgm:scene3d>
+      <a:camera prst="orthographicFront"/>
+      <a:lightRig rig="threePt" dir="t"/>
+    </dgm:scene3d>
+    <dgm:sp3d/>
+    <dgm:txPr/>
+    <dgm:style>
+      <a:lnRef idx="1">
+        <a:scrgbClr r="0" g="0" b="0"/>
+      </a:lnRef>
+      <a:fillRef idx="0">
+        <a:scrgbClr r="0" g="0" b="0"/>
+      </a:fillRef>
+      <a:effectRef idx="0">
+        <a:scrgbClr r="0" g="0" b="0"/>
+      </a:effectRef>
+      <a:fontRef idx="minor"/>
+    </dgm:style>
+  </dgm:styleLbl>
+  <dgm:styleLbl name="callout">
+    <dgm:scene3d>
+      <a:camera prst="orthographicFront"/>
+      <a:lightRig rig="threePt" dir="t"/>
+    </dgm:scene3d>
+    <dgm:sp3d/>
+    <dgm:txPr/>
+    <dgm:style>
+      <a:lnRef idx="2">
+        <a:scrgbClr r="0" g="0" b="0"/>
+      </a:lnRef>
+      <a:fillRef idx="1">
+        <a:scrgbClr r="0" g="0" b="0"/>
+      </a:fillRef>
+      <a:effectRef idx="0">
+        <a:scrgbClr r="0" g="0" b="0"/>
+      </a:effectRef>
+      <a:fontRef idx="minor"/>
+    </dgm:style>
+  </dgm:styleLbl>
+  <dgm:styleLbl name="asst0">
+    <dgm:scene3d>
+      <a:camera prst="orthographicFront"/>
+      <a:lightRig rig="threePt" dir="t"/>
+    </dgm:scene3d>
+    <dgm:sp3d/>
+    <dgm:txPr/>
+    <dgm:style>
+      <a:lnRef idx="2">
+        <a:scrgbClr r="0" g="0" b="0"/>
+      </a:lnRef>
+      <a:fillRef idx="1">
+        <a:scrgbClr r="0" g="0" b="0"/>
+      </a:fillRef>
+      <a:effectRef idx="0">
+        <a:scrgbClr r="0" g="0" b="0"/>
+      </a:effectRef>
+      <a:fontRef idx="minor">
+        <a:schemeClr val="lt1"/>
+      </a:fontRef>
+    </dgm:style>
+  </dgm:styleLbl>
+  <dgm:styleLbl name="asst1">
+    <dgm:scene3d>
+      <a:camera prst="orthographicFront"/>
+      <a:lightRig rig="threePt" dir="t"/>
+    </dgm:scene3d>
+    <dgm:sp3d/>
+    <dgm:txPr/>
+    <dgm:style>
+      <a:lnRef idx="2">
+        <a:scrgbClr r="0" g="0" b="0"/>
+      </a:lnRef>
+      <a:fillRef idx="1">
+        <a:scrgbClr r="0" g="0" b="0"/>
+      </a:fillRef>
+      <a:effectRef idx="0">
+        <a:scrgbClr r="0" g="0" b="0"/>
+      </a:effectRef>
+      <a:fontRef idx="minor">
+        <a:schemeClr val="lt1"/>
+      </a:fontRef>
+    </dgm:style>
+  </dgm:styleLbl>
+  <dgm:styleLbl name="asst2">
+    <dgm:scene3d>
+      <a:camera prst="orthographicFront"/>
+      <a:lightRig rig="threePt" dir="t"/>
+    </dgm:scene3d>
+    <dgm:sp3d/>
+    <dgm:txPr/>
+    <dgm:style>
+      <a:lnRef idx="2">
+        <a:scrgbClr r="0" g="0" b="0"/>
+      </a:lnRef>
+      <a:fillRef idx="1">
+        <a:scrgbClr r="0" g="0" b="0"/>
+      </a:fillRef>
+      <a:effectRef idx="0">
+        <a:scrgbClr r="0" g="0" b="0"/>
+      </a:effectRef>
+      <a:fontRef idx="minor">
+        <a:schemeClr val="lt1"/>
+      </a:fontRef>
+    </dgm:style>
+  </dgm:styleLbl>
+  <dgm:styleLbl name="asst3">
+    <dgm:scene3d>
+      <a:camera prst="orthographicFront"/>
+      <a:lightRig rig="threePt" dir="t"/>
+    </dgm:scene3d>
+    <dgm:sp3d/>
+    <dgm:txPr/>
+    <dgm:style>
+      <a:lnRef idx="2">
+        <a:scrgbClr r="0" g="0" b="0"/>
+      </a:lnRef>
+      <a:fillRef idx="1">
+        <a:scrgbClr r="0" g="0" b="0"/>
+      </a:fillRef>
+      <a:effectRef idx="0">
+        <a:scrgbClr r="0" g="0" b="0"/>
+      </a:effectRef>
+      <a:fontRef idx="minor">
+        <a:schemeClr val="lt1"/>
+      </a:fontRef>
+    </dgm:style>
+  </dgm:styleLbl>
+  <dgm:styleLbl name="asst4">
+    <dgm:scene3d>
+      <a:camera prst="orthographicFront"/>
+      <a:lightRig rig="threePt" dir="t"/>
+    </dgm:scene3d>
+    <dgm:sp3d/>
+    <dgm:txPr/>
+    <dgm:style>
+      <a:lnRef idx="2">
+        <a:scrgbClr r="0" g="0" b="0"/>
+      </a:lnRef>
+      <a:fillRef idx="1">
+        <a:scrgbClr r="0" g="0" b="0"/>
+      </a:fillRef>
+      <a:effectRef idx="0">
+        <a:scrgbClr r="0" g="0" b="0"/>
+      </a:effectRef>
+      <a:fontRef idx="minor">
+        <a:schemeClr val="lt1"/>
+      </a:fontRef>
+    </dgm:style>
+  </dgm:styleLbl>
+  <dgm:styleLbl name="parChTrans2D1">
+    <dgm:scene3d>
+      <a:camera prst="orthographicFront"/>
+      <a:lightRig rig="threePt" dir="t"/>
+    </dgm:scene3d>
+    <dgm:sp3d/>
+    <dgm:txPr/>
+    <dgm:style>
+      <a:lnRef idx="2">
+        <a:scrgbClr r="0" g="0" b="0"/>
+      </a:lnRef>
+      <a:fillRef idx="1">
+        <a:scrgbClr r="0" g="0" b="0"/>
+      </a:fillRef>
+      <a:effectRef idx="0">
+        <a:scrgbClr r="0" g="0" b="0"/>
+      </a:effectRef>
+      <a:fontRef idx="minor">
+        <a:schemeClr val="lt1"/>
+      </a:fontRef>
+    </dgm:style>
+  </dgm:styleLbl>
+  <dgm:styleLbl name="parChTrans2D2">
+    <dgm:scene3d>
+      <a:camera prst="orthographicFront"/>
+      <a:lightRig rig="threePt" dir="t"/>
+    </dgm:scene3d>
+    <dgm:sp3d/>
+    <dgm:txPr/>
+    <dgm:style>
+      <a:lnRef idx="2">
+        <a:scrgbClr r="0" g="0" b="0"/>
+      </a:lnRef>
+      <a:fillRef idx="1">
+        <a:scrgbClr r="0" g="0" b="0"/>
+      </a:fillRef>
+      <a:effectRef idx="0">
+        <a:scrgbClr r="0" g="0" b="0"/>
+      </a:effectRef>
+      <a:fontRef idx="minor">
+        <a:schemeClr val="lt1"/>
+      </a:fontRef>
+    </dgm:style>
+  </dgm:styleLbl>
+  <dgm:styleLbl name="parChTrans2D3">
+    <dgm:scene3d>
+      <a:camera prst="orthographicFront"/>
+      <a:lightRig rig="threePt" dir="t"/>
+    </dgm:scene3d>
+    <dgm:sp3d/>
+    <dgm:txPr/>
+    <dgm:style>
+      <a:lnRef idx="2">
+        <a:scrgbClr r="0" g="0" b="0"/>
+      </a:lnRef>
+      <a:fillRef idx="1">
+        <a:scrgbClr r="0" g="0" b="0"/>
+      </a:fillRef>
+      <a:effectRef idx="0">
+        <a:scrgbClr r="0" g="0" b="0"/>
+      </a:effectRef>
+      <a:fontRef idx="minor">
+        <a:schemeClr val="lt1"/>
+      </a:fontRef>
+    </dgm:style>
+  </dgm:styleLbl>
+  <dgm:styleLbl name="parChTrans2D4">
+    <dgm:scene3d>
+      <a:camera prst="orthographicFront"/>
+      <a:lightRig rig="threePt" dir="t"/>
+    </dgm:scene3d>
+    <dgm:sp3d/>
+    <dgm:txPr/>
+    <dgm:style>
+      <a:lnRef idx="2">
+        <a:scrgbClr r="0" g="0" b="0"/>
+      </a:lnRef>
+      <a:fillRef idx="1">
+        <a:scrgbClr r="0" g="0" b="0"/>
+      </a:fillRef>
+      <a:effectRef idx="0">
+        <a:scrgbClr r="0" g="0" b="0"/>
+      </a:effectRef>
+      <a:fontRef idx="minor">
+        <a:schemeClr val="lt1"/>
+      </a:fontRef>
+    </dgm:style>
+  </dgm:styleLbl>
+  <dgm:styleLbl name="parChTrans1D1">
+    <dgm:scene3d>
+      <a:camera prst="orthographicFront"/>
+      <a:lightRig rig="threePt" dir="t"/>
+    </dgm:scene3d>
+    <dgm:sp3d/>
+    <dgm:txPr/>
+    <dgm:style>
+      <a:lnRef idx="2">
+        <a:scrgbClr r="0" g="0" b="0"/>
+      </a:lnRef>
+      <a:fillRef idx="0">
+        <a:scrgbClr r="0" g="0" b="0"/>
+      </a:fillRef>
+      <a:effectRef idx="0">
+        <a:scrgbClr r="0" g="0" b="0"/>
+      </a:effectRef>
+      <a:fontRef idx="minor"/>
+    </dgm:style>
+  </dgm:styleLbl>
+  <dgm:styleLbl name="parChTrans1D2">
+    <dgm:scene3d>
+      <a:camera prst="orthographicFront"/>
+      <a:lightRig rig="threePt" dir="t"/>
+    </dgm:scene3d>
+    <dgm:sp3d/>
+    <dgm:txPr/>
+    <dgm:style>
+      <a:lnRef idx="2">
+        <a:scrgbClr r="0" g="0" b="0"/>
+      </a:lnRef>
+      <a:fillRef idx="0">
+        <a:scrgbClr r="0" g="0" b="0"/>
+      </a:fillRef>
+      <a:effectRef idx="0">
+        <a:scrgbClr r="0" g="0" b="0"/>
+      </a:effectRef>
+      <a:fontRef idx="minor"/>
+    </dgm:style>
+  </dgm:styleLbl>
+  <dgm:styleLbl name="parChTrans1D3">
+    <dgm:scene3d>
+      <a:camera prst="orthographicFront"/>
+      <a:lightRig rig="threePt" dir="t"/>
+    </dgm:scene3d>
+    <dgm:sp3d/>
+    <dgm:txPr/>
+    <dgm:style>
+      <a:lnRef idx="2">
+        <a:scrgbClr r="0" g="0" b="0"/>
+      </a:lnRef>
+      <a:fillRef idx="0">
+        <a:scrgbClr r="0" g="0" b="0"/>
+      </a:fillRef>
+      <a:effectRef idx="0">
+        <a:scrgbClr r="0" g="0" b="0"/>
+      </a:effectRef>
+      <a:fontRef idx="minor"/>
+    </dgm:style>
+  </dgm:styleLbl>
+  <dgm:styleLbl name="parChTrans1D4">
+    <dgm:scene3d>
+      <a:camera prst="orthographicFront"/>
+      <a:lightRig rig="threePt" dir="t"/>
+    </dgm:scene3d>
+    <dgm:sp3d/>
+    <dgm:txPr/>
+    <dgm:style>
+      <a:lnRef idx="2">
+        <a:scrgbClr r="0" g="0" b="0"/>
+      </a:lnRef>
+      <a:fillRef idx="0">
+        <a:scrgbClr r="0" g="0" b="0"/>
+      </a:fillRef>
+      <a:effectRef idx="0">
+        <a:scrgbClr r="0" g="0" b="0"/>
+      </a:effectRef>
+      <a:fontRef idx="minor"/>
+    </dgm:style>
+  </dgm:styleLbl>
+  <dgm:styleLbl name="fgAcc1">
+    <dgm:scene3d>
+      <a:camera prst="orthographicFront"/>
+      <a:lightRig rig="threePt" dir="t"/>
+    </dgm:scene3d>
+    <dgm:sp3d/>
+    <dgm:txPr/>
+    <dgm:style>
+      <a:lnRef idx="2">
+        <a:scrgbClr r="0" g="0" b="0"/>
+      </a:lnRef>
+      <a:fillRef idx="1">
+        <a:scrgbClr r="0" g="0" b="0"/>
+      </a:fillRef>
+      <a:effectRef idx="0">
+        <a:scrgbClr r="0" g="0" b="0"/>
+      </a:effectRef>
+      <a:fontRef idx="minor"/>
+    </dgm:style>
+  </dgm:styleLbl>
+  <dgm:styleLbl name="conFgAcc1">
+    <dgm:scene3d>
+      <a:camera prst="orthographicFront"/>
+      <a:lightRig rig="threePt" dir="t"/>
+    </dgm:scene3d>
+    <dgm:sp3d/>
+    <dgm:txPr/>
+    <dgm:style>
+      <a:lnRef idx="2">
+        <a:scrgbClr r="0" g="0" b="0"/>
+      </a:lnRef>
+      <a:fillRef idx="1">
+        <a:scrgbClr r="0" g="0" b="0"/>
+      </a:fillRef>
+      <a:effectRef idx="0">
+        <a:scrgbClr r="0" g="0" b="0"/>
+      </a:effectRef>
+      <a:fontRef idx="minor"/>
+    </dgm:style>
+  </dgm:styleLbl>
+  <dgm:styleLbl name="alignAcc1">
+    <dgm:scene3d>
+      <a:camera prst="orthographicFront"/>
+      <a:lightRig rig="threePt" dir="t"/>
+    </dgm:scene3d>
+    <dgm:sp3d/>
+    <dgm:txPr/>
+    <dgm:style>
+      <a:lnRef idx="2">
+        <a:scrgbClr r="0" g="0" b="0"/>
+      </a:lnRef>
+      <a:fillRef idx="1">
+        <a:scrgbClr r="0" g="0" b="0"/>
+      </a:fillRef>
+      <a:effectRef idx="0">
+        <a:scrgbClr r="0" g="0" b="0"/>
+      </a:effectRef>
+      <a:fontRef idx="minor"/>
+    </dgm:style>
+  </dgm:styleLbl>
+  <dgm:styleLbl name="trAlignAcc1">
+    <dgm:scene3d>
+      <a:camera prst="orthographicFront"/>
+      <a:lightRig rig="threePt" dir="t"/>
+    </dgm:scene3d>
+    <dgm:sp3d/>
+    <dgm:txPr/>
+    <dgm:style>
+      <a:lnRef idx="1">
+        <a:scrgbClr r="0" g="0" b="0"/>
+      </a:lnRef>
+      <a:fillRef idx="1">
+        <a:scrgbClr r="0" g="0" b="0"/>
+      </a:fillRef>
+      <a:effectRef idx="0">
+        <a:scrgbClr r="0" g="0" b="0"/>
+      </a:effectRef>
+      <a:fontRef idx="minor"/>
+    </dgm:style>
+  </dgm:styleLbl>
+  <dgm:styleLbl name="bgAcc1">
+    <dgm:scene3d>
+      <a:camera prst="orthographicFront"/>
+      <a:lightRig rig="threePt" dir="t"/>
+    </dgm:scene3d>
+    <dgm:sp3d/>
+    <dgm:txPr/>
+    <dgm:style>
+      <a:lnRef idx="2">
+        <a:scrgbClr r="0" g="0" b="0"/>
+      </a:lnRef>
+      <a:fillRef idx="1">
+        <a:scrgbClr r="0" g="0" b="0"/>
+      </a:fillRef>
+      <a:effectRef idx="0">
+        <a:scrgbClr r="0" g="0" b="0"/>
+      </a:effectRef>
+      <a:fontRef idx="minor"/>
+    </dgm:style>
+  </dgm:styleLbl>
+  <dgm:styleLbl name="solidFgAcc1">
+    <dgm:scene3d>
+      <a:camera prst="orthographicFront"/>
+      <a:lightRig rig="threePt" dir="t"/>
+    </dgm:scene3d>
+    <dgm:sp3d/>
+    <dgm:txPr/>
+    <dgm:style>
+      <a:lnRef idx="2">
+        <a:scrgbClr r="0" g="0" b="0"/>
+      </a:lnRef>
+      <a:fillRef idx="1">
+        <a:scrgbClr r="0" g="0" b="0"/>
+      </a:fillRef>
+      <a:effectRef idx="0">
+        <a:scrgbClr r="0" g="0" b="0"/>
+      </a:effectRef>
+      <a:fontRef idx="minor"/>
+    </dgm:style>
+  </dgm:styleLbl>
+  <dgm:styleLbl name="solidAlignAcc1">
+    <dgm:scene3d>
+      <a:camera prst="orthographicFront"/>
+      <a:lightRig rig="threePt" dir="t"/>
+    </dgm:scene3d>
+    <dgm:sp3d/>
+    <dgm:txPr/>
+    <dgm:style>
+      <a:lnRef idx="2">
+        <a:scrgbClr r="0" g="0" b="0"/>
+      </a:lnRef>
+      <a:fillRef idx="1">
+        <a:scrgbClr r="0" g="0" b="0"/>
+      </a:fillRef>
+      <a:effectRef idx="0">
+        <a:scrgbClr r="0" g="0" b="0"/>
+      </a:effectRef>
+      <a:fontRef idx="minor"/>
+    </dgm:style>
+  </dgm:styleLbl>
+  <dgm:styleLbl name="solidBgAcc1">
+    <dgm:scene3d>
+      <a:camera prst="orthographicFront"/>
+      <a:lightRig rig="threePt" dir="t"/>
+    </dgm:scene3d>
+    <dgm:sp3d/>
+    <dgm:txPr/>
+    <dgm:style>
+      <a:lnRef idx="2">
+        <a:scrgbClr r="0" g="0" b="0"/>
+      </a:lnRef>
+      <a:fillRef idx="1">
+        <a:scrgbClr r="0" g="0" b="0"/>
+      </a:fillRef>
+      <a:effectRef idx="0">
+        <a:scrgbClr r="0" g="0" b="0"/>
+      </a:effectRef>
+      <a:fontRef idx="minor"/>
+    </dgm:style>
+  </dgm:styleLbl>
+  <dgm:styleLbl name="fgAccFollowNode1">
+    <dgm:scene3d>
+      <a:camera prst="orthographicFront"/>
+      <a:lightRig rig="threePt" dir="t"/>
+    </dgm:scene3d>
+    <dgm:sp3d/>
+    <dgm:txPr/>
+    <dgm:style>
+      <a:lnRef idx="2">
+        <a:scrgbClr r="0" g="0" b="0"/>
+      </a:lnRef>
+      <a:fillRef idx="1">
+        <a:scrgbClr r="0" g="0" b="0"/>
+      </a:fillRef>
+      <a:effectRef idx="0">
+        <a:scrgbClr r="0" g="0" b="0"/>
+      </a:effectRef>
+      <a:fontRef idx="minor"/>
+    </dgm:style>
+  </dgm:styleLbl>
+  <dgm:styleLbl name="alignAccFollowNode1">
+    <dgm:scene3d>
+      <a:camera prst="orthographicFront"/>
+      <a:lightRig rig="threePt" dir="t"/>
+    </dgm:scene3d>
+    <dgm:sp3d/>
+    <dgm:txPr/>
+    <dgm:style>
+      <a:lnRef idx="2">
+        <a:scrgbClr r="0" g="0" b="0"/>
+      </a:lnRef>
+      <a:fillRef idx="1">
+        <a:scrgbClr r="0" g="0" b="0"/>
+      </a:fillRef>
+      <a:effectRef idx="0">
+        <a:scrgbClr r="0" g="0" b="0"/>
+      </a:effectRef>
+      <a:fontRef idx="minor"/>
+    </dgm:style>
+  </dgm:styleLbl>
+  <dgm:styleLbl name="bgAccFollowNode1">
+    <dgm:scene3d>
+      <a:camera prst="orthographicFront"/>
+      <a:lightRig rig="threePt" dir="t"/>
+    </dgm:scene3d>
+    <dgm:sp3d/>
+    <dgm:txPr/>
+    <dgm:style>
+      <a:lnRef idx="2">
+        <a:scrgbClr r="0" g="0" b="0"/>
+      </a:lnRef>
+      <a:fillRef idx="1">
+        <a:scrgbClr r="0" g="0" b="0"/>
+      </a:fillRef>
+      <a:effectRef idx="0">
+        <a:scrgbClr r="0" g="0" b="0"/>
+      </a:effectRef>
+      <a:fontRef idx="minor"/>
+    </dgm:style>
+  </dgm:styleLbl>
+  <dgm:styleLbl name="fgAcc0">
+    <dgm:scene3d>
+      <a:camera prst="orthographicFront"/>
+      <a:lightRig rig="threePt" dir="t"/>
+    </dgm:scene3d>
+    <dgm:sp3d/>
+    <dgm:txPr/>
+    <dgm:style>
+      <a:lnRef idx="2">
+        <a:scrgbClr r="0" g="0" b="0"/>
+      </a:lnRef>
+      <a:fillRef idx="1">
+        <a:scrgbClr r="0" g="0" b="0"/>
+      </a:fillRef>
+      <a:effectRef idx="0">
+        <a:scrgbClr r="0" g="0" b="0"/>
+      </a:effectRef>
+      <a:fontRef idx="minor"/>
+    </dgm:style>
+  </dgm:styleLbl>
+  <dgm:styleLbl name="fgAcc2">
+    <dgm:scene3d>
+      <a:camera prst="orthographicFront"/>
+      <a:lightRig rig="threePt" dir="t"/>
+    </dgm:scene3d>
+    <dgm:sp3d/>
+    <dgm:txPr/>
+    <dgm:style>
+      <a:lnRef idx="2">
+        <a:scrgbClr r="0" g="0" b="0"/>
+      </a:lnRef>
+      <a:fillRef idx="1">
+        <a:scrgbClr r="0" g="0" b="0"/>
+      </a:fillRef>
+      <a:effectRef idx="0">
+        <a:scrgbClr r="0" g="0" b="0"/>
+      </a:effectRef>
+      <a:fontRef idx="minor"/>
+    </dgm:style>
+  </dgm:styleLbl>
+  <dgm:styleLbl name="fgAcc3">
+    <dgm:scene3d>
+      <a:camera prst="orthographicFront"/>
+      <a:lightRig rig="threePt" dir="t"/>
+    </dgm:scene3d>
+    <dgm:sp3d/>
+    <dgm:txPr/>
+    <dgm:style>
+      <a:lnRef idx="2">
+        <a:scrgbClr r="0" g="0" b="0"/>
+      </a:lnRef>
+      <a:fillRef idx="1">
+        <a:scrgbClr r="0" g="0" b="0"/>
+      </a:fillRef>
+      <a:effectRef idx="0">
+        <a:scrgbClr r="0" g="0" b="0"/>
+      </a:effectRef>
+      <a:fontRef idx="minor"/>
+    </dgm:style>
+  </dgm:styleLbl>
+  <dgm:styleLbl name="fgAcc4">
+    <dgm:scene3d>
+      <a:camera prst="orthographicFront"/>
+      <a:lightRig rig="threePt" dir="t"/>
+    </dgm:scene3d>
+    <dgm:sp3d/>
+    <dgm:txPr/>
+    <dgm:style>
+      <a:lnRef idx="2">
+        <a:scrgbClr r="0" g="0" b="0"/>
+      </a:lnRef>
+      <a:fillRef idx="1">
+        <a:scrgbClr r="0" g="0" b="0"/>
+      </a:fillRef>
+      <a:effectRef idx="0">
+        <a:scrgbClr r="0" g="0" b="0"/>
+      </a:effectRef>
+      <a:fontRef idx="minor"/>
+    </dgm:style>
+  </dgm:styleLbl>
+  <dgm:styleLbl name="bgShp">
+    <dgm:scene3d>
+      <a:camera prst="orthographicFront"/>
+      <a:lightRig rig="threePt" dir="t"/>
+    </dgm:scene3d>
+    <dgm:sp3d/>
+    <dgm:txPr/>
+    <dgm:style>
+      <a:lnRef idx="0">
+        <a:scrgbClr r="0" g="0" b="0"/>
+      </a:lnRef>
+      <a:fillRef idx="1">
+        <a:scrgbClr r="0" g="0" b="0"/>
+      </a:fillRef>
+      <a:effectRef idx="0">
+        <a:scrgbClr r="0" g="0" b="0"/>
+      </a:effectRef>
+      <a:fontRef idx="minor"/>
+    </dgm:style>
+  </dgm:styleLbl>
+  <dgm:styleLbl name="dkBgShp">
+    <dgm:scene3d>
+      <a:camera prst="orthographicFront"/>
+      <a:lightRig rig="threePt" dir="t"/>
+    </dgm:scene3d>
+    <dgm:sp3d/>
+    <dgm:txPr/>
+    <dgm:style>
+      <a:lnRef idx="0">
+        <a:scrgbClr r="0" g="0" b="0"/>
+      </a:lnRef>
+      <a:fillRef idx="1">
+        <a:scrgbClr r="0" g="0" b="0"/>
+      </a:fillRef>
+      <a:effectRef idx="0">
+        <a:scrgbClr r="0" g="0" b="0"/>
+      </a:effectRef>
+      <a:fontRef idx="minor"/>
+    </dgm:style>
+  </dgm:styleLbl>
+  <dgm:styleLbl name="trBgShp">
+    <dgm:scene3d>
+      <a:camera prst="orthographicFront"/>
+      <a:lightRig rig="threePt" dir="t"/>
+    </dgm:scene3d>
+    <dgm:sp3d/>
+    <dgm:txPr/>
+    <dgm:style>
+      <a:lnRef idx="0">
+        <a:scrgbClr r="0" g="0" b="0"/>
+      </a:lnRef>
+      <a:fillRef idx="1">
+        <a:scrgbClr r="0" g="0" b="0"/>
+      </a:fillRef>
+      <a:effectRef idx="0">
+        <a:scrgbClr r="0" g="0" b="0"/>
+      </a:effectRef>
+      <a:fontRef idx="minor"/>
+    </dgm:style>
+  </dgm:styleLbl>
+  <dgm:styleLbl name="fgShp">
+    <dgm:scene3d>
+      <a:camera prst="orthographicFront"/>
+      <a:lightRig rig="threePt" dir="t"/>
+    </dgm:scene3d>
+    <dgm:sp3d/>
+    <dgm:txPr/>
+    <dgm:style>
+      <a:lnRef idx="2">
+        <a:scrgbClr r="0" g="0" b="0"/>
+      </a:lnRef>
+      <a:fillRef idx="1">
+        <a:scrgbClr r="0" g="0" b="0"/>
+      </a:fillRef>
+      <a:effectRef idx="0">
+        <a:scrgbClr r="0" g="0" b="0"/>
+      </a:effectRef>
+      <a:fontRef idx="minor"/>
+    </dgm:style>
+  </dgm:styleLbl>
+  <dgm:styleLbl name="revTx">
+    <dgm:scene3d>
+      <a:camera prst="orthographicFront"/>
+      <a:lightRig rig="threePt" dir="t"/>
+    </dgm:scene3d>
+    <dgm:sp3d/>
+    <dgm:txPr/>
+    <dgm:style>
+      <a:lnRef idx="0">
+        <a:scrgbClr r="0" g="0" b="0"/>
+      </a:lnRef>
+      <a:fillRef idx="0">
+        <a:scrgbClr r="0" g="0" b="0"/>
+      </a:fillRef>
+      <a:effectRef idx="0">
+        <a:scrgbClr r="0" g="0" b="0"/>
+      </a:effectRef>
+      <a:fontRef idx="minor"/>
+    </dgm:style>
+  </dgm:styleLbl>
+</dgm:styleDef>
+</file>
+
 <file path=ppt/slideLayouts/slideLayout1.xml><?xml version="1.0" encoding="utf-8"?>
 <p:sldLayout xmlns:a="http://schemas.openxmlformats.org/drawingml/2006/main" xmlns:r="http://schemas.openxmlformats.org/officeDocument/2006/relationships" xmlns:p="http://schemas.openxmlformats.org/presentationml/2006/main" type="title" preserve="1">
   <p:cSld name="タイトル スライド">
@@ -3776,7 +7620,7 @@
           <a:p>
             <a:fld id="{29D38AE0-A022-EC4B-ADED-C3987264F154}" type="datetimeFigureOut">
               <a:rPr kumimoji="1" lang="ja-JP" altLang="en-US" smtClean="0"/>
-              <a:t>2026/6/5</a:t>
+              <a:t>2026/6/19</a:t>
             </a:fld>
             <a:endParaRPr kumimoji="1" lang="ja-JP" altLang="en-US"/>
           </a:p>
@@ -4006,7 +7850,7 @@
           <a:p>
             <a:fld id="{29D38AE0-A022-EC4B-ADED-C3987264F154}" type="datetimeFigureOut">
               <a:rPr kumimoji="1" lang="ja-JP" altLang="en-US" smtClean="0"/>
-              <a:t>2026/6/5</a:t>
+              <a:t>2026/6/19</a:t>
             </a:fld>
             <a:endParaRPr kumimoji="1" lang="ja-JP" altLang="en-US"/>
           </a:p>
@@ -4246,7 +8090,7 @@
           <a:p>
             <a:fld id="{29D38AE0-A022-EC4B-ADED-C3987264F154}" type="datetimeFigureOut">
               <a:rPr kumimoji="1" lang="ja-JP" altLang="en-US" smtClean="0"/>
-              <a:t>2026/6/5</a:t>
+              <a:t>2026/6/19</a:t>
             </a:fld>
             <a:endParaRPr kumimoji="1" lang="ja-JP" altLang="en-US"/>
           </a:p>
@@ -4476,7 +8320,7 @@
           <a:p>
             <a:fld id="{29D38AE0-A022-EC4B-ADED-C3987264F154}" type="datetimeFigureOut">
               <a:rPr kumimoji="1" lang="ja-JP" altLang="en-US" smtClean="0"/>
-              <a:t>2026/6/5</a:t>
+              <a:t>2026/6/19</a:t>
             </a:fld>
             <a:endParaRPr kumimoji="1" lang="ja-JP" altLang="en-US"/>
           </a:p>
@@ -4751,7 +8595,7 @@
           <a:p>
             <a:fld id="{29D38AE0-A022-EC4B-ADED-C3987264F154}" type="datetimeFigureOut">
               <a:rPr kumimoji="1" lang="ja-JP" altLang="en-US" smtClean="0"/>
-              <a:t>2026/6/5</a:t>
+              <a:t>2026/6/19</a:t>
             </a:fld>
             <a:endParaRPr kumimoji="1" lang="ja-JP" altLang="en-US"/>
           </a:p>
@@ -5080,7 +8924,7 @@
           <a:p>
             <a:fld id="{29D38AE0-A022-EC4B-ADED-C3987264F154}" type="datetimeFigureOut">
               <a:rPr kumimoji="1" lang="ja-JP" altLang="en-US" smtClean="0"/>
-              <a:t>2026/6/5</a:t>
+              <a:t>2026/6/19</a:t>
             </a:fld>
             <a:endParaRPr kumimoji="1" lang="ja-JP" altLang="en-US"/>
           </a:p>
@@ -5556,7 +9400,7 @@
           <a:p>
             <a:fld id="{29D38AE0-A022-EC4B-ADED-C3987264F154}" type="datetimeFigureOut">
               <a:rPr kumimoji="1" lang="ja-JP" altLang="en-US" smtClean="0"/>
-              <a:t>2026/6/5</a:t>
+              <a:t>2026/6/19</a:t>
             </a:fld>
             <a:endParaRPr kumimoji="1" lang="ja-JP" altLang="en-US"/>
           </a:p>
@@ -5697,7 +9541,7 @@
           <a:p>
             <a:fld id="{29D38AE0-A022-EC4B-ADED-C3987264F154}" type="datetimeFigureOut">
               <a:rPr kumimoji="1" lang="ja-JP" altLang="en-US" smtClean="0"/>
-              <a:t>2026/6/5</a:t>
+              <a:t>2026/6/19</a:t>
             </a:fld>
             <a:endParaRPr kumimoji="1" lang="ja-JP" altLang="en-US"/>
           </a:p>
@@ -5810,7 +9654,7 @@
           <a:p>
             <a:fld id="{29D38AE0-A022-EC4B-ADED-C3987264F154}" type="datetimeFigureOut">
               <a:rPr kumimoji="1" lang="ja-JP" altLang="en-US" smtClean="0"/>
-              <a:t>2026/6/5</a:t>
+              <a:t>2026/6/19</a:t>
             </a:fld>
             <a:endParaRPr kumimoji="1" lang="ja-JP" altLang="en-US"/>
           </a:p>
@@ -6153,7 +9997,7 @@
           <a:p>
             <a:fld id="{29D38AE0-A022-EC4B-ADED-C3987264F154}" type="datetimeFigureOut">
               <a:rPr kumimoji="1" lang="ja-JP" altLang="en-US" smtClean="0"/>
-              <a:t>2026/6/5</a:t>
+              <a:t>2026/6/19</a:t>
             </a:fld>
             <a:endParaRPr kumimoji="1" lang="ja-JP" altLang="en-US"/>
           </a:p>
@@ -6441,7 +10285,7 @@
           <a:p>
             <a:fld id="{29D38AE0-A022-EC4B-ADED-C3987264F154}" type="datetimeFigureOut">
               <a:rPr kumimoji="1" lang="ja-JP" altLang="en-US" smtClean="0"/>
-              <a:t>2026/6/5</a:t>
+              <a:t>2026/6/19</a:t>
             </a:fld>
             <a:endParaRPr kumimoji="1" lang="ja-JP" altLang="en-US"/>
           </a:p>
@@ -6714,7 +10558,7 @@
           <a:p>
             <a:fld id="{29D38AE0-A022-EC4B-ADED-C3987264F154}" type="datetimeFigureOut">
               <a:rPr kumimoji="1" lang="ja-JP" altLang="en-US" smtClean="0"/>
-              <a:t>2026/6/5</a:t>
+              <a:t>2026/6/19</a:t>
             </a:fld>
             <a:endParaRPr kumimoji="1" lang="ja-JP" altLang="en-US"/>
           </a:p>
@@ -15372,6 +19216,517 @@
 </p:sld>
 </file>
 
+<file path=ppt/slides/slide17.xml><?xml version="1.0" encoding="utf-8"?>
+<p:sld xmlns:a="http://schemas.openxmlformats.org/drawingml/2006/main" xmlns:r="http://schemas.openxmlformats.org/officeDocument/2006/relationships" xmlns:p="http://schemas.openxmlformats.org/presentationml/2006/main">
+  <p:cSld>
+    <p:spTree>
+      <p:nvGrpSpPr>
+        <p:cNvPr id="1" name=""/>
+        <p:cNvGrpSpPr/>
+        <p:nvPr/>
+      </p:nvGrpSpPr>
+      <p:grpSpPr>
+        <a:xfrm>
+          <a:off x="0" y="0"/>
+          <a:ext cx="0" cy="0"/>
+          <a:chOff x="0" y="0"/>
+          <a:chExt cx="0" cy="0"/>
+        </a:xfrm>
+      </p:grpSpPr>
+      <p:grpSp>
+        <p:nvGrpSpPr>
+          <p:cNvPr id="2" name="グループ化 1">
+            <a:extLst>
+              <a:ext uri="{FF2B5EF4-FFF2-40B4-BE49-F238E27FC236}">
+                <a16:creationId xmlns:a16="http://schemas.microsoft.com/office/drawing/2014/main" id="{D7F1968D-252C-4570-E60E-EFF3C091133E}"/>
+              </a:ext>
+            </a:extLst>
+          </p:cNvPr>
+          <p:cNvGrpSpPr/>
+          <p:nvPr/>
+        </p:nvGrpSpPr>
+        <p:grpSpPr>
+          <a:xfrm>
+            <a:off x="577047" y="565208"/>
+            <a:ext cx="11037906" cy="5727583"/>
+            <a:chOff x="638086" y="339023"/>
+            <a:chExt cx="11037906" cy="5727583"/>
+          </a:xfrm>
+        </p:grpSpPr>
+        <p:cxnSp>
+          <p:nvCxnSpPr>
+            <p:cNvPr id="3" name="直線コネクタ 2">
+              <a:extLst>
+                <a:ext uri="{FF2B5EF4-FFF2-40B4-BE49-F238E27FC236}">
+                  <a16:creationId xmlns:a16="http://schemas.microsoft.com/office/drawing/2014/main" id="{2989DE21-577D-2F94-6F00-1B99E694A3B6}"/>
+                </a:ext>
+              </a:extLst>
+            </p:cNvPr>
+            <p:cNvCxnSpPr/>
+            <p:nvPr/>
+          </p:nvCxnSpPr>
+          <p:spPr>
+            <a:xfrm>
+              <a:off x="1013254" y="3707027"/>
+              <a:ext cx="10354962" cy="0"/>
+            </a:xfrm>
+            <a:prstGeom prst="line">
+              <a:avLst/>
+            </a:prstGeom>
+            <a:ln w="57150">
+              <a:solidFill>
+                <a:schemeClr val="tx1"/>
+              </a:solidFill>
+              <a:headEnd type="triangle"/>
+              <a:tailEnd type="triangle"/>
+            </a:ln>
+          </p:spPr>
+          <p:style>
+            <a:lnRef idx="1">
+              <a:schemeClr val="accent1"/>
+            </a:lnRef>
+            <a:fillRef idx="0">
+              <a:schemeClr val="accent1"/>
+            </a:fillRef>
+            <a:effectRef idx="0">
+              <a:schemeClr val="accent1"/>
+            </a:effectRef>
+            <a:fontRef idx="minor">
+              <a:schemeClr val="tx1"/>
+            </a:fontRef>
+          </p:style>
+        </p:cxnSp>
+        <p:sp>
+          <p:nvSpPr>
+            <p:cNvPr id="4" name="テキスト ボックス 3">
+              <a:extLst>
+                <a:ext uri="{FF2B5EF4-FFF2-40B4-BE49-F238E27FC236}">
+                  <a16:creationId xmlns:a16="http://schemas.microsoft.com/office/drawing/2014/main" id="{49D56CF8-4C13-940C-E059-05BDB12F03F4}"/>
+                </a:ext>
+              </a:extLst>
+            </p:cNvPr>
+            <p:cNvSpPr txBox="1"/>
+            <p:nvPr/>
+          </p:nvSpPr>
+          <p:spPr>
+            <a:xfrm>
+              <a:off x="10752662" y="1731297"/>
+              <a:ext cx="923330" cy="1887696"/>
+            </a:xfrm>
+            <a:prstGeom prst="rect">
+              <a:avLst/>
+            </a:prstGeom>
+            <a:noFill/>
+          </p:spPr>
+          <p:txBody>
+            <a:bodyPr vert="eaVert" wrap="none" rtlCol="0">
+              <a:spAutoFit/>
+            </a:bodyPr>
+            <a:lstStyle/>
+            <a:p>
+              <a:r>
+                <a:rPr kumimoji="1" lang="ja-JP" altLang="en-US" sz="2800" b="1">
+                  <a:latin typeface="Hiragino Sans W4" panose="020B0400000000000000" pitchFamily="34" charset="-128"/>
+                  <a:ea typeface="Hiragino Sans W4" panose="020B0400000000000000" pitchFamily="34" charset="-128"/>
+                </a:rPr>
+                <a:t>変動相場制</a:t>
+              </a:r>
+              <a:br>
+                <a:rPr kumimoji="1" lang="en-US" altLang="ja-JP" sz="2800" b="1" dirty="0">
+                  <a:latin typeface="Hiragino Sans W4" panose="020B0400000000000000" pitchFamily="34" charset="-128"/>
+                  <a:ea typeface="Hiragino Sans W4" panose="020B0400000000000000" pitchFamily="34" charset="-128"/>
+                </a:rPr>
+              </a:br>
+              <a:r>
+                <a:rPr kumimoji="1" lang="en-US" altLang="ja-JP" sz="2000" dirty="0">
+                  <a:latin typeface="Hiragino Sans W4" panose="020B0400000000000000" pitchFamily="34" charset="-128"/>
+                  <a:ea typeface="Hiragino Sans W4" panose="020B0400000000000000" pitchFamily="34" charset="-128"/>
+                </a:rPr>
+                <a:t>(floating)</a:t>
+              </a:r>
+              <a:endParaRPr kumimoji="1" lang="ja-JP" altLang="en-US" sz="2800" b="1">
+                <a:latin typeface="Hiragino Sans W4" panose="020B0400000000000000" pitchFamily="34" charset="-128"/>
+                <a:ea typeface="Hiragino Sans W4" panose="020B0400000000000000" pitchFamily="34" charset="-128"/>
+              </a:endParaRPr>
+            </a:p>
+          </p:txBody>
+        </p:sp>
+        <p:sp>
+          <p:nvSpPr>
+            <p:cNvPr id="5" name="テキスト ボックス 4">
+              <a:extLst>
+                <a:ext uri="{FF2B5EF4-FFF2-40B4-BE49-F238E27FC236}">
+                  <a16:creationId xmlns:a16="http://schemas.microsoft.com/office/drawing/2014/main" id="{EE565842-8DA0-A9C1-5740-85D5C06075AB}"/>
+                </a:ext>
+              </a:extLst>
+            </p:cNvPr>
+            <p:cNvSpPr txBox="1"/>
+            <p:nvPr/>
+          </p:nvSpPr>
+          <p:spPr>
+            <a:xfrm>
+              <a:off x="638086" y="1655819"/>
+              <a:ext cx="923330" cy="1963174"/>
+            </a:xfrm>
+            <a:prstGeom prst="rect">
+              <a:avLst/>
+            </a:prstGeom>
+            <a:noFill/>
+          </p:spPr>
+          <p:txBody>
+            <a:bodyPr vert="eaVert" wrap="square" rtlCol="0">
+              <a:spAutoFit/>
+            </a:bodyPr>
+            <a:lstStyle/>
+            <a:p>
+              <a:r>
+                <a:rPr kumimoji="1" lang="ja-JP" altLang="en-US" sz="2800" b="1">
+                  <a:latin typeface="Hiragino Sans W4" panose="020B0400000000000000" pitchFamily="34" charset="-128"/>
+                  <a:ea typeface="Hiragino Sans W4" panose="020B0400000000000000" pitchFamily="34" charset="-128"/>
+                </a:rPr>
+                <a:t>固定相場制</a:t>
+              </a:r>
+              <a:endParaRPr kumimoji="1" lang="en-US" altLang="ja-JP" sz="2800" b="1" dirty="0">
+                <a:latin typeface="Hiragino Sans W4" panose="020B0400000000000000" pitchFamily="34" charset="-128"/>
+                <a:ea typeface="Hiragino Sans W4" panose="020B0400000000000000" pitchFamily="34" charset="-128"/>
+              </a:endParaRPr>
+            </a:p>
+            <a:p>
+              <a:r>
+                <a:rPr lang="en-US" altLang="ja-JP" sz="2000" dirty="0">
+                  <a:latin typeface="Hiragino Sans W4" panose="020B0400000000000000" pitchFamily="34" charset="-128"/>
+                  <a:ea typeface="Hiragino Sans W4" panose="020B0400000000000000" pitchFamily="34" charset="-128"/>
+                </a:rPr>
+                <a:t>(fixed)</a:t>
+              </a:r>
+              <a:endParaRPr kumimoji="1" lang="ja-JP" altLang="en-US" sz="2000">
+                <a:latin typeface="Hiragino Sans W4" panose="020B0400000000000000" pitchFamily="34" charset="-128"/>
+                <a:ea typeface="Hiragino Sans W4" panose="020B0400000000000000" pitchFamily="34" charset="-128"/>
+              </a:endParaRPr>
+            </a:p>
+          </p:txBody>
+        </p:sp>
+        <p:sp>
+          <p:nvSpPr>
+            <p:cNvPr id="6" name="テキスト ボックス 5">
+              <a:extLst>
+                <a:ext uri="{FF2B5EF4-FFF2-40B4-BE49-F238E27FC236}">
+                  <a16:creationId xmlns:a16="http://schemas.microsoft.com/office/drawing/2014/main" id="{B7082650-E89F-AED7-2E32-1454499C8AC3}"/>
+                </a:ext>
+              </a:extLst>
+            </p:cNvPr>
+            <p:cNvSpPr txBox="1"/>
+            <p:nvPr/>
+          </p:nvSpPr>
+          <p:spPr>
+            <a:xfrm>
+              <a:off x="7951797" y="1057168"/>
+              <a:ext cx="923330" cy="2605842"/>
+            </a:xfrm>
+            <a:prstGeom prst="rect">
+              <a:avLst/>
+            </a:prstGeom>
+            <a:noFill/>
+          </p:spPr>
+          <p:txBody>
+            <a:bodyPr vert="eaVert" wrap="none" rtlCol="0">
+              <a:spAutoFit/>
+            </a:bodyPr>
+            <a:lstStyle/>
+            <a:p>
+              <a:r>
+                <a:rPr kumimoji="1" lang="ja-JP" altLang="en-US" sz="2800">
+                  <a:latin typeface="Hiragino Sans W4" panose="020B0400000000000000" pitchFamily="34" charset="-128"/>
+                  <a:ea typeface="Hiragino Sans W4" panose="020B0400000000000000" pitchFamily="34" charset="-128"/>
+                </a:rPr>
+                <a:t>管理変動相場制</a:t>
+              </a:r>
+              <a:br>
+                <a:rPr kumimoji="1" lang="en-US" altLang="ja-JP" sz="2800" dirty="0">
+                  <a:latin typeface="Hiragino Sans W4" panose="020B0400000000000000" pitchFamily="34" charset="-128"/>
+                  <a:ea typeface="Hiragino Sans W4" panose="020B0400000000000000" pitchFamily="34" charset="-128"/>
+                </a:rPr>
+              </a:br>
+              <a:r>
+                <a:rPr kumimoji="1" lang="en-US" altLang="ja-JP" sz="2000" dirty="0">
+                  <a:latin typeface="Hiragino Sans W4" panose="020B0400000000000000" pitchFamily="34" charset="-128"/>
+                  <a:ea typeface="Hiragino Sans W4" panose="020B0400000000000000" pitchFamily="34" charset="-128"/>
+                </a:rPr>
+                <a:t>(managed floating)</a:t>
+              </a:r>
+              <a:endParaRPr kumimoji="1" lang="ja-JP" altLang="en-US" sz="2800">
+                <a:latin typeface="Hiragino Sans W4" panose="020B0400000000000000" pitchFamily="34" charset="-128"/>
+                <a:ea typeface="Hiragino Sans W4" panose="020B0400000000000000" pitchFamily="34" charset="-128"/>
+              </a:endParaRPr>
+            </a:p>
+          </p:txBody>
+        </p:sp>
+        <p:sp>
+          <p:nvSpPr>
+            <p:cNvPr id="7" name="テキスト ボックス 6">
+              <a:extLst>
+                <a:ext uri="{FF2B5EF4-FFF2-40B4-BE49-F238E27FC236}">
+                  <a16:creationId xmlns:a16="http://schemas.microsoft.com/office/drawing/2014/main" id="{352F629D-7DAD-45E1-F335-65D0AEE57AED}"/>
+                </a:ext>
+              </a:extLst>
+            </p:cNvPr>
+            <p:cNvSpPr txBox="1"/>
+            <p:nvPr/>
+          </p:nvSpPr>
+          <p:spPr>
+            <a:xfrm>
+              <a:off x="3866971" y="339023"/>
+              <a:ext cx="923330" cy="3323987"/>
+            </a:xfrm>
+            <a:prstGeom prst="rect">
+              <a:avLst/>
+            </a:prstGeom>
+            <a:noFill/>
+          </p:spPr>
+          <p:txBody>
+            <a:bodyPr vert="eaVert" wrap="none" rtlCol="0">
+              <a:spAutoFit/>
+            </a:bodyPr>
+            <a:lstStyle/>
+            <a:p>
+              <a:r>
+                <a:rPr kumimoji="1" lang="ja-JP" altLang="en-US" sz="2800">
+                  <a:latin typeface="Hiragino Sans W4" panose="020B0400000000000000" pitchFamily="34" charset="-128"/>
+                  <a:ea typeface="Hiragino Sans W4" panose="020B0400000000000000" pitchFamily="34" charset="-128"/>
+                </a:rPr>
+                <a:t>調整可能固定相場制</a:t>
+              </a:r>
+              <a:endParaRPr kumimoji="1" lang="en-US" altLang="ja-JP" sz="2800" dirty="0">
+                <a:latin typeface="Hiragino Sans W4" panose="020B0400000000000000" pitchFamily="34" charset="-128"/>
+                <a:ea typeface="Hiragino Sans W4" panose="020B0400000000000000" pitchFamily="34" charset="-128"/>
+              </a:endParaRPr>
+            </a:p>
+            <a:p>
+              <a:r>
+                <a:rPr kumimoji="1" lang="en-US" altLang="ja-JP" sz="2000" dirty="0">
+                  <a:latin typeface="Hiragino Sans W4" panose="020B0400000000000000" pitchFamily="34" charset="-128"/>
+                  <a:ea typeface="Hiragino Sans W4" panose="020B0400000000000000" pitchFamily="34" charset="-128"/>
+                </a:rPr>
+                <a:t>(fixed but adjustab</a:t>
+              </a:r>
+              <a:r>
+                <a:rPr lang="en-US" altLang="ja-JP" sz="2000" dirty="0">
+                  <a:latin typeface="Hiragino Sans W4" panose="020B0400000000000000" pitchFamily="34" charset="-128"/>
+                  <a:ea typeface="Hiragino Sans W4" panose="020B0400000000000000" pitchFamily="34" charset="-128"/>
+                </a:rPr>
+                <a:t>le)</a:t>
+              </a:r>
+              <a:endParaRPr kumimoji="1" lang="ja-JP" altLang="en-US" sz="2000">
+                <a:latin typeface="Hiragino Sans W4" panose="020B0400000000000000" pitchFamily="34" charset="-128"/>
+                <a:ea typeface="Hiragino Sans W4" panose="020B0400000000000000" pitchFamily="34" charset="-128"/>
+              </a:endParaRPr>
+            </a:p>
+          </p:txBody>
+        </p:sp>
+        <p:sp>
+          <p:nvSpPr>
+            <p:cNvPr id="8" name="テキスト ボックス 7">
+              <a:extLst>
+                <a:ext uri="{FF2B5EF4-FFF2-40B4-BE49-F238E27FC236}">
+                  <a16:creationId xmlns:a16="http://schemas.microsoft.com/office/drawing/2014/main" id="{305DBF84-991A-F414-B68D-BA902CD04925}"/>
+                </a:ext>
+              </a:extLst>
+            </p:cNvPr>
+            <p:cNvSpPr txBox="1"/>
+            <p:nvPr/>
+          </p:nvSpPr>
+          <p:spPr>
+            <a:xfrm>
+              <a:off x="1013253" y="4250724"/>
+              <a:ext cx="3777048" cy="1815882"/>
+            </a:xfrm>
+            <a:prstGeom prst="rect">
+              <a:avLst/>
+            </a:prstGeom>
+            <a:noFill/>
+            <a:ln>
+              <a:solidFill>
+                <a:schemeClr val="tx1"/>
+              </a:solidFill>
+            </a:ln>
+          </p:spPr>
+          <p:txBody>
+            <a:bodyPr wrap="square" rtlCol="0">
+              <a:spAutoFit/>
+            </a:bodyPr>
+            <a:lstStyle/>
+            <a:p>
+              <a:r>
+                <a:rPr kumimoji="1" lang="ja-JP" altLang="en-US" sz="2800">
+                  <a:latin typeface="Hiragino Sans W4" panose="020B0400000000000000" pitchFamily="34" charset="-128"/>
+                  <a:ea typeface="Hiragino Sans W4" panose="020B0400000000000000" pitchFamily="34" charset="-128"/>
+                </a:rPr>
+                <a:t>金本位制</a:t>
+              </a:r>
+              <a:br>
+                <a:rPr kumimoji="1" lang="en-US" altLang="ja-JP" sz="2800" dirty="0">
+                  <a:latin typeface="Hiragino Sans W4" panose="020B0400000000000000" pitchFamily="34" charset="-128"/>
+                  <a:ea typeface="Hiragino Sans W4" panose="020B0400000000000000" pitchFamily="34" charset="-128"/>
+                </a:rPr>
+              </a:br>
+              <a:r>
+                <a:rPr lang="ja-JP" altLang="en-US" sz="2800">
+                  <a:latin typeface="Hiragino Sans W4" panose="020B0400000000000000" pitchFamily="34" charset="-128"/>
+                  <a:ea typeface="Hiragino Sans W4" panose="020B0400000000000000" pitchFamily="34" charset="-128"/>
+                </a:rPr>
+                <a:t>通貨同盟</a:t>
+              </a:r>
+              <a:endParaRPr lang="en-US" altLang="ja-JP" sz="2800" dirty="0">
+                <a:latin typeface="Hiragino Sans W4" panose="020B0400000000000000" pitchFamily="34" charset="-128"/>
+                <a:ea typeface="Hiragino Sans W4" panose="020B0400000000000000" pitchFamily="34" charset="-128"/>
+              </a:endParaRPr>
+            </a:p>
+            <a:p>
+              <a:r>
+                <a:rPr kumimoji="1" lang="ja-JP" altLang="en-US" sz="2800">
+                  <a:latin typeface="Hiragino Sans W4" panose="020B0400000000000000" pitchFamily="34" charset="-128"/>
+                  <a:ea typeface="Hiragino Sans W4" panose="020B0400000000000000" pitchFamily="34" charset="-128"/>
+                </a:rPr>
+                <a:t>自国通貨の放棄</a:t>
+              </a:r>
+              <a:endParaRPr kumimoji="1" lang="en-US" altLang="ja-JP" sz="2800" dirty="0">
+                <a:latin typeface="Hiragino Sans W4" panose="020B0400000000000000" pitchFamily="34" charset="-128"/>
+                <a:ea typeface="Hiragino Sans W4" panose="020B0400000000000000" pitchFamily="34" charset="-128"/>
+              </a:endParaRPr>
+            </a:p>
+            <a:p>
+              <a:r>
+                <a:rPr lang="ja-JP" altLang="en-US" sz="2800">
+                  <a:latin typeface="Hiragino Sans W4" panose="020B0400000000000000" pitchFamily="34" charset="-128"/>
+                  <a:ea typeface="Hiragino Sans W4" panose="020B0400000000000000" pitchFamily="34" charset="-128"/>
+                </a:rPr>
+                <a:t>カレンシー・ボード制</a:t>
+              </a:r>
+              <a:endParaRPr kumimoji="1" lang="en-US" altLang="ja-JP" sz="2800" dirty="0">
+                <a:latin typeface="Hiragino Sans W4" panose="020B0400000000000000" pitchFamily="34" charset="-128"/>
+                <a:ea typeface="Hiragino Sans W4" panose="020B0400000000000000" pitchFamily="34" charset="-128"/>
+              </a:endParaRPr>
+            </a:p>
+          </p:txBody>
+        </p:sp>
+        <p:cxnSp>
+          <p:nvCxnSpPr>
+            <p:cNvPr id="9" name="直線矢印コネクタ 8">
+              <a:extLst>
+                <a:ext uri="{FF2B5EF4-FFF2-40B4-BE49-F238E27FC236}">
+                  <a16:creationId xmlns:a16="http://schemas.microsoft.com/office/drawing/2014/main" id="{4BC2EF5C-5EEA-6165-B082-8F36D3014AB5}"/>
+                </a:ext>
+              </a:extLst>
+            </p:cNvPr>
+            <p:cNvCxnSpPr>
+              <a:cxnSpLocks/>
+              <a:stCxn id="8" idx="0"/>
+            </p:cNvCxnSpPr>
+            <p:nvPr/>
+          </p:nvCxnSpPr>
+          <p:spPr>
+            <a:xfrm flipH="1" flipV="1">
+              <a:off x="1099751" y="3707027"/>
+              <a:ext cx="1802026" cy="543697"/>
+            </a:xfrm>
+            <a:prstGeom prst="straightConnector1">
+              <a:avLst/>
+            </a:prstGeom>
+            <a:ln w="28575">
+              <a:solidFill>
+                <a:schemeClr val="tx1"/>
+              </a:solidFill>
+              <a:prstDash val="sysDot"/>
+              <a:tailEnd type="triangle"/>
+            </a:ln>
+          </p:spPr>
+          <p:style>
+            <a:lnRef idx="1">
+              <a:schemeClr val="accent1"/>
+            </a:lnRef>
+            <a:fillRef idx="0">
+              <a:schemeClr val="accent1"/>
+            </a:fillRef>
+            <a:effectRef idx="0">
+              <a:schemeClr val="accent1"/>
+            </a:effectRef>
+            <a:fontRef idx="minor">
+              <a:schemeClr val="tx1"/>
+            </a:fontRef>
+          </p:style>
+        </p:cxnSp>
+      </p:grpSp>
+    </p:spTree>
+    <p:extLst>
+      <p:ext uri="{BB962C8B-B14F-4D97-AF65-F5344CB8AC3E}">
+        <p14:creationId xmlns:p14="http://schemas.microsoft.com/office/powerpoint/2010/main" val="4069975459"/>
+      </p:ext>
+    </p:extLst>
+  </p:cSld>
+  <p:clrMapOvr>
+    <a:masterClrMapping/>
+  </p:clrMapOvr>
+</p:sld>
+</file>
+
+<file path=ppt/slides/slide18.xml><?xml version="1.0" encoding="utf-8"?>
+<p:sld xmlns:a="http://schemas.openxmlformats.org/drawingml/2006/main" xmlns:r="http://schemas.openxmlformats.org/officeDocument/2006/relationships" xmlns:p="http://schemas.openxmlformats.org/presentationml/2006/main">
+  <p:cSld>
+    <p:spTree>
+      <p:nvGrpSpPr>
+        <p:cNvPr id="1" name=""/>
+        <p:cNvGrpSpPr/>
+        <p:nvPr/>
+      </p:nvGrpSpPr>
+      <p:grpSpPr>
+        <a:xfrm>
+          <a:off x="0" y="0"/>
+          <a:ext cx="0" cy="0"/>
+          <a:chOff x="0" y="0"/>
+          <a:chExt cx="0" cy="0"/>
+        </a:xfrm>
+      </p:grpSpPr>
+      <p:graphicFrame>
+        <p:nvGraphicFramePr>
+          <p:cNvPr id="2" name="図表 1">
+            <a:extLst>
+              <a:ext uri="{FF2B5EF4-FFF2-40B4-BE49-F238E27FC236}">
+                <a16:creationId xmlns:a16="http://schemas.microsoft.com/office/drawing/2014/main" id="{AE8633F4-1438-5B61-5EBC-E504ACF7D1BA}"/>
+              </a:ext>
+            </a:extLst>
+          </p:cNvPr>
+          <p:cNvGraphicFramePr/>
+          <p:nvPr>
+            <p:extLst>
+              <p:ext uri="{D42A27DB-BD31-4B8C-83A1-F6EECF244321}">
+                <p14:modId xmlns:p14="http://schemas.microsoft.com/office/powerpoint/2010/main" val="406865297"/>
+              </p:ext>
+            </p:extLst>
+          </p:nvPr>
+        </p:nvGraphicFramePr>
+        <p:xfrm>
+          <a:off x="2032000" y="719666"/>
+          <a:ext cx="8128000" cy="5418667"/>
+        </p:xfrm>
+        <a:graphic>
+          <a:graphicData uri="http://schemas.openxmlformats.org/drawingml/2006/diagram">
+            <dgm:relIds xmlns:dgm="http://schemas.openxmlformats.org/drawingml/2006/diagram" xmlns:r="http://schemas.openxmlformats.org/officeDocument/2006/relationships" r:dm="rId2" r:lo="rId3" r:qs="rId4" r:cs="rId5"/>
+          </a:graphicData>
+        </a:graphic>
+      </p:graphicFrame>
+    </p:spTree>
+    <p:extLst>
+      <p:ext uri="{BB962C8B-B14F-4D97-AF65-F5344CB8AC3E}">
+        <p14:creationId xmlns:p14="http://schemas.microsoft.com/office/powerpoint/2010/main" val="1644184112"/>
+      </p:ext>
+    </p:extLst>
+  </p:cSld>
+  <p:clrMapOvr>
+    <a:masterClrMapping/>
+  </p:clrMapOvr>
+</p:sld>
+</file>
+
 <file path=ppt/slides/slide2.xml><?xml version="1.0" encoding="utf-8"?>
 <p:sld xmlns:a="http://schemas.openxmlformats.org/drawingml/2006/main" xmlns:r="http://schemas.openxmlformats.org/officeDocument/2006/relationships" xmlns:p="http://schemas.openxmlformats.org/presentationml/2006/main">
   <p:cSld>
@@ -15402,7 +19757,7 @@
           <p:nvPr>
             <p:extLst>
               <p:ext uri="{D42A27DB-BD31-4B8C-83A1-F6EECF244321}">
-                <p14:modId xmlns:p14="http://schemas.microsoft.com/office/powerpoint/2010/main" val="1108649520"/>
+                <p14:modId xmlns:p14="http://schemas.microsoft.com/office/powerpoint/2010/main" val="2916038195"/>
               </p:ext>
             </p:extLst>
           </p:nvPr>

--- a/figs/DIYfigures_ipe1.pptx
+++ b/figs/DIYfigures_ipe1.pptx
@@ -23,6 +23,7 @@
     <p:sldId id="272" r:id="rId17"/>
     <p:sldId id="273" r:id="rId18"/>
     <p:sldId id="274" r:id="rId19"/>
+    <p:sldId id="275" r:id="rId20"/>
   </p:sldIdLst>
   <p:sldSz cx="12192000" cy="6858000"/>
   <p:notesSz cx="6858000" cy="9144000"/>
@@ -1743,6 +1744,813 @@
 </dgm:colorsDef>
 </file>
 
+<file path=ppt/diagrams/colors3.xml><?xml version="1.0" encoding="utf-8"?>
+<dgm:colorsDef xmlns:dgm="http://schemas.openxmlformats.org/drawingml/2006/diagram" xmlns:a="http://schemas.openxmlformats.org/drawingml/2006/main" uniqueId="urn:microsoft.com/office/officeart/2005/8/colors/accent0_1">
+  <dgm:title val=""/>
+  <dgm:desc val=""/>
+  <dgm:catLst>
+    <dgm:cat type="mainScheme" pri="10100"/>
+  </dgm:catLst>
+  <dgm:styleLbl name="node0">
+    <dgm:fillClrLst meth="repeat">
+      <a:schemeClr val="lt1"/>
+    </dgm:fillClrLst>
+    <dgm:linClrLst meth="repeat">
+      <a:schemeClr val="dk1">
+        <a:shade val="80000"/>
+      </a:schemeClr>
+    </dgm:linClrLst>
+    <dgm:effectClrLst/>
+    <dgm:txLinClrLst/>
+    <dgm:txFillClrLst meth="repeat">
+      <a:schemeClr val="dk1"/>
+    </dgm:txFillClrLst>
+    <dgm:txEffectClrLst/>
+  </dgm:styleLbl>
+  <dgm:styleLbl name="node1">
+    <dgm:fillClrLst meth="repeat">
+      <a:schemeClr val="lt1"/>
+    </dgm:fillClrLst>
+    <dgm:linClrLst meth="repeat">
+      <a:schemeClr val="dk1">
+        <a:shade val="80000"/>
+      </a:schemeClr>
+    </dgm:linClrLst>
+    <dgm:effectClrLst/>
+    <dgm:txLinClrLst/>
+    <dgm:txFillClrLst meth="repeat">
+      <a:schemeClr val="dk1"/>
+    </dgm:txFillClrLst>
+    <dgm:txEffectClrLst/>
+  </dgm:styleLbl>
+  <dgm:styleLbl name="alignNode1">
+    <dgm:fillClrLst meth="repeat">
+      <a:schemeClr val="lt1"/>
+    </dgm:fillClrLst>
+    <dgm:linClrLst meth="repeat">
+      <a:schemeClr val="dk1">
+        <a:shade val="80000"/>
+      </a:schemeClr>
+    </dgm:linClrLst>
+    <dgm:effectClrLst/>
+    <dgm:txLinClrLst/>
+    <dgm:txFillClrLst meth="repeat">
+      <a:schemeClr val="dk1"/>
+    </dgm:txFillClrLst>
+    <dgm:txEffectClrLst/>
+  </dgm:styleLbl>
+  <dgm:styleLbl name="lnNode1">
+    <dgm:fillClrLst meth="repeat">
+      <a:schemeClr val="lt1"/>
+    </dgm:fillClrLst>
+    <dgm:linClrLst meth="repeat">
+      <a:schemeClr val="dk1">
+        <a:shade val="80000"/>
+      </a:schemeClr>
+    </dgm:linClrLst>
+    <dgm:effectClrLst/>
+    <dgm:txLinClrLst/>
+    <dgm:txFillClrLst meth="repeat">
+      <a:schemeClr val="dk1"/>
+    </dgm:txFillClrLst>
+    <dgm:txEffectClrLst/>
+  </dgm:styleLbl>
+  <dgm:styleLbl name="vennNode1">
+    <dgm:fillClrLst meth="repeat">
+      <a:schemeClr val="lt1">
+        <a:alpha val="50000"/>
+      </a:schemeClr>
+    </dgm:fillClrLst>
+    <dgm:linClrLst meth="repeat">
+      <a:schemeClr val="dk1">
+        <a:shade val="80000"/>
+      </a:schemeClr>
+    </dgm:linClrLst>
+    <dgm:effectClrLst/>
+    <dgm:txLinClrLst/>
+    <dgm:txFillClrLst/>
+    <dgm:txEffectClrLst/>
+  </dgm:styleLbl>
+  <dgm:styleLbl name="node2">
+    <dgm:fillClrLst meth="repeat">
+      <a:schemeClr val="lt1"/>
+    </dgm:fillClrLst>
+    <dgm:linClrLst meth="repeat">
+      <a:schemeClr val="dk1">
+        <a:shade val="80000"/>
+      </a:schemeClr>
+    </dgm:linClrLst>
+    <dgm:effectClrLst/>
+    <dgm:txLinClrLst/>
+    <dgm:txFillClrLst meth="repeat">
+      <a:schemeClr val="dk1"/>
+    </dgm:txFillClrLst>
+    <dgm:txEffectClrLst/>
+  </dgm:styleLbl>
+  <dgm:styleLbl name="node3">
+    <dgm:fillClrLst meth="repeat">
+      <a:schemeClr val="lt1"/>
+    </dgm:fillClrLst>
+    <dgm:linClrLst meth="repeat">
+      <a:schemeClr val="dk1">
+        <a:shade val="80000"/>
+      </a:schemeClr>
+    </dgm:linClrLst>
+    <dgm:effectClrLst/>
+    <dgm:txLinClrLst/>
+    <dgm:txFillClrLst meth="repeat">
+      <a:schemeClr val="dk1"/>
+    </dgm:txFillClrLst>
+    <dgm:txEffectClrLst/>
+  </dgm:styleLbl>
+  <dgm:styleLbl name="node4">
+    <dgm:fillClrLst meth="repeat">
+      <a:schemeClr val="lt1"/>
+    </dgm:fillClrLst>
+    <dgm:linClrLst meth="repeat">
+      <a:schemeClr val="dk1">
+        <a:shade val="80000"/>
+      </a:schemeClr>
+    </dgm:linClrLst>
+    <dgm:effectClrLst/>
+    <dgm:txLinClrLst/>
+    <dgm:txFillClrLst meth="repeat">
+      <a:schemeClr val="dk1"/>
+    </dgm:txFillClrLst>
+    <dgm:txEffectClrLst/>
+  </dgm:styleLbl>
+  <dgm:styleLbl name="fgImgPlace1">
+    <dgm:fillClrLst meth="repeat">
+      <a:schemeClr val="dk1">
+        <a:tint val="40000"/>
+      </a:schemeClr>
+    </dgm:fillClrLst>
+    <dgm:linClrLst meth="repeat">
+      <a:schemeClr val="dk1">
+        <a:shade val="80000"/>
+      </a:schemeClr>
+    </dgm:linClrLst>
+    <dgm:effectClrLst/>
+    <dgm:txLinClrLst/>
+    <dgm:txFillClrLst meth="repeat">
+      <a:schemeClr val="lt1"/>
+    </dgm:txFillClrLst>
+    <dgm:txEffectClrLst/>
+  </dgm:styleLbl>
+  <dgm:styleLbl name="alignImgPlace1">
+    <dgm:fillClrLst meth="repeat">
+      <a:schemeClr val="dk1">
+        <a:tint val="40000"/>
+      </a:schemeClr>
+    </dgm:fillClrLst>
+    <dgm:linClrLst meth="repeat">
+      <a:schemeClr val="dk1">
+        <a:shade val="80000"/>
+      </a:schemeClr>
+    </dgm:linClrLst>
+    <dgm:effectClrLst/>
+    <dgm:txLinClrLst/>
+    <dgm:txFillClrLst meth="repeat">
+      <a:schemeClr val="lt1"/>
+    </dgm:txFillClrLst>
+    <dgm:txEffectClrLst/>
+  </dgm:styleLbl>
+  <dgm:styleLbl name="bgImgPlace1">
+    <dgm:fillClrLst meth="repeat">
+      <a:schemeClr val="dk1">
+        <a:tint val="40000"/>
+      </a:schemeClr>
+    </dgm:fillClrLst>
+    <dgm:linClrLst meth="repeat">
+      <a:schemeClr val="dk1">
+        <a:shade val="80000"/>
+      </a:schemeClr>
+    </dgm:linClrLst>
+    <dgm:effectClrLst/>
+    <dgm:txLinClrLst/>
+    <dgm:txFillClrLst meth="repeat">
+      <a:schemeClr val="lt1"/>
+    </dgm:txFillClrLst>
+    <dgm:txEffectClrLst/>
+  </dgm:styleLbl>
+  <dgm:styleLbl name="sibTrans2D1">
+    <dgm:fillClrLst meth="repeat">
+      <a:schemeClr val="dk1">
+        <a:tint val="60000"/>
+      </a:schemeClr>
+    </dgm:fillClrLst>
+    <dgm:linClrLst meth="repeat">
+      <a:schemeClr val="dk1">
+        <a:tint val="60000"/>
+      </a:schemeClr>
+    </dgm:linClrLst>
+    <dgm:effectClrLst/>
+    <dgm:txLinClrLst/>
+    <dgm:txFillClrLst meth="repeat">
+      <a:schemeClr val="dk1"/>
+    </dgm:txFillClrLst>
+    <dgm:txEffectClrLst/>
+  </dgm:styleLbl>
+  <dgm:styleLbl name="fgSibTrans2D1">
+    <dgm:fillClrLst meth="repeat">
+      <a:schemeClr val="dk1">
+        <a:tint val="60000"/>
+      </a:schemeClr>
+    </dgm:fillClrLst>
+    <dgm:linClrLst meth="repeat">
+      <a:schemeClr val="dk1">
+        <a:tint val="60000"/>
+      </a:schemeClr>
+    </dgm:linClrLst>
+    <dgm:effectClrLst/>
+    <dgm:txLinClrLst/>
+    <dgm:txFillClrLst meth="repeat">
+      <a:schemeClr val="dk1"/>
+    </dgm:txFillClrLst>
+    <dgm:txEffectClrLst/>
+  </dgm:styleLbl>
+  <dgm:styleLbl name="bgSibTrans2D1">
+    <dgm:fillClrLst meth="repeat">
+      <a:schemeClr val="dk1">
+        <a:tint val="60000"/>
+      </a:schemeClr>
+    </dgm:fillClrLst>
+    <dgm:linClrLst meth="repeat">
+      <a:schemeClr val="dk1">
+        <a:tint val="60000"/>
+      </a:schemeClr>
+    </dgm:linClrLst>
+    <dgm:effectClrLst/>
+    <dgm:txLinClrLst/>
+    <dgm:txFillClrLst meth="repeat">
+      <a:schemeClr val="dk1"/>
+    </dgm:txFillClrLst>
+    <dgm:txEffectClrLst/>
+  </dgm:styleLbl>
+  <dgm:styleLbl name="sibTrans1D1">
+    <dgm:fillClrLst meth="repeat">
+      <a:schemeClr val="dk1"/>
+    </dgm:fillClrLst>
+    <dgm:linClrLst meth="repeat">
+      <a:schemeClr val="dk1"/>
+    </dgm:linClrLst>
+    <dgm:effectClrLst/>
+    <dgm:txLinClrLst/>
+    <dgm:txFillClrLst meth="repeat">
+      <a:schemeClr val="tx1"/>
+    </dgm:txFillClrLst>
+    <dgm:txEffectClrLst/>
+  </dgm:styleLbl>
+  <dgm:styleLbl name="callout">
+    <dgm:fillClrLst meth="repeat">
+      <a:schemeClr val="dk1"/>
+    </dgm:fillClrLst>
+    <dgm:linClrLst meth="repeat">
+      <a:schemeClr val="dk1"/>
+    </dgm:linClrLst>
+    <dgm:effectClrLst/>
+    <dgm:txLinClrLst/>
+    <dgm:txFillClrLst meth="repeat">
+      <a:schemeClr val="tx1"/>
+    </dgm:txFillClrLst>
+    <dgm:txEffectClrLst/>
+  </dgm:styleLbl>
+  <dgm:styleLbl name="asst0">
+    <dgm:fillClrLst meth="repeat">
+      <a:schemeClr val="lt1"/>
+    </dgm:fillClrLst>
+    <dgm:linClrLst meth="repeat">
+      <a:schemeClr val="dk1">
+        <a:shade val="80000"/>
+      </a:schemeClr>
+    </dgm:linClrLst>
+    <dgm:effectClrLst/>
+    <dgm:txLinClrLst/>
+    <dgm:txFillClrLst meth="repeat">
+      <a:schemeClr val="dk1"/>
+    </dgm:txFillClrLst>
+    <dgm:txEffectClrLst/>
+  </dgm:styleLbl>
+  <dgm:styleLbl name="asst1">
+    <dgm:fillClrLst meth="repeat">
+      <a:schemeClr val="lt1"/>
+    </dgm:fillClrLst>
+    <dgm:linClrLst meth="repeat">
+      <a:schemeClr val="dk1">
+        <a:shade val="80000"/>
+      </a:schemeClr>
+    </dgm:linClrLst>
+    <dgm:effectClrLst/>
+    <dgm:txLinClrLst/>
+    <dgm:txFillClrLst meth="repeat">
+      <a:schemeClr val="dk1"/>
+    </dgm:txFillClrLst>
+    <dgm:txEffectClrLst/>
+  </dgm:styleLbl>
+  <dgm:styleLbl name="asst2">
+    <dgm:fillClrLst meth="repeat">
+      <a:schemeClr val="lt1"/>
+    </dgm:fillClrLst>
+    <dgm:linClrLst meth="repeat">
+      <a:schemeClr val="dk1">
+        <a:shade val="80000"/>
+      </a:schemeClr>
+    </dgm:linClrLst>
+    <dgm:effectClrLst/>
+    <dgm:txLinClrLst/>
+    <dgm:txFillClrLst meth="repeat">
+      <a:schemeClr val="dk1"/>
+    </dgm:txFillClrLst>
+    <dgm:txEffectClrLst/>
+  </dgm:styleLbl>
+  <dgm:styleLbl name="asst3">
+    <dgm:fillClrLst meth="repeat">
+      <a:schemeClr val="lt1"/>
+    </dgm:fillClrLst>
+    <dgm:linClrLst meth="repeat">
+      <a:schemeClr val="dk1">
+        <a:shade val="80000"/>
+      </a:schemeClr>
+    </dgm:linClrLst>
+    <dgm:effectClrLst/>
+    <dgm:txLinClrLst/>
+    <dgm:txFillClrLst meth="repeat">
+      <a:schemeClr val="dk1"/>
+    </dgm:txFillClrLst>
+    <dgm:txEffectClrLst/>
+  </dgm:styleLbl>
+  <dgm:styleLbl name="asst4">
+    <dgm:fillClrLst meth="repeat">
+      <a:schemeClr val="lt1"/>
+    </dgm:fillClrLst>
+    <dgm:linClrLst meth="repeat">
+      <a:schemeClr val="dk1">
+        <a:shade val="80000"/>
+      </a:schemeClr>
+    </dgm:linClrLst>
+    <dgm:effectClrLst/>
+    <dgm:txLinClrLst/>
+    <dgm:txFillClrLst meth="repeat">
+      <a:schemeClr val="dk1"/>
+    </dgm:txFillClrLst>
+    <dgm:txEffectClrLst/>
+  </dgm:styleLbl>
+  <dgm:styleLbl name="parChTrans2D1">
+    <dgm:fillClrLst meth="repeat">
+      <a:schemeClr val="dk1">
+        <a:tint val="60000"/>
+      </a:schemeClr>
+    </dgm:fillClrLst>
+    <dgm:linClrLst meth="repeat">
+      <a:schemeClr val="dk1">
+        <a:tint val="60000"/>
+      </a:schemeClr>
+    </dgm:linClrLst>
+    <dgm:effectClrLst/>
+    <dgm:txLinClrLst/>
+    <dgm:txFillClrLst/>
+    <dgm:txEffectClrLst/>
+  </dgm:styleLbl>
+  <dgm:styleLbl name="parChTrans2D2">
+    <dgm:fillClrLst meth="repeat">
+      <a:schemeClr val="dk1"/>
+    </dgm:fillClrLst>
+    <dgm:linClrLst meth="repeat">
+      <a:schemeClr val="dk1"/>
+    </dgm:linClrLst>
+    <dgm:effectClrLst/>
+    <dgm:txLinClrLst/>
+    <dgm:txFillClrLst/>
+    <dgm:txEffectClrLst/>
+  </dgm:styleLbl>
+  <dgm:styleLbl name="parChTrans2D3">
+    <dgm:fillClrLst meth="repeat">
+      <a:schemeClr val="dk1"/>
+    </dgm:fillClrLst>
+    <dgm:linClrLst meth="repeat">
+      <a:schemeClr val="dk1"/>
+    </dgm:linClrLst>
+    <dgm:effectClrLst/>
+    <dgm:txLinClrLst/>
+    <dgm:txFillClrLst/>
+    <dgm:txEffectClrLst/>
+  </dgm:styleLbl>
+  <dgm:styleLbl name="parChTrans2D4">
+    <dgm:fillClrLst meth="repeat">
+      <a:schemeClr val="dk1"/>
+    </dgm:fillClrLst>
+    <dgm:linClrLst meth="repeat">
+      <a:schemeClr val="dk1"/>
+    </dgm:linClrLst>
+    <dgm:effectClrLst/>
+    <dgm:txLinClrLst/>
+    <dgm:txFillClrLst meth="repeat">
+      <a:schemeClr val="lt1"/>
+    </dgm:txFillClrLst>
+    <dgm:txEffectClrLst/>
+  </dgm:styleLbl>
+  <dgm:styleLbl name="parChTrans1D1">
+    <dgm:fillClrLst meth="repeat">
+      <a:schemeClr val="dk1"/>
+    </dgm:fillClrLst>
+    <dgm:linClrLst meth="repeat">
+      <a:schemeClr val="dk1">
+        <a:shade val="60000"/>
+      </a:schemeClr>
+    </dgm:linClrLst>
+    <dgm:effectClrLst/>
+    <dgm:txLinClrLst/>
+    <dgm:txFillClrLst meth="repeat">
+      <a:schemeClr val="tx1"/>
+    </dgm:txFillClrLst>
+    <dgm:txEffectClrLst/>
+  </dgm:styleLbl>
+  <dgm:styleLbl name="parChTrans1D2">
+    <dgm:fillClrLst meth="repeat">
+      <a:schemeClr val="dk1"/>
+    </dgm:fillClrLst>
+    <dgm:linClrLst meth="repeat">
+      <a:schemeClr val="dk1">
+        <a:shade val="60000"/>
+      </a:schemeClr>
+    </dgm:linClrLst>
+    <dgm:effectClrLst/>
+    <dgm:txLinClrLst/>
+    <dgm:txFillClrLst meth="repeat">
+      <a:schemeClr val="tx1"/>
+    </dgm:txFillClrLst>
+    <dgm:txEffectClrLst/>
+  </dgm:styleLbl>
+  <dgm:styleLbl name="parChTrans1D3">
+    <dgm:fillClrLst meth="repeat">
+      <a:schemeClr val="dk1"/>
+    </dgm:fillClrLst>
+    <dgm:linClrLst meth="repeat">
+      <a:schemeClr val="dk1">
+        <a:shade val="80000"/>
+      </a:schemeClr>
+    </dgm:linClrLst>
+    <dgm:effectClrLst/>
+    <dgm:txLinClrLst/>
+    <dgm:txFillClrLst meth="repeat">
+      <a:schemeClr val="tx1"/>
+    </dgm:txFillClrLst>
+    <dgm:txEffectClrLst/>
+  </dgm:styleLbl>
+  <dgm:styleLbl name="parChTrans1D4">
+    <dgm:fillClrLst meth="repeat">
+      <a:schemeClr val="dk1"/>
+    </dgm:fillClrLst>
+    <dgm:linClrLst meth="repeat">
+      <a:schemeClr val="dk1">
+        <a:shade val="80000"/>
+      </a:schemeClr>
+    </dgm:linClrLst>
+    <dgm:effectClrLst/>
+    <dgm:txLinClrLst/>
+    <dgm:txFillClrLst meth="repeat">
+      <a:schemeClr val="tx1"/>
+    </dgm:txFillClrLst>
+    <dgm:txEffectClrLst/>
+  </dgm:styleLbl>
+  <dgm:styleLbl name="fgAcc1">
+    <dgm:fillClrLst meth="repeat">
+      <a:schemeClr val="dk1">
+        <a:alpha val="90000"/>
+        <a:tint val="40000"/>
+      </a:schemeClr>
+    </dgm:fillClrLst>
+    <dgm:linClrLst meth="repeat">
+      <a:schemeClr val="dk1"/>
+    </dgm:linClrLst>
+    <dgm:effectClrLst/>
+    <dgm:txLinClrLst/>
+    <dgm:txFillClrLst meth="repeat">
+      <a:schemeClr val="dk1"/>
+    </dgm:txFillClrLst>
+    <dgm:txEffectClrLst/>
+  </dgm:styleLbl>
+  <dgm:styleLbl name="conFgAcc1">
+    <dgm:fillClrLst meth="repeat">
+      <a:schemeClr val="dk1">
+        <a:alpha val="90000"/>
+        <a:tint val="40000"/>
+      </a:schemeClr>
+    </dgm:fillClrLst>
+    <dgm:linClrLst meth="repeat">
+      <a:schemeClr val="dk1"/>
+    </dgm:linClrLst>
+    <dgm:effectClrLst/>
+    <dgm:txLinClrLst/>
+    <dgm:txFillClrLst meth="repeat">
+      <a:schemeClr val="dk1"/>
+    </dgm:txFillClrLst>
+    <dgm:txEffectClrLst/>
+  </dgm:styleLbl>
+  <dgm:styleLbl name="alignAcc1">
+    <dgm:fillClrLst meth="repeat">
+      <a:schemeClr val="dk1">
+        <a:alpha val="90000"/>
+        <a:tint val="40000"/>
+      </a:schemeClr>
+    </dgm:fillClrLst>
+    <dgm:linClrLst meth="repeat">
+      <a:schemeClr val="dk1"/>
+    </dgm:linClrLst>
+    <dgm:effectClrLst/>
+    <dgm:txLinClrLst/>
+    <dgm:txFillClrLst meth="repeat">
+      <a:schemeClr val="dk1"/>
+    </dgm:txFillClrLst>
+    <dgm:txEffectClrLst/>
+  </dgm:styleLbl>
+  <dgm:styleLbl name="trAlignAcc1">
+    <dgm:fillClrLst meth="repeat">
+      <a:schemeClr val="dk1">
+        <a:alpha val="40000"/>
+        <a:tint val="40000"/>
+      </a:schemeClr>
+    </dgm:fillClrLst>
+    <dgm:linClrLst meth="repeat">
+      <a:schemeClr val="dk1"/>
+    </dgm:linClrLst>
+    <dgm:effectClrLst/>
+    <dgm:txLinClrLst/>
+    <dgm:txFillClrLst meth="repeat">
+      <a:schemeClr val="dk1"/>
+    </dgm:txFillClrLst>
+    <dgm:txEffectClrLst/>
+  </dgm:styleLbl>
+  <dgm:styleLbl name="bgAcc1">
+    <dgm:fillClrLst meth="repeat">
+      <a:schemeClr val="dk1">
+        <a:alpha val="90000"/>
+        <a:tint val="40000"/>
+      </a:schemeClr>
+    </dgm:fillClrLst>
+    <dgm:linClrLst meth="repeat">
+      <a:schemeClr val="dk1"/>
+    </dgm:linClrLst>
+    <dgm:effectClrLst/>
+    <dgm:txLinClrLst/>
+    <dgm:txFillClrLst meth="repeat">
+      <a:schemeClr val="dk1"/>
+    </dgm:txFillClrLst>
+    <dgm:txEffectClrLst/>
+  </dgm:styleLbl>
+  <dgm:styleLbl name="solidFgAcc1">
+    <dgm:fillClrLst meth="repeat">
+      <a:schemeClr val="lt1"/>
+    </dgm:fillClrLst>
+    <dgm:linClrLst meth="repeat">
+      <a:schemeClr val="dk1"/>
+    </dgm:linClrLst>
+    <dgm:effectClrLst/>
+    <dgm:txLinClrLst/>
+    <dgm:txFillClrLst meth="repeat">
+      <a:schemeClr val="dk1"/>
+    </dgm:txFillClrLst>
+    <dgm:txEffectClrLst/>
+  </dgm:styleLbl>
+  <dgm:styleLbl name="solidAlignAcc1">
+    <dgm:fillClrLst meth="repeat">
+      <a:schemeClr val="lt1"/>
+    </dgm:fillClrLst>
+    <dgm:linClrLst meth="repeat">
+      <a:schemeClr val="dk1"/>
+    </dgm:linClrLst>
+    <dgm:effectClrLst/>
+    <dgm:txLinClrLst/>
+    <dgm:txFillClrLst meth="repeat">
+      <a:schemeClr val="dk1"/>
+    </dgm:txFillClrLst>
+    <dgm:txEffectClrLst/>
+  </dgm:styleLbl>
+  <dgm:styleLbl name="solidBgAcc1">
+    <dgm:fillClrLst meth="repeat">
+      <a:schemeClr val="lt1"/>
+    </dgm:fillClrLst>
+    <dgm:linClrLst meth="repeat">
+      <a:schemeClr val="dk1"/>
+    </dgm:linClrLst>
+    <dgm:effectClrLst/>
+    <dgm:txLinClrLst/>
+    <dgm:txFillClrLst meth="repeat">
+      <a:schemeClr val="dk1"/>
+    </dgm:txFillClrLst>
+    <dgm:txEffectClrLst/>
+  </dgm:styleLbl>
+  <dgm:styleLbl name="fgAccFollowNode1">
+    <dgm:fillClrLst meth="repeat">
+      <a:schemeClr val="lt1">
+        <a:alpha val="90000"/>
+        <a:tint val="40000"/>
+      </a:schemeClr>
+    </dgm:fillClrLst>
+    <dgm:linClrLst meth="repeat">
+      <a:schemeClr val="dk1">
+        <a:alpha val="90000"/>
+      </a:schemeClr>
+    </dgm:linClrLst>
+    <dgm:effectClrLst/>
+    <dgm:txLinClrLst/>
+    <dgm:txFillClrLst meth="repeat">
+      <a:schemeClr val="dk1"/>
+    </dgm:txFillClrLst>
+    <dgm:txEffectClrLst/>
+  </dgm:styleLbl>
+  <dgm:styleLbl name="alignAccFollowNode1">
+    <dgm:fillClrLst meth="repeat">
+      <a:schemeClr val="lt1">
+        <a:alpha val="90000"/>
+        <a:tint val="40000"/>
+      </a:schemeClr>
+    </dgm:fillClrLst>
+    <dgm:linClrLst meth="repeat">
+      <a:schemeClr val="dk1">
+        <a:alpha val="90000"/>
+      </a:schemeClr>
+    </dgm:linClrLst>
+    <dgm:effectClrLst/>
+    <dgm:txLinClrLst/>
+    <dgm:txFillClrLst meth="repeat">
+      <a:schemeClr val="dk1"/>
+    </dgm:txFillClrLst>
+    <dgm:txEffectClrLst/>
+  </dgm:styleLbl>
+  <dgm:styleLbl name="bgAccFollowNode1">
+    <dgm:fillClrLst meth="repeat">
+      <a:schemeClr val="lt1">
+        <a:alpha val="90000"/>
+        <a:tint val="40000"/>
+      </a:schemeClr>
+    </dgm:fillClrLst>
+    <dgm:linClrLst meth="repeat">
+      <a:schemeClr val="dk1">
+        <a:alpha val="90000"/>
+      </a:schemeClr>
+    </dgm:linClrLst>
+    <dgm:effectClrLst/>
+    <dgm:txLinClrLst/>
+    <dgm:txFillClrLst meth="repeat">
+      <a:schemeClr val="dk1"/>
+    </dgm:txFillClrLst>
+    <dgm:txEffectClrLst/>
+  </dgm:styleLbl>
+  <dgm:styleLbl name="fgAcc0">
+    <dgm:fillClrLst meth="repeat">
+      <a:schemeClr val="dk1">
+        <a:alpha val="90000"/>
+        <a:tint val="40000"/>
+      </a:schemeClr>
+    </dgm:fillClrLst>
+    <dgm:linClrLst meth="repeat">
+      <a:schemeClr val="dk1"/>
+    </dgm:linClrLst>
+    <dgm:effectClrLst/>
+    <dgm:txLinClrLst/>
+    <dgm:txFillClrLst meth="repeat">
+      <a:schemeClr val="dk1"/>
+    </dgm:txFillClrLst>
+    <dgm:txEffectClrLst/>
+  </dgm:styleLbl>
+  <dgm:styleLbl name="fgAcc2">
+    <dgm:fillClrLst meth="repeat">
+      <a:schemeClr val="dk1">
+        <a:alpha val="90000"/>
+        <a:tint val="40000"/>
+      </a:schemeClr>
+    </dgm:fillClrLst>
+    <dgm:linClrLst meth="repeat">
+      <a:schemeClr val="dk1"/>
+    </dgm:linClrLst>
+    <dgm:effectClrLst/>
+    <dgm:txLinClrLst/>
+    <dgm:txFillClrLst meth="repeat">
+      <a:schemeClr val="dk1"/>
+    </dgm:txFillClrLst>
+    <dgm:txEffectClrLst/>
+  </dgm:styleLbl>
+  <dgm:styleLbl name="fgAcc3">
+    <dgm:fillClrLst meth="repeat">
+      <a:schemeClr val="dk1">
+        <a:alpha val="90000"/>
+        <a:tint val="40000"/>
+      </a:schemeClr>
+    </dgm:fillClrLst>
+    <dgm:linClrLst meth="repeat">
+      <a:schemeClr val="dk1"/>
+    </dgm:linClrLst>
+    <dgm:effectClrLst/>
+    <dgm:txLinClrLst/>
+    <dgm:txFillClrLst meth="repeat">
+      <a:schemeClr val="dk1"/>
+    </dgm:txFillClrLst>
+    <dgm:txEffectClrLst/>
+  </dgm:styleLbl>
+  <dgm:styleLbl name="fgAcc4">
+    <dgm:fillClrLst meth="repeat">
+      <a:schemeClr val="dk1">
+        <a:alpha val="90000"/>
+        <a:tint val="40000"/>
+      </a:schemeClr>
+    </dgm:fillClrLst>
+    <dgm:linClrLst meth="repeat">
+      <a:schemeClr val="dk1"/>
+    </dgm:linClrLst>
+    <dgm:effectClrLst/>
+    <dgm:txLinClrLst/>
+    <dgm:txFillClrLst meth="repeat">
+      <a:schemeClr val="dk1"/>
+    </dgm:txFillClrLst>
+    <dgm:txEffectClrLst/>
+  </dgm:styleLbl>
+  <dgm:styleLbl name="bgShp">
+    <dgm:fillClrLst meth="repeat">
+      <a:schemeClr val="dk1">
+        <a:tint val="40000"/>
+      </a:schemeClr>
+    </dgm:fillClrLst>
+    <dgm:linClrLst meth="repeat">
+      <a:schemeClr val="dk1"/>
+    </dgm:linClrLst>
+    <dgm:effectClrLst/>
+    <dgm:txLinClrLst/>
+    <dgm:txFillClrLst meth="repeat">
+      <a:schemeClr val="dk1"/>
+    </dgm:txFillClrLst>
+    <dgm:txEffectClrLst/>
+  </dgm:styleLbl>
+  <dgm:styleLbl name="dkBgShp">
+    <dgm:fillClrLst meth="repeat">
+      <a:schemeClr val="dk1">
+        <a:shade val="80000"/>
+      </a:schemeClr>
+    </dgm:fillClrLst>
+    <dgm:linClrLst meth="repeat">
+      <a:schemeClr val="dk1"/>
+    </dgm:linClrLst>
+    <dgm:effectClrLst/>
+    <dgm:txLinClrLst/>
+    <dgm:txFillClrLst meth="repeat">
+      <a:schemeClr val="lt1"/>
+    </dgm:txFillClrLst>
+    <dgm:txEffectClrLst/>
+  </dgm:styleLbl>
+  <dgm:styleLbl name="trBgShp">
+    <dgm:fillClrLst meth="repeat">
+      <a:schemeClr val="dk1">
+        <a:tint val="50000"/>
+        <a:alpha val="40000"/>
+      </a:schemeClr>
+    </dgm:fillClrLst>
+    <dgm:linClrLst meth="repeat">
+      <a:schemeClr val="dk1"/>
+    </dgm:linClrLst>
+    <dgm:effectClrLst/>
+    <dgm:txLinClrLst/>
+    <dgm:txFillClrLst meth="repeat">
+      <a:schemeClr val="lt1"/>
+    </dgm:txFillClrLst>
+    <dgm:txEffectClrLst/>
+  </dgm:styleLbl>
+  <dgm:styleLbl name="fgShp">
+    <dgm:fillClrLst meth="repeat">
+      <a:schemeClr val="dk1">
+        <a:tint val="60000"/>
+      </a:schemeClr>
+    </dgm:fillClrLst>
+    <dgm:linClrLst meth="repeat">
+      <a:schemeClr val="lt1"/>
+    </dgm:linClrLst>
+    <dgm:effectClrLst/>
+    <dgm:txLinClrLst/>
+    <dgm:txFillClrLst meth="repeat">
+      <a:schemeClr val="dk1"/>
+    </dgm:txFillClrLst>
+    <dgm:txEffectClrLst/>
+  </dgm:styleLbl>
+  <dgm:styleLbl name="revTx">
+    <dgm:fillClrLst meth="repeat">
+      <a:schemeClr val="lt1">
+        <a:alpha val="0"/>
+      </a:schemeClr>
+    </dgm:fillClrLst>
+    <dgm:linClrLst meth="repeat">
+      <a:schemeClr val="dk1">
+        <a:alpha val="0"/>
+      </a:schemeClr>
+    </dgm:linClrLst>
+    <dgm:effectClrLst/>
+    <dgm:txLinClrLst/>
+    <dgm:txFillClrLst meth="repeat">
+      <a:schemeClr val="tx1"/>
+    </dgm:txFillClrLst>
+    <dgm:txEffectClrLst/>
+  </dgm:styleLbl>
+</dgm:colorsDef>
+</file>
+
 <file path=ppt/diagrams/data1.xml><?xml version="1.0" encoding="utf-8"?>
 <dgm:dataModel xmlns:dgm="http://schemas.openxmlformats.org/drawingml/2006/diagram" xmlns:a="http://schemas.openxmlformats.org/drawingml/2006/main">
   <dgm:ptLst>
@@ -2418,16 +3226,16 @@
       </dgm:prSet>
       <dgm:spPr/>
     </dgm:pt>
-    <dgm:pt modelId="{9C1F367D-4B7A-2E43-AB57-E2005CEC54C2}" type="pres">
-      <dgm:prSet presAssocID="{7DD4AF64-A9A0-0447-B0C4-D6B9B3516151}" presName="nodeFollowingNodes" presStyleLbl="node1" presStyleIdx="3" presStyleCnt="10">
+    <dgm:pt modelId="{BC53A7EE-063F-0243-80AC-C4417FF60454}" type="pres">
+      <dgm:prSet presAssocID="{87C913A6-2A36-C840-8C34-44B345906945}" presName="nodeFollowingNodes" presStyleLbl="node1" presStyleIdx="3" presStyleCnt="10">
         <dgm:presLayoutVars>
           <dgm:bulletEnabled val="1"/>
         </dgm:presLayoutVars>
       </dgm:prSet>
       <dgm:spPr/>
     </dgm:pt>
-    <dgm:pt modelId="{BC53A7EE-063F-0243-80AC-C4417FF60454}" type="pres">
-      <dgm:prSet presAssocID="{87C913A6-2A36-C840-8C34-44B345906945}" presName="nodeFollowingNodes" presStyleLbl="node1" presStyleIdx="4" presStyleCnt="10">
+    <dgm:pt modelId="{9C1F367D-4B7A-2E43-AB57-E2005CEC54C2}" type="pres">
+      <dgm:prSet presAssocID="{7DD4AF64-A9A0-0447-B0C4-D6B9B3516151}" presName="nodeFollowingNodes" presStyleLbl="node1" presStyleIdx="4" presStyleCnt="10">
         <dgm:presLayoutVars>
           <dgm:bulletEnabled val="1"/>
         </dgm:presLayoutVars>
@@ -2476,40 +3284,40 @@
     </dgm:pt>
   </dgm:ptLst>
   <dgm:cxnLst>
-    <dgm:cxn modelId="{1BB56B13-ED54-7F49-9C44-E54F0DF65363}" srcId="{056D782B-3AE9-6341-8054-2A504A814F31}" destId="{7DD4AF64-A9A0-0447-B0C4-D6B9B3516151}" srcOrd="3" destOrd="0" parTransId="{B57ED926-CE1F-4641-AA0C-C09D6349E256}" sibTransId="{ECF88FB9-0318-774B-B23E-647D9434C6E1}"/>
-    <dgm:cxn modelId="{F396E149-1945-6244-9732-13C1A68DBD32}" type="presOf" srcId="{7224B14F-880B-634F-A526-C4E35D50D1E3}" destId="{19409FAB-9ED0-024C-9BD3-FA3940064CB5}" srcOrd="0" destOrd="0" presId="urn:microsoft.com/office/officeart/2005/8/layout/cycle3"/>
-    <dgm:cxn modelId="{0126C255-FDFA-D24A-B385-8A484C4CB250}" type="presOf" srcId="{DF12632C-3DFF-0444-AEBA-90FAE8978665}" destId="{1A690F30-74B2-4847-B5F5-75A4E2E3AD9E}" srcOrd="0" destOrd="0" presId="urn:microsoft.com/office/officeart/2005/8/layout/cycle3"/>
+    <dgm:cxn modelId="{1BB56B13-ED54-7F49-9C44-E54F0DF65363}" srcId="{056D782B-3AE9-6341-8054-2A504A814F31}" destId="{7DD4AF64-A9A0-0447-B0C4-D6B9B3516151}" srcOrd="4" destOrd="0" parTransId="{B57ED926-CE1F-4641-AA0C-C09D6349E256}" sibTransId="{ECF88FB9-0318-774B-B23E-647D9434C6E1}"/>
+    <dgm:cxn modelId="{6A0B0F2E-2934-3045-AD32-EBA1ABE99F07}" type="presOf" srcId="{D56B6BE1-E4D0-394D-A3D2-CB5AA4024D55}" destId="{659FE536-1F1D-504E-930D-115BE2D22DCB}" srcOrd="0" destOrd="0" presId="urn:microsoft.com/office/officeart/2005/8/layout/cycle3"/>
+    <dgm:cxn modelId="{27EBC02E-1C68-4E47-8647-6AB276C18D75}" type="presOf" srcId="{409F7A24-5637-5243-801D-289994206447}" destId="{D94B10FC-86A6-FF4A-A1B2-1E5A15A9B8EC}" srcOrd="0" destOrd="0" presId="urn:microsoft.com/office/officeart/2005/8/layout/cycle3"/>
+    <dgm:cxn modelId="{D0BACC40-C4A8-4749-AA24-869A59819CF2}" type="presOf" srcId="{D944F075-B569-C445-9131-D0B813F81D95}" destId="{93260571-C263-5C47-A419-401F437055EE}" srcOrd="0" destOrd="0" presId="urn:microsoft.com/office/officeart/2005/8/layout/cycle3"/>
+    <dgm:cxn modelId="{D185AB42-0F14-4D4C-9C56-5C98F4A0057B}" type="presOf" srcId="{7224B14F-880B-634F-A526-C4E35D50D1E3}" destId="{19409FAB-9ED0-024C-9BD3-FA3940064CB5}" srcOrd="0" destOrd="0" presId="urn:microsoft.com/office/officeart/2005/8/layout/cycle3"/>
     <dgm:cxn modelId="{6C30B45B-8310-254F-9AAE-B9AD3AED63A7}" srcId="{056D782B-3AE9-6341-8054-2A504A814F31}" destId="{4326A752-E400-4E49-AD2E-BF0AD97A978D}" srcOrd="5" destOrd="0" parTransId="{8C968CE8-34FF-894B-AA65-CFAA90D070D2}" sibTransId="{2D7F8951-F8BF-6143-9646-1A76370E1C63}"/>
     <dgm:cxn modelId="{5B2D995C-4229-074D-A910-AF2E78F79A75}" srcId="{056D782B-3AE9-6341-8054-2A504A814F31}" destId="{16418477-AF6E-7849-9D54-63386E430A36}" srcOrd="1" destOrd="0" parTransId="{9C786919-0F2A-6E4A-AEDF-D6709759B767}" sibTransId="{E53BBC97-B433-8C4B-B689-19334FF5366E}"/>
+    <dgm:cxn modelId="{3EB1186E-21B6-7E44-A2A6-389DE8C93B02}" type="presOf" srcId="{DF12632C-3DFF-0444-AEBA-90FAE8978665}" destId="{1A690F30-74B2-4847-B5F5-75A4E2E3AD9E}" srcOrd="0" destOrd="0" presId="urn:microsoft.com/office/officeart/2005/8/layout/cycle3"/>
     <dgm:cxn modelId="{A8226A73-0A2E-814D-A4FF-61D325853B73}" srcId="{056D782B-3AE9-6341-8054-2A504A814F31}" destId="{DF12632C-3DFF-0444-AEBA-90FAE8978665}" srcOrd="8" destOrd="0" parTransId="{8AA5A6E9-F9F8-0348-BDD0-7A4FF5DF3A1A}" sibTransId="{4D1C6FE3-0A91-4541-9BF5-1DA217B5C9DF}"/>
-    <dgm:cxn modelId="{30480581-8EA3-E94D-B8EF-456AAE914C33}" type="presOf" srcId="{D944F075-B569-C445-9131-D0B813F81D95}" destId="{93260571-C263-5C47-A419-401F437055EE}" srcOrd="0" destOrd="0" presId="urn:microsoft.com/office/officeart/2005/8/layout/cycle3"/>
+    <dgm:cxn modelId="{4CC58873-E2A0-5D43-BBF6-795001848803}" type="presOf" srcId="{4326A752-E400-4E49-AD2E-BF0AD97A978D}" destId="{1DF87B89-7439-B148-B088-80277B1BDDD3}" srcOrd="0" destOrd="0" presId="urn:microsoft.com/office/officeart/2005/8/layout/cycle3"/>
     <dgm:cxn modelId="{E7FF6F82-93E0-D245-A83F-620DB99CE8D3}" srcId="{056D782B-3AE9-6341-8054-2A504A814F31}" destId="{3C65A1CA-C348-8A46-854D-CB8C83D8A112}" srcOrd="7" destOrd="0" parTransId="{DDA734B1-D250-FF4A-9EFE-180B0BD9CCAF}" sibTransId="{2F07F163-A262-EB47-B21A-0E2F0E12D06A}"/>
-    <dgm:cxn modelId="{FA7A1992-F934-EC48-A675-5328B572D63D}" type="presOf" srcId="{3C65A1CA-C348-8A46-854D-CB8C83D8A112}" destId="{5A043805-F757-CF4A-9485-BE4798BC4994}" srcOrd="0" destOrd="0" presId="urn:microsoft.com/office/officeart/2005/8/layout/cycle3"/>
     <dgm:cxn modelId="{E70A7B96-E081-FD44-8939-886A69748AA8}" type="presOf" srcId="{056D782B-3AE9-6341-8054-2A504A814F31}" destId="{CA38CAAF-4126-F842-9139-795E9B492809}" srcOrd="0" destOrd="0" presId="urn:microsoft.com/office/officeart/2005/8/layout/cycle3"/>
     <dgm:cxn modelId="{9D35A697-CD78-E84D-ACD4-57979380DB8E}" srcId="{056D782B-3AE9-6341-8054-2A504A814F31}" destId="{D56B6BE1-E4D0-394D-A3D2-CB5AA4024D55}" srcOrd="2" destOrd="0" parTransId="{659AC1EE-6628-824A-B823-52F387E01033}" sibTransId="{486BE965-D079-354A-8A11-71412DC2A78D}"/>
-    <dgm:cxn modelId="{F9CE7798-BD42-3349-9408-17F59482892B}" srcId="{056D782B-3AE9-6341-8054-2A504A814F31}" destId="{87C913A6-2A36-C840-8C34-44B345906945}" srcOrd="4" destOrd="0" parTransId="{721C540D-DF5C-DF47-BE38-5DB2CA559E21}" sibTransId="{1E788998-85E9-D34F-801B-7347E3EB0C3E}"/>
+    <dgm:cxn modelId="{F9CE7798-BD42-3349-9408-17F59482892B}" srcId="{056D782B-3AE9-6341-8054-2A504A814F31}" destId="{87C913A6-2A36-C840-8C34-44B345906945}" srcOrd="3" destOrd="0" parTransId="{721C540D-DF5C-DF47-BE38-5DB2CA559E21}" sibTransId="{1E788998-85E9-D34F-801B-7347E3EB0C3E}"/>
     <dgm:cxn modelId="{2A45D999-46E5-E141-A889-E7E6724A1BEE}" srcId="{056D782B-3AE9-6341-8054-2A504A814F31}" destId="{D944F075-B569-C445-9131-D0B813F81D95}" srcOrd="6" destOrd="0" parTransId="{2AB657AE-DE05-6642-A47F-D076DBCFE7BC}" sibTransId="{86A5A618-D0E0-BF4D-8C48-0331F40F0028}"/>
-    <dgm:cxn modelId="{33A28EA5-8B88-D546-A985-A8877D4AEA3C}" type="presOf" srcId="{D56B6BE1-E4D0-394D-A3D2-CB5AA4024D55}" destId="{659FE536-1F1D-504E-930D-115BE2D22DCB}" srcOrd="0" destOrd="0" presId="urn:microsoft.com/office/officeart/2005/8/layout/cycle3"/>
-    <dgm:cxn modelId="{30BAEFA9-5086-DA45-B1E2-F36E5C3AFBD2}" type="presOf" srcId="{7DD4AF64-A9A0-0447-B0C4-D6B9B3516151}" destId="{9C1F367D-4B7A-2E43-AB57-E2005CEC54C2}" srcOrd="0" destOrd="0" presId="urn:microsoft.com/office/officeart/2005/8/layout/cycle3"/>
+    <dgm:cxn modelId="{6197FC99-AE46-6E4C-9FB6-BED0E84A9581}" type="presOf" srcId="{87C913A6-2A36-C840-8C34-44B345906945}" destId="{BC53A7EE-063F-0243-80AC-C4417FF60454}" srcOrd="0" destOrd="0" presId="urn:microsoft.com/office/officeart/2005/8/layout/cycle3"/>
     <dgm:cxn modelId="{577D96AE-07E1-BE47-813A-2058F110D0DD}" srcId="{056D782B-3AE9-6341-8054-2A504A814F31}" destId="{409F7A24-5637-5243-801D-289994206447}" srcOrd="0" destOrd="0" parTransId="{2CE23994-248B-7D40-BED2-A70B6FE371A8}" sibTransId="{7224B14F-880B-634F-A526-C4E35D50D1E3}"/>
-    <dgm:cxn modelId="{A9CF93BE-2672-0946-970F-8E97FD0DAD8E}" type="presOf" srcId="{4326A752-E400-4E49-AD2E-BF0AD97A978D}" destId="{1DF87B89-7439-B148-B088-80277B1BDDD3}" srcOrd="0" destOrd="0" presId="urn:microsoft.com/office/officeart/2005/8/layout/cycle3"/>
-    <dgm:cxn modelId="{43135BC3-C5A6-F245-97FA-076300E7A0F9}" type="presOf" srcId="{409F7A24-5637-5243-801D-289994206447}" destId="{D94B10FC-86A6-FF4A-A1B2-1E5A15A9B8EC}" srcOrd="0" destOrd="0" presId="urn:microsoft.com/office/officeart/2005/8/layout/cycle3"/>
-    <dgm:cxn modelId="{72F39FC9-1C82-2D4A-A2D9-88C1BB9022EF}" type="presOf" srcId="{16418477-AF6E-7849-9D54-63386E430A36}" destId="{A6D2C092-8BDD-184F-B60A-95002E1C617A}" srcOrd="0" destOrd="0" presId="urn:microsoft.com/office/officeart/2005/8/layout/cycle3"/>
-    <dgm:cxn modelId="{EC49FCD9-C794-8549-8414-12C719311599}" type="presOf" srcId="{10ABBA3C-4CBE-6A4D-9344-A61ED31E64BC}" destId="{CAAC65CA-09FF-B642-B0C8-D19A7DEB4844}" srcOrd="0" destOrd="0" presId="urn:microsoft.com/office/officeart/2005/8/layout/cycle3"/>
+    <dgm:cxn modelId="{A6D78EB5-E5A6-1540-BF46-13AE8A0267D0}" type="presOf" srcId="{16418477-AF6E-7849-9D54-63386E430A36}" destId="{A6D2C092-8BDD-184F-B60A-95002E1C617A}" srcOrd="0" destOrd="0" presId="urn:microsoft.com/office/officeart/2005/8/layout/cycle3"/>
+    <dgm:cxn modelId="{403DD2DF-033B-A94D-BF64-6EF556ED9114}" type="presOf" srcId="{7DD4AF64-A9A0-0447-B0C4-D6B9B3516151}" destId="{9C1F367D-4B7A-2E43-AB57-E2005CEC54C2}" srcOrd="0" destOrd="0" presId="urn:microsoft.com/office/officeart/2005/8/layout/cycle3"/>
+    <dgm:cxn modelId="{22A65FEB-FB0B-494C-AB9E-05D64EA3D280}" type="presOf" srcId="{3C65A1CA-C348-8A46-854D-CB8C83D8A112}" destId="{5A043805-F757-CF4A-9485-BE4798BC4994}" srcOrd="0" destOrd="0" presId="urn:microsoft.com/office/officeart/2005/8/layout/cycle3"/>
     <dgm:cxn modelId="{C0E784F6-C225-F145-A263-D8CED48EF51E}" srcId="{056D782B-3AE9-6341-8054-2A504A814F31}" destId="{10ABBA3C-4CBE-6A4D-9344-A61ED31E64BC}" srcOrd="9" destOrd="0" parTransId="{9A064722-0612-A447-BDB7-330EC0904293}" sibTransId="{7289D30D-5B08-C740-8928-6C5502B260FE}"/>
-    <dgm:cxn modelId="{15524BF9-6736-714B-8F41-7F25724B8F39}" type="presOf" srcId="{87C913A6-2A36-C840-8C34-44B345906945}" destId="{BC53A7EE-063F-0243-80AC-C4417FF60454}" srcOrd="0" destOrd="0" presId="urn:microsoft.com/office/officeart/2005/8/layout/cycle3"/>
-    <dgm:cxn modelId="{3874BEAC-FF92-A042-8B3B-5FC421D9B113}" type="presParOf" srcId="{CA38CAAF-4126-F842-9139-795E9B492809}" destId="{CE83B688-DEF8-2646-90E9-C08F8A3E70E7}" srcOrd="0" destOrd="0" presId="urn:microsoft.com/office/officeart/2005/8/layout/cycle3"/>
-    <dgm:cxn modelId="{0E8F0E7D-A4FA-4545-B15E-4B033D2618DB}" type="presParOf" srcId="{CE83B688-DEF8-2646-90E9-C08F8A3E70E7}" destId="{D94B10FC-86A6-FF4A-A1B2-1E5A15A9B8EC}" srcOrd="0" destOrd="0" presId="urn:microsoft.com/office/officeart/2005/8/layout/cycle3"/>
-    <dgm:cxn modelId="{CF08E2E7-584C-6247-B16B-C80F758DBF89}" type="presParOf" srcId="{CE83B688-DEF8-2646-90E9-C08F8A3E70E7}" destId="{19409FAB-9ED0-024C-9BD3-FA3940064CB5}" srcOrd="1" destOrd="0" presId="urn:microsoft.com/office/officeart/2005/8/layout/cycle3"/>
-    <dgm:cxn modelId="{9C04867F-3EB1-FB40-9BCB-4C9BB2D5FF0B}" type="presParOf" srcId="{CE83B688-DEF8-2646-90E9-C08F8A3E70E7}" destId="{A6D2C092-8BDD-184F-B60A-95002E1C617A}" srcOrd="2" destOrd="0" presId="urn:microsoft.com/office/officeart/2005/8/layout/cycle3"/>
-    <dgm:cxn modelId="{39E1BE29-A379-1B4C-82D2-458FC4CF61F2}" type="presParOf" srcId="{CE83B688-DEF8-2646-90E9-C08F8A3E70E7}" destId="{659FE536-1F1D-504E-930D-115BE2D22DCB}" srcOrd="3" destOrd="0" presId="urn:microsoft.com/office/officeart/2005/8/layout/cycle3"/>
-    <dgm:cxn modelId="{7BA0F49A-6244-CB44-8B24-14DE222807E5}" type="presParOf" srcId="{CE83B688-DEF8-2646-90E9-C08F8A3E70E7}" destId="{9C1F367D-4B7A-2E43-AB57-E2005CEC54C2}" srcOrd="4" destOrd="0" presId="urn:microsoft.com/office/officeart/2005/8/layout/cycle3"/>
-    <dgm:cxn modelId="{D32DEAAD-2BBA-8749-A731-9D89188F1347}" type="presParOf" srcId="{CE83B688-DEF8-2646-90E9-C08F8A3E70E7}" destId="{BC53A7EE-063F-0243-80AC-C4417FF60454}" srcOrd="5" destOrd="0" presId="urn:microsoft.com/office/officeart/2005/8/layout/cycle3"/>
-    <dgm:cxn modelId="{3D8EFCEA-529F-D64D-AB6E-93C194A0A067}" type="presParOf" srcId="{CE83B688-DEF8-2646-90E9-C08F8A3E70E7}" destId="{1DF87B89-7439-B148-B088-80277B1BDDD3}" srcOrd="6" destOrd="0" presId="urn:microsoft.com/office/officeart/2005/8/layout/cycle3"/>
-    <dgm:cxn modelId="{BC921CB3-193E-244B-8953-C9FB142FA41F}" type="presParOf" srcId="{CE83B688-DEF8-2646-90E9-C08F8A3E70E7}" destId="{93260571-C263-5C47-A419-401F437055EE}" srcOrd="7" destOrd="0" presId="urn:microsoft.com/office/officeart/2005/8/layout/cycle3"/>
-    <dgm:cxn modelId="{748B3F98-CE36-0B46-9ABF-1E9069495B16}" type="presParOf" srcId="{CE83B688-DEF8-2646-90E9-C08F8A3E70E7}" destId="{5A043805-F757-CF4A-9485-BE4798BC4994}" srcOrd="8" destOrd="0" presId="urn:microsoft.com/office/officeart/2005/8/layout/cycle3"/>
-    <dgm:cxn modelId="{86ECA832-43EB-D546-957D-15C5C6AE0728}" type="presParOf" srcId="{CE83B688-DEF8-2646-90E9-C08F8A3E70E7}" destId="{1A690F30-74B2-4847-B5F5-75A4E2E3AD9E}" srcOrd="9" destOrd="0" presId="urn:microsoft.com/office/officeart/2005/8/layout/cycle3"/>
-    <dgm:cxn modelId="{4CC50D84-EDFC-9F40-B77A-F4B364144AA6}" type="presParOf" srcId="{CE83B688-DEF8-2646-90E9-C08F8A3E70E7}" destId="{CAAC65CA-09FF-B642-B0C8-D19A7DEB4844}" srcOrd="10" destOrd="0" presId="urn:microsoft.com/office/officeart/2005/8/layout/cycle3"/>
+    <dgm:cxn modelId="{EA22CFF9-42E4-A54A-95E3-AE8E3E697AFD}" type="presOf" srcId="{10ABBA3C-4CBE-6A4D-9344-A61ED31E64BC}" destId="{CAAC65CA-09FF-B642-B0C8-D19A7DEB4844}" srcOrd="0" destOrd="0" presId="urn:microsoft.com/office/officeart/2005/8/layout/cycle3"/>
+    <dgm:cxn modelId="{8CDBF002-D9D0-1F45-B074-950F3052EF68}" type="presParOf" srcId="{CA38CAAF-4126-F842-9139-795E9B492809}" destId="{CE83B688-DEF8-2646-90E9-C08F8A3E70E7}" srcOrd="0" destOrd="0" presId="urn:microsoft.com/office/officeart/2005/8/layout/cycle3"/>
+    <dgm:cxn modelId="{08E1F66F-F459-D042-A735-AC06820FD032}" type="presParOf" srcId="{CE83B688-DEF8-2646-90E9-C08F8A3E70E7}" destId="{D94B10FC-86A6-FF4A-A1B2-1E5A15A9B8EC}" srcOrd="0" destOrd="0" presId="urn:microsoft.com/office/officeart/2005/8/layout/cycle3"/>
+    <dgm:cxn modelId="{8B30BAF8-B1E4-C044-BFAC-F124B8A48955}" type="presParOf" srcId="{CE83B688-DEF8-2646-90E9-C08F8A3E70E7}" destId="{19409FAB-9ED0-024C-9BD3-FA3940064CB5}" srcOrd="1" destOrd="0" presId="urn:microsoft.com/office/officeart/2005/8/layout/cycle3"/>
+    <dgm:cxn modelId="{336F5120-F3FD-A94B-8A92-6024E2FB84A8}" type="presParOf" srcId="{CE83B688-DEF8-2646-90E9-C08F8A3E70E7}" destId="{A6D2C092-8BDD-184F-B60A-95002E1C617A}" srcOrd="2" destOrd="0" presId="urn:microsoft.com/office/officeart/2005/8/layout/cycle3"/>
+    <dgm:cxn modelId="{5B9590F9-92CB-4F41-BC4E-66D30673F4AB}" type="presParOf" srcId="{CE83B688-DEF8-2646-90E9-C08F8A3E70E7}" destId="{659FE536-1F1D-504E-930D-115BE2D22DCB}" srcOrd="3" destOrd="0" presId="urn:microsoft.com/office/officeart/2005/8/layout/cycle3"/>
+    <dgm:cxn modelId="{140D014D-B9FB-8C40-96D0-E257109123C5}" type="presParOf" srcId="{CE83B688-DEF8-2646-90E9-C08F8A3E70E7}" destId="{BC53A7EE-063F-0243-80AC-C4417FF60454}" srcOrd="4" destOrd="0" presId="urn:microsoft.com/office/officeart/2005/8/layout/cycle3"/>
+    <dgm:cxn modelId="{2866F1C1-AFB4-8D4E-86E8-E4DB7FC4BEE1}" type="presParOf" srcId="{CE83B688-DEF8-2646-90E9-C08F8A3E70E7}" destId="{9C1F367D-4B7A-2E43-AB57-E2005CEC54C2}" srcOrd="5" destOrd="0" presId="urn:microsoft.com/office/officeart/2005/8/layout/cycle3"/>
+    <dgm:cxn modelId="{28C8E178-0E71-C047-AD0F-AEABFCA1345B}" type="presParOf" srcId="{CE83B688-DEF8-2646-90E9-C08F8A3E70E7}" destId="{1DF87B89-7439-B148-B088-80277B1BDDD3}" srcOrd="6" destOrd="0" presId="urn:microsoft.com/office/officeart/2005/8/layout/cycle3"/>
+    <dgm:cxn modelId="{9146D414-7A23-4F4B-9A87-29AB9EC6D80D}" type="presParOf" srcId="{CE83B688-DEF8-2646-90E9-C08F8A3E70E7}" destId="{93260571-C263-5C47-A419-401F437055EE}" srcOrd="7" destOrd="0" presId="urn:microsoft.com/office/officeart/2005/8/layout/cycle3"/>
+    <dgm:cxn modelId="{A9919977-9C0A-EC42-B307-80C8C97C2706}" type="presParOf" srcId="{CE83B688-DEF8-2646-90E9-C08F8A3E70E7}" destId="{5A043805-F757-CF4A-9485-BE4798BC4994}" srcOrd="8" destOrd="0" presId="urn:microsoft.com/office/officeart/2005/8/layout/cycle3"/>
+    <dgm:cxn modelId="{0DA40528-B32F-C947-9A0A-A3C5063BF2BE}" type="presParOf" srcId="{CE83B688-DEF8-2646-90E9-C08F8A3E70E7}" destId="{1A690F30-74B2-4847-B5F5-75A4E2E3AD9E}" srcOrd="9" destOrd="0" presId="urn:microsoft.com/office/officeart/2005/8/layout/cycle3"/>
+    <dgm:cxn modelId="{0FC1F4CD-4D5E-0B48-AF45-3CEAA55813AF}" type="presParOf" srcId="{CE83B688-DEF8-2646-90E9-C08F8A3E70E7}" destId="{CAAC65CA-09FF-B642-B0C8-D19A7DEB4844}" srcOrd="10" destOrd="0" presId="urn:microsoft.com/office/officeart/2005/8/layout/cycle3"/>
   </dgm:cxnLst>
   <dgm:bg/>
   <dgm:whole/>
@@ -2603,7 +3411,7 @@
               <a:latin typeface="Hiragino Sans W4" panose="020B0400000000000000" pitchFamily="34" charset="-128"/>
               <a:ea typeface="Hiragino Sans W4" panose="020B0400000000000000" pitchFamily="34" charset="-128"/>
             </a:rPr>
-            <a:t>通貨</a:t>
+            <a:t>自国通貨</a:t>
           </a:r>
           <a:r>
             <a:rPr kumimoji="1" lang="ja-JP" altLang="en-US" b="1">
@@ -2859,7 +3667,7 @@
               <a:latin typeface="Hiragino Sans W4" panose="020B0400000000000000" pitchFamily="34" charset="-128"/>
               <a:ea typeface="Hiragino Sans W4" panose="020B0400000000000000" pitchFamily="34" charset="-128"/>
             </a:rPr>
-            <a:t>通貨</a:t>
+            <a:t>自国通貨</a:t>
           </a:r>
           <a:r>
             <a:rPr kumimoji="1" lang="ja-JP" altLang="en-US" b="1">
@@ -2988,6 +3796,806 @@
     <dgm:cxn modelId="{3D8EFCEA-529F-D64D-AB6E-93C194A0A067}" type="presParOf" srcId="{CE83B688-DEF8-2646-90E9-C08F8A3E70E7}" destId="{1DF87B89-7439-B148-B088-80277B1BDDD3}" srcOrd="4" destOrd="0" presId="urn:microsoft.com/office/officeart/2005/8/layout/cycle3"/>
     <dgm:cxn modelId="{BC921CB3-193E-244B-8953-C9FB142FA41F}" type="presParOf" srcId="{CE83B688-DEF8-2646-90E9-C08F8A3E70E7}" destId="{93260571-C263-5C47-A419-401F437055EE}" srcOrd="5" destOrd="0" presId="urn:microsoft.com/office/officeart/2005/8/layout/cycle3"/>
     <dgm:cxn modelId="{748B3F98-CE36-0B46-9ABF-1E9069495B16}" type="presParOf" srcId="{CE83B688-DEF8-2646-90E9-C08F8A3E70E7}" destId="{5A043805-F757-CF4A-9485-BE4798BC4994}" srcOrd="6" destOrd="0" presId="urn:microsoft.com/office/officeart/2005/8/layout/cycle3"/>
+  </dgm:cxnLst>
+  <dgm:bg/>
+  <dgm:whole/>
+  <dgm:extLst>
+    <a:ext uri="http://schemas.microsoft.com/office/drawing/2008/diagram">
+      <dsp:dataModelExt xmlns:dsp="http://schemas.microsoft.com/office/drawing/2008/diagram" relId="rId6" minVer="http://schemas.openxmlformats.org/drawingml/2006/diagram"/>
+    </a:ext>
+  </dgm:extLst>
+</dgm:dataModel>
+</file>
+
+<file path=ppt/diagrams/data3.xml><?xml version="1.0" encoding="utf-8"?>
+<dgm:dataModel xmlns:dgm="http://schemas.openxmlformats.org/drawingml/2006/diagram" xmlns:a="http://schemas.openxmlformats.org/drawingml/2006/main">
+  <dgm:ptLst>
+    <dgm:pt modelId="{056D782B-3AE9-6341-8054-2A504A814F31}" type="doc">
+      <dgm:prSet loTypeId="urn:microsoft.com/office/officeart/2005/8/layout/cycle3" loCatId="" qsTypeId="urn:microsoft.com/office/officeart/2005/8/quickstyle/simple1" qsCatId="simple" csTypeId="urn:microsoft.com/office/officeart/2005/8/colors/accent0_1" csCatId="mainScheme" phldr="1"/>
+      <dgm:spPr/>
+      <dgm:t>
+        <a:bodyPr/>
+        <a:lstStyle/>
+        <a:p>
+          <a:endParaRPr kumimoji="1" lang="ja-JP" altLang="en-US"/>
+        </a:p>
+      </dgm:t>
+    </dgm:pt>
+    <dgm:pt modelId="{409F7A24-5637-5243-801D-289994206447}">
+      <dgm:prSet phldrT="[テキスト]"/>
+      <dgm:spPr>
+        <a:ln w="12700"/>
+      </dgm:spPr>
+      <dgm:t>
+        <a:bodyPr/>
+        <a:lstStyle/>
+        <a:p>
+          <a:r>
+            <a:rPr kumimoji="1" lang="ja-JP" altLang="en-US">
+              <a:latin typeface="Hiragino Sans W4" panose="020B0400000000000000" pitchFamily="34" charset="-128"/>
+              <a:ea typeface="Hiragino Sans W4" panose="020B0400000000000000" pitchFamily="34" charset="-128"/>
+            </a:rPr>
+            <a:t>貿易</a:t>
+          </a:r>
+          <a:r>
+            <a:rPr kumimoji="1" lang="ja-JP" altLang="en-US" b="1">
+              <a:latin typeface="Hiragino Sans W4" panose="020B0400000000000000" pitchFamily="34" charset="-128"/>
+              <a:ea typeface="Hiragino Sans W4" panose="020B0400000000000000" pitchFamily="34" charset="-128"/>
+            </a:rPr>
+            <a:t>赤字</a:t>
+          </a:r>
+        </a:p>
+      </dgm:t>
+    </dgm:pt>
+    <dgm:pt modelId="{2CE23994-248B-7D40-BED2-A70B6FE371A8}" type="parTrans" cxnId="{577D96AE-07E1-BE47-813A-2058F110D0DD}">
+      <dgm:prSet/>
+      <dgm:spPr/>
+      <dgm:t>
+        <a:bodyPr/>
+        <a:lstStyle/>
+        <a:p>
+          <a:endParaRPr kumimoji="1" lang="ja-JP" altLang="en-US">
+            <a:latin typeface="Hiragino Sans W4" panose="020B0400000000000000" pitchFamily="34" charset="-128"/>
+            <a:ea typeface="Hiragino Sans W4" panose="020B0400000000000000" pitchFamily="34" charset="-128"/>
+          </a:endParaRPr>
+        </a:p>
+      </dgm:t>
+    </dgm:pt>
+    <dgm:pt modelId="{7224B14F-880B-634F-A526-C4E35D50D1E3}" type="sibTrans" cxnId="{577D96AE-07E1-BE47-813A-2058F110D0DD}">
+      <dgm:prSet/>
+      <dgm:spPr/>
+      <dgm:t>
+        <a:bodyPr/>
+        <a:lstStyle/>
+        <a:p>
+          <a:endParaRPr kumimoji="1" lang="ja-JP" altLang="en-US">
+            <a:latin typeface="Hiragino Sans W4" panose="020B0400000000000000" pitchFamily="34" charset="-128"/>
+            <a:ea typeface="Hiragino Sans W4" panose="020B0400000000000000" pitchFamily="34" charset="-128"/>
+          </a:endParaRPr>
+        </a:p>
+      </dgm:t>
+    </dgm:pt>
+    <dgm:pt modelId="{16418477-AF6E-7849-9D54-63386E430A36}">
+      <dgm:prSet phldrT="[テキスト]"/>
+      <dgm:spPr>
+        <a:ln w="12700"/>
+      </dgm:spPr>
+      <dgm:t>
+        <a:bodyPr/>
+        <a:lstStyle/>
+        <a:p>
+          <a:r>
+            <a:rPr kumimoji="1" lang="ja-JP" altLang="en-US">
+              <a:latin typeface="Hiragino Sans W4" panose="020B0400000000000000" pitchFamily="34" charset="-128"/>
+              <a:ea typeface="Hiragino Sans W4" panose="020B0400000000000000" pitchFamily="34" charset="-128"/>
+            </a:rPr>
+            <a:t>自国通貨</a:t>
+          </a:r>
+          <a:r>
+            <a:rPr kumimoji="1" lang="ja-JP" altLang="en-US" b="1">
+              <a:latin typeface="Hiragino Sans W4" panose="020B0400000000000000" pitchFamily="34" charset="-128"/>
+              <a:ea typeface="Hiragino Sans W4" panose="020B0400000000000000" pitchFamily="34" charset="-128"/>
+            </a:rPr>
+            <a:t>減価</a:t>
+          </a:r>
+        </a:p>
+      </dgm:t>
+    </dgm:pt>
+    <dgm:pt modelId="{9C786919-0F2A-6E4A-AEDF-D6709759B767}" type="parTrans" cxnId="{5B2D995C-4229-074D-A910-AF2E78F79A75}">
+      <dgm:prSet/>
+      <dgm:spPr/>
+      <dgm:t>
+        <a:bodyPr/>
+        <a:lstStyle/>
+        <a:p>
+          <a:endParaRPr kumimoji="1" lang="ja-JP" altLang="en-US">
+            <a:latin typeface="Hiragino Sans W4" panose="020B0400000000000000" pitchFamily="34" charset="-128"/>
+            <a:ea typeface="Hiragino Sans W4" panose="020B0400000000000000" pitchFamily="34" charset="-128"/>
+          </a:endParaRPr>
+        </a:p>
+      </dgm:t>
+    </dgm:pt>
+    <dgm:pt modelId="{E53BBC97-B433-8C4B-B689-19334FF5366E}" type="sibTrans" cxnId="{5B2D995C-4229-074D-A910-AF2E78F79A75}">
+      <dgm:prSet/>
+      <dgm:spPr/>
+      <dgm:t>
+        <a:bodyPr/>
+        <a:lstStyle/>
+        <a:p>
+          <a:endParaRPr kumimoji="1" lang="ja-JP" altLang="en-US">
+            <a:latin typeface="Hiragino Sans W4" panose="020B0400000000000000" pitchFamily="34" charset="-128"/>
+            <a:ea typeface="Hiragino Sans W4" panose="020B0400000000000000" pitchFamily="34" charset="-128"/>
+          </a:endParaRPr>
+        </a:p>
+      </dgm:t>
+    </dgm:pt>
+    <dgm:pt modelId="{D56B6BE1-E4D0-394D-A3D2-CB5AA4024D55}">
+      <dgm:prSet phldrT="[テキスト]"/>
+      <dgm:spPr>
+        <a:ln w="12700"/>
+      </dgm:spPr>
+      <dgm:t>
+        <a:bodyPr/>
+        <a:lstStyle/>
+        <a:p>
+          <a:r>
+            <a:rPr kumimoji="1" lang="ja-JP" altLang="en-US">
+              <a:latin typeface="Hiragino Sans W4" panose="020B0400000000000000" pitchFamily="34" charset="-128"/>
+              <a:ea typeface="Hiragino Sans W4" panose="020B0400000000000000" pitchFamily="34" charset="-128"/>
+            </a:rPr>
+            <a:t>輸出</a:t>
+          </a:r>
+          <a:r>
+            <a:rPr kumimoji="1" lang="ja-JP" altLang="en-US" b="1">
+              <a:latin typeface="Hiragino Sans W4" panose="020B0400000000000000" pitchFamily="34" charset="-128"/>
+              <a:ea typeface="Hiragino Sans W4" panose="020B0400000000000000" pitchFamily="34" charset="-128"/>
+            </a:rPr>
+            <a:t>増加</a:t>
+          </a:r>
+          <a:br>
+            <a:rPr kumimoji="1" lang="en-US" altLang="ja-JP" dirty="0">
+              <a:latin typeface="Hiragino Sans W4" panose="020B0400000000000000" pitchFamily="34" charset="-128"/>
+              <a:ea typeface="Hiragino Sans W4" panose="020B0400000000000000" pitchFamily="34" charset="-128"/>
+            </a:rPr>
+          </a:br>
+          <a:r>
+            <a:rPr kumimoji="1" lang="ja-JP" altLang="en-US">
+              <a:latin typeface="Hiragino Sans W4" panose="020B0400000000000000" pitchFamily="34" charset="-128"/>
+              <a:ea typeface="Hiragino Sans W4" panose="020B0400000000000000" pitchFamily="34" charset="-128"/>
+            </a:rPr>
+            <a:t>輸入</a:t>
+          </a:r>
+          <a:r>
+            <a:rPr kumimoji="1" lang="ja-JP" altLang="en-US" b="1">
+              <a:latin typeface="Hiragino Sans W4" panose="020B0400000000000000" pitchFamily="34" charset="-128"/>
+              <a:ea typeface="Hiragino Sans W4" panose="020B0400000000000000" pitchFamily="34" charset="-128"/>
+            </a:rPr>
+            <a:t>減少</a:t>
+          </a:r>
+        </a:p>
+      </dgm:t>
+    </dgm:pt>
+    <dgm:pt modelId="{659AC1EE-6628-824A-B823-52F387E01033}" type="parTrans" cxnId="{9D35A697-CD78-E84D-ACD4-57979380DB8E}">
+      <dgm:prSet/>
+      <dgm:spPr/>
+      <dgm:t>
+        <a:bodyPr/>
+        <a:lstStyle/>
+        <a:p>
+          <a:endParaRPr kumimoji="1" lang="ja-JP" altLang="en-US">
+            <a:latin typeface="Hiragino Sans W4" panose="020B0400000000000000" pitchFamily="34" charset="-128"/>
+            <a:ea typeface="Hiragino Sans W4" panose="020B0400000000000000" pitchFamily="34" charset="-128"/>
+          </a:endParaRPr>
+        </a:p>
+      </dgm:t>
+    </dgm:pt>
+    <dgm:pt modelId="{486BE965-D079-354A-8A11-71412DC2A78D}" type="sibTrans" cxnId="{9D35A697-CD78-E84D-ACD4-57979380DB8E}">
+      <dgm:prSet/>
+      <dgm:spPr/>
+      <dgm:t>
+        <a:bodyPr/>
+        <a:lstStyle/>
+        <a:p>
+          <a:endParaRPr kumimoji="1" lang="ja-JP" altLang="en-US">
+            <a:latin typeface="Hiragino Sans W4" panose="020B0400000000000000" pitchFamily="34" charset="-128"/>
+            <a:ea typeface="Hiragino Sans W4" panose="020B0400000000000000" pitchFamily="34" charset="-128"/>
+          </a:endParaRPr>
+        </a:p>
+      </dgm:t>
+    </dgm:pt>
+    <dgm:pt modelId="{4326A752-E400-4E49-AD2E-BF0AD97A978D}">
+      <dgm:prSet phldrT="[テキスト]"/>
+      <dgm:spPr>
+        <a:ln w="12700"/>
+      </dgm:spPr>
+      <dgm:t>
+        <a:bodyPr/>
+        <a:lstStyle/>
+        <a:p>
+          <a:r>
+            <a:rPr kumimoji="1" lang="ja-JP" altLang="en-US">
+              <a:latin typeface="Hiragino Sans W4" panose="020B0400000000000000" pitchFamily="34" charset="-128"/>
+              <a:ea typeface="Hiragino Sans W4" panose="020B0400000000000000" pitchFamily="34" charset="-128"/>
+            </a:rPr>
+            <a:t>貿易</a:t>
+          </a:r>
+          <a:r>
+            <a:rPr kumimoji="1" lang="ja-JP" altLang="en-US" b="1">
+              <a:latin typeface="Hiragino Sans W4" panose="020B0400000000000000" pitchFamily="34" charset="-128"/>
+              <a:ea typeface="Hiragino Sans W4" panose="020B0400000000000000" pitchFamily="34" charset="-128"/>
+            </a:rPr>
+            <a:t>黒字</a:t>
+          </a:r>
+        </a:p>
+      </dgm:t>
+    </dgm:pt>
+    <dgm:pt modelId="{8C968CE8-34FF-894B-AA65-CFAA90D070D2}" type="parTrans" cxnId="{6C30B45B-8310-254F-9AAE-B9AD3AED63A7}">
+      <dgm:prSet/>
+      <dgm:spPr/>
+      <dgm:t>
+        <a:bodyPr/>
+        <a:lstStyle/>
+        <a:p>
+          <a:endParaRPr kumimoji="1" lang="ja-JP" altLang="en-US">
+            <a:latin typeface="Hiragino Sans W4" panose="020B0400000000000000" pitchFamily="34" charset="-128"/>
+            <a:ea typeface="Hiragino Sans W4" panose="020B0400000000000000" pitchFamily="34" charset="-128"/>
+          </a:endParaRPr>
+        </a:p>
+      </dgm:t>
+    </dgm:pt>
+    <dgm:pt modelId="{2D7F8951-F8BF-6143-9646-1A76370E1C63}" type="sibTrans" cxnId="{6C30B45B-8310-254F-9AAE-B9AD3AED63A7}">
+      <dgm:prSet/>
+      <dgm:spPr/>
+      <dgm:t>
+        <a:bodyPr/>
+        <a:lstStyle/>
+        <a:p>
+          <a:endParaRPr kumimoji="1" lang="ja-JP" altLang="en-US">
+            <a:latin typeface="Hiragino Sans W4" panose="020B0400000000000000" pitchFamily="34" charset="-128"/>
+            <a:ea typeface="Hiragino Sans W4" panose="020B0400000000000000" pitchFamily="34" charset="-128"/>
+          </a:endParaRPr>
+        </a:p>
+      </dgm:t>
+    </dgm:pt>
+    <dgm:pt modelId="{3C65A1CA-C348-8A46-854D-CB8C83D8A112}">
+      <dgm:prSet/>
+      <dgm:spPr>
+        <a:ln w="12700"/>
+      </dgm:spPr>
+      <dgm:t>
+        <a:bodyPr/>
+        <a:lstStyle/>
+        <a:p>
+          <a:r>
+            <a:rPr kumimoji="1" lang="ja-JP" altLang="en-US">
+              <a:latin typeface="Hiragino Sans W4" panose="020B0400000000000000" pitchFamily="34" charset="-128"/>
+              <a:ea typeface="Hiragino Sans W4" panose="020B0400000000000000" pitchFamily="34" charset="-128"/>
+            </a:rPr>
+            <a:t>輸出</a:t>
+          </a:r>
+          <a:r>
+            <a:rPr kumimoji="1" lang="ja-JP" altLang="en-US" b="1">
+              <a:latin typeface="Hiragino Sans W4" panose="020B0400000000000000" pitchFamily="34" charset="-128"/>
+              <a:ea typeface="Hiragino Sans W4" panose="020B0400000000000000" pitchFamily="34" charset="-128"/>
+            </a:rPr>
+            <a:t>減少</a:t>
+          </a:r>
+          <a:br>
+            <a:rPr kumimoji="1" lang="en-US" altLang="ja-JP" dirty="0">
+              <a:latin typeface="Hiragino Sans W4" panose="020B0400000000000000" pitchFamily="34" charset="-128"/>
+              <a:ea typeface="Hiragino Sans W4" panose="020B0400000000000000" pitchFamily="34" charset="-128"/>
+            </a:rPr>
+          </a:br>
+          <a:r>
+            <a:rPr kumimoji="1" lang="ja-JP" altLang="en-US">
+              <a:latin typeface="Hiragino Sans W4" panose="020B0400000000000000" pitchFamily="34" charset="-128"/>
+              <a:ea typeface="Hiragino Sans W4" panose="020B0400000000000000" pitchFamily="34" charset="-128"/>
+            </a:rPr>
+            <a:t>輸入</a:t>
+          </a:r>
+          <a:r>
+            <a:rPr kumimoji="1" lang="ja-JP" altLang="en-US" b="1">
+              <a:latin typeface="Hiragino Sans W4" panose="020B0400000000000000" pitchFamily="34" charset="-128"/>
+              <a:ea typeface="Hiragino Sans W4" panose="020B0400000000000000" pitchFamily="34" charset="-128"/>
+            </a:rPr>
+            <a:t>増加</a:t>
+          </a:r>
+        </a:p>
+      </dgm:t>
+    </dgm:pt>
+    <dgm:pt modelId="{DDA734B1-D250-FF4A-9EFE-180B0BD9CCAF}" type="parTrans" cxnId="{E7FF6F82-93E0-D245-A83F-620DB99CE8D3}">
+      <dgm:prSet/>
+      <dgm:spPr/>
+      <dgm:t>
+        <a:bodyPr/>
+        <a:lstStyle/>
+        <a:p>
+          <a:endParaRPr kumimoji="1" lang="ja-JP" altLang="en-US">
+            <a:latin typeface="Hiragino Sans W4" panose="020B0400000000000000" pitchFamily="34" charset="-128"/>
+            <a:ea typeface="Hiragino Sans W4" panose="020B0400000000000000" pitchFamily="34" charset="-128"/>
+          </a:endParaRPr>
+        </a:p>
+      </dgm:t>
+    </dgm:pt>
+    <dgm:pt modelId="{2F07F163-A262-EB47-B21A-0E2F0E12D06A}" type="sibTrans" cxnId="{E7FF6F82-93E0-D245-A83F-620DB99CE8D3}">
+      <dgm:prSet/>
+      <dgm:spPr/>
+      <dgm:t>
+        <a:bodyPr/>
+        <a:lstStyle/>
+        <a:p>
+          <a:endParaRPr kumimoji="1" lang="ja-JP" altLang="en-US">
+            <a:latin typeface="Hiragino Sans W4" panose="020B0400000000000000" pitchFamily="34" charset="-128"/>
+            <a:ea typeface="Hiragino Sans W4" panose="020B0400000000000000" pitchFamily="34" charset="-128"/>
+          </a:endParaRPr>
+        </a:p>
+      </dgm:t>
+    </dgm:pt>
+    <dgm:pt modelId="{D944F075-B569-C445-9131-D0B813F81D95}">
+      <dgm:prSet phldrT="[テキスト]"/>
+      <dgm:spPr>
+        <a:ln w="12700"/>
+      </dgm:spPr>
+      <dgm:t>
+        <a:bodyPr/>
+        <a:lstStyle/>
+        <a:p>
+          <a:r>
+            <a:rPr kumimoji="1" lang="ja-JP" altLang="en-US">
+              <a:latin typeface="Hiragino Sans W4" panose="020B0400000000000000" pitchFamily="34" charset="-128"/>
+              <a:ea typeface="Hiragino Sans W4" panose="020B0400000000000000" pitchFamily="34" charset="-128"/>
+            </a:rPr>
+            <a:t>自国通貨</a:t>
+          </a:r>
+          <a:r>
+            <a:rPr kumimoji="1" lang="ja-JP" altLang="en-US" b="1">
+              <a:latin typeface="Hiragino Sans W4" panose="020B0400000000000000" pitchFamily="34" charset="-128"/>
+              <a:ea typeface="Hiragino Sans W4" panose="020B0400000000000000" pitchFamily="34" charset="-128"/>
+            </a:rPr>
+            <a:t>増価</a:t>
+          </a:r>
+        </a:p>
+      </dgm:t>
+    </dgm:pt>
+    <dgm:pt modelId="{2AB657AE-DE05-6642-A47F-D076DBCFE7BC}" type="parTrans" cxnId="{2A45D999-46E5-E141-A889-E7E6724A1BEE}">
+      <dgm:prSet/>
+      <dgm:spPr/>
+      <dgm:t>
+        <a:bodyPr/>
+        <a:lstStyle/>
+        <a:p>
+          <a:endParaRPr kumimoji="1" lang="ja-JP" altLang="en-US">
+            <a:latin typeface="Hiragino Sans W4" panose="020B0400000000000000" pitchFamily="34" charset="-128"/>
+            <a:ea typeface="Hiragino Sans W4" panose="020B0400000000000000" pitchFamily="34" charset="-128"/>
+          </a:endParaRPr>
+        </a:p>
+      </dgm:t>
+    </dgm:pt>
+    <dgm:pt modelId="{86A5A618-D0E0-BF4D-8C48-0331F40F0028}" type="sibTrans" cxnId="{2A45D999-46E5-E141-A889-E7E6724A1BEE}">
+      <dgm:prSet/>
+      <dgm:spPr/>
+      <dgm:t>
+        <a:bodyPr/>
+        <a:lstStyle/>
+        <a:p>
+          <a:endParaRPr kumimoji="1" lang="ja-JP" altLang="en-US">
+            <a:latin typeface="Hiragino Sans W4" panose="020B0400000000000000" pitchFamily="34" charset="-128"/>
+            <a:ea typeface="Hiragino Sans W4" panose="020B0400000000000000" pitchFamily="34" charset="-128"/>
+          </a:endParaRPr>
+        </a:p>
+      </dgm:t>
+    </dgm:pt>
+    <dgm:pt modelId="{150E95FE-AE33-A642-99D7-7C8C0DE7CD31}">
+      <dgm:prSet phldrT="[テキスト]"/>
+      <dgm:spPr/>
+      <dgm:t>
+        <a:bodyPr/>
+        <a:lstStyle/>
+        <a:p>
+          <a:r>
+            <a:rPr kumimoji="1" lang="ja-JP" altLang="en-US">
+              <a:latin typeface="Hiragino Sans W4" panose="020B0400000000000000" pitchFamily="34" charset="-128"/>
+              <a:ea typeface="Hiragino Sans W4" panose="020B0400000000000000" pitchFamily="34" charset="-128"/>
+            </a:rPr>
+            <a:t>為替介入</a:t>
+          </a:r>
+          <a:br>
+            <a:rPr kumimoji="1" lang="en-US" altLang="ja-JP" dirty="0">
+              <a:latin typeface="Hiragino Sans W4" panose="020B0400000000000000" pitchFamily="34" charset="-128"/>
+              <a:ea typeface="Hiragino Sans W4" panose="020B0400000000000000" pitchFamily="34" charset="-128"/>
+            </a:rPr>
+          </a:br>
+          <a:r>
+            <a:rPr kumimoji="1" lang="ja-JP" altLang="en-US">
+              <a:latin typeface="Hiragino Sans W4" panose="020B0400000000000000" pitchFamily="34" charset="-128"/>
+              <a:ea typeface="Hiragino Sans W4" panose="020B0400000000000000" pitchFamily="34" charset="-128"/>
+            </a:rPr>
+            <a:t>（自国通貨</a:t>
+          </a:r>
+          <a:r>
+            <a:rPr kumimoji="1" lang="ja-JP" altLang="en-US" b="1">
+              <a:latin typeface="Hiragino Sans W4" panose="020B0400000000000000" pitchFamily="34" charset="-128"/>
+              <a:ea typeface="Hiragino Sans W4" panose="020B0400000000000000" pitchFamily="34" charset="-128"/>
+            </a:rPr>
+            <a:t>買い</a:t>
+          </a:r>
+          <a:r>
+            <a:rPr kumimoji="1" lang="ja-JP" altLang="en-US">
+              <a:latin typeface="Hiragino Sans W4" panose="020B0400000000000000" pitchFamily="34" charset="-128"/>
+              <a:ea typeface="Hiragino Sans W4" panose="020B0400000000000000" pitchFamily="34" charset="-128"/>
+            </a:rPr>
+            <a:t>）</a:t>
+          </a:r>
+        </a:p>
+      </dgm:t>
+    </dgm:pt>
+    <dgm:pt modelId="{EC6909A9-C511-E145-A8C9-66B44B73CDF6}" type="parTrans" cxnId="{EC08BC8B-D63D-8241-9364-9CEC88E831D0}">
+      <dgm:prSet/>
+      <dgm:spPr/>
+      <dgm:t>
+        <a:bodyPr/>
+        <a:lstStyle/>
+        <a:p>
+          <a:endParaRPr kumimoji="1" lang="ja-JP" altLang="en-US">
+            <a:latin typeface="Hiragino Sans W4" panose="020B0400000000000000" pitchFamily="34" charset="-128"/>
+            <a:ea typeface="Hiragino Sans W4" panose="020B0400000000000000" pitchFamily="34" charset="-128"/>
+          </a:endParaRPr>
+        </a:p>
+      </dgm:t>
+    </dgm:pt>
+    <dgm:pt modelId="{7885C853-F0A8-9945-BAF3-922D2F739A61}" type="sibTrans" cxnId="{EC08BC8B-D63D-8241-9364-9CEC88E831D0}">
+      <dgm:prSet/>
+      <dgm:spPr/>
+      <dgm:t>
+        <a:bodyPr/>
+        <a:lstStyle/>
+        <a:p>
+          <a:endParaRPr kumimoji="1" lang="ja-JP" altLang="en-US">
+            <a:latin typeface="Hiragino Sans W4" panose="020B0400000000000000" pitchFamily="34" charset="-128"/>
+            <a:ea typeface="Hiragino Sans W4" panose="020B0400000000000000" pitchFamily="34" charset="-128"/>
+          </a:endParaRPr>
+        </a:p>
+      </dgm:t>
+    </dgm:pt>
+    <dgm:pt modelId="{F5B71743-8B40-BD49-A0B5-0BAA486D6309}">
+      <dgm:prSet phldrT="[テキスト]"/>
+      <dgm:spPr/>
+      <dgm:t>
+        <a:bodyPr/>
+        <a:lstStyle/>
+        <a:p>
+          <a:r>
+            <a:rPr kumimoji="1" lang="ja-JP" altLang="en-US">
+              <a:latin typeface="Hiragino Sans W4" panose="020B0400000000000000" pitchFamily="34" charset="-128"/>
+              <a:ea typeface="Hiragino Sans W4" panose="020B0400000000000000" pitchFamily="34" charset="-128"/>
+            </a:rPr>
+            <a:t>物価安</a:t>
+          </a:r>
+          <a:br>
+            <a:rPr kumimoji="1" lang="en-US" altLang="ja-JP" dirty="0">
+              <a:latin typeface="Hiragino Sans W4" panose="020B0400000000000000" pitchFamily="34" charset="-128"/>
+              <a:ea typeface="Hiragino Sans W4" panose="020B0400000000000000" pitchFamily="34" charset="-128"/>
+            </a:rPr>
+          </a:br>
+          <a:r>
+            <a:rPr kumimoji="1" lang="ja-JP" altLang="en-US">
+              <a:latin typeface="Hiragino Sans W4" panose="020B0400000000000000" pitchFamily="34" charset="-128"/>
+              <a:ea typeface="Hiragino Sans W4" panose="020B0400000000000000" pitchFamily="34" charset="-128"/>
+            </a:rPr>
+            <a:t>（</a:t>
+          </a:r>
+          <a:r>
+            <a:rPr kumimoji="1" lang="ja-JP" altLang="en-US" b="1">
+              <a:latin typeface="Hiragino Sans W4" panose="020B0400000000000000" pitchFamily="34" charset="-128"/>
+              <a:ea typeface="Hiragino Sans W4" panose="020B0400000000000000" pitchFamily="34" charset="-128"/>
+            </a:rPr>
+            <a:t>デフレ</a:t>
+          </a:r>
+          <a:r>
+            <a:rPr kumimoji="1" lang="ja-JP" altLang="en-US">
+              <a:latin typeface="Hiragino Sans W4" panose="020B0400000000000000" pitchFamily="34" charset="-128"/>
+              <a:ea typeface="Hiragino Sans W4" panose="020B0400000000000000" pitchFamily="34" charset="-128"/>
+            </a:rPr>
+            <a:t>）</a:t>
+          </a:r>
+        </a:p>
+      </dgm:t>
+    </dgm:pt>
+    <dgm:pt modelId="{3F5CF5F6-2BAA-9348-B1C2-A8CF9B5B146F}" type="parTrans" cxnId="{FD3C2709-EEC6-0542-8AAE-2FFA007E9F2F}">
+      <dgm:prSet/>
+      <dgm:spPr/>
+      <dgm:t>
+        <a:bodyPr/>
+        <a:lstStyle/>
+        <a:p>
+          <a:endParaRPr kumimoji="1" lang="ja-JP" altLang="en-US">
+            <a:latin typeface="Hiragino Sans W4" panose="020B0400000000000000" pitchFamily="34" charset="-128"/>
+            <a:ea typeface="Hiragino Sans W4" panose="020B0400000000000000" pitchFamily="34" charset="-128"/>
+          </a:endParaRPr>
+        </a:p>
+      </dgm:t>
+    </dgm:pt>
+    <dgm:pt modelId="{C30DF167-4C29-834B-94C1-D470C6CABABD}" type="sibTrans" cxnId="{FD3C2709-EEC6-0542-8AAE-2FFA007E9F2F}">
+      <dgm:prSet/>
+      <dgm:spPr/>
+      <dgm:t>
+        <a:bodyPr/>
+        <a:lstStyle/>
+        <a:p>
+          <a:endParaRPr kumimoji="1" lang="ja-JP" altLang="en-US">
+            <a:latin typeface="Hiragino Sans W4" panose="020B0400000000000000" pitchFamily="34" charset="-128"/>
+            <a:ea typeface="Hiragino Sans W4" panose="020B0400000000000000" pitchFamily="34" charset="-128"/>
+          </a:endParaRPr>
+        </a:p>
+      </dgm:t>
+    </dgm:pt>
+    <dgm:pt modelId="{BA5ECC91-9983-BD40-962B-0EC72B979C3A}">
+      <dgm:prSet phldrT="[テキスト]"/>
+      <dgm:spPr/>
+      <dgm:t>
+        <a:bodyPr/>
+        <a:lstStyle/>
+        <a:p>
+          <a:r>
+            <a:rPr kumimoji="1" lang="ja-JP" altLang="en-US">
+              <a:latin typeface="Hiragino Sans W4" panose="020B0400000000000000" pitchFamily="34" charset="-128"/>
+              <a:ea typeface="Hiragino Sans W4" panose="020B0400000000000000" pitchFamily="34" charset="-128"/>
+            </a:rPr>
+            <a:t>為替介入</a:t>
+          </a:r>
+          <a:br>
+            <a:rPr kumimoji="1" lang="en-US" altLang="ja-JP" dirty="0">
+              <a:latin typeface="Hiragino Sans W4" panose="020B0400000000000000" pitchFamily="34" charset="-128"/>
+              <a:ea typeface="Hiragino Sans W4" panose="020B0400000000000000" pitchFamily="34" charset="-128"/>
+            </a:rPr>
+          </a:br>
+          <a:r>
+            <a:rPr kumimoji="1" lang="ja-JP" altLang="en-US">
+              <a:latin typeface="Hiragino Sans W4" panose="020B0400000000000000" pitchFamily="34" charset="-128"/>
+              <a:ea typeface="Hiragino Sans W4" panose="020B0400000000000000" pitchFamily="34" charset="-128"/>
+            </a:rPr>
+            <a:t>（自国通貨</a:t>
+          </a:r>
+          <a:r>
+            <a:rPr kumimoji="1" lang="ja-JP" altLang="en-US" b="1">
+              <a:latin typeface="Hiragino Sans W4" panose="020B0400000000000000" pitchFamily="34" charset="-128"/>
+              <a:ea typeface="Hiragino Sans W4" panose="020B0400000000000000" pitchFamily="34" charset="-128"/>
+            </a:rPr>
+            <a:t>売り</a:t>
+          </a:r>
+          <a:r>
+            <a:rPr kumimoji="1" lang="ja-JP" altLang="en-US">
+              <a:latin typeface="Hiragino Sans W4" panose="020B0400000000000000" pitchFamily="34" charset="-128"/>
+              <a:ea typeface="Hiragino Sans W4" panose="020B0400000000000000" pitchFamily="34" charset="-128"/>
+            </a:rPr>
+            <a:t>）</a:t>
+          </a:r>
+          <a:endParaRPr kumimoji="1" lang="ja-JP" altLang="en-US"/>
+        </a:p>
+      </dgm:t>
+    </dgm:pt>
+    <dgm:pt modelId="{31B340BA-A6FC-3C41-A0C1-D20AD2AF5B4D}" type="parTrans" cxnId="{7B939511-81F2-0F48-82E4-6FCC20198577}">
+      <dgm:prSet/>
+      <dgm:spPr/>
+      <dgm:t>
+        <a:bodyPr/>
+        <a:lstStyle/>
+        <a:p>
+          <a:endParaRPr kumimoji="1" lang="ja-JP" altLang="en-US"/>
+        </a:p>
+      </dgm:t>
+    </dgm:pt>
+    <dgm:pt modelId="{A1913B1A-8632-EF40-983B-9E7FCCBBB500}" type="sibTrans" cxnId="{7B939511-81F2-0F48-82E4-6FCC20198577}">
+      <dgm:prSet/>
+      <dgm:spPr/>
+      <dgm:t>
+        <a:bodyPr/>
+        <a:lstStyle/>
+        <a:p>
+          <a:endParaRPr kumimoji="1" lang="ja-JP" altLang="en-US"/>
+        </a:p>
+      </dgm:t>
+    </dgm:pt>
+    <dgm:pt modelId="{CFB442CC-5F13-104B-A89F-57261D8654A7}">
+      <dgm:prSet phldrT="[テキスト]"/>
+      <dgm:spPr/>
+      <dgm:t>
+        <a:bodyPr/>
+        <a:lstStyle/>
+        <a:p>
+          <a:r>
+            <a:rPr kumimoji="1" lang="ja-JP" altLang="en-US">
+              <a:latin typeface="Hiragino Sans W4" panose="020B0400000000000000" pitchFamily="34" charset="-128"/>
+              <a:ea typeface="Hiragino Sans W4" panose="020B0400000000000000" pitchFamily="34" charset="-128"/>
+            </a:rPr>
+            <a:t>物価安</a:t>
+          </a:r>
+          <a:br>
+            <a:rPr kumimoji="1" lang="en-US" altLang="ja-JP" dirty="0">
+              <a:latin typeface="Hiragino Sans W4" panose="020B0400000000000000" pitchFamily="34" charset="-128"/>
+              <a:ea typeface="Hiragino Sans W4" panose="020B0400000000000000" pitchFamily="34" charset="-128"/>
+            </a:rPr>
+          </a:br>
+          <a:r>
+            <a:rPr kumimoji="1" lang="ja-JP" altLang="en-US">
+              <a:latin typeface="Hiragino Sans W4" panose="020B0400000000000000" pitchFamily="34" charset="-128"/>
+              <a:ea typeface="Hiragino Sans W4" panose="020B0400000000000000" pitchFamily="34" charset="-128"/>
+            </a:rPr>
+            <a:t>（</a:t>
+          </a:r>
+          <a:r>
+            <a:rPr kumimoji="1" lang="ja-JP" altLang="en-US" b="1">
+              <a:latin typeface="Hiragino Sans W4" panose="020B0400000000000000" pitchFamily="34" charset="-128"/>
+              <a:ea typeface="Hiragino Sans W4" panose="020B0400000000000000" pitchFamily="34" charset="-128"/>
+            </a:rPr>
+            <a:t>インフレ</a:t>
+          </a:r>
+          <a:r>
+            <a:rPr kumimoji="1" lang="ja-JP" altLang="en-US">
+              <a:latin typeface="Hiragino Sans W4" panose="020B0400000000000000" pitchFamily="34" charset="-128"/>
+              <a:ea typeface="Hiragino Sans W4" panose="020B0400000000000000" pitchFamily="34" charset="-128"/>
+            </a:rPr>
+            <a:t>）</a:t>
+          </a:r>
+          <a:endParaRPr kumimoji="1" lang="ja-JP" altLang="en-US"/>
+        </a:p>
+      </dgm:t>
+    </dgm:pt>
+    <dgm:pt modelId="{562C3188-BA85-BC45-BC2B-FE8F621CBFE3}" type="parTrans" cxnId="{0545382B-1D99-0A49-9317-63E10D0BD75C}">
+      <dgm:prSet/>
+      <dgm:spPr/>
+      <dgm:t>
+        <a:bodyPr/>
+        <a:lstStyle/>
+        <a:p>
+          <a:endParaRPr kumimoji="1" lang="ja-JP" altLang="en-US"/>
+        </a:p>
+      </dgm:t>
+    </dgm:pt>
+    <dgm:pt modelId="{4E6A1028-A3F1-6246-BE36-12916BB8439A}" type="sibTrans" cxnId="{0545382B-1D99-0A49-9317-63E10D0BD75C}">
+      <dgm:prSet/>
+      <dgm:spPr/>
+      <dgm:t>
+        <a:bodyPr/>
+        <a:lstStyle/>
+        <a:p>
+          <a:endParaRPr kumimoji="1" lang="ja-JP" altLang="en-US"/>
+        </a:p>
+      </dgm:t>
+    </dgm:pt>
+    <dgm:pt modelId="{CA38CAAF-4126-F842-9139-795E9B492809}" type="pres">
+      <dgm:prSet presAssocID="{056D782B-3AE9-6341-8054-2A504A814F31}" presName="Name0" presStyleCnt="0">
+        <dgm:presLayoutVars>
+          <dgm:dir/>
+          <dgm:resizeHandles val="exact"/>
+        </dgm:presLayoutVars>
+      </dgm:prSet>
+      <dgm:spPr/>
+    </dgm:pt>
+    <dgm:pt modelId="{CE83B688-DEF8-2646-90E9-C08F8A3E70E7}" type="pres">
+      <dgm:prSet presAssocID="{056D782B-3AE9-6341-8054-2A504A814F31}" presName="cycle" presStyleCnt="0"/>
+      <dgm:spPr/>
+    </dgm:pt>
+    <dgm:pt modelId="{D94B10FC-86A6-FF4A-A1B2-1E5A15A9B8EC}" type="pres">
+      <dgm:prSet presAssocID="{409F7A24-5637-5243-801D-289994206447}" presName="nodeFirstNode" presStyleLbl="node1" presStyleIdx="0" presStyleCnt="10">
+        <dgm:presLayoutVars>
+          <dgm:bulletEnabled val="1"/>
+        </dgm:presLayoutVars>
+      </dgm:prSet>
+      <dgm:spPr/>
+    </dgm:pt>
+    <dgm:pt modelId="{19409FAB-9ED0-024C-9BD3-FA3940064CB5}" type="pres">
+      <dgm:prSet presAssocID="{7224B14F-880B-634F-A526-C4E35D50D1E3}" presName="sibTransFirstNode" presStyleLbl="bgShp" presStyleIdx="0" presStyleCnt="1"/>
+      <dgm:spPr/>
+    </dgm:pt>
+    <dgm:pt modelId="{A6D2C092-8BDD-184F-B60A-95002E1C617A}" type="pres">
+      <dgm:prSet presAssocID="{16418477-AF6E-7849-9D54-63386E430A36}" presName="nodeFollowingNodes" presStyleLbl="node1" presStyleIdx="1" presStyleCnt="10">
+        <dgm:presLayoutVars>
+          <dgm:bulletEnabled val="1"/>
+        </dgm:presLayoutVars>
+      </dgm:prSet>
+      <dgm:spPr/>
+    </dgm:pt>
+    <dgm:pt modelId="{A9FA1A01-3B6D-DA4A-956A-7887C3F0F839}" type="pres">
+      <dgm:prSet presAssocID="{150E95FE-AE33-A642-99D7-7C8C0DE7CD31}" presName="nodeFollowingNodes" presStyleLbl="node1" presStyleIdx="2" presStyleCnt="10">
+        <dgm:presLayoutVars>
+          <dgm:bulletEnabled val="1"/>
+        </dgm:presLayoutVars>
+      </dgm:prSet>
+      <dgm:spPr/>
+    </dgm:pt>
+    <dgm:pt modelId="{BEEC44DB-1D2C-5A47-B786-9AAE6963B36A}" type="pres">
+      <dgm:prSet presAssocID="{F5B71743-8B40-BD49-A0B5-0BAA486D6309}" presName="nodeFollowingNodes" presStyleLbl="node1" presStyleIdx="3" presStyleCnt="10">
+        <dgm:presLayoutVars>
+          <dgm:bulletEnabled val="1"/>
+        </dgm:presLayoutVars>
+      </dgm:prSet>
+      <dgm:spPr/>
+    </dgm:pt>
+    <dgm:pt modelId="{659FE536-1F1D-504E-930D-115BE2D22DCB}" type="pres">
+      <dgm:prSet presAssocID="{D56B6BE1-E4D0-394D-A3D2-CB5AA4024D55}" presName="nodeFollowingNodes" presStyleLbl="node1" presStyleIdx="4" presStyleCnt="10">
+        <dgm:presLayoutVars>
+          <dgm:bulletEnabled val="1"/>
+        </dgm:presLayoutVars>
+      </dgm:prSet>
+      <dgm:spPr/>
+    </dgm:pt>
+    <dgm:pt modelId="{1DF87B89-7439-B148-B088-80277B1BDDD3}" type="pres">
+      <dgm:prSet presAssocID="{4326A752-E400-4E49-AD2E-BF0AD97A978D}" presName="nodeFollowingNodes" presStyleLbl="node1" presStyleIdx="5" presStyleCnt="10">
+        <dgm:presLayoutVars>
+          <dgm:bulletEnabled val="1"/>
+        </dgm:presLayoutVars>
+      </dgm:prSet>
+      <dgm:spPr/>
+    </dgm:pt>
+    <dgm:pt modelId="{93260571-C263-5C47-A419-401F437055EE}" type="pres">
+      <dgm:prSet presAssocID="{D944F075-B569-C445-9131-D0B813F81D95}" presName="nodeFollowingNodes" presStyleLbl="node1" presStyleIdx="6" presStyleCnt="10">
+        <dgm:presLayoutVars>
+          <dgm:bulletEnabled val="1"/>
+        </dgm:presLayoutVars>
+      </dgm:prSet>
+      <dgm:spPr/>
+    </dgm:pt>
+    <dgm:pt modelId="{04F4F7BC-8951-3C4E-98FF-8EBAE9FEC36A}" type="pres">
+      <dgm:prSet presAssocID="{BA5ECC91-9983-BD40-962B-0EC72B979C3A}" presName="nodeFollowingNodes" presStyleLbl="node1" presStyleIdx="7" presStyleCnt="10">
+        <dgm:presLayoutVars>
+          <dgm:bulletEnabled val="1"/>
+        </dgm:presLayoutVars>
+      </dgm:prSet>
+      <dgm:spPr/>
+    </dgm:pt>
+    <dgm:pt modelId="{501E3E8F-6299-5846-A6AE-B9980DA69887}" type="pres">
+      <dgm:prSet presAssocID="{CFB442CC-5F13-104B-A89F-57261D8654A7}" presName="nodeFollowingNodes" presStyleLbl="node1" presStyleIdx="8" presStyleCnt="10">
+        <dgm:presLayoutVars>
+          <dgm:bulletEnabled val="1"/>
+        </dgm:presLayoutVars>
+      </dgm:prSet>
+      <dgm:spPr/>
+    </dgm:pt>
+    <dgm:pt modelId="{5A043805-F757-CF4A-9485-BE4798BC4994}" type="pres">
+      <dgm:prSet presAssocID="{3C65A1CA-C348-8A46-854D-CB8C83D8A112}" presName="nodeFollowingNodes" presStyleLbl="node1" presStyleIdx="9" presStyleCnt="10">
+        <dgm:presLayoutVars>
+          <dgm:bulletEnabled val="1"/>
+        </dgm:presLayoutVars>
+      </dgm:prSet>
+      <dgm:spPr/>
+    </dgm:pt>
+  </dgm:ptLst>
+  <dgm:cxnLst>
+    <dgm:cxn modelId="{0D5FF305-F987-7643-B9FF-22AA3736C43E}" type="presOf" srcId="{3C65A1CA-C348-8A46-854D-CB8C83D8A112}" destId="{5A043805-F757-CF4A-9485-BE4798BC4994}" srcOrd="0" destOrd="0" presId="urn:microsoft.com/office/officeart/2005/8/layout/cycle3"/>
+    <dgm:cxn modelId="{FD3C2709-EEC6-0542-8AAE-2FFA007E9F2F}" srcId="{056D782B-3AE9-6341-8054-2A504A814F31}" destId="{F5B71743-8B40-BD49-A0B5-0BAA486D6309}" srcOrd="3" destOrd="0" parTransId="{3F5CF5F6-2BAA-9348-B1C2-A8CF9B5B146F}" sibTransId="{C30DF167-4C29-834B-94C1-D470C6CABABD}"/>
+    <dgm:cxn modelId="{9A6EE50E-8373-9346-A08C-7D4330DF595D}" type="presOf" srcId="{F5B71743-8B40-BD49-A0B5-0BAA486D6309}" destId="{BEEC44DB-1D2C-5A47-B786-9AAE6963B36A}" srcOrd="0" destOrd="0" presId="urn:microsoft.com/office/officeart/2005/8/layout/cycle3"/>
+    <dgm:cxn modelId="{5629BE10-8D91-E246-8BEF-6D9A89F725ED}" type="presOf" srcId="{409F7A24-5637-5243-801D-289994206447}" destId="{D94B10FC-86A6-FF4A-A1B2-1E5A15A9B8EC}" srcOrd="0" destOrd="0" presId="urn:microsoft.com/office/officeart/2005/8/layout/cycle3"/>
+    <dgm:cxn modelId="{7B939511-81F2-0F48-82E4-6FCC20198577}" srcId="{056D782B-3AE9-6341-8054-2A504A814F31}" destId="{BA5ECC91-9983-BD40-962B-0EC72B979C3A}" srcOrd="7" destOrd="0" parTransId="{31B340BA-A6FC-3C41-A0C1-D20AD2AF5B4D}" sibTransId="{A1913B1A-8632-EF40-983B-9E7FCCBBB500}"/>
+    <dgm:cxn modelId="{0545382B-1D99-0A49-9317-63E10D0BD75C}" srcId="{056D782B-3AE9-6341-8054-2A504A814F31}" destId="{CFB442CC-5F13-104B-A89F-57261D8654A7}" srcOrd="8" destOrd="0" parTransId="{562C3188-BA85-BC45-BC2B-FE8F621CBFE3}" sibTransId="{4E6A1028-A3F1-6246-BE36-12916BB8439A}"/>
+    <dgm:cxn modelId="{6C30B45B-8310-254F-9AAE-B9AD3AED63A7}" srcId="{056D782B-3AE9-6341-8054-2A504A814F31}" destId="{4326A752-E400-4E49-AD2E-BF0AD97A978D}" srcOrd="5" destOrd="0" parTransId="{8C968CE8-34FF-894B-AA65-CFAA90D070D2}" sibTransId="{2D7F8951-F8BF-6143-9646-1A76370E1C63}"/>
+    <dgm:cxn modelId="{5B2D995C-4229-074D-A910-AF2E78F79A75}" srcId="{056D782B-3AE9-6341-8054-2A504A814F31}" destId="{16418477-AF6E-7849-9D54-63386E430A36}" srcOrd="1" destOrd="0" parTransId="{9C786919-0F2A-6E4A-AEDF-D6709759B767}" sibTransId="{E53BBC97-B433-8C4B-B689-19334FF5366E}"/>
+    <dgm:cxn modelId="{E540E460-C6D8-2241-9AEE-1DD9407F3DAC}" type="presOf" srcId="{4326A752-E400-4E49-AD2E-BF0AD97A978D}" destId="{1DF87B89-7439-B148-B088-80277B1BDDD3}" srcOrd="0" destOrd="0" presId="urn:microsoft.com/office/officeart/2005/8/layout/cycle3"/>
+    <dgm:cxn modelId="{E7FF6F82-93E0-D245-A83F-620DB99CE8D3}" srcId="{056D782B-3AE9-6341-8054-2A504A814F31}" destId="{3C65A1CA-C348-8A46-854D-CB8C83D8A112}" srcOrd="9" destOrd="0" parTransId="{DDA734B1-D250-FF4A-9EFE-180B0BD9CCAF}" sibTransId="{2F07F163-A262-EB47-B21A-0E2F0E12D06A}"/>
+    <dgm:cxn modelId="{EC08BC8B-D63D-8241-9364-9CEC88E831D0}" srcId="{056D782B-3AE9-6341-8054-2A504A814F31}" destId="{150E95FE-AE33-A642-99D7-7C8C0DE7CD31}" srcOrd="2" destOrd="0" parTransId="{EC6909A9-C511-E145-A8C9-66B44B73CDF6}" sibTransId="{7885C853-F0A8-9945-BAF3-922D2F739A61}"/>
+    <dgm:cxn modelId="{E70A7B96-E081-FD44-8939-886A69748AA8}" type="presOf" srcId="{056D782B-3AE9-6341-8054-2A504A814F31}" destId="{CA38CAAF-4126-F842-9139-795E9B492809}" srcOrd="0" destOrd="0" presId="urn:microsoft.com/office/officeart/2005/8/layout/cycle3"/>
+    <dgm:cxn modelId="{9D35A697-CD78-E84D-ACD4-57979380DB8E}" srcId="{056D782B-3AE9-6341-8054-2A504A814F31}" destId="{D56B6BE1-E4D0-394D-A3D2-CB5AA4024D55}" srcOrd="4" destOrd="0" parTransId="{659AC1EE-6628-824A-B823-52F387E01033}" sibTransId="{486BE965-D079-354A-8A11-71412DC2A78D}"/>
+    <dgm:cxn modelId="{2A45D999-46E5-E141-A889-E7E6724A1BEE}" srcId="{056D782B-3AE9-6341-8054-2A504A814F31}" destId="{D944F075-B569-C445-9131-D0B813F81D95}" srcOrd="6" destOrd="0" parTransId="{2AB657AE-DE05-6642-A47F-D076DBCFE7BC}" sibTransId="{86A5A618-D0E0-BF4D-8C48-0331F40F0028}"/>
+    <dgm:cxn modelId="{31DA55A3-48E9-F445-9BF3-C283ADCE42BB}" type="presOf" srcId="{7224B14F-880B-634F-A526-C4E35D50D1E3}" destId="{19409FAB-9ED0-024C-9BD3-FA3940064CB5}" srcOrd="0" destOrd="0" presId="urn:microsoft.com/office/officeart/2005/8/layout/cycle3"/>
+    <dgm:cxn modelId="{577D96AE-07E1-BE47-813A-2058F110D0DD}" srcId="{056D782B-3AE9-6341-8054-2A504A814F31}" destId="{409F7A24-5637-5243-801D-289994206447}" srcOrd="0" destOrd="0" parTransId="{2CE23994-248B-7D40-BED2-A70B6FE371A8}" sibTransId="{7224B14F-880B-634F-A526-C4E35D50D1E3}"/>
+    <dgm:cxn modelId="{085C62B9-803A-BB44-955F-9A403EDE118A}" type="presOf" srcId="{CFB442CC-5F13-104B-A89F-57261D8654A7}" destId="{501E3E8F-6299-5846-A6AE-B9980DA69887}" srcOrd="0" destOrd="0" presId="urn:microsoft.com/office/officeart/2005/8/layout/cycle3"/>
+    <dgm:cxn modelId="{A8E021BE-F7DC-784F-95D1-8BF63A352D4E}" type="presOf" srcId="{BA5ECC91-9983-BD40-962B-0EC72B979C3A}" destId="{04F4F7BC-8951-3C4E-98FF-8EBAE9FEC36A}" srcOrd="0" destOrd="0" presId="urn:microsoft.com/office/officeart/2005/8/layout/cycle3"/>
+    <dgm:cxn modelId="{FAD4C6CC-7452-7842-9A09-50EE6440BBBB}" type="presOf" srcId="{D56B6BE1-E4D0-394D-A3D2-CB5AA4024D55}" destId="{659FE536-1F1D-504E-930D-115BE2D22DCB}" srcOrd="0" destOrd="0" presId="urn:microsoft.com/office/officeart/2005/8/layout/cycle3"/>
+    <dgm:cxn modelId="{6C3A16DC-BBB9-A841-BABA-7A650CFE3089}" type="presOf" srcId="{16418477-AF6E-7849-9D54-63386E430A36}" destId="{A6D2C092-8BDD-184F-B60A-95002E1C617A}" srcOrd="0" destOrd="0" presId="urn:microsoft.com/office/officeart/2005/8/layout/cycle3"/>
+    <dgm:cxn modelId="{7AAD59DE-CC1F-F946-BAFF-6DD5BBFBE74E}" type="presOf" srcId="{D944F075-B569-C445-9131-D0B813F81D95}" destId="{93260571-C263-5C47-A419-401F437055EE}" srcOrd="0" destOrd="0" presId="urn:microsoft.com/office/officeart/2005/8/layout/cycle3"/>
+    <dgm:cxn modelId="{90F148E3-9E87-654A-AF60-CF1E76977CCB}" type="presOf" srcId="{150E95FE-AE33-A642-99D7-7C8C0DE7CD31}" destId="{A9FA1A01-3B6D-DA4A-956A-7887C3F0F839}" srcOrd="0" destOrd="0" presId="urn:microsoft.com/office/officeart/2005/8/layout/cycle3"/>
+    <dgm:cxn modelId="{AD928F1F-388B-AB4D-8ED2-76DCF82C2503}" type="presParOf" srcId="{CA38CAAF-4126-F842-9139-795E9B492809}" destId="{CE83B688-DEF8-2646-90E9-C08F8A3E70E7}" srcOrd="0" destOrd="0" presId="urn:microsoft.com/office/officeart/2005/8/layout/cycle3"/>
+    <dgm:cxn modelId="{C411A99B-1C0C-2F45-B004-A9F4021D317F}" type="presParOf" srcId="{CE83B688-DEF8-2646-90E9-C08F8A3E70E7}" destId="{D94B10FC-86A6-FF4A-A1B2-1E5A15A9B8EC}" srcOrd="0" destOrd="0" presId="urn:microsoft.com/office/officeart/2005/8/layout/cycle3"/>
+    <dgm:cxn modelId="{ACE88E7D-80F2-DA43-96D1-AFFD4F053F93}" type="presParOf" srcId="{CE83B688-DEF8-2646-90E9-C08F8A3E70E7}" destId="{19409FAB-9ED0-024C-9BD3-FA3940064CB5}" srcOrd="1" destOrd="0" presId="urn:microsoft.com/office/officeart/2005/8/layout/cycle3"/>
+    <dgm:cxn modelId="{33FE5165-AA7D-A044-BD8D-48C862C7E739}" type="presParOf" srcId="{CE83B688-DEF8-2646-90E9-C08F8A3E70E7}" destId="{A6D2C092-8BDD-184F-B60A-95002E1C617A}" srcOrd="2" destOrd="0" presId="urn:microsoft.com/office/officeart/2005/8/layout/cycle3"/>
+    <dgm:cxn modelId="{2ACC937F-B8D9-1143-A9EF-8D12E9666B3C}" type="presParOf" srcId="{CE83B688-DEF8-2646-90E9-C08F8A3E70E7}" destId="{A9FA1A01-3B6D-DA4A-956A-7887C3F0F839}" srcOrd="3" destOrd="0" presId="urn:microsoft.com/office/officeart/2005/8/layout/cycle3"/>
+    <dgm:cxn modelId="{F5E0D9AE-5A4A-8049-9AE6-1461BE9634BF}" type="presParOf" srcId="{CE83B688-DEF8-2646-90E9-C08F8A3E70E7}" destId="{BEEC44DB-1D2C-5A47-B786-9AAE6963B36A}" srcOrd="4" destOrd="0" presId="urn:microsoft.com/office/officeart/2005/8/layout/cycle3"/>
+    <dgm:cxn modelId="{572A90D5-BDBF-3F44-8A51-5C3E4C801C24}" type="presParOf" srcId="{CE83B688-DEF8-2646-90E9-C08F8A3E70E7}" destId="{659FE536-1F1D-504E-930D-115BE2D22DCB}" srcOrd="5" destOrd="0" presId="urn:microsoft.com/office/officeart/2005/8/layout/cycle3"/>
+    <dgm:cxn modelId="{6CC86512-CD32-2C48-9728-9EA62A1480D4}" type="presParOf" srcId="{CE83B688-DEF8-2646-90E9-C08F8A3E70E7}" destId="{1DF87B89-7439-B148-B088-80277B1BDDD3}" srcOrd="6" destOrd="0" presId="urn:microsoft.com/office/officeart/2005/8/layout/cycle3"/>
+    <dgm:cxn modelId="{2FB7A983-8FFD-B747-9BF0-C1905275425E}" type="presParOf" srcId="{CE83B688-DEF8-2646-90E9-C08F8A3E70E7}" destId="{93260571-C263-5C47-A419-401F437055EE}" srcOrd="7" destOrd="0" presId="urn:microsoft.com/office/officeart/2005/8/layout/cycle3"/>
+    <dgm:cxn modelId="{7432D6A6-7917-B542-A8CF-1BD0D9546813}" type="presParOf" srcId="{CE83B688-DEF8-2646-90E9-C08F8A3E70E7}" destId="{04F4F7BC-8951-3C4E-98FF-8EBAE9FEC36A}" srcOrd="8" destOrd="0" presId="urn:microsoft.com/office/officeart/2005/8/layout/cycle3"/>
+    <dgm:cxn modelId="{18AFF355-D33B-AF42-A9B5-4277B0B412EC}" type="presParOf" srcId="{CE83B688-DEF8-2646-90E9-C08F8A3E70E7}" destId="{501E3E8F-6299-5846-A6AE-B9980DA69887}" srcOrd="9" destOrd="0" presId="urn:microsoft.com/office/officeart/2005/8/layout/cycle3"/>
+    <dgm:cxn modelId="{B50F3EC6-6FA3-1243-A536-628DFE7FE766}" type="presParOf" srcId="{CE83B688-DEF8-2646-90E9-C08F8A3E70E7}" destId="{5A043805-F757-CF4A-9485-BE4798BC4994}" srcOrd="10" destOrd="0" presId="urn:microsoft.com/office/officeart/2005/8/layout/cycle3"/>
   </dgm:cxnLst>
   <dgm:bg/>
   <dgm:whole/>
@@ -3320,6 +4928,109 @@
         <a:ext cx="1249528" cy="592700"/>
       </dsp:txXfrm>
     </dsp:sp>
+    <dsp:sp modelId="{BC53A7EE-063F-0243-80AC-C4417FF60454}">
+      <dsp:nvSpPr>
+        <dsp:cNvPr id="0" name=""/>
+        <dsp:cNvSpPr/>
+      </dsp:nvSpPr>
+      <dsp:spPr>
+        <a:xfrm>
+          <a:off x="5669674" y="3116051"/>
+          <a:ext cx="1313656" cy="656828"/>
+        </a:xfrm>
+        <a:prstGeom prst="roundRect">
+          <a:avLst/>
+        </a:prstGeom>
+        <a:solidFill>
+          <a:schemeClr val="lt1">
+            <a:hueOff val="0"/>
+            <a:satOff val="0"/>
+            <a:lumOff val="0"/>
+            <a:alphaOff val="0"/>
+          </a:schemeClr>
+        </a:solidFill>
+        <a:ln w="12700" cap="flat" cmpd="sng" algn="ctr">
+          <a:solidFill>
+            <a:scrgbClr r="0" g="0" b="0"/>
+          </a:solidFill>
+          <a:prstDash val="solid"/>
+          <a:miter lim="800000"/>
+        </a:ln>
+        <a:effectLst/>
+      </dsp:spPr>
+      <dsp:style>
+        <a:lnRef idx="2">
+          <a:scrgbClr r="0" g="0" b="0"/>
+        </a:lnRef>
+        <a:fillRef idx="1">
+          <a:scrgbClr r="0" g="0" b="0"/>
+        </a:fillRef>
+        <a:effectRef idx="0">
+          <a:scrgbClr r="0" g="0" b="0"/>
+        </a:effectRef>
+        <a:fontRef idx="minor">
+          <a:schemeClr val="lt1"/>
+        </a:fontRef>
+      </dsp:style>
+      <dsp:txBody>
+        <a:bodyPr spcFirstLastPara="0" vert="horz" wrap="square" lIns="41910" tIns="41910" rIns="41910" bIns="41910" numCol="1" spcCol="1270" anchor="ctr" anchorCtr="0">
+          <a:noAutofit/>
+        </a:bodyPr>
+        <a:lstStyle/>
+        <a:p>
+          <a:pPr marL="0" lvl="0" indent="0" algn="ctr" defTabSz="488950">
+            <a:lnSpc>
+              <a:spcPct val="90000"/>
+            </a:lnSpc>
+            <a:spcBef>
+              <a:spcPct val="0"/>
+            </a:spcBef>
+            <a:spcAft>
+              <a:spcPct val="35000"/>
+            </a:spcAft>
+            <a:buNone/>
+          </a:pPr>
+          <a:r>
+            <a:rPr kumimoji="1" lang="ja-JP" altLang="en-US" sz="1100" kern="1200">
+              <a:latin typeface="Hiragino Sans W4" panose="020B0400000000000000" pitchFamily="34" charset="-128"/>
+              <a:ea typeface="Hiragino Sans W4" panose="020B0400000000000000" pitchFamily="34" charset="-128"/>
+            </a:rPr>
+            <a:t>物価安</a:t>
+          </a:r>
+          <a:br>
+            <a:rPr kumimoji="1" lang="en-US" altLang="ja-JP" sz="1100" kern="1200" dirty="0">
+              <a:latin typeface="Hiragino Sans W4" panose="020B0400000000000000" pitchFamily="34" charset="-128"/>
+              <a:ea typeface="Hiragino Sans W4" panose="020B0400000000000000" pitchFamily="34" charset="-128"/>
+            </a:rPr>
+          </a:br>
+          <a:r>
+            <a:rPr kumimoji="1" lang="ja-JP" altLang="en-US" sz="1100" kern="1200">
+              <a:latin typeface="Hiragino Sans W4" panose="020B0400000000000000" pitchFamily="34" charset="-128"/>
+              <a:ea typeface="Hiragino Sans W4" panose="020B0400000000000000" pitchFamily="34" charset="-128"/>
+            </a:rPr>
+            <a:t>（</a:t>
+          </a:r>
+          <a:r>
+            <a:rPr kumimoji="1" lang="ja-JP" altLang="en-US" sz="1100" b="1" kern="1200">
+              <a:latin typeface="Hiragino Sans W4" panose="020B0400000000000000" pitchFamily="34" charset="-128"/>
+              <a:ea typeface="Hiragino Sans W4" panose="020B0400000000000000" pitchFamily="34" charset="-128"/>
+            </a:rPr>
+            <a:t>デフレ</a:t>
+          </a:r>
+          <a:r>
+            <a:rPr kumimoji="1" lang="ja-JP" altLang="en-US" sz="1100" kern="1200">
+              <a:latin typeface="Hiragino Sans W4" panose="020B0400000000000000" pitchFamily="34" charset="-128"/>
+              <a:ea typeface="Hiragino Sans W4" panose="020B0400000000000000" pitchFamily="34" charset="-128"/>
+            </a:rPr>
+            <a:t>）</a:t>
+          </a:r>
+        </a:p>
+      </dsp:txBody>
+      <dsp:txXfrm>
+        <a:off x="5701738" y="3148115"/>
+        <a:ext cx="1249528" cy="592700"/>
+      </dsp:txXfrm>
+    </dsp:sp>
     <dsp:sp modelId="{9C1F367D-4B7A-2E43-AB57-E2005CEC54C2}">
       <dsp:nvSpPr>
         <dsp:cNvPr id="0" name=""/>
@@ -3327,7 +5038,7 @@
       </dsp:nvSpPr>
       <dsp:spPr>
         <a:xfrm>
-          <a:off x="5669674" y="3116051"/>
+          <a:off x="4805475" y="4305519"/>
           <a:ext cx="1313656" cy="656828"/>
         </a:xfrm>
         <a:prstGeom prst="roundRect">
@@ -3415,109 +5126,6 @@
               <a:ea typeface="Hiragino Sans W4" panose="020B0400000000000000" pitchFamily="34" charset="-128"/>
             </a:rPr>
             <a:t>減少</a:t>
-          </a:r>
-        </a:p>
-      </dsp:txBody>
-      <dsp:txXfrm>
-        <a:off x="5701738" y="3148115"/>
-        <a:ext cx="1249528" cy="592700"/>
-      </dsp:txXfrm>
-    </dsp:sp>
-    <dsp:sp modelId="{BC53A7EE-063F-0243-80AC-C4417FF60454}">
-      <dsp:nvSpPr>
-        <dsp:cNvPr id="0" name=""/>
-        <dsp:cNvSpPr/>
-      </dsp:nvSpPr>
-      <dsp:spPr>
-        <a:xfrm>
-          <a:off x="4805475" y="4305519"/>
-          <a:ext cx="1313656" cy="656828"/>
-        </a:xfrm>
-        <a:prstGeom prst="roundRect">
-          <a:avLst/>
-        </a:prstGeom>
-        <a:solidFill>
-          <a:schemeClr val="lt1">
-            <a:hueOff val="0"/>
-            <a:satOff val="0"/>
-            <a:lumOff val="0"/>
-            <a:alphaOff val="0"/>
-          </a:schemeClr>
-        </a:solidFill>
-        <a:ln w="12700" cap="flat" cmpd="sng" algn="ctr">
-          <a:solidFill>
-            <a:scrgbClr r="0" g="0" b="0"/>
-          </a:solidFill>
-          <a:prstDash val="solid"/>
-          <a:miter lim="800000"/>
-        </a:ln>
-        <a:effectLst/>
-      </dsp:spPr>
-      <dsp:style>
-        <a:lnRef idx="2">
-          <a:scrgbClr r="0" g="0" b="0"/>
-        </a:lnRef>
-        <a:fillRef idx="1">
-          <a:scrgbClr r="0" g="0" b="0"/>
-        </a:fillRef>
-        <a:effectRef idx="0">
-          <a:scrgbClr r="0" g="0" b="0"/>
-        </a:effectRef>
-        <a:fontRef idx="minor">
-          <a:schemeClr val="lt1"/>
-        </a:fontRef>
-      </dsp:style>
-      <dsp:txBody>
-        <a:bodyPr spcFirstLastPara="0" vert="horz" wrap="square" lIns="41910" tIns="41910" rIns="41910" bIns="41910" numCol="1" spcCol="1270" anchor="ctr" anchorCtr="0">
-          <a:noAutofit/>
-        </a:bodyPr>
-        <a:lstStyle/>
-        <a:p>
-          <a:pPr marL="0" lvl="0" indent="0" algn="ctr" defTabSz="488950">
-            <a:lnSpc>
-              <a:spcPct val="90000"/>
-            </a:lnSpc>
-            <a:spcBef>
-              <a:spcPct val="0"/>
-            </a:spcBef>
-            <a:spcAft>
-              <a:spcPct val="35000"/>
-            </a:spcAft>
-            <a:buNone/>
-          </a:pPr>
-          <a:r>
-            <a:rPr kumimoji="1" lang="ja-JP" altLang="en-US" sz="1100" kern="1200">
-              <a:latin typeface="Hiragino Sans W4" panose="020B0400000000000000" pitchFamily="34" charset="-128"/>
-              <a:ea typeface="Hiragino Sans W4" panose="020B0400000000000000" pitchFamily="34" charset="-128"/>
-            </a:rPr>
-            <a:t>物価安</a:t>
-          </a:r>
-          <a:br>
-            <a:rPr kumimoji="1" lang="en-US" altLang="ja-JP" sz="1100" kern="1200" dirty="0">
-              <a:latin typeface="Hiragino Sans W4" panose="020B0400000000000000" pitchFamily="34" charset="-128"/>
-              <a:ea typeface="Hiragino Sans W4" panose="020B0400000000000000" pitchFamily="34" charset="-128"/>
-            </a:rPr>
-          </a:br>
-          <a:r>
-            <a:rPr kumimoji="1" lang="ja-JP" altLang="en-US" sz="1100" kern="1200">
-              <a:latin typeface="Hiragino Sans W4" panose="020B0400000000000000" pitchFamily="34" charset="-128"/>
-              <a:ea typeface="Hiragino Sans W4" panose="020B0400000000000000" pitchFamily="34" charset="-128"/>
-            </a:rPr>
-            <a:t>（</a:t>
-          </a:r>
-          <a:r>
-            <a:rPr kumimoji="1" lang="ja-JP" altLang="en-US" sz="1100" b="1" kern="1200">
-              <a:latin typeface="Hiragino Sans W4" panose="020B0400000000000000" pitchFamily="34" charset="-128"/>
-              <a:ea typeface="Hiragino Sans W4" panose="020B0400000000000000" pitchFamily="34" charset="-128"/>
-            </a:rPr>
-            <a:t>デフレ</a:t>
-          </a:r>
-          <a:r>
-            <a:rPr kumimoji="1" lang="ja-JP" altLang="en-US" sz="1100" kern="1200">
-              <a:latin typeface="Hiragino Sans W4" panose="020B0400000000000000" pitchFamily="34" charset="-128"/>
-              <a:ea typeface="Hiragino Sans W4" panose="020B0400000000000000" pitchFamily="34" charset="-128"/>
-            </a:rPr>
-            <a:t>）</a:t>
           </a:r>
         </a:p>
       </dsp:txBody>
@@ -4207,7 +5815,7 @@
               <a:latin typeface="Hiragino Sans W4" panose="020B0400000000000000" pitchFamily="34" charset="-128"/>
               <a:ea typeface="Hiragino Sans W4" panose="020B0400000000000000" pitchFamily="34" charset="-128"/>
             </a:rPr>
-            <a:t>通貨</a:t>
+            <a:t>自国通貨</a:t>
           </a:r>
           <a:r>
             <a:rPr kumimoji="1" lang="ja-JP" altLang="en-US" sz="2000" b="1" kern="1200">
@@ -4476,7 +6084,7 @@
               <a:latin typeface="Hiragino Sans W4" panose="020B0400000000000000" pitchFamily="34" charset="-128"/>
               <a:ea typeface="Hiragino Sans W4" panose="020B0400000000000000" pitchFamily="34" charset="-128"/>
             </a:rPr>
-            <a:t>通貨</a:t>
+            <a:t>自国通貨</a:t>
           </a:r>
           <a:r>
             <a:rPr kumimoji="1" lang="ja-JP" altLang="en-US" sz="2000" b="1" kern="1200">
@@ -4593,6 +6201,1040 @@
       <dsp:txXfrm>
         <a:off x="1185442" y="1148114"/>
         <a:ext cx="1955456" cy="927550"/>
+      </dsp:txXfrm>
+    </dsp:sp>
+  </dsp:spTree>
+</dsp:drawing>
+</file>
+
+<file path=ppt/diagrams/drawing3.xml><?xml version="1.0" encoding="utf-8"?>
+<dsp:drawing xmlns:dgm="http://schemas.openxmlformats.org/drawingml/2006/diagram" xmlns:dsp="http://schemas.microsoft.com/office/drawing/2008/diagram" xmlns:a="http://schemas.openxmlformats.org/drawingml/2006/main">
+  <dsp:spTree>
+    <dsp:nvGrpSpPr>
+      <dsp:cNvPr id="0" name=""/>
+      <dsp:cNvGrpSpPr/>
+    </dsp:nvGrpSpPr>
+    <dsp:grpSpPr/>
+    <dsp:sp modelId="{19409FAB-9ED0-024C-9BD3-FA3940064CB5}">
+      <dsp:nvSpPr>
+        <dsp:cNvPr id="0" name=""/>
+        <dsp:cNvSpPr/>
+      </dsp:nvSpPr>
+      <dsp:spPr>
+        <a:xfrm>
+          <a:off x="1274697" y="-73592"/>
+          <a:ext cx="5578605" cy="5578605"/>
+        </a:xfrm>
+        <a:prstGeom prst="circularArrow">
+          <a:avLst>
+            <a:gd name="adj1" fmla="val 5544"/>
+            <a:gd name="adj2" fmla="val 330680"/>
+            <a:gd name="adj3" fmla="val 14854317"/>
+            <a:gd name="adj4" fmla="val 16758672"/>
+            <a:gd name="adj5" fmla="val 5757"/>
+          </a:avLst>
+        </a:prstGeom>
+        <a:solidFill>
+          <a:schemeClr val="dk1">
+            <a:tint val="40000"/>
+            <a:hueOff val="0"/>
+            <a:satOff val="0"/>
+            <a:lumOff val="0"/>
+            <a:alphaOff val="0"/>
+          </a:schemeClr>
+        </a:solidFill>
+        <a:ln>
+          <a:noFill/>
+        </a:ln>
+        <a:effectLst/>
+      </dsp:spPr>
+      <dsp:style>
+        <a:lnRef idx="0">
+          <a:scrgbClr r="0" g="0" b="0"/>
+        </a:lnRef>
+        <a:fillRef idx="1">
+          <a:scrgbClr r="0" g="0" b="0"/>
+        </a:fillRef>
+        <a:effectRef idx="0">
+          <a:scrgbClr r="0" g="0" b="0"/>
+        </a:effectRef>
+        <a:fontRef idx="minor"/>
+      </dsp:style>
+    </dsp:sp>
+    <dsp:sp modelId="{D94B10FC-86A6-FF4A-A1B2-1E5A15A9B8EC}">
+      <dsp:nvSpPr>
+        <dsp:cNvPr id="0" name=""/>
+        <dsp:cNvSpPr/>
+      </dsp:nvSpPr>
+      <dsp:spPr>
+        <a:xfrm>
+          <a:off x="3407171" y="1983"/>
+          <a:ext cx="1313656" cy="656828"/>
+        </a:xfrm>
+        <a:prstGeom prst="roundRect">
+          <a:avLst/>
+        </a:prstGeom>
+        <a:solidFill>
+          <a:schemeClr val="lt1">
+            <a:hueOff val="0"/>
+            <a:satOff val="0"/>
+            <a:lumOff val="0"/>
+            <a:alphaOff val="0"/>
+          </a:schemeClr>
+        </a:solidFill>
+        <a:ln w="12700" cap="flat" cmpd="sng" algn="ctr">
+          <a:solidFill>
+            <a:scrgbClr r="0" g="0" b="0"/>
+          </a:solidFill>
+          <a:prstDash val="solid"/>
+          <a:miter lim="800000"/>
+        </a:ln>
+        <a:effectLst/>
+      </dsp:spPr>
+      <dsp:style>
+        <a:lnRef idx="2">
+          <a:scrgbClr r="0" g="0" b="0"/>
+        </a:lnRef>
+        <a:fillRef idx="1">
+          <a:scrgbClr r="0" g="0" b="0"/>
+        </a:fillRef>
+        <a:effectRef idx="0">
+          <a:scrgbClr r="0" g="0" b="0"/>
+        </a:effectRef>
+        <a:fontRef idx="minor">
+          <a:schemeClr val="lt1"/>
+        </a:fontRef>
+      </dsp:style>
+      <dsp:txBody>
+        <a:bodyPr spcFirstLastPara="0" vert="horz" wrap="square" lIns="41910" tIns="41910" rIns="41910" bIns="41910" numCol="1" spcCol="1270" anchor="ctr" anchorCtr="0">
+          <a:noAutofit/>
+        </a:bodyPr>
+        <a:lstStyle/>
+        <a:p>
+          <a:pPr marL="0" lvl="0" indent="0" algn="ctr" defTabSz="488950">
+            <a:lnSpc>
+              <a:spcPct val="90000"/>
+            </a:lnSpc>
+            <a:spcBef>
+              <a:spcPct val="0"/>
+            </a:spcBef>
+            <a:spcAft>
+              <a:spcPct val="35000"/>
+            </a:spcAft>
+            <a:buNone/>
+          </a:pPr>
+          <a:r>
+            <a:rPr kumimoji="1" lang="ja-JP" altLang="en-US" sz="1100" kern="1200">
+              <a:latin typeface="Hiragino Sans W4" panose="020B0400000000000000" pitchFamily="34" charset="-128"/>
+              <a:ea typeface="Hiragino Sans W4" panose="020B0400000000000000" pitchFamily="34" charset="-128"/>
+            </a:rPr>
+            <a:t>貿易</a:t>
+          </a:r>
+          <a:r>
+            <a:rPr kumimoji="1" lang="ja-JP" altLang="en-US" sz="1100" b="1" kern="1200">
+              <a:latin typeface="Hiragino Sans W4" panose="020B0400000000000000" pitchFamily="34" charset="-128"/>
+              <a:ea typeface="Hiragino Sans W4" panose="020B0400000000000000" pitchFamily="34" charset="-128"/>
+            </a:rPr>
+            <a:t>赤字</a:t>
+          </a:r>
+        </a:p>
+      </dsp:txBody>
+      <dsp:txXfrm>
+        <a:off x="3439235" y="34047"/>
+        <a:ext cx="1249528" cy="592700"/>
+      </dsp:txXfrm>
+    </dsp:sp>
+    <dsp:sp modelId="{A6D2C092-8BDD-184F-B60A-95002E1C617A}">
+      <dsp:nvSpPr>
+        <dsp:cNvPr id="0" name=""/>
+        <dsp:cNvSpPr/>
+      </dsp:nvSpPr>
+      <dsp:spPr>
+        <a:xfrm>
+          <a:off x="4805475" y="456319"/>
+          <a:ext cx="1313656" cy="656828"/>
+        </a:xfrm>
+        <a:prstGeom prst="roundRect">
+          <a:avLst/>
+        </a:prstGeom>
+        <a:solidFill>
+          <a:schemeClr val="lt1">
+            <a:hueOff val="0"/>
+            <a:satOff val="0"/>
+            <a:lumOff val="0"/>
+            <a:alphaOff val="0"/>
+          </a:schemeClr>
+        </a:solidFill>
+        <a:ln w="12700" cap="flat" cmpd="sng" algn="ctr">
+          <a:solidFill>
+            <a:scrgbClr r="0" g="0" b="0"/>
+          </a:solidFill>
+          <a:prstDash val="solid"/>
+          <a:miter lim="800000"/>
+        </a:ln>
+        <a:effectLst/>
+      </dsp:spPr>
+      <dsp:style>
+        <a:lnRef idx="2">
+          <a:scrgbClr r="0" g="0" b="0"/>
+        </a:lnRef>
+        <a:fillRef idx="1">
+          <a:scrgbClr r="0" g="0" b="0"/>
+        </a:fillRef>
+        <a:effectRef idx="0">
+          <a:scrgbClr r="0" g="0" b="0"/>
+        </a:effectRef>
+        <a:fontRef idx="minor">
+          <a:schemeClr val="lt1"/>
+        </a:fontRef>
+      </dsp:style>
+      <dsp:txBody>
+        <a:bodyPr spcFirstLastPara="0" vert="horz" wrap="square" lIns="41910" tIns="41910" rIns="41910" bIns="41910" numCol="1" spcCol="1270" anchor="ctr" anchorCtr="0">
+          <a:noAutofit/>
+        </a:bodyPr>
+        <a:lstStyle/>
+        <a:p>
+          <a:pPr marL="0" lvl="0" indent="0" algn="ctr" defTabSz="488950">
+            <a:lnSpc>
+              <a:spcPct val="90000"/>
+            </a:lnSpc>
+            <a:spcBef>
+              <a:spcPct val="0"/>
+            </a:spcBef>
+            <a:spcAft>
+              <a:spcPct val="35000"/>
+            </a:spcAft>
+            <a:buNone/>
+          </a:pPr>
+          <a:r>
+            <a:rPr kumimoji="1" lang="ja-JP" altLang="en-US" sz="1100" kern="1200">
+              <a:latin typeface="Hiragino Sans W4" panose="020B0400000000000000" pitchFamily="34" charset="-128"/>
+              <a:ea typeface="Hiragino Sans W4" panose="020B0400000000000000" pitchFamily="34" charset="-128"/>
+            </a:rPr>
+            <a:t>自国通貨</a:t>
+          </a:r>
+          <a:r>
+            <a:rPr kumimoji="1" lang="ja-JP" altLang="en-US" sz="1100" b="1" kern="1200">
+              <a:latin typeface="Hiragino Sans W4" panose="020B0400000000000000" pitchFamily="34" charset="-128"/>
+              <a:ea typeface="Hiragino Sans W4" panose="020B0400000000000000" pitchFamily="34" charset="-128"/>
+            </a:rPr>
+            <a:t>減価</a:t>
+          </a:r>
+        </a:p>
+      </dsp:txBody>
+      <dsp:txXfrm>
+        <a:off x="4837539" y="488383"/>
+        <a:ext cx="1249528" cy="592700"/>
+      </dsp:txXfrm>
+    </dsp:sp>
+    <dsp:sp modelId="{A9FA1A01-3B6D-DA4A-956A-7887C3F0F839}">
+      <dsp:nvSpPr>
+        <dsp:cNvPr id="0" name=""/>
+        <dsp:cNvSpPr/>
+      </dsp:nvSpPr>
+      <dsp:spPr>
+        <a:xfrm>
+          <a:off x="5669674" y="1645787"/>
+          <a:ext cx="1313656" cy="656828"/>
+        </a:xfrm>
+        <a:prstGeom prst="roundRect">
+          <a:avLst/>
+        </a:prstGeom>
+        <a:solidFill>
+          <a:schemeClr val="lt1">
+            <a:hueOff val="0"/>
+            <a:satOff val="0"/>
+            <a:lumOff val="0"/>
+            <a:alphaOff val="0"/>
+          </a:schemeClr>
+        </a:solidFill>
+        <a:ln w="19050" cap="flat" cmpd="sng" algn="ctr">
+          <a:solidFill>
+            <a:schemeClr val="dk1">
+              <a:shade val="80000"/>
+              <a:hueOff val="0"/>
+              <a:satOff val="0"/>
+              <a:lumOff val="0"/>
+              <a:alphaOff val="0"/>
+            </a:schemeClr>
+          </a:solidFill>
+          <a:prstDash val="solid"/>
+          <a:miter lim="800000"/>
+        </a:ln>
+        <a:effectLst/>
+      </dsp:spPr>
+      <dsp:style>
+        <a:lnRef idx="2">
+          <a:scrgbClr r="0" g="0" b="0"/>
+        </a:lnRef>
+        <a:fillRef idx="1">
+          <a:scrgbClr r="0" g="0" b="0"/>
+        </a:fillRef>
+        <a:effectRef idx="0">
+          <a:scrgbClr r="0" g="0" b="0"/>
+        </a:effectRef>
+        <a:fontRef idx="minor">
+          <a:schemeClr val="lt1"/>
+        </a:fontRef>
+      </dsp:style>
+      <dsp:txBody>
+        <a:bodyPr spcFirstLastPara="0" vert="horz" wrap="square" lIns="41910" tIns="41910" rIns="41910" bIns="41910" numCol="1" spcCol="1270" anchor="ctr" anchorCtr="0">
+          <a:noAutofit/>
+        </a:bodyPr>
+        <a:lstStyle/>
+        <a:p>
+          <a:pPr marL="0" lvl="0" indent="0" algn="ctr" defTabSz="488950">
+            <a:lnSpc>
+              <a:spcPct val="90000"/>
+            </a:lnSpc>
+            <a:spcBef>
+              <a:spcPct val="0"/>
+            </a:spcBef>
+            <a:spcAft>
+              <a:spcPct val="35000"/>
+            </a:spcAft>
+            <a:buNone/>
+          </a:pPr>
+          <a:r>
+            <a:rPr kumimoji="1" lang="ja-JP" altLang="en-US" sz="1100" kern="1200">
+              <a:latin typeface="Hiragino Sans W4" panose="020B0400000000000000" pitchFamily="34" charset="-128"/>
+              <a:ea typeface="Hiragino Sans W4" panose="020B0400000000000000" pitchFamily="34" charset="-128"/>
+            </a:rPr>
+            <a:t>為替介入</a:t>
+          </a:r>
+          <a:br>
+            <a:rPr kumimoji="1" lang="en-US" altLang="ja-JP" sz="1100" kern="1200" dirty="0">
+              <a:latin typeface="Hiragino Sans W4" panose="020B0400000000000000" pitchFamily="34" charset="-128"/>
+              <a:ea typeface="Hiragino Sans W4" panose="020B0400000000000000" pitchFamily="34" charset="-128"/>
+            </a:rPr>
+          </a:br>
+          <a:r>
+            <a:rPr kumimoji="1" lang="ja-JP" altLang="en-US" sz="1100" kern="1200">
+              <a:latin typeface="Hiragino Sans W4" panose="020B0400000000000000" pitchFamily="34" charset="-128"/>
+              <a:ea typeface="Hiragino Sans W4" panose="020B0400000000000000" pitchFamily="34" charset="-128"/>
+            </a:rPr>
+            <a:t>（自国通貨</a:t>
+          </a:r>
+          <a:r>
+            <a:rPr kumimoji="1" lang="ja-JP" altLang="en-US" sz="1100" b="1" kern="1200">
+              <a:latin typeface="Hiragino Sans W4" panose="020B0400000000000000" pitchFamily="34" charset="-128"/>
+              <a:ea typeface="Hiragino Sans W4" panose="020B0400000000000000" pitchFamily="34" charset="-128"/>
+            </a:rPr>
+            <a:t>買い</a:t>
+          </a:r>
+          <a:r>
+            <a:rPr kumimoji="1" lang="ja-JP" altLang="en-US" sz="1100" kern="1200">
+              <a:latin typeface="Hiragino Sans W4" panose="020B0400000000000000" pitchFamily="34" charset="-128"/>
+              <a:ea typeface="Hiragino Sans W4" panose="020B0400000000000000" pitchFamily="34" charset="-128"/>
+            </a:rPr>
+            <a:t>）</a:t>
+          </a:r>
+        </a:p>
+      </dsp:txBody>
+      <dsp:txXfrm>
+        <a:off x="5701738" y="1677851"/>
+        <a:ext cx="1249528" cy="592700"/>
+      </dsp:txXfrm>
+    </dsp:sp>
+    <dsp:sp modelId="{BEEC44DB-1D2C-5A47-B786-9AAE6963B36A}">
+      <dsp:nvSpPr>
+        <dsp:cNvPr id="0" name=""/>
+        <dsp:cNvSpPr/>
+      </dsp:nvSpPr>
+      <dsp:spPr>
+        <a:xfrm>
+          <a:off x="5669674" y="3116051"/>
+          <a:ext cx="1313656" cy="656828"/>
+        </a:xfrm>
+        <a:prstGeom prst="roundRect">
+          <a:avLst/>
+        </a:prstGeom>
+        <a:solidFill>
+          <a:schemeClr val="lt1">
+            <a:hueOff val="0"/>
+            <a:satOff val="0"/>
+            <a:lumOff val="0"/>
+            <a:alphaOff val="0"/>
+          </a:schemeClr>
+        </a:solidFill>
+        <a:ln w="19050" cap="flat" cmpd="sng" algn="ctr">
+          <a:solidFill>
+            <a:schemeClr val="dk1">
+              <a:shade val="80000"/>
+              <a:hueOff val="0"/>
+              <a:satOff val="0"/>
+              <a:lumOff val="0"/>
+              <a:alphaOff val="0"/>
+            </a:schemeClr>
+          </a:solidFill>
+          <a:prstDash val="solid"/>
+          <a:miter lim="800000"/>
+        </a:ln>
+        <a:effectLst/>
+      </dsp:spPr>
+      <dsp:style>
+        <a:lnRef idx="2">
+          <a:scrgbClr r="0" g="0" b="0"/>
+        </a:lnRef>
+        <a:fillRef idx="1">
+          <a:scrgbClr r="0" g="0" b="0"/>
+        </a:fillRef>
+        <a:effectRef idx="0">
+          <a:scrgbClr r="0" g="0" b="0"/>
+        </a:effectRef>
+        <a:fontRef idx="minor">
+          <a:schemeClr val="lt1"/>
+        </a:fontRef>
+      </dsp:style>
+      <dsp:txBody>
+        <a:bodyPr spcFirstLastPara="0" vert="horz" wrap="square" lIns="41910" tIns="41910" rIns="41910" bIns="41910" numCol="1" spcCol="1270" anchor="ctr" anchorCtr="0">
+          <a:noAutofit/>
+        </a:bodyPr>
+        <a:lstStyle/>
+        <a:p>
+          <a:pPr marL="0" lvl="0" indent="0" algn="ctr" defTabSz="488950">
+            <a:lnSpc>
+              <a:spcPct val="90000"/>
+            </a:lnSpc>
+            <a:spcBef>
+              <a:spcPct val="0"/>
+            </a:spcBef>
+            <a:spcAft>
+              <a:spcPct val="35000"/>
+            </a:spcAft>
+            <a:buNone/>
+          </a:pPr>
+          <a:r>
+            <a:rPr kumimoji="1" lang="ja-JP" altLang="en-US" sz="1100" kern="1200">
+              <a:latin typeface="Hiragino Sans W4" panose="020B0400000000000000" pitchFamily="34" charset="-128"/>
+              <a:ea typeface="Hiragino Sans W4" panose="020B0400000000000000" pitchFamily="34" charset="-128"/>
+            </a:rPr>
+            <a:t>物価安</a:t>
+          </a:r>
+          <a:br>
+            <a:rPr kumimoji="1" lang="en-US" altLang="ja-JP" sz="1100" kern="1200" dirty="0">
+              <a:latin typeface="Hiragino Sans W4" panose="020B0400000000000000" pitchFamily="34" charset="-128"/>
+              <a:ea typeface="Hiragino Sans W4" panose="020B0400000000000000" pitchFamily="34" charset="-128"/>
+            </a:rPr>
+          </a:br>
+          <a:r>
+            <a:rPr kumimoji="1" lang="ja-JP" altLang="en-US" sz="1100" kern="1200">
+              <a:latin typeface="Hiragino Sans W4" panose="020B0400000000000000" pitchFamily="34" charset="-128"/>
+              <a:ea typeface="Hiragino Sans W4" panose="020B0400000000000000" pitchFamily="34" charset="-128"/>
+            </a:rPr>
+            <a:t>（</a:t>
+          </a:r>
+          <a:r>
+            <a:rPr kumimoji="1" lang="ja-JP" altLang="en-US" sz="1100" b="1" kern="1200">
+              <a:latin typeface="Hiragino Sans W4" panose="020B0400000000000000" pitchFamily="34" charset="-128"/>
+              <a:ea typeface="Hiragino Sans W4" panose="020B0400000000000000" pitchFamily="34" charset="-128"/>
+            </a:rPr>
+            <a:t>デフレ</a:t>
+          </a:r>
+          <a:r>
+            <a:rPr kumimoji="1" lang="ja-JP" altLang="en-US" sz="1100" kern="1200">
+              <a:latin typeface="Hiragino Sans W4" panose="020B0400000000000000" pitchFamily="34" charset="-128"/>
+              <a:ea typeface="Hiragino Sans W4" panose="020B0400000000000000" pitchFamily="34" charset="-128"/>
+            </a:rPr>
+            <a:t>）</a:t>
+          </a:r>
+        </a:p>
+      </dsp:txBody>
+      <dsp:txXfrm>
+        <a:off x="5701738" y="3148115"/>
+        <a:ext cx="1249528" cy="592700"/>
+      </dsp:txXfrm>
+    </dsp:sp>
+    <dsp:sp modelId="{659FE536-1F1D-504E-930D-115BE2D22DCB}">
+      <dsp:nvSpPr>
+        <dsp:cNvPr id="0" name=""/>
+        <dsp:cNvSpPr/>
+      </dsp:nvSpPr>
+      <dsp:spPr>
+        <a:xfrm>
+          <a:off x="4805475" y="4305519"/>
+          <a:ext cx="1313656" cy="656828"/>
+        </a:xfrm>
+        <a:prstGeom prst="roundRect">
+          <a:avLst/>
+        </a:prstGeom>
+        <a:solidFill>
+          <a:schemeClr val="lt1">
+            <a:hueOff val="0"/>
+            <a:satOff val="0"/>
+            <a:lumOff val="0"/>
+            <a:alphaOff val="0"/>
+          </a:schemeClr>
+        </a:solidFill>
+        <a:ln w="12700" cap="flat" cmpd="sng" algn="ctr">
+          <a:solidFill>
+            <a:scrgbClr r="0" g="0" b="0"/>
+          </a:solidFill>
+          <a:prstDash val="solid"/>
+          <a:miter lim="800000"/>
+        </a:ln>
+        <a:effectLst/>
+      </dsp:spPr>
+      <dsp:style>
+        <a:lnRef idx="2">
+          <a:scrgbClr r="0" g="0" b="0"/>
+        </a:lnRef>
+        <a:fillRef idx="1">
+          <a:scrgbClr r="0" g="0" b="0"/>
+        </a:fillRef>
+        <a:effectRef idx="0">
+          <a:scrgbClr r="0" g="0" b="0"/>
+        </a:effectRef>
+        <a:fontRef idx="minor">
+          <a:schemeClr val="lt1"/>
+        </a:fontRef>
+      </dsp:style>
+      <dsp:txBody>
+        <a:bodyPr spcFirstLastPara="0" vert="horz" wrap="square" lIns="41910" tIns="41910" rIns="41910" bIns="41910" numCol="1" spcCol="1270" anchor="ctr" anchorCtr="0">
+          <a:noAutofit/>
+        </a:bodyPr>
+        <a:lstStyle/>
+        <a:p>
+          <a:pPr marL="0" lvl="0" indent="0" algn="ctr" defTabSz="488950">
+            <a:lnSpc>
+              <a:spcPct val="90000"/>
+            </a:lnSpc>
+            <a:spcBef>
+              <a:spcPct val="0"/>
+            </a:spcBef>
+            <a:spcAft>
+              <a:spcPct val="35000"/>
+            </a:spcAft>
+            <a:buNone/>
+          </a:pPr>
+          <a:r>
+            <a:rPr kumimoji="1" lang="ja-JP" altLang="en-US" sz="1100" kern="1200">
+              <a:latin typeface="Hiragino Sans W4" panose="020B0400000000000000" pitchFamily="34" charset="-128"/>
+              <a:ea typeface="Hiragino Sans W4" panose="020B0400000000000000" pitchFamily="34" charset="-128"/>
+            </a:rPr>
+            <a:t>輸出</a:t>
+          </a:r>
+          <a:r>
+            <a:rPr kumimoji="1" lang="ja-JP" altLang="en-US" sz="1100" b="1" kern="1200">
+              <a:latin typeface="Hiragino Sans W4" panose="020B0400000000000000" pitchFamily="34" charset="-128"/>
+              <a:ea typeface="Hiragino Sans W4" panose="020B0400000000000000" pitchFamily="34" charset="-128"/>
+            </a:rPr>
+            <a:t>増加</a:t>
+          </a:r>
+          <a:br>
+            <a:rPr kumimoji="1" lang="en-US" altLang="ja-JP" sz="1100" kern="1200" dirty="0">
+              <a:latin typeface="Hiragino Sans W4" panose="020B0400000000000000" pitchFamily="34" charset="-128"/>
+              <a:ea typeface="Hiragino Sans W4" panose="020B0400000000000000" pitchFamily="34" charset="-128"/>
+            </a:rPr>
+          </a:br>
+          <a:r>
+            <a:rPr kumimoji="1" lang="ja-JP" altLang="en-US" sz="1100" kern="1200">
+              <a:latin typeface="Hiragino Sans W4" panose="020B0400000000000000" pitchFamily="34" charset="-128"/>
+              <a:ea typeface="Hiragino Sans W4" panose="020B0400000000000000" pitchFamily="34" charset="-128"/>
+            </a:rPr>
+            <a:t>輸入</a:t>
+          </a:r>
+          <a:r>
+            <a:rPr kumimoji="1" lang="ja-JP" altLang="en-US" sz="1100" b="1" kern="1200">
+              <a:latin typeface="Hiragino Sans W4" panose="020B0400000000000000" pitchFamily="34" charset="-128"/>
+              <a:ea typeface="Hiragino Sans W4" panose="020B0400000000000000" pitchFamily="34" charset="-128"/>
+            </a:rPr>
+            <a:t>減少</a:t>
+          </a:r>
+        </a:p>
+      </dsp:txBody>
+      <dsp:txXfrm>
+        <a:off x="4837539" y="4337583"/>
+        <a:ext cx="1249528" cy="592700"/>
+      </dsp:txXfrm>
+    </dsp:sp>
+    <dsp:sp modelId="{1DF87B89-7439-B148-B088-80277B1BDDD3}">
+      <dsp:nvSpPr>
+        <dsp:cNvPr id="0" name=""/>
+        <dsp:cNvSpPr/>
+      </dsp:nvSpPr>
+      <dsp:spPr>
+        <a:xfrm>
+          <a:off x="3407171" y="4759855"/>
+          <a:ext cx="1313656" cy="656828"/>
+        </a:xfrm>
+        <a:prstGeom prst="roundRect">
+          <a:avLst/>
+        </a:prstGeom>
+        <a:solidFill>
+          <a:schemeClr val="lt1">
+            <a:hueOff val="0"/>
+            <a:satOff val="0"/>
+            <a:lumOff val="0"/>
+            <a:alphaOff val="0"/>
+          </a:schemeClr>
+        </a:solidFill>
+        <a:ln w="12700" cap="flat" cmpd="sng" algn="ctr">
+          <a:solidFill>
+            <a:scrgbClr r="0" g="0" b="0"/>
+          </a:solidFill>
+          <a:prstDash val="solid"/>
+          <a:miter lim="800000"/>
+        </a:ln>
+        <a:effectLst/>
+      </dsp:spPr>
+      <dsp:style>
+        <a:lnRef idx="2">
+          <a:scrgbClr r="0" g="0" b="0"/>
+        </a:lnRef>
+        <a:fillRef idx="1">
+          <a:scrgbClr r="0" g="0" b="0"/>
+        </a:fillRef>
+        <a:effectRef idx="0">
+          <a:scrgbClr r="0" g="0" b="0"/>
+        </a:effectRef>
+        <a:fontRef idx="minor">
+          <a:schemeClr val="lt1"/>
+        </a:fontRef>
+      </dsp:style>
+      <dsp:txBody>
+        <a:bodyPr spcFirstLastPara="0" vert="horz" wrap="square" lIns="41910" tIns="41910" rIns="41910" bIns="41910" numCol="1" spcCol="1270" anchor="ctr" anchorCtr="0">
+          <a:noAutofit/>
+        </a:bodyPr>
+        <a:lstStyle/>
+        <a:p>
+          <a:pPr marL="0" lvl="0" indent="0" algn="ctr" defTabSz="488950">
+            <a:lnSpc>
+              <a:spcPct val="90000"/>
+            </a:lnSpc>
+            <a:spcBef>
+              <a:spcPct val="0"/>
+            </a:spcBef>
+            <a:spcAft>
+              <a:spcPct val="35000"/>
+            </a:spcAft>
+            <a:buNone/>
+          </a:pPr>
+          <a:r>
+            <a:rPr kumimoji="1" lang="ja-JP" altLang="en-US" sz="1100" kern="1200">
+              <a:latin typeface="Hiragino Sans W4" panose="020B0400000000000000" pitchFamily="34" charset="-128"/>
+              <a:ea typeface="Hiragino Sans W4" panose="020B0400000000000000" pitchFamily="34" charset="-128"/>
+            </a:rPr>
+            <a:t>貿易</a:t>
+          </a:r>
+          <a:r>
+            <a:rPr kumimoji="1" lang="ja-JP" altLang="en-US" sz="1100" b="1" kern="1200">
+              <a:latin typeface="Hiragino Sans W4" panose="020B0400000000000000" pitchFamily="34" charset="-128"/>
+              <a:ea typeface="Hiragino Sans W4" panose="020B0400000000000000" pitchFamily="34" charset="-128"/>
+            </a:rPr>
+            <a:t>黒字</a:t>
+          </a:r>
+        </a:p>
+      </dsp:txBody>
+      <dsp:txXfrm>
+        <a:off x="3439235" y="4791919"/>
+        <a:ext cx="1249528" cy="592700"/>
+      </dsp:txXfrm>
+    </dsp:sp>
+    <dsp:sp modelId="{93260571-C263-5C47-A419-401F437055EE}">
+      <dsp:nvSpPr>
+        <dsp:cNvPr id="0" name=""/>
+        <dsp:cNvSpPr/>
+      </dsp:nvSpPr>
+      <dsp:spPr>
+        <a:xfrm>
+          <a:off x="2008868" y="4305519"/>
+          <a:ext cx="1313656" cy="656828"/>
+        </a:xfrm>
+        <a:prstGeom prst="roundRect">
+          <a:avLst/>
+        </a:prstGeom>
+        <a:solidFill>
+          <a:schemeClr val="lt1">
+            <a:hueOff val="0"/>
+            <a:satOff val="0"/>
+            <a:lumOff val="0"/>
+            <a:alphaOff val="0"/>
+          </a:schemeClr>
+        </a:solidFill>
+        <a:ln w="12700" cap="flat" cmpd="sng" algn="ctr">
+          <a:solidFill>
+            <a:scrgbClr r="0" g="0" b="0"/>
+          </a:solidFill>
+          <a:prstDash val="solid"/>
+          <a:miter lim="800000"/>
+        </a:ln>
+        <a:effectLst/>
+      </dsp:spPr>
+      <dsp:style>
+        <a:lnRef idx="2">
+          <a:scrgbClr r="0" g="0" b="0"/>
+        </a:lnRef>
+        <a:fillRef idx="1">
+          <a:scrgbClr r="0" g="0" b="0"/>
+        </a:fillRef>
+        <a:effectRef idx="0">
+          <a:scrgbClr r="0" g="0" b="0"/>
+        </a:effectRef>
+        <a:fontRef idx="minor">
+          <a:schemeClr val="lt1"/>
+        </a:fontRef>
+      </dsp:style>
+      <dsp:txBody>
+        <a:bodyPr spcFirstLastPara="0" vert="horz" wrap="square" lIns="41910" tIns="41910" rIns="41910" bIns="41910" numCol="1" spcCol="1270" anchor="ctr" anchorCtr="0">
+          <a:noAutofit/>
+        </a:bodyPr>
+        <a:lstStyle/>
+        <a:p>
+          <a:pPr marL="0" lvl="0" indent="0" algn="ctr" defTabSz="488950">
+            <a:lnSpc>
+              <a:spcPct val="90000"/>
+            </a:lnSpc>
+            <a:spcBef>
+              <a:spcPct val="0"/>
+            </a:spcBef>
+            <a:spcAft>
+              <a:spcPct val="35000"/>
+            </a:spcAft>
+            <a:buNone/>
+          </a:pPr>
+          <a:r>
+            <a:rPr kumimoji="1" lang="ja-JP" altLang="en-US" sz="1100" kern="1200">
+              <a:latin typeface="Hiragino Sans W4" panose="020B0400000000000000" pitchFamily="34" charset="-128"/>
+              <a:ea typeface="Hiragino Sans W4" panose="020B0400000000000000" pitchFamily="34" charset="-128"/>
+            </a:rPr>
+            <a:t>自国通貨</a:t>
+          </a:r>
+          <a:r>
+            <a:rPr kumimoji="1" lang="ja-JP" altLang="en-US" sz="1100" b="1" kern="1200">
+              <a:latin typeface="Hiragino Sans W4" panose="020B0400000000000000" pitchFamily="34" charset="-128"/>
+              <a:ea typeface="Hiragino Sans W4" panose="020B0400000000000000" pitchFamily="34" charset="-128"/>
+            </a:rPr>
+            <a:t>増価</a:t>
+          </a:r>
+        </a:p>
+      </dsp:txBody>
+      <dsp:txXfrm>
+        <a:off x="2040932" y="4337583"/>
+        <a:ext cx="1249528" cy="592700"/>
+      </dsp:txXfrm>
+    </dsp:sp>
+    <dsp:sp modelId="{04F4F7BC-8951-3C4E-98FF-8EBAE9FEC36A}">
+      <dsp:nvSpPr>
+        <dsp:cNvPr id="0" name=""/>
+        <dsp:cNvSpPr/>
+      </dsp:nvSpPr>
+      <dsp:spPr>
+        <a:xfrm>
+          <a:off x="1144668" y="3116051"/>
+          <a:ext cx="1313656" cy="656828"/>
+        </a:xfrm>
+        <a:prstGeom prst="roundRect">
+          <a:avLst/>
+        </a:prstGeom>
+        <a:solidFill>
+          <a:schemeClr val="lt1">
+            <a:hueOff val="0"/>
+            <a:satOff val="0"/>
+            <a:lumOff val="0"/>
+            <a:alphaOff val="0"/>
+          </a:schemeClr>
+        </a:solidFill>
+        <a:ln w="19050" cap="flat" cmpd="sng" algn="ctr">
+          <a:solidFill>
+            <a:schemeClr val="dk1">
+              <a:shade val="80000"/>
+              <a:hueOff val="0"/>
+              <a:satOff val="0"/>
+              <a:lumOff val="0"/>
+              <a:alphaOff val="0"/>
+            </a:schemeClr>
+          </a:solidFill>
+          <a:prstDash val="solid"/>
+          <a:miter lim="800000"/>
+        </a:ln>
+        <a:effectLst/>
+      </dsp:spPr>
+      <dsp:style>
+        <a:lnRef idx="2">
+          <a:scrgbClr r="0" g="0" b="0"/>
+        </a:lnRef>
+        <a:fillRef idx="1">
+          <a:scrgbClr r="0" g="0" b="0"/>
+        </a:fillRef>
+        <a:effectRef idx="0">
+          <a:scrgbClr r="0" g="0" b="0"/>
+        </a:effectRef>
+        <a:fontRef idx="minor">
+          <a:schemeClr val="lt1"/>
+        </a:fontRef>
+      </dsp:style>
+      <dsp:txBody>
+        <a:bodyPr spcFirstLastPara="0" vert="horz" wrap="square" lIns="41910" tIns="41910" rIns="41910" bIns="41910" numCol="1" spcCol="1270" anchor="ctr" anchorCtr="0">
+          <a:noAutofit/>
+        </a:bodyPr>
+        <a:lstStyle/>
+        <a:p>
+          <a:pPr marL="0" lvl="0" indent="0" algn="ctr" defTabSz="488950">
+            <a:lnSpc>
+              <a:spcPct val="90000"/>
+            </a:lnSpc>
+            <a:spcBef>
+              <a:spcPct val="0"/>
+            </a:spcBef>
+            <a:spcAft>
+              <a:spcPct val="35000"/>
+            </a:spcAft>
+            <a:buNone/>
+          </a:pPr>
+          <a:r>
+            <a:rPr kumimoji="1" lang="ja-JP" altLang="en-US" sz="1100" kern="1200">
+              <a:latin typeface="Hiragino Sans W4" panose="020B0400000000000000" pitchFamily="34" charset="-128"/>
+              <a:ea typeface="Hiragino Sans W4" panose="020B0400000000000000" pitchFamily="34" charset="-128"/>
+            </a:rPr>
+            <a:t>為替介入</a:t>
+          </a:r>
+          <a:br>
+            <a:rPr kumimoji="1" lang="en-US" altLang="ja-JP" sz="1100" kern="1200" dirty="0">
+              <a:latin typeface="Hiragino Sans W4" panose="020B0400000000000000" pitchFamily="34" charset="-128"/>
+              <a:ea typeface="Hiragino Sans W4" panose="020B0400000000000000" pitchFamily="34" charset="-128"/>
+            </a:rPr>
+          </a:br>
+          <a:r>
+            <a:rPr kumimoji="1" lang="ja-JP" altLang="en-US" sz="1100" kern="1200">
+              <a:latin typeface="Hiragino Sans W4" panose="020B0400000000000000" pitchFamily="34" charset="-128"/>
+              <a:ea typeface="Hiragino Sans W4" panose="020B0400000000000000" pitchFamily="34" charset="-128"/>
+            </a:rPr>
+            <a:t>（自国通貨</a:t>
+          </a:r>
+          <a:r>
+            <a:rPr kumimoji="1" lang="ja-JP" altLang="en-US" sz="1100" b="1" kern="1200">
+              <a:latin typeface="Hiragino Sans W4" panose="020B0400000000000000" pitchFamily="34" charset="-128"/>
+              <a:ea typeface="Hiragino Sans W4" panose="020B0400000000000000" pitchFamily="34" charset="-128"/>
+            </a:rPr>
+            <a:t>売り</a:t>
+          </a:r>
+          <a:r>
+            <a:rPr kumimoji="1" lang="ja-JP" altLang="en-US" sz="1100" kern="1200">
+              <a:latin typeface="Hiragino Sans W4" panose="020B0400000000000000" pitchFamily="34" charset="-128"/>
+              <a:ea typeface="Hiragino Sans W4" panose="020B0400000000000000" pitchFamily="34" charset="-128"/>
+            </a:rPr>
+            <a:t>）</a:t>
+          </a:r>
+          <a:endParaRPr kumimoji="1" lang="ja-JP" altLang="en-US" sz="1100" kern="1200"/>
+        </a:p>
+      </dsp:txBody>
+      <dsp:txXfrm>
+        <a:off x="1176732" y="3148115"/>
+        <a:ext cx="1249528" cy="592700"/>
+      </dsp:txXfrm>
+    </dsp:sp>
+    <dsp:sp modelId="{501E3E8F-6299-5846-A6AE-B9980DA69887}">
+      <dsp:nvSpPr>
+        <dsp:cNvPr id="0" name=""/>
+        <dsp:cNvSpPr/>
+      </dsp:nvSpPr>
+      <dsp:spPr>
+        <a:xfrm>
+          <a:off x="1144668" y="1645787"/>
+          <a:ext cx="1313656" cy="656828"/>
+        </a:xfrm>
+        <a:prstGeom prst="roundRect">
+          <a:avLst/>
+        </a:prstGeom>
+        <a:solidFill>
+          <a:schemeClr val="lt1">
+            <a:hueOff val="0"/>
+            <a:satOff val="0"/>
+            <a:lumOff val="0"/>
+            <a:alphaOff val="0"/>
+          </a:schemeClr>
+        </a:solidFill>
+        <a:ln w="19050" cap="flat" cmpd="sng" algn="ctr">
+          <a:solidFill>
+            <a:schemeClr val="dk1">
+              <a:shade val="80000"/>
+              <a:hueOff val="0"/>
+              <a:satOff val="0"/>
+              <a:lumOff val="0"/>
+              <a:alphaOff val="0"/>
+            </a:schemeClr>
+          </a:solidFill>
+          <a:prstDash val="solid"/>
+          <a:miter lim="800000"/>
+        </a:ln>
+        <a:effectLst/>
+      </dsp:spPr>
+      <dsp:style>
+        <a:lnRef idx="2">
+          <a:scrgbClr r="0" g="0" b="0"/>
+        </a:lnRef>
+        <a:fillRef idx="1">
+          <a:scrgbClr r="0" g="0" b="0"/>
+        </a:fillRef>
+        <a:effectRef idx="0">
+          <a:scrgbClr r="0" g="0" b="0"/>
+        </a:effectRef>
+        <a:fontRef idx="minor">
+          <a:schemeClr val="lt1"/>
+        </a:fontRef>
+      </dsp:style>
+      <dsp:txBody>
+        <a:bodyPr spcFirstLastPara="0" vert="horz" wrap="square" lIns="41910" tIns="41910" rIns="41910" bIns="41910" numCol="1" spcCol="1270" anchor="ctr" anchorCtr="0">
+          <a:noAutofit/>
+        </a:bodyPr>
+        <a:lstStyle/>
+        <a:p>
+          <a:pPr marL="0" lvl="0" indent="0" algn="ctr" defTabSz="488950">
+            <a:lnSpc>
+              <a:spcPct val="90000"/>
+            </a:lnSpc>
+            <a:spcBef>
+              <a:spcPct val="0"/>
+            </a:spcBef>
+            <a:spcAft>
+              <a:spcPct val="35000"/>
+            </a:spcAft>
+            <a:buNone/>
+          </a:pPr>
+          <a:r>
+            <a:rPr kumimoji="1" lang="ja-JP" altLang="en-US" sz="1100" kern="1200">
+              <a:latin typeface="Hiragino Sans W4" panose="020B0400000000000000" pitchFamily="34" charset="-128"/>
+              <a:ea typeface="Hiragino Sans W4" panose="020B0400000000000000" pitchFamily="34" charset="-128"/>
+            </a:rPr>
+            <a:t>物価安</a:t>
+          </a:r>
+          <a:br>
+            <a:rPr kumimoji="1" lang="en-US" altLang="ja-JP" sz="1100" kern="1200" dirty="0">
+              <a:latin typeface="Hiragino Sans W4" panose="020B0400000000000000" pitchFamily="34" charset="-128"/>
+              <a:ea typeface="Hiragino Sans W4" panose="020B0400000000000000" pitchFamily="34" charset="-128"/>
+            </a:rPr>
+          </a:br>
+          <a:r>
+            <a:rPr kumimoji="1" lang="ja-JP" altLang="en-US" sz="1100" kern="1200">
+              <a:latin typeface="Hiragino Sans W4" panose="020B0400000000000000" pitchFamily="34" charset="-128"/>
+              <a:ea typeface="Hiragino Sans W4" panose="020B0400000000000000" pitchFamily="34" charset="-128"/>
+            </a:rPr>
+            <a:t>（</a:t>
+          </a:r>
+          <a:r>
+            <a:rPr kumimoji="1" lang="ja-JP" altLang="en-US" sz="1100" b="1" kern="1200">
+              <a:latin typeface="Hiragino Sans W4" panose="020B0400000000000000" pitchFamily="34" charset="-128"/>
+              <a:ea typeface="Hiragino Sans W4" panose="020B0400000000000000" pitchFamily="34" charset="-128"/>
+            </a:rPr>
+            <a:t>インフレ</a:t>
+          </a:r>
+          <a:r>
+            <a:rPr kumimoji="1" lang="ja-JP" altLang="en-US" sz="1100" kern="1200">
+              <a:latin typeface="Hiragino Sans W4" panose="020B0400000000000000" pitchFamily="34" charset="-128"/>
+              <a:ea typeface="Hiragino Sans W4" panose="020B0400000000000000" pitchFamily="34" charset="-128"/>
+            </a:rPr>
+            <a:t>）</a:t>
+          </a:r>
+          <a:endParaRPr kumimoji="1" lang="ja-JP" altLang="en-US" sz="1100" kern="1200"/>
+        </a:p>
+      </dsp:txBody>
+      <dsp:txXfrm>
+        <a:off x="1176732" y="1677851"/>
+        <a:ext cx="1249528" cy="592700"/>
+      </dsp:txXfrm>
+    </dsp:sp>
+    <dsp:sp modelId="{5A043805-F757-CF4A-9485-BE4798BC4994}">
+      <dsp:nvSpPr>
+        <dsp:cNvPr id="0" name=""/>
+        <dsp:cNvSpPr/>
+      </dsp:nvSpPr>
+      <dsp:spPr>
+        <a:xfrm>
+          <a:off x="2008868" y="456319"/>
+          <a:ext cx="1313656" cy="656828"/>
+        </a:xfrm>
+        <a:prstGeom prst="roundRect">
+          <a:avLst/>
+        </a:prstGeom>
+        <a:solidFill>
+          <a:schemeClr val="lt1">
+            <a:hueOff val="0"/>
+            <a:satOff val="0"/>
+            <a:lumOff val="0"/>
+            <a:alphaOff val="0"/>
+          </a:schemeClr>
+        </a:solidFill>
+        <a:ln w="12700" cap="flat" cmpd="sng" algn="ctr">
+          <a:solidFill>
+            <a:scrgbClr r="0" g="0" b="0"/>
+          </a:solidFill>
+          <a:prstDash val="solid"/>
+          <a:miter lim="800000"/>
+        </a:ln>
+        <a:effectLst/>
+      </dsp:spPr>
+      <dsp:style>
+        <a:lnRef idx="2">
+          <a:scrgbClr r="0" g="0" b="0"/>
+        </a:lnRef>
+        <a:fillRef idx="1">
+          <a:scrgbClr r="0" g="0" b="0"/>
+        </a:fillRef>
+        <a:effectRef idx="0">
+          <a:scrgbClr r="0" g="0" b="0"/>
+        </a:effectRef>
+        <a:fontRef idx="minor">
+          <a:schemeClr val="lt1"/>
+        </a:fontRef>
+      </dsp:style>
+      <dsp:txBody>
+        <a:bodyPr spcFirstLastPara="0" vert="horz" wrap="square" lIns="41910" tIns="41910" rIns="41910" bIns="41910" numCol="1" spcCol="1270" anchor="ctr" anchorCtr="0">
+          <a:noAutofit/>
+        </a:bodyPr>
+        <a:lstStyle/>
+        <a:p>
+          <a:pPr marL="0" lvl="0" indent="0" algn="ctr" defTabSz="488950">
+            <a:lnSpc>
+              <a:spcPct val="90000"/>
+            </a:lnSpc>
+            <a:spcBef>
+              <a:spcPct val="0"/>
+            </a:spcBef>
+            <a:spcAft>
+              <a:spcPct val="35000"/>
+            </a:spcAft>
+            <a:buNone/>
+          </a:pPr>
+          <a:r>
+            <a:rPr kumimoji="1" lang="ja-JP" altLang="en-US" sz="1100" kern="1200">
+              <a:latin typeface="Hiragino Sans W4" panose="020B0400000000000000" pitchFamily="34" charset="-128"/>
+              <a:ea typeface="Hiragino Sans W4" panose="020B0400000000000000" pitchFamily="34" charset="-128"/>
+            </a:rPr>
+            <a:t>輸出</a:t>
+          </a:r>
+          <a:r>
+            <a:rPr kumimoji="1" lang="ja-JP" altLang="en-US" sz="1100" b="1" kern="1200">
+              <a:latin typeface="Hiragino Sans W4" panose="020B0400000000000000" pitchFamily="34" charset="-128"/>
+              <a:ea typeface="Hiragino Sans W4" panose="020B0400000000000000" pitchFamily="34" charset="-128"/>
+            </a:rPr>
+            <a:t>減少</a:t>
+          </a:r>
+          <a:br>
+            <a:rPr kumimoji="1" lang="en-US" altLang="ja-JP" sz="1100" kern="1200" dirty="0">
+              <a:latin typeface="Hiragino Sans W4" panose="020B0400000000000000" pitchFamily="34" charset="-128"/>
+              <a:ea typeface="Hiragino Sans W4" panose="020B0400000000000000" pitchFamily="34" charset="-128"/>
+            </a:rPr>
+          </a:br>
+          <a:r>
+            <a:rPr kumimoji="1" lang="ja-JP" altLang="en-US" sz="1100" kern="1200">
+              <a:latin typeface="Hiragino Sans W4" panose="020B0400000000000000" pitchFamily="34" charset="-128"/>
+              <a:ea typeface="Hiragino Sans W4" panose="020B0400000000000000" pitchFamily="34" charset="-128"/>
+            </a:rPr>
+            <a:t>輸入</a:t>
+          </a:r>
+          <a:r>
+            <a:rPr kumimoji="1" lang="ja-JP" altLang="en-US" sz="1100" b="1" kern="1200">
+              <a:latin typeface="Hiragino Sans W4" panose="020B0400000000000000" pitchFamily="34" charset="-128"/>
+              <a:ea typeface="Hiragino Sans W4" panose="020B0400000000000000" pitchFamily="34" charset="-128"/>
+            </a:rPr>
+            <a:t>増加</a:t>
+          </a:r>
+        </a:p>
+      </dsp:txBody>
+      <dsp:txXfrm>
+        <a:off x="2040932" y="488383"/>
+        <a:ext cx="1249528" cy="592700"/>
       </dsp:txXfrm>
     </dsp:sp>
   </dsp:spTree>
@@ -5405,6 +8047,409 @@
 </dgm:layoutDef>
 </file>
 
+<file path=ppt/diagrams/layout3.xml><?xml version="1.0" encoding="utf-8"?>
+<dgm:layoutDef xmlns:dgm="http://schemas.openxmlformats.org/drawingml/2006/diagram" xmlns:a="http://schemas.openxmlformats.org/drawingml/2006/main" uniqueId="urn:microsoft.com/office/officeart/2005/8/layout/cycle3">
+  <dgm:title val=""/>
+  <dgm:desc val=""/>
+  <dgm:catLst>
+    <dgm:cat type="cycle" pri="5000"/>
+  </dgm:catLst>
+  <dgm:sampData>
+    <dgm:dataModel>
+      <dgm:ptLst>
+        <dgm:pt modelId="0" type="doc"/>
+        <dgm:pt modelId="1">
+          <dgm:prSet phldr="1"/>
+        </dgm:pt>
+        <dgm:pt modelId="2">
+          <dgm:prSet phldr="1"/>
+        </dgm:pt>
+        <dgm:pt modelId="3">
+          <dgm:prSet phldr="1"/>
+        </dgm:pt>
+        <dgm:pt modelId="4">
+          <dgm:prSet phldr="1"/>
+        </dgm:pt>
+        <dgm:pt modelId="5">
+          <dgm:prSet phldr="1"/>
+        </dgm:pt>
+      </dgm:ptLst>
+      <dgm:cxnLst>
+        <dgm:cxn modelId="6" srcId="0" destId="1" srcOrd="0" destOrd="0"/>
+        <dgm:cxn modelId="7" srcId="0" destId="2" srcOrd="1" destOrd="0"/>
+        <dgm:cxn modelId="8" srcId="0" destId="3" srcOrd="2" destOrd="0"/>
+        <dgm:cxn modelId="9" srcId="0" destId="4" srcOrd="3" destOrd="0"/>
+        <dgm:cxn modelId="10" srcId="0" destId="5" srcOrd="4" destOrd="0"/>
+      </dgm:cxnLst>
+      <dgm:bg/>
+      <dgm:whole/>
+    </dgm:dataModel>
+  </dgm:sampData>
+  <dgm:styleData>
+    <dgm:dataModel>
+      <dgm:ptLst>
+        <dgm:pt modelId="0" type="doc"/>
+        <dgm:pt modelId="1"/>
+        <dgm:pt modelId="2"/>
+        <dgm:pt modelId="3"/>
+      </dgm:ptLst>
+      <dgm:cxnLst>
+        <dgm:cxn modelId="4" srcId="0" destId="1" srcOrd="0" destOrd="0"/>
+        <dgm:cxn modelId="5" srcId="0" destId="2" srcOrd="1" destOrd="0"/>
+        <dgm:cxn modelId="6" srcId="0" destId="3" srcOrd="2" destOrd="0"/>
+      </dgm:cxnLst>
+      <dgm:bg/>
+      <dgm:whole/>
+    </dgm:dataModel>
+  </dgm:styleData>
+  <dgm:clrData>
+    <dgm:dataModel>
+      <dgm:ptLst>
+        <dgm:pt modelId="0" type="doc"/>
+        <dgm:pt modelId="1"/>
+        <dgm:pt modelId="2"/>
+        <dgm:pt modelId="3"/>
+        <dgm:pt modelId="4"/>
+        <dgm:pt modelId="5"/>
+        <dgm:pt modelId="6"/>
+      </dgm:ptLst>
+      <dgm:cxnLst>
+        <dgm:cxn modelId="7" srcId="0" destId="1" srcOrd="0" destOrd="0"/>
+        <dgm:cxn modelId="8" srcId="0" destId="2" srcOrd="1" destOrd="0"/>
+        <dgm:cxn modelId="9" srcId="0" destId="3" srcOrd="2" destOrd="0"/>
+        <dgm:cxn modelId="10" srcId="0" destId="4" srcOrd="3" destOrd="0"/>
+        <dgm:cxn modelId="11" srcId="0" destId="5" srcOrd="4" destOrd="0"/>
+        <dgm:cxn modelId="12" srcId="0" destId="6" srcOrd="5" destOrd="0"/>
+      </dgm:cxnLst>
+      <dgm:bg/>
+      <dgm:whole/>
+    </dgm:dataModel>
+  </dgm:clrData>
+  <dgm:layoutNode name="Name0">
+    <dgm:varLst>
+      <dgm:dir/>
+      <dgm:resizeHandles val="exact"/>
+    </dgm:varLst>
+    <dgm:choose name="Name1">
+      <dgm:if name="Name2" axis="ch" ptType="node" func="cnt" op="equ" val="2">
+        <dgm:alg type="composite">
+          <dgm:param type="ar" val="0.9"/>
+        </dgm:alg>
+        <dgm:shape xmlns:r="http://schemas.openxmlformats.org/officeDocument/2006/relationships" r:blip="">
+          <dgm:adjLst/>
+        </dgm:shape>
+        <dgm:presOf/>
+        <dgm:constrLst>
+          <dgm:constr type="primFontSz" for="ch" ptType="node" op="equ" val="65"/>
+          <dgm:constr type="ctrX" for="ch" forName="node1" refType="w" fact="0.5"/>
+          <dgm:constr type="t" for="ch" forName="node1"/>
+          <dgm:constr type="w" for="ch" forName="node1" refType="w" fact="0.8"/>
+          <dgm:constr type="h" for="ch" forName="node1" refType="w" refFor="ch" refForName="node1" fact="0.5"/>
+          <dgm:constr type="ctrX" for="ch" forName="sibTrans" refType="w" fact="0.5"/>
+          <dgm:constr type="t" for="ch" forName="sibTrans"/>
+          <dgm:constr type="w" for="ch" forName="sibTrans" refType="w" fact="0.8"/>
+          <dgm:constr type="h" for="ch" forName="sibTrans" refType="w" refFor="ch" refForName="node1" fact="0.5"/>
+          <dgm:constr type="userA" for="ch" forName="sibTrans" refType="w" fact="1.07"/>
+          <dgm:constr type="ctrX" for="ch" forName="node2" refType="w" fact="0.5"/>
+          <dgm:constr type="b" for="ch" forName="node2" refType="h"/>
+          <dgm:constr type="w" for="ch" forName="node2" refType="w" fact="0.8"/>
+          <dgm:constr type="h" for="ch" forName="node2" refType="w" refFor="ch" refForName="node1" fact="0.5"/>
+          <dgm:constr type="l" for="ch" forName="sp1"/>
+          <dgm:constr type="t" for="ch" forName="sp1" refType="h" fact="0.5"/>
+          <dgm:constr type="w" for="ch" forName="sp1" val="1"/>
+          <dgm:constr type="h" for="ch" forName="sp1" val="1"/>
+          <dgm:constr type="r" for="ch" forName="sp2" refType="w"/>
+          <dgm:constr type="t" for="ch" forName="sp2" refType="h" fact="0.5"/>
+          <dgm:constr type="w" for="ch" forName="sp2" val="1"/>
+          <dgm:constr type="h" for="ch" forName="sp2" val="1"/>
+        </dgm:constrLst>
+        <dgm:ruleLst/>
+      </dgm:if>
+      <dgm:else name="Name3">
+        <dgm:alg type="composite"/>
+        <dgm:shape xmlns:r="http://schemas.openxmlformats.org/officeDocument/2006/relationships" r:blip="">
+          <dgm:adjLst/>
+        </dgm:shape>
+        <dgm:presOf/>
+        <dgm:constrLst>
+          <dgm:constr type="primFontSz" for="ch" ptType="node" op="equ" val="65"/>
+        </dgm:constrLst>
+        <dgm:ruleLst/>
+      </dgm:else>
+    </dgm:choose>
+    <dgm:choose name="Name4">
+      <dgm:if name="Name5" axis="ch" ptType="node" func="cnt" op="equ" val="2">
+        <dgm:layoutNode name="node1">
+          <dgm:varLst>
+            <dgm:bulletEnabled val="1"/>
+          </dgm:varLst>
+          <dgm:alg type="tx"/>
+          <dgm:shape xmlns:r="http://schemas.openxmlformats.org/officeDocument/2006/relationships" type="roundRect" r:blip="">
+            <dgm:adjLst/>
+          </dgm:shape>
+          <dgm:presOf axis="ch desOrSelf" ptType="node node" st="1 1" cnt="1 0"/>
+          <dgm:constrLst>
+            <dgm:constr type="tMarg" refType="primFontSz" fact="0.3"/>
+            <dgm:constr type="bMarg" refType="primFontSz" fact="0.3"/>
+            <dgm:constr type="lMarg" refType="primFontSz" fact="0.3"/>
+            <dgm:constr type="rMarg" refType="primFontSz" fact="0.3"/>
+          </dgm:constrLst>
+          <dgm:ruleLst>
+            <dgm:rule type="primFontSz" val="5" fact="NaN" max="NaN"/>
+          </dgm:ruleLst>
+        </dgm:layoutNode>
+        <dgm:layoutNode name="sibTrans" styleLbl="bgShp">
+          <dgm:choose name="Name6">
+            <dgm:if name="Name7" func="var" arg="dir" op="equ" val="norm">
+              <dgm:alg type="conn">
+                <dgm:param type="connRout" val="longCurve"/>
+                <dgm:param type="begPts" val="midR"/>
+                <dgm:param type="endPts" val="midL"/>
+                <dgm:param type="dstNode" val="node1"/>
+              </dgm:alg>
+              <dgm:shape xmlns:r="http://schemas.openxmlformats.org/officeDocument/2006/relationships" type="conn" r:blip="" zOrderOff="-2">
+                <dgm:adjLst/>
+              </dgm:shape>
+              <dgm:presOf axis="ch" ptType="sibTrans"/>
+              <dgm:constrLst>
+                <dgm:constr type="userA"/>
+                <dgm:constr type="diam" refType="userA" fact="-1"/>
+                <dgm:constr type="wArH" refType="userA" fact="0.05"/>
+                <dgm:constr type="hArH" refType="userA" fact="0.1"/>
+                <dgm:constr type="stemThick" refType="userA" fact="0.06"/>
+                <dgm:constr type="begPad" refType="connDist" fact="-0.2"/>
+                <dgm:constr type="endPad" refType="connDist" fact="0.05"/>
+              </dgm:constrLst>
+            </dgm:if>
+            <dgm:else name="Name8">
+              <dgm:alg type="conn">
+                <dgm:param type="connRout" val="longCurve"/>
+                <dgm:param type="begPts" val="midL"/>
+                <dgm:param type="endPts" val="midR"/>
+                <dgm:param type="dstNode" val="node1"/>
+              </dgm:alg>
+              <dgm:shape xmlns:r="http://schemas.openxmlformats.org/officeDocument/2006/relationships" type="conn" r:blip="" zOrderOff="-2">
+                <dgm:adjLst/>
+              </dgm:shape>
+              <dgm:presOf axis="ch" ptType="sibTrans"/>
+              <dgm:constrLst>
+                <dgm:constr type="userA"/>
+                <dgm:constr type="diam" refType="userA"/>
+                <dgm:constr type="wArH" refType="userA" fact="0.05"/>
+                <dgm:constr type="hArH" refType="userA" fact="0.1"/>
+                <dgm:constr type="stemThick" refType="userA" fact="0.06"/>
+                <dgm:constr type="begPad" refType="connDist" fact="-0.2"/>
+                <dgm:constr type="endPad" refType="connDist" fact="0.05"/>
+              </dgm:constrLst>
+            </dgm:else>
+          </dgm:choose>
+          <dgm:ruleLst/>
+        </dgm:layoutNode>
+        <dgm:layoutNode name="node2">
+          <dgm:varLst>
+            <dgm:bulletEnabled val="1"/>
+          </dgm:varLst>
+          <dgm:alg type="tx"/>
+          <dgm:shape xmlns:r="http://schemas.openxmlformats.org/officeDocument/2006/relationships" type="roundRect" r:blip="">
+            <dgm:adjLst/>
+          </dgm:shape>
+          <dgm:presOf axis="ch desOrSelf" ptType="node node" st="2 1" cnt="1 0"/>
+          <dgm:constrLst>
+            <dgm:constr type="tMarg" refType="primFontSz" fact="0.3"/>
+            <dgm:constr type="bMarg" refType="primFontSz" fact="0.3"/>
+            <dgm:constr type="lMarg" refType="primFontSz" fact="0.3"/>
+            <dgm:constr type="rMarg" refType="primFontSz" fact="0.3"/>
+          </dgm:constrLst>
+          <dgm:ruleLst>
+            <dgm:rule type="primFontSz" val="5" fact="NaN" max="NaN"/>
+          </dgm:ruleLst>
+        </dgm:layoutNode>
+        <dgm:layoutNode name="sp1">
+          <dgm:alg type="sp"/>
+          <dgm:shape xmlns:r="http://schemas.openxmlformats.org/officeDocument/2006/relationships" r:blip="">
+            <dgm:adjLst/>
+          </dgm:shape>
+          <dgm:presOf/>
+          <dgm:constrLst/>
+          <dgm:ruleLst/>
+        </dgm:layoutNode>
+        <dgm:layoutNode name="sp2">
+          <dgm:alg type="sp"/>
+          <dgm:shape xmlns:r="http://schemas.openxmlformats.org/officeDocument/2006/relationships" r:blip="">
+            <dgm:adjLst/>
+          </dgm:shape>
+          <dgm:presOf/>
+          <dgm:constrLst/>
+          <dgm:ruleLst/>
+        </dgm:layoutNode>
+      </dgm:if>
+      <dgm:else name="Name9">
+        <dgm:layoutNode name="cycle">
+          <dgm:choose name="Name10">
+            <dgm:if name="Name11" func="var" arg="dir" op="equ" val="norm">
+              <dgm:alg type="cycle">
+                <dgm:param type="stAng" val="0"/>
+                <dgm:param type="spanAng" val="360"/>
+              </dgm:alg>
+              <dgm:shape xmlns:r="http://schemas.openxmlformats.org/officeDocument/2006/relationships" r:blip="">
+                <dgm:adjLst/>
+              </dgm:shape>
+              <dgm:presOf/>
+              <dgm:constrLst>
+                <dgm:constr type="diam" refType="w"/>
+                <dgm:constr type="w" for="ch" ptType="node" refType="w"/>
+                <dgm:constr type="sibSp" val="15"/>
+                <dgm:constr type="userA" for="ch" ptType="sibTrans" refType="diam" op="equ" fact="-1"/>
+                <dgm:constr type="wArH" for="ch" ptType="sibTrans" refType="diam" op="equ" fact="0.05"/>
+                <dgm:constr type="hArH" for="ch" ptType="sibTrans" refType="diam" op="equ" fact="0.1"/>
+                <dgm:constr type="stemThick" for="ch" ptType="sibTrans" refType="diam" op="equ" fact="0.065"/>
+                <dgm:constr type="primFontSz" for="ch" ptType="node" op="equ"/>
+              </dgm:constrLst>
+            </dgm:if>
+            <dgm:else name="Name12">
+              <dgm:alg type="cycle">
+                <dgm:param type="stAng" val="0"/>
+                <dgm:param type="spanAng" val="-360"/>
+              </dgm:alg>
+              <dgm:shape xmlns:r="http://schemas.openxmlformats.org/officeDocument/2006/relationships" r:blip="">
+                <dgm:adjLst/>
+              </dgm:shape>
+              <dgm:presOf/>
+              <dgm:constrLst>
+                <dgm:constr type="diam" refType="w"/>
+                <dgm:constr type="w" for="ch" ptType="node" refType="w"/>
+                <dgm:constr type="sibSp" val="15"/>
+                <dgm:constr type="userA" for="ch" ptType="sibTrans" refType="diam" op="equ"/>
+                <dgm:constr type="wArH" for="ch" ptType="sibTrans" refType="diam" op="equ" fact="0.05"/>
+                <dgm:constr type="hArH" for="ch" ptType="sibTrans" refType="diam" op="equ" fact="0.1"/>
+                <dgm:constr type="stemThick" for="ch" ptType="sibTrans" refType="diam" op="equ" fact="0.065"/>
+                <dgm:constr type="primFontSz" for="ch" ptType="node" op="equ"/>
+              </dgm:constrLst>
+            </dgm:else>
+          </dgm:choose>
+          <dgm:ruleLst/>
+          <dgm:forEach name="nodesFirstNodeForEach" axis="ch" ptType="node" cnt="1">
+            <dgm:layoutNode name="nodeFirstNode">
+              <dgm:varLst>
+                <dgm:bulletEnabled val="1"/>
+              </dgm:varLst>
+              <dgm:alg type="tx"/>
+              <dgm:shape xmlns:r="http://schemas.openxmlformats.org/officeDocument/2006/relationships" type="roundRect" r:blip="">
+                <dgm:adjLst/>
+              </dgm:shape>
+              <dgm:presOf axis="desOrSelf" ptType="node"/>
+              <dgm:constrLst>
+                <dgm:constr type="h" refType="w" fact="0.5"/>
+                <dgm:constr type="primFontSz" val="65"/>
+                <dgm:constr type="tMarg" refType="primFontSz" fact="0.3"/>
+                <dgm:constr type="bMarg" refType="primFontSz" fact="0.3"/>
+                <dgm:constr type="lMarg" refType="primFontSz" fact="0.3"/>
+                <dgm:constr type="rMarg" refType="primFontSz" fact="0.3"/>
+              </dgm:constrLst>
+              <dgm:ruleLst>
+                <dgm:rule type="primFontSz" val="5" fact="NaN" max="NaN"/>
+              </dgm:ruleLst>
+            </dgm:layoutNode>
+            <dgm:forEach name="sibTransForEach" axis="followSib" ptType="sibTrans" cnt="1">
+              <dgm:layoutNode name="sibTransFirstNode" styleLbl="bgShp">
+                <dgm:choose name="Name13">
+                  <dgm:if name="Name14" func="var" arg="dir" op="equ" val="norm">
+                    <dgm:alg type="conn">
+                      <dgm:param type="connRout" val="longCurve"/>
+                      <dgm:param type="begPts" val="midR"/>
+                      <dgm:param type="endPts" val="midL"/>
+                      <dgm:param type="dstNode" val="nodeFirstNode"/>
+                    </dgm:alg>
+                  </dgm:if>
+                  <dgm:else name="Name15">
+                    <dgm:alg type="conn">
+                      <dgm:param type="connRout" val="longCurve"/>
+                      <dgm:param type="begPts" val="midL"/>
+                      <dgm:param type="endPts" val="midR"/>
+                      <dgm:param type="dstNode" val="nodeFirstNode"/>
+                    </dgm:alg>
+                  </dgm:else>
+                </dgm:choose>
+                <dgm:shape xmlns:r="http://schemas.openxmlformats.org/officeDocument/2006/relationships" type="conn" r:blip="" zOrderOff="-2">
+                  <dgm:adjLst/>
+                </dgm:shape>
+                <dgm:presOf axis="self"/>
+                <dgm:choose name="Name16">
+                  <dgm:if name="Name17" axis="par ch" ptType="doc node" func="cnt" op="equ" val="3">
+                    <dgm:constrLst>
+                      <dgm:constr type="userA"/>
+                      <dgm:constr type="diam" refType="userA" fact="1.01"/>
+                      <dgm:constr type="begPad" refType="connDist" fact="-0.2"/>
+                      <dgm:constr type="endPad" refType="connDist" fact="0.05"/>
+                    </dgm:constrLst>
+                  </dgm:if>
+                  <dgm:if name="Name18" axis="par ch" ptType="doc node" func="cnt" op="equ" val="4">
+                    <dgm:constrLst>
+                      <dgm:constr type="userA"/>
+                      <dgm:constr type="diam" refType="userA" fact="1.26"/>
+                      <dgm:constr type="begPad" refType="connDist" fact="-0.2"/>
+                      <dgm:constr type="endPad" refType="connDist" fact="0.05"/>
+                    </dgm:constrLst>
+                  </dgm:if>
+                  <dgm:if name="Name19" axis="par ch" ptType="doc node" func="cnt" op="equ" val="5">
+                    <dgm:constrLst>
+                      <dgm:constr type="userA"/>
+                      <dgm:constr type="diam" refType="userA" fact="1.04"/>
+                      <dgm:constr type="begPad" refType="connDist" fact="-0.2"/>
+                      <dgm:constr type="endPad" refType="connDist" fact="0.05"/>
+                    </dgm:constrLst>
+                  </dgm:if>
+                  <dgm:if name="Name20" axis="par ch" ptType="doc node" func="cnt" op="equ" val="6">
+                    <dgm:constrLst>
+                      <dgm:constr type="userA"/>
+                      <dgm:constr type="diam" refType="userA" fact="1.1"/>
+                      <dgm:constr type="begPad" refType="connDist" fact="-0.2"/>
+                      <dgm:constr type="endPad" refType="connDist" fact="0.05"/>
+                    </dgm:constrLst>
+                  </dgm:if>
+                  <dgm:else name="Name21">
+                    <dgm:constrLst>
+                      <dgm:constr type="userA"/>
+                      <dgm:constr type="diam" refType="userA" fact="1.04"/>
+                      <dgm:constr type="begPad" refType="connDist" fact="-0.2"/>
+                      <dgm:constr type="endPad" refType="connDist" fact="0.05"/>
+                    </dgm:constrLst>
+                  </dgm:else>
+                </dgm:choose>
+                <dgm:ruleLst/>
+              </dgm:layoutNode>
+            </dgm:forEach>
+          </dgm:forEach>
+          <dgm:forEach name="followingNodesForEach" axis="ch" ptType="node" st="2">
+            <dgm:layoutNode name="nodeFollowingNodes">
+              <dgm:varLst>
+                <dgm:bulletEnabled val="1"/>
+              </dgm:varLst>
+              <dgm:alg type="tx"/>
+              <dgm:shape xmlns:r="http://schemas.openxmlformats.org/officeDocument/2006/relationships" type="roundRect" r:blip="">
+                <dgm:adjLst/>
+              </dgm:shape>
+              <dgm:presOf axis="desOrSelf" ptType="node"/>
+              <dgm:constrLst>
+                <dgm:constr type="h" refType="w" fact="0.5"/>
+                <dgm:constr type="primFontSz" val="65"/>
+                <dgm:constr type="tMarg" refType="primFontSz" fact="0.3"/>
+                <dgm:constr type="bMarg" refType="primFontSz" fact="0.3"/>
+                <dgm:constr type="lMarg" refType="primFontSz" fact="0.3"/>
+                <dgm:constr type="rMarg" refType="primFontSz" fact="0.3"/>
+              </dgm:constrLst>
+              <dgm:ruleLst>
+                <dgm:rule type="primFontSz" val="5" fact="NaN" max="NaN"/>
+              </dgm:ruleLst>
+            </dgm:layoutNode>
+          </dgm:forEach>
+        </dgm:layoutNode>
+      </dgm:else>
+    </dgm:choose>
+  </dgm:layoutNode>
+</dgm:layoutDef>
+</file>
+
 <file path=ppt/diagrams/quickStyle1.xml><?xml version="1.0" encoding="utf-8"?>
 <dgm:styleDef xmlns:dgm="http://schemas.openxmlformats.org/drawingml/2006/diagram" xmlns:a="http://schemas.openxmlformats.org/drawingml/2006/main" uniqueId="urn:microsoft.com/office/officeart/2005/8/quickstyle/simple1">
   <dgm:title val=""/>
@@ -6440,6 +9485,1040 @@
 </file>
 
 <file path=ppt/diagrams/quickStyle2.xml><?xml version="1.0" encoding="utf-8"?>
+<dgm:styleDef xmlns:dgm="http://schemas.openxmlformats.org/drawingml/2006/diagram" xmlns:a="http://schemas.openxmlformats.org/drawingml/2006/main" uniqueId="urn:microsoft.com/office/officeart/2005/8/quickstyle/simple1">
+  <dgm:title val=""/>
+  <dgm:desc val=""/>
+  <dgm:catLst>
+    <dgm:cat type="simple" pri="10100"/>
+  </dgm:catLst>
+  <dgm:scene3d>
+    <a:camera prst="orthographicFront"/>
+    <a:lightRig rig="threePt" dir="t"/>
+  </dgm:scene3d>
+  <dgm:styleLbl name="node0">
+    <dgm:scene3d>
+      <a:camera prst="orthographicFront"/>
+      <a:lightRig rig="threePt" dir="t"/>
+    </dgm:scene3d>
+    <dgm:sp3d/>
+    <dgm:txPr/>
+    <dgm:style>
+      <a:lnRef idx="2">
+        <a:scrgbClr r="0" g="0" b="0"/>
+      </a:lnRef>
+      <a:fillRef idx="1">
+        <a:scrgbClr r="0" g="0" b="0"/>
+      </a:fillRef>
+      <a:effectRef idx="0">
+        <a:scrgbClr r="0" g="0" b="0"/>
+      </a:effectRef>
+      <a:fontRef idx="minor">
+        <a:schemeClr val="lt1"/>
+      </a:fontRef>
+    </dgm:style>
+  </dgm:styleLbl>
+  <dgm:styleLbl name="lnNode1">
+    <dgm:scene3d>
+      <a:camera prst="orthographicFront"/>
+      <a:lightRig rig="threePt" dir="t"/>
+    </dgm:scene3d>
+    <dgm:sp3d/>
+    <dgm:txPr/>
+    <dgm:style>
+      <a:lnRef idx="2">
+        <a:scrgbClr r="0" g="0" b="0"/>
+      </a:lnRef>
+      <a:fillRef idx="1">
+        <a:scrgbClr r="0" g="0" b="0"/>
+      </a:fillRef>
+      <a:effectRef idx="0">
+        <a:scrgbClr r="0" g="0" b="0"/>
+      </a:effectRef>
+      <a:fontRef idx="minor">
+        <a:schemeClr val="lt1"/>
+      </a:fontRef>
+    </dgm:style>
+  </dgm:styleLbl>
+  <dgm:styleLbl name="vennNode1">
+    <dgm:scene3d>
+      <a:camera prst="orthographicFront"/>
+      <a:lightRig rig="threePt" dir="t"/>
+    </dgm:scene3d>
+    <dgm:sp3d/>
+    <dgm:txPr/>
+    <dgm:style>
+      <a:lnRef idx="2">
+        <a:scrgbClr r="0" g="0" b="0"/>
+      </a:lnRef>
+      <a:fillRef idx="1">
+        <a:scrgbClr r="0" g="0" b="0"/>
+      </a:fillRef>
+      <a:effectRef idx="0">
+        <a:scrgbClr r="0" g="0" b="0"/>
+      </a:effectRef>
+      <a:fontRef idx="minor">
+        <a:schemeClr val="tx1"/>
+      </a:fontRef>
+    </dgm:style>
+  </dgm:styleLbl>
+  <dgm:styleLbl name="alignNode1">
+    <dgm:scene3d>
+      <a:camera prst="orthographicFront"/>
+      <a:lightRig rig="threePt" dir="t"/>
+    </dgm:scene3d>
+    <dgm:sp3d/>
+    <dgm:txPr/>
+    <dgm:style>
+      <a:lnRef idx="2">
+        <a:scrgbClr r="0" g="0" b="0"/>
+      </a:lnRef>
+      <a:fillRef idx="1">
+        <a:scrgbClr r="0" g="0" b="0"/>
+      </a:fillRef>
+      <a:effectRef idx="0">
+        <a:scrgbClr r="0" g="0" b="0"/>
+      </a:effectRef>
+      <a:fontRef idx="minor">
+        <a:schemeClr val="lt1"/>
+      </a:fontRef>
+    </dgm:style>
+  </dgm:styleLbl>
+  <dgm:styleLbl name="node1">
+    <dgm:scene3d>
+      <a:camera prst="orthographicFront"/>
+      <a:lightRig rig="threePt" dir="t"/>
+    </dgm:scene3d>
+    <dgm:sp3d/>
+    <dgm:txPr/>
+    <dgm:style>
+      <a:lnRef idx="2">
+        <a:scrgbClr r="0" g="0" b="0"/>
+      </a:lnRef>
+      <a:fillRef idx="1">
+        <a:scrgbClr r="0" g="0" b="0"/>
+      </a:fillRef>
+      <a:effectRef idx="0">
+        <a:scrgbClr r="0" g="0" b="0"/>
+      </a:effectRef>
+      <a:fontRef idx="minor">
+        <a:schemeClr val="lt1"/>
+      </a:fontRef>
+    </dgm:style>
+  </dgm:styleLbl>
+  <dgm:styleLbl name="node2">
+    <dgm:scene3d>
+      <a:camera prst="orthographicFront"/>
+      <a:lightRig rig="threePt" dir="t"/>
+    </dgm:scene3d>
+    <dgm:sp3d/>
+    <dgm:txPr/>
+    <dgm:style>
+      <a:lnRef idx="2">
+        <a:scrgbClr r="0" g="0" b="0"/>
+      </a:lnRef>
+      <a:fillRef idx="1">
+        <a:scrgbClr r="0" g="0" b="0"/>
+      </a:fillRef>
+      <a:effectRef idx="0">
+        <a:scrgbClr r="0" g="0" b="0"/>
+      </a:effectRef>
+      <a:fontRef idx="minor">
+        <a:schemeClr val="lt1"/>
+      </a:fontRef>
+    </dgm:style>
+  </dgm:styleLbl>
+  <dgm:styleLbl name="node3">
+    <dgm:scene3d>
+      <a:camera prst="orthographicFront"/>
+      <a:lightRig rig="threePt" dir="t"/>
+    </dgm:scene3d>
+    <dgm:sp3d/>
+    <dgm:txPr/>
+    <dgm:style>
+      <a:lnRef idx="2">
+        <a:scrgbClr r="0" g="0" b="0"/>
+      </a:lnRef>
+      <a:fillRef idx="1">
+        <a:scrgbClr r="0" g="0" b="0"/>
+      </a:fillRef>
+      <a:effectRef idx="0">
+        <a:scrgbClr r="0" g="0" b="0"/>
+      </a:effectRef>
+      <a:fontRef idx="minor">
+        <a:schemeClr val="lt1"/>
+      </a:fontRef>
+    </dgm:style>
+  </dgm:styleLbl>
+  <dgm:styleLbl name="node4">
+    <dgm:scene3d>
+      <a:camera prst="orthographicFront"/>
+      <a:lightRig rig="threePt" dir="t"/>
+    </dgm:scene3d>
+    <dgm:sp3d/>
+    <dgm:txPr/>
+    <dgm:style>
+      <a:lnRef idx="2">
+        <a:scrgbClr r="0" g="0" b="0"/>
+      </a:lnRef>
+      <a:fillRef idx="1">
+        <a:scrgbClr r="0" g="0" b="0"/>
+      </a:fillRef>
+      <a:effectRef idx="0">
+        <a:scrgbClr r="0" g="0" b="0"/>
+      </a:effectRef>
+      <a:fontRef idx="minor">
+        <a:schemeClr val="lt1"/>
+      </a:fontRef>
+    </dgm:style>
+  </dgm:styleLbl>
+  <dgm:styleLbl name="fgImgPlace1">
+    <dgm:scene3d>
+      <a:camera prst="orthographicFront"/>
+      <a:lightRig rig="threePt" dir="t"/>
+    </dgm:scene3d>
+    <dgm:sp3d/>
+    <dgm:txPr/>
+    <dgm:style>
+      <a:lnRef idx="2">
+        <a:scrgbClr r="0" g="0" b="0"/>
+      </a:lnRef>
+      <a:fillRef idx="1">
+        <a:scrgbClr r="0" g="0" b="0"/>
+      </a:fillRef>
+      <a:effectRef idx="0">
+        <a:scrgbClr r="0" g="0" b="0"/>
+      </a:effectRef>
+      <a:fontRef idx="minor"/>
+    </dgm:style>
+  </dgm:styleLbl>
+  <dgm:styleLbl name="alignImgPlace1">
+    <dgm:scene3d>
+      <a:camera prst="orthographicFront"/>
+      <a:lightRig rig="threePt" dir="t"/>
+    </dgm:scene3d>
+    <dgm:sp3d/>
+    <dgm:txPr/>
+    <dgm:style>
+      <a:lnRef idx="2">
+        <a:scrgbClr r="0" g="0" b="0"/>
+      </a:lnRef>
+      <a:fillRef idx="1">
+        <a:scrgbClr r="0" g="0" b="0"/>
+      </a:fillRef>
+      <a:effectRef idx="0">
+        <a:scrgbClr r="0" g="0" b="0"/>
+      </a:effectRef>
+      <a:fontRef idx="minor"/>
+    </dgm:style>
+  </dgm:styleLbl>
+  <dgm:styleLbl name="bgImgPlace1">
+    <dgm:scene3d>
+      <a:camera prst="orthographicFront"/>
+      <a:lightRig rig="threePt" dir="t"/>
+    </dgm:scene3d>
+    <dgm:sp3d/>
+    <dgm:txPr/>
+    <dgm:style>
+      <a:lnRef idx="2">
+        <a:scrgbClr r="0" g="0" b="0"/>
+      </a:lnRef>
+      <a:fillRef idx="1">
+        <a:scrgbClr r="0" g="0" b="0"/>
+      </a:fillRef>
+      <a:effectRef idx="0">
+        <a:scrgbClr r="0" g="0" b="0"/>
+      </a:effectRef>
+      <a:fontRef idx="minor"/>
+    </dgm:style>
+  </dgm:styleLbl>
+  <dgm:styleLbl name="sibTrans2D1">
+    <dgm:scene3d>
+      <a:camera prst="orthographicFront"/>
+      <a:lightRig rig="threePt" dir="t"/>
+    </dgm:scene3d>
+    <dgm:sp3d/>
+    <dgm:txPr/>
+    <dgm:style>
+      <a:lnRef idx="0">
+        <a:scrgbClr r="0" g="0" b="0"/>
+      </a:lnRef>
+      <a:fillRef idx="1">
+        <a:scrgbClr r="0" g="0" b="0"/>
+      </a:fillRef>
+      <a:effectRef idx="0">
+        <a:scrgbClr r="0" g="0" b="0"/>
+      </a:effectRef>
+      <a:fontRef idx="minor">
+        <a:schemeClr val="lt1"/>
+      </a:fontRef>
+    </dgm:style>
+  </dgm:styleLbl>
+  <dgm:styleLbl name="fgSibTrans2D1">
+    <dgm:scene3d>
+      <a:camera prst="orthographicFront"/>
+      <a:lightRig rig="threePt" dir="t"/>
+    </dgm:scene3d>
+    <dgm:sp3d/>
+    <dgm:txPr/>
+    <dgm:style>
+      <a:lnRef idx="0">
+        <a:scrgbClr r="0" g="0" b="0"/>
+      </a:lnRef>
+      <a:fillRef idx="1">
+        <a:scrgbClr r="0" g="0" b="0"/>
+      </a:fillRef>
+      <a:effectRef idx="0">
+        <a:scrgbClr r="0" g="0" b="0"/>
+      </a:effectRef>
+      <a:fontRef idx="minor">
+        <a:schemeClr val="lt1"/>
+      </a:fontRef>
+    </dgm:style>
+  </dgm:styleLbl>
+  <dgm:styleLbl name="bgSibTrans2D1">
+    <dgm:scene3d>
+      <a:camera prst="orthographicFront"/>
+      <a:lightRig rig="threePt" dir="t"/>
+    </dgm:scene3d>
+    <dgm:sp3d/>
+    <dgm:txPr/>
+    <dgm:style>
+      <a:lnRef idx="0">
+        <a:scrgbClr r="0" g="0" b="0"/>
+      </a:lnRef>
+      <a:fillRef idx="1">
+        <a:scrgbClr r="0" g="0" b="0"/>
+      </a:fillRef>
+      <a:effectRef idx="0">
+        <a:scrgbClr r="0" g="0" b="0"/>
+      </a:effectRef>
+      <a:fontRef idx="minor">
+        <a:schemeClr val="lt1"/>
+      </a:fontRef>
+    </dgm:style>
+  </dgm:styleLbl>
+  <dgm:styleLbl name="sibTrans1D1">
+    <dgm:scene3d>
+      <a:camera prst="orthographicFront"/>
+      <a:lightRig rig="threePt" dir="t"/>
+    </dgm:scene3d>
+    <dgm:sp3d/>
+    <dgm:txPr/>
+    <dgm:style>
+      <a:lnRef idx="1">
+        <a:scrgbClr r="0" g="0" b="0"/>
+      </a:lnRef>
+      <a:fillRef idx="0">
+        <a:scrgbClr r="0" g="0" b="0"/>
+      </a:fillRef>
+      <a:effectRef idx="0">
+        <a:scrgbClr r="0" g="0" b="0"/>
+      </a:effectRef>
+      <a:fontRef idx="minor"/>
+    </dgm:style>
+  </dgm:styleLbl>
+  <dgm:styleLbl name="callout">
+    <dgm:scene3d>
+      <a:camera prst="orthographicFront"/>
+      <a:lightRig rig="threePt" dir="t"/>
+    </dgm:scene3d>
+    <dgm:sp3d/>
+    <dgm:txPr/>
+    <dgm:style>
+      <a:lnRef idx="2">
+        <a:scrgbClr r="0" g="0" b="0"/>
+      </a:lnRef>
+      <a:fillRef idx="1">
+        <a:scrgbClr r="0" g="0" b="0"/>
+      </a:fillRef>
+      <a:effectRef idx="0">
+        <a:scrgbClr r="0" g="0" b="0"/>
+      </a:effectRef>
+      <a:fontRef idx="minor"/>
+    </dgm:style>
+  </dgm:styleLbl>
+  <dgm:styleLbl name="asst0">
+    <dgm:scene3d>
+      <a:camera prst="orthographicFront"/>
+      <a:lightRig rig="threePt" dir="t"/>
+    </dgm:scene3d>
+    <dgm:sp3d/>
+    <dgm:txPr/>
+    <dgm:style>
+      <a:lnRef idx="2">
+        <a:scrgbClr r="0" g="0" b="0"/>
+      </a:lnRef>
+      <a:fillRef idx="1">
+        <a:scrgbClr r="0" g="0" b="0"/>
+      </a:fillRef>
+      <a:effectRef idx="0">
+        <a:scrgbClr r="0" g="0" b="0"/>
+      </a:effectRef>
+      <a:fontRef idx="minor">
+        <a:schemeClr val="lt1"/>
+      </a:fontRef>
+    </dgm:style>
+  </dgm:styleLbl>
+  <dgm:styleLbl name="asst1">
+    <dgm:scene3d>
+      <a:camera prst="orthographicFront"/>
+      <a:lightRig rig="threePt" dir="t"/>
+    </dgm:scene3d>
+    <dgm:sp3d/>
+    <dgm:txPr/>
+    <dgm:style>
+      <a:lnRef idx="2">
+        <a:scrgbClr r="0" g="0" b="0"/>
+      </a:lnRef>
+      <a:fillRef idx="1">
+        <a:scrgbClr r="0" g="0" b="0"/>
+      </a:fillRef>
+      <a:effectRef idx="0">
+        <a:scrgbClr r="0" g="0" b="0"/>
+      </a:effectRef>
+      <a:fontRef idx="minor">
+        <a:schemeClr val="lt1"/>
+      </a:fontRef>
+    </dgm:style>
+  </dgm:styleLbl>
+  <dgm:styleLbl name="asst2">
+    <dgm:scene3d>
+      <a:camera prst="orthographicFront"/>
+      <a:lightRig rig="threePt" dir="t"/>
+    </dgm:scene3d>
+    <dgm:sp3d/>
+    <dgm:txPr/>
+    <dgm:style>
+      <a:lnRef idx="2">
+        <a:scrgbClr r="0" g="0" b="0"/>
+      </a:lnRef>
+      <a:fillRef idx="1">
+        <a:scrgbClr r="0" g="0" b="0"/>
+      </a:fillRef>
+      <a:effectRef idx="0">
+        <a:scrgbClr r="0" g="0" b="0"/>
+      </a:effectRef>
+      <a:fontRef idx="minor">
+        <a:schemeClr val="lt1"/>
+      </a:fontRef>
+    </dgm:style>
+  </dgm:styleLbl>
+  <dgm:styleLbl name="asst3">
+    <dgm:scene3d>
+      <a:camera prst="orthographicFront"/>
+      <a:lightRig rig="threePt" dir="t"/>
+    </dgm:scene3d>
+    <dgm:sp3d/>
+    <dgm:txPr/>
+    <dgm:style>
+      <a:lnRef idx="2">
+        <a:scrgbClr r="0" g="0" b="0"/>
+      </a:lnRef>
+      <a:fillRef idx="1">
+        <a:scrgbClr r="0" g="0" b="0"/>
+      </a:fillRef>
+      <a:effectRef idx="0">
+        <a:scrgbClr r="0" g="0" b="0"/>
+      </a:effectRef>
+      <a:fontRef idx="minor">
+        <a:schemeClr val="lt1"/>
+      </a:fontRef>
+    </dgm:style>
+  </dgm:styleLbl>
+  <dgm:styleLbl name="asst4">
+    <dgm:scene3d>
+      <a:camera prst="orthographicFront"/>
+      <a:lightRig rig="threePt" dir="t"/>
+    </dgm:scene3d>
+    <dgm:sp3d/>
+    <dgm:txPr/>
+    <dgm:style>
+      <a:lnRef idx="2">
+        <a:scrgbClr r="0" g="0" b="0"/>
+      </a:lnRef>
+      <a:fillRef idx="1">
+        <a:scrgbClr r="0" g="0" b="0"/>
+      </a:fillRef>
+      <a:effectRef idx="0">
+        <a:scrgbClr r="0" g="0" b="0"/>
+      </a:effectRef>
+      <a:fontRef idx="minor">
+        <a:schemeClr val="lt1"/>
+      </a:fontRef>
+    </dgm:style>
+  </dgm:styleLbl>
+  <dgm:styleLbl name="parChTrans2D1">
+    <dgm:scene3d>
+      <a:camera prst="orthographicFront"/>
+      <a:lightRig rig="threePt" dir="t"/>
+    </dgm:scene3d>
+    <dgm:sp3d/>
+    <dgm:txPr/>
+    <dgm:style>
+      <a:lnRef idx="2">
+        <a:scrgbClr r="0" g="0" b="0"/>
+      </a:lnRef>
+      <a:fillRef idx="1">
+        <a:scrgbClr r="0" g="0" b="0"/>
+      </a:fillRef>
+      <a:effectRef idx="0">
+        <a:scrgbClr r="0" g="0" b="0"/>
+      </a:effectRef>
+      <a:fontRef idx="minor">
+        <a:schemeClr val="lt1"/>
+      </a:fontRef>
+    </dgm:style>
+  </dgm:styleLbl>
+  <dgm:styleLbl name="parChTrans2D2">
+    <dgm:scene3d>
+      <a:camera prst="orthographicFront"/>
+      <a:lightRig rig="threePt" dir="t"/>
+    </dgm:scene3d>
+    <dgm:sp3d/>
+    <dgm:txPr/>
+    <dgm:style>
+      <a:lnRef idx="2">
+        <a:scrgbClr r="0" g="0" b="0"/>
+      </a:lnRef>
+      <a:fillRef idx="1">
+        <a:scrgbClr r="0" g="0" b="0"/>
+      </a:fillRef>
+      <a:effectRef idx="0">
+        <a:scrgbClr r="0" g="0" b="0"/>
+      </a:effectRef>
+      <a:fontRef idx="minor">
+        <a:schemeClr val="lt1"/>
+      </a:fontRef>
+    </dgm:style>
+  </dgm:styleLbl>
+  <dgm:styleLbl name="parChTrans2D3">
+    <dgm:scene3d>
+      <a:camera prst="orthographicFront"/>
+      <a:lightRig rig="threePt" dir="t"/>
+    </dgm:scene3d>
+    <dgm:sp3d/>
+    <dgm:txPr/>
+    <dgm:style>
+      <a:lnRef idx="2">
+        <a:scrgbClr r="0" g="0" b="0"/>
+      </a:lnRef>
+      <a:fillRef idx="1">
+        <a:scrgbClr r="0" g="0" b="0"/>
+      </a:fillRef>
+      <a:effectRef idx="0">
+        <a:scrgbClr r="0" g="0" b="0"/>
+      </a:effectRef>
+      <a:fontRef idx="minor">
+        <a:schemeClr val="lt1"/>
+      </a:fontRef>
+    </dgm:style>
+  </dgm:styleLbl>
+  <dgm:styleLbl name="parChTrans2D4">
+    <dgm:scene3d>
+      <a:camera prst="orthographicFront"/>
+      <a:lightRig rig="threePt" dir="t"/>
+    </dgm:scene3d>
+    <dgm:sp3d/>
+    <dgm:txPr/>
+    <dgm:style>
+      <a:lnRef idx="2">
+        <a:scrgbClr r="0" g="0" b="0"/>
+      </a:lnRef>
+      <a:fillRef idx="1">
+        <a:scrgbClr r="0" g="0" b="0"/>
+      </a:fillRef>
+      <a:effectRef idx="0">
+        <a:scrgbClr r="0" g="0" b="0"/>
+      </a:effectRef>
+      <a:fontRef idx="minor">
+        <a:schemeClr val="lt1"/>
+      </a:fontRef>
+    </dgm:style>
+  </dgm:styleLbl>
+  <dgm:styleLbl name="parChTrans1D1">
+    <dgm:scene3d>
+      <a:camera prst="orthographicFront"/>
+      <a:lightRig rig="threePt" dir="t"/>
+    </dgm:scene3d>
+    <dgm:sp3d/>
+    <dgm:txPr/>
+    <dgm:style>
+      <a:lnRef idx="2">
+        <a:scrgbClr r="0" g="0" b="0"/>
+      </a:lnRef>
+      <a:fillRef idx="0">
+        <a:scrgbClr r="0" g="0" b="0"/>
+      </a:fillRef>
+      <a:effectRef idx="0">
+        <a:scrgbClr r="0" g="0" b="0"/>
+      </a:effectRef>
+      <a:fontRef idx="minor"/>
+    </dgm:style>
+  </dgm:styleLbl>
+  <dgm:styleLbl name="parChTrans1D2">
+    <dgm:scene3d>
+      <a:camera prst="orthographicFront"/>
+      <a:lightRig rig="threePt" dir="t"/>
+    </dgm:scene3d>
+    <dgm:sp3d/>
+    <dgm:txPr/>
+    <dgm:style>
+      <a:lnRef idx="2">
+        <a:scrgbClr r="0" g="0" b="0"/>
+      </a:lnRef>
+      <a:fillRef idx="0">
+        <a:scrgbClr r="0" g="0" b="0"/>
+      </a:fillRef>
+      <a:effectRef idx="0">
+        <a:scrgbClr r="0" g="0" b="0"/>
+      </a:effectRef>
+      <a:fontRef idx="minor"/>
+    </dgm:style>
+  </dgm:styleLbl>
+  <dgm:styleLbl name="parChTrans1D3">
+    <dgm:scene3d>
+      <a:camera prst="orthographicFront"/>
+      <a:lightRig rig="threePt" dir="t"/>
+    </dgm:scene3d>
+    <dgm:sp3d/>
+    <dgm:txPr/>
+    <dgm:style>
+      <a:lnRef idx="2">
+        <a:scrgbClr r="0" g="0" b="0"/>
+      </a:lnRef>
+      <a:fillRef idx="0">
+        <a:scrgbClr r="0" g="0" b="0"/>
+      </a:fillRef>
+      <a:effectRef idx="0">
+        <a:scrgbClr r="0" g="0" b="0"/>
+      </a:effectRef>
+      <a:fontRef idx="minor"/>
+    </dgm:style>
+  </dgm:styleLbl>
+  <dgm:styleLbl name="parChTrans1D4">
+    <dgm:scene3d>
+      <a:camera prst="orthographicFront"/>
+      <a:lightRig rig="threePt" dir="t"/>
+    </dgm:scene3d>
+    <dgm:sp3d/>
+    <dgm:txPr/>
+    <dgm:style>
+      <a:lnRef idx="2">
+        <a:scrgbClr r="0" g="0" b="0"/>
+      </a:lnRef>
+      <a:fillRef idx="0">
+        <a:scrgbClr r="0" g="0" b="0"/>
+      </a:fillRef>
+      <a:effectRef idx="0">
+        <a:scrgbClr r="0" g="0" b="0"/>
+      </a:effectRef>
+      <a:fontRef idx="minor"/>
+    </dgm:style>
+  </dgm:styleLbl>
+  <dgm:styleLbl name="fgAcc1">
+    <dgm:scene3d>
+      <a:camera prst="orthographicFront"/>
+      <a:lightRig rig="threePt" dir="t"/>
+    </dgm:scene3d>
+    <dgm:sp3d/>
+    <dgm:txPr/>
+    <dgm:style>
+      <a:lnRef idx="2">
+        <a:scrgbClr r="0" g="0" b="0"/>
+      </a:lnRef>
+      <a:fillRef idx="1">
+        <a:scrgbClr r="0" g="0" b="0"/>
+      </a:fillRef>
+      <a:effectRef idx="0">
+        <a:scrgbClr r="0" g="0" b="0"/>
+      </a:effectRef>
+      <a:fontRef idx="minor"/>
+    </dgm:style>
+  </dgm:styleLbl>
+  <dgm:styleLbl name="conFgAcc1">
+    <dgm:scene3d>
+      <a:camera prst="orthographicFront"/>
+      <a:lightRig rig="threePt" dir="t"/>
+    </dgm:scene3d>
+    <dgm:sp3d/>
+    <dgm:txPr/>
+    <dgm:style>
+      <a:lnRef idx="2">
+        <a:scrgbClr r="0" g="0" b="0"/>
+      </a:lnRef>
+      <a:fillRef idx="1">
+        <a:scrgbClr r="0" g="0" b="0"/>
+      </a:fillRef>
+      <a:effectRef idx="0">
+        <a:scrgbClr r="0" g="0" b="0"/>
+      </a:effectRef>
+      <a:fontRef idx="minor"/>
+    </dgm:style>
+  </dgm:styleLbl>
+  <dgm:styleLbl name="alignAcc1">
+    <dgm:scene3d>
+      <a:camera prst="orthographicFront"/>
+      <a:lightRig rig="threePt" dir="t"/>
+    </dgm:scene3d>
+    <dgm:sp3d/>
+    <dgm:txPr/>
+    <dgm:style>
+      <a:lnRef idx="2">
+        <a:scrgbClr r="0" g="0" b="0"/>
+      </a:lnRef>
+      <a:fillRef idx="1">
+        <a:scrgbClr r="0" g="0" b="0"/>
+      </a:fillRef>
+      <a:effectRef idx="0">
+        <a:scrgbClr r="0" g="0" b="0"/>
+      </a:effectRef>
+      <a:fontRef idx="minor"/>
+    </dgm:style>
+  </dgm:styleLbl>
+  <dgm:styleLbl name="trAlignAcc1">
+    <dgm:scene3d>
+      <a:camera prst="orthographicFront"/>
+      <a:lightRig rig="threePt" dir="t"/>
+    </dgm:scene3d>
+    <dgm:sp3d/>
+    <dgm:txPr/>
+    <dgm:style>
+      <a:lnRef idx="1">
+        <a:scrgbClr r="0" g="0" b="0"/>
+      </a:lnRef>
+      <a:fillRef idx="1">
+        <a:scrgbClr r="0" g="0" b="0"/>
+      </a:fillRef>
+      <a:effectRef idx="0">
+        <a:scrgbClr r="0" g="0" b="0"/>
+      </a:effectRef>
+      <a:fontRef idx="minor"/>
+    </dgm:style>
+  </dgm:styleLbl>
+  <dgm:styleLbl name="bgAcc1">
+    <dgm:scene3d>
+      <a:camera prst="orthographicFront"/>
+      <a:lightRig rig="threePt" dir="t"/>
+    </dgm:scene3d>
+    <dgm:sp3d/>
+    <dgm:txPr/>
+    <dgm:style>
+      <a:lnRef idx="2">
+        <a:scrgbClr r="0" g="0" b="0"/>
+      </a:lnRef>
+      <a:fillRef idx="1">
+        <a:scrgbClr r="0" g="0" b="0"/>
+      </a:fillRef>
+      <a:effectRef idx="0">
+        <a:scrgbClr r="0" g="0" b="0"/>
+      </a:effectRef>
+      <a:fontRef idx="minor"/>
+    </dgm:style>
+  </dgm:styleLbl>
+  <dgm:styleLbl name="solidFgAcc1">
+    <dgm:scene3d>
+      <a:camera prst="orthographicFront"/>
+      <a:lightRig rig="threePt" dir="t"/>
+    </dgm:scene3d>
+    <dgm:sp3d/>
+    <dgm:txPr/>
+    <dgm:style>
+      <a:lnRef idx="2">
+        <a:scrgbClr r="0" g="0" b="0"/>
+      </a:lnRef>
+      <a:fillRef idx="1">
+        <a:scrgbClr r="0" g="0" b="0"/>
+      </a:fillRef>
+      <a:effectRef idx="0">
+        <a:scrgbClr r="0" g="0" b="0"/>
+      </a:effectRef>
+      <a:fontRef idx="minor"/>
+    </dgm:style>
+  </dgm:styleLbl>
+  <dgm:styleLbl name="solidAlignAcc1">
+    <dgm:scene3d>
+      <a:camera prst="orthographicFront"/>
+      <a:lightRig rig="threePt" dir="t"/>
+    </dgm:scene3d>
+    <dgm:sp3d/>
+    <dgm:txPr/>
+    <dgm:style>
+      <a:lnRef idx="2">
+        <a:scrgbClr r="0" g="0" b="0"/>
+      </a:lnRef>
+      <a:fillRef idx="1">
+        <a:scrgbClr r="0" g="0" b="0"/>
+      </a:fillRef>
+      <a:effectRef idx="0">
+        <a:scrgbClr r="0" g="0" b="0"/>
+      </a:effectRef>
+      <a:fontRef idx="minor"/>
+    </dgm:style>
+  </dgm:styleLbl>
+  <dgm:styleLbl name="solidBgAcc1">
+    <dgm:scene3d>
+      <a:camera prst="orthographicFront"/>
+      <a:lightRig rig="threePt" dir="t"/>
+    </dgm:scene3d>
+    <dgm:sp3d/>
+    <dgm:txPr/>
+    <dgm:style>
+      <a:lnRef idx="2">
+        <a:scrgbClr r="0" g="0" b="0"/>
+      </a:lnRef>
+      <a:fillRef idx="1">
+        <a:scrgbClr r="0" g="0" b="0"/>
+      </a:fillRef>
+      <a:effectRef idx="0">
+        <a:scrgbClr r="0" g="0" b="0"/>
+      </a:effectRef>
+      <a:fontRef idx="minor"/>
+    </dgm:style>
+  </dgm:styleLbl>
+  <dgm:styleLbl name="fgAccFollowNode1">
+    <dgm:scene3d>
+      <a:camera prst="orthographicFront"/>
+      <a:lightRig rig="threePt" dir="t"/>
+    </dgm:scene3d>
+    <dgm:sp3d/>
+    <dgm:txPr/>
+    <dgm:style>
+      <a:lnRef idx="2">
+        <a:scrgbClr r="0" g="0" b="0"/>
+      </a:lnRef>
+      <a:fillRef idx="1">
+        <a:scrgbClr r="0" g="0" b="0"/>
+      </a:fillRef>
+      <a:effectRef idx="0">
+        <a:scrgbClr r="0" g="0" b="0"/>
+      </a:effectRef>
+      <a:fontRef idx="minor"/>
+    </dgm:style>
+  </dgm:styleLbl>
+  <dgm:styleLbl name="alignAccFollowNode1">
+    <dgm:scene3d>
+      <a:camera prst="orthographicFront"/>
+      <a:lightRig rig="threePt" dir="t"/>
+    </dgm:scene3d>
+    <dgm:sp3d/>
+    <dgm:txPr/>
+    <dgm:style>
+      <a:lnRef idx="2">
+        <a:scrgbClr r="0" g="0" b="0"/>
+      </a:lnRef>
+      <a:fillRef idx="1">
+        <a:scrgbClr r="0" g="0" b="0"/>
+      </a:fillRef>
+      <a:effectRef idx="0">
+        <a:scrgbClr r="0" g="0" b="0"/>
+      </a:effectRef>
+      <a:fontRef idx="minor"/>
+    </dgm:style>
+  </dgm:styleLbl>
+  <dgm:styleLbl name="bgAccFollowNode1">
+    <dgm:scene3d>
+      <a:camera prst="orthographicFront"/>
+      <a:lightRig rig="threePt" dir="t"/>
+    </dgm:scene3d>
+    <dgm:sp3d/>
+    <dgm:txPr/>
+    <dgm:style>
+      <a:lnRef idx="2">
+        <a:scrgbClr r="0" g="0" b="0"/>
+      </a:lnRef>
+      <a:fillRef idx="1">
+        <a:scrgbClr r="0" g="0" b="0"/>
+      </a:fillRef>
+      <a:effectRef idx="0">
+        <a:scrgbClr r="0" g="0" b="0"/>
+      </a:effectRef>
+      <a:fontRef idx="minor"/>
+    </dgm:style>
+  </dgm:styleLbl>
+  <dgm:styleLbl name="fgAcc0">
+    <dgm:scene3d>
+      <a:camera prst="orthographicFront"/>
+      <a:lightRig rig="threePt" dir="t"/>
+    </dgm:scene3d>
+    <dgm:sp3d/>
+    <dgm:txPr/>
+    <dgm:style>
+      <a:lnRef idx="2">
+        <a:scrgbClr r="0" g="0" b="0"/>
+      </a:lnRef>
+      <a:fillRef idx="1">
+        <a:scrgbClr r="0" g="0" b="0"/>
+      </a:fillRef>
+      <a:effectRef idx="0">
+        <a:scrgbClr r="0" g="0" b="0"/>
+      </a:effectRef>
+      <a:fontRef idx="minor"/>
+    </dgm:style>
+  </dgm:styleLbl>
+  <dgm:styleLbl name="fgAcc2">
+    <dgm:scene3d>
+      <a:camera prst="orthographicFront"/>
+      <a:lightRig rig="threePt" dir="t"/>
+    </dgm:scene3d>
+    <dgm:sp3d/>
+    <dgm:txPr/>
+    <dgm:style>
+      <a:lnRef idx="2">
+        <a:scrgbClr r="0" g="0" b="0"/>
+      </a:lnRef>
+      <a:fillRef idx="1">
+        <a:scrgbClr r="0" g="0" b="0"/>
+      </a:fillRef>
+      <a:effectRef idx="0">
+        <a:scrgbClr r="0" g="0" b="0"/>
+      </a:effectRef>
+      <a:fontRef idx="minor"/>
+    </dgm:style>
+  </dgm:styleLbl>
+  <dgm:styleLbl name="fgAcc3">
+    <dgm:scene3d>
+      <a:camera prst="orthographicFront"/>
+      <a:lightRig rig="threePt" dir="t"/>
+    </dgm:scene3d>
+    <dgm:sp3d/>
+    <dgm:txPr/>
+    <dgm:style>
+      <a:lnRef idx="2">
+        <a:scrgbClr r="0" g="0" b="0"/>
+      </a:lnRef>
+      <a:fillRef idx="1">
+        <a:scrgbClr r="0" g="0" b="0"/>
+      </a:fillRef>
+      <a:effectRef idx="0">
+        <a:scrgbClr r="0" g="0" b="0"/>
+      </a:effectRef>
+      <a:fontRef idx="minor"/>
+    </dgm:style>
+  </dgm:styleLbl>
+  <dgm:styleLbl name="fgAcc4">
+    <dgm:scene3d>
+      <a:camera prst="orthographicFront"/>
+      <a:lightRig rig="threePt" dir="t"/>
+    </dgm:scene3d>
+    <dgm:sp3d/>
+    <dgm:txPr/>
+    <dgm:style>
+      <a:lnRef idx="2">
+        <a:scrgbClr r="0" g="0" b="0"/>
+      </a:lnRef>
+      <a:fillRef idx="1">
+        <a:scrgbClr r="0" g="0" b="0"/>
+      </a:fillRef>
+      <a:effectRef idx="0">
+        <a:scrgbClr r="0" g="0" b="0"/>
+      </a:effectRef>
+      <a:fontRef idx="minor"/>
+    </dgm:style>
+  </dgm:styleLbl>
+  <dgm:styleLbl name="bgShp">
+    <dgm:scene3d>
+      <a:camera prst="orthographicFront"/>
+      <a:lightRig rig="threePt" dir="t"/>
+    </dgm:scene3d>
+    <dgm:sp3d/>
+    <dgm:txPr/>
+    <dgm:style>
+      <a:lnRef idx="0">
+        <a:scrgbClr r="0" g="0" b="0"/>
+      </a:lnRef>
+      <a:fillRef idx="1">
+        <a:scrgbClr r="0" g="0" b="0"/>
+      </a:fillRef>
+      <a:effectRef idx="0">
+        <a:scrgbClr r="0" g="0" b="0"/>
+      </a:effectRef>
+      <a:fontRef idx="minor"/>
+    </dgm:style>
+  </dgm:styleLbl>
+  <dgm:styleLbl name="dkBgShp">
+    <dgm:scene3d>
+      <a:camera prst="orthographicFront"/>
+      <a:lightRig rig="threePt" dir="t"/>
+    </dgm:scene3d>
+    <dgm:sp3d/>
+    <dgm:txPr/>
+    <dgm:style>
+      <a:lnRef idx="0">
+        <a:scrgbClr r="0" g="0" b="0"/>
+      </a:lnRef>
+      <a:fillRef idx="1">
+        <a:scrgbClr r="0" g="0" b="0"/>
+      </a:fillRef>
+      <a:effectRef idx="0">
+        <a:scrgbClr r="0" g="0" b="0"/>
+      </a:effectRef>
+      <a:fontRef idx="minor"/>
+    </dgm:style>
+  </dgm:styleLbl>
+  <dgm:styleLbl name="trBgShp">
+    <dgm:scene3d>
+      <a:camera prst="orthographicFront"/>
+      <a:lightRig rig="threePt" dir="t"/>
+    </dgm:scene3d>
+    <dgm:sp3d/>
+    <dgm:txPr/>
+    <dgm:style>
+      <a:lnRef idx="0">
+        <a:scrgbClr r="0" g="0" b="0"/>
+      </a:lnRef>
+      <a:fillRef idx="1">
+        <a:scrgbClr r="0" g="0" b="0"/>
+      </a:fillRef>
+      <a:effectRef idx="0">
+        <a:scrgbClr r="0" g="0" b="0"/>
+      </a:effectRef>
+      <a:fontRef idx="minor"/>
+    </dgm:style>
+  </dgm:styleLbl>
+  <dgm:styleLbl name="fgShp">
+    <dgm:scene3d>
+      <a:camera prst="orthographicFront"/>
+      <a:lightRig rig="threePt" dir="t"/>
+    </dgm:scene3d>
+    <dgm:sp3d/>
+    <dgm:txPr/>
+    <dgm:style>
+      <a:lnRef idx="2">
+        <a:scrgbClr r="0" g="0" b="0"/>
+      </a:lnRef>
+      <a:fillRef idx="1">
+        <a:scrgbClr r="0" g="0" b="0"/>
+      </a:fillRef>
+      <a:effectRef idx="0">
+        <a:scrgbClr r="0" g="0" b="0"/>
+      </a:effectRef>
+      <a:fontRef idx="minor"/>
+    </dgm:style>
+  </dgm:styleLbl>
+  <dgm:styleLbl name="revTx">
+    <dgm:scene3d>
+      <a:camera prst="orthographicFront"/>
+      <a:lightRig rig="threePt" dir="t"/>
+    </dgm:scene3d>
+    <dgm:sp3d/>
+    <dgm:txPr/>
+    <dgm:style>
+      <a:lnRef idx="0">
+        <a:scrgbClr r="0" g="0" b="0"/>
+      </a:lnRef>
+      <a:fillRef idx="0">
+        <a:scrgbClr r="0" g="0" b="0"/>
+      </a:fillRef>
+      <a:effectRef idx="0">
+        <a:scrgbClr r="0" g="0" b="0"/>
+      </a:effectRef>
+      <a:fontRef idx="minor"/>
+    </dgm:style>
+  </dgm:styleLbl>
+</dgm:styleDef>
+</file>
+
+<file path=ppt/diagrams/quickStyle3.xml><?xml version="1.0" encoding="utf-8"?>
 <dgm:styleDef xmlns:dgm="http://schemas.openxmlformats.org/drawingml/2006/diagram" xmlns:a="http://schemas.openxmlformats.org/drawingml/2006/main" uniqueId="urn:microsoft.com/office/officeart/2005/8/quickstyle/simple1">
   <dgm:title val=""/>
   <dgm:desc val=""/>
@@ -19699,7 +23778,7 @@
           <p:nvPr>
             <p:extLst>
               <p:ext uri="{D42A27DB-BD31-4B8C-83A1-F6EECF244321}">
-                <p14:modId xmlns:p14="http://schemas.microsoft.com/office/powerpoint/2010/main" val="406865297"/>
+                <p14:modId xmlns:p14="http://schemas.microsoft.com/office/powerpoint/2010/main" val="267146412"/>
               </p:ext>
             </p:extLst>
           </p:nvPr>
@@ -19718,6 +23797,64 @@
     <p:extLst>
       <p:ext uri="{BB962C8B-B14F-4D97-AF65-F5344CB8AC3E}">
         <p14:creationId xmlns:p14="http://schemas.microsoft.com/office/powerpoint/2010/main" val="1644184112"/>
+      </p:ext>
+    </p:extLst>
+  </p:cSld>
+  <p:clrMapOvr>
+    <a:masterClrMapping/>
+  </p:clrMapOvr>
+</p:sld>
+</file>
+
+<file path=ppt/slides/slide19.xml><?xml version="1.0" encoding="utf-8"?>
+<p:sld xmlns:a="http://schemas.openxmlformats.org/drawingml/2006/main" xmlns:r="http://schemas.openxmlformats.org/officeDocument/2006/relationships" xmlns:p="http://schemas.openxmlformats.org/presentationml/2006/main">
+  <p:cSld>
+    <p:spTree>
+      <p:nvGrpSpPr>
+        <p:cNvPr id="1" name=""/>
+        <p:cNvGrpSpPr/>
+        <p:nvPr/>
+      </p:nvGrpSpPr>
+      <p:grpSpPr>
+        <a:xfrm>
+          <a:off x="0" y="0"/>
+          <a:ext cx="0" cy="0"/>
+          <a:chOff x="0" y="0"/>
+          <a:chExt cx="0" cy="0"/>
+        </a:xfrm>
+      </p:grpSpPr>
+      <p:graphicFrame>
+        <p:nvGraphicFramePr>
+          <p:cNvPr id="2" name="図表 1">
+            <a:extLst>
+              <a:ext uri="{FF2B5EF4-FFF2-40B4-BE49-F238E27FC236}">
+                <a16:creationId xmlns:a16="http://schemas.microsoft.com/office/drawing/2014/main" id="{E03B17EC-41B2-DAB1-70BF-03449EA59AB4}"/>
+              </a:ext>
+            </a:extLst>
+          </p:cNvPr>
+          <p:cNvGraphicFramePr/>
+          <p:nvPr>
+            <p:extLst>
+              <p:ext uri="{D42A27DB-BD31-4B8C-83A1-F6EECF244321}">
+                <p14:modId xmlns:p14="http://schemas.microsoft.com/office/powerpoint/2010/main" val="2955597567"/>
+              </p:ext>
+            </p:extLst>
+          </p:nvPr>
+        </p:nvGraphicFramePr>
+        <p:xfrm>
+          <a:off x="2032000" y="719666"/>
+          <a:ext cx="8128000" cy="5418667"/>
+        </p:xfrm>
+        <a:graphic>
+          <a:graphicData uri="http://schemas.openxmlformats.org/drawingml/2006/diagram">
+            <dgm:relIds xmlns:dgm="http://schemas.openxmlformats.org/drawingml/2006/diagram" xmlns:r="http://schemas.openxmlformats.org/officeDocument/2006/relationships" r:dm="rId2" r:lo="rId3" r:qs="rId4" r:cs="rId5"/>
+          </a:graphicData>
+        </a:graphic>
+      </p:graphicFrame>
+    </p:spTree>
+    <p:extLst>
+      <p:ext uri="{BB962C8B-B14F-4D97-AF65-F5344CB8AC3E}">
+        <p14:creationId xmlns:p14="http://schemas.microsoft.com/office/powerpoint/2010/main" val="2834714350"/>
       </p:ext>
     </p:extLst>
   </p:cSld>
@@ -19757,7 +23894,7 @@
           <p:nvPr>
             <p:extLst>
               <p:ext uri="{D42A27DB-BD31-4B8C-83A1-F6EECF244321}">
-                <p14:modId xmlns:p14="http://schemas.microsoft.com/office/powerpoint/2010/main" val="2916038195"/>
+                <p14:modId xmlns:p14="http://schemas.microsoft.com/office/powerpoint/2010/main" val="4222105004"/>
               </p:ext>
             </p:extLst>
           </p:nvPr>

--- a/figs/DIYfigures_ipe1.pptx
+++ b/figs/DIYfigures_ipe1.pptx
@@ -24,6 +24,7 @@
     <p:sldId id="273" r:id="rId18"/>
     <p:sldId id="274" r:id="rId19"/>
     <p:sldId id="275" r:id="rId20"/>
+    <p:sldId id="276" r:id="rId21"/>
   </p:sldIdLst>
   <p:sldSz cx="12192000" cy="6858000"/>
   <p:notesSz cx="6858000" cy="9144000"/>
@@ -11699,7 +11700,7 @@
           <a:p>
             <a:fld id="{29D38AE0-A022-EC4B-ADED-C3987264F154}" type="datetimeFigureOut">
               <a:rPr kumimoji="1" lang="ja-JP" altLang="en-US" smtClean="0"/>
-              <a:t>2026/6/19</a:t>
+              <a:t>2026/6/28</a:t>
             </a:fld>
             <a:endParaRPr kumimoji="1" lang="ja-JP" altLang="en-US"/>
           </a:p>
@@ -11929,7 +11930,7 @@
           <a:p>
             <a:fld id="{29D38AE0-A022-EC4B-ADED-C3987264F154}" type="datetimeFigureOut">
               <a:rPr kumimoji="1" lang="ja-JP" altLang="en-US" smtClean="0"/>
-              <a:t>2026/6/19</a:t>
+              <a:t>2026/6/28</a:t>
             </a:fld>
             <a:endParaRPr kumimoji="1" lang="ja-JP" altLang="en-US"/>
           </a:p>
@@ -12169,7 +12170,7 @@
           <a:p>
             <a:fld id="{29D38AE0-A022-EC4B-ADED-C3987264F154}" type="datetimeFigureOut">
               <a:rPr kumimoji="1" lang="ja-JP" altLang="en-US" smtClean="0"/>
-              <a:t>2026/6/19</a:t>
+              <a:t>2026/6/28</a:t>
             </a:fld>
             <a:endParaRPr kumimoji="1" lang="ja-JP" altLang="en-US"/>
           </a:p>
@@ -12399,7 +12400,7 @@
           <a:p>
             <a:fld id="{29D38AE0-A022-EC4B-ADED-C3987264F154}" type="datetimeFigureOut">
               <a:rPr kumimoji="1" lang="ja-JP" altLang="en-US" smtClean="0"/>
-              <a:t>2026/6/19</a:t>
+              <a:t>2026/6/28</a:t>
             </a:fld>
             <a:endParaRPr kumimoji="1" lang="ja-JP" altLang="en-US"/>
           </a:p>
@@ -12674,7 +12675,7 @@
           <a:p>
             <a:fld id="{29D38AE0-A022-EC4B-ADED-C3987264F154}" type="datetimeFigureOut">
               <a:rPr kumimoji="1" lang="ja-JP" altLang="en-US" smtClean="0"/>
-              <a:t>2026/6/19</a:t>
+              <a:t>2026/6/28</a:t>
             </a:fld>
             <a:endParaRPr kumimoji="1" lang="ja-JP" altLang="en-US"/>
           </a:p>
@@ -13003,7 +13004,7 @@
           <a:p>
             <a:fld id="{29D38AE0-A022-EC4B-ADED-C3987264F154}" type="datetimeFigureOut">
               <a:rPr kumimoji="1" lang="ja-JP" altLang="en-US" smtClean="0"/>
-              <a:t>2026/6/19</a:t>
+              <a:t>2026/6/28</a:t>
             </a:fld>
             <a:endParaRPr kumimoji="1" lang="ja-JP" altLang="en-US"/>
           </a:p>
@@ -13479,7 +13480,7 @@
           <a:p>
             <a:fld id="{29D38AE0-A022-EC4B-ADED-C3987264F154}" type="datetimeFigureOut">
               <a:rPr kumimoji="1" lang="ja-JP" altLang="en-US" smtClean="0"/>
-              <a:t>2026/6/19</a:t>
+              <a:t>2026/6/28</a:t>
             </a:fld>
             <a:endParaRPr kumimoji="1" lang="ja-JP" altLang="en-US"/>
           </a:p>
@@ -13620,7 +13621,7 @@
           <a:p>
             <a:fld id="{29D38AE0-A022-EC4B-ADED-C3987264F154}" type="datetimeFigureOut">
               <a:rPr kumimoji="1" lang="ja-JP" altLang="en-US" smtClean="0"/>
-              <a:t>2026/6/19</a:t>
+              <a:t>2026/6/28</a:t>
             </a:fld>
             <a:endParaRPr kumimoji="1" lang="ja-JP" altLang="en-US"/>
           </a:p>
@@ -13733,7 +13734,7 @@
           <a:p>
             <a:fld id="{29D38AE0-A022-EC4B-ADED-C3987264F154}" type="datetimeFigureOut">
               <a:rPr kumimoji="1" lang="ja-JP" altLang="en-US" smtClean="0"/>
-              <a:t>2026/6/19</a:t>
+              <a:t>2026/6/28</a:t>
             </a:fld>
             <a:endParaRPr kumimoji="1" lang="ja-JP" altLang="en-US"/>
           </a:p>
@@ -14076,7 +14077,7 @@
           <a:p>
             <a:fld id="{29D38AE0-A022-EC4B-ADED-C3987264F154}" type="datetimeFigureOut">
               <a:rPr kumimoji="1" lang="ja-JP" altLang="en-US" smtClean="0"/>
-              <a:t>2026/6/19</a:t>
+              <a:t>2026/6/28</a:t>
             </a:fld>
             <a:endParaRPr kumimoji="1" lang="ja-JP" altLang="en-US"/>
           </a:p>
@@ -14364,7 +14365,7 @@
           <a:p>
             <a:fld id="{29D38AE0-A022-EC4B-ADED-C3987264F154}" type="datetimeFigureOut">
               <a:rPr kumimoji="1" lang="ja-JP" altLang="en-US" smtClean="0"/>
-              <a:t>2026/6/19</a:t>
+              <a:t>2026/6/28</a:t>
             </a:fld>
             <a:endParaRPr kumimoji="1" lang="ja-JP" altLang="en-US"/>
           </a:p>
@@ -14637,7 +14638,7 @@
           <a:p>
             <a:fld id="{29D38AE0-A022-EC4B-ADED-C3987264F154}" type="datetimeFigureOut">
               <a:rPr kumimoji="1" lang="ja-JP" altLang="en-US" smtClean="0"/>
-              <a:t>2026/6/19</a:t>
+              <a:t>2026/6/28</a:t>
             </a:fld>
             <a:endParaRPr kumimoji="1" lang="ja-JP" altLang="en-US"/>
           </a:p>
@@ -23922,6 +23923,411 @@
 </p:sld>
 </file>
 
+<file path=ppt/slides/slide20.xml><?xml version="1.0" encoding="utf-8"?>
+<p:sld xmlns:a="http://schemas.openxmlformats.org/drawingml/2006/main" xmlns:r="http://schemas.openxmlformats.org/officeDocument/2006/relationships" xmlns:p="http://schemas.openxmlformats.org/presentationml/2006/main">
+  <p:cSld>
+    <p:spTree>
+      <p:nvGrpSpPr>
+        <p:cNvPr id="1" name=""/>
+        <p:cNvGrpSpPr/>
+        <p:nvPr/>
+      </p:nvGrpSpPr>
+      <p:grpSpPr>
+        <a:xfrm>
+          <a:off x="0" y="0"/>
+          <a:ext cx="0" cy="0"/>
+          <a:chOff x="0" y="0"/>
+          <a:chExt cx="0" cy="0"/>
+        </a:xfrm>
+      </p:grpSpPr>
+      <p:grpSp>
+        <p:nvGrpSpPr>
+          <p:cNvPr id="10" name="グループ化 9">
+            <a:extLst>
+              <a:ext uri="{FF2B5EF4-FFF2-40B4-BE49-F238E27FC236}">
+                <a16:creationId xmlns:a16="http://schemas.microsoft.com/office/drawing/2014/main" id="{94940CFC-0C90-EAB4-9EBE-040E72BE2157}"/>
+              </a:ext>
+            </a:extLst>
+          </p:cNvPr>
+          <p:cNvGrpSpPr/>
+          <p:nvPr/>
+        </p:nvGrpSpPr>
+        <p:grpSpPr>
+          <a:xfrm>
+            <a:off x="3095182" y="1400898"/>
+            <a:ext cx="6053705" cy="4594811"/>
+            <a:chOff x="3095182" y="1400898"/>
+            <a:chExt cx="6053705" cy="4594811"/>
+          </a:xfrm>
+        </p:grpSpPr>
+        <p:sp>
+          <p:nvSpPr>
+            <p:cNvPr id="3" name="三角形 2">
+              <a:extLst>
+                <a:ext uri="{FF2B5EF4-FFF2-40B4-BE49-F238E27FC236}">
+                  <a16:creationId xmlns:a16="http://schemas.microsoft.com/office/drawing/2014/main" id="{E9F03896-0AB1-3E2C-0D03-489C2C15679B}"/>
+                </a:ext>
+              </a:extLst>
+            </p:cNvPr>
+            <p:cNvSpPr/>
+            <p:nvPr/>
+          </p:nvSpPr>
+          <p:spPr>
+            <a:xfrm>
+              <a:off x="4011168" y="1631731"/>
+              <a:ext cx="4169664" cy="3594538"/>
+            </a:xfrm>
+            <a:prstGeom prst="triangle">
+              <a:avLst/>
+            </a:prstGeom>
+            <a:noFill/>
+            <a:ln w="57150">
+              <a:solidFill>
+                <a:schemeClr val="tx1"/>
+              </a:solidFill>
+            </a:ln>
+          </p:spPr>
+          <p:style>
+            <a:lnRef idx="2">
+              <a:schemeClr val="accent1">
+                <a:shade val="15000"/>
+              </a:schemeClr>
+            </a:lnRef>
+            <a:fillRef idx="1">
+              <a:schemeClr val="accent1"/>
+            </a:fillRef>
+            <a:effectRef idx="0">
+              <a:schemeClr val="accent1"/>
+            </a:effectRef>
+            <a:fontRef idx="minor">
+              <a:schemeClr val="lt1"/>
+            </a:fontRef>
+          </p:style>
+          <p:txBody>
+            <a:bodyPr rtlCol="0" anchor="ctr"/>
+            <a:lstStyle/>
+            <a:p>
+              <a:pPr algn="ctr"/>
+              <a:endParaRPr kumimoji="1" lang="ja-JP" altLang="en-US"/>
+            </a:p>
+          </p:txBody>
+        </p:sp>
+        <p:sp>
+          <p:nvSpPr>
+            <p:cNvPr id="4" name="テキスト ボックス 3">
+              <a:extLst>
+                <a:ext uri="{FF2B5EF4-FFF2-40B4-BE49-F238E27FC236}">
+                  <a16:creationId xmlns:a16="http://schemas.microsoft.com/office/drawing/2014/main" id="{2BA12B38-0D82-A4FA-ADED-B7AC0E0CD8C8}"/>
+                </a:ext>
+              </a:extLst>
+            </p:cNvPr>
+            <p:cNvSpPr txBox="1"/>
+            <p:nvPr/>
+          </p:nvSpPr>
+          <p:spPr>
+            <a:xfrm>
+              <a:off x="4868985" y="1400898"/>
+              <a:ext cx="2454029" cy="584775"/>
+            </a:xfrm>
+            <a:prstGeom prst="rect">
+              <a:avLst/>
+            </a:prstGeom>
+            <a:solidFill>
+              <a:schemeClr val="bg1"/>
+            </a:solidFill>
+            <a:ln>
+              <a:solidFill>
+                <a:schemeClr val="tx1"/>
+              </a:solidFill>
+            </a:ln>
+          </p:spPr>
+          <p:txBody>
+            <a:bodyPr wrap="square" rtlCol="0">
+              <a:spAutoFit/>
+            </a:bodyPr>
+            <a:lstStyle/>
+            <a:p>
+              <a:pPr algn="ctr"/>
+              <a:r>
+                <a:rPr kumimoji="1" lang="ja-JP" altLang="en-US" sz="3200" b="1">
+                  <a:latin typeface="Hiragino Sans W7" panose="020B0400000000000000" pitchFamily="34" charset="-128"/>
+                  <a:ea typeface="Hiragino Sans W7" panose="020B0400000000000000" pitchFamily="34" charset="-128"/>
+                </a:rPr>
+                <a:t>固定相場制</a:t>
+              </a:r>
+              <a:endParaRPr kumimoji="1" lang="en-US" altLang="ja-JP" sz="3200" b="1" dirty="0">
+                <a:latin typeface="Hiragino Sans W7" panose="020B0400000000000000" pitchFamily="34" charset="-128"/>
+                <a:ea typeface="Hiragino Sans W7" panose="020B0400000000000000" pitchFamily="34" charset="-128"/>
+              </a:endParaRPr>
+            </a:p>
+          </p:txBody>
+        </p:sp>
+        <p:sp>
+          <p:nvSpPr>
+            <p:cNvPr id="5" name="テキスト ボックス 4">
+              <a:extLst>
+                <a:ext uri="{FF2B5EF4-FFF2-40B4-BE49-F238E27FC236}">
+                  <a16:creationId xmlns:a16="http://schemas.microsoft.com/office/drawing/2014/main" id="{24F6B80A-9CAA-6229-21C3-BF54730C5774}"/>
+                </a:ext>
+              </a:extLst>
+            </p:cNvPr>
+            <p:cNvSpPr txBox="1"/>
+            <p:nvPr/>
+          </p:nvSpPr>
+          <p:spPr>
+            <a:xfrm>
+              <a:off x="3095182" y="4687659"/>
+              <a:ext cx="1831971" cy="1077218"/>
+            </a:xfrm>
+            <a:prstGeom prst="rect">
+              <a:avLst/>
+            </a:prstGeom>
+            <a:solidFill>
+              <a:schemeClr val="bg1"/>
+            </a:solidFill>
+            <a:ln>
+              <a:solidFill>
+                <a:schemeClr val="tx1"/>
+              </a:solidFill>
+            </a:ln>
+          </p:spPr>
+          <p:txBody>
+            <a:bodyPr wrap="square" rtlCol="0">
+              <a:spAutoFit/>
+            </a:bodyPr>
+            <a:lstStyle/>
+            <a:p>
+              <a:pPr algn="ctr"/>
+              <a:r>
+                <a:rPr kumimoji="1" lang="ja-JP" altLang="en-US" sz="3200" b="1">
+                  <a:latin typeface="Hiragino Sans W7" panose="020B0400000000000000" pitchFamily="34" charset="-128"/>
+                  <a:ea typeface="Hiragino Sans W7" panose="020B0400000000000000" pitchFamily="34" charset="-128"/>
+                </a:rPr>
+                <a:t>自由な</a:t>
+              </a:r>
+              <a:endParaRPr kumimoji="1" lang="en-US" altLang="ja-JP" sz="3200" b="1" dirty="0">
+                <a:latin typeface="Hiragino Sans W7" panose="020B0400000000000000" pitchFamily="34" charset="-128"/>
+                <a:ea typeface="Hiragino Sans W7" panose="020B0400000000000000" pitchFamily="34" charset="-128"/>
+              </a:endParaRPr>
+            </a:p>
+            <a:p>
+              <a:pPr algn="ctr"/>
+              <a:r>
+                <a:rPr kumimoji="1" lang="ja-JP" altLang="en-US" sz="3200" b="1">
+                  <a:latin typeface="Hiragino Sans W7" panose="020B0400000000000000" pitchFamily="34" charset="-128"/>
+                  <a:ea typeface="Hiragino Sans W7" panose="020B0400000000000000" pitchFamily="34" charset="-128"/>
+                </a:rPr>
+                <a:t>資本移動</a:t>
+              </a:r>
+              <a:endParaRPr kumimoji="1" lang="en-US" altLang="ja-JP" sz="3200" b="1" dirty="0">
+                <a:latin typeface="Hiragino Sans W7" panose="020B0400000000000000" pitchFamily="34" charset="-128"/>
+                <a:ea typeface="Hiragino Sans W7" panose="020B0400000000000000" pitchFamily="34" charset="-128"/>
+              </a:endParaRPr>
+            </a:p>
+          </p:txBody>
+        </p:sp>
+        <p:sp>
+          <p:nvSpPr>
+            <p:cNvPr id="6" name="テキスト ボックス 5">
+              <a:extLst>
+                <a:ext uri="{FF2B5EF4-FFF2-40B4-BE49-F238E27FC236}">
+                  <a16:creationId xmlns:a16="http://schemas.microsoft.com/office/drawing/2014/main" id="{B8EF5A06-A7A9-AEFD-AFF7-2C08D72D7364}"/>
+                </a:ext>
+              </a:extLst>
+            </p:cNvPr>
+            <p:cNvSpPr txBox="1"/>
+            <p:nvPr/>
+          </p:nvSpPr>
+          <p:spPr>
+            <a:xfrm>
+              <a:off x="7040706" y="4687659"/>
+              <a:ext cx="2108181" cy="1077218"/>
+            </a:xfrm>
+            <a:prstGeom prst="rect">
+              <a:avLst/>
+            </a:prstGeom>
+            <a:solidFill>
+              <a:schemeClr val="bg1"/>
+            </a:solidFill>
+            <a:ln>
+              <a:solidFill>
+                <a:schemeClr val="tx1"/>
+              </a:solidFill>
+            </a:ln>
+          </p:spPr>
+          <p:txBody>
+            <a:bodyPr wrap="square" rtlCol="0">
+              <a:spAutoFit/>
+            </a:bodyPr>
+            <a:lstStyle/>
+            <a:p>
+              <a:pPr algn="ctr"/>
+              <a:r>
+                <a:rPr kumimoji="1" lang="ja-JP" altLang="en-US" sz="3200" b="1">
+                  <a:latin typeface="Hiragino Sans W7" panose="020B0400000000000000" pitchFamily="34" charset="-128"/>
+                  <a:ea typeface="Hiragino Sans W7" panose="020B0400000000000000" pitchFamily="34" charset="-128"/>
+                </a:rPr>
+                <a:t>独立した金融政策</a:t>
+              </a:r>
+              <a:endParaRPr kumimoji="1" lang="en-US" altLang="ja-JP" sz="3200" b="1" dirty="0">
+                <a:latin typeface="Hiragino Sans W7" panose="020B0400000000000000" pitchFamily="34" charset="-128"/>
+                <a:ea typeface="Hiragino Sans W7" panose="020B0400000000000000" pitchFamily="34" charset="-128"/>
+              </a:endParaRPr>
+            </a:p>
+          </p:txBody>
+        </p:sp>
+        <p:sp>
+          <p:nvSpPr>
+            <p:cNvPr id="7" name="テキスト ボックス 6">
+              <a:extLst>
+                <a:ext uri="{FF2B5EF4-FFF2-40B4-BE49-F238E27FC236}">
+                  <a16:creationId xmlns:a16="http://schemas.microsoft.com/office/drawing/2014/main" id="{63A9492E-CF1D-D99C-4C96-B90744576E8E}"/>
+                </a:ext>
+              </a:extLst>
+            </p:cNvPr>
+            <p:cNvSpPr txBox="1"/>
+            <p:nvPr/>
+          </p:nvSpPr>
+          <p:spPr>
+            <a:xfrm>
+              <a:off x="5792546" y="5226268"/>
+              <a:ext cx="606905" cy="769441"/>
+            </a:xfrm>
+            <a:prstGeom prst="rect">
+              <a:avLst/>
+            </a:prstGeom>
+            <a:noFill/>
+            <a:ln>
+              <a:noFill/>
+            </a:ln>
+          </p:spPr>
+          <p:txBody>
+            <a:bodyPr wrap="square" rtlCol="0">
+              <a:spAutoFit/>
+            </a:bodyPr>
+            <a:lstStyle/>
+            <a:p>
+              <a:pPr algn="ctr"/>
+              <a:r>
+                <a:rPr kumimoji="1" lang="en-US" altLang="ja-JP" sz="4400" b="1" dirty="0">
+                  <a:latin typeface="Hiragino Sans W7" panose="020B0400000000000000" pitchFamily="34" charset="-128"/>
+                  <a:ea typeface="Hiragino Sans W7" panose="020B0400000000000000" pitchFamily="34" charset="-128"/>
+                </a:rPr>
+                <a:t>C</a:t>
+              </a:r>
+              <a:endParaRPr kumimoji="1" lang="en-US" altLang="ja-JP" sz="3200" b="1" dirty="0">
+                <a:latin typeface="Hiragino Sans W7" panose="020B0400000000000000" pitchFamily="34" charset="-128"/>
+                <a:ea typeface="Hiragino Sans W7" panose="020B0400000000000000" pitchFamily="34" charset="-128"/>
+              </a:endParaRPr>
+            </a:p>
+          </p:txBody>
+        </p:sp>
+        <p:sp>
+          <p:nvSpPr>
+            <p:cNvPr id="8" name="テキスト ボックス 7">
+              <a:extLst>
+                <a:ext uri="{FF2B5EF4-FFF2-40B4-BE49-F238E27FC236}">
+                  <a16:creationId xmlns:a16="http://schemas.microsoft.com/office/drawing/2014/main" id="{05534814-E9E4-2C16-D388-88BAEBC05445}"/>
+                </a:ext>
+              </a:extLst>
+            </p:cNvPr>
+            <p:cNvSpPr txBox="1"/>
+            <p:nvPr/>
+          </p:nvSpPr>
+          <p:spPr>
+            <a:xfrm>
+              <a:off x="7305428" y="2951945"/>
+              <a:ext cx="606905" cy="769441"/>
+            </a:xfrm>
+            <a:prstGeom prst="rect">
+              <a:avLst/>
+            </a:prstGeom>
+            <a:noFill/>
+            <a:ln>
+              <a:noFill/>
+            </a:ln>
+          </p:spPr>
+          <p:txBody>
+            <a:bodyPr wrap="square" rtlCol="0">
+              <a:spAutoFit/>
+            </a:bodyPr>
+            <a:lstStyle/>
+            <a:p>
+              <a:pPr algn="ctr"/>
+              <a:r>
+                <a:rPr lang="en-US" altLang="ja-JP" sz="4400" b="1" dirty="0">
+                  <a:latin typeface="Hiragino Sans W7" panose="020B0400000000000000" pitchFamily="34" charset="-128"/>
+                  <a:ea typeface="Hiragino Sans W7" panose="020B0400000000000000" pitchFamily="34" charset="-128"/>
+                </a:rPr>
+                <a:t>B</a:t>
+              </a:r>
+              <a:endParaRPr kumimoji="1" lang="en-US" altLang="ja-JP" sz="3200" b="1" dirty="0">
+                <a:latin typeface="Hiragino Sans W7" panose="020B0400000000000000" pitchFamily="34" charset="-128"/>
+                <a:ea typeface="Hiragino Sans W7" panose="020B0400000000000000" pitchFamily="34" charset="-128"/>
+              </a:endParaRPr>
+            </a:p>
+          </p:txBody>
+        </p:sp>
+        <p:sp>
+          <p:nvSpPr>
+            <p:cNvPr id="9" name="テキスト ボックス 8">
+              <a:extLst>
+                <a:ext uri="{FF2B5EF4-FFF2-40B4-BE49-F238E27FC236}">
+                  <a16:creationId xmlns:a16="http://schemas.microsoft.com/office/drawing/2014/main" id="{6936F8AD-CAF6-798D-59CF-7DD13984264F}"/>
+                </a:ext>
+              </a:extLst>
+            </p:cNvPr>
+            <p:cNvSpPr txBox="1"/>
+            <p:nvPr/>
+          </p:nvSpPr>
+          <p:spPr>
+            <a:xfrm>
+              <a:off x="4320248" y="2951944"/>
+              <a:ext cx="606905" cy="769441"/>
+            </a:xfrm>
+            <a:prstGeom prst="rect">
+              <a:avLst/>
+            </a:prstGeom>
+            <a:noFill/>
+            <a:ln>
+              <a:noFill/>
+            </a:ln>
+          </p:spPr>
+          <p:txBody>
+            <a:bodyPr wrap="square" rtlCol="0">
+              <a:spAutoFit/>
+            </a:bodyPr>
+            <a:lstStyle/>
+            <a:p>
+              <a:pPr algn="ctr"/>
+              <a:r>
+                <a:rPr lang="en-US" altLang="ja-JP" sz="4400" b="1" dirty="0">
+                  <a:latin typeface="Hiragino Sans W7" panose="020B0400000000000000" pitchFamily="34" charset="-128"/>
+                  <a:ea typeface="Hiragino Sans W7" panose="020B0400000000000000" pitchFamily="34" charset="-128"/>
+                </a:rPr>
+                <a:t>A</a:t>
+              </a:r>
+              <a:endParaRPr kumimoji="1" lang="en-US" altLang="ja-JP" sz="3200" b="1" dirty="0">
+                <a:latin typeface="Hiragino Sans W7" panose="020B0400000000000000" pitchFamily="34" charset="-128"/>
+                <a:ea typeface="Hiragino Sans W7" panose="020B0400000000000000" pitchFamily="34" charset="-128"/>
+              </a:endParaRPr>
+            </a:p>
+          </p:txBody>
+        </p:sp>
+      </p:grpSp>
+    </p:spTree>
+    <p:extLst>
+      <p:ext uri="{BB962C8B-B14F-4D97-AF65-F5344CB8AC3E}">
+        <p14:creationId xmlns:p14="http://schemas.microsoft.com/office/powerpoint/2010/main" val="1728279770"/>
+      </p:ext>
+    </p:extLst>
+  </p:cSld>
+  <p:clrMapOvr>
+    <a:masterClrMapping/>
+  </p:clrMapOvr>
+</p:sld>
+</file>
+
 <file path=ppt/slides/slide3.xml><?xml version="1.0" encoding="utf-8"?>
 <p:sld xmlns:a="http://schemas.openxmlformats.org/drawingml/2006/main" xmlns:r="http://schemas.openxmlformats.org/officeDocument/2006/relationships" xmlns:p="http://schemas.openxmlformats.org/presentationml/2006/main">
   <p:cSld>
